--- a/business/CareSignal_Pitch_Deck.pptx
+++ b/business/CareSignal_Pitch_Deck.pptx
@@ -883,11 +883,11 @@
             <a:avLst/>
           </a:prstGeom>
           <a:solidFill>
-            <a:srgbClr val="0A0A0A"/>
+            <a:srgbClr val="FAFAF8"/>
           </a:solidFill>
           <a:ln w="12700">
             <a:solidFill>
-              <a:srgbClr val="0A0A0A"/>
+              <a:srgbClr val="FAFAF8"/>
             </a:solidFill>
             <a:prstDash val="solid"/>
           </a:ln>
@@ -902,17 +902,17 @@
         <p:spPr>
           <a:xfrm>
             <a:off x="0" y="0"/>
-            <a:ext cx="109728" cy="6858000"/>
-          </a:xfrm>
-          <a:prstGeom prst="rect">
-            <a:avLst/>
-          </a:prstGeom>
-          <a:solidFill>
-            <a:srgbClr val="2563EB"/>
+            <a:ext cx="12192000" cy="73152"/>
+          </a:xfrm>
+          <a:prstGeom prst="rect">
+            <a:avLst/>
+          </a:prstGeom>
+          <a:solidFill>
+            <a:srgbClr val="5B8DB8"/>
           </a:solidFill>
           <a:ln w="12700">
             <a:solidFill>
-              <a:srgbClr val="2563EB"/>
+              <a:srgbClr val="5B8DB8"/>
             </a:solidFill>
             <a:prstDash val="solid"/>
           </a:ln>
@@ -920,14 +920,39 @@
       </p:sp>
       <p:sp>
         <p:nvSpPr>
-          <p:cNvPr id="4" name="Text 2"/>
+          <p:cNvPr id="4" name="Shape 2"/>
           <p:cNvSpPr/>
           <p:nvPr/>
         </p:nvSpPr>
         <p:spPr>
           <a:xfrm>
-            <a:off x="365760" y="1005840"/>
-            <a:ext cx="8229600" cy="914400"/>
+            <a:off x="0" y="6510528"/>
+            <a:ext cx="12192000" cy="73152"/>
+          </a:xfrm>
+          <a:prstGeom prst="rect">
+            <a:avLst/>
+          </a:prstGeom>
+          <a:solidFill>
+            <a:srgbClr val="C4786A"/>
+          </a:solidFill>
+          <a:ln w="12700">
+            <a:solidFill>
+              <a:srgbClr val="C4786A"/>
+            </a:solidFill>
+            <a:prstDash val="solid"/>
+          </a:ln>
+        </p:spPr>
+      </p:sp>
+      <p:sp>
+        <p:nvSpPr>
+          <p:cNvPr id="5" name="Text 3"/>
+          <p:cNvSpPr/>
+          <p:nvPr/>
+        </p:nvSpPr>
+        <p:spPr>
+          <a:xfrm>
+            <a:off x="457200" y="822960"/>
+            <a:ext cx="914400" cy="914400"/>
           </a:xfrm>
           <a:prstGeom prst="rect">
             <a:avLst/>
@@ -939,13 +964,49 @@
           <a:bodyPr wrap="square" rtlCol="0" anchor="ctr"/>
           <a:lstStyle/>
           <a:p>
+            <a:pPr algn="ctr" indent="0" marL="0">
+              <a:buNone/>
+            </a:pPr>
+            <a:r>
+              <a:rPr lang="en-US" sz="4800" dirty="0">
+                <a:solidFill>
+                  <a:srgbClr val="000000"/>
+                </a:solidFill>
+              </a:rPr>
+              <a:t>🛡️</a:t>
+            </a:r>
+            <a:endParaRPr lang="en-US" sz="4800" dirty="0"/>
+          </a:p>
+        </p:txBody>
+      </p:sp>
+      <p:sp>
+        <p:nvSpPr>
+          <p:cNvPr id="6" name="Text 4"/>
+          <p:cNvSpPr/>
+          <p:nvPr/>
+        </p:nvSpPr>
+        <p:spPr>
+          <a:xfrm>
+            <a:off x="1463040" y="868680"/>
+            <a:ext cx="7132320" cy="822960"/>
+          </a:xfrm>
+          <a:prstGeom prst="rect">
+            <a:avLst/>
+          </a:prstGeom>
+          <a:noFill/>
+          <a:ln/>
+        </p:spPr>
+        <p:txBody>
+          <a:bodyPr wrap="square" rtlCol="0" anchor="ctr"/>
+          <a:lstStyle/>
+          <a:p>
             <a:pPr indent="0" marL="0">
               <a:buNone/>
             </a:pPr>
             <a:r>
-              <a:rPr lang="en-US" sz="5400" b="1" dirty="0">
+              <a:rPr lang="en-US" b="1" dirty="0">
                 <a:solidFill>
-                  <a:srgbClr val="F8FAFC"/>
+                  <a:srgbClr val="2D3748"/>
                 </a:solidFill>
                 <a:latin typeface="Arial" pitchFamily="34" charset="0"/>
                 <a:ea typeface="Arial" pitchFamily="34" charset="-122"/>
@@ -953,20 +1014,20 @@
               </a:rPr>
               <a:t>CareSignal</a:t>
             </a:r>
-            <a:endParaRPr lang="en-US" sz="5400" dirty="0"/>
+            <a:endParaRPr lang="en-US" dirty="0"/>
           </a:p>
         </p:txBody>
       </p:sp>
       <p:sp>
         <p:nvSpPr>
-          <p:cNvPr id="5" name="Text 3"/>
+          <p:cNvPr id="7" name="Text 5"/>
           <p:cNvSpPr/>
           <p:nvPr/>
         </p:nvSpPr>
         <p:spPr>
           <a:xfrm>
-            <a:off x="365760" y="1920240"/>
-            <a:ext cx="7772400" cy="457200"/>
+            <a:off x="1463040" y="1691640"/>
+            <a:ext cx="7132320" cy="411480"/>
           </a:xfrm>
           <a:prstGeom prst="rect">
             <a:avLst/>
@@ -982,9 +1043,9 @@
               <a:buNone/>
             </a:pPr>
             <a:r>
-              <a:rPr lang="en-US" sz="2000" dirty="0">
+              <a:rPr lang="en-US" dirty="0">
                 <a:solidFill>
-                  <a:srgbClr val="3B82F6"/>
+                  <a:srgbClr val="5B8DB8"/>
                 </a:solidFill>
                 <a:latin typeface="Arial" pitchFamily="34" charset="0"/>
                 <a:ea typeface="Arial" pitchFamily="34" charset="-122"/>
@@ -992,28 +1053,28 @@
               </a:rPr>
               <a:t>Trazabilidad operativa para residencias de adultos mayores</a:t>
             </a:r>
-            <a:endParaRPr lang="en-US" sz="2000" dirty="0"/>
+            <a:endParaRPr lang="en-US" dirty="0"/>
           </a:p>
         </p:txBody>
       </p:sp>
       <p:sp>
         <p:nvSpPr>
-          <p:cNvPr id="6" name="Shape 4"/>
+          <p:cNvPr id="8" name="Shape 6"/>
           <p:cNvSpPr/>
           <p:nvPr/>
         </p:nvSpPr>
         <p:spPr>
           <a:xfrm>
-            <a:off x="365760" y="2514600"/>
-            <a:ext cx="8046720" cy="0"/>
+            <a:off x="457200" y="2286000"/>
+            <a:ext cx="8375904" cy="0"/>
           </a:xfrm>
           <a:prstGeom prst="line">
             <a:avLst/>
           </a:prstGeom>
           <a:noFill/>
-          <a:ln w="19050">
+          <a:ln w="15240">
             <a:solidFill>
-              <a:srgbClr val="2563EB"/>
+              <a:srgbClr val="E2E8F0"/>
             </a:solidFill>
             <a:prstDash val="solid"/>
           </a:ln>
@@ -1021,14 +1082,41 @@
       </p:sp>
       <p:sp>
         <p:nvSpPr>
-          <p:cNvPr id="7" name="Text 5"/>
+          <p:cNvPr id="9" name="Shape 7"/>
           <p:cNvSpPr/>
           <p:nvPr/>
         </p:nvSpPr>
         <p:spPr>
           <a:xfrm>
-            <a:off x="365760" y="2697480"/>
-            <a:ext cx="6400800" cy="320040"/>
+            <a:off x="457200" y="2560320"/>
+            <a:ext cx="2606040" cy="2011680"/>
+          </a:xfrm>
+          <a:prstGeom prst="roundRect">
+            <a:avLst>
+              <a:gd name="adj" fmla="val 3636"/>
+            </a:avLst>
+          </a:prstGeom>
+          <a:solidFill>
+            <a:srgbClr val="F0EDE8"/>
+          </a:solidFill>
+          <a:ln w="6350">
+            <a:solidFill>
+              <a:srgbClr val="E2E8F0"/>
+            </a:solidFill>
+            <a:prstDash val="solid"/>
+          </a:ln>
+        </p:spPr>
+      </p:sp>
+      <p:sp>
+        <p:nvSpPr>
+          <p:cNvPr id="10" name="Text 8"/>
+          <p:cNvSpPr/>
+          <p:nvPr/>
+        </p:nvSpPr>
+        <p:spPr>
+          <a:xfrm>
+            <a:off x="457200" y="2697480"/>
+            <a:ext cx="2606040" cy="548640"/>
           </a:xfrm>
           <a:prstGeom prst="rect">
             <a:avLst/>
@@ -1040,112 +1128,131 @@
           <a:bodyPr wrap="square" rtlCol="0" anchor="ctr"/>
           <a:lstStyle/>
           <a:p>
-            <a:pPr indent="0" marL="0">
+            <a:pPr algn="ctr" indent="0" marL="0">
               <a:buNone/>
             </a:pPr>
             <a:r>
+              <a:rPr lang="en-US" sz="3000" dirty="0">
+                <a:solidFill>
+                  <a:srgbClr val="000000"/>
+                </a:solidFill>
+              </a:rPr>
+              <a:t>⏱️</a:t>
+            </a:r>
+            <a:endParaRPr lang="en-US" sz="3000" dirty="0"/>
+          </a:p>
+        </p:txBody>
+      </p:sp>
+      <p:sp>
+        <p:nvSpPr>
+          <p:cNvPr id="11" name="Text 9"/>
+          <p:cNvSpPr/>
+          <p:nvPr/>
+        </p:nvSpPr>
+        <p:spPr>
+          <a:xfrm>
+            <a:off x="457200" y="3291840"/>
+            <a:ext cx="2606040" cy="1005840"/>
+          </a:xfrm>
+          <a:prstGeom prst="rect">
+            <a:avLst/>
+          </a:prstGeom>
+          <a:noFill/>
+          <a:ln/>
+        </p:spPr>
+        <p:txBody>
+          <a:bodyPr wrap="square" rtlCol="0" anchor="ctr"/>
+          <a:lstStyle/>
+          <a:p>
+            <a:pPr algn="ctr" indent="0" marL="0">
+              <a:buNone/>
+            </a:pPr>
+            <a:r>
               <a:rPr lang="en-US" sz="1300" dirty="0">
                 <a:solidFill>
-                  <a:srgbClr val="94A3B8"/>
+                  <a:srgbClr val="2D3748"/>
                 </a:solidFill>
                 <a:latin typeface="Arial" pitchFamily="34" charset="0"/>
                 <a:ea typeface="Arial" pitchFamily="34" charset="-122"/>
                 <a:cs typeface="Arial" pitchFamily="34" charset="-120"/>
               </a:rPr>
-              <a:t>Pitch · 4 minutos · WomenCISO 4 / MenCISO 1</a:t>
+              <a:t>Detección</a:t>
             </a:r>
             <a:endParaRPr lang="en-US" sz="1300" dirty="0"/>
           </a:p>
-        </p:txBody>
-      </p:sp>
-      <p:sp>
-        <p:nvSpPr>
-          <p:cNvPr id="8" name="Text 6"/>
-          <p:cNvSpPr/>
-          <p:nvPr/>
-        </p:nvSpPr>
-        <p:spPr>
-          <a:xfrm>
-            <a:off x="365760" y="3108960"/>
-            <a:ext cx="3657600" cy="274320"/>
-          </a:xfrm>
-          <a:prstGeom prst="rect">
-            <a:avLst/>
-          </a:prstGeom>
-          <a:noFill/>
-          <a:ln/>
-        </p:spPr>
-        <p:txBody>
-          <a:bodyPr wrap="square" rtlCol="0" anchor="ctr"/>
-          <a:lstStyle/>
-          <a:p>
-            <a:pPr indent="0" marL="0">
+          <a:p>
+            <a:pPr algn="ctr" indent="0" marL="0">
               <a:buNone/>
             </a:pPr>
             <a:r>
-              <a:rPr lang="en-US" sz="1200" dirty="0">
+              <a:rPr lang="en-US" sz="1300" dirty="0">
                 <a:solidFill>
-                  <a:srgbClr val="94A3B8"/>
+                  <a:srgbClr val="2D3748"/>
                 </a:solidFill>
                 <a:latin typeface="Arial" pitchFamily="34" charset="0"/>
                 <a:ea typeface="Arial" pitchFamily="34" charset="-122"/>
                 <a:cs typeface="Arial" pitchFamily="34" charset="-120"/>
               </a:rPr>
-              <a:t>Agosto 2026</a:t>
-            </a:r>
-            <a:endParaRPr lang="en-US" sz="1200" dirty="0"/>
-          </a:p>
-        </p:txBody>
-      </p:sp>
-      <p:sp>
-        <p:nvSpPr>
-          <p:cNvPr id="9" name="Text 7"/>
-          <p:cNvSpPr/>
-          <p:nvPr/>
-        </p:nvSpPr>
-        <p:spPr>
-          <a:xfrm>
-            <a:off x="2286000" y="6263640"/>
-            <a:ext cx="6492240" cy="256032"/>
-          </a:xfrm>
-          <a:prstGeom prst="rect">
-            <a:avLst/>
-          </a:prstGeom>
-          <a:noFill/>
-          <a:ln/>
-        </p:spPr>
-        <p:txBody>
-          <a:bodyPr wrap="square" rtlCol="0" anchor="ctr"/>
-          <a:lstStyle/>
-          <a:p>
-            <a:pPr algn="r" indent="0" marL="0">
+              <a:t>automática de</a:t>
+            </a:r>
+            <a:endParaRPr lang="en-US" sz="1300" dirty="0"/>
+          </a:p>
+          <a:p>
+            <a:pPr algn="ctr" indent="0" marL="0">
               <a:buNone/>
             </a:pPr>
             <a:r>
-              <a:rPr lang="en-US" sz="900" dirty="0">
+              <a:rPr lang="en-US" sz="1300" dirty="0">
                 <a:solidFill>
-                  <a:srgbClr val="94A3B8"/>
+                  <a:srgbClr val="2D3748"/>
                 </a:solidFill>
                 <a:latin typeface="Arial" pitchFamily="34" charset="0"/>
                 <a:ea typeface="Arial" pitchFamily="34" charset="-122"/>
                 <a:cs typeface="Arial" pitchFamily="34" charset="-120"/>
               </a:rPr>
-              <a:t>MVP operacional · No dispositivo médico · Datos ficticios</a:t>
-            </a:r>
-            <a:endParaRPr lang="en-US" sz="900" dirty="0"/>
+              <a:t>rondas atrasadas</a:t>
+            </a:r>
+            <a:endParaRPr lang="en-US" sz="1300" dirty="0"/>
           </a:p>
         </p:txBody>
       </p:sp>
       <p:sp>
         <p:nvSpPr>
-          <p:cNvPr id="10" name="Text 8"/>
+          <p:cNvPr id="12" name="Shape 10"/>
           <p:cNvSpPr/>
           <p:nvPr/>
         </p:nvSpPr>
         <p:spPr>
           <a:xfrm>
-            <a:off x="365760" y="6263640"/>
-            <a:ext cx="2743200" cy="256032"/>
+            <a:off x="3291840" y="2560320"/>
+            <a:ext cx="2606040" cy="2011680"/>
+          </a:xfrm>
+          <a:prstGeom prst="roundRect">
+            <a:avLst>
+              <a:gd name="adj" fmla="val 3636"/>
+            </a:avLst>
+          </a:prstGeom>
+          <a:solidFill>
+            <a:srgbClr val="F0EDE8"/>
+          </a:solidFill>
+          <a:ln w="6350">
+            <a:solidFill>
+              <a:srgbClr val="E2E8F0"/>
+            </a:solidFill>
+            <a:prstDash val="solid"/>
+          </a:ln>
+        </p:spPr>
+      </p:sp>
+      <p:sp>
+        <p:nvSpPr>
+          <p:cNvPr id="13" name="Text 11"/>
+          <p:cNvSpPr/>
+          <p:nvPr/>
+        </p:nvSpPr>
+        <p:spPr>
+          <a:xfrm>
+            <a:off x="3291840" y="2697480"/>
+            <a:ext cx="2606040" cy="548640"/>
           </a:xfrm>
           <a:prstGeom prst="rect">
             <a:avLst/>
@@ -1157,21 +1264,305 @@
           <a:bodyPr wrap="square" rtlCol="0" anchor="ctr"/>
           <a:lstStyle/>
           <a:p>
-            <a:pPr indent="0" marL="0">
+            <a:pPr algn="ctr" indent="0" marL="0">
               <a:buNone/>
             </a:pPr>
             <a:r>
-              <a:rPr lang="en-US" sz="900" dirty="0">
+              <a:rPr lang="en-US" sz="3000" dirty="0">
                 <a:solidFill>
-                  <a:srgbClr val="94A3B8"/>
+                  <a:srgbClr val="000000"/>
+                </a:solidFill>
+              </a:rPr>
+              <a:t>📋</a:t>
+            </a:r>
+            <a:endParaRPr lang="en-US" sz="3000" dirty="0"/>
+          </a:p>
+        </p:txBody>
+      </p:sp>
+      <p:sp>
+        <p:nvSpPr>
+          <p:cNvPr id="14" name="Text 12"/>
+          <p:cNvSpPr/>
+          <p:nvPr/>
+        </p:nvSpPr>
+        <p:spPr>
+          <a:xfrm>
+            <a:off x="3291840" y="3291840"/>
+            <a:ext cx="2606040" cy="1005840"/>
+          </a:xfrm>
+          <a:prstGeom prst="rect">
+            <a:avLst/>
+          </a:prstGeom>
+          <a:noFill/>
+          <a:ln/>
+        </p:spPr>
+        <p:txBody>
+          <a:bodyPr wrap="square" rtlCol="0" anchor="ctr"/>
+          <a:lstStyle/>
+          <a:p>
+            <a:pPr algn="ctr" indent="0" marL="0">
+              <a:buNone/>
+            </a:pPr>
+            <a:r>
+              <a:rPr lang="en-US" sz="1300" dirty="0">
+                <a:solidFill>
+                  <a:srgbClr val="2D3748"/>
                 </a:solidFill>
                 <a:latin typeface="Arial" pitchFamily="34" charset="0"/>
                 <a:ea typeface="Arial" pitchFamily="34" charset="-122"/>
                 <a:cs typeface="Arial" pitchFamily="34" charset="-120"/>
               </a:rPr>
-              <a:t>v0.1.0-workshop</a:t>
-            </a:r>
-            <a:endParaRPr lang="en-US" sz="900" dirty="0"/>
+              <a:t>Bitácora</a:t>
+            </a:r>
+            <a:endParaRPr lang="en-US" sz="1300" dirty="0"/>
+          </a:p>
+          <a:p>
+            <a:pPr algn="ctr" indent="0" marL="0">
+              <a:buNone/>
+            </a:pPr>
+            <a:r>
+              <a:rPr lang="en-US" sz="1300" dirty="0">
+                <a:solidFill>
+                  <a:srgbClr val="2D3748"/>
+                </a:solidFill>
+                <a:latin typeface="Arial" pitchFamily="34" charset="0"/>
+                <a:ea typeface="Arial" pitchFamily="34" charset="-122"/>
+                <a:cs typeface="Arial" pitchFamily="34" charset="-120"/>
+              </a:rPr>
+              <a:t>auditable</a:t>
+            </a:r>
+            <a:endParaRPr lang="en-US" sz="1300" dirty="0"/>
+          </a:p>
+          <a:p>
+            <a:pPr algn="ctr" indent="0" marL="0">
+              <a:buNone/>
+            </a:pPr>
+            <a:r>
+              <a:rPr lang="en-US" sz="1300" dirty="0">
+                <a:solidFill>
+                  <a:srgbClr val="2D3748"/>
+                </a:solidFill>
+                <a:latin typeface="Arial" pitchFamily="34" charset="0"/>
+                <a:ea typeface="Arial" pitchFamily="34" charset="-122"/>
+                <a:cs typeface="Arial" pitchFamily="34" charset="-120"/>
+              </a:rPr>
+              <a:t>e inmutable</a:t>
+            </a:r>
+            <a:endParaRPr lang="en-US" sz="1300" dirty="0"/>
+          </a:p>
+        </p:txBody>
+      </p:sp>
+      <p:sp>
+        <p:nvSpPr>
+          <p:cNvPr id="15" name="Shape 13"/>
+          <p:cNvSpPr/>
+          <p:nvPr/>
+        </p:nvSpPr>
+        <p:spPr>
+          <a:xfrm>
+            <a:off x="6126480" y="2560320"/>
+            <a:ext cx="2606040" cy="2011680"/>
+          </a:xfrm>
+          <a:prstGeom prst="roundRect">
+            <a:avLst>
+              <a:gd name="adj" fmla="val 3636"/>
+            </a:avLst>
+          </a:prstGeom>
+          <a:solidFill>
+            <a:srgbClr val="F0EDE8"/>
+          </a:solidFill>
+          <a:ln w="6350">
+            <a:solidFill>
+              <a:srgbClr val="E2E8F0"/>
+            </a:solidFill>
+            <a:prstDash val="solid"/>
+          </a:ln>
+        </p:spPr>
+      </p:sp>
+      <p:sp>
+        <p:nvSpPr>
+          <p:cNvPr id="16" name="Text 14"/>
+          <p:cNvSpPr/>
+          <p:nvPr/>
+        </p:nvSpPr>
+        <p:spPr>
+          <a:xfrm>
+            <a:off x="6126480" y="2697480"/>
+            <a:ext cx="2606040" cy="548640"/>
+          </a:xfrm>
+          <a:prstGeom prst="rect">
+            <a:avLst/>
+          </a:prstGeom>
+          <a:noFill/>
+          <a:ln/>
+        </p:spPr>
+        <p:txBody>
+          <a:bodyPr wrap="square" rtlCol="0" anchor="ctr"/>
+          <a:lstStyle/>
+          <a:p>
+            <a:pPr algn="ctr" indent="0" marL="0">
+              <a:buNone/>
+            </a:pPr>
+            <a:r>
+              <a:rPr lang="en-US" sz="3000" dirty="0">
+                <a:solidFill>
+                  <a:srgbClr val="000000"/>
+                </a:solidFill>
+              </a:rPr>
+              <a:t>🔔</a:t>
+            </a:r>
+            <a:endParaRPr lang="en-US" sz="3000" dirty="0"/>
+          </a:p>
+        </p:txBody>
+      </p:sp>
+      <p:sp>
+        <p:nvSpPr>
+          <p:cNvPr id="17" name="Text 15"/>
+          <p:cNvSpPr/>
+          <p:nvPr/>
+        </p:nvSpPr>
+        <p:spPr>
+          <a:xfrm>
+            <a:off x="6126480" y="3291840"/>
+            <a:ext cx="2606040" cy="1005840"/>
+          </a:xfrm>
+          <a:prstGeom prst="rect">
+            <a:avLst/>
+          </a:prstGeom>
+          <a:noFill/>
+          <a:ln/>
+        </p:spPr>
+        <p:txBody>
+          <a:bodyPr wrap="square" rtlCol="0" anchor="ctr"/>
+          <a:lstStyle/>
+          <a:p>
+            <a:pPr algn="ctr" indent="0" marL="0">
+              <a:buNone/>
+            </a:pPr>
+            <a:r>
+              <a:rPr lang="en-US" sz="1300" dirty="0">
+                <a:solidFill>
+                  <a:srgbClr val="2D3748"/>
+                </a:solidFill>
+                <a:latin typeface="Arial" pitchFamily="34" charset="0"/>
+                <a:ea typeface="Arial" pitchFamily="34" charset="-122"/>
+                <a:cs typeface="Arial" pitchFamily="34" charset="-120"/>
+              </a:rPr>
+              <a:t>Alertas en</a:t>
+            </a:r>
+            <a:endParaRPr lang="en-US" sz="1300" dirty="0"/>
+          </a:p>
+          <a:p>
+            <a:pPr algn="ctr" indent="0" marL="0">
+              <a:buNone/>
+            </a:pPr>
+            <a:r>
+              <a:rPr lang="en-US" sz="1300" dirty="0">
+                <a:solidFill>
+                  <a:srgbClr val="2D3748"/>
+                </a:solidFill>
+                <a:latin typeface="Arial" pitchFamily="34" charset="0"/>
+                <a:ea typeface="Arial" pitchFamily="34" charset="-122"/>
+                <a:cs typeface="Arial" pitchFamily="34" charset="-120"/>
+              </a:rPr>
+              <a:t>tiempo real</a:t>
+            </a:r>
+            <a:endParaRPr lang="en-US" sz="1300" dirty="0"/>
+          </a:p>
+          <a:p>
+            <a:pPr algn="ctr" indent="0" marL="0">
+              <a:buNone/>
+            </a:pPr>
+            <a:r>
+              <a:rPr lang="en-US" sz="1300" dirty="0">
+                <a:solidFill>
+                  <a:srgbClr val="2D3748"/>
+                </a:solidFill>
+                <a:latin typeface="Arial" pitchFamily="34" charset="0"/>
+                <a:ea typeface="Arial" pitchFamily="34" charset="-122"/>
+                <a:cs typeface="Arial" pitchFamily="34" charset="-120"/>
+              </a:rPr>
+              <a:t>al supervisor</a:t>
+            </a:r>
+            <a:endParaRPr lang="en-US" sz="1300" dirty="0"/>
+          </a:p>
+        </p:txBody>
+      </p:sp>
+      <p:sp>
+        <p:nvSpPr>
+          <p:cNvPr id="18" name="Text 16"/>
+          <p:cNvSpPr/>
+          <p:nvPr/>
+        </p:nvSpPr>
+        <p:spPr>
+          <a:xfrm>
+            <a:off x="457200" y="4892040"/>
+            <a:ext cx="8375904" cy="320040"/>
+          </a:xfrm>
+          <a:prstGeom prst="rect">
+            <a:avLst/>
+          </a:prstGeom>
+          <a:noFill/>
+          <a:ln/>
+        </p:spPr>
+        <p:txBody>
+          <a:bodyPr wrap="square" rtlCol="0" anchor="ctr"/>
+          <a:lstStyle/>
+          <a:p>
+            <a:pPr algn="ctr" indent="0" marL="0">
+              <a:buNone/>
+            </a:pPr>
+            <a:r>
+              <a:rPr lang="en-US" sz="1200" dirty="0">
+                <a:solidFill>
+                  <a:srgbClr val="718096"/>
+                </a:solidFill>
+                <a:latin typeface="Arial" pitchFamily="34" charset="0"/>
+                <a:ea typeface="Arial" pitchFamily="34" charset="-122"/>
+                <a:cs typeface="Arial" pitchFamily="34" charset="-120"/>
+              </a:rPr>
+              <a:t>Pitch · 4 minutos  |  WomenCISO 4 / MenCISO 1  |  Agosto 2026</a:t>
+            </a:r>
+            <a:endParaRPr lang="en-US" sz="1200" dirty="0"/>
+          </a:p>
+        </p:txBody>
+      </p:sp>
+      <p:sp>
+        <p:nvSpPr>
+          <p:cNvPr id="19" name="Text 17"/>
+          <p:cNvSpPr/>
+          <p:nvPr/>
+        </p:nvSpPr>
+        <p:spPr>
+          <a:xfrm>
+            <a:off x="457200" y="6172200"/>
+            <a:ext cx="8375904" cy="256032"/>
+          </a:xfrm>
+          <a:prstGeom prst="rect">
+            <a:avLst/>
+          </a:prstGeom>
+          <a:noFill/>
+          <a:ln/>
+        </p:spPr>
+        <p:txBody>
+          <a:bodyPr wrap="square" rtlCol="0" anchor="ctr"/>
+          <a:lstStyle/>
+          <a:p>
+            <a:pPr algn="ctr" indent="0" marL="0">
+              <a:buNone/>
+            </a:pPr>
+            <a:r>
+              <a:rPr lang="en-US" dirty="0">
+                <a:solidFill>
+                  <a:srgbClr val="718096"/>
+                </a:solidFill>
+                <a:latin typeface="Arial" pitchFamily="34" charset="0"/>
+                <a:ea typeface="Arial" pitchFamily="34" charset="-122"/>
+                <a:cs typeface="Arial" pitchFamily="34" charset="-120"/>
+              </a:rPr>
+              <a:t>v0.1.0-workshop  ·  MVP operacional  ·  No dispositivo médico  ·  Datos ficticios</a:t>
+            </a:r>
+            <a:endParaRPr lang="en-US" dirty="0"/>
           </a:p>
         </p:txBody>
       </p:sp>
@@ -1226,7 +1617,7 @@
     </a:clrScheme>
     <a:fontScheme name="Office">
       <a:majorFont>
-        <a:latin typeface="Arial"/>
+        <a:latin typeface="Calibri Light" panose="020F0302020204030204"/>
         <a:ea typeface=""/>
         <a:cs typeface=""/>
         <a:font script="Jpan" typeface="游ゴシック Light"/>
@@ -1278,7 +1669,7 @@
         <a:font script="Tfng" typeface="Ebrima"/>
       </a:majorFont>
       <a:minorFont>
-        <a:latin typeface="Arial"/>
+        <a:latin typeface="Calibri" panose="020F0502020204030204"/>
         <a:ea typeface=""/>
         <a:cs typeface=""/>
         <a:font script="Jpan" typeface="游ゴシック"/>

--- a/business/CareSignal_Pitch_Deck.pptx
+++ b/business/CareSignal_Pitch_Deck.pptx
@@ -901,8 +901,95 @@
         </p:nvSpPr>
         <p:spPr>
           <a:xfrm>
+            <a:off x="6583680" y="4389120"/>
+            <a:ext cx="3840480" cy="3840480"/>
+          </a:xfrm>
+          <a:prstGeom prst="ellipse">
+            <a:avLst/>
+          </a:prstGeom>
+          <a:solidFill>
+            <a:srgbClr val="A8C4DC">
+              <a:alpha val="18000"/>
+            </a:srgbClr>
+          </a:solidFill>
+          <a:ln w="12700">
+            <a:solidFill>
+              <a:srgbClr val="A8C4DC">
+                <a:alpha val="18000"/>
+              </a:srgbClr>
+            </a:solidFill>
+            <a:prstDash val="solid"/>
+          </a:ln>
+        </p:spPr>
+      </p:sp>
+      <p:sp>
+        <p:nvSpPr>
+          <p:cNvPr id="4" name="Shape 2"/>
+          <p:cNvSpPr/>
+          <p:nvPr/>
+        </p:nvSpPr>
+        <p:spPr>
+          <a:xfrm>
+            <a:off x="-1005840" y="-1097280"/>
+            <a:ext cx="2926080" cy="2926080"/>
+          </a:xfrm>
+          <a:prstGeom prst="ellipse">
+            <a:avLst/>
+          </a:prstGeom>
+          <a:solidFill>
+            <a:srgbClr val="C4786A">
+              <a:alpha val="12000"/>
+            </a:srgbClr>
+          </a:solidFill>
+          <a:ln w="12700">
+            <a:solidFill>
+              <a:srgbClr val="C4786A">
+                <a:alpha val="12000"/>
+              </a:srgbClr>
+            </a:solidFill>
+            <a:prstDash val="solid"/>
+          </a:ln>
+        </p:spPr>
+      </p:sp>
+      <p:sp>
+        <p:nvSpPr>
+          <p:cNvPr id="5" name="Shape 3"/>
+          <p:cNvSpPr/>
+          <p:nvPr/>
+        </p:nvSpPr>
+        <p:spPr>
+          <a:xfrm>
+            <a:off x="8778240" y="1645920"/>
+            <a:ext cx="54864" cy="2194560"/>
+          </a:xfrm>
+          <a:prstGeom prst="rect">
+            <a:avLst/>
+          </a:prstGeom>
+          <a:solidFill>
+            <a:srgbClr val="5B8DB8">
+              <a:alpha val="45000"/>
+            </a:srgbClr>
+          </a:solidFill>
+          <a:ln w="12700">
+            <a:solidFill>
+              <a:srgbClr val="5B8DB8">
+                <a:alpha val="45000"/>
+              </a:srgbClr>
+            </a:solidFill>
+            <a:prstDash val="solid"/>
+          </a:ln>
+        </p:spPr>
+      </p:sp>
+      <p:sp>
+        <p:nvSpPr>
+          <p:cNvPr id="6" name="Shape 4"/>
+          <p:cNvSpPr/>
+          <p:nvPr/>
+        </p:nvSpPr>
+        <p:spPr>
+          <a:xfrm>
             <a:off x="0" y="0"/>
-            <a:ext cx="12192000" cy="73152"/>
+            <a:ext cx="12192000" cy="54864"/>
           </a:xfrm>
           <a:prstGeom prst="rect">
             <a:avLst/>
@@ -920,14 +1007,14 @@
       </p:sp>
       <p:sp>
         <p:nvSpPr>
-          <p:cNvPr id="4" name="Shape 2"/>
-          <p:cNvSpPr/>
-          <p:nvPr/>
-        </p:nvSpPr>
-        <p:spPr>
-          <a:xfrm>
-            <a:off x="0" y="6510528"/>
-            <a:ext cx="12192000" cy="73152"/>
+          <p:cNvPr id="7" name="Shape 5"/>
+          <p:cNvSpPr/>
+          <p:nvPr/>
+        </p:nvSpPr>
+        <p:spPr>
+          <a:xfrm>
+            <a:off x="0" y="6528816"/>
+            <a:ext cx="12192000" cy="54864"/>
           </a:xfrm>
           <a:prstGeom prst="rect">
             <a:avLst/>
@@ -945,7 +1032,7 @@
       </p:sp>
       <p:sp>
         <p:nvSpPr>
-          <p:cNvPr id="5" name="Text 3"/>
+          <p:cNvPr id="8" name="Text 6"/>
           <p:cNvSpPr/>
           <p:nvPr/>
         </p:nvSpPr>
@@ -981,7 +1068,7 @@
       </p:sp>
       <p:sp>
         <p:nvSpPr>
-          <p:cNvPr id="6" name="Text 4"/>
+          <p:cNvPr id="9" name="Text 7"/>
           <p:cNvSpPr/>
           <p:nvPr/>
         </p:nvSpPr>
@@ -1020,7 +1107,7 @@
       </p:sp>
       <p:sp>
         <p:nvSpPr>
-          <p:cNvPr id="7" name="Text 5"/>
+          <p:cNvPr id="10" name="Text 8"/>
           <p:cNvSpPr/>
           <p:nvPr/>
         </p:nvSpPr>
@@ -1059,7 +1146,7 @@
       </p:sp>
       <p:sp>
         <p:nvSpPr>
-          <p:cNvPr id="8" name="Shape 6"/>
+          <p:cNvPr id="11" name="Shape 9"/>
           <p:cNvSpPr/>
           <p:nvPr/>
         </p:nvSpPr>
@@ -1082,7 +1169,7 @@
       </p:sp>
       <p:sp>
         <p:nvSpPr>
-          <p:cNvPr id="9" name="Shape 7"/>
+          <p:cNvPr id="12" name="Shape 10"/>
           <p:cNvSpPr/>
           <p:nvPr/>
         </p:nvSpPr>
@@ -1109,7 +1196,7 @@
       </p:sp>
       <p:sp>
         <p:nvSpPr>
-          <p:cNvPr id="10" name="Text 8"/>
+          <p:cNvPr id="13" name="Text 11"/>
           <p:cNvSpPr/>
           <p:nvPr/>
         </p:nvSpPr>
@@ -1145,7 +1232,7 @@
       </p:sp>
       <p:sp>
         <p:nvSpPr>
-          <p:cNvPr id="11" name="Text 9"/>
+          <p:cNvPr id="14" name="Text 12"/>
           <p:cNvSpPr/>
           <p:nvPr/>
         </p:nvSpPr>
@@ -1218,7 +1305,7 @@
       </p:sp>
       <p:sp>
         <p:nvSpPr>
-          <p:cNvPr id="12" name="Shape 10"/>
+          <p:cNvPr id="15" name="Shape 13"/>
           <p:cNvSpPr/>
           <p:nvPr/>
         </p:nvSpPr>
@@ -1245,7 +1332,7 @@
       </p:sp>
       <p:sp>
         <p:nvSpPr>
-          <p:cNvPr id="13" name="Text 11"/>
+          <p:cNvPr id="16" name="Text 14"/>
           <p:cNvSpPr/>
           <p:nvPr/>
         </p:nvSpPr>
@@ -1281,7 +1368,7 @@
       </p:sp>
       <p:sp>
         <p:nvSpPr>
-          <p:cNvPr id="14" name="Text 12"/>
+          <p:cNvPr id="17" name="Text 15"/>
           <p:cNvSpPr/>
           <p:nvPr/>
         </p:nvSpPr>
@@ -1354,7 +1441,7 @@
       </p:sp>
       <p:sp>
         <p:nvSpPr>
-          <p:cNvPr id="15" name="Shape 13"/>
+          <p:cNvPr id="18" name="Shape 16"/>
           <p:cNvSpPr/>
           <p:nvPr/>
         </p:nvSpPr>
@@ -1381,7 +1468,7 @@
       </p:sp>
       <p:sp>
         <p:nvSpPr>
-          <p:cNvPr id="16" name="Text 14"/>
+          <p:cNvPr id="19" name="Text 17"/>
           <p:cNvSpPr/>
           <p:nvPr/>
         </p:nvSpPr>
@@ -1417,7 +1504,7 @@
       </p:sp>
       <p:sp>
         <p:nvSpPr>
-          <p:cNvPr id="17" name="Text 15"/>
+          <p:cNvPr id="20" name="Text 18"/>
           <p:cNvSpPr/>
           <p:nvPr/>
         </p:nvSpPr>
@@ -1490,7 +1577,7 @@
       </p:sp>
       <p:sp>
         <p:nvSpPr>
-          <p:cNvPr id="18" name="Text 16"/>
+          <p:cNvPr id="21" name="Text 19"/>
           <p:cNvSpPr/>
           <p:nvPr/>
         </p:nvSpPr>
@@ -1529,7 +1616,7 @@
       </p:sp>
       <p:sp>
         <p:nvSpPr>
-          <p:cNvPr id="19" name="Text 17"/>
+          <p:cNvPr id="22" name="Text 20"/>
           <p:cNvSpPr/>
           <p:nvPr/>
         </p:nvSpPr>

--- a/business/CareSignal_Pitch_Deck.pptx
+++ b/business/CareSignal_Pitch_Deck.pptx
@@ -6,9 +6,14 @@
   </p:sldMasterIdLst>
   <p:sldIdLst>
     <p:sldId id="256" r:id="rId2"/>
+    <p:sldId id="257" r:id="rId3"/>
+    <p:sldId id="258" r:id="rId4"/>
+    <p:sldId id="259" r:id="rId5"/>
+    <p:sldId id="260" r:id="rId6"/>
+    <p:sldId id="261" r:id="rId7"/>
   </p:sldIdLst>
   <p:notesMasterIdLst>
-    <p:notesMasterId r:id="rId3"/>
+    <p:notesMasterId r:id="rId8"/>
   </p:notesMasterIdLst>
   <p:sldSz cx="12192000" cy="6858000"/>
   <p:notesSz cx="6858000" cy="12192000"/>
@@ -544,6 +549,446 @@
 </p:notes>
 </file>
 
+<file path=ppt/notesSlides/notesSlide2.xml><?xml version="1.0" encoding="utf-8"?>
+<p:notes xmlns:a="http://schemas.openxmlformats.org/drawingml/2006/main" xmlns:r="http://schemas.openxmlformats.org/officeDocument/2006/relationships" xmlns:p="http://schemas.openxmlformats.org/presentationml/2006/main">
+  <p:cSld>
+    <p:spTree>
+      <p:nvGrpSpPr>
+        <p:cNvPr id="1" name=""/>
+        <p:cNvGrpSpPr/>
+        <p:nvPr/>
+      </p:nvGrpSpPr>
+      <p:grpSpPr>
+        <a:xfrm>
+          <a:off x="0" y="0"/>
+          <a:ext cx="0" cy="0"/>
+          <a:chOff x="0" y="0"/>
+          <a:chExt cx="0" cy="0"/>
+        </a:xfrm>
+      </p:grpSpPr>
+      <p:sp>
+        <p:nvSpPr>
+          <p:cNvPr id="2" name="Slide Image Placeholder 1"/>
+          <p:cNvSpPr>
+            <a:spLocks noGrp="1" noRot="1" noChangeAspect="1"/>
+          </p:cNvSpPr>
+          <p:nvPr>
+            <p:ph type="sldImg"/>
+          </p:nvPr>
+        </p:nvSpPr>
+        <p:spPr/>
+      </p:sp>
+      <p:sp>
+        <p:nvSpPr>
+          <p:cNvPr id="3" name="Notes Placeholder 2"/>
+          <p:cNvSpPr>
+            <a:spLocks noGrp="1"/>
+          </p:cNvSpPr>
+          <p:nvPr>
+            <p:ph type="body" idx="1"/>
+          </p:nvPr>
+        </p:nvSpPr>
+        <p:spPr/>
+        <p:txBody>
+          <a:bodyPr/>
+          <a:lstStyle/>
+          <a:p>
+            <a:r>
+              <a:rPr lang="en-US" dirty="0"/>
+              <a:t/>
+            </a:r>
+            <a:endParaRPr lang="en-US" dirty="0"/>
+          </a:p>
+        </p:txBody>
+      </p:sp>
+      <p:sp>
+        <p:nvSpPr>
+          <p:cNvPr id="4" name="Slide Number Placeholder 3"/>
+          <p:cNvSpPr>
+            <a:spLocks noGrp="1"/>
+          </p:cNvSpPr>
+          <p:nvPr>
+            <p:ph type="sldNum" sz="quarter" idx="10"/>
+          </p:nvPr>
+        </p:nvSpPr>
+        <p:spPr/>
+        <p:txBody>
+          <a:bodyPr/>
+          <a:lstStyle/>
+          <a:p>
+            <a:fld id="{F7021451-1387-4CA6-816F-3879F97B5CBC}" type="slidenum">
+              <a:rPr lang="en-US"/>
+              <a:t>2</a:t>
+            </a:fld>
+            <a:endParaRPr lang="en-US"/>
+          </a:p>
+        </p:txBody>
+      </p:sp>
+    </p:spTree>
+    <p:extLst>
+      <p:ext uri="{BB962C8B-B14F-4D97-AF65-F5344CB8AC3E}">
+        <p14:creationId xmlns:p14="http://schemas.microsoft.com/office/powerpoint/2010/main" val="1024086991"/>
+      </p:ext>
+    </p:extLst>
+  </p:cSld>
+  <p:clrMapOvr>
+    <a:masterClrMapping/>
+  </p:clrMapOvr>
+</p:notes>
+</file>
+
+<file path=ppt/notesSlides/notesSlide3.xml><?xml version="1.0" encoding="utf-8"?>
+<p:notes xmlns:a="http://schemas.openxmlformats.org/drawingml/2006/main" xmlns:r="http://schemas.openxmlformats.org/officeDocument/2006/relationships" xmlns:p="http://schemas.openxmlformats.org/presentationml/2006/main">
+  <p:cSld>
+    <p:spTree>
+      <p:nvGrpSpPr>
+        <p:cNvPr id="1" name=""/>
+        <p:cNvGrpSpPr/>
+        <p:nvPr/>
+      </p:nvGrpSpPr>
+      <p:grpSpPr>
+        <a:xfrm>
+          <a:off x="0" y="0"/>
+          <a:ext cx="0" cy="0"/>
+          <a:chOff x="0" y="0"/>
+          <a:chExt cx="0" cy="0"/>
+        </a:xfrm>
+      </p:grpSpPr>
+      <p:sp>
+        <p:nvSpPr>
+          <p:cNvPr id="2" name="Slide Image Placeholder 1"/>
+          <p:cNvSpPr>
+            <a:spLocks noGrp="1" noRot="1" noChangeAspect="1"/>
+          </p:cNvSpPr>
+          <p:nvPr>
+            <p:ph type="sldImg"/>
+          </p:nvPr>
+        </p:nvSpPr>
+        <p:spPr/>
+      </p:sp>
+      <p:sp>
+        <p:nvSpPr>
+          <p:cNvPr id="3" name="Notes Placeholder 2"/>
+          <p:cNvSpPr>
+            <a:spLocks noGrp="1"/>
+          </p:cNvSpPr>
+          <p:nvPr>
+            <p:ph type="body" idx="1"/>
+          </p:nvPr>
+        </p:nvSpPr>
+        <p:spPr/>
+        <p:txBody>
+          <a:bodyPr/>
+          <a:lstStyle/>
+          <a:p>
+            <a:r>
+              <a:rPr lang="en-US" dirty="0"/>
+              <a:t/>
+            </a:r>
+            <a:endParaRPr lang="en-US" dirty="0"/>
+          </a:p>
+        </p:txBody>
+      </p:sp>
+      <p:sp>
+        <p:nvSpPr>
+          <p:cNvPr id="4" name="Slide Number Placeholder 3"/>
+          <p:cNvSpPr>
+            <a:spLocks noGrp="1"/>
+          </p:cNvSpPr>
+          <p:nvPr>
+            <p:ph type="sldNum" sz="quarter" idx="10"/>
+          </p:nvPr>
+        </p:nvSpPr>
+        <p:spPr/>
+        <p:txBody>
+          <a:bodyPr/>
+          <a:lstStyle/>
+          <a:p>
+            <a:fld id="{F7021451-1387-4CA6-816F-3879F97B5CBC}" type="slidenum">
+              <a:rPr lang="en-US"/>
+              <a:t>3</a:t>
+            </a:fld>
+            <a:endParaRPr lang="en-US"/>
+          </a:p>
+        </p:txBody>
+      </p:sp>
+    </p:spTree>
+    <p:extLst>
+      <p:ext uri="{BB962C8B-B14F-4D97-AF65-F5344CB8AC3E}">
+        <p14:creationId xmlns:p14="http://schemas.microsoft.com/office/powerpoint/2010/main" val="1024086991"/>
+      </p:ext>
+    </p:extLst>
+  </p:cSld>
+  <p:clrMapOvr>
+    <a:masterClrMapping/>
+  </p:clrMapOvr>
+</p:notes>
+</file>
+
+<file path=ppt/notesSlides/notesSlide4.xml><?xml version="1.0" encoding="utf-8"?>
+<p:notes xmlns:a="http://schemas.openxmlformats.org/drawingml/2006/main" xmlns:r="http://schemas.openxmlformats.org/officeDocument/2006/relationships" xmlns:p="http://schemas.openxmlformats.org/presentationml/2006/main">
+  <p:cSld>
+    <p:spTree>
+      <p:nvGrpSpPr>
+        <p:cNvPr id="1" name=""/>
+        <p:cNvGrpSpPr/>
+        <p:nvPr/>
+      </p:nvGrpSpPr>
+      <p:grpSpPr>
+        <a:xfrm>
+          <a:off x="0" y="0"/>
+          <a:ext cx="0" cy="0"/>
+          <a:chOff x="0" y="0"/>
+          <a:chExt cx="0" cy="0"/>
+        </a:xfrm>
+      </p:grpSpPr>
+      <p:sp>
+        <p:nvSpPr>
+          <p:cNvPr id="2" name="Slide Image Placeholder 1"/>
+          <p:cNvSpPr>
+            <a:spLocks noGrp="1" noRot="1" noChangeAspect="1"/>
+          </p:cNvSpPr>
+          <p:nvPr>
+            <p:ph type="sldImg"/>
+          </p:nvPr>
+        </p:nvSpPr>
+        <p:spPr/>
+      </p:sp>
+      <p:sp>
+        <p:nvSpPr>
+          <p:cNvPr id="3" name="Notes Placeholder 2"/>
+          <p:cNvSpPr>
+            <a:spLocks noGrp="1"/>
+          </p:cNvSpPr>
+          <p:nvPr>
+            <p:ph type="body" idx="1"/>
+          </p:nvPr>
+        </p:nvSpPr>
+        <p:spPr/>
+        <p:txBody>
+          <a:bodyPr/>
+          <a:lstStyle/>
+          <a:p>
+            <a:r>
+              <a:rPr lang="en-US" dirty="0"/>
+              <a:t/>
+            </a:r>
+            <a:endParaRPr lang="en-US" dirty="0"/>
+          </a:p>
+        </p:txBody>
+      </p:sp>
+      <p:sp>
+        <p:nvSpPr>
+          <p:cNvPr id="4" name="Slide Number Placeholder 3"/>
+          <p:cNvSpPr>
+            <a:spLocks noGrp="1"/>
+          </p:cNvSpPr>
+          <p:nvPr>
+            <p:ph type="sldNum" sz="quarter" idx="10"/>
+          </p:nvPr>
+        </p:nvSpPr>
+        <p:spPr/>
+        <p:txBody>
+          <a:bodyPr/>
+          <a:lstStyle/>
+          <a:p>
+            <a:fld id="{F7021451-1387-4CA6-816F-3879F97B5CBC}" type="slidenum">
+              <a:rPr lang="en-US"/>
+              <a:t>4</a:t>
+            </a:fld>
+            <a:endParaRPr lang="en-US"/>
+          </a:p>
+        </p:txBody>
+      </p:sp>
+    </p:spTree>
+    <p:extLst>
+      <p:ext uri="{BB962C8B-B14F-4D97-AF65-F5344CB8AC3E}">
+        <p14:creationId xmlns:p14="http://schemas.microsoft.com/office/powerpoint/2010/main" val="1024086991"/>
+      </p:ext>
+    </p:extLst>
+  </p:cSld>
+  <p:clrMapOvr>
+    <a:masterClrMapping/>
+  </p:clrMapOvr>
+</p:notes>
+</file>
+
+<file path=ppt/notesSlides/notesSlide5.xml><?xml version="1.0" encoding="utf-8"?>
+<p:notes xmlns:a="http://schemas.openxmlformats.org/drawingml/2006/main" xmlns:r="http://schemas.openxmlformats.org/officeDocument/2006/relationships" xmlns:p="http://schemas.openxmlformats.org/presentationml/2006/main">
+  <p:cSld>
+    <p:spTree>
+      <p:nvGrpSpPr>
+        <p:cNvPr id="1" name=""/>
+        <p:cNvGrpSpPr/>
+        <p:nvPr/>
+      </p:nvGrpSpPr>
+      <p:grpSpPr>
+        <a:xfrm>
+          <a:off x="0" y="0"/>
+          <a:ext cx="0" cy="0"/>
+          <a:chOff x="0" y="0"/>
+          <a:chExt cx="0" cy="0"/>
+        </a:xfrm>
+      </p:grpSpPr>
+      <p:sp>
+        <p:nvSpPr>
+          <p:cNvPr id="2" name="Slide Image Placeholder 1"/>
+          <p:cNvSpPr>
+            <a:spLocks noGrp="1" noRot="1" noChangeAspect="1"/>
+          </p:cNvSpPr>
+          <p:nvPr>
+            <p:ph type="sldImg"/>
+          </p:nvPr>
+        </p:nvSpPr>
+        <p:spPr/>
+      </p:sp>
+      <p:sp>
+        <p:nvSpPr>
+          <p:cNvPr id="3" name="Notes Placeholder 2"/>
+          <p:cNvSpPr>
+            <a:spLocks noGrp="1"/>
+          </p:cNvSpPr>
+          <p:nvPr>
+            <p:ph type="body" idx="1"/>
+          </p:nvPr>
+        </p:nvSpPr>
+        <p:spPr/>
+        <p:txBody>
+          <a:bodyPr/>
+          <a:lstStyle/>
+          <a:p>
+            <a:r>
+              <a:rPr lang="en-US" dirty="0"/>
+              <a:t/>
+            </a:r>
+            <a:endParaRPr lang="en-US" dirty="0"/>
+          </a:p>
+        </p:txBody>
+      </p:sp>
+      <p:sp>
+        <p:nvSpPr>
+          <p:cNvPr id="4" name="Slide Number Placeholder 3"/>
+          <p:cNvSpPr>
+            <a:spLocks noGrp="1"/>
+          </p:cNvSpPr>
+          <p:nvPr>
+            <p:ph type="sldNum" sz="quarter" idx="10"/>
+          </p:nvPr>
+        </p:nvSpPr>
+        <p:spPr/>
+        <p:txBody>
+          <a:bodyPr/>
+          <a:lstStyle/>
+          <a:p>
+            <a:fld id="{F7021451-1387-4CA6-816F-3879F97B5CBC}" type="slidenum">
+              <a:rPr lang="en-US"/>
+              <a:t>5</a:t>
+            </a:fld>
+            <a:endParaRPr lang="en-US"/>
+          </a:p>
+        </p:txBody>
+      </p:sp>
+    </p:spTree>
+    <p:extLst>
+      <p:ext uri="{BB962C8B-B14F-4D97-AF65-F5344CB8AC3E}">
+        <p14:creationId xmlns:p14="http://schemas.microsoft.com/office/powerpoint/2010/main" val="1024086991"/>
+      </p:ext>
+    </p:extLst>
+  </p:cSld>
+  <p:clrMapOvr>
+    <a:masterClrMapping/>
+  </p:clrMapOvr>
+</p:notes>
+</file>
+
+<file path=ppt/notesSlides/notesSlide6.xml><?xml version="1.0" encoding="utf-8"?>
+<p:notes xmlns:a="http://schemas.openxmlformats.org/drawingml/2006/main" xmlns:r="http://schemas.openxmlformats.org/officeDocument/2006/relationships" xmlns:p="http://schemas.openxmlformats.org/presentationml/2006/main">
+  <p:cSld>
+    <p:spTree>
+      <p:nvGrpSpPr>
+        <p:cNvPr id="1" name=""/>
+        <p:cNvGrpSpPr/>
+        <p:nvPr/>
+      </p:nvGrpSpPr>
+      <p:grpSpPr>
+        <a:xfrm>
+          <a:off x="0" y="0"/>
+          <a:ext cx="0" cy="0"/>
+          <a:chOff x="0" y="0"/>
+          <a:chExt cx="0" cy="0"/>
+        </a:xfrm>
+      </p:grpSpPr>
+      <p:sp>
+        <p:nvSpPr>
+          <p:cNvPr id="2" name="Slide Image Placeholder 1"/>
+          <p:cNvSpPr>
+            <a:spLocks noGrp="1" noRot="1" noChangeAspect="1"/>
+          </p:cNvSpPr>
+          <p:nvPr>
+            <p:ph type="sldImg"/>
+          </p:nvPr>
+        </p:nvSpPr>
+        <p:spPr/>
+      </p:sp>
+      <p:sp>
+        <p:nvSpPr>
+          <p:cNvPr id="3" name="Notes Placeholder 2"/>
+          <p:cNvSpPr>
+            <a:spLocks noGrp="1"/>
+          </p:cNvSpPr>
+          <p:nvPr>
+            <p:ph type="body" idx="1"/>
+          </p:nvPr>
+        </p:nvSpPr>
+        <p:spPr/>
+        <p:txBody>
+          <a:bodyPr/>
+          <a:lstStyle/>
+          <a:p>
+            <a:r>
+              <a:rPr lang="en-US" dirty="0"/>
+              <a:t/>
+            </a:r>
+            <a:endParaRPr lang="en-US" dirty="0"/>
+          </a:p>
+        </p:txBody>
+      </p:sp>
+      <p:sp>
+        <p:nvSpPr>
+          <p:cNvPr id="4" name="Slide Number Placeholder 3"/>
+          <p:cNvSpPr>
+            <a:spLocks noGrp="1"/>
+          </p:cNvSpPr>
+          <p:nvPr>
+            <p:ph type="sldNum" sz="quarter" idx="10"/>
+          </p:nvPr>
+        </p:nvSpPr>
+        <p:spPr/>
+        <p:txBody>
+          <a:bodyPr/>
+          <a:lstStyle/>
+          <a:p>
+            <a:fld id="{F7021451-1387-4CA6-816F-3879F97B5CBC}" type="slidenum">
+              <a:rPr lang="en-US"/>
+              <a:t>6</a:t>
+            </a:fld>
+            <a:endParaRPr lang="en-US"/>
+          </a:p>
+        </p:txBody>
+      </p:sp>
+    </p:spTree>
+    <p:extLst>
+      <p:ext uri="{BB962C8B-B14F-4D97-AF65-F5344CB8AC3E}">
+        <p14:creationId xmlns:p14="http://schemas.microsoft.com/office/powerpoint/2010/main" val="1024086991"/>
+      </p:ext>
+    </p:extLst>
+  </p:cSld>
+  <p:clrMapOvr>
+    <a:masterClrMapping/>
+  </p:clrMapOvr>
+</p:notes>
+</file>
+
 <file path=ppt/slideLayouts/slideLayout1.xml><?xml version="1.0" encoding="utf-8"?>
 <p:sldLayout xmlns:a="http://schemas.openxmlformats.org/drawingml/2006/main" xmlns:r="http://schemas.openxmlformats.org/officeDocument/2006/relationships" xmlns:p="http://schemas.openxmlformats.org/presentationml/2006/main" preserve="1">
   <p:cSld name="DEFAULT">
@@ -1648,6 +2093,4616 @@
                 <a:cs typeface="Arial" pitchFamily="34" charset="-120"/>
               </a:rPr>
               <a:t>v0.1.0-workshop  ·  MVP operacional  ·  No dispositivo médico  ·  Datos ficticios</a:t>
+            </a:r>
+            <a:endParaRPr lang="en-US" dirty="0"/>
+          </a:p>
+        </p:txBody>
+      </p:sp>
+    </p:spTree>
+  </p:cSld>
+  <p:clrMapOvr>
+    <a:masterClrMapping/>
+  </p:clrMapOvr>
+</p:sld>
+</file>
+
+<file path=ppt/slides/slide2.xml><?xml version="1.0" encoding="utf-8"?>
+<p:sld xmlns:a="http://schemas.openxmlformats.org/drawingml/2006/main" xmlns:r="http://schemas.openxmlformats.org/officeDocument/2006/relationships" xmlns:p="http://schemas.openxmlformats.org/presentationml/2006/main">
+  <p:cSld name="Slide 2">
+    <p:spTree>
+      <p:nvGrpSpPr>
+        <p:cNvPr id="1" name=""/>
+        <p:cNvGrpSpPr/>
+        <p:nvPr/>
+      </p:nvGrpSpPr>
+      <p:grpSpPr>
+        <a:xfrm>
+          <a:off x="0" y="0"/>
+          <a:ext cx="0" cy="0"/>
+          <a:chOff x="0" y="0"/>
+          <a:chExt cx="0" cy="0"/>
+        </a:xfrm>
+      </p:grpSpPr>
+      <p:sp>
+        <p:nvSpPr>
+          <p:cNvPr id="2" name="Shape 0"/>
+          <p:cNvSpPr/>
+          <p:nvPr/>
+        </p:nvSpPr>
+        <p:spPr>
+          <a:xfrm>
+            <a:off x="0" y="0"/>
+            <a:ext cx="12192000" cy="6858000"/>
+          </a:xfrm>
+          <a:prstGeom prst="rect">
+            <a:avLst/>
+          </a:prstGeom>
+          <a:solidFill>
+            <a:srgbClr val="FAFAF8"/>
+          </a:solidFill>
+          <a:ln w="12700">
+            <a:solidFill>
+              <a:srgbClr val="FAFAF8"/>
+            </a:solidFill>
+            <a:prstDash val="solid"/>
+          </a:ln>
+        </p:spPr>
+      </p:sp>
+      <p:sp>
+        <p:nvSpPr>
+          <p:cNvPr id="3" name="Shape 1"/>
+          <p:cNvSpPr/>
+          <p:nvPr/>
+        </p:nvSpPr>
+        <p:spPr>
+          <a:xfrm>
+            <a:off x="7132320" y="-1371600"/>
+            <a:ext cx="3474720" cy="3474720"/>
+          </a:xfrm>
+          <a:prstGeom prst="ellipse">
+            <a:avLst/>
+          </a:prstGeom>
+          <a:solidFill>
+            <a:srgbClr val="7BA68A">
+              <a:alpha val="16000"/>
+            </a:srgbClr>
+          </a:solidFill>
+          <a:ln w="12700">
+            <a:solidFill>
+              <a:srgbClr val="7BA68A">
+                <a:alpha val="16000"/>
+              </a:srgbClr>
+            </a:solidFill>
+            <a:prstDash val="solid"/>
+          </a:ln>
+        </p:spPr>
+      </p:sp>
+      <p:sp>
+        <p:nvSpPr>
+          <p:cNvPr id="4" name="Shape 2"/>
+          <p:cNvSpPr/>
+          <p:nvPr/>
+        </p:nvSpPr>
+        <p:spPr>
+          <a:xfrm>
+            <a:off x="-365760" y="5303520"/>
+            <a:ext cx="2011680" cy="2011680"/>
+          </a:xfrm>
+          <a:prstGeom prst="ellipse">
+            <a:avLst/>
+          </a:prstGeom>
+          <a:solidFill>
+            <a:srgbClr val="A8C4DC">
+              <a:alpha val="20000"/>
+            </a:srgbClr>
+          </a:solidFill>
+          <a:ln w="12700">
+            <a:solidFill>
+              <a:srgbClr val="A8C4DC">
+                <a:alpha val="20000"/>
+              </a:srgbClr>
+            </a:solidFill>
+            <a:prstDash val="solid"/>
+          </a:ln>
+        </p:spPr>
+      </p:sp>
+      <p:sp>
+        <p:nvSpPr>
+          <p:cNvPr id="5" name="Shape 3"/>
+          <p:cNvSpPr/>
+          <p:nvPr/>
+        </p:nvSpPr>
+        <p:spPr>
+          <a:xfrm rot="-1080000">
+            <a:off x="274320" y="5943600"/>
+            <a:ext cx="2286000" cy="0"/>
+          </a:xfrm>
+          <a:prstGeom prst="line">
+            <a:avLst/>
+          </a:prstGeom>
+          <a:noFill/>
+          <a:ln w="12700">
+            <a:solidFill>
+              <a:srgbClr val="E2E8F0"/>
+            </a:solidFill>
+            <a:prstDash val="solid"/>
+          </a:ln>
+        </p:spPr>
+      </p:sp>
+      <p:sp>
+        <p:nvSpPr>
+          <p:cNvPr id="6" name="Shape 4"/>
+          <p:cNvSpPr/>
+          <p:nvPr/>
+        </p:nvSpPr>
+        <p:spPr>
+          <a:xfrm>
+            <a:off x="0" y="0"/>
+            <a:ext cx="12192000" cy="54864"/>
+          </a:xfrm>
+          <a:prstGeom prst="rect">
+            <a:avLst/>
+          </a:prstGeom>
+          <a:solidFill>
+            <a:srgbClr val="5B8DB8"/>
+          </a:solidFill>
+          <a:ln w="12700">
+            <a:solidFill>
+              <a:srgbClr val="5B8DB8"/>
+            </a:solidFill>
+            <a:prstDash val="solid"/>
+          </a:ln>
+        </p:spPr>
+      </p:sp>
+      <p:sp>
+        <p:nvSpPr>
+          <p:cNvPr id="7" name="Shape 5"/>
+          <p:cNvSpPr/>
+          <p:nvPr/>
+        </p:nvSpPr>
+        <p:spPr>
+          <a:xfrm>
+            <a:off x="0" y="6528816"/>
+            <a:ext cx="12192000" cy="54864"/>
+          </a:xfrm>
+          <a:prstGeom prst="rect">
+            <a:avLst/>
+          </a:prstGeom>
+          <a:solidFill>
+            <a:srgbClr val="C4786A"/>
+          </a:solidFill>
+          <a:ln w="12700">
+            <a:solidFill>
+              <a:srgbClr val="C4786A"/>
+            </a:solidFill>
+            <a:prstDash val="solid"/>
+          </a:ln>
+        </p:spPr>
+      </p:sp>
+      <p:sp>
+        <p:nvSpPr>
+          <p:cNvPr id="8" name="Text 6"/>
+          <p:cNvSpPr/>
+          <p:nvPr/>
+        </p:nvSpPr>
+        <p:spPr>
+          <a:xfrm>
+            <a:off x="457200" y="228600"/>
+            <a:ext cx="8375904" cy="502920"/>
+          </a:xfrm>
+          <a:prstGeom prst="rect">
+            <a:avLst/>
+          </a:prstGeom>
+          <a:noFill/>
+          <a:ln/>
+        </p:spPr>
+        <p:txBody>
+          <a:bodyPr wrap="square" rtlCol="0" anchor="ctr"/>
+          <a:lstStyle/>
+          <a:p>
+            <a:pPr indent="0" marL="0">
+              <a:buNone/>
+            </a:pPr>
+            <a:r>
+              <a:rPr lang="en-US" b="1" dirty="0">
+                <a:solidFill>
+                  <a:srgbClr val="2D3748"/>
+                </a:solidFill>
+                <a:latin typeface="Arial" pitchFamily="34" charset="0"/>
+                <a:ea typeface="Arial" pitchFamily="34" charset="-122"/>
+                <a:cs typeface="Arial" pitchFamily="34" charset="-120"/>
+              </a:rPr>
+              <a:t>El problema ya llegó para cientos de millones</a:t>
+            </a:r>
+            <a:endParaRPr lang="en-US" dirty="0"/>
+          </a:p>
+        </p:txBody>
+      </p:sp>
+      <p:sp>
+        <p:nvSpPr>
+          <p:cNvPr id="9" name="Text 7"/>
+          <p:cNvSpPr/>
+          <p:nvPr/>
+        </p:nvSpPr>
+        <p:spPr>
+          <a:xfrm>
+            <a:off x="457200" y="731520"/>
+            <a:ext cx="8375904" cy="320040"/>
+          </a:xfrm>
+          <a:prstGeom prst="rect">
+            <a:avLst/>
+          </a:prstGeom>
+          <a:noFill/>
+          <a:ln/>
+        </p:spPr>
+        <p:txBody>
+          <a:bodyPr wrap="square" rtlCol="0" anchor="ctr"/>
+          <a:lstStyle/>
+          <a:p>
+            <a:pPr indent="0" marL="0">
+              <a:buNone/>
+            </a:pPr>
+            <a:r>
+              <a:rPr lang="en-US" b="1" dirty="0">
+                <a:solidFill>
+                  <a:srgbClr val="5B8DB8"/>
+                </a:solidFill>
+                <a:latin typeface="Arial" pitchFamily="34" charset="0"/>
+                <a:ea typeface="Arial" pitchFamily="34" charset="-122"/>
+                <a:cs typeface="Arial" pitchFamily="34" charset="-120"/>
+              </a:rPr>
+              <a:t>Personas mayores de 65 años en el mundo · 2023–2050</a:t>
+            </a:r>
+            <a:endParaRPr lang="en-US" dirty="0"/>
+          </a:p>
+        </p:txBody>
+      </p:sp>
+      <p:sp>
+        <p:nvSpPr>
+          <p:cNvPr id="10" name="Shape 8"/>
+          <p:cNvSpPr/>
+          <p:nvPr/>
+        </p:nvSpPr>
+        <p:spPr>
+          <a:xfrm>
+            <a:off x="457200" y="1097280"/>
+            <a:ext cx="8375904" cy="0"/>
+          </a:xfrm>
+          <a:prstGeom prst="line">
+            <a:avLst/>
+          </a:prstGeom>
+          <a:noFill/>
+          <a:ln w="12700">
+            <a:solidFill>
+              <a:srgbClr val="E2E8F0"/>
+            </a:solidFill>
+            <a:prstDash val="solid"/>
+          </a:ln>
+        </p:spPr>
+      </p:sp>
+      <p:sp>
+        <p:nvSpPr>
+          <p:cNvPr id="11" name="Shape 9"/>
+          <p:cNvSpPr/>
+          <p:nvPr/>
+        </p:nvSpPr>
+        <p:spPr>
+          <a:xfrm>
+            <a:off x="365760" y="1371600"/>
+            <a:ext cx="1737360" cy="1828800"/>
+          </a:xfrm>
+          <a:prstGeom prst="roundRect">
+            <a:avLst>
+              <a:gd name="adj" fmla="val 4211"/>
+            </a:avLst>
+          </a:prstGeom>
+          <a:solidFill>
+            <a:srgbClr val="F0EDE8"/>
+          </a:solidFill>
+          <a:ln w="6350">
+            <a:solidFill>
+              <a:srgbClr val="E2E8F0"/>
+            </a:solidFill>
+            <a:prstDash val="solid"/>
+          </a:ln>
+        </p:spPr>
+      </p:sp>
+      <p:sp>
+        <p:nvSpPr>
+          <p:cNvPr id="12" name="Text 10"/>
+          <p:cNvSpPr/>
+          <p:nvPr/>
+        </p:nvSpPr>
+        <p:spPr>
+          <a:xfrm>
+            <a:off x="365760" y="1444752"/>
+            <a:ext cx="1737360" cy="457200"/>
+          </a:xfrm>
+          <a:prstGeom prst="rect">
+            <a:avLst/>
+          </a:prstGeom>
+          <a:noFill/>
+          <a:ln/>
+        </p:spPr>
+        <p:txBody>
+          <a:bodyPr wrap="square" rtlCol="0" anchor="ctr"/>
+          <a:lstStyle/>
+          <a:p>
+            <a:pPr algn="ctr" indent="0" marL="0">
+              <a:buNone/>
+            </a:pPr>
+            <a:r>
+              <a:rPr lang="en-US" sz="2200" dirty="0">
+                <a:solidFill>
+                  <a:srgbClr val="000000"/>
+                </a:solidFill>
+              </a:rPr>
+              <a:t>🌎</a:t>
+            </a:r>
+            <a:endParaRPr lang="en-US" sz="2200" dirty="0"/>
+          </a:p>
+        </p:txBody>
+      </p:sp>
+      <p:sp>
+        <p:nvSpPr>
+          <p:cNvPr id="13" name="Text 11"/>
+          <p:cNvSpPr/>
+          <p:nvPr/>
+        </p:nvSpPr>
+        <p:spPr>
+          <a:xfrm>
+            <a:off x="365760" y="1874520"/>
+            <a:ext cx="1737360" cy="274320"/>
+          </a:xfrm>
+          <a:prstGeom prst="rect">
+            <a:avLst/>
+          </a:prstGeom>
+          <a:noFill/>
+          <a:ln/>
+        </p:spPr>
+        <p:txBody>
+          <a:bodyPr wrap="square" rtlCol="0" anchor="ctr"/>
+          <a:lstStyle/>
+          <a:p>
+            <a:pPr algn="ctr" indent="0" marL="0">
+              <a:buNone/>
+            </a:pPr>
+            <a:r>
+              <a:rPr lang="en-US" sz="1100" b="1" dirty="0">
+                <a:solidFill>
+                  <a:srgbClr val="2D3748"/>
+                </a:solidFill>
+                <a:latin typeface="Arial" pitchFamily="34" charset="0"/>
+                <a:ea typeface="Arial" pitchFamily="34" charset="-122"/>
+                <a:cs typeface="Arial" pitchFamily="34" charset="-120"/>
+              </a:rPr>
+              <a:t>México</a:t>
+            </a:r>
+            <a:endParaRPr lang="en-US" sz="1100" dirty="0"/>
+          </a:p>
+        </p:txBody>
+      </p:sp>
+      <p:sp>
+        <p:nvSpPr>
+          <p:cNvPr id="14" name="Text 12"/>
+          <p:cNvSpPr/>
+          <p:nvPr/>
+        </p:nvSpPr>
+        <p:spPr>
+          <a:xfrm>
+            <a:off x="365760" y="2148840"/>
+            <a:ext cx="1737360" cy="457200"/>
+          </a:xfrm>
+          <a:prstGeom prst="rect">
+            <a:avLst/>
+          </a:prstGeom>
+          <a:noFill/>
+          <a:ln/>
+        </p:spPr>
+        <p:txBody>
+          <a:bodyPr wrap="square" rtlCol="0" anchor="ctr"/>
+          <a:lstStyle/>
+          <a:p>
+            <a:pPr algn="ctr" indent="0" marL="0">
+              <a:buNone/>
+            </a:pPr>
+            <a:r>
+              <a:rPr lang="en-US" sz="2200" b="1" dirty="0">
+                <a:solidFill>
+                  <a:srgbClr val="3A6B96"/>
+                </a:solidFill>
+                <a:latin typeface="Arial" pitchFamily="34" charset="0"/>
+                <a:ea typeface="Arial" pitchFamily="34" charset="-122"/>
+                <a:cs typeface="Arial" pitchFamily="34" charset="-120"/>
+              </a:rPr>
+              <a:t>17.1 M</a:t>
+            </a:r>
+            <a:endParaRPr lang="en-US" sz="2200" dirty="0"/>
+          </a:p>
+        </p:txBody>
+      </p:sp>
+      <p:sp>
+        <p:nvSpPr>
+          <p:cNvPr id="15" name="Text 13"/>
+          <p:cNvSpPr/>
+          <p:nvPr/>
+        </p:nvSpPr>
+        <p:spPr>
+          <a:xfrm>
+            <a:off x="365760" y="2633472"/>
+            <a:ext cx="1737360" cy="411480"/>
+          </a:xfrm>
+          <a:prstGeom prst="rect">
+            <a:avLst/>
+          </a:prstGeom>
+          <a:noFill/>
+          <a:ln/>
+        </p:spPr>
+        <p:txBody>
+          <a:bodyPr wrap="square" rtlCol="0" anchor="ctr"/>
+          <a:lstStyle/>
+          <a:p>
+            <a:pPr algn="ctr" indent="0" marL="0">
+              <a:buNone/>
+            </a:pPr>
+            <a:r>
+              <a:rPr lang="en-US" sz="850" dirty="0">
+                <a:solidFill>
+                  <a:srgbClr val="718096"/>
+                </a:solidFill>
+                <a:latin typeface="Arial" pitchFamily="34" charset="0"/>
+                <a:ea typeface="Arial" pitchFamily="34" charset="-122"/>
+                <a:cs typeface="Arial" pitchFamily="34" charset="-120"/>
+              </a:rPr>
+              <a:t>60+ años · CONAPO 2025</a:t>
+            </a:r>
+            <a:endParaRPr lang="en-US" sz="850" dirty="0"/>
+          </a:p>
+        </p:txBody>
+      </p:sp>
+      <p:sp>
+        <p:nvSpPr>
+          <p:cNvPr id="16" name="Shape 14"/>
+          <p:cNvSpPr/>
+          <p:nvPr/>
+        </p:nvSpPr>
+        <p:spPr>
+          <a:xfrm>
+            <a:off x="2240280" y="1371600"/>
+            <a:ext cx="1737360" cy="1828800"/>
+          </a:xfrm>
+          <a:prstGeom prst="roundRect">
+            <a:avLst>
+              <a:gd name="adj" fmla="val 4211"/>
+            </a:avLst>
+          </a:prstGeom>
+          <a:solidFill>
+            <a:srgbClr val="F0EDE8"/>
+          </a:solidFill>
+          <a:ln w="6350">
+            <a:solidFill>
+              <a:srgbClr val="E2E8F0"/>
+            </a:solidFill>
+            <a:prstDash val="solid"/>
+          </a:ln>
+        </p:spPr>
+      </p:sp>
+      <p:sp>
+        <p:nvSpPr>
+          <p:cNvPr id="17" name="Text 15"/>
+          <p:cNvSpPr/>
+          <p:nvPr/>
+        </p:nvSpPr>
+        <p:spPr>
+          <a:xfrm>
+            <a:off x="2240280" y="1444752"/>
+            <a:ext cx="1737360" cy="457200"/>
+          </a:xfrm>
+          <a:prstGeom prst="rect">
+            <a:avLst/>
+          </a:prstGeom>
+          <a:noFill/>
+          <a:ln/>
+        </p:spPr>
+        <p:txBody>
+          <a:bodyPr wrap="square" rtlCol="0" anchor="ctr"/>
+          <a:lstStyle/>
+          <a:p>
+            <a:pPr algn="ctr" indent="0" marL="0">
+              <a:buNone/>
+            </a:pPr>
+            <a:r>
+              <a:rPr lang="en-US" sz="2200" dirty="0">
+                <a:solidFill>
+                  <a:srgbClr val="000000"/>
+                </a:solidFill>
+              </a:rPr>
+              <a:t>🌎</a:t>
+            </a:r>
+            <a:endParaRPr lang="en-US" sz="2200" dirty="0"/>
+          </a:p>
+        </p:txBody>
+      </p:sp>
+      <p:sp>
+        <p:nvSpPr>
+          <p:cNvPr id="18" name="Text 16"/>
+          <p:cNvSpPr/>
+          <p:nvPr/>
+        </p:nvSpPr>
+        <p:spPr>
+          <a:xfrm>
+            <a:off x="2240280" y="1874520"/>
+            <a:ext cx="1737360" cy="274320"/>
+          </a:xfrm>
+          <a:prstGeom prst="rect">
+            <a:avLst/>
+          </a:prstGeom>
+          <a:noFill/>
+          <a:ln/>
+        </p:spPr>
+        <p:txBody>
+          <a:bodyPr wrap="square" rtlCol="0" anchor="ctr"/>
+          <a:lstStyle/>
+          <a:p>
+            <a:pPr algn="ctr" indent="0" marL="0">
+              <a:buNone/>
+            </a:pPr>
+            <a:r>
+              <a:rPr lang="en-US" sz="1100" b="1" dirty="0">
+                <a:solidFill>
+                  <a:srgbClr val="2D3748"/>
+                </a:solidFill>
+                <a:latin typeface="Arial" pitchFamily="34" charset="0"/>
+                <a:ea typeface="Arial" pitchFamily="34" charset="-122"/>
+                <a:cs typeface="Arial" pitchFamily="34" charset="-120"/>
+              </a:rPr>
+              <a:t>América Latina</a:t>
+            </a:r>
+            <a:endParaRPr lang="en-US" sz="1100" dirty="0"/>
+          </a:p>
+        </p:txBody>
+      </p:sp>
+      <p:sp>
+        <p:nvSpPr>
+          <p:cNvPr id="19" name="Text 17"/>
+          <p:cNvSpPr/>
+          <p:nvPr/>
+        </p:nvSpPr>
+        <p:spPr>
+          <a:xfrm>
+            <a:off x="2240280" y="2148840"/>
+            <a:ext cx="1737360" cy="457200"/>
+          </a:xfrm>
+          <a:prstGeom prst="rect">
+            <a:avLst/>
+          </a:prstGeom>
+          <a:noFill/>
+          <a:ln/>
+        </p:spPr>
+        <p:txBody>
+          <a:bodyPr wrap="square" rtlCol="0" anchor="ctr"/>
+          <a:lstStyle/>
+          <a:p>
+            <a:pPr algn="ctr" indent="0" marL="0">
+              <a:buNone/>
+            </a:pPr>
+            <a:r>
+              <a:rPr lang="en-US" sz="2200" b="1" dirty="0">
+                <a:solidFill>
+                  <a:srgbClr val="5B8DB8"/>
+                </a:solidFill>
+                <a:latin typeface="Arial" pitchFamily="34" charset="0"/>
+                <a:ea typeface="Arial" pitchFamily="34" charset="-122"/>
+                <a:cs typeface="Arial" pitchFamily="34" charset="-120"/>
+              </a:rPr>
+              <a:t>65 M</a:t>
+            </a:r>
+            <a:endParaRPr lang="en-US" sz="2200" dirty="0"/>
+          </a:p>
+        </p:txBody>
+      </p:sp>
+      <p:sp>
+        <p:nvSpPr>
+          <p:cNvPr id="20" name="Text 18"/>
+          <p:cNvSpPr/>
+          <p:nvPr/>
+        </p:nvSpPr>
+        <p:spPr>
+          <a:xfrm>
+            <a:off x="2240280" y="2633472"/>
+            <a:ext cx="1737360" cy="411480"/>
+          </a:xfrm>
+          <a:prstGeom prst="rect">
+            <a:avLst/>
+          </a:prstGeom>
+          <a:noFill/>
+          <a:ln/>
+        </p:spPr>
+        <p:txBody>
+          <a:bodyPr wrap="square" rtlCol="0" anchor="ctr"/>
+          <a:lstStyle/>
+          <a:p>
+            <a:pPr algn="ctr" indent="0" marL="0">
+              <a:buNone/>
+            </a:pPr>
+            <a:r>
+              <a:rPr lang="en-US" sz="850" dirty="0">
+                <a:solidFill>
+                  <a:srgbClr val="718096"/>
+                </a:solidFill>
+                <a:latin typeface="Arial" pitchFamily="34" charset="0"/>
+                <a:ea typeface="Arial" pitchFamily="34" charset="-122"/>
+                <a:cs typeface="Arial" pitchFamily="34" charset="-120"/>
+              </a:rPr>
+              <a:t>65+ años · CEPAL 2024</a:t>
+            </a:r>
+            <a:endParaRPr lang="en-US" sz="850" dirty="0"/>
+          </a:p>
+        </p:txBody>
+      </p:sp>
+      <p:sp>
+        <p:nvSpPr>
+          <p:cNvPr id="21" name="Shape 19"/>
+          <p:cNvSpPr/>
+          <p:nvPr/>
+        </p:nvSpPr>
+        <p:spPr>
+          <a:xfrm>
+            <a:off x="4114800" y="1371600"/>
+            <a:ext cx="1737360" cy="1828800"/>
+          </a:xfrm>
+          <a:prstGeom prst="roundRect">
+            <a:avLst>
+              <a:gd name="adj" fmla="val 4211"/>
+            </a:avLst>
+          </a:prstGeom>
+          <a:solidFill>
+            <a:srgbClr val="F0EDE8"/>
+          </a:solidFill>
+          <a:ln w="6350">
+            <a:solidFill>
+              <a:srgbClr val="E2E8F0"/>
+            </a:solidFill>
+            <a:prstDash val="solid"/>
+          </a:ln>
+        </p:spPr>
+      </p:sp>
+      <p:sp>
+        <p:nvSpPr>
+          <p:cNvPr id="22" name="Text 20"/>
+          <p:cNvSpPr/>
+          <p:nvPr/>
+        </p:nvSpPr>
+        <p:spPr>
+          <a:xfrm>
+            <a:off x="4114800" y="1444752"/>
+            <a:ext cx="1737360" cy="457200"/>
+          </a:xfrm>
+          <a:prstGeom prst="rect">
+            <a:avLst/>
+          </a:prstGeom>
+          <a:noFill/>
+          <a:ln/>
+        </p:spPr>
+        <p:txBody>
+          <a:bodyPr wrap="square" rtlCol="0" anchor="ctr"/>
+          <a:lstStyle/>
+          <a:p>
+            <a:pPr algn="ctr" indent="0" marL="0">
+              <a:buNone/>
+            </a:pPr>
+            <a:r>
+              <a:rPr lang="en-US" sz="2200" dirty="0">
+                <a:solidFill>
+                  <a:srgbClr val="000000"/>
+                </a:solidFill>
+              </a:rPr>
+              <a:t>🌎</a:t>
+            </a:r>
+            <a:endParaRPr lang="en-US" sz="2200" dirty="0"/>
+          </a:p>
+        </p:txBody>
+      </p:sp>
+      <p:sp>
+        <p:nvSpPr>
+          <p:cNvPr id="23" name="Text 21"/>
+          <p:cNvSpPr/>
+          <p:nvPr/>
+        </p:nvSpPr>
+        <p:spPr>
+          <a:xfrm>
+            <a:off x="4114800" y="1874520"/>
+            <a:ext cx="1737360" cy="274320"/>
+          </a:xfrm>
+          <a:prstGeom prst="rect">
+            <a:avLst/>
+          </a:prstGeom>
+          <a:noFill/>
+          <a:ln/>
+        </p:spPr>
+        <p:txBody>
+          <a:bodyPr wrap="square" rtlCol="0" anchor="ctr"/>
+          <a:lstStyle/>
+          <a:p>
+            <a:pPr algn="ctr" indent="0" marL="0">
+              <a:buNone/>
+            </a:pPr>
+            <a:r>
+              <a:rPr lang="en-US" sz="1100" b="1" dirty="0">
+                <a:solidFill>
+                  <a:srgbClr val="2D3748"/>
+                </a:solidFill>
+                <a:latin typeface="Arial" pitchFamily="34" charset="0"/>
+                <a:ea typeface="Arial" pitchFamily="34" charset="-122"/>
+                <a:cs typeface="Arial" pitchFamily="34" charset="-120"/>
+              </a:rPr>
+              <a:t>EE. UU.</a:t>
+            </a:r>
+            <a:endParaRPr lang="en-US" sz="1100" dirty="0"/>
+          </a:p>
+        </p:txBody>
+      </p:sp>
+      <p:sp>
+        <p:nvSpPr>
+          <p:cNvPr id="24" name="Text 22"/>
+          <p:cNvSpPr/>
+          <p:nvPr/>
+        </p:nvSpPr>
+        <p:spPr>
+          <a:xfrm>
+            <a:off x="4114800" y="2148840"/>
+            <a:ext cx="1737360" cy="457200"/>
+          </a:xfrm>
+          <a:prstGeom prst="rect">
+            <a:avLst/>
+          </a:prstGeom>
+          <a:noFill/>
+          <a:ln/>
+        </p:spPr>
+        <p:txBody>
+          <a:bodyPr wrap="square" rtlCol="0" anchor="ctr"/>
+          <a:lstStyle/>
+          <a:p>
+            <a:pPr algn="ctr" indent="0" marL="0">
+              <a:buNone/>
+            </a:pPr>
+            <a:r>
+              <a:rPr lang="en-US" sz="2200" b="1" dirty="0">
+                <a:solidFill>
+                  <a:srgbClr val="5B8DB8"/>
+                </a:solidFill>
+                <a:latin typeface="Arial" pitchFamily="34" charset="0"/>
+                <a:ea typeface="Arial" pitchFamily="34" charset="-122"/>
+                <a:cs typeface="Arial" pitchFamily="34" charset="-120"/>
+              </a:rPr>
+              <a:t>57 M</a:t>
+            </a:r>
+            <a:endParaRPr lang="en-US" sz="2200" dirty="0"/>
+          </a:p>
+        </p:txBody>
+      </p:sp>
+      <p:sp>
+        <p:nvSpPr>
+          <p:cNvPr id="25" name="Text 23"/>
+          <p:cNvSpPr/>
+          <p:nvPr/>
+        </p:nvSpPr>
+        <p:spPr>
+          <a:xfrm>
+            <a:off x="4114800" y="2633472"/>
+            <a:ext cx="1737360" cy="411480"/>
+          </a:xfrm>
+          <a:prstGeom prst="rect">
+            <a:avLst/>
+          </a:prstGeom>
+          <a:noFill/>
+          <a:ln/>
+        </p:spPr>
+        <p:txBody>
+          <a:bodyPr wrap="square" rtlCol="0" anchor="ctr"/>
+          <a:lstStyle/>
+          <a:p>
+            <a:pPr algn="ctr" indent="0" marL="0">
+              <a:buNone/>
+            </a:pPr>
+            <a:r>
+              <a:rPr lang="en-US" sz="850" dirty="0">
+                <a:solidFill>
+                  <a:srgbClr val="718096"/>
+                </a:solidFill>
+                <a:latin typeface="Arial" pitchFamily="34" charset="0"/>
+                <a:ea typeface="Arial" pitchFamily="34" charset="-122"/>
+                <a:cs typeface="Arial" pitchFamily="34" charset="-120"/>
+              </a:rPr>
+              <a:t>65+ años · Census 2023</a:t>
+            </a:r>
+            <a:endParaRPr lang="en-US" sz="850" dirty="0"/>
+          </a:p>
+        </p:txBody>
+      </p:sp>
+      <p:sp>
+        <p:nvSpPr>
+          <p:cNvPr id="26" name="Shape 24"/>
+          <p:cNvSpPr/>
+          <p:nvPr/>
+        </p:nvSpPr>
+        <p:spPr>
+          <a:xfrm>
+            <a:off x="5989320" y="1371600"/>
+            <a:ext cx="1737360" cy="1828800"/>
+          </a:xfrm>
+          <a:prstGeom prst="roundRect">
+            <a:avLst>
+              <a:gd name="adj" fmla="val 4211"/>
+            </a:avLst>
+          </a:prstGeom>
+          <a:solidFill>
+            <a:srgbClr val="F0EDE8"/>
+          </a:solidFill>
+          <a:ln w="6350">
+            <a:solidFill>
+              <a:srgbClr val="E2E8F0"/>
+            </a:solidFill>
+            <a:prstDash val="solid"/>
+          </a:ln>
+        </p:spPr>
+      </p:sp>
+      <p:sp>
+        <p:nvSpPr>
+          <p:cNvPr id="27" name="Text 25"/>
+          <p:cNvSpPr/>
+          <p:nvPr/>
+        </p:nvSpPr>
+        <p:spPr>
+          <a:xfrm>
+            <a:off x="5989320" y="1444752"/>
+            <a:ext cx="1737360" cy="457200"/>
+          </a:xfrm>
+          <a:prstGeom prst="rect">
+            <a:avLst/>
+          </a:prstGeom>
+          <a:noFill/>
+          <a:ln/>
+        </p:spPr>
+        <p:txBody>
+          <a:bodyPr wrap="square" rtlCol="0" anchor="ctr"/>
+          <a:lstStyle/>
+          <a:p>
+            <a:pPr algn="ctr" indent="0" marL="0">
+              <a:buNone/>
+            </a:pPr>
+            <a:r>
+              <a:rPr lang="en-US" sz="2200" dirty="0">
+                <a:solidFill>
+                  <a:srgbClr val="000000"/>
+                </a:solidFill>
+              </a:rPr>
+              <a:t>🌏</a:t>
+            </a:r>
+            <a:endParaRPr lang="en-US" sz="2200" dirty="0"/>
+          </a:p>
+        </p:txBody>
+      </p:sp>
+      <p:sp>
+        <p:nvSpPr>
+          <p:cNvPr id="28" name="Text 26"/>
+          <p:cNvSpPr/>
+          <p:nvPr/>
+        </p:nvSpPr>
+        <p:spPr>
+          <a:xfrm>
+            <a:off x="5989320" y="1874520"/>
+            <a:ext cx="1737360" cy="274320"/>
+          </a:xfrm>
+          <a:prstGeom prst="rect">
+            <a:avLst/>
+          </a:prstGeom>
+          <a:noFill/>
+          <a:ln/>
+        </p:spPr>
+        <p:txBody>
+          <a:bodyPr wrap="square" rtlCol="0" anchor="ctr"/>
+          <a:lstStyle/>
+          <a:p>
+            <a:pPr algn="ctr" indent="0" marL="0">
+              <a:buNone/>
+            </a:pPr>
+            <a:r>
+              <a:rPr lang="en-US" sz="1100" b="1" dirty="0">
+                <a:solidFill>
+                  <a:srgbClr val="2D3748"/>
+                </a:solidFill>
+                <a:latin typeface="Arial" pitchFamily="34" charset="0"/>
+                <a:ea typeface="Arial" pitchFamily="34" charset="-122"/>
+                <a:cs typeface="Arial" pitchFamily="34" charset="-120"/>
+              </a:rPr>
+              <a:t>Japón</a:t>
+            </a:r>
+            <a:endParaRPr lang="en-US" sz="1100" dirty="0"/>
+          </a:p>
+        </p:txBody>
+      </p:sp>
+      <p:sp>
+        <p:nvSpPr>
+          <p:cNvPr id="29" name="Text 27"/>
+          <p:cNvSpPr/>
+          <p:nvPr/>
+        </p:nvSpPr>
+        <p:spPr>
+          <a:xfrm>
+            <a:off x="5989320" y="2148840"/>
+            <a:ext cx="1737360" cy="457200"/>
+          </a:xfrm>
+          <a:prstGeom prst="rect">
+            <a:avLst/>
+          </a:prstGeom>
+          <a:noFill/>
+          <a:ln/>
+        </p:spPr>
+        <p:txBody>
+          <a:bodyPr wrap="square" rtlCol="0" anchor="ctr"/>
+          <a:lstStyle/>
+          <a:p>
+            <a:pPr algn="ctr" indent="0" marL="0">
+              <a:buNone/>
+            </a:pPr>
+            <a:r>
+              <a:rPr lang="en-US" sz="2200" b="1" dirty="0">
+                <a:solidFill>
+                  <a:srgbClr val="5B8DB8"/>
+                </a:solidFill>
+                <a:latin typeface="Arial" pitchFamily="34" charset="0"/>
+                <a:ea typeface="Arial" pitchFamily="34" charset="-122"/>
+                <a:cs typeface="Arial" pitchFamily="34" charset="-120"/>
+              </a:rPr>
+              <a:t>36 M</a:t>
+            </a:r>
+            <a:endParaRPr lang="en-US" sz="2200" dirty="0"/>
+          </a:p>
+        </p:txBody>
+      </p:sp>
+      <p:sp>
+        <p:nvSpPr>
+          <p:cNvPr id="30" name="Text 28"/>
+          <p:cNvSpPr/>
+          <p:nvPr/>
+        </p:nvSpPr>
+        <p:spPr>
+          <a:xfrm>
+            <a:off x="5989320" y="2633472"/>
+            <a:ext cx="1737360" cy="411480"/>
+          </a:xfrm>
+          <a:prstGeom prst="rect">
+            <a:avLst/>
+          </a:prstGeom>
+          <a:noFill/>
+          <a:ln/>
+        </p:spPr>
+        <p:txBody>
+          <a:bodyPr wrap="square" rtlCol="0" anchor="ctr"/>
+          <a:lstStyle/>
+          <a:p>
+            <a:pPr algn="ctr" indent="0" marL="0">
+              <a:buNone/>
+            </a:pPr>
+            <a:r>
+              <a:rPr lang="en-US" sz="850" dirty="0">
+                <a:solidFill>
+                  <a:srgbClr val="718096"/>
+                </a:solidFill>
+                <a:latin typeface="Arial" pitchFamily="34" charset="0"/>
+                <a:ea typeface="Arial" pitchFamily="34" charset="-122"/>
+                <a:cs typeface="Arial" pitchFamily="34" charset="-120"/>
+              </a:rPr>
+              <a:t>65+ años · Stat. JP 2023</a:t>
+            </a:r>
+            <a:endParaRPr lang="en-US" sz="850" dirty="0"/>
+          </a:p>
+        </p:txBody>
+      </p:sp>
+      <p:sp>
+        <p:nvSpPr>
+          <p:cNvPr id="31" name="Shape 29"/>
+          <p:cNvSpPr/>
+          <p:nvPr/>
+        </p:nvSpPr>
+        <p:spPr>
+          <a:xfrm>
+            <a:off x="365760" y="3520440"/>
+            <a:ext cx="1737360" cy="1828800"/>
+          </a:xfrm>
+          <a:prstGeom prst="roundRect">
+            <a:avLst>
+              <a:gd name="adj" fmla="val 4211"/>
+            </a:avLst>
+          </a:prstGeom>
+          <a:solidFill>
+            <a:srgbClr val="F0EDE8"/>
+          </a:solidFill>
+          <a:ln w="6350">
+            <a:solidFill>
+              <a:srgbClr val="E2E8F0"/>
+            </a:solidFill>
+            <a:prstDash val="solid"/>
+          </a:ln>
+        </p:spPr>
+      </p:sp>
+      <p:sp>
+        <p:nvSpPr>
+          <p:cNvPr id="32" name="Text 30"/>
+          <p:cNvSpPr/>
+          <p:nvPr/>
+        </p:nvSpPr>
+        <p:spPr>
+          <a:xfrm>
+            <a:off x="365760" y="3593592"/>
+            <a:ext cx="1737360" cy="457200"/>
+          </a:xfrm>
+          <a:prstGeom prst="rect">
+            <a:avLst/>
+          </a:prstGeom>
+          <a:noFill/>
+          <a:ln/>
+        </p:spPr>
+        <p:txBody>
+          <a:bodyPr wrap="square" rtlCol="0" anchor="ctr"/>
+          <a:lstStyle/>
+          <a:p>
+            <a:pPr algn="ctr" indent="0" marL="0">
+              <a:buNone/>
+            </a:pPr>
+            <a:r>
+              <a:rPr lang="en-US" sz="2200" dirty="0">
+                <a:solidFill>
+                  <a:srgbClr val="000000"/>
+                </a:solidFill>
+              </a:rPr>
+              <a:t>🌍</a:t>
+            </a:r>
+            <a:endParaRPr lang="en-US" sz="2200" dirty="0"/>
+          </a:p>
+        </p:txBody>
+      </p:sp>
+      <p:sp>
+        <p:nvSpPr>
+          <p:cNvPr id="33" name="Text 31"/>
+          <p:cNvSpPr/>
+          <p:nvPr/>
+        </p:nvSpPr>
+        <p:spPr>
+          <a:xfrm>
+            <a:off x="365760" y="4023360"/>
+            <a:ext cx="1737360" cy="274320"/>
+          </a:xfrm>
+          <a:prstGeom prst="rect">
+            <a:avLst/>
+          </a:prstGeom>
+          <a:noFill/>
+          <a:ln/>
+        </p:spPr>
+        <p:txBody>
+          <a:bodyPr wrap="square" rtlCol="0" anchor="ctr"/>
+          <a:lstStyle/>
+          <a:p>
+            <a:pPr algn="ctr" indent="0" marL="0">
+              <a:buNone/>
+            </a:pPr>
+            <a:r>
+              <a:rPr lang="en-US" sz="1100" b="1" dirty="0">
+                <a:solidFill>
+                  <a:srgbClr val="2D3748"/>
+                </a:solidFill>
+                <a:latin typeface="Arial" pitchFamily="34" charset="0"/>
+                <a:ea typeface="Arial" pitchFamily="34" charset="-122"/>
+                <a:cs typeface="Arial" pitchFamily="34" charset="-120"/>
+              </a:rPr>
+              <a:t>Global</a:t>
+            </a:r>
+            <a:endParaRPr lang="en-US" sz="1100" dirty="0"/>
+          </a:p>
+        </p:txBody>
+      </p:sp>
+      <p:sp>
+        <p:nvSpPr>
+          <p:cNvPr id="34" name="Text 32"/>
+          <p:cNvSpPr/>
+          <p:nvPr/>
+        </p:nvSpPr>
+        <p:spPr>
+          <a:xfrm>
+            <a:off x="365760" y="4297680"/>
+            <a:ext cx="1737360" cy="457200"/>
+          </a:xfrm>
+          <a:prstGeom prst="rect">
+            <a:avLst/>
+          </a:prstGeom>
+          <a:noFill/>
+          <a:ln/>
+        </p:spPr>
+        <p:txBody>
+          <a:bodyPr wrap="square" rtlCol="0" anchor="ctr"/>
+          <a:lstStyle/>
+          <a:p>
+            <a:pPr algn="ctr" indent="0" marL="0">
+              <a:buNone/>
+            </a:pPr>
+            <a:r>
+              <a:rPr lang="en-US" sz="2200" b="1" dirty="0">
+                <a:solidFill>
+                  <a:srgbClr val="C4786A"/>
+                </a:solidFill>
+                <a:latin typeface="Arial" pitchFamily="34" charset="0"/>
+                <a:ea typeface="Arial" pitchFamily="34" charset="-122"/>
+                <a:cs typeface="Arial" pitchFamily="34" charset="-120"/>
+              </a:rPr>
+              <a:t>770 M</a:t>
+            </a:r>
+            <a:endParaRPr lang="en-US" sz="2200" dirty="0"/>
+          </a:p>
+        </p:txBody>
+      </p:sp>
+      <p:sp>
+        <p:nvSpPr>
+          <p:cNvPr id="35" name="Text 33"/>
+          <p:cNvSpPr/>
+          <p:nvPr/>
+        </p:nvSpPr>
+        <p:spPr>
+          <a:xfrm>
+            <a:off x="365760" y="4782312"/>
+            <a:ext cx="1737360" cy="411480"/>
+          </a:xfrm>
+          <a:prstGeom prst="rect">
+            <a:avLst/>
+          </a:prstGeom>
+          <a:noFill/>
+          <a:ln/>
+        </p:spPr>
+        <p:txBody>
+          <a:bodyPr wrap="square" rtlCol="0" anchor="ctr"/>
+          <a:lstStyle/>
+          <a:p>
+            <a:pPr algn="ctr" indent="0" marL="0">
+              <a:buNone/>
+            </a:pPr>
+            <a:r>
+              <a:rPr lang="en-US" sz="850" dirty="0">
+                <a:solidFill>
+                  <a:srgbClr val="718096"/>
+                </a:solidFill>
+                <a:latin typeface="Arial" pitchFamily="34" charset="0"/>
+                <a:ea typeface="Arial" pitchFamily="34" charset="-122"/>
+                <a:cs typeface="Arial" pitchFamily="34" charset="-120"/>
+              </a:rPr>
+              <a:t>UN WPP 2022 (se estima)</a:t>
+            </a:r>
+            <a:endParaRPr lang="en-US" sz="850" dirty="0"/>
+          </a:p>
+        </p:txBody>
+      </p:sp>
+      <p:sp>
+        <p:nvSpPr>
+          <p:cNvPr id="36" name="Shape 34"/>
+          <p:cNvSpPr/>
+          <p:nvPr/>
+        </p:nvSpPr>
+        <p:spPr>
+          <a:xfrm>
+            <a:off x="2926080" y="3520440"/>
+            <a:ext cx="1737360" cy="1828800"/>
+          </a:xfrm>
+          <a:prstGeom prst="roundRect">
+            <a:avLst>
+              <a:gd name="adj" fmla="val 4211"/>
+            </a:avLst>
+          </a:prstGeom>
+          <a:solidFill>
+            <a:srgbClr val="F0EDE8"/>
+          </a:solidFill>
+          <a:ln w="6350">
+            <a:solidFill>
+              <a:srgbClr val="E2E8F0"/>
+            </a:solidFill>
+            <a:prstDash val="solid"/>
+          </a:ln>
+        </p:spPr>
+      </p:sp>
+      <p:sp>
+        <p:nvSpPr>
+          <p:cNvPr id="37" name="Text 35"/>
+          <p:cNvSpPr/>
+          <p:nvPr/>
+        </p:nvSpPr>
+        <p:spPr>
+          <a:xfrm>
+            <a:off x="2926080" y="3593592"/>
+            <a:ext cx="1737360" cy="457200"/>
+          </a:xfrm>
+          <a:prstGeom prst="rect">
+            <a:avLst/>
+          </a:prstGeom>
+          <a:noFill/>
+          <a:ln/>
+        </p:spPr>
+        <p:txBody>
+          <a:bodyPr wrap="square" rtlCol="0" anchor="ctr"/>
+          <a:lstStyle/>
+          <a:p>
+            <a:pPr algn="ctr" indent="0" marL="0">
+              <a:buNone/>
+            </a:pPr>
+            <a:r>
+              <a:rPr lang="en-US" sz="2200" dirty="0">
+                <a:solidFill>
+                  <a:srgbClr val="000000"/>
+                </a:solidFill>
+              </a:rPr>
+              <a:t>📈</a:t>
+            </a:r>
+            <a:endParaRPr lang="en-US" sz="2200" dirty="0"/>
+          </a:p>
+        </p:txBody>
+      </p:sp>
+      <p:sp>
+        <p:nvSpPr>
+          <p:cNvPr id="38" name="Text 36"/>
+          <p:cNvSpPr/>
+          <p:nvPr/>
+        </p:nvSpPr>
+        <p:spPr>
+          <a:xfrm>
+            <a:off x="2926080" y="4023360"/>
+            <a:ext cx="1737360" cy="274320"/>
+          </a:xfrm>
+          <a:prstGeom prst="rect">
+            <a:avLst/>
+          </a:prstGeom>
+          <a:noFill/>
+          <a:ln/>
+        </p:spPr>
+        <p:txBody>
+          <a:bodyPr wrap="square" rtlCol="0" anchor="ctr"/>
+          <a:lstStyle/>
+          <a:p>
+            <a:pPr algn="ctr" indent="0" marL="0">
+              <a:buNone/>
+            </a:pPr>
+            <a:r>
+              <a:rPr lang="en-US" sz="1100" b="1" dirty="0">
+                <a:solidFill>
+                  <a:srgbClr val="2D3748"/>
+                </a:solidFill>
+                <a:latin typeface="Arial" pitchFamily="34" charset="0"/>
+                <a:ea typeface="Arial" pitchFamily="34" charset="-122"/>
+                <a:cs typeface="Arial" pitchFamily="34" charset="-120"/>
+              </a:rPr>
+              <a:t>Global 2050</a:t>
+            </a:r>
+            <a:endParaRPr lang="en-US" sz="1100" dirty="0"/>
+          </a:p>
+        </p:txBody>
+      </p:sp>
+      <p:sp>
+        <p:nvSpPr>
+          <p:cNvPr id="39" name="Text 37"/>
+          <p:cNvSpPr/>
+          <p:nvPr/>
+        </p:nvSpPr>
+        <p:spPr>
+          <a:xfrm>
+            <a:off x="2926080" y="4297680"/>
+            <a:ext cx="1737360" cy="457200"/>
+          </a:xfrm>
+          <a:prstGeom prst="rect">
+            <a:avLst/>
+          </a:prstGeom>
+          <a:noFill/>
+          <a:ln/>
+        </p:spPr>
+        <p:txBody>
+          <a:bodyPr wrap="square" rtlCol="0" anchor="ctr"/>
+          <a:lstStyle/>
+          <a:p>
+            <a:pPr algn="ctr" indent="0" marL="0">
+              <a:buNone/>
+            </a:pPr>
+            <a:r>
+              <a:rPr lang="en-US" sz="2200" b="1" dirty="0">
+                <a:solidFill>
+                  <a:srgbClr val="C4786A"/>
+                </a:solidFill>
+                <a:latin typeface="Arial" pitchFamily="34" charset="0"/>
+                <a:ea typeface="Arial" pitchFamily="34" charset="-122"/>
+                <a:cs typeface="Arial" pitchFamily="34" charset="-120"/>
+              </a:rPr>
+              <a:t>1,600 M</a:t>
+            </a:r>
+            <a:endParaRPr lang="en-US" sz="2200" dirty="0"/>
+          </a:p>
+        </p:txBody>
+      </p:sp>
+      <p:sp>
+        <p:nvSpPr>
+          <p:cNvPr id="40" name="Text 38"/>
+          <p:cNvSpPr/>
+          <p:nvPr/>
+        </p:nvSpPr>
+        <p:spPr>
+          <a:xfrm>
+            <a:off x="2926080" y="4782312"/>
+            <a:ext cx="1737360" cy="411480"/>
+          </a:xfrm>
+          <a:prstGeom prst="rect">
+            <a:avLst/>
+          </a:prstGeom>
+          <a:noFill/>
+          <a:ln/>
+        </p:spPr>
+        <p:txBody>
+          <a:bodyPr wrap="square" rtlCol="0" anchor="ctr"/>
+          <a:lstStyle/>
+          <a:p>
+            <a:pPr algn="ctr" indent="0" marL="0">
+              <a:buNone/>
+            </a:pPr>
+            <a:r>
+              <a:rPr lang="en-US" sz="850" dirty="0">
+                <a:solidFill>
+                  <a:srgbClr val="718096"/>
+                </a:solidFill>
+                <a:latin typeface="Arial" pitchFamily="34" charset="0"/>
+                <a:ea typeface="Arial" pitchFamily="34" charset="-122"/>
+                <a:cs typeface="Arial" pitchFamily="34" charset="-120"/>
+              </a:rPr>
+              <a:t>Proyección ONU (se estima)</a:t>
+            </a:r>
+            <a:endParaRPr lang="en-US" sz="850" dirty="0"/>
+          </a:p>
+        </p:txBody>
+      </p:sp>
+      <p:sp>
+        <p:nvSpPr>
+          <p:cNvPr id="41" name="Shape 39"/>
+          <p:cNvSpPr/>
+          <p:nvPr/>
+        </p:nvSpPr>
+        <p:spPr>
+          <a:xfrm>
+            <a:off x="365760" y="3383280"/>
+            <a:ext cx="8412480" cy="0"/>
+          </a:xfrm>
+          <a:prstGeom prst="line">
+            <a:avLst/>
+          </a:prstGeom>
+          <a:noFill/>
+          <a:ln w="9525">
+            <a:solidFill>
+              <a:srgbClr val="E2E8F0"/>
+            </a:solidFill>
+            <a:prstDash val="solid"/>
+          </a:ln>
+        </p:spPr>
+      </p:sp>
+      <p:sp>
+        <p:nvSpPr>
+          <p:cNvPr id="42" name="Text 40"/>
+          <p:cNvSpPr/>
+          <p:nvPr/>
+        </p:nvSpPr>
+        <p:spPr>
+          <a:xfrm>
+            <a:off x="4846320" y="3520440"/>
+            <a:ext cx="3931920" cy="1188720"/>
+          </a:xfrm>
+          <a:prstGeom prst="rect">
+            <a:avLst/>
+          </a:prstGeom>
+          <a:noFill/>
+          <a:ln/>
+        </p:spPr>
+        <p:txBody>
+          <a:bodyPr wrap="square" rtlCol="0" anchor="ctr"/>
+          <a:lstStyle/>
+          <a:p>
+            <a:pPr indent="0" marL="0">
+              <a:buNone/>
+            </a:pPr>
+            <a:r>
+              <a:rPr lang="en-US" sz="1400" i="1" dirty="0">
+                <a:solidFill>
+                  <a:srgbClr val="2D3748"/>
+                </a:solidFill>
+                <a:latin typeface="Arial" pitchFamily="34" charset="0"/>
+                <a:ea typeface="Arial" pitchFamily="34" charset="-122"/>
+                <a:cs typeface="Arial" pitchFamily="34" charset="-120"/>
+              </a:rPr>
+              <a:t>Para 2050 habrá casi el doble de la población actual de China viviendo esta realidad.</a:t>
+            </a:r>
+            <a:endParaRPr lang="en-US" sz="1400" dirty="0"/>
+          </a:p>
+        </p:txBody>
+      </p:sp>
+      <p:sp>
+        <p:nvSpPr>
+          <p:cNvPr id="43" name="Text 41"/>
+          <p:cNvSpPr/>
+          <p:nvPr/>
+        </p:nvSpPr>
+        <p:spPr>
+          <a:xfrm>
+            <a:off x="457200" y="6291072"/>
+            <a:ext cx="8375904" cy="201168"/>
+          </a:xfrm>
+          <a:prstGeom prst="rect">
+            <a:avLst/>
+          </a:prstGeom>
+          <a:noFill/>
+          <a:ln/>
+        </p:spPr>
+        <p:txBody>
+          <a:bodyPr wrap="square" rtlCol="0" anchor="ctr"/>
+          <a:lstStyle/>
+          <a:p>
+            <a:pPr algn="l" indent="0" marL="0">
+              <a:buNone/>
+            </a:pPr>
+            <a:r>
+              <a:rPr lang="en-US" dirty="0">
+                <a:solidFill>
+                  <a:srgbClr val="718096"/>
+                </a:solidFill>
+                <a:latin typeface="Arial" pitchFamily="34" charset="0"/>
+                <a:ea typeface="Arial" pitchFamily="34" charset="-122"/>
+                <a:cs typeface="Arial" pitchFamily="34" charset="-120"/>
+              </a:rPr>
+              <a:t>Fuentes: CONAPO · CEPAL · US Census Bureau · Statistics Japan · UN WPP 2022  ·  Cifras internacionales "se estima"</a:t>
+            </a:r>
+            <a:endParaRPr lang="en-US" dirty="0"/>
+          </a:p>
+        </p:txBody>
+      </p:sp>
+    </p:spTree>
+  </p:cSld>
+  <p:clrMapOvr>
+    <a:masterClrMapping/>
+  </p:clrMapOvr>
+</p:sld>
+</file>
+
+<file path=ppt/slides/slide3.xml><?xml version="1.0" encoding="utf-8"?>
+<p:sld xmlns:a="http://schemas.openxmlformats.org/drawingml/2006/main" xmlns:r="http://schemas.openxmlformats.org/officeDocument/2006/relationships" xmlns:p="http://schemas.openxmlformats.org/presentationml/2006/main">
+  <p:cSld name="Slide 3">
+    <p:spTree>
+      <p:nvGrpSpPr>
+        <p:cNvPr id="1" name=""/>
+        <p:cNvGrpSpPr/>
+        <p:nvPr/>
+      </p:nvGrpSpPr>
+      <p:grpSpPr>
+        <a:xfrm>
+          <a:off x="0" y="0"/>
+          <a:ext cx="0" cy="0"/>
+          <a:chOff x="0" y="0"/>
+          <a:chExt cx="0" cy="0"/>
+        </a:xfrm>
+      </p:grpSpPr>
+      <p:sp>
+        <p:nvSpPr>
+          <p:cNvPr id="2" name="Shape 0"/>
+          <p:cNvSpPr/>
+          <p:nvPr/>
+        </p:nvSpPr>
+        <p:spPr>
+          <a:xfrm>
+            <a:off x="0" y="0"/>
+            <a:ext cx="12192000" cy="6858000"/>
+          </a:xfrm>
+          <a:prstGeom prst="rect">
+            <a:avLst/>
+          </a:prstGeom>
+          <a:solidFill>
+            <a:srgbClr val="FAFAF8"/>
+          </a:solidFill>
+          <a:ln w="12700">
+            <a:solidFill>
+              <a:srgbClr val="FAFAF8"/>
+            </a:solidFill>
+            <a:prstDash val="solid"/>
+          </a:ln>
+        </p:spPr>
+      </p:sp>
+      <p:sp>
+        <p:nvSpPr>
+          <p:cNvPr id="3" name="Shape 1"/>
+          <p:cNvSpPr/>
+          <p:nvPr/>
+        </p:nvSpPr>
+        <p:spPr>
+          <a:xfrm>
+            <a:off x="6583680" y="4389120"/>
+            <a:ext cx="3840480" cy="3840480"/>
+          </a:xfrm>
+          <a:prstGeom prst="ellipse">
+            <a:avLst/>
+          </a:prstGeom>
+          <a:solidFill>
+            <a:srgbClr val="A8C4DC">
+              <a:alpha val="18000"/>
+            </a:srgbClr>
+          </a:solidFill>
+          <a:ln w="12700">
+            <a:solidFill>
+              <a:srgbClr val="A8C4DC">
+                <a:alpha val="18000"/>
+              </a:srgbClr>
+            </a:solidFill>
+            <a:prstDash val="solid"/>
+          </a:ln>
+        </p:spPr>
+      </p:sp>
+      <p:sp>
+        <p:nvSpPr>
+          <p:cNvPr id="4" name="Shape 2"/>
+          <p:cNvSpPr/>
+          <p:nvPr/>
+        </p:nvSpPr>
+        <p:spPr>
+          <a:xfrm>
+            <a:off x="-1005840" y="-1097280"/>
+            <a:ext cx="2926080" cy="2926080"/>
+          </a:xfrm>
+          <a:prstGeom prst="ellipse">
+            <a:avLst/>
+          </a:prstGeom>
+          <a:solidFill>
+            <a:srgbClr val="C4786A">
+              <a:alpha val="12000"/>
+            </a:srgbClr>
+          </a:solidFill>
+          <a:ln w="12700">
+            <a:solidFill>
+              <a:srgbClr val="C4786A">
+                <a:alpha val="12000"/>
+              </a:srgbClr>
+            </a:solidFill>
+            <a:prstDash val="solid"/>
+          </a:ln>
+        </p:spPr>
+      </p:sp>
+      <p:sp>
+        <p:nvSpPr>
+          <p:cNvPr id="5" name="Shape 3"/>
+          <p:cNvSpPr/>
+          <p:nvPr/>
+        </p:nvSpPr>
+        <p:spPr>
+          <a:xfrm>
+            <a:off x="8778240" y="1645920"/>
+            <a:ext cx="54864" cy="2194560"/>
+          </a:xfrm>
+          <a:prstGeom prst="rect">
+            <a:avLst/>
+          </a:prstGeom>
+          <a:solidFill>
+            <a:srgbClr val="5B8DB8">
+              <a:alpha val="45000"/>
+            </a:srgbClr>
+          </a:solidFill>
+          <a:ln w="12700">
+            <a:solidFill>
+              <a:srgbClr val="5B8DB8">
+                <a:alpha val="45000"/>
+              </a:srgbClr>
+            </a:solidFill>
+            <a:prstDash val="solid"/>
+          </a:ln>
+        </p:spPr>
+      </p:sp>
+      <p:sp>
+        <p:nvSpPr>
+          <p:cNvPr id="6" name="Shape 4"/>
+          <p:cNvSpPr/>
+          <p:nvPr/>
+        </p:nvSpPr>
+        <p:spPr>
+          <a:xfrm>
+            <a:off x="0" y="0"/>
+            <a:ext cx="12192000" cy="54864"/>
+          </a:xfrm>
+          <a:prstGeom prst="rect">
+            <a:avLst/>
+          </a:prstGeom>
+          <a:solidFill>
+            <a:srgbClr val="5B8DB8"/>
+          </a:solidFill>
+          <a:ln w="12700">
+            <a:solidFill>
+              <a:srgbClr val="5B8DB8"/>
+            </a:solidFill>
+            <a:prstDash val="solid"/>
+          </a:ln>
+        </p:spPr>
+      </p:sp>
+      <p:sp>
+        <p:nvSpPr>
+          <p:cNvPr id="7" name="Shape 5"/>
+          <p:cNvSpPr/>
+          <p:nvPr/>
+        </p:nvSpPr>
+        <p:spPr>
+          <a:xfrm>
+            <a:off x="0" y="6528816"/>
+            <a:ext cx="12192000" cy="54864"/>
+          </a:xfrm>
+          <a:prstGeom prst="rect">
+            <a:avLst/>
+          </a:prstGeom>
+          <a:solidFill>
+            <a:srgbClr val="C4786A"/>
+          </a:solidFill>
+          <a:ln w="12700">
+            <a:solidFill>
+              <a:srgbClr val="C4786A"/>
+            </a:solidFill>
+            <a:prstDash val="solid"/>
+          </a:ln>
+        </p:spPr>
+      </p:sp>
+      <p:sp>
+        <p:nvSpPr>
+          <p:cNvPr id="8" name="Text 6"/>
+          <p:cNvSpPr/>
+          <p:nvPr/>
+        </p:nvSpPr>
+        <p:spPr>
+          <a:xfrm>
+            <a:off x="3657600" y="640080"/>
+            <a:ext cx="1737360" cy="1188720"/>
+          </a:xfrm>
+          <a:prstGeom prst="rect">
+            <a:avLst/>
+          </a:prstGeom>
+          <a:noFill/>
+          <a:ln/>
+        </p:spPr>
+        <p:txBody>
+          <a:bodyPr wrap="square" rtlCol="0" anchor="ctr"/>
+          <a:lstStyle/>
+          <a:p>
+            <a:pPr algn="ctr" indent="0" marL="0">
+              <a:buNone/>
+            </a:pPr>
+            <a:r>
+              <a:rPr lang="en-US" sz="6000" dirty="0">
+                <a:solidFill>
+                  <a:srgbClr val="000000"/>
+                </a:solidFill>
+              </a:rPr>
+              <a:t>🤝</a:t>
+            </a:r>
+            <a:endParaRPr lang="en-US" sz="6000" dirty="0"/>
+          </a:p>
+        </p:txBody>
+      </p:sp>
+      <p:sp>
+        <p:nvSpPr>
+          <p:cNvPr id="9" name="Text 7"/>
+          <p:cNvSpPr/>
+          <p:nvPr/>
+        </p:nvSpPr>
+        <p:spPr>
+          <a:xfrm>
+            <a:off x="457200" y="1828800"/>
+            <a:ext cx="8375904" cy="548640"/>
+          </a:xfrm>
+          <a:prstGeom prst="rect">
+            <a:avLst/>
+          </a:prstGeom>
+          <a:noFill/>
+          <a:ln/>
+        </p:spPr>
+        <p:txBody>
+          <a:bodyPr wrap="square" rtlCol="0" anchor="ctr"/>
+          <a:lstStyle/>
+          <a:p>
+            <a:pPr algn="ctr" indent="0" marL="0">
+              <a:buNone/>
+            </a:pPr>
+            <a:r>
+              <a:rPr lang="en-US" b="1" dirty="0">
+                <a:solidFill>
+                  <a:srgbClr val="2D3748"/>
+                </a:solidFill>
+                <a:latin typeface="Arial" pitchFamily="34" charset="0"/>
+                <a:ea typeface="Arial" pitchFamily="34" charset="-122"/>
+                <a:cs typeface="Arial" pitchFamily="34" charset="-120"/>
+              </a:rPr>
+              <a:t>El momento de confianza</a:t>
+            </a:r>
+            <a:endParaRPr lang="en-US" dirty="0"/>
+          </a:p>
+        </p:txBody>
+      </p:sp>
+      <p:sp>
+        <p:nvSpPr>
+          <p:cNvPr id="10" name="Shape 8"/>
+          <p:cNvSpPr/>
+          <p:nvPr/>
+        </p:nvSpPr>
+        <p:spPr>
+          <a:xfrm>
+            <a:off x="2743200" y="2468880"/>
+            <a:ext cx="3474720" cy="0"/>
+          </a:xfrm>
+          <a:prstGeom prst="line">
+            <a:avLst/>
+          </a:prstGeom>
+          <a:noFill/>
+          <a:ln w="25400">
+            <a:solidFill>
+              <a:srgbClr val="5B8DB8"/>
+            </a:solidFill>
+            <a:prstDash val="solid"/>
+          </a:ln>
+        </p:spPr>
+      </p:sp>
+      <p:sp>
+        <p:nvSpPr>
+          <p:cNvPr id="11" name="Text 9"/>
+          <p:cNvSpPr/>
+          <p:nvPr/>
+        </p:nvSpPr>
+        <p:spPr>
+          <a:xfrm>
+            <a:off x="731520" y="2697480"/>
+            <a:ext cx="7498080" cy="1463040"/>
+          </a:xfrm>
+          <a:prstGeom prst="rect">
+            <a:avLst/>
+          </a:prstGeom>
+          <a:noFill/>
+          <a:ln/>
+        </p:spPr>
+        <p:txBody>
+          <a:bodyPr wrap="square" rtlCol="0" anchor="ctr"/>
+          <a:lstStyle/>
+          <a:p>
+            <a:pPr algn="ctr" indent="0" marL="0">
+              <a:lnSpc>
+                <a:spcPct val="140000"/>
+              </a:lnSpc>
+              <a:buNone/>
+            </a:pPr>
+            <a:r>
+              <a:rPr lang="en-US" sz="2000" dirty="0">
+                <a:solidFill>
+                  <a:srgbClr val="2D3748"/>
+                </a:solidFill>
+                <a:latin typeface="Arial" pitchFamily="34" charset="0"/>
+                <a:ea typeface="Arial" pitchFamily="34" charset="-122"/>
+                <a:cs typeface="Arial" pitchFamily="34" charset="-120"/>
+              </a:rPr>
+              <a:t>Cuando llevas a ese familiar, a ese ser querido, a una residencia,</a:t>
+            </a:r>
+            <a:endParaRPr lang="en-US" sz="2000" dirty="0"/>
+          </a:p>
+          <a:p>
+            <a:pPr algn="ctr" indent="0" marL="0">
+              <a:lnSpc>
+                <a:spcPct val="140000"/>
+              </a:lnSpc>
+              <a:buNone/>
+            </a:pPr>
+            <a:r>
+              <a:rPr lang="en-US" sz="2000" dirty="0">
+                <a:solidFill>
+                  <a:srgbClr val="2D3748"/>
+                </a:solidFill>
+                <a:latin typeface="Arial" pitchFamily="34" charset="0"/>
+                <a:ea typeface="Arial" pitchFamily="34" charset="-122"/>
+                <a:cs typeface="Arial" pitchFamily="34" charset="-120"/>
+              </a:rPr>
+              <a:t>le estás confiando lo más valioso que tienes —</a:t>
+            </a:r>
+            <a:endParaRPr lang="en-US" sz="2000" dirty="0"/>
+          </a:p>
+          <a:p>
+            <a:pPr algn="ctr" indent="0" marL="0">
+              <a:lnSpc>
+                <a:spcPct val="140000"/>
+              </a:lnSpc>
+              <a:buNone/>
+            </a:pPr>
+            <a:r>
+              <a:rPr lang="en-US" sz="2000" dirty="0">
+                <a:solidFill>
+                  <a:srgbClr val="2D3748"/>
+                </a:solidFill>
+                <a:latin typeface="Arial" pitchFamily="34" charset="0"/>
+                <a:ea typeface="Arial" pitchFamily="34" charset="-122"/>
+                <a:cs typeface="Arial" pitchFamily="34" charset="-120"/>
+              </a:rPr>
+              <a:t>su tiempo, su dignidad, su seguridad.</a:t>
+            </a:r>
+            <a:endParaRPr lang="en-US" sz="2000" dirty="0"/>
+          </a:p>
+        </p:txBody>
+      </p:sp>
+      <p:sp>
+        <p:nvSpPr>
+          <p:cNvPr id="12" name="Shape 10"/>
+          <p:cNvSpPr/>
+          <p:nvPr/>
+        </p:nvSpPr>
+        <p:spPr>
+          <a:xfrm>
+            <a:off x="1280160" y="4434840"/>
+            <a:ext cx="2011680" cy="685800"/>
+          </a:xfrm>
+          <a:prstGeom prst="roundRect">
+            <a:avLst>
+              <a:gd name="adj" fmla="val 10667"/>
+            </a:avLst>
+          </a:prstGeom>
+          <a:solidFill>
+            <a:srgbClr val="F0EDE8"/>
+          </a:solidFill>
+          <a:ln w="6350">
+            <a:solidFill>
+              <a:srgbClr val="E2E8F0"/>
+            </a:solidFill>
+            <a:prstDash val="solid"/>
+          </a:ln>
+        </p:spPr>
+      </p:sp>
+      <p:sp>
+        <p:nvSpPr>
+          <p:cNvPr id="13" name="Text 11"/>
+          <p:cNvSpPr/>
+          <p:nvPr/>
+        </p:nvSpPr>
+        <p:spPr>
+          <a:xfrm>
+            <a:off x="1280160" y="4434840"/>
+            <a:ext cx="2011680" cy="685800"/>
+          </a:xfrm>
+          <a:prstGeom prst="rect">
+            <a:avLst/>
+          </a:prstGeom>
+          <a:noFill/>
+          <a:ln/>
+        </p:spPr>
+        <p:txBody>
+          <a:bodyPr wrap="square" rtlCol="0" anchor="ctr"/>
+          <a:lstStyle/>
+          <a:p>
+            <a:pPr algn="ctr" indent="0" marL="0">
+              <a:buNone/>
+            </a:pPr>
+            <a:r>
+              <a:rPr lang="en-US" sz="1600" b="1" dirty="0">
+                <a:solidFill>
+                  <a:srgbClr val="5B8DB8"/>
+                </a:solidFill>
+                <a:latin typeface="Arial" pitchFamily="34" charset="0"/>
+                <a:ea typeface="Arial" pitchFamily="34" charset="-122"/>
+                <a:cs typeface="Arial" pitchFamily="34" charset="-120"/>
+              </a:rPr>
+              <a:t>Tiempo</a:t>
+            </a:r>
+            <a:endParaRPr lang="en-US" sz="1600" dirty="0"/>
+          </a:p>
+        </p:txBody>
+      </p:sp>
+      <p:sp>
+        <p:nvSpPr>
+          <p:cNvPr id="14" name="Shape 12"/>
+          <p:cNvSpPr/>
+          <p:nvPr/>
+        </p:nvSpPr>
+        <p:spPr>
+          <a:xfrm>
+            <a:off x="3749040" y="4434840"/>
+            <a:ext cx="2011680" cy="685800"/>
+          </a:xfrm>
+          <a:prstGeom prst="roundRect">
+            <a:avLst>
+              <a:gd name="adj" fmla="val 10667"/>
+            </a:avLst>
+          </a:prstGeom>
+          <a:solidFill>
+            <a:srgbClr val="F0EDE8"/>
+          </a:solidFill>
+          <a:ln w="6350">
+            <a:solidFill>
+              <a:srgbClr val="E2E8F0"/>
+            </a:solidFill>
+            <a:prstDash val="solid"/>
+          </a:ln>
+        </p:spPr>
+      </p:sp>
+      <p:sp>
+        <p:nvSpPr>
+          <p:cNvPr id="15" name="Text 13"/>
+          <p:cNvSpPr/>
+          <p:nvPr/>
+        </p:nvSpPr>
+        <p:spPr>
+          <a:xfrm>
+            <a:off x="3749040" y="4434840"/>
+            <a:ext cx="2011680" cy="685800"/>
+          </a:xfrm>
+          <a:prstGeom prst="rect">
+            <a:avLst/>
+          </a:prstGeom>
+          <a:noFill/>
+          <a:ln/>
+        </p:spPr>
+        <p:txBody>
+          <a:bodyPr wrap="square" rtlCol="0" anchor="ctr"/>
+          <a:lstStyle/>
+          <a:p>
+            <a:pPr algn="ctr" indent="0" marL="0">
+              <a:buNone/>
+            </a:pPr>
+            <a:r>
+              <a:rPr lang="en-US" sz="1600" b="1" dirty="0">
+                <a:solidFill>
+                  <a:srgbClr val="5B8DB8"/>
+                </a:solidFill>
+                <a:latin typeface="Arial" pitchFamily="34" charset="0"/>
+                <a:ea typeface="Arial" pitchFamily="34" charset="-122"/>
+                <a:cs typeface="Arial" pitchFamily="34" charset="-120"/>
+              </a:rPr>
+              <a:t>Dignidad</a:t>
+            </a:r>
+            <a:endParaRPr lang="en-US" sz="1600" dirty="0"/>
+          </a:p>
+        </p:txBody>
+      </p:sp>
+      <p:sp>
+        <p:nvSpPr>
+          <p:cNvPr id="16" name="Shape 14"/>
+          <p:cNvSpPr/>
+          <p:nvPr/>
+        </p:nvSpPr>
+        <p:spPr>
+          <a:xfrm>
+            <a:off x="6217920" y="4434840"/>
+            <a:ext cx="2011680" cy="685800"/>
+          </a:xfrm>
+          <a:prstGeom prst="roundRect">
+            <a:avLst>
+              <a:gd name="adj" fmla="val 10667"/>
+            </a:avLst>
+          </a:prstGeom>
+          <a:solidFill>
+            <a:srgbClr val="F0EDE8"/>
+          </a:solidFill>
+          <a:ln w="6350">
+            <a:solidFill>
+              <a:srgbClr val="E2E8F0"/>
+            </a:solidFill>
+            <a:prstDash val="solid"/>
+          </a:ln>
+        </p:spPr>
+      </p:sp>
+      <p:sp>
+        <p:nvSpPr>
+          <p:cNvPr id="17" name="Text 15"/>
+          <p:cNvSpPr/>
+          <p:nvPr/>
+        </p:nvSpPr>
+        <p:spPr>
+          <a:xfrm>
+            <a:off x="6217920" y="4434840"/>
+            <a:ext cx="2011680" cy="685800"/>
+          </a:xfrm>
+          <a:prstGeom prst="rect">
+            <a:avLst/>
+          </a:prstGeom>
+          <a:noFill/>
+          <a:ln/>
+        </p:spPr>
+        <p:txBody>
+          <a:bodyPr wrap="square" rtlCol="0" anchor="ctr"/>
+          <a:lstStyle/>
+          <a:p>
+            <a:pPr algn="ctr" indent="0" marL="0">
+              <a:buNone/>
+            </a:pPr>
+            <a:r>
+              <a:rPr lang="en-US" sz="1600" b="1" dirty="0">
+                <a:solidFill>
+                  <a:srgbClr val="5B8DB8"/>
+                </a:solidFill>
+                <a:latin typeface="Arial" pitchFamily="34" charset="0"/>
+                <a:ea typeface="Arial" pitchFamily="34" charset="-122"/>
+                <a:cs typeface="Arial" pitchFamily="34" charset="-120"/>
+              </a:rPr>
+              <a:t>Seguridad</a:t>
+            </a:r>
+            <a:endParaRPr lang="en-US" sz="1600" dirty="0"/>
+          </a:p>
+        </p:txBody>
+      </p:sp>
+      <p:sp>
+        <p:nvSpPr>
+          <p:cNvPr id="18" name="Text 16"/>
+          <p:cNvSpPr/>
+          <p:nvPr/>
+        </p:nvSpPr>
+        <p:spPr>
+          <a:xfrm>
+            <a:off x="457200" y="6291072"/>
+            <a:ext cx="8375904" cy="201168"/>
+          </a:xfrm>
+          <a:prstGeom prst="rect">
+            <a:avLst/>
+          </a:prstGeom>
+          <a:noFill/>
+          <a:ln/>
+        </p:spPr>
+        <p:txBody>
+          <a:bodyPr wrap="square" rtlCol="0" anchor="ctr"/>
+          <a:lstStyle/>
+          <a:p>
+            <a:pPr algn="ctr" indent="0" marL="0">
+              <a:buNone/>
+            </a:pPr>
+            <a:r>
+              <a:rPr lang="en-US" dirty="0">
+                <a:solidFill>
+                  <a:srgbClr val="718096"/>
+                </a:solidFill>
+                <a:latin typeface="Arial" pitchFamily="34" charset="0"/>
+                <a:ea typeface="Arial" pitchFamily="34" charset="-122"/>
+                <a:cs typeface="Arial" pitchFamily="34" charset="-120"/>
+              </a:rPr>
+              <a:t>MVP operacional · No dispositivo médico · Datos ficticios</a:t>
+            </a:r>
+            <a:endParaRPr lang="en-US" dirty="0"/>
+          </a:p>
+        </p:txBody>
+      </p:sp>
+    </p:spTree>
+  </p:cSld>
+  <p:clrMapOvr>
+    <a:masterClrMapping/>
+  </p:clrMapOvr>
+</p:sld>
+</file>
+
+<file path=ppt/slides/slide4.xml><?xml version="1.0" encoding="utf-8"?>
+<p:sld xmlns:a="http://schemas.openxmlformats.org/drawingml/2006/main" xmlns:r="http://schemas.openxmlformats.org/officeDocument/2006/relationships" xmlns:p="http://schemas.openxmlformats.org/presentationml/2006/main">
+  <p:cSld name="Slide 4">
+    <p:spTree>
+      <p:nvGrpSpPr>
+        <p:cNvPr id="1" name=""/>
+        <p:cNvGrpSpPr/>
+        <p:nvPr/>
+      </p:nvGrpSpPr>
+      <p:grpSpPr>
+        <a:xfrm>
+          <a:off x="0" y="0"/>
+          <a:ext cx="0" cy="0"/>
+          <a:chOff x="0" y="0"/>
+          <a:chExt cx="0" cy="0"/>
+        </a:xfrm>
+      </p:grpSpPr>
+      <p:sp>
+        <p:nvSpPr>
+          <p:cNvPr id="2" name="Shape 0"/>
+          <p:cNvSpPr/>
+          <p:nvPr/>
+        </p:nvSpPr>
+        <p:spPr>
+          <a:xfrm>
+            <a:off x="0" y="0"/>
+            <a:ext cx="12192000" cy="6858000"/>
+          </a:xfrm>
+          <a:prstGeom prst="rect">
+            <a:avLst/>
+          </a:prstGeom>
+          <a:solidFill>
+            <a:srgbClr val="FAFAF8"/>
+          </a:solidFill>
+          <a:ln w="12700">
+            <a:solidFill>
+              <a:srgbClr val="FAFAF8"/>
+            </a:solidFill>
+            <a:prstDash val="solid"/>
+          </a:ln>
+        </p:spPr>
+      </p:sp>
+      <p:sp>
+        <p:nvSpPr>
+          <p:cNvPr id="3" name="Shape 1"/>
+          <p:cNvSpPr/>
+          <p:nvPr/>
+        </p:nvSpPr>
+        <p:spPr>
+          <a:xfrm>
+            <a:off x="7132320" y="-1371600"/>
+            <a:ext cx="3474720" cy="3474720"/>
+          </a:xfrm>
+          <a:prstGeom prst="ellipse">
+            <a:avLst/>
+          </a:prstGeom>
+          <a:solidFill>
+            <a:srgbClr val="7BA68A">
+              <a:alpha val="16000"/>
+            </a:srgbClr>
+          </a:solidFill>
+          <a:ln w="12700">
+            <a:solidFill>
+              <a:srgbClr val="7BA68A">
+                <a:alpha val="16000"/>
+              </a:srgbClr>
+            </a:solidFill>
+            <a:prstDash val="solid"/>
+          </a:ln>
+        </p:spPr>
+      </p:sp>
+      <p:sp>
+        <p:nvSpPr>
+          <p:cNvPr id="4" name="Shape 2"/>
+          <p:cNvSpPr/>
+          <p:nvPr/>
+        </p:nvSpPr>
+        <p:spPr>
+          <a:xfrm>
+            <a:off x="-365760" y="5303520"/>
+            <a:ext cx="2011680" cy="2011680"/>
+          </a:xfrm>
+          <a:prstGeom prst="ellipse">
+            <a:avLst/>
+          </a:prstGeom>
+          <a:solidFill>
+            <a:srgbClr val="A8C4DC">
+              <a:alpha val="20000"/>
+            </a:srgbClr>
+          </a:solidFill>
+          <a:ln w="12700">
+            <a:solidFill>
+              <a:srgbClr val="A8C4DC">
+                <a:alpha val="20000"/>
+              </a:srgbClr>
+            </a:solidFill>
+            <a:prstDash val="solid"/>
+          </a:ln>
+        </p:spPr>
+      </p:sp>
+      <p:sp>
+        <p:nvSpPr>
+          <p:cNvPr id="5" name="Shape 3"/>
+          <p:cNvSpPr/>
+          <p:nvPr/>
+        </p:nvSpPr>
+        <p:spPr>
+          <a:xfrm rot="-1080000">
+            <a:off x="274320" y="5943600"/>
+            <a:ext cx="2286000" cy="0"/>
+          </a:xfrm>
+          <a:prstGeom prst="line">
+            <a:avLst/>
+          </a:prstGeom>
+          <a:noFill/>
+          <a:ln w="12700">
+            <a:solidFill>
+              <a:srgbClr val="E2E8F0"/>
+            </a:solidFill>
+            <a:prstDash val="solid"/>
+          </a:ln>
+        </p:spPr>
+      </p:sp>
+      <p:sp>
+        <p:nvSpPr>
+          <p:cNvPr id="6" name="Shape 4"/>
+          <p:cNvSpPr/>
+          <p:nvPr/>
+        </p:nvSpPr>
+        <p:spPr>
+          <a:xfrm>
+            <a:off x="0" y="0"/>
+            <a:ext cx="12192000" cy="54864"/>
+          </a:xfrm>
+          <a:prstGeom prst="rect">
+            <a:avLst/>
+          </a:prstGeom>
+          <a:solidFill>
+            <a:srgbClr val="5B8DB8"/>
+          </a:solidFill>
+          <a:ln w="12700">
+            <a:solidFill>
+              <a:srgbClr val="5B8DB8"/>
+            </a:solidFill>
+            <a:prstDash val="solid"/>
+          </a:ln>
+        </p:spPr>
+      </p:sp>
+      <p:sp>
+        <p:nvSpPr>
+          <p:cNvPr id="7" name="Shape 5"/>
+          <p:cNvSpPr/>
+          <p:nvPr/>
+        </p:nvSpPr>
+        <p:spPr>
+          <a:xfrm>
+            <a:off x="0" y="6528816"/>
+            <a:ext cx="12192000" cy="54864"/>
+          </a:xfrm>
+          <a:prstGeom prst="rect">
+            <a:avLst/>
+          </a:prstGeom>
+          <a:solidFill>
+            <a:srgbClr val="C4786A"/>
+          </a:solidFill>
+          <a:ln w="12700">
+            <a:solidFill>
+              <a:srgbClr val="C4786A"/>
+            </a:solidFill>
+            <a:prstDash val="solid"/>
+          </a:ln>
+        </p:spPr>
+      </p:sp>
+      <p:sp>
+        <p:nvSpPr>
+          <p:cNvPr id="8" name="Text 6"/>
+          <p:cNvSpPr/>
+          <p:nvPr/>
+        </p:nvSpPr>
+        <p:spPr>
+          <a:xfrm>
+            <a:off x="457200" y="228600"/>
+            <a:ext cx="8375904" cy="502920"/>
+          </a:xfrm>
+          <a:prstGeom prst="rect">
+            <a:avLst/>
+          </a:prstGeom>
+          <a:noFill/>
+          <a:ln/>
+        </p:spPr>
+        <p:txBody>
+          <a:bodyPr wrap="square" rtlCol="0" anchor="ctr"/>
+          <a:lstStyle/>
+          <a:p>
+            <a:pPr indent="0" marL="0">
+              <a:buNone/>
+            </a:pPr>
+            <a:r>
+              <a:rPr lang="en-US" b="1" dirty="0">
+                <a:solidFill>
+                  <a:srgbClr val="2D3748"/>
+                </a:solidFill>
+                <a:latin typeface="Arial" pitchFamily="34" charset="0"/>
+                <a:ea typeface="Arial" pitchFamily="34" charset="-122"/>
+                <a:cs typeface="Arial" pitchFamily="34" charset="-120"/>
+              </a:rPr>
+              <a:t>⚠️  Fallo operativo</a:t>
+            </a:r>
+            <a:endParaRPr lang="en-US" dirty="0"/>
+          </a:p>
+        </p:txBody>
+      </p:sp>
+      <p:sp>
+        <p:nvSpPr>
+          <p:cNvPr id="9" name="Text 7"/>
+          <p:cNvSpPr/>
+          <p:nvPr/>
+        </p:nvSpPr>
+        <p:spPr>
+          <a:xfrm>
+            <a:off x="457200" y="731520"/>
+            <a:ext cx="8375904" cy="320040"/>
+          </a:xfrm>
+          <a:prstGeom prst="rect">
+            <a:avLst/>
+          </a:prstGeom>
+          <a:noFill/>
+          <a:ln/>
+        </p:spPr>
+        <p:txBody>
+          <a:bodyPr wrap="square" rtlCol="0" anchor="ctr"/>
+          <a:lstStyle/>
+          <a:p>
+            <a:pPr indent="0" marL="0">
+              <a:buNone/>
+            </a:pPr>
+            <a:r>
+              <a:rPr lang="en-US" b="1" dirty="0">
+                <a:solidFill>
+                  <a:srgbClr val="5B8DB8"/>
+                </a:solidFill>
+                <a:latin typeface="Arial" pitchFamily="34" charset="0"/>
+                <a:ea typeface="Arial" pitchFamily="34" charset="-122"/>
+                <a:cs typeface="Arial" pitchFamily="34" charset="-120"/>
+              </a:rPr>
+              <a:t>Cuando el cuidado ocurre — o no ocurre — y nadie lo sabe</a:t>
+            </a:r>
+            <a:endParaRPr lang="en-US" dirty="0"/>
+          </a:p>
+        </p:txBody>
+      </p:sp>
+      <p:sp>
+        <p:nvSpPr>
+          <p:cNvPr id="10" name="Shape 8"/>
+          <p:cNvSpPr/>
+          <p:nvPr/>
+        </p:nvSpPr>
+        <p:spPr>
+          <a:xfrm>
+            <a:off x="457200" y="1097280"/>
+            <a:ext cx="8375904" cy="0"/>
+          </a:xfrm>
+          <a:prstGeom prst="line">
+            <a:avLst/>
+          </a:prstGeom>
+          <a:noFill/>
+          <a:ln w="12700">
+            <a:solidFill>
+              <a:srgbClr val="E2E8F0"/>
+            </a:solidFill>
+            <a:prstDash val="solid"/>
+          </a:ln>
+        </p:spPr>
+      </p:sp>
+      <p:sp>
+        <p:nvSpPr>
+          <p:cNvPr id="11" name="Shape 9"/>
+          <p:cNvSpPr/>
+          <p:nvPr/>
+        </p:nvSpPr>
+        <p:spPr>
+          <a:xfrm>
+            <a:off x="365760" y="1325880"/>
+            <a:ext cx="1828800" cy="1737360"/>
+          </a:xfrm>
+          <a:prstGeom prst="roundRect">
+            <a:avLst>
+              <a:gd name="adj" fmla="val 5263"/>
+            </a:avLst>
+          </a:prstGeom>
+          <a:solidFill>
+            <a:srgbClr val="A8C4DC"/>
+          </a:solidFill>
+          <a:ln w="6350">
+            <a:solidFill>
+              <a:srgbClr val="E2E8F0"/>
+            </a:solidFill>
+            <a:prstDash val="solid"/>
+          </a:ln>
+        </p:spPr>
+      </p:sp>
+      <p:sp>
+        <p:nvSpPr>
+          <p:cNvPr id="12" name="Text 10"/>
+          <p:cNvSpPr/>
+          <p:nvPr/>
+        </p:nvSpPr>
+        <p:spPr>
+          <a:xfrm>
+            <a:off x="365760" y="1417320"/>
+            <a:ext cx="1828800" cy="548640"/>
+          </a:xfrm>
+          <a:prstGeom prst="rect">
+            <a:avLst/>
+          </a:prstGeom>
+          <a:noFill/>
+          <a:ln/>
+        </p:spPr>
+        <p:txBody>
+          <a:bodyPr wrap="square" rtlCol="0" anchor="ctr"/>
+          <a:lstStyle/>
+          <a:p>
+            <a:pPr algn="ctr" indent="0" marL="0">
+              <a:buNone/>
+            </a:pPr>
+            <a:r>
+              <a:rPr lang="en-US" sz="2600" dirty="0">
+                <a:solidFill>
+                  <a:srgbClr val="000000"/>
+                </a:solidFill>
+              </a:rPr>
+              <a:t>📅</a:t>
+            </a:r>
+            <a:endParaRPr lang="en-US" sz="2600" dirty="0"/>
+          </a:p>
+        </p:txBody>
+      </p:sp>
+      <p:sp>
+        <p:nvSpPr>
+          <p:cNvPr id="13" name="Text 11"/>
+          <p:cNvSpPr/>
+          <p:nvPr/>
+        </p:nvSpPr>
+        <p:spPr>
+          <a:xfrm>
+            <a:off x="365760" y="2011680"/>
+            <a:ext cx="1828800" cy="822960"/>
+          </a:xfrm>
+          <a:prstGeom prst="rect">
+            <a:avLst/>
+          </a:prstGeom>
+          <a:noFill/>
+          <a:ln/>
+        </p:spPr>
+        <p:txBody>
+          <a:bodyPr wrap="square" rtlCol="0" anchor="ctr"/>
+          <a:lstStyle/>
+          <a:p>
+            <a:pPr algn="ctr" indent="0" marL="0">
+              <a:buNone/>
+            </a:pPr>
+            <a:r>
+              <a:rPr lang="en-US" sz="1200" dirty="0">
+                <a:solidFill>
+                  <a:srgbClr val="2D3748"/>
+                </a:solidFill>
+                <a:latin typeface="Arial" pitchFamily="34" charset="0"/>
+                <a:ea typeface="Arial" pitchFamily="34" charset="-122"/>
+                <a:cs typeface="Arial" pitchFamily="34" charset="-120"/>
+              </a:rPr>
+              <a:t>Ronda</a:t>
+            </a:r>
+            <a:endParaRPr lang="en-US" sz="1200" dirty="0"/>
+          </a:p>
+          <a:p>
+            <a:pPr algn="ctr" indent="0" marL="0">
+              <a:buNone/>
+            </a:pPr>
+            <a:r>
+              <a:rPr lang="en-US" sz="1200" dirty="0">
+                <a:solidFill>
+                  <a:srgbClr val="2D3748"/>
+                </a:solidFill>
+                <a:latin typeface="Arial" pitchFamily="34" charset="0"/>
+                <a:ea typeface="Arial" pitchFamily="34" charset="-122"/>
+                <a:cs typeface="Arial" pitchFamily="34" charset="-120"/>
+              </a:rPr>
+              <a:t>programada</a:t>
+            </a:r>
+            <a:endParaRPr lang="en-US" sz="1200" dirty="0"/>
+          </a:p>
+        </p:txBody>
+      </p:sp>
+      <p:sp>
+        <p:nvSpPr>
+          <p:cNvPr id="14" name="Text 12"/>
+          <p:cNvSpPr/>
+          <p:nvPr/>
+        </p:nvSpPr>
+        <p:spPr>
+          <a:xfrm>
+            <a:off x="2194560" y="1737360"/>
+            <a:ext cx="292608" cy="457200"/>
+          </a:xfrm>
+          <a:prstGeom prst="rect">
+            <a:avLst/>
+          </a:prstGeom>
+          <a:noFill/>
+          <a:ln/>
+        </p:spPr>
+        <p:txBody>
+          <a:bodyPr wrap="square" rtlCol="0" anchor="ctr"/>
+          <a:lstStyle/>
+          <a:p>
+            <a:pPr algn="ctr" indent="0" marL="0">
+              <a:buNone/>
+            </a:pPr>
+            <a:r>
+              <a:rPr lang="en-US" sz="2000" dirty="0">
+                <a:solidFill>
+                  <a:srgbClr val="718096"/>
+                </a:solidFill>
+                <a:latin typeface="Arial" pitchFamily="34" charset="0"/>
+                <a:ea typeface="Arial" pitchFamily="34" charset="-122"/>
+                <a:cs typeface="Arial" pitchFamily="34" charset="-120"/>
+              </a:rPr>
+              <a:t>→</a:t>
+            </a:r>
+            <a:endParaRPr lang="en-US" sz="2000" dirty="0"/>
+          </a:p>
+        </p:txBody>
+      </p:sp>
+      <p:sp>
+        <p:nvSpPr>
+          <p:cNvPr id="15" name="Shape 13"/>
+          <p:cNvSpPr/>
+          <p:nvPr/>
+        </p:nvSpPr>
+        <p:spPr>
+          <a:xfrm>
+            <a:off x="2487168" y="1325880"/>
+            <a:ext cx="1828800" cy="1737360"/>
+          </a:xfrm>
+          <a:prstGeom prst="roundRect">
+            <a:avLst>
+              <a:gd name="adj" fmla="val 5263"/>
+            </a:avLst>
+          </a:prstGeom>
+          <a:solidFill>
+            <a:srgbClr val="F0EDE8"/>
+          </a:solidFill>
+          <a:ln w="6350">
+            <a:solidFill>
+              <a:srgbClr val="E2E8F0"/>
+            </a:solidFill>
+            <a:prstDash val="solid"/>
+          </a:ln>
+        </p:spPr>
+      </p:sp>
+      <p:sp>
+        <p:nvSpPr>
+          <p:cNvPr id="16" name="Text 14"/>
+          <p:cNvSpPr/>
+          <p:nvPr/>
+        </p:nvSpPr>
+        <p:spPr>
+          <a:xfrm>
+            <a:off x="2487168" y="1417320"/>
+            <a:ext cx="1828800" cy="548640"/>
+          </a:xfrm>
+          <a:prstGeom prst="rect">
+            <a:avLst/>
+          </a:prstGeom>
+          <a:noFill/>
+          <a:ln/>
+        </p:spPr>
+        <p:txBody>
+          <a:bodyPr wrap="square" rtlCol="0" anchor="ctr"/>
+          <a:lstStyle/>
+          <a:p>
+            <a:pPr algn="ctr" indent="0" marL="0">
+              <a:buNone/>
+            </a:pPr>
+            <a:r>
+              <a:rPr lang="en-US" sz="2600" dirty="0">
+                <a:solidFill>
+                  <a:srgbClr val="000000"/>
+                </a:solidFill>
+              </a:rPr>
+              <a:t>🚶</a:t>
+            </a:r>
+            <a:endParaRPr lang="en-US" sz="2600" dirty="0"/>
+          </a:p>
+        </p:txBody>
+      </p:sp>
+      <p:sp>
+        <p:nvSpPr>
+          <p:cNvPr id="17" name="Text 15"/>
+          <p:cNvSpPr/>
+          <p:nvPr/>
+        </p:nvSpPr>
+        <p:spPr>
+          <a:xfrm>
+            <a:off x="2487168" y="2011680"/>
+            <a:ext cx="1828800" cy="822960"/>
+          </a:xfrm>
+          <a:prstGeom prst="rect">
+            <a:avLst/>
+          </a:prstGeom>
+          <a:noFill/>
+          <a:ln/>
+        </p:spPr>
+        <p:txBody>
+          <a:bodyPr wrap="square" rtlCol="0" anchor="ctr"/>
+          <a:lstStyle/>
+          <a:p>
+            <a:pPr algn="ctr" indent="0" marL="0">
+              <a:buNone/>
+            </a:pPr>
+            <a:r>
+              <a:rPr lang="en-US" sz="1200" dirty="0">
+                <a:solidFill>
+                  <a:srgbClr val="2D3748"/>
+                </a:solidFill>
+                <a:latin typeface="Arial" pitchFamily="34" charset="0"/>
+                <a:ea typeface="Arial" pitchFamily="34" charset="-122"/>
+                <a:cs typeface="Arial" pitchFamily="34" charset="-120"/>
+              </a:rPr>
+              <a:t>¿Cuidador</a:t>
+            </a:r>
+            <a:endParaRPr lang="en-US" sz="1200" dirty="0"/>
+          </a:p>
+          <a:p>
+            <a:pPr algn="ctr" indent="0" marL="0">
+              <a:buNone/>
+            </a:pPr>
+            <a:r>
+              <a:rPr lang="en-US" sz="1200" dirty="0">
+                <a:solidFill>
+                  <a:srgbClr val="2D3748"/>
+                </a:solidFill>
+                <a:latin typeface="Arial" pitchFamily="34" charset="0"/>
+                <a:ea typeface="Arial" pitchFamily="34" charset="-122"/>
+                <a:cs typeface="Arial" pitchFamily="34" charset="-120"/>
+              </a:rPr>
+              <a:t>fue a verlo?</a:t>
+            </a:r>
+            <a:endParaRPr lang="en-US" sz="1200" dirty="0"/>
+          </a:p>
+        </p:txBody>
+      </p:sp>
+      <p:sp>
+        <p:nvSpPr>
+          <p:cNvPr id="18" name="Text 16"/>
+          <p:cNvSpPr/>
+          <p:nvPr/>
+        </p:nvSpPr>
+        <p:spPr>
+          <a:xfrm>
+            <a:off x="4315968" y="1737360"/>
+            <a:ext cx="292608" cy="457200"/>
+          </a:xfrm>
+          <a:prstGeom prst="rect">
+            <a:avLst/>
+          </a:prstGeom>
+          <a:noFill/>
+          <a:ln/>
+        </p:spPr>
+        <p:txBody>
+          <a:bodyPr wrap="square" rtlCol="0" anchor="ctr"/>
+          <a:lstStyle/>
+          <a:p>
+            <a:pPr algn="ctr" indent="0" marL="0">
+              <a:buNone/>
+            </a:pPr>
+            <a:r>
+              <a:rPr lang="en-US" sz="2000" dirty="0">
+                <a:solidFill>
+                  <a:srgbClr val="718096"/>
+                </a:solidFill>
+                <a:latin typeface="Arial" pitchFamily="34" charset="0"/>
+                <a:ea typeface="Arial" pitchFamily="34" charset="-122"/>
+                <a:cs typeface="Arial" pitchFamily="34" charset="-120"/>
+              </a:rPr>
+              <a:t>→</a:t>
+            </a:r>
+            <a:endParaRPr lang="en-US" sz="2000" dirty="0"/>
+          </a:p>
+        </p:txBody>
+      </p:sp>
+      <p:sp>
+        <p:nvSpPr>
+          <p:cNvPr id="19" name="Shape 17"/>
+          <p:cNvSpPr/>
+          <p:nvPr/>
+        </p:nvSpPr>
+        <p:spPr>
+          <a:xfrm>
+            <a:off x="4608576" y="1325880"/>
+            <a:ext cx="1828800" cy="1737360"/>
+          </a:xfrm>
+          <a:prstGeom prst="roundRect">
+            <a:avLst>
+              <a:gd name="adj" fmla="val 5263"/>
+            </a:avLst>
+          </a:prstGeom>
+          <a:solidFill>
+            <a:srgbClr val="FDE68A"/>
+          </a:solidFill>
+          <a:ln w="6350">
+            <a:solidFill>
+              <a:srgbClr val="E2E8F0"/>
+            </a:solidFill>
+            <a:prstDash val="solid"/>
+          </a:ln>
+        </p:spPr>
+      </p:sp>
+      <p:sp>
+        <p:nvSpPr>
+          <p:cNvPr id="20" name="Text 18"/>
+          <p:cNvSpPr/>
+          <p:nvPr/>
+        </p:nvSpPr>
+        <p:spPr>
+          <a:xfrm>
+            <a:off x="4608576" y="1417320"/>
+            <a:ext cx="1828800" cy="548640"/>
+          </a:xfrm>
+          <a:prstGeom prst="rect">
+            <a:avLst/>
+          </a:prstGeom>
+          <a:noFill/>
+          <a:ln/>
+        </p:spPr>
+        <p:txBody>
+          <a:bodyPr wrap="square" rtlCol="0" anchor="ctr"/>
+          <a:lstStyle/>
+          <a:p>
+            <a:pPr algn="ctr" indent="0" marL="0">
+              <a:buNone/>
+            </a:pPr>
+            <a:r>
+              <a:rPr lang="en-US" sz="2600" dirty="0">
+                <a:solidFill>
+                  <a:srgbClr val="000000"/>
+                </a:solidFill>
+              </a:rPr>
+              <a:t>❓</a:t>
+            </a:r>
+            <a:endParaRPr lang="en-US" sz="2600" dirty="0"/>
+          </a:p>
+        </p:txBody>
+      </p:sp>
+      <p:sp>
+        <p:nvSpPr>
+          <p:cNvPr id="21" name="Text 19"/>
+          <p:cNvSpPr/>
+          <p:nvPr/>
+        </p:nvSpPr>
+        <p:spPr>
+          <a:xfrm>
+            <a:off x="4608576" y="2011680"/>
+            <a:ext cx="1828800" cy="822960"/>
+          </a:xfrm>
+          <a:prstGeom prst="rect">
+            <a:avLst/>
+          </a:prstGeom>
+          <a:noFill/>
+          <a:ln/>
+        </p:spPr>
+        <p:txBody>
+          <a:bodyPr wrap="square" rtlCol="0" anchor="ctr"/>
+          <a:lstStyle/>
+          <a:p>
+            <a:pPr algn="ctr" indent="0" marL="0">
+              <a:buNone/>
+            </a:pPr>
+            <a:r>
+              <a:rPr lang="en-US" sz="1200" dirty="0">
+                <a:solidFill>
+                  <a:srgbClr val="2D3748"/>
+                </a:solidFill>
+                <a:latin typeface="Arial" pitchFamily="34" charset="0"/>
+                <a:ea typeface="Arial" pitchFamily="34" charset="-122"/>
+                <a:cs typeface="Arial" pitchFamily="34" charset="-120"/>
+              </a:rPr>
+              <a:t>Sin registro</a:t>
+            </a:r>
+            <a:endParaRPr lang="en-US" sz="1200" dirty="0"/>
+          </a:p>
+          <a:p>
+            <a:pPr algn="ctr" indent="0" marL="0">
+              <a:buNone/>
+            </a:pPr>
+            <a:r>
+              <a:rPr lang="en-US" sz="1200" dirty="0">
+                <a:solidFill>
+                  <a:srgbClr val="2D3748"/>
+                </a:solidFill>
+                <a:latin typeface="Arial" pitchFamily="34" charset="0"/>
+                <a:ea typeface="Arial" pitchFamily="34" charset="-122"/>
+                <a:cs typeface="Arial" pitchFamily="34" charset="-120"/>
+              </a:rPr>
+              <a:t>ni evidencia</a:t>
+            </a:r>
+            <a:endParaRPr lang="en-US" sz="1200" dirty="0"/>
+          </a:p>
+        </p:txBody>
+      </p:sp>
+      <p:sp>
+        <p:nvSpPr>
+          <p:cNvPr id="22" name="Text 20"/>
+          <p:cNvSpPr/>
+          <p:nvPr/>
+        </p:nvSpPr>
+        <p:spPr>
+          <a:xfrm>
+            <a:off x="6437376" y="1737360"/>
+            <a:ext cx="292608" cy="457200"/>
+          </a:xfrm>
+          <a:prstGeom prst="rect">
+            <a:avLst/>
+          </a:prstGeom>
+          <a:noFill/>
+          <a:ln/>
+        </p:spPr>
+        <p:txBody>
+          <a:bodyPr wrap="square" rtlCol="0" anchor="ctr"/>
+          <a:lstStyle/>
+          <a:p>
+            <a:pPr algn="ctr" indent="0" marL="0">
+              <a:buNone/>
+            </a:pPr>
+            <a:r>
+              <a:rPr lang="en-US" sz="2000" dirty="0">
+                <a:solidFill>
+                  <a:srgbClr val="718096"/>
+                </a:solidFill>
+                <a:latin typeface="Arial" pitchFamily="34" charset="0"/>
+                <a:ea typeface="Arial" pitchFamily="34" charset="-122"/>
+                <a:cs typeface="Arial" pitchFamily="34" charset="-120"/>
+              </a:rPr>
+              <a:t>→</a:t>
+            </a:r>
+            <a:endParaRPr lang="en-US" sz="2000" dirty="0"/>
+          </a:p>
+        </p:txBody>
+      </p:sp>
+      <p:sp>
+        <p:nvSpPr>
+          <p:cNvPr id="23" name="Shape 21"/>
+          <p:cNvSpPr/>
+          <p:nvPr/>
+        </p:nvSpPr>
+        <p:spPr>
+          <a:xfrm>
+            <a:off x="6729984" y="1325880"/>
+            <a:ext cx="1828800" cy="1737360"/>
+          </a:xfrm>
+          <a:prstGeom prst="roundRect">
+            <a:avLst>
+              <a:gd name="adj" fmla="val 5263"/>
+            </a:avLst>
+          </a:prstGeom>
+          <a:solidFill>
+            <a:srgbClr val="FECACA"/>
+          </a:solidFill>
+          <a:ln w="6350">
+            <a:solidFill>
+              <a:srgbClr val="E2E8F0"/>
+            </a:solidFill>
+            <a:prstDash val="solid"/>
+          </a:ln>
+        </p:spPr>
+      </p:sp>
+      <p:sp>
+        <p:nvSpPr>
+          <p:cNvPr id="24" name="Text 22"/>
+          <p:cNvSpPr/>
+          <p:nvPr/>
+        </p:nvSpPr>
+        <p:spPr>
+          <a:xfrm>
+            <a:off x="6729984" y="1417320"/>
+            <a:ext cx="1828800" cy="548640"/>
+          </a:xfrm>
+          <a:prstGeom prst="rect">
+            <a:avLst/>
+          </a:prstGeom>
+          <a:noFill/>
+          <a:ln/>
+        </p:spPr>
+        <p:txBody>
+          <a:bodyPr wrap="square" rtlCol="0" anchor="ctr"/>
+          <a:lstStyle/>
+          <a:p>
+            <a:pPr algn="ctr" indent="0" marL="0">
+              <a:buNone/>
+            </a:pPr>
+            <a:r>
+              <a:rPr lang="en-US" sz="2600" dirty="0">
+                <a:solidFill>
+                  <a:srgbClr val="000000"/>
+                </a:solidFill>
+              </a:rPr>
+              <a:t>😰</a:t>
+            </a:r>
+            <a:endParaRPr lang="en-US" sz="2600" dirty="0"/>
+          </a:p>
+        </p:txBody>
+      </p:sp>
+      <p:sp>
+        <p:nvSpPr>
+          <p:cNvPr id="25" name="Text 23"/>
+          <p:cNvSpPr/>
+          <p:nvPr/>
+        </p:nvSpPr>
+        <p:spPr>
+          <a:xfrm>
+            <a:off x="6729984" y="2011680"/>
+            <a:ext cx="1828800" cy="822960"/>
+          </a:xfrm>
+          <a:prstGeom prst="rect">
+            <a:avLst/>
+          </a:prstGeom>
+          <a:noFill/>
+          <a:ln/>
+        </p:spPr>
+        <p:txBody>
+          <a:bodyPr wrap="square" rtlCol="0" anchor="ctr"/>
+          <a:lstStyle/>
+          <a:p>
+            <a:pPr algn="ctr" indent="0" marL="0">
+              <a:buNone/>
+            </a:pPr>
+            <a:r>
+              <a:rPr lang="en-US" sz="1200" dirty="0">
+                <a:solidFill>
+                  <a:srgbClr val="2D3748"/>
+                </a:solidFill>
+                <a:latin typeface="Arial" pitchFamily="34" charset="0"/>
+                <a:ea typeface="Arial" pitchFamily="34" charset="-122"/>
+                <a:cs typeface="Arial" pitchFamily="34" charset="-120"/>
+              </a:rPr>
+              <a:t>Nadie lo sabe</a:t>
+            </a:r>
+            <a:endParaRPr lang="en-US" sz="1200" dirty="0"/>
+          </a:p>
+          <a:p>
+            <a:pPr algn="ctr" indent="0" marL="0">
+              <a:buNone/>
+            </a:pPr>
+            <a:r>
+              <a:rPr lang="en-US" sz="1200" dirty="0">
+                <a:solidFill>
+                  <a:srgbClr val="2D3748"/>
+                </a:solidFill>
+                <a:latin typeface="Arial" pitchFamily="34" charset="0"/>
+                <a:ea typeface="Arial" pitchFamily="34" charset="-122"/>
+                <a:cs typeface="Arial" pitchFamily="34" charset="-120"/>
+              </a:rPr>
+              <a:t>hasta que es tarde</a:t>
+            </a:r>
+            <a:endParaRPr lang="en-US" sz="1200" dirty="0"/>
+          </a:p>
+        </p:txBody>
+      </p:sp>
+      <p:sp>
+        <p:nvSpPr>
+          <p:cNvPr id="26" name="Shape 24"/>
+          <p:cNvSpPr/>
+          <p:nvPr/>
+        </p:nvSpPr>
+        <p:spPr>
+          <a:xfrm>
+            <a:off x="457200" y="3337560"/>
+            <a:ext cx="8375904" cy="960120"/>
+          </a:xfrm>
+          <a:prstGeom prst="roundRect">
+            <a:avLst>
+              <a:gd name="adj" fmla="val 7619"/>
+            </a:avLst>
+          </a:prstGeom>
+          <a:solidFill>
+            <a:srgbClr val="F0EDE8"/>
+          </a:solidFill>
+          <a:ln w="6350">
+            <a:solidFill>
+              <a:srgbClr val="E2E8F0"/>
+            </a:solidFill>
+            <a:prstDash val="solid"/>
+          </a:ln>
+        </p:spPr>
+      </p:sp>
+      <p:sp>
+        <p:nvSpPr>
+          <p:cNvPr id="27" name="Text 25"/>
+          <p:cNvSpPr/>
+          <p:nvPr/>
+        </p:nvSpPr>
+        <p:spPr>
+          <a:xfrm>
+            <a:off x="548640" y="3401568"/>
+            <a:ext cx="731520" cy="731520"/>
+          </a:xfrm>
+          <a:prstGeom prst="rect">
+            <a:avLst/>
+          </a:prstGeom>
+          <a:noFill/>
+          <a:ln/>
+        </p:spPr>
+        <p:txBody>
+          <a:bodyPr wrap="square" rtlCol="0" anchor="ctr"/>
+          <a:lstStyle/>
+          <a:p>
+            <a:pPr algn="ctr" indent="0" marL="0">
+              <a:buNone/>
+            </a:pPr>
+            <a:r>
+              <a:rPr lang="en-US" sz="2800" dirty="0">
+                <a:solidFill>
+                  <a:srgbClr val="000000"/>
+                </a:solidFill>
+              </a:rPr>
+              <a:t>📊</a:t>
+            </a:r>
+            <a:endParaRPr lang="en-US" sz="2800" dirty="0"/>
+          </a:p>
+        </p:txBody>
+      </p:sp>
+      <p:sp>
+        <p:nvSpPr>
+          <p:cNvPr id="28" name="Text 26"/>
+          <p:cNvSpPr/>
+          <p:nvPr/>
+        </p:nvSpPr>
+        <p:spPr>
+          <a:xfrm>
+            <a:off x="1371600" y="3401568"/>
+            <a:ext cx="7223760" cy="822960"/>
+          </a:xfrm>
+          <a:prstGeom prst="rect">
+            <a:avLst/>
+          </a:prstGeom>
+          <a:noFill/>
+          <a:ln/>
+        </p:spPr>
+        <p:txBody>
+          <a:bodyPr wrap="square" rtlCol="0" anchor="ctr"/>
+          <a:lstStyle/>
+          <a:p>
+            <a:pPr indent="0" marL="0">
+              <a:buNone/>
+            </a:pPr>
+            <a:r>
+              <a:rPr lang="en-US" sz="1300" dirty="0">
+                <a:solidFill>
+                  <a:srgbClr val="2D3748"/>
+                </a:solidFill>
+                <a:latin typeface="Arial" pitchFamily="34" charset="0"/>
+                <a:ea typeface="Arial" pitchFamily="34" charset="-122"/>
+                <a:cs typeface="Arial" pitchFamily="34" charset="-120"/>
+              </a:rPr>
+              <a:t>Como ejemplo: en una residencia con 50 adultos mayores se realizan cerca de 450 rondas por semana.</a:t>
+            </a:r>
+            <a:endParaRPr lang="en-US" sz="1300" dirty="0"/>
+          </a:p>
+          <a:p>
+            <a:pPr indent="0" marL="0">
+              <a:buNone/>
+            </a:pPr>
+            <a:r>
+              <a:rPr lang="en-US" sz="1300" dirty="0">
+                <a:solidFill>
+                  <a:srgbClr val="2D3748"/>
+                </a:solidFill>
+                <a:latin typeface="Arial" pitchFamily="34" charset="0"/>
+                <a:ea typeface="Arial" pitchFamily="34" charset="-122"/>
+                <a:cs typeface="Arial" pitchFamily="34" charset="-120"/>
+              </a:rPr>
+              <a:t>Cada una es una oportunidad de que el cuidado ocurra — o de que no ocurra y nadie lo detecte.</a:t>
+            </a:r>
+            <a:endParaRPr lang="en-US" sz="1300" dirty="0"/>
+          </a:p>
+        </p:txBody>
+      </p:sp>
+      <p:sp>
+        <p:nvSpPr>
+          <p:cNvPr id="29" name="Text 27"/>
+          <p:cNvSpPr/>
+          <p:nvPr/>
+        </p:nvSpPr>
+        <p:spPr>
+          <a:xfrm>
+            <a:off x="457200" y="6291072"/>
+            <a:ext cx="8375904" cy="201168"/>
+          </a:xfrm>
+          <a:prstGeom prst="rect">
+            <a:avLst/>
+          </a:prstGeom>
+          <a:noFill/>
+          <a:ln/>
+        </p:spPr>
+        <p:txBody>
+          <a:bodyPr wrap="square" rtlCol="0" anchor="ctr"/>
+          <a:lstStyle/>
+          <a:p>
+            <a:pPr algn="ctr" indent="0" marL="0">
+              <a:buNone/>
+            </a:pPr>
+            <a:r>
+              <a:rPr lang="en-US" dirty="0">
+                <a:solidFill>
+                  <a:srgbClr val="718096"/>
+                </a:solidFill>
+                <a:latin typeface="Arial" pitchFamily="34" charset="0"/>
+                <a:ea typeface="Arial" pitchFamily="34" charset="-122"/>
+                <a:cs typeface="Arial" pitchFamily="34" charset="-120"/>
+              </a:rPr>
+              <a:t>MVP operacional · No dispositivo médico · Datos ficticios</a:t>
+            </a:r>
+            <a:endParaRPr lang="en-US" dirty="0"/>
+          </a:p>
+        </p:txBody>
+      </p:sp>
+    </p:spTree>
+  </p:cSld>
+  <p:clrMapOvr>
+    <a:masterClrMapping/>
+  </p:clrMapOvr>
+</p:sld>
+</file>
+
+<file path=ppt/slides/slide5.xml><?xml version="1.0" encoding="utf-8"?>
+<p:sld xmlns:a="http://schemas.openxmlformats.org/drawingml/2006/main" xmlns:r="http://schemas.openxmlformats.org/officeDocument/2006/relationships" xmlns:p="http://schemas.openxmlformats.org/presentationml/2006/main">
+  <p:cSld name="Slide 5">
+    <p:spTree>
+      <p:nvGrpSpPr>
+        <p:cNvPr id="1" name=""/>
+        <p:cNvGrpSpPr/>
+        <p:nvPr/>
+      </p:nvGrpSpPr>
+      <p:grpSpPr>
+        <a:xfrm>
+          <a:off x="0" y="0"/>
+          <a:ext cx="0" cy="0"/>
+          <a:chOff x="0" y="0"/>
+          <a:chExt cx="0" cy="0"/>
+        </a:xfrm>
+      </p:grpSpPr>
+      <p:sp>
+        <p:nvSpPr>
+          <p:cNvPr id="2" name="Shape 0"/>
+          <p:cNvSpPr/>
+          <p:nvPr/>
+        </p:nvSpPr>
+        <p:spPr>
+          <a:xfrm>
+            <a:off x="0" y="0"/>
+            <a:ext cx="12192000" cy="6858000"/>
+          </a:xfrm>
+          <a:prstGeom prst="rect">
+            <a:avLst/>
+          </a:prstGeom>
+          <a:solidFill>
+            <a:srgbClr val="FAFAF8"/>
+          </a:solidFill>
+          <a:ln w="12700">
+            <a:solidFill>
+              <a:srgbClr val="FAFAF8"/>
+            </a:solidFill>
+            <a:prstDash val="solid"/>
+          </a:ln>
+        </p:spPr>
+      </p:sp>
+      <p:sp>
+        <p:nvSpPr>
+          <p:cNvPr id="3" name="Shape 1"/>
+          <p:cNvSpPr/>
+          <p:nvPr/>
+        </p:nvSpPr>
+        <p:spPr>
+          <a:xfrm>
+            <a:off x="8138160" y="0"/>
+            <a:ext cx="694944" cy="6858000"/>
+          </a:xfrm>
+          <a:prstGeom prst="rect">
+            <a:avLst/>
+          </a:prstGeom>
+          <a:solidFill>
+            <a:srgbClr val="A8C4DC">
+              <a:alpha val="12000"/>
+            </a:srgbClr>
+          </a:solidFill>
+          <a:ln w="12700">
+            <a:solidFill>
+              <a:srgbClr val="A8C4DC">
+                <a:alpha val="12000"/>
+              </a:srgbClr>
+            </a:solidFill>
+            <a:prstDash val="solid"/>
+          </a:ln>
+        </p:spPr>
+      </p:sp>
+      <p:sp>
+        <p:nvSpPr>
+          <p:cNvPr id="4" name="Shape 2"/>
+          <p:cNvSpPr/>
+          <p:nvPr/>
+        </p:nvSpPr>
+        <p:spPr>
+          <a:xfrm>
+            <a:off x="3474720" y="5120640"/>
+            <a:ext cx="2377440" cy="2377440"/>
+          </a:xfrm>
+          <a:prstGeom prst="ellipse">
+            <a:avLst/>
+          </a:prstGeom>
+          <a:solidFill>
+            <a:srgbClr val="C4786A">
+              <a:alpha val="10000"/>
+            </a:srgbClr>
+          </a:solidFill>
+          <a:ln w="12700">
+            <a:solidFill>
+              <a:srgbClr val="C4786A">
+                <a:alpha val="10000"/>
+              </a:srgbClr>
+            </a:solidFill>
+            <a:prstDash val="solid"/>
+          </a:ln>
+        </p:spPr>
+      </p:sp>
+      <p:sp>
+        <p:nvSpPr>
+          <p:cNvPr id="5" name="Shape 3"/>
+          <p:cNvSpPr/>
+          <p:nvPr/>
+        </p:nvSpPr>
+        <p:spPr>
+          <a:xfrm>
+            <a:off x="0" y="0"/>
+            <a:ext cx="12192000" cy="54864"/>
+          </a:xfrm>
+          <a:prstGeom prst="rect">
+            <a:avLst/>
+          </a:prstGeom>
+          <a:solidFill>
+            <a:srgbClr val="5B8DB8"/>
+          </a:solidFill>
+          <a:ln w="12700">
+            <a:solidFill>
+              <a:srgbClr val="5B8DB8"/>
+            </a:solidFill>
+            <a:prstDash val="solid"/>
+          </a:ln>
+        </p:spPr>
+      </p:sp>
+      <p:sp>
+        <p:nvSpPr>
+          <p:cNvPr id="6" name="Shape 4"/>
+          <p:cNvSpPr/>
+          <p:nvPr/>
+        </p:nvSpPr>
+        <p:spPr>
+          <a:xfrm>
+            <a:off x="0" y="6528816"/>
+            <a:ext cx="12192000" cy="54864"/>
+          </a:xfrm>
+          <a:prstGeom prst="rect">
+            <a:avLst/>
+          </a:prstGeom>
+          <a:solidFill>
+            <a:srgbClr val="C4786A"/>
+          </a:solidFill>
+          <a:ln w="12700">
+            <a:solidFill>
+              <a:srgbClr val="C4786A"/>
+            </a:solidFill>
+            <a:prstDash val="solid"/>
+          </a:ln>
+        </p:spPr>
+      </p:sp>
+      <p:sp>
+        <p:nvSpPr>
+          <p:cNvPr id="7" name="Text 5"/>
+          <p:cNvSpPr/>
+          <p:nvPr/>
+        </p:nvSpPr>
+        <p:spPr>
+          <a:xfrm>
+            <a:off x="457200" y="228600"/>
+            <a:ext cx="8375904" cy="502920"/>
+          </a:xfrm>
+          <a:prstGeom prst="rect">
+            <a:avLst/>
+          </a:prstGeom>
+          <a:noFill/>
+          <a:ln/>
+        </p:spPr>
+        <p:txBody>
+          <a:bodyPr wrap="square" rtlCol="0" anchor="ctr"/>
+          <a:lstStyle/>
+          <a:p>
+            <a:pPr indent="0" marL="0">
+              <a:buNone/>
+            </a:pPr>
+            <a:r>
+              <a:rPr lang="en-US" b="1" dirty="0">
+                <a:solidFill>
+                  <a:srgbClr val="2D3748"/>
+                </a:solidFill>
+                <a:latin typeface="Arial" pitchFamily="34" charset="0"/>
+                <a:ea typeface="Arial" pitchFamily="34" charset="-122"/>
+                <a:cs typeface="Arial" pitchFamily="34" charset="-120"/>
+              </a:rPr>
+              <a:t>🗂️  Fallo administrativo</a:t>
+            </a:r>
+            <a:endParaRPr lang="en-US" dirty="0"/>
+          </a:p>
+        </p:txBody>
+      </p:sp>
+      <p:sp>
+        <p:nvSpPr>
+          <p:cNvPr id="8" name="Text 6"/>
+          <p:cNvSpPr/>
+          <p:nvPr/>
+        </p:nvSpPr>
+        <p:spPr>
+          <a:xfrm>
+            <a:off x="457200" y="731520"/>
+            <a:ext cx="8375904" cy="320040"/>
+          </a:xfrm>
+          <a:prstGeom prst="rect">
+            <a:avLst/>
+          </a:prstGeom>
+          <a:noFill/>
+          <a:ln/>
+        </p:spPr>
+        <p:txBody>
+          <a:bodyPr wrap="square" rtlCol="0" anchor="ctr"/>
+          <a:lstStyle/>
+          <a:p>
+            <a:pPr indent="0" marL="0">
+              <a:buNone/>
+            </a:pPr>
+            <a:r>
+              <a:rPr lang="en-US" b="1" dirty="0">
+                <a:solidFill>
+                  <a:srgbClr val="5B8DB8"/>
+                </a:solidFill>
+                <a:latin typeface="Arial" pitchFamily="34" charset="0"/>
+                <a:ea typeface="Arial" pitchFamily="34" charset="-122"/>
+                <a:cs typeface="Arial" pitchFamily="34" charset="-120"/>
+              </a:rPr>
+              <a:t>Sin registro confiable, no hay defensa posible</a:t>
+            </a:r>
+            <a:endParaRPr lang="en-US" dirty="0"/>
+          </a:p>
+        </p:txBody>
+      </p:sp>
+      <p:sp>
+        <p:nvSpPr>
+          <p:cNvPr id="9" name="Shape 7"/>
+          <p:cNvSpPr/>
+          <p:nvPr/>
+        </p:nvSpPr>
+        <p:spPr>
+          <a:xfrm>
+            <a:off x="457200" y="1097280"/>
+            <a:ext cx="8375904" cy="0"/>
+          </a:xfrm>
+          <a:prstGeom prst="line">
+            <a:avLst/>
+          </a:prstGeom>
+          <a:noFill/>
+          <a:ln w="12700">
+            <a:solidFill>
+              <a:srgbClr val="E2E8F0"/>
+            </a:solidFill>
+            <a:prstDash val="solid"/>
+          </a:ln>
+        </p:spPr>
+      </p:sp>
+      <p:sp>
+        <p:nvSpPr>
+          <p:cNvPr id="10" name="Shape 8"/>
+          <p:cNvSpPr/>
+          <p:nvPr/>
+        </p:nvSpPr>
+        <p:spPr>
+          <a:xfrm>
+            <a:off x="457200" y="1325880"/>
+            <a:ext cx="8375904" cy="1143000"/>
+          </a:xfrm>
+          <a:prstGeom prst="roundRect">
+            <a:avLst>
+              <a:gd name="adj" fmla="val 8000"/>
+            </a:avLst>
+          </a:prstGeom>
+          <a:solidFill>
+            <a:srgbClr val="F0EDE8"/>
+          </a:solidFill>
+          <a:ln w="6350">
+            <a:solidFill>
+              <a:srgbClr val="E2E8F0"/>
+            </a:solidFill>
+            <a:prstDash val="solid"/>
+          </a:ln>
+        </p:spPr>
+      </p:sp>
+      <p:sp>
+        <p:nvSpPr>
+          <p:cNvPr id="11" name="Text 9"/>
+          <p:cNvSpPr/>
+          <p:nvPr/>
+        </p:nvSpPr>
+        <p:spPr>
+          <a:xfrm>
+            <a:off x="594360" y="1581912"/>
+            <a:ext cx="822960" cy="640080"/>
+          </a:xfrm>
+          <a:prstGeom prst="rect">
+            <a:avLst/>
+          </a:prstGeom>
+          <a:noFill/>
+          <a:ln/>
+        </p:spPr>
+        <p:txBody>
+          <a:bodyPr wrap="square" rtlCol="0" anchor="ctr"/>
+          <a:lstStyle/>
+          <a:p>
+            <a:pPr algn="ctr" indent="0" marL="0">
+              <a:buNone/>
+            </a:pPr>
+            <a:r>
+              <a:rPr lang="en-US" sz="2800" dirty="0">
+                <a:solidFill>
+                  <a:srgbClr val="000000"/>
+                </a:solidFill>
+              </a:rPr>
+              <a:t>👨‍👩‍👧</a:t>
+            </a:r>
+            <a:endParaRPr lang="en-US" sz="2800" dirty="0"/>
+          </a:p>
+        </p:txBody>
+      </p:sp>
+      <p:sp>
+        <p:nvSpPr>
+          <p:cNvPr id="12" name="Text 10"/>
+          <p:cNvSpPr/>
+          <p:nvPr/>
+        </p:nvSpPr>
+        <p:spPr>
+          <a:xfrm>
+            <a:off x="1508760" y="1508760"/>
+            <a:ext cx="3200400" cy="411480"/>
+          </a:xfrm>
+          <a:prstGeom prst="rect">
+            <a:avLst/>
+          </a:prstGeom>
+          <a:noFill/>
+          <a:ln/>
+        </p:spPr>
+        <p:txBody>
+          <a:bodyPr wrap="square" rtlCol="0" anchor="ctr"/>
+          <a:lstStyle/>
+          <a:p>
+            <a:pPr indent="0" marL="0">
+              <a:buNone/>
+            </a:pPr>
+            <a:r>
+              <a:rPr lang="en-US" sz="1500" b="1" dirty="0">
+                <a:solidFill>
+                  <a:srgbClr val="2D3748"/>
+                </a:solidFill>
+                <a:latin typeface="Arial" pitchFamily="34" charset="0"/>
+                <a:ea typeface="Arial" pitchFamily="34" charset="-122"/>
+                <a:cs typeface="Arial" pitchFamily="34" charset="-120"/>
+              </a:rPr>
+              <a:t>La familia llama</a:t>
+            </a:r>
+            <a:endParaRPr lang="en-US" sz="1500" dirty="0"/>
+          </a:p>
+        </p:txBody>
+      </p:sp>
+      <p:sp>
+        <p:nvSpPr>
+          <p:cNvPr id="13" name="Text 11"/>
+          <p:cNvSpPr/>
+          <p:nvPr/>
+        </p:nvSpPr>
+        <p:spPr>
+          <a:xfrm>
+            <a:off x="1508760" y="1920240"/>
+            <a:ext cx="6858000" cy="365760"/>
+          </a:xfrm>
+          <a:prstGeom prst="rect">
+            <a:avLst/>
+          </a:prstGeom>
+          <a:noFill/>
+          <a:ln/>
+        </p:spPr>
+        <p:txBody>
+          <a:bodyPr wrap="square" rtlCol="0" anchor="ctr"/>
+          <a:lstStyle/>
+          <a:p>
+            <a:pPr indent="0" marL="0">
+              <a:buNone/>
+            </a:pPr>
+            <a:r>
+              <a:rPr lang="en-US" sz="1400" i="1" dirty="0">
+                <a:solidFill>
+                  <a:srgbClr val="C4786A"/>
+                </a:solidFill>
+                <a:latin typeface="Arial" pitchFamily="34" charset="0"/>
+                <a:ea typeface="Arial" pitchFamily="34" charset="-122"/>
+                <a:cs typeface="Arial" pitchFamily="34" charset="-120"/>
+              </a:rPr>
+              <a:t>y no hay respuesta.</a:t>
+            </a:r>
+            <a:endParaRPr lang="en-US" sz="1400" dirty="0"/>
+          </a:p>
+        </p:txBody>
+      </p:sp>
+      <p:sp>
+        <p:nvSpPr>
+          <p:cNvPr id="14" name="Shape 12"/>
+          <p:cNvSpPr/>
+          <p:nvPr/>
+        </p:nvSpPr>
+        <p:spPr>
+          <a:xfrm>
+            <a:off x="457200" y="2651760"/>
+            <a:ext cx="8375904" cy="1143000"/>
+          </a:xfrm>
+          <a:prstGeom prst="roundRect">
+            <a:avLst>
+              <a:gd name="adj" fmla="val 8000"/>
+            </a:avLst>
+          </a:prstGeom>
+          <a:solidFill>
+            <a:srgbClr val="EDE9FE"/>
+          </a:solidFill>
+          <a:ln w="6350">
+            <a:solidFill>
+              <a:srgbClr val="E2E8F0"/>
+            </a:solidFill>
+            <a:prstDash val="solid"/>
+          </a:ln>
+        </p:spPr>
+      </p:sp>
+      <p:sp>
+        <p:nvSpPr>
+          <p:cNvPr id="15" name="Text 13"/>
+          <p:cNvSpPr/>
+          <p:nvPr/>
+        </p:nvSpPr>
+        <p:spPr>
+          <a:xfrm>
+            <a:off x="594360" y="2907792"/>
+            <a:ext cx="822960" cy="640080"/>
+          </a:xfrm>
+          <a:prstGeom prst="rect">
+            <a:avLst/>
+          </a:prstGeom>
+          <a:noFill/>
+          <a:ln/>
+        </p:spPr>
+        <p:txBody>
+          <a:bodyPr wrap="square" rtlCol="0" anchor="ctr"/>
+          <a:lstStyle/>
+          <a:p>
+            <a:pPr algn="ctr" indent="0" marL="0">
+              <a:buNone/>
+            </a:pPr>
+            <a:r>
+              <a:rPr lang="en-US" sz="2800" dirty="0">
+                <a:solidFill>
+                  <a:srgbClr val="000000"/>
+                </a:solidFill>
+              </a:rPr>
+              <a:t>🏛️</a:t>
+            </a:r>
+            <a:endParaRPr lang="en-US" sz="2800" dirty="0"/>
+          </a:p>
+        </p:txBody>
+      </p:sp>
+      <p:sp>
+        <p:nvSpPr>
+          <p:cNvPr id="16" name="Text 14"/>
+          <p:cNvSpPr/>
+          <p:nvPr/>
+        </p:nvSpPr>
+        <p:spPr>
+          <a:xfrm>
+            <a:off x="1508760" y="2834640"/>
+            <a:ext cx="3200400" cy="411480"/>
+          </a:xfrm>
+          <a:prstGeom prst="rect">
+            <a:avLst/>
+          </a:prstGeom>
+          <a:noFill/>
+          <a:ln/>
+        </p:spPr>
+        <p:txBody>
+          <a:bodyPr wrap="square" rtlCol="0" anchor="ctr"/>
+          <a:lstStyle/>
+          <a:p>
+            <a:pPr indent="0" marL="0">
+              <a:buNone/>
+            </a:pPr>
+            <a:r>
+              <a:rPr lang="en-US" sz="1500" b="1" dirty="0">
+                <a:solidFill>
+                  <a:srgbClr val="2D3748"/>
+                </a:solidFill>
+                <a:latin typeface="Arial" pitchFamily="34" charset="0"/>
+                <a:ea typeface="Arial" pitchFamily="34" charset="-122"/>
+                <a:cs typeface="Arial" pitchFamily="34" charset="-120"/>
+              </a:rPr>
+              <a:t>La inspección llega</a:t>
+            </a:r>
+            <a:endParaRPr lang="en-US" sz="1500" dirty="0"/>
+          </a:p>
+        </p:txBody>
+      </p:sp>
+      <p:sp>
+        <p:nvSpPr>
+          <p:cNvPr id="17" name="Text 15"/>
+          <p:cNvSpPr/>
+          <p:nvPr/>
+        </p:nvSpPr>
+        <p:spPr>
+          <a:xfrm>
+            <a:off x="1508760" y="3246120"/>
+            <a:ext cx="6858000" cy="365760"/>
+          </a:xfrm>
+          <a:prstGeom prst="rect">
+            <a:avLst/>
+          </a:prstGeom>
+          <a:noFill/>
+          <a:ln/>
+        </p:spPr>
+        <p:txBody>
+          <a:bodyPr wrap="square" rtlCol="0" anchor="ctr"/>
+          <a:lstStyle/>
+          <a:p>
+            <a:pPr indent="0" marL="0">
+              <a:buNone/>
+            </a:pPr>
+            <a:r>
+              <a:rPr lang="en-US" sz="1400" i="1" dirty="0">
+                <a:solidFill>
+                  <a:srgbClr val="C4786A"/>
+                </a:solidFill>
+                <a:latin typeface="Arial" pitchFamily="34" charset="0"/>
+                <a:ea typeface="Arial" pitchFamily="34" charset="-122"/>
+                <a:cs typeface="Arial" pitchFamily="34" charset="-120"/>
+              </a:rPr>
+              <a:t>y no hay evidencia.</a:t>
+            </a:r>
+            <a:endParaRPr lang="en-US" sz="1400" dirty="0"/>
+          </a:p>
+        </p:txBody>
+      </p:sp>
+      <p:sp>
+        <p:nvSpPr>
+          <p:cNvPr id="18" name="Shape 16"/>
+          <p:cNvSpPr/>
+          <p:nvPr/>
+        </p:nvSpPr>
+        <p:spPr>
+          <a:xfrm>
+            <a:off x="457200" y="3977640"/>
+            <a:ext cx="8375904" cy="1143000"/>
+          </a:xfrm>
+          <a:prstGeom prst="roundRect">
+            <a:avLst>
+              <a:gd name="adj" fmla="val 8000"/>
+            </a:avLst>
+          </a:prstGeom>
+          <a:solidFill>
+            <a:srgbClr val="FECACA"/>
+          </a:solidFill>
+          <a:ln w="6350">
+            <a:solidFill>
+              <a:srgbClr val="E2E8F0"/>
+            </a:solidFill>
+            <a:prstDash val="solid"/>
+          </a:ln>
+        </p:spPr>
+      </p:sp>
+      <p:sp>
+        <p:nvSpPr>
+          <p:cNvPr id="19" name="Text 17"/>
+          <p:cNvSpPr/>
+          <p:nvPr/>
+        </p:nvSpPr>
+        <p:spPr>
+          <a:xfrm>
+            <a:off x="594360" y="4233672"/>
+            <a:ext cx="822960" cy="640080"/>
+          </a:xfrm>
+          <a:prstGeom prst="rect">
+            <a:avLst/>
+          </a:prstGeom>
+          <a:noFill/>
+          <a:ln/>
+        </p:spPr>
+        <p:txBody>
+          <a:bodyPr wrap="square" rtlCol="0" anchor="ctr"/>
+          <a:lstStyle/>
+          <a:p>
+            <a:pPr algn="ctr" indent="0" marL="0">
+              <a:buNone/>
+            </a:pPr>
+            <a:r>
+              <a:rPr lang="en-US" sz="2800" dirty="0">
+                <a:solidFill>
+                  <a:srgbClr val="000000"/>
+                </a:solidFill>
+              </a:rPr>
+              <a:t>⚖️</a:t>
+            </a:r>
+            <a:endParaRPr lang="en-US" sz="2800" dirty="0"/>
+          </a:p>
+        </p:txBody>
+      </p:sp>
+      <p:sp>
+        <p:nvSpPr>
+          <p:cNvPr id="20" name="Text 18"/>
+          <p:cNvSpPr/>
+          <p:nvPr/>
+        </p:nvSpPr>
+        <p:spPr>
+          <a:xfrm>
+            <a:off x="1508760" y="4160520"/>
+            <a:ext cx="3200400" cy="411480"/>
+          </a:xfrm>
+          <a:prstGeom prst="rect">
+            <a:avLst/>
+          </a:prstGeom>
+          <a:noFill/>
+          <a:ln/>
+        </p:spPr>
+        <p:txBody>
+          <a:bodyPr wrap="square" rtlCol="0" anchor="ctr"/>
+          <a:lstStyle/>
+          <a:p>
+            <a:pPr indent="0" marL="0">
+              <a:buNone/>
+            </a:pPr>
+            <a:r>
+              <a:rPr lang="en-US" sz="1500" b="1" dirty="0">
+                <a:solidFill>
+                  <a:srgbClr val="2D3748"/>
+                </a:solidFill>
+                <a:latin typeface="Arial" pitchFamily="34" charset="0"/>
+                <a:ea typeface="Arial" pitchFamily="34" charset="-122"/>
+                <a:cs typeface="Arial" pitchFamily="34" charset="-120"/>
+              </a:rPr>
+              <a:t>El abogado pregunta</a:t>
+            </a:r>
+            <a:endParaRPr lang="en-US" sz="1500" dirty="0"/>
+          </a:p>
+        </p:txBody>
+      </p:sp>
+      <p:sp>
+        <p:nvSpPr>
+          <p:cNvPr id="21" name="Text 19"/>
+          <p:cNvSpPr/>
+          <p:nvPr/>
+        </p:nvSpPr>
+        <p:spPr>
+          <a:xfrm>
+            <a:off x="1508760" y="4572000"/>
+            <a:ext cx="6858000" cy="365760"/>
+          </a:xfrm>
+          <a:prstGeom prst="rect">
+            <a:avLst/>
+          </a:prstGeom>
+          <a:noFill/>
+          <a:ln/>
+        </p:spPr>
+        <p:txBody>
+          <a:bodyPr wrap="square" rtlCol="0" anchor="ctr"/>
+          <a:lstStyle/>
+          <a:p>
+            <a:pPr indent="0" marL="0">
+              <a:buNone/>
+            </a:pPr>
+            <a:r>
+              <a:rPr lang="en-US" sz="1400" i="1" dirty="0">
+                <a:solidFill>
+                  <a:srgbClr val="C4786A"/>
+                </a:solidFill>
+                <a:latin typeface="Arial" pitchFamily="34" charset="0"/>
+                <a:ea typeface="Arial" pitchFamily="34" charset="-122"/>
+                <a:cs typeface="Arial" pitchFamily="34" charset="-120"/>
+              </a:rPr>
+              <a:t>y no hay defensa.</a:t>
+            </a:r>
+            <a:endParaRPr lang="en-US" sz="1400" dirty="0"/>
+          </a:p>
+        </p:txBody>
+      </p:sp>
+      <p:sp>
+        <p:nvSpPr>
+          <p:cNvPr id="22" name="Text 20"/>
+          <p:cNvSpPr/>
+          <p:nvPr/>
+        </p:nvSpPr>
+        <p:spPr>
+          <a:xfrm>
+            <a:off x="457200" y="5943600"/>
+            <a:ext cx="8375904" cy="347472"/>
+          </a:xfrm>
+          <a:prstGeom prst="rect">
+            <a:avLst/>
+          </a:prstGeom>
+          <a:noFill/>
+          <a:ln/>
+        </p:spPr>
+        <p:txBody>
+          <a:bodyPr wrap="square" rtlCol="0" anchor="ctr"/>
+          <a:lstStyle/>
+          <a:p>
+            <a:pPr algn="ctr" indent="0" marL="0">
+              <a:buNone/>
+            </a:pPr>
+            <a:r>
+              <a:rPr lang="en-US" sz="1200" i="1" dirty="0">
+                <a:solidFill>
+                  <a:srgbClr val="718096"/>
+                </a:solidFill>
+                <a:latin typeface="Arial" pitchFamily="34" charset="0"/>
+                <a:ea typeface="Arial" pitchFamily="34" charset="-122"/>
+                <a:cs typeface="Arial" pitchFamily="34" charset="-120"/>
+              </a:rPr>
+              <a:t>Sin registro auditable, el director no puede demostrar que el cuidado ocurrió — en ningún escenario.</a:t>
+            </a:r>
+            <a:endParaRPr lang="en-US" sz="1200" dirty="0"/>
+          </a:p>
+        </p:txBody>
+      </p:sp>
+      <p:sp>
+        <p:nvSpPr>
+          <p:cNvPr id="23" name="Text 21"/>
+          <p:cNvSpPr/>
+          <p:nvPr/>
+        </p:nvSpPr>
+        <p:spPr>
+          <a:xfrm>
+            <a:off x="457200" y="6291072"/>
+            <a:ext cx="8375904" cy="201168"/>
+          </a:xfrm>
+          <a:prstGeom prst="rect">
+            <a:avLst/>
+          </a:prstGeom>
+          <a:noFill/>
+          <a:ln/>
+        </p:spPr>
+        <p:txBody>
+          <a:bodyPr wrap="square" rtlCol="0" anchor="ctr"/>
+          <a:lstStyle/>
+          <a:p>
+            <a:pPr algn="ctr" indent="0" marL="0">
+              <a:buNone/>
+            </a:pPr>
+            <a:r>
+              <a:rPr lang="en-US" dirty="0">
+                <a:solidFill>
+                  <a:srgbClr val="718096"/>
+                </a:solidFill>
+                <a:latin typeface="Arial" pitchFamily="34" charset="0"/>
+                <a:ea typeface="Arial" pitchFamily="34" charset="-122"/>
+                <a:cs typeface="Arial" pitchFamily="34" charset="-120"/>
+              </a:rPr>
+              <a:t>MVP operacional · No dispositivo médico · Datos ficticios</a:t>
+            </a:r>
+            <a:endParaRPr lang="en-US" dirty="0"/>
+          </a:p>
+        </p:txBody>
+      </p:sp>
+    </p:spTree>
+  </p:cSld>
+  <p:clrMapOvr>
+    <a:masterClrMapping/>
+  </p:clrMapOvr>
+</p:sld>
+</file>
+
+<file path=ppt/slides/slide6.xml><?xml version="1.0" encoding="utf-8"?>
+<p:sld xmlns:a="http://schemas.openxmlformats.org/drawingml/2006/main" xmlns:r="http://schemas.openxmlformats.org/officeDocument/2006/relationships" xmlns:p="http://schemas.openxmlformats.org/presentationml/2006/main">
+  <p:cSld name="Slide 6">
+    <p:spTree>
+      <p:nvGrpSpPr>
+        <p:cNvPr id="1" name=""/>
+        <p:cNvGrpSpPr/>
+        <p:nvPr/>
+      </p:nvGrpSpPr>
+      <p:grpSpPr>
+        <a:xfrm>
+          <a:off x="0" y="0"/>
+          <a:ext cx="0" cy="0"/>
+          <a:chOff x="0" y="0"/>
+          <a:chExt cx="0" cy="0"/>
+        </a:xfrm>
+      </p:grpSpPr>
+      <p:sp>
+        <p:nvSpPr>
+          <p:cNvPr id="2" name="Shape 0"/>
+          <p:cNvSpPr/>
+          <p:nvPr/>
+        </p:nvSpPr>
+        <p:spPr>
+          <a:xfrm>
+            <a:off x="0" y="0"/>
+            <a:ext cx="12192000" cy="6858000"/>
+          </a:xfrm>
+          <a:prstGeom prst="rect">
+            <a:avLst/>
+          </a:prstGeom>
+          <a:solidFill>
+            <a:srgbClr val="FAFAF8"/>
+          </a:solidFill>
+          <a:ln w="12700">
+            <a:solidFill>
+              <a:srgbClr val="FAFAF8"/>
+            </a:solidFill>
+            <a:prstDash val="solid"/>
+          </a:ln>
+        </p:spPr>
+      </p:sp>
+      <p:sp>
+        <p:nvSpPr>
+          <p:cNvPr id="3" name="Shape 1"/>
+          <p:cNvSpPr/>
+          <p:nvPr/>
+        </p:nvSpPr>
+        <p:spPr>
+          <a:xfrm>
+            <a:off x="6583680" y="4389120"/>
+            <a:ext cx="3840480" cy="3840480"/>
+          </a:xfrm>
+          <a:prstGeom prst="ellipse">
+            <a:avLst/>
+          </a:prstGeom>
+          <a:solidFill>
+            <a:srgbClr val="A8C4DC">
+              <a:alpha val="18000"/>
+            </a:srgbClr>
+          </a:solidFill>
+          <a:ln w="12700">
+            <a:solidFill>
+              <a:srgbClr val="A8C4DC">
+                <a:alpha val="18000"/>
+              </a:srgbClr>
+            </a:solidFill>
+            <a:prstDash val="solid"/>
+          </a:ln>
+        </p:spPr>
+      </p:sp>
+      <p:sp>
+        <p:nvSpPr>
+          <p:cNvPr id="4" name="Shape 2"/>
+          <p:cNvSpPr/>
+          <p:nvPr/>
+        </p:nvSpPr>
+        <p:spPr>
+          <a:xfrm>
+            <a:off x="-1005840" y="-1097280"/>
+            <a:ext cx="2926080" cy="2926080"/>
+          </a:xfrm>
+          <a:prstGeom prst="ellipse">
+            <a:avLst/>
+          </a:prstGeom>
+          <a:solidFill>
+            <a:srgbClr val="C4786A">
+              <a:alpha val="12000"/>
+            </a:srgbClr>
+          </a:solidFill>
+          <a:ln w="12700">
+            <a:solidFill>
+              <a:srgbClr val="C4786A">
+                <a:alpha val="12000"/>
+              </a:srgbClr>
+            </a:solidFill>
+            <a:prstDash val="solid"/>
+          </a:ln>
+        </p:spPr>
+      </p:sp>
+      <p:sp>
+        <p:nvSpPr>
+          <p:cNvPr id="5" name="Shape 3"/>
+          <p:cNvSpPr/>
+          <p:nvPr/>
+        </p:nvSpPr>
+        <p:spPr>
+          <a:xfrm>
+            <a:off x="8778240" y="1645920"/>
+            <a:ext cx="54864" cy="2194560"/>
+          </a:xfrm>
+          <a:prstGeom prst="rect">
+            <a:avLst/>
+          </a:prstGeom>
+          <a:solidFill>
+            <a:srgbClr val="5B8DB8">
+              <a:alpha val="45000"/>
+            </a:srgbClr>
+          </a:solidFill>
+          <a:ln w="12700">
+            <a:solidFill>
+              <a:srgbClr val="5B8DB8">
+                <a:alpha val="45000"/>
+              </a:srgbClr>
+            </a:solidFill>
+            <a:prstDash val="solid"/>
+          </a:ln>
+        </p:spPr>
+      </p:sp>
+      <p:sp>
+        <p:nvSpPr>
+          <p:cNvPr id="6" name="Shape 4"/>
+          <p:cNvSpPr/>
+          <p:nvPr/>
+        </p:nvSpPr>
+        <p:spPr>
+          <a:xfrm>
+            <a:off x="0" y="0"/>
+            <a:ext cx="12192000" cy="54864"/>
+          </a:xfrm>
+          <a:prstGeom prst="rect">
+            <a:avLst/>
+          </a:prstGeom>
+          <a:solidFill>
+            <a:srgbClr val="5B8DB8"/>
+          </a:solidFill>
+          <a:ln w="12700">
+            <a:solidFill>
+              <a:srgbClr val="5B8DB8"/>
+            </a:solidFill>
+            <a:prstDash val="solid"/>
+          </a:ln>
+        </p:spPr>
+      </p:sp>
+      <p:sp>
+        <p:nvSpPr>
+          <p:cNvPr id="7" name="Shape 5"/>
+          <p:cNvSpPr/>
+          <p:nvPr/>
+        </p:nvSpPr>
+        <p:spPr>
+          <a:xfrm>
+            <a:off x="0" y="6528816"/>
+            <a:ext cx="12192000" cy="54864"/>
+          </a:xfrm>
+          <a:prstGeom prst="rect">
+            <a:avLst/>
+          </a:prstGeom>
+          <a:solidFill>
+            <a:srgbClr val="C4786A"/>
+          </a:solidFill>
+          <a:ln w="12700">
+            <a:solidFill>
+              <a:srgbClr val="C4786A"/>
+            </a:solidFill>
+            <a:prstDash val="solid"/>
+          </a:ln>
+        </p:spPr>
+      </p:sp>
+      <p:sp>
+        <p:nvSpPr>
+          <p:cNvPr id="8" name="Text 6"/>
+          <p:cNvSpPr/>
+          <p:nvPr/>
+        </p:nvSpPr>
+        <p:spPr>
+          <a:xfrm>
+            <a:off x="457200" y="228600"/>
+            <a:ext cx="8375904" cy="502920"/>
+          </a:xfrm>
+          <a:prstGeom prst="rect">
+            <a:avLst/>
+          </a:prstGeom>
+          <a:noFill/>
+          <a:ln/>
+        </p:spPr>
+        <p:txBody>
+          <a:bodyPr wrap="square" rtlCol="0" anchor="ctr"/>
+          <a:lstStyle/>
+          <a:p>
+            <a:pPr indent="0" marL="0">
+              <a:buNone/>
+            </a:pPr>
+            <a:r>
+              <a:rPr lang="en-US" b="1" dirty="0">
+                <a:solidFill>
+                  <a:srgbClr val="2D3748"/>
+                </a:solidFill>
+                <a:latin typeface="Arial" pitchFamily="34" charset="0"/>
+                <a:ea typeface="Arial" pitchFamily="34" charset="-122"/>
+                <a:cs typeface="Arial" pitchFamily="34" charset="-120"/>
+              </a:rPr>
+              <a:t>⚖️  Marco legal — exposición permanente</a:t>
+            </a:r>
+            <a:endParaRPr lang="en-US" dirty="0"/>
+          </a:p>
+        </p:txBody>
+      </p:sp>
+      <p:sp>
+        <p:nvSpPr>
+          <p:cNvPr id="9" name="Text 7"/>
+          <p:cNvSpPr/>
+          <p:nvPr/>
+        </p:nvSpPr>
+        <p:spPr>
+          <a:xfrm>
+            <a:off x="457200" y="731520"/>
+            <a:ext cx="8375904" cy="320040"/>
+          </a:xfrm>
+          <a:prstGeom prst="rect">
+            <a:avLst/>
+          </a:prstGeom>
+          <a:noFill/>
+          <a:ln/>
+        </p:spPr>
+        <p:txBody>
+          <a:bodyPr wrap="square" rtlCol="0" anchor="ctr"/>
+          <a:lstStyle/>
+          <a:p>
+            <a:pPr indent="0" marL="0">
+              <a:buNone/>
+            </a:pPr>
+            <a:r>
+              <a:rPr lang="en-US" b="1" dirty="0">
+                <a:solidFill>
+                  <a:srgbClr val="5B8DB8"/>
+                </a:solidFill>
+                <a:latin typeface="Arial" pitchFamily="34" charset="0"/>
+                <a:ea typeface="Arial" pitchFamily="34" charset="-122"/>
+                <a:cs typeface="Arial" pitchFamily="34" charset="-120"/>
+              </a:rPr>
+              <a:t>La regulación ya exige los registros — sin fecha ni aviso previo</a:t>
+            </a:r>
+            <a:endParaRPr lang="en-US" dirty="0"/>
+          </a:p>
+        </p:txBody>
+      </p:sp>
+      <p:sp>
+        <p:nvSpPr>
+          <p:cNvPr id="10" name="Shape 8"/>
+          <p:cNvSpPr/>
+          <p:nvPr/>
+        </p:nvSpPr>
+        <p:spPr>
+          <a:xfrm>
+            <a:off x="457200" y="1097280"/>
+            <a:ext cx="8375904" cy="0"/>
+          </a:xfrm>
+          <a:prstGeom prst="line">
+            <a:avLst/>
+          </a:prstGeom>
+          <a:noFill/>
+          <a:ln w="12700">
+            <a:solidFill>
+              <a:srgbClr val="E2E8F0"/>
+            </a:solidFill>
+            <a:prstDash val="solid"/>
+          </a:ln>
+        </p:spPr>
+      </p:sp>
+      <p:sp>
+        <p:nvSpPr>
+          <p:cNvPr id="11" name="Shape 9"/>
+          <p:cNvSpPr/>
+          <p:nvPr/>
+        </p:nvSpPr>
+        <p:spPr>
+          <a:xfrm>
+            <a:off x="457200" y="1261872"/>
+            <a:ext cx="8375904" cy="1170432"/>
+          </a:xfrm>
+          <a:prstGeom prst="roundRect">
+            <a:avLst>
+              <a:gd name="adj" fmla="val 7813"/>
+            </a:avLst>
+          </a:prstGeom>
+          <a:solidFill>
+            <a:srgbClr val="F0EDE8"/>
+          </a:solidFill>
+          <a:ln w="6350">
+            <a:solidFill>
+              <a:srgbClr val="E2E8F0"/>
+            </a:solidFill>
+            <a:prstDash val="solid"/>
+          </a:ln>
+        </p:spPr>
+      </p:sp>
+      <p:sp>
+        <p:nvSpPr>
+          <p:cNvPr id="12" name="Text 10"/>
+          <p:cNvSpPr/>
+          <p:nvPr/>
+        </p:nvSpPr>
+        <p:spPr>
+          <a:xfrm>
+            <a:off x="594360" y="1517904"/>
+            <a:ext cx="731520" cy="640080"/>
+          </a:xfrm>
+          <a:prstGeom prst="rect">
+            <a:avLst/>
+          </a:prstGeom>
+          <a:noFill/>
+          <a:ln/>
+        </p:spPr>
+        <p:txBody>
+          <a:bodyPr wrap="square" rtlCol="0" anchor="ctr"/>
+          <a:lstStyle/>
+          <a:p>
+            <a:pPr algn="ctr" indent="0" marL="0">
+              <a:buNone/>
+            </a:pPr>
+            <a:r>
+              <a:rPr lang="en-US" sz="2600" dirty="0">
+                <a:solidFill>
+                  <a:srgbClr val="000000"/>
+                </a:solidFill>
+              </a:rPr>
+              <a:t>📜</a:t>
+            </a:r>
+            <a:endParaRPr lang="en-US" sz="2600" dirty="0"/>
+          </a:p>
+        </p:txBody>
+      </p:sp>
+      <p:sp>
+        <p:nvSpPr>
+          <p:cNvPr id="13" name="Text 11"/>
+          <p:cNvSpPr/>
+          <p:nvPr/>
+        </p:nvSpPr>
+        <p:spPr>
+          <a:xfrm>
+            <a:off x="1417320" y="1399032"/>
+            <a:ext cx="7223760" cy="347472"/>
+          </a:xfrm>
+          <a:prstGeom prst="rect">
+            <a:avLst/>
+          </a:prstGeom>
+          <a:noFill/>
+          <a:ln/>
+        </p:spPr>
+        <p:txBody>
+          <a:bodyPr wrap="square" rtlCol="0" anchor="ctr"/>
+          <a:lstStyle/>
+          <a:p>
+            <a:pPr indent="0" marL="0">
+              <a:buNone/>
+            </a:pPr>
+            <a:r>
+              <a:rPr lang="en-US" sz="1300" b="1" dirty="0">
+                <a:solidFill>
+                  <a:srgbClr val="2D3748"/>
+                </a:solidFill>
+                <a:latin typeface="Arial" pitchFamily="34" charset="0"/>
+                <a:ea typeface="Arial" pitchFamily="34" charset="-122"/>
+                <a:cs typeface="Arial" pitchFamily="34" charset="-120"/>
+              </a:rPr>
+              <a:t>NOM-031-SSA3-2012</a:t>
+            </a:r>
+            <a:endParaRPr lang="en-US" sz="1300" dirty="0"/>
+          </a:p>
+        </p:txBody>
+      </p:sp>
+      <p:sp>
+        <p:nvSpPr>
+          <p:cNvPr id="14" name="Text 12"/>
+          <p:cNvSpPr/>
+          <p:nvPr/>
+        </p:nvSpPr>
+        <p:spPr>
+          <a:xfrm>
+            <a:off x="1417320" y="1764792"/>
+            <a:ext cx="7223760" cy="594360"/>
+          </a:xfrm>
+          <a:prstGeom prst="rect">
+            <a:avLst/>
+          </a:prstGeom>
+          <a:noFill/>
+          <a:ln/>
+        </p:spPr>
+        <p:txBody>
+          <a:bodyPr wrap="square" rtlCol="0" anchor="ctr"/>
+          <a:lstStyle/>
+          <a:p>
+            <a:pPr indent="0" marL="0">
+              <a:buNone/>
+            </a:pPr>
+            <a:r>
+              <a:rPr lang="en-US" sz="1200" dirty="0">
+                <a:solidFill>
+                  <a:srgbClr val="2D3748"/>
+                </a:solidFill>
+                <a:latin typeface="Arial" pitchFamily="34" charset="0"/>
+                <a:ea typeface="Arial" pitchFamily="34" charset="-122"/>
+                <a:cs typeface="Arial" pitchFamily="34" charset="-120"/>
+              </a:rPr>
+              <a:t>Exige expediente administrativo permanente por residente, reglamento interno y bitácoras de operación.</a:t>
+            </a:r>
+            <a:endParaRPr lang="en-US" sz="1200" dirty="0"/>
+          </a:p>
+        </p:txBody>
+      </p:sp>
+      <p:sp>
+        <p:nvSpPr>
+          <p:cNvPr id="15" name="Shape 13"/>
+          <p:cNvSpPr/>
+          <p:nvPr/>
+        </p:nvSpPr>
+        <p:spPr>
+          <a:xfrm>
+            <a:off x="457200" y="2587752"/>
+            <a:ext cx="8375904" cy="1170432"/>
+          </a:xfrm>
+          <a:prstGeom prst="roundRect">
+            <a:avLst>
+              <a:gd name="adj" fmla="val 7813"/>
+            </a:avLst>
+          </a:prstGeom>
+          <a:solidFill>
+            <a:srgbClr val="EDE9FE"/>
+          </a:solidFill>
+          <a:ln w="6350">
+            <a:solidFill>
+              <a:srgbClr val="E2E8F0"/>
+            </a:solidFill>
+            <a:prstDash val="solid"/>
+          </a:ln>
+        </p:spPr>
+      </p:sp>
+      <p:sp>
+        <p:nvSpPr>
+          <p:cNvPr id="16" name="Text 14"/>
+          <p:cNvSpPr/>
+          <p:nvPr/>
+        </p:nvSpPr>
+        <p:spPr>
+          <a:xfrm>
+            <a:off x="594360" y="2843784"/>
+            <a:ext cx="731520" cy="640080"/>
+          </a:xfrm>
+          <a:prstGeom prst="rect">
+            <a:avLst/>
+          </a:prstGeom>
+          <a:noFill/>
+          <a:ln/>
+        </p:spPr>
+        <p:txBody>
+          <a:bodyPr wrap="square" rtlCol="0" anchor="ctr"/>
+          <a:lstStyle/>
+          <a:p>
+            <a:pPr algn="ctr" indent="0" marL="0">
+              <a:buNone/>
+            </a:pPr>
+            <a:r>
+              <a:rPr lang="en-US" sz="2600" dirty="0">
+                <a:solidFill>
+                  <a:srgbClr val="000000"/>
+                </a:solidFill>
+              </a:rPr>
+              <a:t>🔍</a:t>
+            </a:r>
+            <a:endParaRPr lang="en-US" sz="2600" dirty="0"/>
+          </a:p>
+        </p:txBody>
+      </p:sp>
+      <p:sp>
+        <p:nvSpPr>
+          <p:cNvPr id="17" name="Text 15"/>
+          <p:cNvSpPr/>
+          <p:nvPr/>
+        </p:nvSpPr>
+        <p:spPr>
+          <a:xfrm>
+            <a:off x="1417320" y="2724912"/>
+            <a:ext cx="7223760" cy="347472"/>
+          </a:xfrm>
+          <a:prstGeom prst="rect">
+            <a:avLst/>
+          </a:prstGeom>
+          <a:noFill/>
+          <a:ln/>
+        </p:spPr>
+        <p:txBody>
+          <a:bodyPr wrap="square" rtlCol="0" anchor="ctr"/>
+          <a:lstStyle/>
+          <a:p>
+            <a:pPr indent="0" marL="0">
+              <a:buNone/>
+            </a:pPr>
+            <a:r>
+              <a:rPr lang="en-US" sz="1300" b="1" dirty="0">
+                <a:solidFill>
+                  <a:srgbClr val="2D3748"/>
+                </a:solidFill>
+                <a:latin typeface="Arial" pitchFamily="34" charset="0"/>
+                <a:ea typeface="Arial" pitchFamily="34" charset="-122"/>
+                <a:cs typeface="Arial" pitchFamily="34" charset="-120"/>
+              </a:rPr>
+              <a:t>CNDH ISP-12/2020</a:t>
+            </a:r>
+            <a:endParaRPr lang="en-US" sz="1300" dirty="0"/>
+          </a:p>
+        </p:txBody>
+      </p:sp>
+      <p:sp>
+        <p:nvSpPr>
+          <p:cNvPr id="18" name="Text 16"/>
+          <p:cNvSpPr/>
+          <p:nvPr/>
+        </p:nvSpPr>
+        <p:spPr>
+          <a:xfrm>
+            <a:off x="1417320" y="3090672"/>
+            <a:ext cx="7223760" cy="594360"/>
+          </a:xfrm>
+          <a:prstGeom prst="rect">
+            <a:avLst/>
+          </a:prstGeom>
+          <a:noFill/>
+          <a:ln/>
+        </p:spPr>
+        <p:txBody>
+          <a:bodyPr wrap="square" rtlCol="0" anchor="ctr"/>
+          <a:lstStyle/>
+          <a:p>
+            <a:pPr indent="0" marL="0">
+              <a:buNone/>
+            </a:pPr>
+            <a:r>
+              <a:rPr lang="en-US" sz="1200" dirty="0">
+                <a:solidFill>
+                  <a:srgbClr val="2D3748"/>
+                </a:solidFill>
+                <a:latin typeface="Arial" pitchFamily="34" charset="0"/>
+                <a:ea typeface="Arial" pitchFamily="34" charset="-122"/>
+                <a:cs typeface="Arial" pitchFamily="34" charset="-120"/>
+              </a:rPr>
+              <a:t>Muestreo en residencias documentó abandono, falta de personal y deficiencias operativas — sin sistemas de gestión.</a:t>
+            </a:r>
+            <a:endParaRPr lang="en-US" sz="1200" dirty="0"/>
+          </a:p>
+        </p:txBody>
+      </p:sp>
+      <p:sp>
+        <p:nvSpPr>
+          <p:cNvPr id="19" name="Shape 17"/>
+          <p:cNvSpPr/>
+          <p:nvPr/>
+        </p:nvSpPr>
+        <p:spPr>
+          <a:xfrm>
+            <a:off x="457200" y="3913632"/>
+            <a:ext cx="8375904" cy="1170432"/>
+          </a:xfrm>
+          <a:prstGeom prst="roundRect">
+            <a:avLst>
+              <a:gd name="adj" fmla="val 7813"/>
+            </a:avLst>
+          </a:prstGeom>
+          <a:solidFill>
+            <a:srgbClr val="FECACA"/>
+          </a:solidFill>
+          <a:ln w="6350">
+            <a:solidFill>
+              <a:srgbClr val="E2E8F0"/>
+            </a:solidFill>
+            <a:prstDash val="solid"/>
+          </a:ln>
+        </p:spPr>
+      </p:sp>
+      <p:sp>
+        <p:nvSpPr>
+          <p:cNvPr id="20" name="Text 18"/>
+          <p:cNvSpPr/>
+          <p:nvPr/>
+        </p:nvSpPr>
+        <p:spPr>
+          <a:xfrm>
+            <a:off x="594360" y="4169664"/>
+            <a:ext cx="731520" cy="640080"/>
+          </a:xfrm>
+          <a:prstGeom prst="rect">
+            <a:avLst/>
+          </a:prstGeom>
+          <a:noFill/>
+          <a:ln/>
+        </p:spPr>
+        <p:txBody>
+          <a:bodyPr wrap="square" rtlCol="0" anchor="ctr"/>
+          <a:lstStyle/>
+          <a:p>
+            <a:pPr algn="ctr" indent="0" marL="0">
+              <a:buNone/>
+            </a:pPr>
+            <a:r>
+              <a:rPr lang="en-US" sz="2600" dirty="0">
+                <a:solidFill>
+                  <a:srgbClr val="000000"/>
+                </a:solidFill>
+              </a:rPr>
+              <a:t>⚖️</a:t>
+            </a:r>
+            <a:endParaRPr lang="en-US" sz="2600" dirty="0"/>
+          </a:p>
+        </p:txBody>
+      </p:sp>
+      <p:sp>
+        <p:nvSpPr>
+          <p:cNvPr id="21" name="Text 19"/>
+          <p:cNvSpPr/>
+          <p:nvPr/>
+        </p:nvSpPr>
+        <p:spPr>
+          <a:xfrm>
+            <a:off x="1417320" y="4050792"/>
+            <a:ext cx="7223760" cy="347472"/>
+          </a:xfrm>
+          <a:prstGeom prst="rect">
+            <a:avLst/>
+          </a:prstGeom>
+          <a:noFill/>
+          <a:ln/>
+        </p:spPr>
+        <p:txBody>
+          <a:bodyPr wrap="square" rtlCol="0" anchor="ctr"/>
+          <a:lstStyle/>
+          <a:p>
+            <a:pPr indent="0" marL="0">
+              <a:buNone/>
+            </a:pPr>
+            <a:r>
+              <a:rPr lang="en-US" sz="1300" b="1" dirty="0">
+                <a:solidFill>
+                  <a:srgbClr val="2D3748"/>
+                </a:solidFill>
+                <a:latin typeface="Arial" pitchFamily="34" charset="0"/>
+                <a:ea typeface="Arial" pitchFamily="34" charset="-122"/>
+                <a:cs typeface="Arial" pitchFamily="34" charset="-120"/>
+              </a:rPr>
+              <a:t>Ley General de Salud</a:t>
+            </a:r>
+            <a:endParaRPr lang="en-US" sz="1300" dirty="0"/>
+          </a:p>
+        </p:txBody>
+      </p:sp>
+      <p:sp>
+        <p:nvSpPr>
+          <p:cNvPr id="22" name="Text 20"/>
+          <p:cNvSpPr/>
+          <p:nvPr/>
+        </p:nvSpPr>
+        <p:spPr>
+          <a:xfrm>
+            <a:off x="1417320" y="4416552"/>
+            <a:ext cx="7223760" cy="594360"/>
+          </a:xfrm>
+          <a:prstGeom prst="rect">
+            <a:avLst/>
+          </a:prstGeom>
+          <a:noFill/>
+          <a:ln/>
+        </p:spPr>
+        <p:txBody>
+          <a:bodyPr wrap="square" rtlCol="0" anchor="ctr"/>
+          <a:lstStyle/>
+          <a:p>
+            <a:pPr indent="0" marL="0">
+              <a:buNone/>
+            </a:pPr>
+            <a:r>
+              <a:rPr lang="en-US" sz="1200" dirty="0">
+                <a:solidFill>
+                  <a:srgbClr val="2D3748"/>
+                </a:solidFill>
+                <a:latin typeface="Arial" pitchFamily="34" charset="0"/>
+                <a:ea typeface="Arial" pitchFamily="34" charset="-122"/>
+                <a:cs typeface="Arial" pitchFamily="34" charset="-120"/>
+              </a:rPr>
+              <a:t>Art. 419: multas por incumplimiento pueden superar $234,000 MXN — y cualquier inspección, queja o demanda puede llegar sin aviso.</a:t>
+            </a:r>
+            <a:endParaRPr lang="en-US" sz="1200" dirty="0"/>
+          </a:p>
+        </p:txBody>
+      </p:sp>
+      <p:sp>
+        <p:nvSpPr>
+          <p:cNvPr id="23" name="Text 21"/>
+          <p:cNvSpPr/>
+          <p:nvPr/>
+        </p:nvSpPr>
+        <p:spPr>
+          <a:xfrm>
+            <a:off x="457200" y="6291072"/>
+            <a:ext cx="8375904" cy="201168"/>
+          </a:xfrm>
+          <a:prstGeom prst="rect">
+            <a:avLst/>
+          </a:prstGeom>
+          <a:noFill/>
+          <a:ln/>
+        </p:spPr>
+        <p:txBody>
+          <a:bodyPr wrap="square" rtlCol="0" anchor="ctr"/>
+          <a:lstStyle/>
+          <a:p>
+            <a:pPr algn="l" indent="0" marL="0">
+              <a:buNone/>
+            </a:pPr>
+            <a:r>
+              <a:rPr lang="en-US" dirty="0">
+                <a:solidFill>
+                  <a:srgbClr val="718096"/>
+                </a:solidFill>
+                <a:latin typeface="Arial" pitchFamily="34" charset="0"/>
+                <a:ea typeface="Arial" pitchFamily="34" charset="-122"/>
+                <a:cs typeface="Arial" pitchFamily="34" charset="-120"/>
+              </a:rPr>
+              <a:t>Fuentes: DOF · CNDH · Ley General de Salud Art. 419</a:t>
             </a:r>
             <a:endParaRPr lang="en-US" dirty="0"/>
           </a:p>

--- a/business/CareSignal_Pitch_Deck.pptx
+++ b/business/CareSignal_Pitch_Deck.pptx
@@ -11,9 +11,10 @@
     <p:sldId id="259" r:id="rId5"/>
     <p:sldId id="260" r:id="rId6"/>
     <p:sldId id="261" r:id="rId7"/>
+    <p:sldId id="262" r:id="rId8"/>
   </p:sldIdLst>
   <p:notesMasterIdLst>
-    <p:notesMasterId r:id="rId8"/>
+    <p:notesMasterId r:id="rId9"/>
   </p:notesMasterIdLst>
   <p:sldSz cx="12192000" cy="6858000"/>
   <p:notesSz cx="6858000" cy="12192000"/>
@@ -989,6 +990,94 @@
 </p:notes>
 </file>
 
+<file path=ppt/notesSlides/notesSlide7.xml><?xml version="1.0" encoding="utf-8"?>
+<p:notes xmlns:a="http://schemas.openxmlformats.org/drawingml/2006/main" xmlns:r="http://schemas.openxmlformats.org/officeDocument/2006/relationships" xmlns:p="http://schemas.openxmlformats.org/presentationml/2006/main">
+  <p:cSld>
+    <p:spTree>
+      <p:nvGrpSpPr>
+        <p:cNvPr id="1" name=""/>
+        <p:cNvGrpSpPr/>
+        <p:nvPr/>
+      </p:nvGrpSpPr>
+      <p:grpSpPr>
+        <a:xfrm>
+          <a:off x="0" y="0"/>
+          <a:ext cx="0" cy="0"/>
+          <a:chOff x="0" y="0"/>
+          <a:chExt cx="0" cy="0"/>
+        </a:xfrm>
+      </p:grpSpPr>
+      <p:sp>
+        <p:nvSpPr>
+          <p:cNvPr id="2" name="Slide Image Placeholder 1"/>
+          <p:cNvSpPr>
+            <a:spLocks noGrp="1" noRot="1" noChangeAspect="1"/>
+          </p:cNvSpPr>
+          <p:nvPr>
+            <p:ph type="sldImg"/>
+          </p:nvPr>
+        </p:nvSpPr>
+        <p:spPr/>
+      </p:sp>
+      <p:sp>
+        <p:nvSpPr>
+          <p:cNvPr id="3" name="Notes Placeholder 2"/>
+          <p:cNvSpPr>
+            <a:spLocks noGrp="1"/>
+          </p:cNvSpPr>
+          <p:nvPr>
+            <p:ph type="body" idx="1"/>
+          </p:nvPr>
+        </p:nvSpPr>
+        <p:spPr/>
+        <p:txBody>
+          <a:bodyPr/>
+          <a:lstStyle/>
+          <a:p>
+            <a:r>
+              <a:rPr lang="en-US" dirty="0"/>
+              <a:t/>
+            </a:r>
+            <a:endParaRPr lang="en-US" dirty="0"/>
+          </a:p>
+        </p:txBody>
+      </p:sp>
+      <p:sp>
+        <p:nvSpPr>
+          <p:cNvPr id="4" name="Slide Number Placeholder 3"/>
+          <p:cNvSpPr>
+            <a:spLocks noGrp="1"/>
+          </p:cNvSpPr>
+          <p:nvPr>
+            <p:ph type="sldNum" sz="quarter" idx="10"/>
+          </p:nvPr>
+        </p:nvSpPr>
+        <p:spPr/>
+        <p:txBody>
+          <a:bodyPr/>
+          <a:lstStyle/>
+          <a:p>
+            <a:fld id="{F7021451-1387-4CA6-816F-3879F97B5CBC}" type="slidenum">
+              <a:rPr lang="en-US"/>
+              <a:t>7</a:t>
+            </a:fld>
+            <a:endParaRPr lang="en-US"/>
+          </a:p>
+        </p:txBody>
+      </p:sp>
+    </p:spTree>
+    <p:extLst>
+      <p:ext uri="{BB962C8B-B14F-4D97-AF65-F5344CB8AC3E}">
+        <p14:creationId xmlns:p14="http://schemas.microsoft.com/office/powerpoint/2010/main" val="1024086991"/>
+      </p:ext>
+    </p:extLst>
+  </p:cSld>
+  <p:clrMapOvr>
+    <a:masterClrMapping/>
+  </p:clrMapOvr>
+</p:notes>
+</file>
+
 <file path=ppt/slideLayouts/slideLayout1.xml><?xml version="1.0" encoding="utf-8"?>
 <p:sldLayout xmlns:a="http://schemas.openxmlformats.org/drawingml/2006/main" xmlns:r="http://schemas.openxmlformats.org/officeDocument/2006/relationships" xmlns:p="http://schemas.openxmlformats.org/presentationml/2006/main" preserve="1">
   <p:cSld name="DEFAULT">
@@ -6703,6 +6792,1217 @@
                 <a:cs typeface="Arial" pitchFamily="34" charset="-120"/>
               </a:rPr>
               <a:t>Fuentes: DOF · CNDH · Ley General de Salud Art. 419</a:t>
+            </a:r>
+            <a:endParaRPr lang="en-US" dirty="0"/>
+          </a:p>
+        </p:txBody>
+      </p:sp>
+    </p:spTree>
+  </p:cSld>
+  <p:clrMapOvr>
+    <a:masterClrMapping/>
+  </p:clrMapOvr>
+</p:sld>
+</file>
+
+<file path=ppt/slides/slide7.xml><?xml version="1.0" encoding="utf-8"?>
+<p:sld xmlns:a="http://schemas.openxmlformats.org/drawingml/2006/main" xmlns:r="http://schemas.openxmlformats.org/officeDocument/2006/relationships" xmlns:p="http://schemas.openxmlformats.org/presentationml/2006/main">
+  <p:cSld name="Slide 7">
+    <p:spTree>
+      <p:nvGrpSpPr>
+        <p:cNvPr id="1" name=""/>
+        <p:cNvGrpSpPr/>
+        <p:nvPr/>
+      </p:nvGrpSpPr>
+      <p:grpSpPr>
+        <a:xfrm>
+          <a:off x="0" y="0"/>
+          <a:ext cx="0" cy="0"/>
+          <a:chOff x="0" y="0"/>
+          <a:chExt cx="0" cy="0"/>
+        </a:xfrm>
+      </p:grpSpPr>
+      <p:sp>
+        <p:nvSpPr>
+          <p:cNvPr id="2" name="Shape 0"/>
+          <p:cNvSpPr/>
+          <p:nvPr/>
+        </p:nvSpPr>
+        <p:spPr>
+          <a:xfrm>
+            <a:off x="0" y="0"/>
+            <a:ext cx="12192000" cy="6858000"/>
+          </a:xfrm>
+          <a:prstGeom prst="rect">
+            <a:avLst/>
+          </a:prstGeom>
+          <a:solidFill>
+            <a:srgbClr val="FAFAF8"/>
+          </a:solidFill>
+          <a:ln w="12700">
+            <a:solidFill>
+              <a:srgbClr val="FAFAF8"/>
+            </a:solidFill>
+            <a:prstDash val="solid"/>
+          </a:ln>
+        </p:spPr>
+      </p:sp>
+      <p:sp>
+        <p:nvSpPr>
+          <p:cNvPr id="3" name="Shape 1"/>
+          <p:cNvSpPr/>
+          <p:nvPr/>
+        </p:nvSpPr>
+        <p:spPr>
+          <a:xfrm>
+            <a:off x="8138160" y="0"/>
+            <a:ext cx="694944" cy="6858000"/>
+          </a:xfrm>
+          <a:prstGeom prst="rect">
+            <a:avLst/>
+          </a:prstGeom>
+          <a:solidFill>
+            <a:srgbClr val="A8C4DC">
+              <a:alpha val="12000"/>
+            </a:srgbClr>
+          </a:solidFill>
+          <a:ln w="12700">
+            <a:solidFill>
+              <a:srgbClr val="A8C4DC">
+                <a:alpha val="12000"/>
+              </a:srgbClr>
+            </a:solidFill>
+            <a:prstDash val="solid"/>
+          </a:ln>
+        </p:spPr>
+      </p:sp>
+      <p:sp>
+        <p:nvSpPr>
+          <p:cNvPr id="4" name="Shape 2"/>
+          <p:cNvSpPr/>
+          <p:nvPr/>
+        </p:nvSpPr>
+        <p:spPr>
+          <a:xfrm>
+            <a:off x="3474720" y="5120640"/>
+            <a:ext cx="2377440" cy="2377440"/>
+          </a:xfrm>
+          <a:prstGeom prst="ellipse">
+            <a:avLst/>
+          </a:prstGeom>
+          <a:solidFill>
+            <a:srgbClr val="C4786A">
+              <a:alpha val="10000"/>
+            </a:srgbClr>
+          </a:solidFill>
+          <a:ln w="12700">
+            <a:solidFill>
+              <a:srgbClr val="C4786A">
+                <a:alpha val="10000"/>
+              </a:srgbClr>
+            </a:solidFill>
+            <a:prstDash val="solid"/>
+          </a:ln>
+        </p:spPr>
+      </p:sp>
+      <p:sp>
+        <p:nvSpPr>
+          <p:cNvPr id="5" name="Shape 3"/>
+          <p:cNvSpPr/>
+          <p:nvPr/>
+        </p:nvSpPr>
+        <p:spPr>
+          <a:xfrm>
+            <a:off x="0" y="0"/>
+            <a:ext cx="12192000" cy="54864"/>
+          </a:xfrm>
+          <a:prstGeom prst="rect">
+            <a:avLst/>
+          </a:prstGeom>
+          <a:solidFill>
+            <a:srgbClr val="5B8DB8"/>
+          </a:solidFill>
+          <a:ln w="12700">
+            <a:solidFill>
+              <a:srgbClr val="5B8DB8"/>
+            </a:solidFill>
+            <a:prstDash val="solid"/>
+          </a:ln>
+        </p:spPr>
+      </p:sp>
+      <p:sp>
+        <p:nvSpPr>
+          <p:cNvPr id="6" name="Shape 4"/>
+          <p:cNvSpPr/>
+          <p:nvPr/>
+        </p:nvSpPr>
+        <p:spPr>
+          <a:xfrm>
+            <a:off x="0" y="6528816"/>
+            <a:ext cx="12192000" cy="54864"/>
+          </a:xfrm>
+          <a:prstGeom prst="rect">
+            <a:avLst/>
+          </a:prstGeom>
+          <a:solidFill>
+            <a:srgbClr val="C4786A"/>
+          </a:solidFill>
+          <a:ln w="12700">
+            <a:solidFill>
+              <a:srgbClr val="C4786A"/>
+            </a:solidFill>
+            <a:prstDash val="solid"/>
+          </a:ln>
+        </p:spPr>
+      </p:sp>
+      <p:sp>
+        <p:nvSpPr>
+          <p:cNvPr id="7" name="Text 5"/>
+          <p:cNvSpPr/>
+          <p:nvPr/>
+        </p:nvSpPr>
+        <p:spPr>
+          <a:xfrm>
+            <a:off x="457200" y="228600"/>
+            <a:ext cx="8375904" cy="502920"/>
+          </a:xfrm>
+          <a:prstGeom prst="rect">
+            <a:avLst/>
+          </a:prstGeom>
+          <a:noFill/>
+          <a:ln/>
+        </p:spPr>
+        <p:txBody>
+          <a:bodyPr wrap="square" rtlCol="0" anchor="ctr"/>
+          <a:lstStyle/>
+          <a:p>
+            <a:pPr indent="0" marL="0">
+              <a:buNone/>
+            </a:pPr>
+            <a:r>
+              <a:rPr lang="en-US" b="1" dirty="0">
+                <a:solidFill>
+                  <a:srgbClr val="2D3748"/>
+                </a:solidFill>
+                <a:latin typeface="Arial" pitchFamily="34" charset="0"/>
+                <a:ea typeface="Arial" pitchFamily="34" charset="-122"/>
+                <a:cs typeface="Arial" pitchFamily="34" charset="-120"/>
+              </a:rPr>
+              <a:t>✅  CareSignal — la solución</a:t>
+            </a:r>
+            <a:endParaRPr lang="en-US" dirty="0"/>
+          </a:p>
+        </p:txBody>
+      </p:sp>
+      <p:sp>
+        <p:nvSpPr>
+          <p:cNvPr id="8" name="Text 6"/>
+          <p:cNvSpPr/>
+          <p:nvPr/>
+        </p:nvSpPr>
+        <p:spPr>
+          <a:xfrm>
+            <a:off x="457200" y="731520"/>
+            <a:ext cx="8375904" cy="320040"/>
+          </a:xfrm>
+          <a:prstGeom prst="rect">
+            <a:avLst/>
+          </a:prstGeom>
+          <a:noFill/>
+          <a:ln/>
+        </p:spPr>
+        <p:txBody>
+          <a:bodyPr wrap="square" rtlCol="0" anchor="ctr"/>
+          <a:lstStyle/>
+          <a:p>
+            <a:pPr indent="0" marL="0">
+              <a:buNone/>
+            </a:pPr>
+            <a:r>
+              <a:rPr lang="en-US" b="1" dirty="0">
+                <a:solidFill>
+                  <a:srgbClr val="5B8DB8"/>
+                </a:solidFill>
+                <a:latin typeface="Arial" pitchFamily="34" charset="0"/>
+                <a:ea typeface="Arial" pitchFamily="34" charset="-122"/>
+                <a:cs typeface="Arial" pitchFamily="34" charset="-120"/>
+              </a:rPr>
+              <a:t>Un sistema diseñado para resolver los dos fallos</a:t>
+            </a:r>
+            <a:endParaRPr lang="en-US" dirty="0"/>
+          </a:p>
+        </p:txBody>
+      </p:sp>
+      <p:sp>
+        <p:nvSpPr>
+          <p:cNvPr id="9" name="Shape 7"/>
+          <p:cNvSpPr/>
+          <p:nvPr/>
+        </p:nvSpPr>
+        <p:spPr>
+          <a:xfrm>
+            <a:off x="457200" y="1097280"/>
+            <a:ext cx="8375904" cy="0"/>
+          </a:xfrm>
+          <a:prstGeom prst="line">
+            <a:avLst/>
+          </a:prstGeom>
+          <a:noFill/>
+          <a:ln w="12700">
+            <a:solidFill>
+              <a:srgbClr val="E2E8F0"/>
+            </a:solidFill>
+            <a:prstDash val="solid"/>
+          </a:ln>
+        </p:spPr>
+      </p:sp>
+      <p:sp>
+        <p:nvSpPr>
+          <p:cNvPr id="10" name="Shape 8"/>
+          <p:cNvSpPr/>
+          <p:nvPr/>
+        </p:nvSpPr>
+        <p:spPr>
+          <a:xfrm>
+            <a:off x="457200" y="1261872"/>
+            <a:ext cx="3977640" cy="3474720"/>
+          </a:xfrm>
+          <a:prstGeom prst="roundRect">
+            <a:avLst>
+              <a:gd name="adj" fmla="val 2105"/>
+            </a:avLst>
+          </a:prstGeom>
+          <a:solidFill>
+            <a:srgbClr val="EFF6FF"/>
+          </a:solidFill>
+          <a:ln w="6350">
+            <a:solidFill>
+              <a:srgbClr val="E2E8F0"/>
+            </a:solidFill>
+            <a:prstDash val="solid"/>
+          </a:ln>
+        </p:spPr>
+      </p:sp>
+      <p:sp>
+        <p:nvSpPr>
+          <p:cNvPr id="11" name="Text 9"/>
+          <p:cNvSpPr/>
+          <p:nvPr/>
+        </p:nvSpPr>
+        <p:spPr>
+          <a:xfrm>
+            <a:off x="594360" y="1371600"/>
+            <a:ext cx="3703320" cy="384048"/>
+          </a:xfrm>
+          <a:prstGeom prst="rect">
+            <a:avLst/>
+          </a:prstGeom>
+          <a:noFill/>
+          <a:ln/>
+        </p:spPr>
+        <p:txBody>
+          <a:bodyPr wrap="square" rtlCol="0" anchor="ctr"/>
+          <a:lstStyle/>
+          <a:p>
+            <a:pPr indent="0" marL="0">
+              <a:buNone/>
+            </a:pPr>
+            <a:r>
+              <a:rPr lang="en-US" sz="1400" b="1" dirty="0">
+                <a:solidFill>
+                  <a:srgbClr val="C4786A"/>
+                </a:solidFill>
+                <a:latin typeface="Arial" pitchFamily="34" charset="0"/>
+                <a:ea typeface="Arial" pitchFamily="34" charset="-122"/>
+                <a:cs typeface="Arial" pitchFamily="34" charset="-120"/>
+              </a:rPr>
+              <a:t>⚠️  Fallo operativo</a:t>
+            </a:r>
+            <a:endParaRPr lang="en-US" sz="1400" dirty="0"/>
+          </a:p>
+        </p:txBody>
+      </p:sp>
+      <p:sp>
+        <p:nvSpPr>
+          <p:cNvPr id="12" name="Shape 10"/>
+          <p:cNvSpPr/>
+          <p:nvPr/>
+        </p:nvSpPr>
+        <p:spPr>
+          <a:xfrm>
+            <a:off x="594360" y="1783080"/>
+            <a:ext cx="3703320" cy="0"/>
+          </a:xfrm>
+          <a:prstGeom prst="line">
+            <a:avLst/>
+          </a:prstGeom>
+          <a:noFill/>
+          <a:ln w="9525">
+            <a:solidFill>
+              <a:srgbClr val="E2E8F0"/>
+            </a:solidFill>
+            <a:prstDash val="solid"/>
+          </a:ln>
+        </p:spPr>
+      </p:sp>
+      <p:sp>
+        <p:nvSpPr>
+          <p:cNvPr id="13" name="Text 11"/>
+          <p:cNvSpPr/>
+          <p:nvPr/>
+        </p:nvSpPr>
+        <p:spPr>
+          <a:xfrm>
+            <a:off x="594360" y="1874520"/>
+            <a:ext cx="3703320" cy="347472"/>
+          </a:xfrm>
+          <a:prstGeom prst="rect">
+            <a:avLst/>
+          </a:prstGeom>
+          <a:noFill/>
+          <a:ln/>
+        </p:spPr>
+        <p:txBody>
+          <a:bodyPr wrap="square" rtlCol="0" anchor="ctr"/>
+          <a:lstStyle/>
+          <a:p>
+            <a:pPr indent="0" marL="0">
+              <a:buNone/>
+            </a:pPr>
+            <a:r>
+              <a:rPr lang="en-US" sz="1200" i="1" dirty="0">
+                <a:solidFill>
+                  <a:srgbClr val="718096"/>
+                </a:solidFill>
+                <a:latin typeface="Arial" pitchFamily="34" charset="0"/>
+                <a:ea typeface="Arial" pitchFamily="34" charset="-122"/>
+                <a:cs typeface="Arial" pitchFamily="34" charset="-120"/>
+              </a:rPr>
+              <a:t>Ronda no ocurre y nadie lo detecta</a:t>
+            </a:r>
+            <a:endParaRPr lang="en-US" sz="1200" dirty="0"/>
+          </a:p>
+        </p:txBody>
+      </p:sp>
+      <p:sp>
+        <p:nvSpPr>
+          <p:cNvPr id="14" name="Text 12"/>
+          <p:cNvSpPr/>
+          <p:nvPr/>
+        </p:nvSpPr>
+        <p:spPr>
+          <a:xfrm>
+            <a:off x="640080" y="2331720"/>
+            <a:ext cx="548640" cy="457200"/>
+          </a:xfrm>
+          <a:prstGeom prst="rect">
+            <a:avLst/>
+          </a:prstGeom>
+          <a:noFill/>
+          <a:ln/>
+        </p:spPr>
+        <p:txBody>
+          <a:bodyPr wrap="square" rtlCol="0" anchor="ctr"/>
+          <a:lstStyle/>
+          <a:p>
+            <a:pPr algn="ctr" indent="0" marL="0">
+              <a:buNone/>
+            </a:pPr>
+            <a:r>
+              <a:rPr lang="en-US" sz="2200" dirty="0">
+                <a:solidFill>
+                  <a:srgbClr val="000000"/>
+                </a:solidFill>
+              </a:rPr>
+              <a:t>⏱️</a:t>
+            </a:r>
+            <a:endParaRPr lang="en-US" sz="2200" dirty="0"/>
+          </a:p>
+        </p:txBody>
+      </p:sp>
+      <p:sp>
+        <p:nvSpPr>
+          <p:cNvPr id="15" name="Text 13"/>
+          <p:cNvSpPr/>
+          <p:nvPr/>
+        </p:nvSpPr>
+        <p:spPr>
+          <a:xfrm>
+            <a:off x="1234440" y="2331720"/>
+            <a:ext cx="3063240" cy="594360"/>
+          </a:xfrm>
+          <a:prstGeom prst="rect">
+            <a:avLst/>
+          </a:prstGeom>
+          <a:noFill/>
+          <a:ln/>
+        </p:spPr>
+        <p:txBody>
+          <a:bodyPr wrap="square" rtlCol="0" anchor="ctr"/>
+          <a:lstStyle/>
+          <a:p>
+            <a:pPr indent="0" marL="0">
+              <a:buNone/>
+            </a:pPr>
+            <a:r>
+              <a:rPr lang="en-US" sz="1300" dirty="0">
+                <a:solidFill>
+                  <a:srgbClr val="2D3748"/>
+                </a:solidFill>
+                <a:latin typeface="Arial" pitchFamily="34" charset="0"/>
+                <a:ea typeface="Arial" pitchFamily="34" charset="-122"/>
+                <a:cs typeface="Arial" pitchFamily="34" charset="-120"/>
+              </a:rPr>
+              <a:t>Detecta automáticamente</a:t>
+            </a:r>
+            <a:endParaRPr lang="en-US" sz="1300" dirty="0"/>
+          </a:p>
+          <a:p>
+            <a:pPr indent="0" marL="0">
+              <a:buNone/>
+            </a:pPr>
+            <a:r>
+              <a:rPr lang="en-US" sz="1300" dirty="0">
+                <a:solidFill>
+                  <a:srgbClr val="2D3748"/>
+                </a:solidFill>
+                <a:latin typeface="Arial" pitchFamily="34" charset="0"/>
+                <a:ea typeface="Arial" pitchFamily="34" charset="-122"/>
+                <a:cs typeface="Arial" pitchFamily="34" charset="-120"/>
+              </a:rPr>
+              <a:t>cuando una ronda no ocurre</a:t>
+            </a:r>
+            <a:endParaRPr lang="en-US" sz="1300" dirty="0"/>
+          </a:p>
+        </p:txBody>
+      </p:sp>
+      <p:sp>
+        <p:nvSpPr>
+          <p:cNvPr id="16" name="Text 14"/>
+          <p:cNvSpPr/>
+          <p:nvPr/>
+        </p:nvSpPr>
+        <p:spPr>
+          <a:xfrm>
+            <a:off x="640080" y="3017520"/>
+            <a:ext cx="548640" cy="457200"/>
+          </a:xfrm>
+          <a:prstGeom prst="rect">
+            <a:avLst/>
+          </a:prstGeom>
+          <a:noFill/>
+          <a:ln/>
+        </p:spPr>
+        <p:txBody>
+          <a:bodyPr wrap="square" rtlCol="0" anchor="ctr"/>
+          <a:lstStyle/>
+          <a:p>
+            <a:pPr algn="ctr" indent="0" marL="0">
+              <a:buNone/>
+            </a:pPr>
+            <a:r>
+              <a:rPr lang="en-US" sz="2200" dirty="0">
+                <a:solidFill>
+                  <a:srgbClr val="000000"/>
+                </a:solidFill>
+              </a:rPr>
+              <a:t>🔔</a:t>
+            </a:r>
+            <a:endParaRPr lang="en-US" sz="2200" dirty="0"/>
+          </a:p>
+        </p:txBody>
+      </p:sp>
+      <p:sp>
+        <p:nvSpPr>
+          <p:cNvPr id="17" name="Text 15"/>
+          <p:cNvSpPr/>
+          <p:nvPr/>
+        </p:nvSpPr>
+        <p:spPr>
+          <a:xfrm>
+            <a:off x="1234440" y="3017520"/>
+            <a:ext cx="3063240" cy="594360"/>
+          </a:xfrm>
+          <a:prstGeom prst="rect">
+            <a:avLst/>
+          </a:prstGeom>
+          <a:noFill/>
+          <a:ln/>
+        </p:spPr>
+        <p:txBody>
+          <a:bodyPr wrap="square" rtlCol="0" anchor="ctr"/>
+          <a:lstStyle/>
+          <a:p>
+            <a:pPr indent="0" marL="0">
+              <a:buNone/>
+            </a:pPr>
+            <a:r>
+              <a:rPr lang="en-US" sz="1300" dirty="0">
+                <a:solidFill>
+                  <a:srgbClr val="2D3748"/>
+                </a:solidFill>
+                <a:latin typeface="Arial" pitchFamily="34" charset="0"/>
+                <a:ea typeface="Arial" pitchFamily="34" charset="-122"/>
+                <a:cs typeface="Arial" pitchFamily="34" charset="-120"/>
+              </a:rPr>
+              <a:t>Alerta al supervisor</a:t>
+            </a:r>
+            <a:endParaRPr lang="en-US" sz="1300" dirty="0"/>
+          </a:p>
+          <a:p>
+            <a:pPr indent="0" marL="0">
+              <a:buNone/>
+            </a:pPr>
+            <a:r>
+              <a:rPr lang="en-US" sz="1300" dirty="0">
+                <a:solidFill>
+                  <a:srgbClr val="2D3748"/>
+                </a:solidFill>
+                <a:latin typeface="Arial" pitchFamily="34" charset="0"/>
+                <a:ea typeface="Arial" pitchFamily="34" charset="-122"/>
+                <a:cs typeface="Arial" pitchFamily="34" charset="-120"/>
+              </a:rPr>
+              <a:t>en tiempo real</a:t>
+            </a:r>
+            <a:endParaRPr lang="en-US" sz="1300" dirty="0"/>
+          </a:p>
+        </p:txBody>
+      </p:sp>
+      <p:sp>
+        <p:nvSpPr>
+          <p:cNvPr id="18" name="Text 16"/>
+          <p:cNvSpPr/>
+          <p:nvPr/>
+        </p:nvSpPr>
+        <p:spPr>
+          <a:xfrm>
+            <a:off x="640080" y="3703320"/>
+            <a:ext cx="548640" cy="457200"/>
+          </a:xfrm>
+          <a:prstGeom prst="rect">
+            <a:avLst/>
+          </a:prstGeom>
+          <a:noFill/>
+          <a:ln/>
+        </p:spPr>
+        <p:txBody>
+          <a:bodyPr wrap="square" rtlCol="0" anchor="ctr"/>
+          <a:lstStyle/>
+          <a:p>
+            <a:pPr algn="ctr" indent="0" marL="0">
+              <a:buNone/>
+            </a:pPr>
+            <a:r>
+              <a:rPr lang="en-US" sz="2200" dirty="0">
+                <a:solidFill>
+                  <a:srgbClr val="000000"/>
+                </a:solidFill>
+              </a:rPr>
+              <a:t>👤</a:t>
+            </a:r>
+            <a:endParaRPr lang="en-US" sz="2200" dirty="0"/>
+          </a:p>
+        </p:txBody>
+      </p:sp>
+      <p:sp>
+        <p:nvSpPr>
+          <p:cNvPr id="19" name="Text 17"/>
+          <p:cNvSpPr/>
+          <p:nvPr/>
+        </p:nvSpPr>
+        <p:spPr>
+          <a:xfrm>
+            <a:off x="1234440" y="3703320"/>
+            <a:ext cx="3063240" cy="594360"/>
+          </a:xfrm>
+          <a:prstGeom prst="rect">
+            <a:avLst/>
+          </a:prstGeom>
+          <a:noFill/>
+          <a:ln/>
+        </p:spPr>
+        <p:txBody>
+          <a:bodyPr wrap="square" rtlCol="0" anchor="ctr"/>
+          <a:lstStyle/>
+          <a:p>
+            <a:pPr indent="0" marL="0">
+              <a:buNone/>
+            </a:pPr>
+            <a:r>
+              <a:rPr lang="en-US" sz="1300" dirty="0">
+                <a:solidFill>
+                  <a:srgbClr val="2D3748"/>
+                </a:solidFill>
+                <a:latin typeface="Arial" pitchFamily="34" charset="0"/>
+                <a:ea typeface="Arial" pitchFamily="34" charset="-122"/>
+                <a:cs typeface="Arial" pitchFamily="34" charset="-120"/>
+              </a:rPr>
+              <a:t>Asignación, escalación</a:t>
+            </a:r>
+            <a:endParaRPr lang="en-US" sz="1300" dirty="0"/>
+          </a:p>
+          <a:p>
+            <a:pPr indent="0" marL="0">
+              <a:buNone/>
+            </a:pPr>
+            <a:r>
+              <a:rPr lang="en-US" sz="1300" dirty="0">
+                <a:solidFill>
+                  <a:srgbClr val="2D3748"/>
+                </a:solidFill>
+                <a:latin typeface="Arial" pitchFamily="34" charset="0"/>
+                <a:ea typeface="Arial" pitchFamily="34" charset="-122"/>
+                <a:cs typeface="Arial" pitchFamily="34" charset="-120"/>
+              </a:rPr>
+              <a:t>y seguimiento del cuidador</a:t>
+            </a:r>
+            <a:endParaRPr lang="en-US" sz="1300" dirty="0"/>
+          </a:p>
+        </p:txBody>
+      </p:sp>
+      <p:sp>
+        <p:nvSpPr>
+          <p:cNvPr id="20" name="Shape 18"/>
+          <p:cNvSpPr/>
+          <p:nvPr/>
+        </p:nvSpPr>
+        <p:spPr>
+          <a:xfrm>
+            <a:off x="4846320" y="1261872"/>
+            <a:ext cx="3977640" cy="3474720"/>
+          </a:xfrm>
+          <a:prstGeom prst="roundRect">
+            <a:avLst>
+              <a:gd name="adj" fmla="val 2105"/>
+            </a:avLst>
+          </a:prstGeom>
+          <a:solidFill>
+            <a:srgbClr val="F0FDF4"/>
+          </a:solidFill>
+          <a:ln w="6350">
+            <a:solidFill>
+              <a:srgbClr val="E2E8F0"/>
+            </a:solidFill>
+            <a:prstDash val="solid"/>
+          </a:ln>
+        </p:spPr>
+      </p:sp>
+      <p:sp>
+        <p:nvSpPr>
+          <p:cNvPr id="21" name="Text 19"/>
+          <p:cNvSpPr/>
+          <p:nvPr/>
+        </p:nvSpPr>
+        <p:spPr>
+          <a:xfrm>
+            <a:off x="4983480" y="1371600"/>
+            <a:ext cx="3703320" cy="384048"/>
+          </a:xfrm>
+          <a:prstGeom prst="rect">
+            <a:avLst/>
+          </a:prstGeom>
+          <a:noFill/>
+          <a:ln/>
+        </p:spPr>
+        <p:txBody>
+          <a:bodyPr wrap="square" rtlCol="0" anchor="ctr"/>
+          <a:lstStyle/>
+          <a:p>
+            <a:pPr indent="0" marL="0">
+              <a:buNone/>
+            </a:pPr>
+            <a:r>
+              <a:rPr lang="en-US" sz="1400" b="1" dirty="0">
+                <a:solidFill>
+                  <a:srgbClr val="7BA68A"/>
+                </a:solidFill>
+                <a:latin typeface="Arial" pitchFamily="34" charset="0"/>
+                <a:ea typeface="Arial" pitchFamily="34" charset="-122"/>
+                <a:cs typeface="Arial" pitchFamily="34" charset="-120"/>
+              </a:rPr>
+              <a:t>🗂️  Fallo administrativo</a:t>
+            </a:r>
+            <a:endParaRPr lang="en-US" sz="1400" dirty="0"/>
+          </a:p>
+        </p:txBody>
+      </p:sp>
+      <p:sp>
+        <p:nvSpPr>
+          <p:cNvPr id="22" name="Shape 20"/>
+          <p:cNvSpPr/>
+          <p:nvPr/>
+        </p:nvSpPr>
+        <p:spPr>
+          <a:xfrm>
+            <a:off x="4983480" y="1783080"/>
+            <a:ext cx="3703320" cy="0"/>
+          </a:xfrm>
+          <a:prstGeom prst="line">
+            <a:avLst/>
+          </a:prstGeom>
+          <a:noFill/>
+          <a:ln w="9525">
+            <a:solidFill>
+              <a:srgbClr val="E2E8F0"/>
+            </a:solidFill>
+            <a:prstDash val="solid"/>
+          </a:ln>
+        </p:spPr>
+      </p:sp>
+      <p:sp>
+        <p:nvSpPr>
+          <p:cNvPr id="23" name="Text 21"/>
+          <p:cNvSpPr/>
+          <p:nvPr/>
+        </p:nvSpPr>
+        <p:spPr>
+          <a:xfrm>
+            <a:off x="4983480" y="1874520"/>
+            <a:ext cx="3703320" cy="347472"/>
+          </a:xfrm>
+          <a:prstGeom prst="rect">
+            <a:avLst/>
+          </a:prstGeom>
+          <a:noFill/>
+          <a:ln/>
+        </p:spPr>
+        <p:txBody>
+          <a:bodyPr wrap="square" rtlCol="0" anchor="ctr"/>
+          <a:lstStyle/>
+          <a:p>
+            <a:pPr indent="0" marL="0">
+              <a:buNone/>
+            </a:pPr>
+            <a:r>
+              <a:rPr lang="en-US" sz="1200" i="1" dirty="0">
+                <a:solidFill>
+                  <a:srgbClr val="718096"/>
+                </a:solidFill>
+                <a:latin typeface="Arial" pitchFamily="34" charset="0"/>
+                <a:ea typeface="Arial" pitchFamily="34" charset="-122"/>
+                <a:cs typeface="Arial" pitchFamily="34" charset="-120"/>
+              </a:rPr>
+              <a:t>Sin registro confiable ni evidencia auditable</a:t>
+            </a:r>
+            <a:endParaRPr lang="en-US" sz="1200" dirty="0"/>
+          </a:p>
+        </p:txBody>
+      </p:sp>
+      <p:sp>
+        <p:nvSpPr>
+          <p:cNvPr id="24" name="Text 22"/>
+          <p:cNvSpPr/>
+          <p:nvPr/>
+        </p:nvSpPr>
+        <p:spPr>
+          <a:xfrm>
+            <a:off x="5029200" y="2331720"/>
+            <a:ext cx="548640" cy="457200"/>
+          </a:xfrm>
+          <a:prstGeom prst="rect">
+            <a:avLst/>
+          </a:prstGeom>
+          <a:noFill/>
+          <a:ln/>
+        </p:spPr>
+        <p:txBody>
+          <a:bodyPr wrap="square" rtlCol="0" anchor="ctr"/>
+          <a:lstStyle/>
+          <a:p>
+            <a:pPr algn="ctr" indent="0" marL="0">
+              <a:buNone/>
+            </a:pPr>
+            <a:r>
+              <a:rPr lang="en-US" sz="2200" dirty="0">
+                <a:solidFill>
+                  <a:srgbClr val="000000"/>
+                </a:solidFill>
+              </a:rPr>
+              <a:t>📋</a:t>
+            </a:r>
+            <a:endParaRPr lang="en-US" sz="2200" dirty="0"/>
+          </a:p>
+        </p:txBody>
+      </p:sp>
+      <p:sp>
+        <p:nvSpPr>
+          <p:cNvPr id="25" name="Text 23"/>
+          <p:cNvSpPr/>
+          <p:nvPr/>
+        </p:nvSpPr>
+        <p:spPr>
+          <a:xfrm>
+            <a:off x="5623560" y="2331720"/>
+            <a:ext cx="3063240" cy="594360"/>
+          </a:xfrm>
+          <a:prstGeom prst="rect">
+            <a:avLst/>
+          </a:prstGeom>
+          <a:noFill/>
+          <a:ln/>
+        </p:spPr>
+        <p:txBody>
+          <a:bodyPr wrap="square" rtlCol="0" anchor="ctr"/>
+          <a:lstStyle/>
+          <a:p>
+            <a:pPr indent="0" marL="0">
+              <a:buNone/>
+            </a:pPr>
+            <a:r>
+              <a:rPr lang="en-US" sz="1300" dirty="0">
+                <a:solidFill>
+                  <a:srgbClr val="2D3748"/>
+                </a:solidFill>
+                <a:latin typeface="Arial" pitchFamily="34" charset="0"/>
+                <a:ea typeface="Arial" pitchFamily="34" charset="-122"/>
+                <a:cs typeface="Arial" pitchFamily="34" charset="-120"/>
+              </a:rPr>
+              <a:t>Bitácora inmutable:</a:t>
+            </a:r>
+            <a:endParaRPr lang="en-US" sz="1300" dirty="0"/>
+          </a:p>
+          <a:p>
+            <a:pPr indent="0" marL="0">
+              <a:buNone/>
+            </a:pPr>
+            <a:r>
+              <a:rPr lang="en-US" sz="1300" dirty="0">
+                <a:solidFill>
+                  <a:srgbClr val="2D3748"/>
+                </a:solidFill>
+                <a:latin typeface="Arial" pitchFamily="34" charset="0"/>
+                <a:ea typeface="Arial" pitchFamily="34" charset="-122"/>
+                <a:cs typeface="Arial" pitchFamily="34" charset="-120"/>
+              </a:rPr>
+              <a:t>quién, cuándo, qué resultado</a:t>
+            </a:r>
+            <a:endParaRPr lang="en-US" sz="1300" dirty="0"/>
+          </a:p>
+        </p:txBody>
+      </p:sp>
+      <p:sp>
+        <p:nvSpPr>
+          <p:cNvPr id="26" name="Text 24"/>
+          <p:cNvSpPr/>
+          <p:nvPr/>
+        </p:nvSpPr>
+        <p:spPr>
+          <a:xfrm>
+            <a:off x="5029200" y="3017520"/>
+            <a:ext cx="548640" cy="457200"/>
+          </a:xfrm>
+          <a:prstGeom prst="rect">
+            <a:avLst/>
+          </a:prstGeom>
+          <a:noFill/>
+          <a:ln/>
+        </p:spPr>
+        <p:txBody>
+          <a:bodyPr wrap="square" rtlCol="0" anchor="ctr"/>
+          <a:lstStyle/>
+          <a:p>
+            <a:pPr algn="ctr" indent="0" marL="0">
+              <a:buNone/>
+            </a:pPr>
+            <a:r>
+              <a:rPr lang="en-US" sz="2200" dirty="0">
+                <a:solidFill>
+                  <a:srgbClr val="000000"/>
+                </a:solidFill>
+              </a:rPr>
+              <a:t>📄</a:t>
+            </a:r>
+            <a:endParaRPr lang="en-US" sz="2200" dirty="0"/>
+          </a:p>
+        </p:txBody>
+      </p:sp>
+      <p:sp>
+        <p:nvSpPr>
+          <p:cNvPr id="27" name="Text 25"/>
+          <p:cNvSpPr/>
+          <p:nvPr/>
+        </p:nvSpPr>
+        <p:spPr>
+          <a:xfrm>
+            <a:off x="5623560" y="3017520"/>
+            <a:ext cx="3063240" cy="594360"/>
+          </a:xfrm>
+          <a:prstGeom prst="rect">
+            <a:avLst/>
+          </a:prstGeom>
+          <a:noFill/>
+          <a:ln/>
+        </p:spPr>
+        <p:txBody>
+          <a:bodyPr wrap="square" rtlCol="0" anchor="ctr"/>
+          <a:lstStyle/>
+          <a:p>
+            <a:pPr indent="0" marL="0">
+              <a:buNone/>
+            </a:pPr>
+            <a:r>
+              <a:rPr lang="en-US" sz="1300" dirty="0">
+                <a:solidFill>
+                  <a:srgbClr val="2D3748"/>
+                </a:solidFill>
+                <a:latin typeface="Arial" pitchFamily="34" charset="0"/>
+                <a:ea typeface="Arial" pitchFamily="34" charset="-122"/>
+                <a:cs typeface="Arial" pitchFamily="34" charset="-120"/>
+              </a:rPr>
+              <a:t>Sin papel, sin transcripción,</a:t>
+            </a:r>
+            <a:endParaRPr lang="en-US" sz="1300" dirty="0"/>
+          </a:p>
+          <a:p>
+            <a:pPr indent="0" marL="0">
+              <a:buNone/>
+            </a:pPr>
+            <a:r>
+              <a:rPr lang="en-US" sz="1300" dirty="0">
+                <a:solidFill>
+                  <a:srgbClr val="2D3748"/>
+                </a:solidFill>
+                <a:latin typeface="Arial" pitchFamily="34" charset="0"/>
+                <a:ea typeface="Arial" pitchFamily="34" charset="-122"/>
+                <a:cs typeface="Arial" pitchFamily="34" charset="-120"/>
+              </a:rPr>
+              <a:t>sin trabajo extra</a:t>
+            </a:r>
+            <a:endParaRPr lang="en-US" sz="1300" dirty="0"/>
+          </a:p>
+        </p:txBody>
+      </p:sp>
+      <p:sp>
+        <p:nvSpPr>
+          <p:cNvPr id="28" name="Text 26"/>
+          <p:cNvSpPr/>
+          <p:nvPr/>
+        </p:nvSpPr>
+        <p:spPr>
+          <a:xfrm>
+            <a:off x="5029200" y="3703320"/>
+            <a:ext cx="548640" cy="457200"/>
+          </a:xfrm>
+          <a:prstGeom prst="rect">
+            <a:avLst/>
+          </a:prstGeom>
+          <a:noFill/>
+          <a:ln/>
+        </p:spPr>
+        <p:txBody>
+          <a:bodyPr wrap="square" rtlCol="0" anchor="ctr"/>
+          <a:lstStyle/>
+          <a:p>
+            <a:pPr algn="ctr" indent="0" marL="0">
+              <a:buNone/>
+            </a:pPr>
+            <a:r>
+              <a:rPr lang="en-US" sz="2200" dirty="0">
+                <a:solidFill>
+                  <a:srgbClr val="000000"/>
+                </a:solidFill>
+              </a:rPr>
+              <a:t>🛡️</a:t>
+            </a:r>
+            <a:endParaRPr lang="en-US" sz="2200" dirty="0"/>
+          </a:p>
+        </p:txBody>
+      </p:sp>
+      <p:sp>
+        <p:nvSpPr>
+          <p:cNvPr id="29" name="Text 27"/>
+          <p:cNvSpPr/>
+          <p:nvPr/>
+        </p:nvSpPr>
+        <p:spPr>
+          <a:xfrm>
+            <a:off x="5623560" y="3703320"/>
+            <a:ext cx="3063240" cy="594360"/>
+          </a:xfrm>
+          <a:prstGeom prst="rect">
+            <a:avLst/>
+          </a:prstGeom>
+          <a:noFill/>
+          <a:ln/>
+        </p:spPr>
+        <p:txBody>
+          <a:bodyPr wrap="square" rtlCol="0" anchor="ctr"/>
+          <a:lstStyle/>
+          <a:p>
+            <a:pPr indent="0" marL="0">
+              <a:buNone/>
+            </a:pPr>
+            <a:r>
+              <a:rPr lang="en-US" sz="1300" dirty="0">
+                <a:solidFill>
+                  <a:srgbClr val="2D3748"/>
+                </a:solidFill>
+                <a:latin typeface="Arial" pitchFamily="34" charset="0"/>
+                <a:ea typeface="Arial" pitchFamily="34" charset="-122"/>
+                <a:cs typeface="Arial" pitchFamily="34" charset="-120"/>
+              </a:rPr>
+              <a:t>Evidencia lista ante cualquier</a:t>
+            </a:r>
+            <a:endParaRPr lang="en-US" sz="1300" dirty="0"/>
+          </a:p>
+          <a:p>
+            <a:pPr indent="0" marL="0">
+              <a:buNone/>
+            </a:pPr>
+            <a:r>
+              <a:rPr lang="en-US" sz="1300" dirty="0">
+                <a:solidFill>
+                  <a:srgbClr val="2D3748"/>
+                </a:solidFill>
+                <a:latin typeface="Arial" pitchFamily="34" charset="0"/>
+                <a:ea typeface="Arial" pitchFamily="34" charset="-122"/>
+                <a:cs typeface="Arial" pitchFamily="34" charset="-120"/>
+              </a:rPr>
+              <a:t>inspección, queja o demanda</a:t>
+            </a:r>
+            <a:endParaRPr lang="en-US" sz="1300" dirty="0"/>
+          </a:p>
+        </p:txBody>
+      </p:sp>
+      <p:sp>
+        <p:nvSpPr>
+          <p:cNvPr id="30" name="Text 28"/>
+          <p:cNvSpPr/>
+          <p:nvPr/>
+        </p:nvSpPr>
+        <p:spPr>
+          <a:xfrm>
+            <a:off x="4434840" y="2651760"/>
+            <a:ext cx="411480" cy="457200"/>
+          </a:xfrm>
+          <a:prstGeom prst="rect">
+            <a:avLst/>
+          </a:prstGeom>
+          <a:noFill/>
+          <a:ln/>
+        </p:spPr>
+        <p:txBody>
+          <a:bodyPr wrap="square" rtlCol="0" anchor="ctr"/>
+          <a:lstStyle/>
+          <a:p>
+            <a:pPr algn="ctr" indent="0" marL="0">
+              <a:buNone/>
+            </a:pPr>
+            <a:r>
+              <a:rPr lang="en-US" sz="2400" b="1" dirty="0">
+                <a:solidFill>
+                  <a:srgbClr val="5B8DB8"/>
+                </a:solidFill>
+                <a:latin typeface="Arial" pitchFamily="34" charset="0"/>
+                <a:ea typeface="Arial" pitchFamily="34" charset="-122"/>
+                <a:cs typeface="Arial" pitchFamily="34" charset="-120"/>
+              </a:rPr>
+              <a:t>→</a:t>
+            </a:r>
+            <a:endParaRPr lang="en-US" sz="2400" dirty="0"/>
+          </a:p>
+        </p:txBody>
+      </p:sp>
+      <p:sp>
+        <p:nvSpPr>
+          <p:cNvPr id="31" name="Shape 29"/>
+          <p:cNvSpPr/>
+          <p:nvPr/>
+        </p:nvSpPr>
+        <p:spPr>
+          <a:xfrm>
+            <a:off x="457200" y="4956048"/>
+            <a:ext cx="8375904" cy="685800"/>
+          </a:xfrm>
+          <a:prstGeom prst="roundRect">
+            <a:avLst>
+              <a:gd name="adj" fmla="val 10667"/>
+            </a:avLst>
+          </a:prstGeom>
+          <a:solidFill>
+            <a:srgbClr val="F0EDE8"/>
+          </a:solidFill>
+          <a:ln w="6350">
+            <a:solidFill>
+              <a:srgbClr val="E2E8F0"/>
+            </a:solidFill>
+            <a:prstDash val="solid"/>
+          </a:ln>
+        </p:spPr>
+      </p:sp>
+      <p:sp>
+        <p:nvSpPr>
+          <p:cNvPr id="32" name="Text 30"/>
+          <p:cNvSpPr/>
+          <p:nvPr/>
+        </p:nvSpPr>
+        <p:spPr>
+          <a:xfrm>
+            <a:off x="640080" y="5029200"/>
+            <a:ext cx="8010144" cy="502920"/>
+          </a:xfrm>
+          <a:prstGeom prst="rect">
+            <a:avLst/>
+          </a:prstGeom>
+          <a:noFill/>
+          <a:ln/>
+        </p:spPr>
+        <p:txBody>
+          <a:bodyPr wrap="square" rtlCol="0" anchor="ctr"/>
+          <a:lstStyle/>
+          <a:p>
+            <a:pPr algn="ctr" indent="0" marL="0">
+              <a:buNone/>
+            </a:pPr>
+            <a:r>
+              <a:rPr lang="en-US" sz="1300" b="1" dirty="0">
+                <a:solidFill>
+                  <a:srgbClr val="2D3748"/>
+                </a:solidFill>
+                <a:latin typeface="Arial" pitchFamily="34" charset="0"/>
+                <a:ea typeface="Arial" pitchFamily="34" charset="-122"/>
+                <a:cs typeface="Arial" pitchFamily="34" charset="-120"/>
+              </a:rPr>
+              <a:t>El director tiene evidencia lista ante cualquier inspección, queja o demanda — en todo momento.</a:t>
+            </a:r>
+            <a:endParaRPr lang="en-US" sz="1300" dirty="0"/>
+          </a:p>
+        </p:txBody>
+      </p:sp>
+      <p:sp>
+        <p:nvSpPr>
+          <p:cNvPr id="33" name="Text 31"/>
+          <p:cNvSpPr/>
+          <p:nvPr/>
+        </p:nvSpPr>
+        <p:spPr>
+          <a:xfrm>
+            <a:off x="457200" y="6291072"/>
+            <a:ext cx="8375904" cy="201168"/>
+          </a:xfrm>
+          <a:prstGeom prst="rect">
+            <a:avLst/>
+          </a:prstGeom>
+          <a:noFill/>
+          <a:ln/>
+        </p:spPr>
+        <p:txBody>
+          <a:bodyPr wrap="square" rtlCol="0" anchor="ctr"/>
+          <a:lstStyle/>
+          <a:p>
+            <a:pPr algn="ctr" indent="0" marL="0">
+              <a:buNone/>
+            </a:pPr>
+            <a:r>
+              <a:rPr lang="en-US" dirty="0">
+                <a:solidFill>
+                  <a:srgbClr val="718096"/>
+                </a:solidFill>
+                <a:latin typeface="Arial" pitchFamily="34" charset="0"/>
+                <a:ea typeface="Arial" pitchFamily="34" charset="-122"/>
+                <a:cs typeface="Arial" pitchFamily="34" charset="-120"/>
+              </a:rPr>
+              <a:t>MVP operacional · No dispositivo médico · Datos ficticios</a:t>
             </a:r>
             <a:endParaRPr lang="en-US" dirty="0"/>
           </a:p>

--- a/business/CareSignal_Pitch_Deck.pptx
+++ b/business/CareSignal_Pitch_Deck.pptx
@@ -12,9 +12,11 @@
     <p:sldId id="260" r:id="rId6"/>
     <p:sldId id="261" r:id="rId7"/>
     <p:sldId id="262" r:id="rId8"/>
+    <p:sldId id="263" r:id="rId9"/>
+    <p:sldId id="264" r:id="rId10"/>
   </p:sldIdLst>
   <p:notesMasterIdLst>
-    <p:notesMasterId r:id="rId9"/>
+    <p:notesMasterId r:id="rId11"/>
   </p:notesMasterIdLst>
   <p:sldSz cx="12192000" cy="6858000"/>
   <p:notesSz cx="6858000" cy="12192000"/>
@@ -1060,6 +1062,182 @@
             <a:fld id="{F7021451-1387-4CA6-816F-3879F97B5CBC}" type="slidenum">
               <a:rPr lang="en-US"/>
               <a:t>7</a:t>
+            </a:fld>
+            <a:endParaRPr lang="en-US"/>
+          </a:p>
+        </p:txBody>
+      </p:sp>
+    </p:spTree>
+    <p:extLst>
+      <p:ext uri="{BB962C8B-B14F-4D97-AF65-F5344CB8AC3E}">
+        <p14:creationId xmlns:p14="http://schemas.microsoft.com/office/powerpoint/2010/main" val="1024086991"/>
+      </p:ext>
+    </p:extLst>
+  </p:cSld>
+  <p:clrMapOvr>
+    <a:masterClrMapping/>
+  </p:clrMapOvr>
+</p:notes>
+</file>
+
+<file path=ppt/notesSlides/notesSlide8.xml><?xml version="1.0" encoding="utf-8"?>
+<p:notes xmlns:a="http://schemas.openxmlformats.org/drawingml/2006/main" xmlns:r="http://schemas.openxmlformats.org/officeDocument/2006/relationships" xmlns:p="http://schemas.openxmlformats.org/presentationml/2006/main">
+  <p:cSld>
+    <p:spTree>
+      <p:nvGrpSpPr>
+        <p:cNvPr id="1" name=""/>
+        <p:cNvGrpSpPr/>
+        <p:nvPr/>
+      </p:nvGrpSpPr>
+      <p:grpSpPr>
+        <a:xfrm>
+          <a:off x="0" y="0"/>
+          <a:ext cx="0" cy="0"/>
+          <a:chOff x="0" y="0"/>
+          <a:chExt cx="0" cy="0"/>
+        </a:xfrm>
+      </p:grpSpPr>
+      <p:sp>
+        <p:nvSpPr>
+          <p:cNvPr id="2" name="Slide Image Placeholder 1"/>
+          <p:cNvSpPr>
+            <a:spLocks noGrp="1" noRot="1" noChangeAspect="1"/>
+          </p:cNvSpPr>
+          <p:nvPr>
+            <p:ph type="sldImg"/>
+          </p:nvPr>
+        </p:nvSpPr>
+        <p:spPr/>
+      </p:sp>
+      <p:sp>
+        <p:nvSpPr>
+          <p:cNvPr id="3" name="Notes Placeholder 2"/>
+          <p:cNvSpPr>
+            <a:spLocks noGrp="1"/>
+          </p:cNvSpPr>
+          <p:nvPr>
+            <p:ph type="body" idx="1"/>
+          </p:nvPr>
+        </p:nvSpPr>
+        <p:spPr/>
+        <p:txBody>
+          <a:bodyPr/>
+          <a:lstStyle/>
+          <a:p>
+            <a:r>
+              <a:rPr lang="en-US" dirty="0"/>
+              <a:t/>
+            </a:r>
+            <a:endParaRPr lang="en-US" dirty="0"/>
+          </a:p>
+        </p:txBody>
+      </p:sp>
+      <p:sp>
+        <p:nvSpPr>
+          <p:cNvPr id="4" name="Slide Number Placeholder 3"/>
+          <p:cNvSpPr>
+            <a:spLocks noGrp="1"/>
+          </p:cNvSpPr>
+          <p:nvPr>
+            <p:ph type="sldNum" sz="quarter" idx="10"/>
+          </p:nvPr>
+        </p:nvSpPr>
+        <p:spPr/>
+        <p:txBody>
+          <a:bodyPr/>
+          <a:lstStyle/>
+          <a:p>
+            <a:fld id="{F7021451-1387-4CA6-816F-3879F97B5CBC}" type="slidenum">
+              <a:rPr lang="en-US"/>
+              <a:t>8</a:t>
+            </a:fld>
+            <a:endParaRPr lang="en-US"/>
+          </a:p>
+        </p:txBody>
+      </p:sp>
+    </p:spTree>
+    <p:extLst>
+      <p:ext uri="{BB962C8B-B14F-4D97-AF65-F5344CB8AC3E}">
+        <p14:creationId xmlns:p14="http://schemas.microsoft.com/office/powerpoint/2010/main" val="1024086991"/>
+      </p:ext>
+    </p:extLst>
+  </p:cSld>
+  <p:clrMapOvr>
+    <a:masterClrMapping/>
+  </p:clrMapOvr>
+</p:notes>
+</file>
+
+<file path=ppt/notesSlides/notesSlide9.xml><?xml version="1.0" encoding="utf-8"?>
+<p:notes xmlns:a="http://schemas.openxmlformats.org/drawingml/2006/main" xmlns:r="http://schemas.openxmlformats.org/officeDocument/2006/relationships" xmlns:p="http://schemas.openxmlformats.org/presentationml/2006/main">
+  <p:cSld>
+    <p:spTree>
+      <p:nvGrpSpPr>
+        <p:cNvPr id="1" name=""/>
+        <p:cNvGrpSpPr/>
+        <p:nvPr/>
+      </p:nvGrpSpPr>
+      <p:grpSpPr>
+        <a:xfrm>
+          <a:off x="0" y="0"/>
+          <a:ext cx="0" cy="0"/>
+          <a:chOff x="0" y="0"/>
+          <a:chExt cx="0" cy="0"/>
+        </a:xfrm>
+      </p:grpSpPr>
+      <p:sp>
+        <p:nvSpPr>
+          <p:cNvPr id="2" name="Slide Image Placeholder 1"/>
+          <p:cNvSpPr>
+            <a:spLocks noGrp="1" noRot="1" noChangeAspect="1"/>
+          </p:cNvSpPr>
+          <p:nvPr>
+            <p:ph type="sldImg"/>
+          </p:nvPr>
+        </p:nvSpPr>
+        <p:spPr/>
+      </p:sp>
+      <p:sp>
+        <p:nvSpPr>
+          <p:cNvPr id="3" name="Notes Placeholder 2"/>
+          <p:cNvSpPr>
+            <a:spLocks noGrp="1"/>
+          </p:cNvSpPr>
+          <p:nvPr>
+            <p:ph type="body" idx="1"/>
+          </p:nvPr>
+        </p:nvSpPr>
+        <p:spPr/>
+        <p:txBody>
+          <a:bodyPr/>
+          <a:lstStyle/>
+          <a:p>
+            <a:r>
+              <a:rPr lang="en-US" dirty="0"/>
+              <a:t/>
+            </a:r>
+            <a:endParaRPr lang="en-US" dirty="0"/>
+          </a:p>
+        </p:txBody>
+      </p:sp>
+      <p:sp>
+        <p:nvSpPr>
+          <p:cNvPr id="4" name="Slide Number Placeholder 3"/>
+          <p:cNvSpPr>
+            <a:spLocks noGrp="1"/>
+          </p:cNvSpPr>
+          <p:nvPr>
+            <p:ph type="sldNum" sz="quarter" idx="10"/>
+          </p:nvPr>
+        </p:nvSpPr>
+        <p:spPr/>
+        <p:txBody>
+          <a:bodyPr/>
+          <a:lstStyle/>
+          <a:p>
+            <a:fld id="{F7021451-1387-4CA6-816F-3879F97B5CBC}" type="slidenum">
+              <a:rPr lang="en-US"/>
+              <a:t>9</a:t>
             </a:fld>
             <a:endParaRPr lang="en-US"/>
           </a:p>
@@ -8016,6 +8194,2430 @@
 </p:sld>
 </file>
 
+<file path=ppt/slides/slide8.xml><?xml version="1.0" encoding="utf-8"?>
+<p:sld xmlns:a="http://schemas.openxmlformats.org/drawingml/2006/main" xmlns:r="http://schemas.openxmlformats.org/officeDocument/2006/relationships" xmlns:p="http://schemas.openxmlformats.org/presentationml/2006/main">
+  <p:cSld name="Slide 8">
+    <p:spTree>
+      <p:nvGrpSpPr>
+        <p:cNvPr id="1" name=""/>
+        <p:cNvGrpSpPr/>
+        <p:nvPr/>
+      </p:nvGrpSpPr>
+      <p:grpSpPr>
+        <a:xfrm>
+          <a:off x="0" y="0"/>
+          <a:ext cx="0" cy="0"/>
+          <a:chOff x="0" y="0"/>
+          <a:chExt cx="0" cy="0"/>
+        </a:xfrm>
+      </p:grpSpPr>
+      <p:sp>
+        <p:nvSpPr>
+          <p:cNvPr id="2" name="Shape 0"/>
+          <p:cNvSpPr/>
+          <p:nvPr/>
+        </p:nvSpPr>
+        <p:spPr>
+          <a:xfrm>
+            <a:off x="0" y="0"/>
+            <a:ext cx="12192000" cy="6858000"/>
+          </a:xfrm>
+          <a:prstGeom prst="rect">
+            <a:avLst/>
+          </a:prstGeom>
+          <a:solidFill>
+            <a:srgbClr val="FAFAF8"/>
+          </a:solidFill>
+          <a:ln w="12700">
+            <a:solidFill>
+              <a:srgbClr val="FAFAF8"/>
+            </a:solidFill>
+            <a:prstDash val="solid"/>
+          </a:ln>
+        </p:spPr>
+      </p:sp>
+      <p:sp>
+        <p:nvSpPr>
+          <p:cNvPr id="3" name="Shape 1"/>
+          <p:cNvSpPr/>
+          <p:nvPr/>
+        </p:nvSpPr>
+        <p:spPr>
+          <a:xfrm>
+            <a:off x="7132320" y="-1371600"/>
+            <a:ext cx="3474720" cy="3474720"/>
+          </a:xfrm>
+          <a:prstGeom prst="ellipse">
+            <a:avLst/>
+          </a:prstGeom>
+          <a:solidFill>
+            <a:srgbClr val="7BA68A">
+              <a:alpha val="16000"/>
+            </a:srgbClr>
+          </a:solidFill>
+          <a:ln w="12700">
+            <a:solidFill>
+              <a:srgbClr val="7BA68A">
+                <a:alpha val="16000"/>
+              </a:srgbClr>
+            </a:solidFill>
+            <a:prstDash val="solid"/>
+          </a:ln>
+        </p:spPr>
+      </p:sp>
+      <p:sp>
+        <p:nvSpPr>
+          <p:cNvPr id="4" name="Shape 2"/>
+          <p:cNvSpPr/>
+          <p:nvPr/>
+        </p:nvSpPr>
+        <p:spPr>
+          <a:xfrm>
+            <a:off x="-365760" y="5303520"/>
+            <a:ext cx="2011680" cy="2011680"/>
+          </a:xfrm>
+          <a:prstGeom prst="ellipse">
+            <a:avLst/>
+          </a:prstGeom>
+          <a:solidFill>
+            <a:srgbClr val="A8C4DC">
+              <a:alpha val="20000"/>
+            </a:srgbClr>
+          </a:solidFill>
+          <a:ln w="12700">
+            <a:solidFill>
+              <a:srgbClr val="A8C4DC">
+                <a:alpha val="20000"/>
+              </a:srgbClr>
+            </a:solidFill>
+            <a:prstDash val="solid"/>
+          </a:ln>
+        </p:spPr>
+      </p:sp>
+      <p:sp>
+        <p:nvSpPr>
+          <p:cNvPr id="5" name="Shape 3"/>
+          <p:cNvSpPr/>
+          <p:nvPr/>
+        </p:nvSpPr>
+        <p:spPr>
+          <a:xfrm rot="-1080000">
+            <a:off x="274320" y="5943600"/>
+            <a:ext cx="2286000" cy="0"/>
+          </a:xfrm>
+          <a:prstGeom prst="line">
+            <a:avLst/>
+          </a:prstGeom>
+          <a:noFill/>
+          <a:ln w="12700">
+            <a:solidFill>
+              <a:srgbClr val="E2E8F0"/>
+            </a:solidFill>
+            <a:prstDash val="solid"/>
+          </a:ln>
+        </p:spPr>
+      </p:sp>
+      <p:sp>
+        <p:nvSpPr>
+          <p:cNvPr id="6" name="Shape 4"/>
+          <p:cNvSpPr/>
+          <p:nvPr/>
+        </p:nvSpPr>
+        <p:spPr>
+          <a:xfrm>
+            <a:off x="0" y="0"/>
+            <a:ext cx="12192000" cy="54864"/>
+          </a:xfrm>
+          <a:prstGeom prst="rect">
+            <a:avLst/>
+          </a:prstGeom>
+          <a:solidFill>
+            <a:srgbClr val="5B8DB8"/>
+          </a:solidFill>
+          <a:ln w="12700">
+            <a:solidFill>
+              <a:srgbClr val="5B8DB8"/>
+            </a:solidFill>
+            <a:prstDash val="solid"/>
+          </a:ln>
+        </p:spPr>
+      </p:sp>
+      <p:sp>
+        <p:nvSpPr>
+          <p:cNvPr id="7" name="Shape 5"/>
+          <p:cNvSpPr/>
+          <p:nvPr/>
+        </p:nvSpPr>
+        <p:spPr>
+          <a:xfrm>
+            <a:off x="0" y="6528816"/>
+            <a:ext cx="12192000" cy="54864"/>
+          </a:xfrm>
+          <a:prstGeom prst="rect">
+            <a:avLst/>
+          </a:prstGeom>
+          <a:solidFill>
+            <a:srgbClr val="C4786A"/>
+          </a:solidFill>
+          <a:ln w="12700">
+            <a:solidFill>
+              <a:srgbClr val="C4786A"/>
+            </a:solidFill>
+            <a:prstDash val="solid"/>
+          </a:ln>
+        </p:spPr>
+      </p:sp>
+      <p:sp>
+        <p:nvSpPr>
+          <p:cNvPr id="8" name="Text 6"/>
+          <p:cNvSpPr/>
+          <p:nvPr/>
+        </p:nvSpPr>
+        <p:spPr>
+          <a:xfrm>
+            <a:off x="457200" y="228600"/>
+            <a:ext cx="8375904" cy="502920"/>
+          </a:xfrm>
+          <a:prstGeom prst="rect">
+            <a:avLst/>
+          </a:prstGeom>
+          <a:noFill/>
+          <a:ln/>
+        </p:spPr>
+        <p:txBody>
+          <a:bodyPr wrap="square" rtlCol="0" anchor="ctr"/>
+          <a:lstStyle/>
+          <a:p>
+            <a:pPr indent="0" marL="0">
+              <a:buNone/>
+            </a:pPr>
+            <a:r>
+              <a:rPr lang="en-US" b="1" dirty="0">
+                <a:solidFill>
+                  <a:srgbClr val="2D3748"/>
+                </a:solidFill>
+                <a:latin typeface="Arial" pitchFamily="34" charset="0"/>
+                <a:ea typeface="Arial" pitchFamily="34" charset="-122"/>
+                <a:cs typeface="Arial" pitchFamily="34" charset="-120"/>
+              </a:rPr>
+              <a:t>📊  Tamaño de mercado</a:t>
+            </a:r>
+            <a:endParaRPr lang="en-US" dirty="0"/>
+          </a:p>
+        </p:txBody>
+      </p:sp>
+      <p:sp>
+        <p:nvSpPr>
+          <p:cNvPr id="9" name="Text 7"/>
+          <p:cNvSpPr/>
+          <p:nvPr/>
+        </p:nvSpPr>
+        <p:spPr>
+          <a:xfrm>
+            <a:off x="457200" y="731520"/>
+            <a:ext cx="8375904" cy="320040"/>
+          </a:xfrm>
+          <a:prstGeom prst="rect">
+            <a:avLst/>
+          </a:prstGeom>
+          <a:noFill/>
+          <a:ln/>
+        </p:spPr>
+        <p:txBody>
+          <a:bodyPr wrap="square" rtlCol="0" anchor="ctr"/>
+          <a:lstStyle/>
+          <a:p>
+            <a:pPr indent="0" marL="0">
+              <a:buNone/>
+            </a:pPr>
+            <a:r>
+              <a:rPr lang="en-US" b="1" dirty="0">
+                <a:solidFill>
+                  <a:srgbClr val="5B8DB8"/>
+                </a:solidFill>
+                <a:latin typeface="Arial" pitchFamily="34" charset="0"/>
+                <a:ea typeface="Arial" pitchFamily="34" charset="-122"/>
+                <a:cs typeface="Arial" pitchFamily="34" charset="-120"/>
+              </a:rPr>
+              <a:t>México · SaaS B2B · por residencia / mes</a:t>
+            </a:r>
+            <a:endParaRPr lang="en-US" dirty="0"/>
+          </a:p>
+        </p:txBody>
+      </p:sp>
+      <p:sp>
+        <p:nvSpPr>
+          <p:cNvPr id="10" name="Shape 8"/>
+          <p:cNvSpPr/>
+          <p:nvPr/>
+        </p:nvSpPr>
+        <p:spPr>
+          <a:xfrm>
+            <a:off x="457200" y="1097280"/>
+            <a:ext cx="8375904" cy="0"/>
+          </a:xfrm>
+          <a:prstGeom prst="line">
+            <a:avLst/>
+          </a:prstGeom>
+          <a:noFill/>
+          <a:ln w="12700">
+            <a:solidFill>
+              <a:srgbClr val="E2E8F0"/>
+            </a:solidFill>
+            <a:prstDash val="solid"/>
+          </a:ln>
+        </p:spPr>
+      </p:sp>
+      <p:sp>
+        <p:nvSpPr>
+          <p:cNvPr id="11" name="Shape 9"/>
+          <p:cNvSpPr/>
+          <p:nvPr/>
+        </p:nvSpPr>
+        <p:spPr>
+          <a:xfrm>
+            <a:off x="457200" y="1261872"/>
+            <a:ext cx="8375904" cy="1371600"/>
+          </a:xfrm>
+          <a:prstGeom prst="roundRect">
+            <a:avLst>
+              <a:gd name="adj" fmla="val 6667"/>
+            </a:avLst>
+          </a:prstGeom>
+          <a:solidFill>
+            <a:srgbClr val="A8C4DC"/>
+          </a:solidFill>
+          <a:ln w="6350">
+            <a:solidFill>
+              <a:srgbClr val="E2E8F0"/>
+            </a:solidFill>
+            <a:prstDash val="solid"/>
+          </a:ln>
+        </p:spPr>
+      </p:sp>
+      <p:sp>
+        <p:nvSpPr>
+          <p:cNvPr id="12" name="Text 10"/>
+          <p:cNvSpPr/>
+          <p:nvPr/>
+        </p:nvSpPr>
+        <p:spPr>
+          <a:xfrm>
+            <a:off x="621792" y="1371600"/>
+            <a:ext cx="914400" cy="384048"/>
+          </a:xfrm>
+          <a:prstGeom prst="rect">
+            <a:avLst/>
+          </a:prstGeom>
+          <a:noFill/>
+          <a:ln/>
+        </p:spPr>
+        <p:txBody>
+          <a:bodyPr wrap="square" rtlCol="0" anchor="ctr"/>
+          <a:lstStyle/>
+          <a:p>
+            <a:pPr indent="0" marL="0">
+              <a:buNone/>
+            </a:pPr>
+            <a:r>
+              <a:rPr lang="en-US" sz="1500" b="1" dirty="0">
+                <a:solidFill>
+                  <a:srgbClr val="3A6B96"/>
+                </a:solidFill>
+                <a:latin typeface="Arial" pitchFamily="34" charset="0"/>
+                <a:ea typeface="Arial" pitchFamily="34" charset="-122"/>
+                <a:cs typeface="Arial" pitchFamily="34" charset="-120"/>
+              </a:rPr>
+              <a:t>TAM</a:t>
+            </a:r>
+            <a:endParaRPr lang="en-US" sz="1500" dirty="0"/>
+          </a:p>
+        </p:txBody>
+      </p:sp>
+      <p:sp>
+        <p:nvSpPr>
+          <p:cNvPr id="13" name="Text 11"/>
+          <p:cNvSpPr/>
+          <p:nvPr/>
+        </p:nvSpPr>
+        <p:spPr>
+          <a:xfrm>
+            <a:off x="1600200" y="1335024"/>
+            <a:ext cx="4114800" cy="685800"/>
+          </a:xfrm>
+          <a:prstGeom prst="rect">
+            <a:avLst/>
+          </a:prstGeom>
+          <a:noFill/>
+          <a:ln/>
+        </p:spPr>
+        <p:txBody>
+          <a:bodyPr wrap="square" rtlCol="0" anchor="ctr"/>
+          <a:lstStyle/>
+          <a:p>
+            <a:pPr indent="0" marL="0">
+              <a:buNone/>
+            </a:pPr>
+            <a:r>
+              <a:rPr lang="en-US" sz="1100" dirty="0">
+                <a:solidFill>
+                  <a:srgbClr val="2D3748"/>
+                </a:solidFill>
+                <a:latin typeface="Arial" pitchFamily="34" charset="0"/>
+                <a:ea typeface="Arial" pitchFamily="34" charset="-122"/>
+                <a:cs typeface="Arial" pitchFamily="34" charset="-120"/>
+              </a:rPr>
+              <a:t>Mercado total cuidados</a:t>
+            </a:r>
+            <a:endParaRPr lang="en-US" sz="1100" dirty="0"/>
+          </a:p>
+          <a:p>
+            <a:pPr indent="0" marL="0">
+              <a:buNone/>
+            </a:pPr>
+            <a:r>
+              <a:rPr lang="en-US" sz="1100" dirty="0">
+                <a:solidFill>
+                  <a:srgbClr val="2D3748"/>
+                </a:solidFill>
+                <a:latin typeface="Arial" pitchFamily="34" charset="0"/>
+                <a:ea typeface="Arial" pitchFamily="34" charset="-122"/>
+                <a:cs typeface="Arial" pitchFamily="34" charset="-120"/>
+              </a:rPr>
+              <a:t>geriátricos MX + LatAm</a:t>
+            </a:r>
+            <a:endParaRPr lang="en-US" sz="1100" dirty="0"/>
+          </a:p>
+        </p:txBody>
+      </p:sp>
+      <p:sp>
+        <p:nvSpPr>
+          <p:cNvPr id="14" name="Text 12"/>
+          <p:cNvSpPr/>
+          <p:nvPr/>
+        </p:nvSpPr>
+        <p:spPr>
+          <a:xfrm>
+            <a:off x="5760720" y="1490472"/>
+            <a:ext cx="2743200" cy="384048"/>
+          </a:xfrm>
+          <a:prstGeom prst="rect">
+            <a:avLst/>
+          </a:prstGeom>
+          <a:noFill/>
+          <a:ln/>
+        </p:spPr>
+        <p:txBody>
+          <a:bodyPr wrap="square" rtlCol="0" anchor="ctr"/>
+          <a:lstStyle/>
+          <a:p>
+            <a:pPr algn="r" indent="0" marL="0">
+              <a:buNone/>
+            </a:pPr>
+            <a:r>
+              <a:rPr lang="en-US" sz="1300" b="1" dirty="0">
+                <a:solidFill>
+                  <a:srgbClr val="3A6B96"/>
+                </a:solidFill>
+                <a:latin typeface="Arial" pitchFamily="34" charset="0"/>
+                <a:ea typeface="Arial" pitchFamily="34" charset="-122"/>
+                <a:cs typeface="Arial" pitchFamily="34" charset="-120"/>
+              </a:rPr>
+              <a:t>&gt; USD 25,000 M</a:t>
+            </a:r>
+            <a:endParaRPr lang="en-US" sz="1300" dirty="0"/>
+          </a:p>
+        </p:txBody>
+      </p:sp>
+      <p:sp>
+        <p:nvSpPr>
+          <p:cNvPr id="15" name="Shape 13"/>
+          <p:cNvSpPr/>
+          <p:nvPr/>
+        </p:nvSpPr>
+        <p:spPr>
+          <a:xfrm>
+            <a:off x="868680" y="2423160"/>
+            <a:ext cx="7552944" cy="1325880"/>
+          </a:xfrm>
+          <a:prstGeom prst="roundRect">
+            <a:avLst>
+              <a:gd name="adj" fmla="val 6897"/>
+            </a:avLst>
+          </a:prstGeom>
+          <a:solidFill>
+            <a:srgbClr val="D1E8F5"/>
+          </a:solidFill>
+          <a:ln w="6350">
+            <a:solidFill>
+              <a:srgbClr val="E2E8F0"/>
+            </a:solidFill>
+            <a:prstDash val="solid"/>
+          </a:ln>
+        </p:spPr>
+      </p:sp>
+      <p:sp>
+        <p:nvSpPr>
+          <p:cNvPr id="16" name="Text 14"/>
+          <p:cNvSpPr/>
+          <p:nvPr/>
+        </p:nvSpPr>
+        <p:spPr>
+          <a:xfrm>
+            <a:off x="1033272" y="2532888"/>
+            <a:ext cx="914400" cy="384048"/>
+          </a:xfrm>
+          <a:prstGeom prst="rect">
+            <a:avLst/>
+          </a:prstGeom>
+          <a:noFill/>
+          <a:ln/>
+        </p:spPr>
+        <p:txBody>
+          <a:bodyPr wrap="square" rtlCol="0" anchor="ctr"/>
+          <a:lstStyle/>
+          <a:p>
+            <a:pPr indent="0" marL="0">
+              <a:buNone/>
+            </a:pPr>
+            <a:r>
+              <a:rPr lang="en-US" sz="1500" b="1" dirty="0">
+                <a:solidFill>
+                  <a:srgbClr val="3A6B96"/>
+                </a:solidFill>
+                <a:latin typeface="Arial" pitchFamily="34" charset="0"/>
+                <a:ea typeface="Arial" pitchFamily="34" charset="-122"/>
+                <a:cs typeface="Arial" pitchFamily="34" charset="-120"/>
+              </a:rPr>
+              <a:t>SAM</a:t>
+            </a:r>
+            <a:endParaRPr lang="en-US" sz="1500" dirty="0"/>
+          </a:p>
+        </p:txBody>
+      </p:sp>
+      <p:sp>
+        <p:nvSpPr>
+          <p:cNvPr id="17" name="Text 15"/>
+          <p:cNvSpPr/>
+          <p:nvPr/>
+        </p:nvSpPr>
+        <p:spPr>
+          <a:xfrm>
+            <a:off x="2011680" y="2496312"/>
+            <a:ext cx="4114800" cy="685800"/>
+          </a:xfrm>
+          <a:prstGeom prst="rect">
+            <a:avLst/>
+          </a:prstGeom>
+          <a:noFill/>
+          <a:ln/>
+        </p:spPr>
+        <p:txBody>
+          <a:bodyPr wrap="square" rtlCol="0" anchor="ctr"/>
+          <a:lstStyle/>
+          <a:p>
+            <a:pPr indent="0" marL="0">
+              <a:buNone/>
+            </a:pPr>
+            <a:r>
+              <a:rPr lang="en-US" sz="1100" dirty="0">
+                <a:solidFill>
+                  <a:srgbClr val="2D3748"/>
+                </a:solidFill>
+                <a:latin typeface="Arial" pitchFamily="34" charset="0"/>
+                <a:ea typeface="Arial" pitchFamily="34" charset="-122"/>
+                <a:cs typeface="Arial" pitchFamily="34" charset="-120"/>
+              </a:rPr>
+              <a:t>~1,100–1,300 residencias</a:t>
+            </a:r>
+            <a:endParaRPr lang="en-US" sz="1100" dirty="0"/>
+          </a:p>
+          <a:p>
+            <a:pPr indent="0" marL="0">
+              <a:buNone/>
+            </a:pPr>
+            <a:r>
+              <a:rPr lang="en-US" sz="1100" dirty="0">
+                <a:solidFill>
+                  <a:srgbClr val="2D3748"/>
+                </a:solidFill>
+                <a:latin typeface="Arial" pitchFamily="34" charset="0"/>
+                <a:ea typeface="Arial" pitchFamily="34" charset="-122"/>
+                <a:cs typeface="Arial" pitchFamily="34" charset="-120"/>
+              </a:rPr>
+              <a:t>privadas formales en MX</a:t>
+            </a:r>
+            <a:endParaRPr lang="en-US" sz="1100" dirty="0"/>
+          </a:p>
+        </p:txBody>
+      </p:sp>
+      <p:sp>
+        <p:nvSpPr>
+          <p:cNvPr id="18" name="Text 16"/>
+          <p:cNvSpPr/>
+          <p:nvPr/>
+        </p:nvSpPr>
+        <p:spPr>
+          <a:xfrm>
+            <a:off x="6172200" y="2651760"/>
+            <a:ext cx="2743200" cy="384048"/>
+          </a:xfrm>
+          <a:prstGeom prst="rect">
+            <a:avLst/>
+          </a:prstGeom>
+          <a:noFill/>
+          <a:ln/>
+        </p:spPr>
+        <p:txBody>
+          <a:bodyPr wrap="square" rtlCol="0" anchor="ctr"/>
+          <a:lstStyle/>
+          <a:p>
+            <a:pPr algn="r" indent="0" marL="0">
+              <a:buNone/>
+            </a:pPr>
+            <a:r>
+              <a:rPr lang="en-US" sz="1300" b="1" dirty="0">
+                <a:solidFill>
+                  <a:srgbClr val="3A6B96"/>
+                </a:solidFill>
+                <a:latin typeface="Arial" pitchFamily="34" charset="0"/>
+                <a:ea typeface="Arial" pitchFamily="34" charset="-122"/>
+                <a:cs typeface="Arial" pitchFamily="34" charset="-120"/>
+              </a:rPr>
+              <a:t>DENUE 2025 · +18 % anual</a:t>
+            </a:r>
+            <a:endParaRPr lang="en-US" sz="1300" dirty="0"/>
+          </a:p>
+        </p:txBody>
+      </p:sp>
+      <p:sp>
+        <p:nvSpPr>
+          <p:cNvPr id="19" name="Shape 17"/>
+          <p:cNvSpPr/>
+          <p:nvPr/>
+        </p:nvSpPr>
+        <p:spPr>
+          <a:xfrm>
+            <a:off x="1280160" y="3547872"/>
+            <a:ext cx="6729984" cy="1325880"/>
+          </a:xfrm>
+          <a:prstGeom prst="roundRect">
+            <a:avLst>
+              <a:gd name="adj" fmla="val 6897"/>
+            </a:avLst>
+          </a:prstGeom>
+          <a:solidFill>
+            <a:srgbClr val="F0EDE8"/>
+          </a:solidFill>
+          <a:ln w="6350">
+            <a:solidFill>
+              <a:srgbClr val="E2E8F0"/>
+            </a:solidFill>
+            <a:prstDash val="solid"/>
+          </a:ln>
+        </p:spPr>
+      </p:sp>
+      <p:sp>
+        <p:nvSpPr>
+          <p:cNvPr id="20" name="Text 18"/>
+          <p:cNvSpPr/>
+          <p:nvPr/>
+        </p:nvSpPr>
+        <p:spPr>
+          <a:xfrm>
+            <a:off x="1444752" y="3657600"/>
+            <a:ext cx="914400" cy="384048"/>
+          </a:xfrm>
+          <a:prstGeom prst="rect">
+            <a:avLst/>
+          </a:prstGeom>
+          <a:noFill/>
+          <a:ln/>
+        </p:spPr>
+        <p:txBody>
+          <a:bodyPr wrap="square" rtlCol="0" anchor="ctr"/>
+          <a:lstStyle/>
+          <a:p>
+            <a:pPr indent="0" marL="0">
+              <a:buNone/>
+            </a:pPr>
+            <a:r>
+              <a:rPr lang="en-US" sz="1500" b="1" dirty="0">
+                <a:solidFill>
+                  <a:srgbClr val="3A6B96"/>
+                </a:solidFill>
+                <a:latin typeface="Arial" pitchFamily="34" charset="0"/>
+                <a:ea typeface="Arial" pitchFamily="34" charset="-122"/>
+                <a:cs typeface="Arial" pitchFamily="34" charset="-120"/>
+              </a:rPr>
+              <a:t>SOM</a:t>
+            </a:r>
+            <a:endParaRPr lang="en-US" sz="1500" dirty="0"/>
+          </a:p>
+        </p:txBody>
+      </p:sp>
+      <p:sp>
+        <p:nvSpPr>
+          <p:cNvPr id="21" name="Text 19"/>
+          <p:cNvSpPr/>
+          <p:nvPr/>
+        </p:nvSpPr>
+        <p:spPr>
+          <a:xfrm>
+            <a:off x="2423160" y="3621024"/>
+            <a:ext cx="4114800" cy="685800"/>
+          </a:xfrm>
+          <a:prstGeom prst="rect">
+            <a:avLst/>
+          </a:prstGeom>
+          <a:noFill/>
+          <a:ln/>
+        </p:spPr>
+        <p:txBody>
+          <a:bodyPr wrap="square" rtlCol="0" anchor="ctr"/>
+          <a:lstStyle/>
+          <a:p>
+            <a:pPr indent="0" marL="0">
+              <a:buNone/>
+            </a:pPr>
+            <a:r>
+              <a:rPr lang="en-US" sz="1100" dirty="0">
+                <a:solidFill>
+                  <a:srgbClr val="2D3748"/>
+                </a:solidFill>
+                <a:latin typeface="Arial" pitchFamily="34" charset="0"/>
+                <a:ea typeface="Arial" pitchFamily="34" charset="-122"/>
+                <a:cs typeface="Arial" pitchFamily="34" charset="-120"/>
+              </a:rPr>
+              <a:t>Objetivo 3–5 años:</a:t>
+            </a:r>
+            <a:endParaRPr lang="en-US" sz="1100" dirty="0"/>
+          </a:p>
+          <a:p>
+            <a:pPr indent="0" marL="0">
+              <a:buNone/>
+            </a:pPr>
+            <a:r>
+              <a:rPr lang="en-US" sz="1100" dirty="0">
+                <a:solidFill>
+                  <a:srgbClr val="2D3748"/>
+                </a:solidFill>
+                <a:latin typeface="Arial" pitchFamily="34" charset="0"/>
+                <a:ea typeface="Arial" pitchFamily="34" charset="-122"/>
+                <a:cs typeface="Arial" pitchFamily="34" charset="-120"/>
+              </a:rPr>
+              <a:t>50–200 residencias piloto</a:t>
+            </a:r>
+            <a:endParaRPr lang="en-US" sz="1100" dirty="0"/>
+          </a:p>
+        </p:txBody>
+      </p:sp>
+      <p:sp>
+        <p:nvSpPr>
+          <p:cNvPr id="22" name="Text 20"/>
+          <p:cNvSpPr/>
+          <p:nvPr/>
+        </p:nvSpPr>
+        <p:spPr>
+          <a:xfrm>
+            <a:off x="6583680" y="3776472"/>
+            <a:ext cx="2743200" cy="384048"/>
+          </a:xfrm>
+          <a:prstGeom prst="rect">
+            <a:avLst/>
+          </a:prstGeom>
+          <a:noFill/>
+          <a:ln/>
+        </p:spPr>
+        <p:txBody>
+          <a:bodyPr wrap="square" rtlCol="0" anchor="ctr"/>
+          <a:lstStyle/>
+          <a:p>
+            <a:pPr algn="r" indent="0" marL="0">
+              <a:buNone/>
+            </a:pPr>
+            <a:r>
+              <a:rPr lang="en-US" sz="1300" b="1" dirty="0">
+                <a:solidFill>
+                  <a:srgbClr val="3A6B96"/>
+                </a:solidFill>
+                <a:latin typeface="Arial" pitchFamily="34" charset="0"/>
+                <a:ea typeface="Arial" pitchFamily="34" charset="-122"/>
+                <a:cs typeface="Arial" pitchFamily="34" charset="-120"/>
+              </a:rPr>
+              <a:t>$175K – $700K MXN/mes</a:t>
+            </a:r>
+            <a:endParaRPr lang="en-US" sz="1300" dirty="0"/>
+          </a:p>
+        </p:txBody>
+      </p:sp>
+      <p:sp>
+        <p:nvSpPr>
+          <p:cNvPr id="23" name="Shape 21"/>
+          <p:cNvSpPr/>
+          <p:nvPr/>
+        </p:nvSpPr>
+        <p:spPr>
+          <a:xfrm>
+            <a:off x="457200" y="5047488"/>
+            <a:ext cx="8375904" cy="594360"/>
+          </a:xfrm>
+          <a:prstGeom prst="roundRect">
+            <a:avLst>
+              <a:gd name="adj" fmla="val 12308"/>
+            </a:avLst>
+          </a:prstGeom>
+          <a:solidFill>
+            <a:srgbClr val="F0EDE8"/>
+          </a:solidFill>
+          <a:ln w="6350">
+            <a:solidFill>
+              <a:srgbClr val="E2E8F0"/>
+            </a:solidFill>
+            <a:prstDash val="solid"/>
+          </a:ln>
+        </p:spPr>
+      </p:sp>
+      <p:sp>
+        <p:nvSpPr>
+          <p:cNvPr id="24" name="Text 22"/>
+          <p:cNvSpPr/>
+          <p:nvPr/>
+        </p:nvSpPr>
+        <p:spPr>
+          <a:xfrm>
+            <a:off x="640080" y="5120640"/>
+            <a:ext cx="8010144" cy="438912"/>
+          </a:xfrm>
+          <a:prstGeom prst="rect">
+            <a:avLst/>
+          </a:prstGeom>
+          <a:noFill/>
+          <a:ln/>
+        </p:spPr>
+        <p:txBody>
+          <a:bodyPr wrap="square" rtlCol="0" anchor="ctr"/>
+          <a:lstStyle/>
+          <a:p>
+            <a:pPr indent="0" marL="0">
+              <a:buNone/>
+            </a:pPr>
+            <a:r>
+              <a:rPr lang="en-US" sz="1200" dirty="0">
+                <a:solidFill>
+                  <a:srgbClr val="2D3748"/>
+                </a:solidFill>
+                <a:latin typeface="Arial" pitchFamily="34" charset="0"/>
+                <a:ea typeface="Arial" pitchFamily="34" charset="-122"/>
+                <a:cs typeface="Arial" pitchFamily="34" charset="-120"/>
+              </a:rPr>
+              <a:t>📈  El registro del sector creció +18 % en un año (DENUE 2024→2025) — mercado en expansión activa.</a:t>
+            </a:r>
+            <a:endParaRPr lang="en-US" sz="1200" dirty="0"/>
+          </a:p>
+        </p:txBody>
+      </p:sp>
+      <p:sp>
+        <p:nvSpPr>
+          <p:cNvPr id="25" name="Text 23"/>
+          <p:cNvSpPr/>
+          <p:nvPr/>
+        </p:nvSpPr>
+        <p:spPr>
+          <a:xfrm>
+            <a:off x="457200" y="6291072"/>
+            <a:ext cx="8375904" cy="201168"/>
+          </a:xfrm>
+          <a:prstGeom prst="rect">
+            <a:avLst/>
+          </a:prstGeom>
+          <a:noFill/>
+          <a:ln/>
+        </p:spPr>
+        <p:txBody>
+          <a:bodyPr wrap="square" rtlCol="0" anchor="ctr"/>
+          <a:lstStyle/>
+          <a:p>
+            <a:pPr algn="l" indent="0" marL="0">
+              <a:buNone/>
+            </a:pPr>
+            <a:r>
+              <a:rPr lang="en-US" dirty="0">
+                <a:solidFill>
+                  <a:srgbClr val="718096"/>
+                </a:solidFill>
+                <a:latin typeface="Arial" pitchFamily="34" charset="0"/>
+                <a:ea typeface="Arial" pitchFamily="34" charset="-122"/>
+                <a:cs typeface="Arial" pitchFamily="34" charset="-120"/>
+              </a:rPr>
+              <a:t>Fuentes: DENUE 2025 · IMARC Group · Grand View Research  ·  Precios de referencia, no validados con clientes</a:t>
+            </a:r>
+            <a:endParaRPr lang="en-US" dirty="0"/>
+          </a:p>
+        </p:txBody>
+      </p:sp>
+    </p:spTree>
+  </p:cSld>
+  <p:clrMapOvr>
+    <a:masterClrMapping/>
+  </p:clrMapOvr>
+</p:sld>
+</file>
+
+<file path=ppt/slides/slide9.xml><?xml version="1.0" encoding="utf-8"?>
+<p:sld xmlns:a="http://schemas.openxmlformats.org/drawingml/2006/main" xmlns:r="http://schemas.openxmlformats.org/officeDocument/2006/relationships" xmlns:p="http://schemas.openxmlformats.org/presentationml/2006/main">
+  <p:cSld name="Slide 9">
+    <p:spTree>
+      <p:nvGrpSpPr>
+        <p:cNvPr id="1" name=""/>
+        <p:cNvGrpSpPr/>
+        <p:nvPr/>
+      </p:nvGrpSpPr>
+      <p:grpSpPr>
+        <a:xfrm>
+          <a:off x="0" y="0"/>
+          <a:ext cx="0" cy="0"/>
+          <a:chOff x="0" y="0"/>
+          <a:chExt cx="0" cy="0"/>
+        </a:xfrm>
+      </p:grpSpPr>
+      <p:sp>
+        <p:nvSpPr>
+          <p:cNvPr id="2" name="Shape 0"/>
+          <p:cNvSpPr/>
+          <p:nvPr/>
+        </p:nvSpPr>
+        <p:spPr>
+          <a:xfrm>
+            <a:off x="0" y="0"/>
+            <a:ext cx="12192000" cy="6858000"/>
+          </a:xfrm>
+          <a:prstGeom prst="rect">
+            <a:avLst/>
+          </a:prstGeom>
+          <a:solidFill>
+            <a:srgbClr val="FAFAF8"/>
+          </a:solidFill>
+          <a:ln w="12700">
+            <a:solidFill>
+              <a:srgbClr val="FAFAF8"/>
+            </a:solidFill>
+            <a:prstDash val="solid"/>
+          </a:ln>
+        </p:spPr>
+      </p:sp>
+      <p:sp>
+        <p:nvSpPr>
+          <p:cNvPr id="3" name="Shape 1"/>
+          <p:cNvSpPr/>
+          <p:nvPr/>
+        </p:nvSpPr>
+        <p:spPr>
+          <a:xfrm>
+            <a:off x="6583680" y="4389120"/>
+            <a:ext cx="3840480" cy="3840480"/>
+          </a:xfrm>
+          <a:prstGeom prst="ellipse">
+            <a:avLst/>
+          </a:prstGeom>
+          <a:solidFill>
+            <a:srgbClr val="A8C4DC">
+              <a:alpha val="18000"/>
+            </a:srgbClr>
+          </a:solidFill>
+          <a:ln w="12700">
+            <a:solidFill>
+              <a:srgbClr val="A8C4DC">
+                <a:alpha val="18000"/>
+              </a:srgbClr>
+            </a:solidFill>
+            <a:prstDash val="solid"/>
+          </a:ln>
+        </p:spPr>
+      </p:sp>
+      <p:sp>
+        <p:nvSpPr>
+          <p:cNvPr id="4" name="Shape 2"/>
+          <p:cNvSpPr/>
+          <p:nvPr/>
+        </p:nvSpPr>
+        <p:spPr>
+          <a:xfrm>
+            <a:off x="-1005840" y="-1097280"/>
+            <a:ext cx="2926080" cy="2926080"/>
+          </a:xfrm>
+          <a:prstGeom prst="ellipse">
+            <a:avLst/>
+          </a:prstGeom>
+          <a:solidFill>
+            <a:srgbClr val="C4786A">
+              <a:alpha val="12000"/>
+            </a:srgbClr>
+          </a:solidFill>
+          <a:ln w="12700">
+            <a:solidFill>
+              <a:srgbClr val="C4786A">
+                <a:alpha val="12000"/>
+              </a:srgbClr>
+            </a:solidFill>
+            <a:prstDash val="solid"/>
+          </a:ln>
+        </p:spPr>
+      </p:sp>
+      <p:sp>
+        <p:nvSpPr>
+          <p:cNvPr id="5" name="Shape 3"/>
+          <p:cNvSpPr/>
+          <p:nvPr/>
+        </p:nvSpPr>
+        <p:spPr>
+          <a:xfrm>
+            <a:off x="8778240" y="1645920"/>
+            <a:ext cx="54864" cy="2194560"/>
+          </a:xfrm>
+          <a:prstGeom prst="rect">
+            <a:avLst/>
+          </a:prstGeom>
+          <a:solidFill>
+            <a:srgbClr val="5B8DB8">
+              <a:alpha val="45000"/>
+            </a:srgbClr>
+          </a:solidFill>
+          <a:ln w="12700">
+            <a:solidFill>
+              <a:srgbClr val="5B8DB8">
+                <a:alpha val="45000"/>
+              </a:srgbClr>
+            </a:solidFill>
+            <a:prstDash val="solid"/>
+          </a:ln>
+        </p:spPr>
+      </p:sp>
+      <p:sp>
+        <p:nvSpPr>
+          <p:cNvPr id="6" name="Shape 4"/>
+          <p:cNvSpPr/>
+          <p:nvPr/>
+        </p:nvSpPr>
+        <p:spPr>
+          <a:xfrm>
+            <a:off x="0" y="0"/>
+            <a:ext cx="12192000" cy="54864"/>
+          </a:xfrm>
+          <a:prstGeom prst="rect">
+            <a:avLst/>
+          </a:prstGeom>
+          <a:solidFill>
+            <a:srgbClr val="5B8DB8"/>
+          </a:solidFill>
+          <a:ln w="12700">
+            <a:solidFill>
+              <a:srgbClr val="5B8DB8"/>
+            </a:solidFill>
+            <a:prstDash val="solid"/>
+          </a:ln>
+        </p:spPr>
+      </p:sp>
+      <p:sp>
+        <p:nvSpPr>
+          <p:cNvPr id="7" name="Shape 5"/>
+          <p:cNvSpPr/>
+          <p:nvPr/>
+        </p:nvSpPr>
+        <p:spPr>
+          <a:xfrm>
+            <a:off x="0" y="6528816"/>
+            <a:ext cx="12192000" cy="54864"/>
+          </a:xfrm>
+          <a:prstGeom prst="rect">
+            <a:avLst/>
+          </a:prstGeom>
+          <a:solidFill>
+            <a:srgbClr val="C4786A"/>
+          </a:solidFill>
+          <a:ln w="12700">
+            <a:solidFill>
+              <a:srgbClr val="C4786A"/>
+            </a:solidFill>
+            <a:prstDash val="solid"/>
+          </a:ln>
+        </p:spPr>
+      </p:sp>
+      <p:sp>
+        <p:nvSpPr>
+          <p:cNvPr id="8" name="Text 6"/>
+          <p:cNvSpPr/>
+          <p:nvPr/>
+        </p:nvSpPr>
+        <p:spPr>
+          <a:xfrm>
+            <a:off x="457200" y="228600"/>
+            <a:ext cx="8375904" cy="502920"/>
+          </a:xfrm>
+          <a:prstGeom prst="rect">
+            <a:avLst/>
+          </a:prstGeom>
+          <a:noFill/>
+          <a:ln/>
+        </p:spPr>
+        <p:txBody>
+          <a:bodyPr wrap="square" rtlCol="0" anchor="ctr"/>
+          <a:lstStyle/>
+          <a:p>
+            <a:pPr indent="0" marL="0">
+              <a:buNone/>
+            </a:pPr>
+            <a:r>
+              <a:rPr lang="en-US" b="1" dirty="0">
+                <a:solidFill>
+                  <a:srgbClr val="2D3748"/>
+                </a:solidFill>
+                <a:latin typeface="Arial" pitchFamily="34" charset="0"/>
+                <a:ea typeface="Arial" pitchFamily="34" charset="-122"/>
+                <a:cs typeface="Arial" pitchFamily="34" charset="-120"/>
+              </a:rPr>
+              <a:t>🏆  ¿Por qué CareSignal?</a:t>
+            </a:r>
+            <a:endParaRPr lang="en-US" dirty="0"/>
+          </a:p>
+        </p:txBody>
+      </p:sp>
+      <p:sp>
+        <p:nvSpPr>
+          <p:cNvPr id="9" name="Text 7"/>
+          <p:cNvSpPr/>
+          <p:nvPr/>
+        </p:nvSpPr>
+        <p:spPr>
+          <a:xfrm>
+            <a:off x="457200" y="731520"/>
+            <a:ext cx="8375904" cy="320040"/>
+          </a:xfrm>
+          <a:prstGeom prst="rect">
+            <a:avLst/>
+          </a:prstGeom>
+          <a:noFill/>
+          <a:ln/>
+        </p:spPr>
+        <p:txBody>
+          <a:bodyPr wrap="square" rtlCol="0" anchor="ctr"/>
+          <a:lstStyle/>
+          <a:p>
+            <a:pPr indent="0" marL="0">
+              <a:buNone/>
+            </a:pPr>
+            <a:r>
+              <a:rPr lang="en-US" b="1" dirty="0">
+                <a:solidFill>
+                  <a:srgbClr val="5B8DB8"/>
+                </a:solidFill>
+                <a:latin typeface="Arial" pitchFamily="34" charset="0"/>
+                <a:ea typeface="Arial" pitchFamily="34" charset="-122"/>
+                <a:cs typeface="Arial" pitchFamily="34" charset="-120"/>
+              </a:rPr>
+              <a:t>Nadie más modela el ciclo operativo de la ronda</a:t>
+            </a:r>
+            <a:endParaRPr lang="en-US" dirty="0"/>
+          </a:p>
+        </p:txBody>
+      </p:sp>
+      <p:sp>
+        <p:nvSpPr>
+          <p:cNvPr id="10" name="Shape 8"/>
+          <p:cNvSpPr/>
+          <p:nvPr/>
+        </p:nvSpPr>
+        <p:spPr>
+          <a:xfrm>
+            <a:off x="457200" y="1097280"/>
+            <a:ext cx="8375904" cy="0"/>
+          </a:xfrm>
+          <a:prstGeom prst="line">
+            <a:avLst/>
+          </a:prstGeom>
+          <a:noFill/>
+          <a:ln w="12700">
+            <a:solidFill>
+              <a:srgbClr val="E2E8F0"/>
+            </a:solidFill>
+            <a:prstDash val="solid"/>
+          </a:ln>
+        </p:spPr>
+      </p:sp>
+      <p:sp>
+        <p:nvSpPr>
+          <p:cNvPr id="11" name="Shape 9"/>
+          <p:cNvSpPr/>
+          <p:nvPr/>
+        </p:nvSpPr>
+        <p:spPr>
+          <a:xfrm>
+            <a:off x="457200" y="1188720"/>
+            <a:ext cx="8375904" cy="457200"/>
+          </a:xfrm>
+          <a:prstGeom prst="roundRect">
+            <a:avLst>
+              <a:gd name="adj" fmla="val 10000"/>
+            </a:avLst>
+          </a:prstGeom>
+          <a:solidFill>
+            <a:srgbClr val="5B8DB8"/>
+          </a:solidFill>
+          <a:ln w="12700">
+            <a:solidFill>
+              <a:srgbClr val="5B8DB8"/>
+            </a:solidFill>
+            <a:prstDash val="solid"/>
+          </a:ln>
+        </p:spPr>
+      </p:sp>
+      <p:sp>
+        <p:nvSpPr>
+          <p:cNvPr id="12" name="Text 10"/>
+          <p:cNvSpPr/>
+          <p:nvPr/>
+        </p:nvSpPr>
+        <p:spPr>
+          <a:xfrm>
+            <a:off x="548640" y="1234440"/>
+            <a:ext cx="2651760" cy="365760"/>
+          </a:xfrm>
+          <a:prstGeom prst="rect">
+            <a:avLst/>
+          </a:prstGeom>
+          <a:noFill/>
+          <a:ln/>
+        </p:spPr>
+        <p:txBody>
+          <a:bodyPr wrap="square" rtlCol="0" anchor="ctr"/>
+          <a:lstStyle/>
+          <a:p>
+            <a:pPr indent="0" marL="0">
+              <a:buNone/>
+            </a:pPr>
+            <a:r>
+              <a:rPr lang="en-US" sz="1200" b="1" dirty="0">
+                <a:solidFill>
+                  <a:srgbClr val="FFFFFF"/>
+                </a:solidFill>
+                <a:latin typeface="Arial" pitchFamily="34" charset="0"/>
+                <a:ea typeface="Arial" pitchFamily="34" charset="-122"/>
+                <a:cs typeface="Arial" pitchFamily="34" charset="-120"/>
+              </a:rPr>
+              <a:t>Capacidad</a:t>
+            </a:r>
+            <a:endParaRPr lang="en-US" sz="1200" dirty="0"/>
+          </a:p>
+        </p:txBody>
+      </p:sp>
+      <p:sp>
+        <p:nvSpPr>
+          <p:cNvPr id="13" name="Text 11"/>
+          <p:cNvSpPr/>
+          <p:nvPr/>
+        </p:nvSpPr>
+        <p:spPr>
+          <a:xfrm>
+            <a:off x="3337560" y="1234440"/>
+            <a:ext cx="1600200" cy="365760"/>
+          </a:xfrm>
+          <a:prstGeom prst="rect">
+            <a:avLst/>
+          </a:prstGeom>
+          <a:noFill/>
+          <a:ln/>
+        </p:spPr>
+        <p:txBody>
+          <a:bodyPr wrap="square" rtlCol="0" anchor="ctr"/>
+          <a:lstStyle/>
+          <a:p>
+            <a:pPr indent="0" marL="0">
+              <a:buNone/>
+            </a:pPr>
+            <a:r>
+              <a:rPr lang="en-US" sz="1200" b="1" dirty="0">
+                <a:solidFill>
+                  <a:srgbClr val="FFFFFF"/>
+                </a:solidFill>
+                <a:latin typeface="Arial" pitchFamily="34" charset="0"/>
+                <a:ea typeface="Arial" pitchFamily="34" charset="-122"/>
+                <a:cs typeface="Arial" pitchFamily="34" charset="-120"/>
+              </a:rPr>
+              <a:t>CareSignal</a:t>
+            </a:r>
+            <a:endParaRPr lang="en-US" sz="1200" dirty="0"/>
+          </a:p>
+        </p:txBody>
+      </p:sp>
+      <p:sp>
+        <p:nvSpPr>
+          <p:cNvPr id="14" name="Text 12"/>
+          <p:cNvSpPr/>
+          <p:nvPr/>
+        </p:nvSpPr>
+        <p:spPr>
+          <a:xfrm>
+            <a:off x="5074920" y="1234440"/>
+            <a:ext cx="1600200" cy="365760"/>
+          </a:xfrm>
+          <a:prstGeom prst="rect">
+            <a:avLst/>
+          </a:prstGeom>
+          <a:noFill/>
+          <a:ln/>
+        </p:spPr>
+        <p:txBody>
+          <a:bodyPr wrap="square" rtlCol="0" anchor="ctr"/>
+          <a:lstStyle/>
+          <a:p>
+            <a:pPr indent="0" marL="0">
+              <a:buNone/>
+            </a:pPr>
+            <a:r>
+              <a:rPr lang="en-US" sz="1200" b="1" dirty="0">
+                <a:solidFill>
+                  <a:srgbClr val="FFFFFF"/>
+                </a:solidFill>
+                <a:latin typeface="Arial" pitchFamily="34" charset="0"/>
+                <a:ea typeface="Arial" pitchFamily="34" charset="-122"/>
+                <a:cs typeface="Arial" pitchFamily="34" charset="-120"/>
+              </a:rPr>
+              <a:t>Cronos Care</a:t>
+            </a:r>
+            <a:endParaRPr lang="en-US" sz="1200" dirty="0"/>
+          </a:p>
+        </p:txBody>
+      </p:sp>
+      <p:sp>
+        <p:nvSpPr>
+          <p:cNvPr id="15" name="Text 13"/>
+          <p:cNvSpPr/>
+          <p:nvPr/>
+        </p:nvSpPr>
+        <p:spPr>
+          <a:xfrm>
+            <a:off x="6812280" y="1234440"/>
+            <a:ext cx="1600200" cy="365760"/>
+          </a:xfrm>
+          <a:prstGeom prst="rect">
+            <a:avLst/>
+          </a:prstGeom>
+          <a:noFill/>
+          <a:ln/>
+        </p:spPr>
+        <p:txBody>
+          <a:bodyPr wrap="square" rtlCol="0" anchor="ctr"/>
+          <a:lstStyle/>
+          <a:p>
+            <a:pPr indent="0" marL="0">
+              <a:buNone/>
+            </a:pPr>
+            <a:r>
+              <a:rPr lang="en-US" sz="1200" b="1" dirty="0">
+                <a:solidFill>
+                  <a:srgbClr val="FFFFFF"/>
+                </a:solidFill>
+                <a:latin typeface="Arial" pitchFamily="34" charset="0"/>
+                <a:ea typeface="Arial" pitchFamily="34" charset="-122"/>
+                <a:cs typeface="Arial" pitchFamily="34" charset="-120"/>
+              </a:rPr>
+              <a:t>GERIGES</a:t>
+            </a:r>
+            <a:endParaRPr lang="en-US" sz="1200" dirty="0"/>
+          </a:p>
+        </p:txBody>
+      </p:sp>
+      <p:sp>
+        <p:nvSpPr>
+          <p:cNvPr id="16" name="Shape 14"/>
+          <p:cNvSpPr/>
+          <p:nvPr/>
+        </p:nvSpPr>
+        <p:spPr>
+          <a:xfrm>
+            <a:off x="457200" y="1645920"/>
+            <a:ext cx="8375904" cy="530352"/>
+          </a:xfrm>
+          <a:prstGeom prst="roundRect">
+            <a:avLst>
+              <a:gd name="adj" fmla="val 6897"/>
+            </a:avLst>
+          </a:prstGeom>
+          <a:solidFill>
+            <a:srgbClr val="F0EDE8"/>
+          </a:solidFill>
+          <a:ln w="5080">
+            <a:solidFill>
+              <a:srgbClr val="E2E8F0"/>
+            </a:solidFill>
+            <a:prstDash val="solid"/>
+          </a:ln>
+        </p:spPr>
+      </p:sp>
+      <p:sp>
+        <p:nvSpPr>
+          <p:cNvPr id="17" name="Text 15"/>
+          <p:cNvSpPr/>
+          <p:nvPr/>
+        </p:nvSpPr>
+        <p:spPr>
+          <a:xfrm>
+            <a:off x="548640" y="1719072"/>
+            <a:ext cx="2606040" cy="384048"/>
+          </a:xfrm>
+          <a:prstGeom prst="rect">
+            <a:avLst/>
+          </a:prstGeom>
+          <a:noFill/>
+          <a:ln/>
+        </p:spPr>
+        <p:txBody>
+          <a:bodyPr wrap="square" rtlCol="0" anchor="ctr"/>
+          <a:lstStyle/>
+          <a:p>
+            <a:pPr indent="0" marL="0">
+              <a:buNone/>
+            </a:pPr>
+            <a:r>
+              <a:rPr lang="en-US" sz="1150" dirty="0">
+                <a:solidFill>
+                  <a:srgbClr val="2D3748"/>
+                </a:solidFill>
+                <a:latin typeface="Arial" pitchFamily="34" charset="0"/>
+                <a:ea typeface="Arial" pitchFamily="34" charset="-122"/>
+                <a:cs typeface="Arial" pitchFamily="34" charset="-120"/>
+              </a:rPr>
+              <a:t>Detección de ronda atrasada</a:t>
+            </a:r>
+            <a:endParaRPr lang="en-US" sz="1150" dirty="0"/>
+          </a:p>
+        </p:txBody>
+      </p:sp>
+      <p:sp>
+        <p:nvSpPr>
+          <p:cNvPr id="18" name="Text 16"/>
+          <p:cNvSpPr/>
+          <p:nvPr/>
+        </p:nvSpPr>
+        <p:spPr>
+          <a:xfrm>
+            <a:off x="3246120" y="1691640"/>
+            <a:ext cx="1691640" cy="438912"/>
+          </a:xfrm>
+          <a:prstGeom prst="rect">
+            <a:avLst/>
+          </a:prstGeom>
+          <a:noFill/>
+          <a:ln/>
+        </p:spPr>
+        <p:txBody>
+          <a:bodyPr wrap="square" rtlCol="0" anchor="ctr"/>
+          <a:lstStyle/>
+          <a:p>
+            <a:pPr algn="ctr" indent="0" marL="0">
+              <a:buNone/>
+            </a:pPr>
+            <a:r>
+              <a:rPr lang="en-US" sz="1800" dirty="0">
+                <a:solidFill>
+                  <a:srgbClr val="000000"/>
+                </a:solidFill>
+              </a:rPr>
+              <a:t>✅</a:t>
+            </a:r>
+            <a:endParaRPr lang="en-US" sz="1800" dirty="0"/>
+          </a:p>
+        </p:txBody>
+      </p:sp>
+      <p:sp>
+        <p:nvSpPr>
+          <p:cNvPr id="19" name="Text 17"/>
+          <p:cNvSpPr/>
+          <p:nvPr/>
+        </p:nvSpPr>
+        <p:spPr>
+          <a:xfrm>
+            <a:off x="4983480" y="1691640"/>
+            <a:ext cx="1691640" cy="438912"/>
+          </a:xfrm>
+          <a:prstGeom prst="rect">
+            <a:avLst/>
+          </a:prstGeom>
+          <a:noFill/>
+          <a:ln/>
+        </p:spPr>
+        <p:txBody>
+          <a:bodyPr wrap="square" rtlCol="0" anchor="ctr"/>
+          <a:lstStyle/>
+          <a:p>
+            <a:pPr algn="ctr" indent="0" marL="0">
+              <a:buNone/>
+            </a:pPr>
+            <a:r>
+              <a:rPr lang="en-US" sz="1800" dirty="0">
+                <a:solidFill>
+                  <a:srgbClr val="000000"/>
+                </a:solidFill>
+              </a:rPr>
+              <a:t>❌</a:t>
+            </a:r>
+            <a:endParaRPr lang="en-US" sz="1800" dirty="0"/>
+          </a:p>
+        </p:txBody>
+      </p:sp>
+      <p:sp>
+        <p:nvSpPr>
+          <p:cNvPr id="20" name="Text 18"/>
+          <p:cNvSpPr/>
+          <p:nvPr/>
+        </p:nvSpPr>
+        <p:spPr>
+          <a:xfrm>
+            <a:off x="6720840" y="1691640"/>
+            <a:ext cx="1691640" cy="438912"/>
+          </a:xfrm>
+          <a:prstGeom prst="rect">
+            <a:avLst/>
+          </a:prstGeom>
+          <a:noFill/>
+          <a:ln/>
+        </p:spPr>
+        <p:txBody>
+          <a:bodyPr wrap="square" rtlCol="0" anchor="ctr"/>
+          <a:lstStyle/>
+          <a:p>
+            <a:pPr algn="ctr" indent="0" marL="0">
+              <a:buNone/>
+            </a:pPr>
+            <a:r>
+              <a:rPr lang="en-US" sz="1800" dirty="0">
+                <a:solidFill>
+                  <a:srgbClr val="000000"/>
+                </a:solidFill>
+              </a:rPr>
+              <a:t>❌</a:t>
+            </a:r>
+            <a:endParaRPr lang="en-US" sz="1800" dirty="0"/>
+          </a:p>
+        </p:txBody>
+      </p:sp>
+      <p:sp>
+        <p:nvSpPr>
+          <p:cNvPr id="21" name="Shape 19"/>
+          <p:cNvSpPr/>
+          <p:nvPr/>
+        </p:nvSpPr>
+        <p:spPr>
+          <a:xfrm>
+            <a:off x="457200" y="2240280"/>
+            <a:ext cx="8375904" cy="530352"/>
+          </a:xfrm>
+          <a:prstGeom prst="roundRect">
+            <a:avLst>
+              <a:gd name="adj" fmla="val 6897"/>
+            </a:avLst>
+          </a:prstGeom>
+          <a:solidFill>
+            <a:srgbClr val="FFFFFF"/>
+          </a:solidFill>
+          <a:ln w="5080">
+            <a:solidFill>
+              <a:srgbClr val="E2E8F0"/>
+            </a:solidFill>
+            <a:prstDash val="solid"/>
+          </a:ln>
+        </p:spPr>
+      </p:sp>
+      <p:sp>
+        <p:nvSpPr>
+          <p:cNvPr id="22" name="Text 20"/>
+          <p:cNvSpPr/>
+          <p:nvPr/>
+        </p:nvSpPr>
+        <p:spPr>
+          <a:xfrm>
+            <a:off x="548640" y="2313432"/>
+            <a:ext cx="2606040" cy="384048"/>
+          </a:xfrm>
+          <a:prstGeom prst="rect">
+            <a:avLst/>
+          </a:prstGeom>
+          <a:noFill/>
+          <a:ln/>
+        </p:spPr>
+        <p:txBody>
+          <a:bodyPr wrap="square" rtlCol="0" anchor="ctr"/>
+          <a:lstStyle/>
+          <a:p>
+            <a:pPr indent="0" marL="0">
+              <a:buNone/>
+            </a:pPr>
+            <a:r>
+              <a:rPr lang="en-US" sz="1150" dirty="0">
+                <a:solidFill>
+                  <a:srgbClr val="2D3748"/>
+                </a:solidFill>
+                <a:latin typeface="Arial" pitchFamily="34" charset="0"/>
+                <a:ea typeface="Arial" pitchFamily="34" charset="-122"/>
+                <a:cs typeface="Arial" pitchFamily="34" charset="-120"/>
+              </a:rPr>
+              <a:t>Alerta automática al supervisor</a:t>
+            </a:r>
+            <a:endParaRPr lang="en-US" sz="1150" dirty="0"/>
+          </a:p>
+        </p:txBody>
+      </p:sp>
+      <p:sp>
+        <p:nvSpPr>
+          <p:cNvPr id="23" name="Text 21"/>
+          <p:cNvSpPr/>
+          <p:nvPr/>
+        </p:nvSpPr>
+        <p:spPr>
+          <a:xfrm>
+            <a:off x="3246120" y="2286000"/>
+            <a:ext cx="1691640" cy="438912"/>
+          </a:xfrm>
+          <a:prstGeom prst="rect">
+            <a:avLst/>
+          </a:prstGeom>
+          <a:noFill/>
+          <a:ln/>
+        </p:spPr>
+        <p:txBody>
+          <a:bodyPr wrap="square" rtlCol="0" anchor="ctr"/>
+          <a:lstStyle/>
+          <a:p>
+            <a:pPr algn="ctr" indent="0" marL="0">
+              <a:buNone/>
+            </a:pPr>
+            <a:r>
+              <a:rPr lang="en-US" sz="1800" dirty="0">
+                <a:solidFill>
+                  <a:srgbClr val="000000"/>
+                </a:solidFill>
+              </a:rPr>
+              <a:t>✅</a:t>
+            </a:r>
+            <a:endParaRPr lang="en-US" sz="1800" dirty="0"/>
+          </a:p>
+        </p:txBody>
+      </p:sp>
+      <p:sp>
+        <p:nvSpPr>
+          <p:cNvPr id="24" name="Text 22"/>
+          <p:cNvSpPr/>
+          <p:nvPr/>
+        </p:nvSpPr>
+        <p:spPr>
+          <a:xfrm>
+            <a:off x="4983480" y="2286000"/>
+            <a:ext cx="1691640" cy="438912"/>
+          </a:xfrm>
+          <a:prstGeom prst="rect">
+            <a:avLst/>
+          </a:prstGeom>
+          <a:noFill/>
+          <a:ln/>
+        </p:spPr>
+        <p:txBody>
+          <a:bodyPr wrap="square" rtlCol="0" anchor="ctr"/>
+          <a:lstStyle/>
+          <a:p>
+            <a:pPr algn="ctr" indent="0" marL="0">
+              <a:buNone/>
+            </a:pPr>
+            <a:r>
+              <a:rPr lang="en-US" sz="1800" dirty="0">
+                <a:solidFill>
+                  <a:srgbClr val="000000"/>
+                </a:solidFill>
+              </a:rPr>
+              <a:t>❌</a:t>
+            </a:r>
+            <a:endParaRPr lang="en-US" sz="1800" dirty="0"/>
+          </a:p>
+        </p:txBody>
+      </p:sp>
+      <p:sp>
+        <p:nvSpPr>
+          <p:cNvPr id="25" name="Text 23"/>
+          <p:cNvSpPr/>
+          <p:nvPr/>
+        </p:nvSpPr>
+        <p:spPr>
+          <a:xfrm>
+            <a:off x="6720840" y="2286000"/>
+            <a:ext cx="1691640" cy="438912"/>
+          </a:xfrm>
+          <a:prstGeom prst="rect">
+            <a:avLst/>
+          </a:prstGeom>
+          <a:noFill/>
+          <a:ln/>
+        </p:spPr>
+        <p:txBody>
+          <a:bodyPr wrap="square" rtlCol="0" anchor="ctr"/>
+          <a:lstStyle/>
+          <a:p>
+            <a:pPr algn="ctr" indent="0" marL="0">
+              <a:buNone/>
+            </a:pPr>
+            <a:r>
+              <a:rPr lang="en-US" sz="1800" dirty="0">
+                <a:solidFill>
+                  <a:srgbClr val="000000"/>
+                </a:solidFill>
+              </a:rPr>
+              <a:t>❌</a:t>
+            </a:r>
+            <a:endParaRPr lang="en-US" sz="1800" dirty="0"/>
+          </a:p>
+        </p:txBody>
+      </p:sp>
+      <p:sp>
+        <p:nvSpPr>
+          <p:cNvPr id="26" name="Shape 24"/>
+          <p:cNvSpPr/>
+          <p:nvPr/>
+        </p:nvSpPr>
+        <p:spPr>
+          <a:xfrm>
+            <a:off x="457200" y="2834640"/>
+            <a:ext cx="8375904" cy="530352"/>
+          </a:xfrm>
+          <a:prstGeom prst="roundRect">
+            <a:avLst>
+              <a:gd name="adj" fmla="val 6897"/>
+            </a:avLst>
+          </a:prstGeom>
+          <a:solidFill>
+            <a:srgbClr val="F0EDE8"/>
+          </a:solidFill>
+          <a:ln w="5080">
+            <a:solidFill>
+              <a:srgbClr val="E2E8F0"/>
+            </a:solidFill>
+            <a:prstDash val="solid"/>
+          </a:ln>
+        </p:spPr>
+      </p:sp>
+      <p:sp>
+        <p:nvSpPr>
+          <p:cNvPr id="27" name="Text 25"/>
+          <p:cNvSpPr/>
+          <p:nvPr/>
+        </p:nvSpPr>
+        <p:spPr>
+          <a:xfrm>
+            <a:off x="548640" y="2907792"/>
+            <a:ext cx="2606040" cy="384048"/>
+          </a:xfrm>
+          <a:prstGeom prst="rect">
+            <a:avLst/>
+          </a:prstGeom>
+          <a:noFill/>
+          <a:ln/>
+        </p:spPr>
+        <p:txBody>
+          <a:bodyPr wrap="square" rtlCol="0" anchor="ctr"/>
+          <a:lstStyle/>
+          <a:p>
+            <a:pPr indent="0" marL="0">
+              <a:buNone/>
+            </a:pPr>
+            <a:r>
+              <a:rPr lang="en-US" sz="1150" dirty="0">
+                <a:solidFill>
+                  <a:srgbClr val="2D3748"/>
+                </a:solidFill>
+                <a:latin typeface="Arial" pitchFamily="34" charset="0"/>
+                <a:ea typeface="Arial" pitchFamily="34" charset="-122"/>
+                <a:cs typeface="Arial" pitchFamily="34" charset="-120"/>
+              </a:rPr>
+              <a:t>Bitácora de auditoría inmutable</a:t>
+            </a:r>
+            <a:endParaRPr lang="en-US" sz="1150" dirty="0"/>
+          </a:p>
+        </p:txBody>
+      </p:sp>
+      <p:sp>
+        <p:nvSpPr>
+          <p:cNvPr id="28" name="Text 26"/>
+          <p:cNvSpPr/>
+          <p:nvPr/>
+        </p:nvSpPr>
+        <p:spPr>
+          <a:xfrm>
+            <a:off x="3246120" y="2880360"/>
+            <a:ext cx="1691640" cy="438912"/>
+          </a:xfrm>
+          <a:prstGeom prst="rect">
+            <a:avLst/>
+          </a:prstGeom>
+          <a:noFill/>
+          <a:ln/>
+        </p:spPr>
+        <p:txBody>
+          <a:bodyPr wrap="square" rtlCol="0" anchor="ctr"/>
+          <a:lstStyle/>
+          <a:p>
+            <a:pPr algn="ctr" indent="0" marL="0">
+              <a:buNone/>
+            </a:pPr>
+            <a:r>
+              <a:rPr lang="en-US" sz="1800" dirty="0">
+                <a:solidFill>
+                  <a:srgbClr val="000000"/>
+                </a:solidFill>
+              </a:rPr>
+              <a:t>✅</a:t>
+            </a:r>
+            <a:endParaRPr lang="en-US" sz="1800" dirty="0"/>
+          </a:p>
+        </p:txBody>
+      </p:sp>
+      <p:sp>
+        <p:nvSpPr>
+          <p:cNvPr id="29" name="Text 27"/>
+          <p:cNvSpPr/>
+          <p:nvPr/>
+        </p:nvSpPr>
+        <p:spPr>
+          <a:xfrm>
+            <a:off x="4983480" y="2880360"/>
+            <a:ext cx="1691640" cy="438912"/>
+          </a:xfrm>
+          <a:prstGeom prst="rect">
+            <a:avLst/>
+          </a:prstGeom>
+          <a:noFill/>
+          <a:ln/>
+        </p:spPr>
+        <p:txBody>
+          <a:bodyPr wrap="square" rtlCol="0" anchor="ctr"/>
+          <a:lstStyle/>
+          <a:p>
+            <a:pPr algn="ctr" indent="0" marL="0">
+              <a:buNone/>
+            </a:pPr>
+            <a:r>
+              <a:rPr lang="en-US" sz="1800" dirty="0">
+                <a:solidFill>
+                  <a:srgbClr val="000000"/>
+                </a:solidFill>
+              </a:rPr>
+              <a:t>⚠️</a:t>
+            </a:r>
+            <a:endParaRPr lang="en-US" sz="1800" dirty="0"/>
+          </a:p>
+        </p:txBody>
+      </p:sp>
+      <p:sp>
+        <p:nvSpPr>
+          <p:cNvPr id="30" name="Text 28"/>
+          <p:cNvSpPr/>
+          <p:nvPr/>
+        </p:nvSpPr>
+        <p:spPr>
+          <a:xfrm>
+            <a:off x="6720840" y="2880360"/>
+            <a:ext cx="1691640" cy="438912"/>
+          </a:xfrm>
+          <a:prstGeom prst="rect">
+            <a:avLst/>
+          </a:prstGeom>
+          <a:noFill/>
+          <a:ln/>
+        </p:spPr>
+        <p:txBody>
+          <a:bodyPr wrap="square" rtlCol="0" anchor="ctr"/>
+          <a:lstStyle/>
+          <a:p>
+            <a:pPr algn="ctr" indent="0" marL="0">
+              <a:buNone/>
+            </a:pPr>
+            <a:r>
+              <a:rPr lang="en-US" sz="1800" dirty="0">
+                <a:solidFill>
+                  <a:srgbClr val="000000"/>
+                </a:solidFill>
+              </a:rPr>
+              <a:t>⚠️</a:t>
+            </a:r>
+            <a:endParaRPr lang="en-US" sz="1800" dirty="0"/>
+          </a:p>
+        </p:txBody>
+      </p:sp>
+      <p:sp>
+        <p:nvSpPr>
+          <p:cNvPr id="31" name="Shape 29"/>
+          <p:cNvSpPr/>
+          <p:nvPr/>
+        </p:nvSpPr>
+        <p:spPr>
+          <a:xfrm>
+            <a:off x="457200" y="3429000"/>
+            <a:ext cx="8375904" cy="530352"/>
+          </a:xfrm>
+          <a:prstGeom prst="roundRect">
+            <a:avLst>
+              <a:gd name="adj" fmla="val 6897"/>
+            </a:avLst>
+          </a:prstGeom>
+          <a:solidFill>
+            <a:srgbClr val="FFFFFF"/>
+          </a:solidFill>
+          <a:ln w="5080">
+            <a:solidFill>
+              <a:srgbClr val="E2E8F0"/>
+            </a:solidFill>
+            <a:prstDash val="solid"/>
+          </a:ln>
+        </p:spPr>
+      </p:sp>
+      <p:sp>
+        <p:nvSpPr>
+          <p:cNvPr id="32" name="Text 30"/>
+          <p:cNvSpPr/>
+          <p:nvPr/>
+        </p:nvSpPr>
+        <p:spPr>
+          <a:xfrm>
+            <a:off x="548640" y="3502152"/>
+            <a:ext cx="2606040" cy="384048"/>
+          </a:xfrm>
+          <a:prstGeom prst="rect">
+            <a:avLst/>
+          </a:prstGeom>
+          <a:noFill/>
+          <a:ln/>
+        </p:spPr>
+        <p:txBody>
+          <a:bodyPr wrap="square" rtlCol="0" anchor="ctr"/>
+          <a:lstStyle/>
+          <a:p>
+            <a:pPr indent="0" marL="0">
+              <a:buNone/>
+            </a:pPr>
+            <a:r>
+              <a:rPr lang="en-US" sz="1150" dirty="0">
+                <a:solidFill>
+                  <a:srgbClr val="2D3748"/>
+                </a:solidFill>
+                <a:latin typeface="Arial" pitchFamily="34" charset="0"/>
+                <a:ea typeface="Arial" pitchFamily="34" charset="-122"/>
+                <a:cs typeface="Arial" pitchFamily="34" charset="-120"/>
+              </a:rPr>
+              <a:t>Ciclo completo alerta→cierre</a:t>
+            </a:r>
+            <a:endParaRPr lang="en-US" sz="1150" dirty="0"/>
+          </a:p>
+        </p:txBody>
+      </p:sp>
+      <p:sp>
+        <p:nvSpPr>
+          <p:cNvPr id="33" name="Text 31"/>
+          <p:cNvSpPr/>
+          <p:nvPr/>
+        </p:nvSpPr>
+        <p:spPr>
+          <a:xfrm>
+            <a:off x="3246120" y="3474720"/>
+            <a:ext cx="1691640" cy="438912"/>
+          </a:xfrm>
+          <a:prstGeom prst="rect">
+            <a:avLst/>
+          </a:prstGeom>
+          <a:noFill/>
+          <a:ln/>
+        </p:spPr>
+        <p:txBody>
+          <a:bodyPr wrap="square" rtlCol="0" anchor="ctr"/>
+          <a:lstStyle/>
+          <a:p>
+            <a:pPr algn="ctr" indent="0" marL="0">
+              <a:buNone/>
+            </a:pPr>
+            <a:r>
+              <a:rPr lang="en-US" sz="1800" dirty="0">
+                <a:solidFill>
+                  <a:srgbClr val="000000"/>
+                </a:solidFill>
+              </a:rPr>
+              <a:t>✅</a:t>
+            </a:r>
+            <a:endParaRPr lang="en-US" sz="1800" dirty="0"/>
+          </a:p>
+        </p:txBody>
+      </p:sp>
+      <p:sp>
+        <p:nvSpPr>
+          <p:cNvPr id="34" name="Text 32"/>
+          <p:cNvSpPr/>
+          <p:nvPr/>
+        </p:nvSpPr>
+        <p:spPr>
+          <a:xfrm>
+            <a:off x="4983480" y="3474720"/>
+            <a:ext cx="1691640" cy="438912"/>
+          </a:xfrm>
+          <a:prstGeom prst="rect">
+            <a:avLst/>
+          </a:prstGeom>
+          <a:noFill/>
+          <a:ln/>
+        </p:spPr>
+        <p:txBody>
+          <a:bodyPr wrap="square" rtlCol="0" anchor="ctr"/>
+          <a:lstStyle/>
+          <a:p>
+            <a:pPr algn="ctr" indent="0" marL="0">
+              <a:buNone/>
+            </a:pPr>
+            <a:r>
+              <a:rPr lang="en-US" sz="1800" dirty="0">
+                <a:solidFill>
+                  <a:srgbClr val="000000"/>
+                </a:solidFill>
+              </a:rPr>
+              <a:t>❌</a:t>
+            </a:r>
+            <a:endParaRPr lang="en-US" sz="1800" dirty="0"/>
+          </a:p>
+        </p:txBody>
+      </p:sp>
+      <p:sp>
+        <p:nvSpPr>
+          <p:cNvPr id="35" name="Text 33"/>
+          <p:cNvSpPr/>
+          <p:nvPr/>
+        </p:nvSpPr>
+        <p:spPr>
+          <a:xfrm>
+            <a:off x="6720840" y="3474720"/>
+            <a:ext cx="1691640" cy="438912"/>
+          </a:xfrm>
+          <a:prstGeom prst="rect">
+            <a:avLst/>
+          </a:prstGeom>
+          <a:noFill/>
+          <a:ln/>
+        </p:spPr>
+        <p:txBody>
+          <a:bodyPr wrap="square" rtlCol="0" anchor="ctr"/>
+          <a:lstStyle/>
+          <a:p>
+            <a:pPr algn="ctr" indent="0" marL="0">
+              <a:buNone/>
+            </a:pPr>
+            <a:r>
+              <a:rPr lang="en-US" sz="1800" dirty="0">
+                <a:solidFill>
+                  <a:srgbClr val="000000"/>
+                </a:solidFill>
+              </a:rPr>
+              <a:t>❌</a:t>
+            </a:r>
+            <a:endParaRPr lang="en-US" sz="1800" dirty="0"/>
+          </a:p>
+        </p:txBody>
+      </p:sp>
+      <p:sp>
+        <p:nvSpPr>
+          <p:cNvPr id="36" name="Shape 34"/>
+          <p:cNvSpPr/>
+          <p:nvPr/>
+        </p:nvSpPr>
+        <p:spPr>
+          <a:xfrm>
+            <a:off x="457200" y="4023360"/>
+            <a:ext cx="8375904" cy="530352"/>
+          </a:xfrm>
+          <a:prstGeom prst="roundRect">
+            <a:avLst>
+              <a:gd name="adj" fmla="val 6897"/>
+            </a:avLst>
+          </a:prstGeom>
+          <a:solidFill>
+            <a:srgbClr val="F0EDE8"/>
+          </a:solidFill>
+          <a:ln w="5080">
+            <a:solidFill>
+              <a:srgbClr val="E2E8F0"/>
+            </a:solidFill>
+            <a:prstDash val="solid"/>
+          </a:ln>
+        </p:spPr>
+      </p:sp>
+      <p:sp>
+        <p:nvSpPr>
+          <p:cNvPr id="37" name="Text 35"/>
+          <p:cNvSpPr/>
+          <p:nvPr/>
+        </p:nvSpPr>
+        <p:spPr>
+          <a:xfrm>
+            <a:off x="548640" y="4096512"/>
+            <a:ext cx="2606040" cy="384048"/>
+          </a:xfrm>
+          <a:prstGeom prst="rect">
+            <a:avLst/>
+          </a:prstGeom>
+          <a:noFill/>
+          <a:ln/>
+        </p:spPr>
+        <p:txBody>
+          <a:bodyPr wrap="square" rtlCol="0" anchor="ctr"/>
+          <a:lstStyle/>
+          <a:p>
+            <a:pPr indent="0" marL="0">
+              <a:buNone/>
+            </a:pPr>
+            <a:r>
+              <a:rPr lang="en-US" sz="1150" dirty="0">
+                <a:solidFill>
+                  <a:srgbClr val="2D3748"/>
+                </a:solidFill>
+                <a:latin typeface="Arial" pitchFamily="34" charset="0"/>
+                <a:ea typeface="Arial" pitchFamily="34" charset="-122"/>
+                <a:cs typeface="Arial" pitchFamily="34" charset="-120"/>
+              </a:rPr>
+              <a:t>Precio publicado</a:t>
+            </a:r>
+            <a:endParaRPr lang="en-US" sz="1150" dirty="0"/>
+          </a:p>
+        </p:txBody>
+      </p:sp>
+      <p:sp>
+        <p:nvSpPr>
+          <p:cNvPr id="38" name="Text 36"/>
+          <p:cNvSpPr/>
+          <p:nvPr/>
+        </p:nvSpPr>
+        <p:spPr>
+          <a:xfrm>
+            <a:off x="3246120" y="4069080"/>
+            <a:ext cx="1691640" cy="438912"/>
+          </a:xfrm>
+          <a:prstGeom prst="rect">
+            <a:avLst/>
+          </a:prstGeom>
+          <a:noFill/>
+          <a:ln/>
+        </p:spPr>
+        <p:txBody>
+          <a:bodyPr wrap="square" rtlCol="0" anchor="ctr"/>
+          <a:lstStyle/>
+          <a:p>
+            <a:pPr algn="ctr" indent="0" marL="0">
+              <a:buNone/>
+            </a:pPr>
+            <a:r>
+              <a:rPr lang="en-US" sz="1800" dirty="0">
+                <a:solidFill>
+                  <a:srgbClr val="000000"/>
+                </a:solidFill>
+              </a:rPr>
+              <a:t>✅</a:t>
+            </a:r>
+            <a:endParaRPr lang="en-US" sz="1800" dirty="0"/>
+          </a:p>
+        </p:txBody>
+      </p:sp>
+      <p:sp>
+        <p:nvSpPr>
+          <p:cNvPr id="39" name="Text 37"/>
+          <p:cNvSpPr/>
+          <p:nvPr/>
+        </p:nvSpPr>
+        <p:spPr>
+          <a:xfrm>
+            <a:off x="4983480" y="4069080"/>
+            <a:ext cx="1691640" cy="438912"/>
+          </a:xfrm>
+          <a:prstGeom prst="rect">
+            <a:avLst/>
+          </a:prstGeom>
+          <a:noFill/>
+          <a:ln/>
+        </p:spPr>
+        <p:txBody>
+          <a:bodyPr wrap="square" rtlCol="0" anchor="ctr"/>
+          <a:lstStyle/>
+          <a:p>
+            <a:pPr algn="ctr" indent="0" marL="0">
+              <a:buNone/>
+            </a:pPr>
+            <a:r>
+              <a:rPr lang="en-US" sz="1800" dirty="0">
+                <a:solidFill>
+                  <a:srgbClr val="000000"/>
+                </a:solidFill>
+              </a:rPr>
+              <a:t>❌</a:t>
+            </a:r>
+            <a:endParaRPr lang="en-US" sz="1800" dirty="0"/>
+          </a:p>
+        </p:txBody>
+      </p:sp>
+      <p:sp>
+        <p:nvSpPr>
+          <p:cNvPr id="40" name="Text 38"/>
+          <p:cNvSpPr/>
+          <p:nvPr/>
+        </p:nvSpPr>
+        <p:spPr>
+          <a:xfrm>
+            <a:off x="6720840" y="4069080"/>
+            <a:ext cx="1691640" cy="438912"/>
+          </a:xfrm>
+          <a:prstGeom prst="rect">
+            <a:avLst/>
+          </a:prstGeom>
+          <a:noFill/>
+          <a:ln/>
+        </p:spPr>
+        <p:txBody>
+          <a:bodyPr wrap="square" rtlCol="0" anchor="ctr"/>
+          <a:lstStyle/>
+          <a:p>
+            <a:pPr algn="ctr" indent="0" marL="0">
+              <a:buNone/>
+            </a:pPr>
+            <a:r>
+              <a:rPr lang="en-US" sz="1800" dirty="0">
+                <a:solidFill>
+                  <a:srgbClr val="000000"/>
+                </a:solidFill>
+              </a:rPr>
+              <a:t>❌</a:t>
+            </a:r>
+            <a:endParaRPr lang="en-US" sz="1800" dirty="0"/>
+          </a:p>
+        </p:txBody>
+      </p:sp>
+      <p:sp>
+        <p:nvSpPr>
+          <p:cNvPr id="41" name="Shape 39"/>
+          <p:cNvSpPr/>
+          <p:nvPr/>
+        </p:nvSpPr>
+        <p:spPr>
+          <a:xfrm>
+            <a:off x="457200" y="4617720"/>
+            <a:ext cx="8375904" cy="530352"/>
+          </a:xfrm>
+          <a:prstGeom prst="roundRect">
+            <a:avLst>
+              <a:gd name="adj" fmla="val 6897"/>
+            </a:avLst>
+          </a:prstGeom>
+          <a:solidFill>
+            <a:srgbClr val="FFFFFF"/>
+          </a:solidFill>
+          <a:ln w="5080">
+            <a:solidFill>
+              <a:srgbClr val="E2E8F0"/>
+            </a:solidFill>
+            <a:prstDash val="solid"/>
+          </a:ln>
+        </p:spPr>
+      </p:sp>
+      <p:sp>
+        <p:nvSpPr>
+          <p:cNvPr id="42" name="Text 40"/>
+          <p:cNvSpPr/>
+          <p:nvPr/>
+        </p:nvSpPr>
+        <p:spPr>
+          <a:xfrm>
+            <a:off x="548640" y="4690872"/>
+            <a:ext cx="2606040" cy="384048"/>
+          </a:xfrm>
+          <a:prstGeom prst="rect">
+            <a:avLst/>
+          </a:prstGeom>
+          <a:noFill/>
+          <a:ln/>
+        </p:spPr>
+        <p:txBody>
+          <a:bodyPr wrap="square" rtlCol="0" anchor="ctr"/>
+          <a:lstStyle/>
+          <a:p>
+            <a:pPr indent="0" marL="0">
+              <a:buNone/>
+            </a:pPr>
+            <a:r>
+              <a:rPr lang="en-US" sz="1150" dirty="0">
+                <a:solidFill>
+                  <a:srgbClr val="2D3748"/>
+                </a:solidFill>
+                <a:latin typeface="Arial" pitchFamily="34" charset="0"/>
+                <a:ea typeface="Arial" pitchFamily="34" charset="-122"/>
+                <a:cs typeface="Arial" pitchFamily="34" charset="-120"/>
+              </a:rPr>
+              <a:t>Expediente / historial residente</a:t>
+            </a:r>
+            <a:endParaRPr lang="en-US" sz="1150" dirty="0"/>
+          </a:p>
+        </p:txBody>
+      </p:sp>
+      <p:sp>
+        <p:nvSpPr>
+          <p:cNvPr id="43" name="Text 41"/>
+          <p:cNvSpPr/>
+          <p:nvPr/>
+        </p:nvSpPr>
+        <p:spPr>
+          <a:xfrm>
+            <a:off x="3246120" y="4663440"/>
+            <a:ext cx="1691640" cy="438912"/>
+          </a:xfrm>
+          <a:prstGeom prst="rect">
+            <a:avLst/>
+          </a:prstGeom>
+          <a:noFill/>
+          <a:ln/>
+        </p:spPr>
+        <p:txBody>
+          <a:bodyPr wrap="square" rtlCol="0" anchor="ctr"/>
+          <a:lstStyle/>
+          <a:p>
+            <a:pPr algn="ctr" indent="0" marL="0">
+              <a:buNone/>
+            </a:pPr>
+            <a:r>
+              <a:rPr lang="en-US" sz="1800" dirty="0">
+                <a:solidFill>
+                  <a:srgbClr val="000000"/>
+                </a:solidFill>
+              </a:rPr>
+              <a:t>⚠️</a:t>
+            </a:r>
+            <a:endParaRPr lang="en-US" sz="1800" dirty="0"/>
+          </a:p>
+        </p:txBody>
+      </p:sp>
+      <p:sp>
+        <p:nvSpPr>
+          <p:cNvPr id="44" name="Text 42"/>
+          <p:cNvSpPr/>
+          <p:nvPr/>
+        </p:nvSpPr>
+        <p:spPr>
+          <a:xfrm>
+            <a:off x="4983480" y="4663440"/>
+            <a:ext cx="1691640" cy="438912"/>
+          </a:xfrm>
+          <a:prstGeom prst="rect">
+            <a:avLst/>
+          </a:prstGeom>
+          <a:noFill/>
+          <a:ln/>
+        </p:spPr>
+        <p:txBody>
+          <a:bodyPr wrap="square" rtlCol="0" anchor="ctr"/>
+          <a:lstStyle/>
+          <a:p>
+            <a:pPr algn="ctr" indent="0" marL="0">
+              <a:buNone/>
+            </a:pPr>
+            <a:r>
+              <a:rPr lang="en-US" sz="1800" dirty="0">
+                <a:solidFill>
+                  <a:srgbClr val="000000"/>
+                </a:solidFill>
+              </a:rPr>
+              <a:t>✅</a:t>
+            </a:r>
+            <a:endParaRPr lang="en-US" sz="1800" dirty="0"/>
+          </a:p>
+        </p:txBody>
+      </p:sp>
+      <p:sp>
+        <p:nvSpPr>
+          <p:cNvPr id="45" name="Text 43"/>
+          <p:cNvSpPr/>
+          <p:nvPr/>
+        </p:nvSpPr>
+        <p:spPr>
+          <a:xfrm>
+            <a:off x="6720840" y="4663440"/>
+            <a:ext cx="1691640" cy="438912"/>
+          </a:xfrm>
+          <a:prstGeom prst="rect">
+            <a:avLst/>
+          </a:prstGeom>
+          <a:noFill/>
+          <a:ln/>
+        </p:spPr>
+        <p:txBody>
+          <a:bodyPr wrap="square" rtlCol="0" anchor="ctr"/>
+          <a:lstStyle/>
+          <a:p>
+            <a:pPr algn="ctr" indent="0" marL="0">
+              <a:buNone/>
+            </a:pPr>
+            <a:r>
+              <a:rPr lang="en-US" sz="1800" dirty="0">
+                <a:solidFill>
+                  <a:srgbClr val="000000"/>
+                </a:solidFill>
+              </a:rPr>
+              <a:t>✅</a:t>
+            </a:r>
+            <a:endParaRPr lang="en-US" sz="1800" dirty="0"/>
+          </a:p>
+        </p:txBody>
+      </p:sp>
+      <p:sp>
+        <p:nvSpPr>
+          <p:cNvPr id="46" name="Text 44"/>
+          <p:cNvSpPr/>
+          <p:nvPr/>
+        </p:nvSpPr>
+        <p:spPr>
+          <a:xfrm>
+            <a:off x="457200" y="6291072"/>
+            <a:ext cx="8375904" cy="201168"/>
+          </a:xfrm>
+          <a:prstGeom prst="rect">
+            <a:avLst/>
+          </a:prstGeom>
+          <a:noFill/>
+          <a:ln/>
+        </p:spPr>
+        <p:txBody>
+          <a:bodyPr wrap="square" rtlCol="0" anchor="ctr"/>
+          <a:lstStyle/>
+          <a:p>
+            <a:pPr algn="l" indent="0" marL="0">
+              <a:buNone/>
+            </a:pPr>
+            <a:r>
+              <a:rPr lang="en-US" dirty="0">
+                <a:solidFill>
+                  <a:srgbClr val="718096"/>
+                </a:solidFill>
+                <a:latin typeface="Arial" pitchFamily="34" charset="0"/>
+                <a:ea typeface="Arial" pitchFamily="34" charset="-122"/>
+                <a:cs typeface="Arial" pitchFamily="34" charset="-120"/>
+              </a:rPr>
+              <a:t>⚠️ = funcionalidad parcial o no confirmada  ·  Fuente: investigación pública agosto 2026</a:t>
+            </a:r>
+            <a:endParaRPr lang="en-US" dirty="0"/>
+          </a:p>
+        </p:txBody>
+      </p:sp>
+    </p:spTree>
+  </p:cSld>
+  <p:clrMapOvr>
+    <a:masterClrMapping/>
+  </p:clrMapOvr>
+</p:sld>
+</file>
+
 <file path=ppt/theme/theme1.xml><?xml version="1.0" encoding="utf-8"?>
 <a:theme xmlns:a="http://schemas.openxmlformats.org/drawingml/2006/main" name="Office Theme">
   <a:themeElements>

--- a/business/CareSignal_Pitch_Deck.pptx
+++ b/business/CareSignal_Pitch_Deck.pptx
@@ -14,9 +14,11 @@
     <p:sldId id="262" r:id="rId8"/>
     <p:sldId id="263" r:id="rId9"/>
     <p:sldId id="264" r:id="rId10"/>
+    <p:sldId id="265" r:id="rId11"/>
+    <p:sldId id="266" r:id="rId12"/>
   </p:sldIdLst>
   <p:notesMasterIdLst>
-    <p:notesMasterId r:id="rId11"/>
+    <p:notesMasterId r:id="rId13"/>
   </p:notesMasterIdLst>
   <p:sldSz cx="12192000" cy="6858000"/>
   <p:notesSz cx="6858000" cy="12192000"/>
@@ -534,6 +536,182 @@
             <a:fld id="{F7021451-1387-4CA6-816F-3879F97B5CBC}" type="slidenum">
               <a:rPr lang="en-US"/>
               <a:t>1</a:t>
+            </a:fld>
+            <a:endParaRPr lang="en-US"/>
+          </a:p>
+        </p:txBody>
+      </p:sp>
+    </p:spTree>
+    <p:extLst>
+      <p:ext uri="{BB962C8B-B14F-4D97-AF65-F5344CB8AC3E}">
+        <p14:creationId xmlns:p14="http://schemas.microsoft.com/office/powerpoint/2010/main" val="1024086991"/>
+      </p:ext>
+    </p:extLst>
+  </p:cSld>
+  <p:clrMapOvr>
+    <a:masterClrMapping/>
+  </p:clrMapOvr>
+</p:notes>
+</file>
+
+<file path=ppt/notesSlides/notesSlide10.xml><?xml version="1.0" encoding="utf-8"?>
+<p:notes xmlns:a="http://schemas.openxmlformats.org/drawingml/2006/main" xmlns:r="http://schemas.openxmlformats.org/officeDocument/2006/relationships" xmlns:p="http://schemas.openxmlformats.org/presentationml/2006/main">
+  <p:cSld>
+    <p:spTree>
+      <p:nvGrpSpPr>
+        <p:cNvPr id="1" name=""/>
+        <p:cNvGrpSpPr/>
+        <p:nvPr/>
+      </p:nvGrpSpPr>
+      <p:grpSpPr>
+        <a:xfrm>
+          <a:off x="0" y="0"/>
+          <a:ext cx="0" cy="0"/>
+          <a:chOff x="0" y="0"/>
+          <a:chExt cx="0" cy="0"/>
+        </a:xfrm>
+      </p:grpSpPr>
+      <p:sp>
+        <p:nvSpPr>
+          <p:cNvPr id="2" name="Slide Image Placeholder 1"/>
+          <p:cNvSpPr>
+            <a:spLocks noGrp="1" noRot="1" noChangeAspect="1"/>
+          </p:cNvSpPr>
+          <p:nvPr>
+            <p:ph type="sldImg"/>
+          </p:nvPr>
+        </p:nvSpPr>
+        <p:spPr/>
+      </p:sp>
+      <p:sp>
+        <p:nvSpPr>
+          <p:cNvPr id="3" name="Notes Placeholder 2"/>
+          <p:cNvSpPr>
+            <a:spLocks noGrp="1"/>
+          </p:cNvSpPr>
+          <p:nvPr>
+            <p:ph type="body" idx="1"/>
+          </p:nvPr>
+        </p:nvSpPr>
+        <p:spPr/>
+        <p:txBody>
+          <a:bodyPr/>
+          <a:lstStyle/>
+          <a:p>
+            <a:r>
+              <a:rPr lang="en-US" dirty="0"/>
+              <a:t/>
+            </a:r>
+            <a:endParaRPr lang="en-US" dirty="0"/>
+          </a:p>
+        </p:txBody>
+      </p:sp>
+      <p:sp>
+        <p:nvSpPr>
+          <p:cNvPr id="4" name="Slide Number Placeholder 3"/>
+          <p:cNvSpPr>
+            <a:spLocks noGrp="1"/>
+          </p:cNvSpPr>
+          <p:nvPr>
+            <p:ph type="sldNum" sz="quarter" idx="10"/>
+          </p:nvPr>
+        </p:nvSpPr>
+        <p:spPr/>
+        <p:txBody>
+          <a:bodyPr/>
+          <a:lstStyle/>
+          <a:p>
+            <a:fld id="{F7021451-1387-4CA6-816F-3879F97B5CBC}" type="slidenum">
+              <a:rPr lang="en-US"/>
+              <a:t>10</a:t>
+            </a:fld>
+            <a:endParaRPr lang="en-US"/>
+          </a:p>
+        </p:txBody>
+      </p:sp>
+    </p:spTree>
+    <p:extLst>
+      <p:ext uri="{BB962C8B-B14F-4D97-AF65-F5344CB8AC3E}">
+        <p14:creationId xmlns:p14="http://schemas.microsoft.com/office/powerpoint/2010/main" val="1024086991"/>
+      </p:ext>
+    </p:extLst>
+  </p:cSld>
+  <p:clrMapOvr>
+    <a:masterClrMapping/>
+  </p:clrMapOvr>
+</p:notes>
+</file>
+
+<file path=ppt/notesSlides/notesSlide11.xml><?xml version="1.0" encoding="utf-8"?>
+<p:notes xmlns:a="http://schemas.openxmlformats.org/drawingml/2006/main" xmlns:r="http://schemas.openxmlformats.org/officeDocument/2006/relationships" xmlns:p="http://schemas.openxmlformats.org/presentationml/2006/main">
+  <p:cSld>
+    <p:spTree>
+      <p:nvGrpSpPr>
+        <p:cNvPr id="1" name=""/>
+        <p:cNvGrpSpPr/>
+        <p:nvPr/>
+      </p:nvGrpSpPr>
+      <p:grpSpPr>
+        <a:xfrm>
+          <a:off x="0" y="0"/>
+          <a:ext cx="0" cy="0"/>
+          <a:chOff x="0" y="0"/>
+          <a:chExt cx="0" cy="0"/>
+        </a:xfrm>
+      </p:grpSpPr>
+      <p:sp>
+        <p:nvSpPr>
+          <p:cNvPr id="2" name="Slide Image Placeholder 1"/>
+          <p:cNvSpPr>
+            <a:spLocks noGrp="1" noRot="1" noChangeAspect="1"/>
+          </p:cNvSpPr>
+          <p:nvPr>
+            <p:ph type="sldImg"/>
+          </p:nvPr>
+        </p:nvSpPr>
+        <p:spPr/>
+      </p:sp>
+      <p:sp>
+        <p:nvSpPr>
+          <p:cNvPr id="3" name="Notes Placeholder 2"/>
+          <p:cNvSpPr>
+            <a:spLocks noGrp="1"/>
+          </p:cNvSpPr>
+          <p:nvPr>
+            <p:ph type="body" idx="1"/>
+          </p:nvPr>
+        </p:nvSpPr>
+        <p:spPr/>
+        <p:txBody>
+          <a:bodyPr/>
+          <a:lstStyle/>
+          <a:p>
+            <a:r>
+              <a:rPr lang="en-US" dirty="0"/>
+              <a:t/>
+            </a:r>
+            <a:endParaRPr lang="en-US" dirty="0"/>
+          </a:p>
+        </p:txBody>
+      </p:sp>
+      <p:sp>
+        <p:nvSpPr>
+          <p:cNvPr id="4" name="Slide Number Placeholder 3"/>
+          <p:cNvSpPr>
+            <a:spLocks noGrp="1"/>
+          </p:cNvSpPr>
+          <p:nvPr>
+            <p:ph type="sldNum" sz="quarter" idx="10"/>
+          </p:nvPr>
+        </p:nvSpPr>
+        <p:spPr/>
+        <p:txBody>
+          <a:bodyPr/>
+          <a:lstStyle/>
+          <a:p>
+            <a:fld id="{F7021451-1387-4CA6-816F-3879F97B5CBC}" type="slidenum">
+              <a:rPr lang="en-US"/>
+              <a:t>11</a:t>
             </a:fld>
             <a:endParaRPr lang="en-US"/>
           </a:p>
@@ -2373,6 +2551,2924 @@
 </p:sld>
 </file>
 
+<file path=ppt/slides/slide10.xml><?xml version="1.0" encoding="utf-8"?>
+<p:sld xmlns:a="http://schemas.openxmlformats.org/drawingml/2006/main" xmlns:r="http://schemas.openxmlformats.org/officeDocument/2006/relationships" xmlns:p="http://schemas.openxmlformats.org/presentationml/2006/main">
+  <p:cSld name="Slide 10">
+    <p:spTree>
+      <p:nvGrpSpPr>
+        <p:cNvPr id="1" name=""/>
+        <p:cNvGrpSpPr/>
+        <p:nvPr/>
+      </p:nvGrpSpPr>
+      <p:grpSpPr>
+        <a:xfrm>
+          <a:off x="0" y="0"/>
+          <a:ext cx="0" cy="0"/>
+          <a:chOff x="0" y="0"/>
+          <a:chExt cx="0" cy="0"/>
+        </a:xfrm>
+      </p:grpSpPr>
+      <p:sp>
+        <p:nvSpPr>
+          <p:cNvPr id="2" name="Shape 0"/>
+          <p:cNvSpPr/>
+          <p:nvPr/>
+        </p:nvSpPr>
+        <p:spPr>
+          <a:xfrm>
+            <a:off x="0" y="0"/>
+            <a:ext cx="12192000" cy="6858000"/>
+          </a:xfrm>
+          <a:prstGeom prst="rect">
+            <a:avLst/>
+          </a:prstGeom>
+          <a:solidFill>
+            <a:srgbClr val="FAFAF8"/>
+          </a:solidFill>
+          <a:ln w="12700">
+            <a:solidFill>
+              <a:srgbClr val="FAFAF8"/>
+            </a:solidFill>
+            <a:prstDash val="solid"/>
+          </a:ln>
+        </p:spPr>
+      </p:sp>
+      <p:sp>
+        <p:nvSpPr>
+          <p:cNvPr id="3" name="Shape 1"/>
+          <p:cNvSpPr/>
+          <p:nvPr/>
+        </p:nvSpPr>
+        <p:spPr>
+          <a:xfrm>
+            <a:off x="8138160" y="0"/>
+            <a:ext cx="694944" cy="6858000"/>
+          </a:xfrm>
+          <a:prstGeom prst="rect">
+            <a:avLst/>
+          </a:prstGeom>
+          <a:solidFill>
+            <a:srgbClr val="A8C4DC">
+              <a:alpha val="12000"/>
+            </a:srgbClr>
+          </a:solidFill>
+          <a:ln w="12700">
+            <a:solidFill>
+              <a:srgbClr val="A8C4DC">
+                <a:alpha val="12000"/>
+              </a:srgbClr>
+            </a:solidFill>
+            <a:prstDash val="solid"/>
+          </a:ln>
+        </p:spPr>
+      </p:sp>
+      <p:sp>
+        <p:nvSpPr>
+          <p:cNvPr id="4" name="Shape 2"/>
+          <p:cNvSpPr/>
+          <p:nvPr/>
+        </p:nvSpPr>
+        <p:spPr>
+          <a:xfrm>
+            <a:off x="3474720" y="5120640"/>
+            <a:ext cx="2377440" cy="2377440"/>
+          </a:xfrm>
+          <a:prstGeom prst="ellipse">
+            <a:avLst/>
+          </a:prstGeom>
+          <a:solidFill>
+            <a:srgbClr val="C4786A">
+              <a:alpha val="10000"/>
+            </a:srgbClr>
+          </a:solidFill>
+          <a:ln w="12700">
+            <a:solidFill>
+              <a:srgbClr val="C4786A">
+                <a:alpha val="10000"/>
+              </a:srgbClr>
+            </a:solidFill>
+            <a:prstDash val="solid"/>
+          </a:ln>
+        </p:spPr>
+      </p:sp>
+      <p:sp>
+        <p:nvSpPr>
+          <p:cNvPr id="5" name="Shape 3"/>
+          <p:cNvSpPr/>
+          <p:nvPr/>
+        </p:nvSpPr>
+        <p:spPr>
+          <a:xfrm>
+            <a:off x="0" y="0"/>
+            <a:ext cx="12192000" cy="54864"/>
+          </a:xfrm>
+          <a:prstGeom prst="rect">
+            <a:avLst/>
+          </a:prstGeom>
+          <a:solidFill>
+            <a:srgbClr val="5B8DB8"/>
+          </a:solidFill>
+          <a:ln w="12700">
+            <a:solidFill>
+              <a:srgbClr val="5B8DB8"/>
+            </a:solidFill>
+            <a:prstDash val="solid"/>
+          </a:ln>
+        </p:spPr>
+      </p:sp>
+      <p:sp>
+        <p:nvSpPr>
+          <p:cNvPr id="6" name="Shape 4"/>
+          <p:cNvSpPr/>
+          <p:nvPr/>
+        </p:nvSpPr>
+        <p:spPr>
+          <a:xfrm>
+            <a:off x="0" y="6528816"/>
+            <a:ext cx="12192000" cy="54864"/>
+          </a:xfrm>
+          <a:prstGeom prst="rect">
+            <a:avLst/>
+          </a:prstGeom>
+          <a:solidFill>
+            <a:srgbClr val="C4786A"/>
+          </a:solidFill>
+          <a:ln w="12700">
+            <a:solidFill>
+              <a:srgbClr val="C4786A"/>
+            </a:solidFill>
+            <a:prstDash val="solid"/>
+          </a:ln>
+        </p:spPr>
+      </p:sp>
+      <p:sp>
+        <p:nvSpPr>
+          <p:cNvPr id="7" name="Text 5"/>
+          <p:cNvSpPr/>
+          <p:nvPr/>
+        </p:nvSpPr>
+        <p:spPr>
+          <a:xfrm>
+            <a:off x="457200" y="228600"/>
+            <a:ext cx="8375904" cy="502920"/>
+          </a:xfrm>
+          <a:prstGeom prst="rect">
+            <a:avLst/>
+          </a:prstGeom>
+          <a:noFill/>
+          <a:ln/>
+        </p:spPr>
+        <p:txBody>
+          <a:bodyPr wrap="square" rtlCol="0" anchor="ctr"/>
+          <a:lstStyle/>
+          <a:p>
+            <a:pPr indent="0" marL="0">
+              <a:buNone/>
+            </a:pPr>
+            <a:r>
+              <a:rPr lang="en-US" b="1" dirty="0">
+                <a:solidFill>
+                  <a:srgbClr val="2D3748"/>
+                </a:solidFill>
+                <a:latin typeface="Arial" pitchFamily="34" charset="0"/>
+                <a:ea typeface="Arial" pitchFamily="34" charset="-122"/>
+                <a:cs typeface="Arial" pitchFamily="34" charset="-120"/>
+              </a:rPr>
+              <a:t>🏅  Tracción — producto terminado hoy</a:t>
+            </a:r>
+            <a:endParaRPr lang="en-US" dirty="0"/>
+          </a:p>
+        </p:txBody>
+      </p:sp>
+      <p:sp>
+        <p:nvSpPr>
+          <p:cNvPr id="8" name="Text 6"/>
+          <p:cNvSpPr/>
+          <p:nvPr/>
+        </p:nvSpPr>
+        <p:spPr>
+          <a:xfrm>
+            <a:off x="457200" y="731520"/>
+            <a:ext cx="8375904" cy="320040"/>
+          </a:xfrm>
+          <a:prstGeom prst="rect">
+            <a:avLst/>
+          </a:prstGeom>
+          <a:noFill/>
+          <a:ln/>
+        </p:spPr>
+        <p:txBody>
+          <a:bodyPr wrap="square" rtlCol="0" anchor="ctr"/>
+          <a:lstStyle/>
+          <a:p>
+            <a:pPr indent="0" marL="0">
+              <a:buNone/>
+            </a:pPr>
+            <a:r>
+              <a:rPr lang="en-US" b="1" dirty="0">
+                <a:solidFill>
+                  <a:srgbClr val="5B8DB8"/>
+                </a:solidFill>
+                <a:latin typeface="Arial" pitchFamily="34" charset="0"/>
+                <a:ea typeface="Arial" pitchFamily="34" charset="-122"/>
+                <a:cs typeface="Arial" pitchFamily="34" charset="-120"/>
+              </a:rPr>
+              <a:t>8 fases con gate review humano · Auditoría QA: PASS</a:t>
+            </a:r>
+            <a:endParaRPr lang="en-US" dirty="0"/>
+          </a:p>
+        </p:txBody>
+      </p:sp>
+      <p:sp>
+        <p:nvSpPr>
+          <p:cNvPr id="9" name="Shape 7"/>
+          <p:cNvSpPr/>
+          <p:nvPr/>
+        </p:nvSpPr>
+        <p:spPr>
+          <a:xfrm>
+            <a:off x="457200" y="1097280"/>
+            <a:ext cx="8375904" cy="0"/>
+          </a:xfrm>
+          <a:prstGeom prst="line">
+            <a:avLst/>
+          </a:prstGeom>
+          <a:noFill/>
+          <a:ln w="12700">
+            <a:solidFill>
+              <a:srgbClr val="E2E8F0"/>
+            </a:solidFill>
+            <a:prstDash val="solid"/>
+          </a:ln>
+        </p:spPr>
+      </p:sp>
+      <p:sp>
+        <p:nvSpPr>
+          <p:cNvPr id="10" name="Shape 8"/>
+          <p:cNvSpPr/>
+          <p:nvPr/>
+        </p:nvSpPr>
+        <p:spPr>
+          <a:xfrm>
+            <a:off x="457200" y="1261872"/>
+            <a:ext cx="1828800" cy="1965960"/>
+          </a:xfrm>
+          <a:prstGeom prst="roundRect">
+            <a:avLst>
+              <a:gd name="adj" fmla="val 4000"/>
+            </a:avLst>
+          </a:prstGeom>
+          <a:solidFill>
+            <a:srgbClr val="F0FDF4"/>
+          </a:solidFill>
+          <a:ln w="6350">
+            <a:solidFill>
+              <a:srgbClr val="E2E8F0"/>
+            </a:solidFill>
+            <a:prstDash val="solid"/>
+          </a:ln>
+        </p:spPr>
+      </p:sp>
+      <p:sp>
+        <p:nvSpPr>
+          <p:cNvPr id="11" name="Text 9"/>
+          <p:cNvSpPr/>
+          <p:nvPr/>
+        </p:nvSpPr>
+        <p:spPr>
+          <a:xfrm>
+            <a:off x="457200" y="1371600"/>
+            <a:ext cx="1828800" cy="502920"/>
+          </a:xfrm>
+          <a:prstGeom prst="rect">
+            <a:avLst/>
+          </a:prstGeom>
+          <a:noFill/>
+          <a:ln/>
+        </p:spPr>
+        <p:txBody>
+          <a:bodyPr wrap="square" rtlCol="0" anchor="ctr"/>
+          <a:lstStyle/>
+          <a:p>
+            <a:pPr algn="ctr" indent="0" marL="0">
+              <a:buNone/>
+            </a:pPr>
+            <a:r>
+              <a:rPr lang="en-US" sz="2600" dirty="0">
+                <a:solidFill>
+                  <a:srgbClr val="000000"/>
+                </a:solidFill>
+              </a:rPr>
+              <a:t>✅</a:t>
+            </a:r>
+            <a:endParaRPr lang="en-US" sz="2600" dirty="0"/>
+          </a:p>
+        </p:txBody>
+      </p:sp>
+      <p:sp>
+        <p:nvSpPr>
+          <p:cNvPr id="12" name="Text 10"/>
+          <p:cNvSpPr/>
+          <p:nvPr/>
+        </p:nvSpPr>
+        <p:spPr>
+          <a:xfrm>
+            <a:off x="457200" y="1920240"/>
+            <a:ext cx="1828800" cy="594360"/>
+          </a:xfrm>
+          <a:prstGeom prst="rect">
+            <a:avLst/>
+          </a:prstGeom>
+          <a:noFill/>
+          <a:ln/>
+        </p:spPr>
+        <p:txBody>
+          <a:bodyPr wrap="square" rtlCol="0" anchor="ctr"/>
+          <a:lstStyle/>
+          <a:p>
+            <a:pPr algn="ctr" indent="0" marL="0">
+              <a:buNone/>
+            </a:pPr>
+            <a:r>
+              <a:rPr lang="en-US" sz="3000" b="1" dirty="0">
+                <a:solidFill>
+                  <a:srgbClr val="3A6B96"/>
+                </a:solidFill>
+                <a:latin typeface="Arial" pitchFamily="34" charset="0"/>
+                <a:ea typeface="Arial" pitchFamily="34" charset="-122"/>
+                <a:cs typeface="Arial" pitchFamily="34" charset="-120"/>
+              </a:rPr>
+              <a:t>8 / 8</a:t>
+            </a:r>
+            <a:endParaRPr lang="en-US" sz="3000" dirty="0"/>
+          </a:p>
+        </p:txBody>
+      </p:sp>
+      <p:sp>
+        <p:nvSpPr>
+          <p:cNvPr id="13" name="Text 11"/>
+          <p:cNvSpPr/>
+          <p:nvPr/>
+        </p:nvSpPr>
+        <p:spPr>
+          <a:xfrm>
+            <a:off x="457200" y="2514600"/>
+            <a:ext cx="1828800" cy="548640"/>
+          </a:xfrm>
+          <a:prstGeom prst="rect">
+            <a:avLst/>
+          </a:prstGeom>
+          <a:noFill/>
+          <a:ln/>
+        </p:spPr>
+        <p:txBody>
+          <a:bodyPr wrap="square" rtlCol="0" anchor="ctr"/>
+          <a:lstStyle/>
+          <a:p>
+            <a:pPr algn="ctr" indent="0" marL="0">
+              <a:buNone/>
+            </a:pPr>
+            <a:r>
+              <a:rPr lang="en-US" sz="1050" dirty="0">
+                <a:solidFill>
+                  <a:srgbClr val="718096"/>
+                </a:solidFill>
+                <a:latin typeface="Arial" pitchFamily="34" charset="0"/>
+                <a:ea typeface="Arial" pitchFamily="34" charset="-122"/>
+                <a:cs typeface="Arial" pitchFamily="34" charset="-120"/>
+              </a:rPr>
+              <a:t>Fases aprobadas</a:t>
+            </a:r>
+            <a:endParaRPr lang="en-US" sz="1050" dirty="0"/>
+          </a:p>
+          <a:p>
+            <a:pPr algn="ctr" indent="0" marL="0">
+              <a:buNone/>
+            </a:pPr>
+            <a:r>
+              <a:rPr lang="en-US" sz="1050" dirty="0">
+                <a:solidFill>
+                  <a:srgbClr val="718096"/>
+                </a:solidFill>
+                <a:latin typeface="Arial" pitchFamily="34" charset="0"/>
+                <a:ea typeface="Arial" pitchFamily="34" charset="-122"/>
+                <a:cs typeface="Arial" pitchFamily="34" charset="-120"/>
+              </a:rPr>
+              <a:t>con gate review</a:t>
+            </a:r>
+            <a:endParaRPr lang="en-US" sz="1050" dirty="0"/>
+          </a:p>
+        </p:txBody>
+      </p:sp>
+      <p:sp>
+        <p:nvSpPr>
+          <p:cNvPr id="14" name="Shape 12"/>
+          <p:cNvSpPr/>
+          <p:nvPr/>
+        </p:nvSpPr>
+        <p:spPr>
+          <a:xfrm>
+            <a:off x="2578608" y="1261872"/>
+            <a:ext cx="1828800" cy="1965960"/>
+          </a:xfrm>
+          <a:prstGeom prst="roundRect">
+            <a:avLst>
+              <a:gd name="adj" fmla="val 4000"/>
+            </a:avLst>
+          </a:prstGeom>
+          <a:solidFill>
+            <a:srgbClr val="EFF6FF"/>
+          </a:solidFill>
+          <a:ln w="6350">
+            <a:solidFill>
+              <a:srgbClr val="E2E8F0"/>
+            </a:solidFill>
+            <a:prstDash val="solid"/>
+          </a:ln>
+        </p:spPr>
+      </p:sp>
+      <p:sp>
+        <p:nvSpPr>
+          <p:cNvPr id="15" name="Text 13"/>
+          <p:cNvSpPr/>
+          <p:nvPr/>
+        </p:nvSpPr>
+        <p:spPr>
+          <a:xfrm>
+            <a:off x="2578608" y="1371600"/>
+            <a:ext cx="1828800" cy="502920"/>
+          </a:xfrm>
+          <a:prstGeom prst="rect">
+            <a:avLst/>
+          </a:prstGeom>
+          <a:noFill/>
+          <a:ln/>
+        </p:spPr>
+        <p:txBody>
+          <a:bodyPr wrap="square" rtlCol="0" anchor="ctr"/>
+          <a:lstStyle/>
+          <a:p>
+            <a:pPr algn="ctr" indent="0" marL="0">
+              <a:buNone/>
+            </a:pPr>
+            <a:r>
+              <a:rPr lang="en-US" sz="2600" dirty="0">
+                <a:solidFill>
+                  <a:srgbClr val="000000"/>
+                </a:solidFill>
+              </a:rPr>
+              <a:t>🧪</a:t>
+            </a:r>
+            <a:endParaRPr lang="en-US" sz="2600" dirty="0"/>
+          </a:p>
+        </p:txBody>
+      </p:sp>
+      <p:sp>
+        <p:nvSpPr>
+          <p:cNvPr id="16" name="Text 14"/>
+          <p:cNvSpPr/>
+          <p:nvPr/>
+        </p:nvSpPr>
+        <p:spPr>
+          <a:xfrm>
+            <a:off x="2578608" y="1920240"/>
+            <a:ext cx="1828800" cy="594360"/>
+          </a:xfrm>
+          <a:prstGeom prst="rect">
+            <a:avLst/>
+          </a:prstGeom>
+          <a:noFill/>
+          <a:ln/>
+        </p:spPr>
+        <p:txBody>
+          <a:bodyPr wrap="square" rtlCol="0" anchor="ctr"/>
+          <a:lstStyle/>
+          <a:p>
+            <a:pPr algn="ctr" indent="0" marL="0">
+              <a:buNone/>
+            </a:pPr>
+            <a:r>
+              <a:rPr lang="en-US" sz="3000" b="1" dirty="0">
+                <a:solidFill>
+                  <a:srgbClr val="3A6B96"/>
+                </a:solidFill>
+                <a:latin typeface="Arial" pitchFamily="34" charset="0"/>
+                <a:ea typeface="Arial" pitchFamily="34" charset="-122"/>
+                <a:cs typeface="Arial" pitchFamily="34" charset="-120"/>
+              </a:rPr>
+              <a:t>38</a:t>
+            </a:r>
+            <a:endParaRPr lang="en-US" sz="3000" dirty="0"/>
+          </a:p>
+        </p:txBody>
+      </p:sp>
+      <p:sp>
+        <p:nvSpPr>
+          <p:cNvPr id="17" name="Text 15"/>
+          <p:cNvSpPr/>
+          <p:nvPr/>
+        </p:nvSpPr>
+        <p:spPr>
+          <a:xfrm>
+            <a:off x="2578608" y="2514600"/>
+            <a:ext cx="1828800" cy="548640"/>
+          </a:xfrm>
+          <a:prstGeom prst="rect">
+            <a:avLst/>
+          </a:prstGeom>
+          <a:noFill/>
+          <a:ln/>
+        </p:spPr>
+        <p:txBody>
+          <a:bodyPr wrap="square" rtlCol="0" anchor="ctr"/>
+          <a:lstStyle/>
+          <a:p>
+            <a:pPr algn="ctr" indent="0" marL="0">
+              <a:buNone/>
+            </a:pPr>
+            <a:r>
+              <a:rPr lang="en-US" sz="1050" dirty="0">
+                <a:solidFill>
+                  <a:srgbClr val="718096"/>
+                </a:solidFill>
+                <a:latin typeface="Arial" pitchFamily="34" charset="0"/>
+                <a:ea typeface="Arial" pitchFamily="34" charset="-122"/>
+                <a:cs typeface="Arial" pitchFamily="34" charset="-120"/>
+              </a:rPr>
+              <a:t>Pruebas</a:t>
+            </a:r>
+            <a:endParaRPr lang="en-US" sz="1050" dirty="0"/>
+          </a:p>
+          <a:p>
+            <a:pPr algn="ctr" indent="0" marL="0">
+              <a:buNone/>
+            </a:pPr>
+            <a:r>
+              <a:rPr lang="en-US" sz="1050" dirty="0">
+                <a:solidFill>
+                  <a:srgbClr val="718096"/>
+                </a:solidFill>
+                <a:latin typeface="Arial" pitchFamily="34" charset="0"/>
+                <a:ea typeface="Arial" pitchFamily="34" charset="-122"/>
+                <a:cs typeface="Arial" pitchFamily="34" charset="-120"/>
+              </a:rPr>
+              <a:t>automatizadas</a:t>
+            </a:r>
+            <a:endParaRPr lang="en-US" sz="1050" dirty="0"/>
+          </a:p>
+        </p:txBody>
+      </p:sp>
+      <p:sp>
+        <p:nvSpPr>
+          <p:cNvPr id="18" name="Shape 16"/>
+          <p:cNvSpPr/>
+          <p:nvPr/>
+        </p:nvSpPr>
+        <p:spPr>
+          <a:xfrm>
+            <a:off x="4700016" y="1261872"/>
+            <a:ext cx="1828800" cy="1965960"/>
+          </a:xfrm>
+          <a:prstGeom prst="roundRect">
+            <a:avLst>
+              <a:gd name="adj" fmla="val 4000"/>
+            </a:avLst>
+          </a:prstGeom>
+          <a:solidFill>
+            <a:srgbClr val="EFF6FF"/>
+          </a:solidFill>
+          <a:ln w="6350">
+            <a:solidFill>
+              <a:srgbClr val="E2E8F0"/>
+            </a:solidFill>
+            <a:prstDash val="solid"/>
+          </a:ln>
+        </p:spPr>
+      </p:sp>
+      <p:sp>
+        <p:nvSpPr>
+          <p:cNvPr id="19" name="Text 17"/>
+          <p:cNvSpPr/>
+          <p:nvPr/>
+        </p:nvSpPr>
+        <p:spPr>
+          <a:xfrm>
+            <a:off x="4700016" y="1371600"/>
+            <a:ext cx="1828800" cy="502920"/>
+          </a:xfrm>
+          <a:prstGeom prst="rect">
+            <a:avLst/>
+          </a:prstGeom>
+          <a:noFill/>
+          <a:ln/>
+        </p:spPr>
+        <p:txBody>
+          <a:bodyPr wrap="square" rtlCol="0" anchor="ctr"/>
+          <a:lstStyle/>
+          <a:p>
+            <a:pPr algn="ctr" indent="0" marL="0">
+              <a:buNone/>
+            </a:pPr>
+            <a:r>
+              <a:rPr lang="en-US" sz="2600" dirty="0">
+                <a:solidFill>
+                  <a:srgbClr val="000000"/>
+                </a:solidFill>
+              </a:rPr>
+              <a:t>📋</a:t>
+            </a:r>
+            <a:endParaRPr lang="en-US" sz="2600" dirty="0"/>
+          </a:p>
+        </p:txBody>
+      </p:sp>
+      <p:sp>
+        <p:nvSpPr>
+          <p:cNvPr id="20" name="Text 18"/>
+          <p:cNvSpPr/>
+          <p:nvPr/>
+        </p:nvSpPr>
+        <p:spPr>
+          <a:xfrm>
+            <a:off x="4700016" y="1920240"/>
+            <a:ext cx="1828800" cy="594360"/>
+          </a:xfrm>
+          <a:prstGeom prst="rect">
+            <a:avLst/>
+          </a:prstGeom>
+          <a:noFill/>
+          <a:ln/>
+        </p:spPr>
+        <p:txBody>
+          <a:bodyPr wrap="square" rtlCol="0" anchor="ctr"/>
+          <a:lstStyle/>
+          <a:p>
+            <a:pPr algn="ctr" indent="0" marL="0">
+              <a:buNone/>
+            </a:pPr>
+            <a:r>
+              <a:rPr lang="en-US" sz="3000" b="1" dirty="0">
+                <a:solidFill>
+                  <a:srgbClr val="3A6B96"/>
+                </a:solidFill>
+                <a:latin typeface="Arial" pitchFamily="34" charset="0"/>
+                <a:ea typeface="Arial" pitchFamily="34" charset="-122"/>
+                <a:cs typeface="Arial" pitchFamily="34" charset="-120"/>
+              </a:rPr>
+              <a:t>20</a:t>
+            </a:r>
+            <a:endParaRPr lang="en-US" sz="3000" dirty="0"/>
+          </a:p>
+        </p:txBody>
+      </p:sp>
+      <p:sp>
+        <p:nvSpPr>
+          <p:cNvPr id="21" name="Text 19"/>
+          <p:cNvSpPr/>
+          <p:nvPr/>
+        </p:nvSpPr>
+        <p:spPr>
+          <a:xfrm>
+            <a:off x="4700016" y="2514600"/>
+            <a:ext cx="1828800" cy="548640"/>
+          </a:xfrm>
+          <a:prstGeom prst="rect">
+            <a:avLst/>
+          </a:prstGeom>
+          <a:noFill/>
+          <a:ln/>
+        </p:spPr>
+        <p:txBody>
+          <a:bodyPr wrap="square" rtlCol="0" anchor="ctr"/>
+          <a:lstStyle/>
+          <a:p>
+            <a:pPr algn="ctr" indent="0" marL="0">
+              <a:buNone/>
+            </a:pPr>
+            <a:r>
+              <a:rPr lang="en-US" sz="1050" dirty="0">
+                <a:solidFill>
+                  <a:srgbClr val="718096"/>
+                </a:solidFill>
+                <a:latin typeface="Arial" pitchFamily="34" charset="0"/>
+                <a:ea typeface="Arial" pitchFamily="34" charset="-122"/>
+                <a:cs typeface="Arial" pitchFamily="34" charset="-120"/>
+              </a:rPr>
+              <a:t>Aceptación</a:t>
+            </a:r>
+            <a:endParaRPr lang="en-US" sz="1050" dirty="0"/>
+          </a:p>
+          <a:p>
+            <a:pPr algn="ctr" indent="0" marL="0">
+              <a:buNone/>
+            </a:pPr>
+            <a:r>
+              <a:rPr lang="en-US" sz="1050" dirty="0">
+                <a:solidFill>
+                  <a:srgbClr val="718096"/>
+                </a:solidFill>
+                <a:latin typeface="Arial" pitchFamily="34" charset="0"/>
+                <a:ea typeface="Arial" pitchFamily="34" charset="-122"/>
+                <a:cs typeface="Arial" pitchFamily="34" charset="-120"/>
+              </a:rPr>
+              <a:t>del contrato</a:t>
+            </a:r>
+            <a:endParaRPr lang="en-US" sz="1050" dirty="0"/>
+          </a:p>
+        </p:txBody>
+      </p:sp>
+      <p:sp>
+        <p:nvSpPr>
+          <p:cNvPr id="22" name="Shape 20"/>
+          <p:cNvSpPr/>
+          <p:nvPr/>
+        </p:nvSpPr>
+        <p:spPr>
+          <a:xfrm>
+            <a:off x="6821424" y="1261872"/>
+            <a:ext cx="1828800" cy="1965960"/>
+          </a:xfrm>
+          <a:prstGeom prst="roundRect">
+            <a:avLst>
+              <a:gd name="adj" fmla="val 4000"/>
+            </a:avLst>
+          </a:prstGeom>
+          <a:solidFill>
+            <a:srgbClr val="FFF7ED"/>
+          </a:solidFill>
+          <a:ln w="6350">
+            <a:solidFill>
+              <a:srgbClr val="E2E8F0"/>
+            </a:solidFill>
+            <a:prstDash val="solid"/>
+          </a:ln>
+        </p:spPr>
+      </p:sp>
+      <p:sp>
+        <p:nvSpPr>
+          <p:cNvPr id="23" name="Text 21"/>
+          <p:cNvSpPr/>
+          <p:nvPr/>
+        </p:nvSpPr>
+        <p:spPr>
+          <a:xfrm>
+            <a:off x="6821424" y="1371600"/>
+            <a:ext cx="1828800" cy="502920"/>
+          </a:xfrm>
+          <a:prstGeom prst="rect">
+            <a:avLst/>
+          </a:prstGeom>
+          <a:noFill/>
+          <a:ln/>
+        </p:spPr>
+        <p:txBody>
+          <a:bodyPr wrap="square" rtlCol="0" anchor="ctr"/>
+          <a:lstStyle/>
+          <a:p>
+            <a:pPr algn="ctr" indent="0" marL="0">
+              <a:buNone/>
+            </a:pPr>
+            <a:r>
+              <a:rPr lang="en-US" sz="2600" dirty="0">
+                <a:solidFill>
+                  <a:srgbClr val="000000"/>
+                </a:solidFill>
+              </a:rPr>
+              <a:t>🚫</a:t>
+            </a:r>
+            <a:endParaRPr lang="en-US" sz="2600" dirty="0"/>
+          </a:p>
+        </p:txBody>
+      </p:sp>
+      <p:sp>
+        <p:nvSpPr>
+          <p:cNvPr id="24" name="Text 22"/>
+          <p:cNvSpPr/>
+          <p:nvPr/>
+        </p:nvSpPr>
+        <p:spPr>
+          <a:xfrm>
+            <a:off x="6821424" y="1920240"/>
+            <a:ext cx="1828800" cy="594360"/>
+          </a:xfrm>
+          <a:prstGeom prst="rect">
+            <a:avLst/>
+          </a:prstGeom>
+          <a:noFill/>
+          <a:ln/>
+        </p:spPr>
+        <p:txBody>
+          <a:bodyPr wrap="square" rtlCol="0" anchor="ctr"/>
+          <a:lstStyle/>
+          <a:p>
+            <a:pPr algn="ctr" indent="0" marL="0">
+              <a:buNone/>
+            </a:pPr>
+            <a:r>
+              <a:rPr lang="en-US" sz="3000" b="1" dirty="0">
+                <a:solidFill>
+                  <a:srgbClr val="3A6B96"/>
+                </a:solidFill>
+                <a:latin typeface="Arial" pitchFamily="34" charset="0"/>
+                <a:ea typeface="Arial" pitchFamily="34" charset="-122"/>
+                <a:cs typeface="Arial" pitchFamily="34" charset="-120"/>
+              </a:rPr>
+              <a:t>0</a:t>
+            </a:r>
+            <a:endParaRPr lang="en-US" sz="3000" dirty="0"/>
+          </a:p>
+        </p:txBody>
+      </p:sp>
+      <p:sp>
+        <p:nvSpPr>
+          <p:cNvPr id="25" name="Text 23"/>
+          <p:cNvSpPr/>
+          <p:nvPr/>
+        </p:nvSpPr>
+        <p:spPr>
+          <a:xfrm>
+            <a:off x="6821424" y="2514600"/>
+            <a:ext cx="1828800" cy="548640"/>
+          </a:xfrm>
+          <a:prstGeom prst="rect">
+            <a:avLst/>
+          </a:prstGeom>
+          <a:noFill/>
+          <a:ln/>
+        </p:spPr>
+        <p:txBody>
+          <a:bodyPr wrap="square" rtlCol="0" anchor="ctr"/>
+          <a:lstStyle/>
+          <a:p>
+            <a:pPr algn="ctr" indent="0" marL="0">
+              <a:buNone/>
+            </a:pPr>
+            <a:r>
+              <a:rPr lang="en-US" sz="1050" dirty="0">
+                <a:solidFill>
+                  <a:srgbClr val="718096"/>
+                </a:solidFill>
+                <a:latin typeface="Arial" pitchFamily="34" charset="0"/>
+                <a:ea typeface="Arial" pitchFamily="34" charset="-122"/>
+                <a:cs typeface="Arial" pitchFamily="34" charset="-120"/>
+              </a:rPr>
+              <a:t>Hallazgos</a:t>
+            </a:r>
+            <a:endParaRPr lang="en-US" sz="1050" dirty="0"/>
+          </a:p>
+          <a:p>
+            <a:pPr algn="ctr" indent="0" marL="0">
+              <a:buNone/>
+            </a:pPr>
+            <a:r>
+              <a:rPr lang="en-US" sz="1050" dirty="0">
+                <a:solidFill>
+                  <a:srgbClr val="718096"/>
+                </a:solidFill>
+                <a:latin typeface="Arial" pitchFamily="34" charset="0"/>
+                <a:ea typeface="Arial" pitchFamily="34" charset="-122"/>
+                <a:cs typeface="Arial" pitchFamily="34" charset="-120"/>
+              </a:rPr>
+              <a:t>bloqueantes</a:t>
+            </a:r>
+            <a:endParaRPr lang="en-US" sz="1050" dirty="0"/>
+          </a:p>
+        </p:txBody>
+      </p:sp>
+      <p:sp>
+        <p:nvSpPr>
+          <p:cNvPr id="26" name="Shape 24"/>
+          <p:cNvSpPr/>
+          <p:nvPr/>
+        </p:nvSpPr>
+        <p:spPr>
+          <a:xfrm>
+            <a:off x="457200" y="3429000"/>
+            <a:ext cx="1828800" cy="1691640"/>
+          </a:xfrm>
+          <a:prstGeom prst="roundRect">
+            <a:avLst>
+              <a:gd name="adj" fmla="val 4324"/>
+            </a:avLst>
+          </a:prstGeom>
+          <a:solidFill>
+            <a:srgbClr val="F0EDE8"/>
+          </a:solidFill>
+          <a:ln w="6350">
+            <a:solidFill>
+              <a:srgbClr val="E2E8F0"/>
+            </a:solidFill>
+            <a:prstDash val="solid"/>
+          </a:ln>
+        </p:spPr>
+      </p:sp>
+      <p:sp>
+        <p:nvSpPr>
+          <p:cNvPr id="27" name="Text 25"/>
+          <p:cNvSpPr/>
+          <p:nvPr/>
+        </p:nvSpPr>
+        <p:spPr>
+          <a:xfrm>
+            <a:off x="457200" y="3520440"/>
+            <a:ext cx="1828800" cy="457200"/>
+          </a:xfrm>
+          <a:prstGeom prst="rect">
+            <a:avLst/>
+          </a:prstGeom>
+          <a:noFill/>
+          <a:ln/>
+        </p:spPr>
+        <p:txBody>
+          <a:bodyPr wrap="square" rtlCol="0" anchor="ctr"/>
+          <a:lstStyle/>
+          <a:p>
+            <a:pPr algn="ctr" indent="0" marL="0">
+              <a:buNone/>
+            </a:pPr>
+            <a:r>
+              <a:rPr lang="en-US" sz="2200" dirty="0">
+                <a:solidFill>
+                  <a:srgbClr val="000000"/>
+                </a:solidFill>
+              </a:rPr>
+              <a:t>📊</a:t>
+            </a:r>
+            <a:endParaRPr lang="en-US" sz="2200" dirty="0"/>
+          </a:p>
+        </p:txBody>
+      </p:sp>
+      <p:sp>
+        <p:nvSpPr>
+          <p:cNvPr id="28" name="Text 26"/>
+          <p:cNvSpPr/>
+          <p:nvPr/>
+        </p:nvSpPr>
+        <p:spPr>
+          <a:xfrm>
+            <a:off x="457200" y="4005072"/>
+            <a:ext cx="1828800" cy="502920"/>
+          </a:xfrm>
+          <a:prstGeom prst="rect">
+            <a:avLst/>
+          </a:prstGeom>
+          <a:noFill/>
+          <a:ln/>
+        </p:spPr>
+        <p:txBody>
+          <a:bodyPr wrap="square" rtlCol="0" anchor="ctr"/>
+          <a:lstStyle/>
+          <a:p>
+            <a:pPr algn="ctr" indent="0" marL="0">
+              <a:buNone/>
+            </a:pPr>
+            <a:r>
+              <a:rPr lang="en-US" sz="2400" b="1" dirty="0">
+                <a:solidFill>
+                  <a:srgbClr val="5B8DB8"/>
+                </a:solidFill>
+                <a:latin typeface="Arial" pitchFamily="34" charset="0"/>
+                <a:ea typeface="Arial" pitchFamily="34" charset="-122"/>
+                <a:cs typeface="Arial" pitchFamily="34" charset="-120"/>
+              </a:rPr>
+              <a:t>20</a:t>
+            </a:r>
+            <a:endParaRPr lang="en-US" sz="2400" dirty="0"/>
+          </a:p>
+        </p:txBody>
+      </p:sp>
+      <p:sp>
+        <p:nvSpPr>
+          <p:cNvPr id="29" name="Text 27"/>
+          <p:cNvSpPr/>
+          <p:nvPr/>
+        </p:nvSpPr>
+        <p:spPr>
+          <a:xfrm>
+            <a:off x="457200" y="4526280"/>
+            <a:ext cx="1828800" cy="457200"/>
+          </a:xfrm>
+          <a:prstGeom prst="rect">
+            <a:avLst/>
+          </a:prstGeom>
+          <a:noFill/>
+          <a:ln/>
+        </p:spPr>
+        <p:txBody>
+          <a:bodyPr wrap="square" rtlCol="0" anchor="ctr"/>
+          <a:lstStyle/>
+          <a:p>
+            <a:pPr algn="ctr" indent="0" marL="0">
+              <a:buNone/>
+            </a:pPr>
+            <a:r>
+              <a:rPr lang="en-US" sz="1000" dirty="0">
+                <a:solidFill>
+                  <a:srgbClr val="718096"/>
+                </a:solidFill>
+                <a:latin typeface="Arial" pitchFamily="34" charset="0"/>
+                <a:ea typeface="Arial" pitchFamily="34" charset="-122"/>
+                <a:cs typeface="Arial" pitchFamily="34" charset="-120"/>
+              </a:rPr>
+              <a:t>Tipos de evento</a:t>
+            </a:r>
+            <a:endParaRPr lang="en-US" sz="1000" dirty="0"/>
+          </a:p>
+          <a:p>
+            <a:pPr algn="ctr" indent="0" marL="0">
+              <a:buNone/>
+            </a:pPr>
+            <a:r>
+              <a:rPr lang="en-US" sz="1000" dirty="0">
+                <a:solidFill>
+                  <a:srgbClr val="718096"/>
+                </a:solidFill>
+                <a:latin typeface="Arial" pitchFamily="34" charset="0"/>
+                <a:ea typeface="Arial" pitchFamily="34" charset="-122"/>
+                <a:cs typeface="Arial" pitchFamily="34" charset="-120"/>
+              </a:rPr>
+              <a:t>de auditoría</a:t>
+            </a:r>
+            <a:endParaRPr lang="en-US" sz="1000" dirty="0"/>
+          </a:p>
+        </p:txBody>
+      </p:sp>
+      <p:sp>
+        <p:nvSpPr>
+          <p:cNvPr id="30" name="Shape 28"/>
+          <p:cNvSpPr/>
+          <p:nvPr/>
+        </p:nvSpPr>
+        <p:spPr>
+          <a:xfrm>
+            <a:off x="2578608" y="3429000"/>
+            <a:ext cx="1828800" cy="1691640"/>
+          </a:xfrm>
+          <a:prstGeom prst="roundRect">
+            <a:avLst>
+              <a:gd name="adj" fmla="val 4324"/>
+            </a:avLst>
+          </a:prstGeom>
+          <a:solidFill>
+            <a:srgbClr val="F0EDE8"/>
+          </a:solidFill>
+          <a:ln w="6350">
+            <a:solidFill>
+              <a:srgbClr val="E2E8F0"/>
+            </a:solidFill>
+            <a:prstDash val="solid"/>
+          </a:ln>
+        </p:spPr>
+      </p:sp>
+      <p:sp>
+        <p:nvSpPr>
+          <p:cNvPr id="31" name="Text 29"/>
+          <p:cNvSpPr/>
+          <p:nvPr/>
+        </p:nvSpPr>
+        <p:spPr>
+          <a:xfrm>
+            <a:off x="2578608" y="3520440"/>
+            <a:ext cx="1828800" cy="457200"/>
+          </a:xfrm>
+          <a:prstGeom prst="rect">
+            <a:avLst/>
+          </a:prstGeom>
+          <a:noFill/>
+          <a:ln/>
+        </p:spPr>
+        <p:txBody>
+          <a:bodyPr wrap="square" rtlCol="0" anchor="ctr"/>
+          <a:lstStyle/>
+          <a:p>
+            <a:pPr algn="ctr" indent="0" marL="0">
+              <a:buNone/>
+            </a:pPr>
+            <a:r>
+              <a:rPr lang="en-US" sz="2200" dirty="0">
+                <a:solidFill>
+                  <a:srgbClr val="000000"/>
+                </a:solidFill>
+              </a:rPr>
+              <a:t>⚙️</a:t>
+            </a:r>
+            <a:endParaRPr lang="en-US" sz="2200" dirty="0"/>
+          </a:p>
+        </p:txBody>
+      </p:sp>
+      <p:sp>
+        <p:nvSpPr>
+          <p:cNvPr id="32" name="Text 30"/>
+          <p:cNvSpPr/>
+          <p:nvPr/>
+        </p:nvSpPr>
+        <p:spPr>
+          <a:xfrm>
+            <a:off x="2578608" y="4005072"/>
+            <a:ext cx="1828800" cy="502920"/>
+          </a:xfrm>
+          <a:prstGeom prst="rect">
+            <a:avLst/>
+          </a:prstGeom>
+          <a:noFill/>
+          <a:ln/>
+        </p:spPr>
+        <p:txBody>
+          <a:bodyPr wrap="square" rtlCol="0" anchor="ctr"/>
+          <a:lstStyle/>
+          <a:p>
+            <a:pPr algn="ctr" indent="0" marL="0">
+              <a:buNone/>
+            </a:pPr>
+            <a:r>
+              <a:rPr lang="en-US" sz="2400" b="1" dirty="0">
+                <a:solidFill>
+                  <a:srgbClr val="5B8DB8"/>
+                </a:solidFill>
+                <a:latin typeface="Arial" pitchFamily="34" charset="0"/>
+                <a:ea typeface="Arial" pitchFamily="34" charset="-122"/>
+                <a:cs typeface="Arial" pitchFamily="34" charset="-120"/>
+              </a:rPr>
+              <a:t>8</a:t>
+            </a:r>
+            <a:endParaRPr lang="en-US" sz="2400" dirty="0"/>
+          </a:p>
+        </p:txBody>
+      </p:sp>
+      <p:sp>
+        <p:nvSpPr>
+          <p:cNvPr id="33" name="Text 31"/>
+          <p:cNvSpPr/>
+          <p:nvPr/>
+        </p:nvSpPr>
+        <p:spPr>
+          <a:xfrm>
+            <a:off x="2578608" y="4526280"/>
+            <a:ext cx="1828800" cy="457200"/>
+          </a:xfrm>
+          <a:prstGeom prst="rect">
+            <a:avLst/>
+          </a:prstGeom>
+          <a:noFill/>
+          <a:ln/>
+        </p:spPr>
+        <p:txBody>
+          <a:bodyPr wrap="square" rtlCol="0" anchor="ctr"/>
+          <a:lstStyle/>
+          <a:p>
+            <a:pPr algn="ctr" indent="0" marL="0">
+              <a:buNone/>
+            </a:pPr>
+            <a:r>
+              <a:rPr lang="en-US" sz="1000" dirty="0">
+                <a:solidFill>
+                  <a:srgbClr val="718096"/>
+                </a:solidFill>
+                <a:latin typeface="Arial" pitchFamily="34" charset="0"/>
+                <a:ea typeface="Arial" pitchFamily="34" charset="-122"/>
+                <a:cs typeface="Arial" pitchFamily="34" charset="-120"/>
+              </a:rPr>
+              <a:t>Políticas del</a:t>
+            </a:r>
+            <a:endParaRPr lang="en-US" sz="1000" dirty="0"/>
+          </a:p>
+          <a:p>
+            <a:pPr algn="ctr" indent="0" marL="0">
+              <a:buNone/>
+            </a:pPr>
+            <a:r>
+              <a:rPr lang="en-US" sz="1000" dirty="0">
+                <a:solidFill>
+                  <a:srgbClr val="718096"/>
+                </a:solidFill>
+                <a:latin typeface="Arial" pitchFamily="34" charset="0"/>
+                <a:ea typeface="Arial" pitchFamily="34" charset="-122"/>
+                <a:cs typeface="Arial" pitchFamily="34" charset="-120"/>
+              </a:rPr>
+              <a:t>motor temporal</a:t>
+            </a:r>
+            <a:endParaRPr lang="en-US" sz="1000" dirty="0"/>
+          </a:p>
+        </p:txBody>
+      </p:sp>
+      <p:sp>
+        <p:nvSpPr>
+          <p:cNvPr id="34" name="Shape 32"/>
+          <p:cNvSpPr/>
+          <p:nvPr/>
+        </p:nvSpPr>
+        <p:spPr>
+          <a:xfrm>
+            <a:off x="4700016" y="3429000"/>
+            <a:ext cx="1828800" cy="1691640"/>
+          </a:xfrm>
+          <a:prstGeom prst="roundRect">
+            <a:avLst>
+              <a:gd name="adj" fmla="val 4324"/>
+            </a:avLst>
+          </a:prstGeom>
+          <a:solidFill>
+            <a:srgbClr val="F0EDE8"/>
+          </a:solidFill>
+          <a:ln w="6350">
+            <a:solidFill>
+              <a:srgbClr val="E2E8F0"/>
+            </a:solidFill>
+            <a:prstDash val="solid"/>
+          </a:ln>
+        </p:spPr>
+      </p:sp>
+      <p:sp>
+        <p:nvSpPr>
+          <p:cNvPr id="35" name="Text 33"/>
+          <p:cNvSpPr/>
+          <p:nvPr/>
+        </p:nvSpPr>
+        <p:spPr>
+          <a:xfrm>
+            <a:off x="4700016" y="3520440"/>
+            <a:ext cx="1828800" cy="457200"/>
+          </a:xfrm>
+          <a:prstGeom prst="rect">
+            <a:avLst/>
+          </a:prstGeom>
+          <a:noFill/>
+          <a:ln/>
+        </p:spPr>
+        <p:txBody>
+          <a:bodyPr wrap="square" rtlCol="0" anchor="ctr"/>
+          <a:lstStyle/>
+          <a:p>
+            <a:pPr algn="ctr" indent="0" marL="0">
+              <a:buNone/>
+            </a:pPr>
+            <a:r>
+              <a:rPr lang="en-US" sz="2200" dirty="0">
+                <a:solidFill>
+                  <a:srgbClr val="000000"/>
+                </a:solidFill>
+              </a:rPr>
+              <a:t>👆</a:t>
+            </a:r>
+            <a:endParaRPr lang="en-US" sz="2200" dirty="0"/>
+          </a:p>
+        </p:txBody>
+      </p:sp>
+      <p:sp>
+        <p:nvSpPr>
+          <p:cNvPr id="36" name="Text 34"/>
+          <p:cNvSpPr/>
+          <p:nvPr/>
+        </p:nvSpPr>
+        <p:spPr>
+          <a:xfrm>
+            <a:off x="4700016" y="4005072"/>
+            <a:ext cx="1828800" cy="502920"/>
+          </a:xfrm>
+          <a:prstGeom prst="rect">
+            <a:avLst/>
+          </a:prstGeom>
+          <a:noFill/>
+          <a:ln/>
+        </p:spPr>
+        <p:txBody>
+          <a:bodyPr wrap="square" rtlCol="0" anchor="ctr"/>
+          <a:lstStyle/>
+          <a:p>
+            <a:pPr algn="ctr" indent="0" marL="0">
+              <a:buNone/>
+            </a:pPr>
+            <a:r>
+              <a:rPr lang="en-US" sz="2400" b="1" dirty="0">
+                <a:solidFill>
+                  <a:srgbClr val="5B8DB8"/>
+                </a:solidFill>
+                <a:latin typeface="Arial" pitchFamily="34" charset="0"/>
+                <a:ea typeface="Arial" pitchFamily="34" charset="-122"/>
+                <a:cs typeface="Arial" pitchFamily="34" charset="-120"/>
+              </a:rPr>
+              <a:t>≤ 3</a:t>
+            </a:r>
+            <a:endParaRPr lang="en-US" sz="2400" dirty="0"/>
+          </a:p>
+        </p:txBody>
+      </p:sp>
+      <p:sp>
+        <p:nvSpPr>
+          <p:cNvPr id="37" name="Text 35"/>
+          <p:cNvSpPr/>
+          <p:nvPr/>
+        </p:nvSpPr>
+        <p:spPr>
+          <a:xfrm>
+            <a:off x="4700016" y="4526280"/>
+            <a:ext cx="1828800" cy="457200"/>
+          </a:xfrm>
+          <a:prstGeom prst="rect">
+            <a:avLst/>
+          </a:prstGeom>
+          <a:noFill/>
+          <a:ln/>
+        </p:spPr>
+        <p:txBody>
+          <a:bodyPr wrap="square" rtlCol="0" anchor="ctr"/>
+          <a:lstStyle/>
+          <a:p>
+            <a:pPr algn="ctr" indent="0" marL="0">
+              <a:buNone/>
+            </a:pPr>
+            <a:r>
+              <a:rPr lang="en-US" sz="1000" dirty="0">
+                <a:solidFill>
+                  <a:srgbClr val="718096"/>
+                </a:solidFill>
+                <a:latin typeface="Arial" pitchFamily="34" charset="0"/>
+                <a:ea typeface="Arial" pitchFamily="34" charset="-122"/>
+                <a:cs typeface="Arial" pitchFamily="34" charset="-120"/>
+              </a:rPr>
+              <a:t>Acciones para</a:t>
+            </a:r>
+            <a:endParaRPr lang="en-US" sz="1000" dirty="0"/>
+          </a:p>
+          <a:p>
+            <a:pPr algn="ctr" indent="0" marL="0">
+              <a:buNone/>
+            </a:pPr>
+            <a:r>
+              <a:rPr lang="en-US" sz="1000" dirty="0">
+                <a:solidFill>
+                  <a:srgbClr val="718096"/>
+                </a:solidFill>
+                <a:latin typeface="Arial" pitchFamily="34" charset="0"/>
+                <a:ea typeface="Arial" pitchFamily="34" charset="-122"/>
+                <a:cs typeface="Arial" pitchFamily="34" charset="-120"/>
+              </a:rPr>
+              <a:t>completar una ronda</a:t>
+            </a:r>
+            <a:endParaRPr lang="en-US" sz="1000" dirty="0"/>
+          </a:p>
+        </p:txBody>
+      </p:sp>
+      <p:sp>
+        <p:nvSpPr>
+          <p:cNvPr id="38" name="Shape 36"/>
+          <p:cNvSpPr/>
+          <p:nvPr/>
+        </p:nvSpPr>
+        <p:spPr>
+          <a:xfrm>
+            <a:off x="6821424" y="3429000"/>
+            <a:ext cx="1828800" cy="1691640"/>
+          </a:xfrm>
+          <a:prstGeom prst="roundRect">
+            <a:avLst>
+              <a:gd name="adj" fmla="val 4324"/>
+            </a:avLst>
+          </a:prstGeom>
+          <a:solidFill>
+            <a:srgbClr val="F0EDE8"/>
+          </a:solidFill>
+          <a:ln w="6350">
+            <a:solidFill>
+              <a:srgbClr val="E2E8F0"/>
+            </a:solidFill>
+            <a:prstDash val="solid"/>
+          </a:ln>
+        </p:spPr>
+      </p:sp>
+      <p:sp>
+        <p:nvSpPr>
+          <p:cNvPr id="39" name="Text 37"/>
+          <p:cNvSpPr/>
+          <p:nvPr/>
+        </p:nvSpPr>
+        <p:spPr>
+          <a:xfrm>
+            <a:off x="6821424" y="3520440"/>
+            <a:ext cx="1828800" cy="457200"/>
+          </a:xfrm>
+          <a:prstGeom prst="rect">
+            <a:avLst/>
+          </a:prstGeom>
+          <a:noFill/>
+          <a:ln/>
+        </p:spPr>
+        <p:txBody>
+          <a:bodyPr wrap="square" rtlCol="0" anchor="ctr"/>
+          <a:lstStyle/>
+          <a:p>
+            <a:pPr algn="ctr" indent="0" marL="0">
+              <a:buNone/>
+            </a:pPr>
+            <a:r>
+              <a:rPr lang="en-US" sz="2200" dirty="0">
+                <a:solidFill>
+                  <a:srgbClr val="000000"/>
+                </a:solidFill>
+              </a:rPr>
+              <a:t>📦</a:t>
+            </a:r>
+            <a:endParaRPr lang="en-US" sz="2200" dirty="0"/>
+          </a:p>
+        </p:txBody>
+      </p:sp>
+      <p:sp>
+        <p:nvSpPr>
+          <p:cNvPr id="40" name="Text 38"/>
+          <p:cNvSpPr/>
+          <p:nvPr/>
+        </p:nvSpPr>
+        <p:spPr>
+          <a:xfrm>
+            <a:off x="6821424" y="4005072"/>
+            <a:ext cx="1828800" cy="502920"/>
+          </a:xfrm>
+          <a:prstGeom prst="rect">
+            <a:avLst/>
+          </a:prstGeom>
+          <a:noFill/>
+          <a:ln/>
+        </p:spPr>
+        <p:txBody>
+          <a:bodyPr wrap="square" rtlCol="0" anchor="ctr"/>
+          <a:lstStyle/>
+          <a:p>
+            <a:pPr algn="ctr" indent="0" marL="0">
+              <a:buNone/>
+            </a:pPr>
+            <a:r>
+              <a:rPr lang="en-US" sz="2400" b="1" dirty="0">
+                <a:solidFill>
+                  <a:srgbClr val="5B8DB8"/>
+                </a:solidFill>
+                <a:latin typeface="Arial" pitchFamily="34" charset="0"/>
+                <a:ea typeface="Arial" pitchFamily="34" charset="-122"/>
+                <a:cs typeface="Arial" pitchFamily="34" charset="-120"/>
+              </a:rPr>
+              <a:t>~68 KB</a:t>
+            </a:r>
+            <a:endParaRPr lang="en-US" sz="2400" dirty="0"/>
+          </a:p>
+        </p:txBody>
+      </p:sp>
+      <p:sp>
+        <p:nvSpPr>
+          <p:cNvPr id="41" name="Text 39"/>
+          <p:cNvSpPr/>
+          <p:nvPr/>
+        </p:nvSpPr>
+        <p:spPr>
+          <a:xfrm>
+            <a:off x="6821424" y="4526280"/>
+            <a:ext cx="1828800" cy="457200"/>
+          </a:xfrm>
+          <a:prstGeom prst="rect">
+            <a:avLst/>
+          </a:prstGeom>
+          <a:noFill/>
+          <a:ln/>
+        </p:spPr>
+        <p:txBody>
+          <a:bodyPr wrap="square" rtlCol="0" anchor="ctr"/>
+          <a:lstStyle/>
+          <a:p>
+            <a:pPr algn="ctr" indent="0" marL="0">
+              <a:buNone/>
+            </a:pPr>
+            <a:r>
+              <a:rPr lang="en-US" sz="1000" dirty="0">
+                <a:solidFill>
+                  <a:srgbClr val="718096"/>
+                </a:solidFill>
+                <a:latin typeface="Arial" pitchFamily="34" charset="0"/>
+                <a:ea typeface="Arial" pitchFamily="34" charset="-122"/>
+                <a:cs typeface="Arial" pitchFamily="34" charset="-120"/>
+              </a:rPr>
+              <a:t>Bundle comprimido</a:t>
+            </a:r>
+            <a:endParaRPr lang="en-US" sz="1000" dirty="0"/>
+          </a:p>
+          <a:p>
+            <a:pPr algn="ctr" indent="0" marL="0">
+              <a:buNone/>
+            </a:pPr>
+            <a:r>
+              <a:rPr lang="en-US" sz="1000" dirty="0">
+                <a:solidFill>
+                  <a:srgbClr val="718096"/>
+                </a:solidFill>
+                <a:latin typeface="Arial" pitchFamily="34" charset="0"/>
+                <a:ea typeface="Arial" pitchFamily="34" charset="-122"/>
+                <a:cs typeface="Arial" pitchFamily="34" charset="-120"/>
+              </a:rPr>
+              <a:t>de producción</a:t>
+            </a:r>
+            <a:endParaRPr lang="en-US" sz="1000" dirty="0"/>
+          </a:p>
+        </p:txBody>
+      </p:sp>
+      <p:sp>
+        <p:nvSpPr>
+          <p:cNvPr id="42" name="Text 40"/>
+          <p:cNvSpPr/>
+          <p:nvPr/>
+        </p:nvSpPr>
+        <p:spPr>
+          <a:xfrm>
+            <a:off x="457200" y="6291072"/>
+            <a:ext cx="8375904" cy="201168"/>
+          </a:xfrm>
+          <a:prstGeom prst="rect">
+            <a:avLst/>
+          </a:prstGeom>
+          <a:noFill/>
+          <a:ln/>
+        </p:spPr>
+        <p:txBody>
+          <a:bodyPr wrap="square" rtlCol="0" anchor="ctr"/>
+          <a:lstStyle/>
+          <a:p>
+            <a:pPr algn="ctr" indent="0" marL="0">
+              <a:buNone/>
+            </a:pPr>
+            <a:r>
+              <a:rPr lang="en-US" dirty="0">
+                <a:solidFill>
+                  <a:srgbClr val="718096"/>
+                </a:solidFill>
+                <a:latin typeface="Arial" pitchFamily="34" charset="0"/>
+                <a:ea typeface="Arial" pitchFamily="34" charset="-122"/>
+                <a:cs typeface="Arial" pitchFamily="34" charset="-120"/>
+              </a:rPr>
+              <a:t>MVP operacional · No dispositivo médico · Datos ficticios</a:t>
+            </a:r>
+            <a:endParaRPr lang="en-US" dirty="0"/>
+          </a:p>
+        </p:txBody>
+      </p:sp>
+    </p:spTree>
+  </p:cSld>
+  <p:clrMapOvr>
+    <a:masterClrMapping/>
+  </p:clrMapOvr>
+</p:sld>
+</file>
+
+<file path=ppt/slides/slide11.xml><?xml version="1.0" encoding="utf-8"?>
+<p:sld xmlns:a="http://schemas.openxmlformats.org/drawingml/2006/main" xmlns:r="http://schemas.openxmlformats.org/officeDocument/2006/relationships" xmlns:p="http://schemas.openxmlformats.org/presentationml/2006/main">
+  <p:cSld name="Slide 11">
+    <p:spTree>
+      <p:nvGrpSpPr>
+        <p:cNvPr id="1" name=""/>
+        <p:cNvGrpSpPr/>
+        <p:nvPr/>
+      </p:nvGrpSpPr>
+      <p:grpSpPr>
+        <a:xfrm>
+          <a:off x="0" y="0"/>
+          <a:ext cx="0" cy="0"/>
+          <a:chOff x="0" y="0"/>
+          <a:chExt cx="0" cy="0"/>
+        </a:xfrm>
+      </p:grpSpPr>
+      <p:sp>
+        <p:nvSpPr>
+          <p:cNvPr id="2" name="Shape 0"/>
+          <p:cNvSpPr/>
+          <p:nvPr/>
+        </p:nvSpPr>
+        <p:spPr>
+          <a:xfrm>
+            <a:off x="0" y="0"/>
+            <a:ext cx="12192000" cy="6858000"/>
+          </a:xfrm>
+          <a:prstGeom prst="rect">
+            <a:avLst/>
+          </a:prstGeom>
+          <a:solidFill>
+            <a:srgbClr val="FAFAF8"/>
+          </a:solidFill>
+          <a:ln w="12700">
+            <a:solidFill>
+              <a:srgbClr val="FAFAF8"/>
+            </a:solidFill>
+            <a:prstDash val="solid"/>
+          </a:ln>
+        </p:spPr>
+      </p:sp>
+      <p:sp>
+        <p:nvSpPr>
+          <p:cNvPr id="3" name="Shape 1"/>
+          <p:cNvSpPr/>
+          <p:nvPr/>
+        </p:nvSpPr>
+        <p:spPr>
+          <a:xfrm>
+            <a:off x="7132320" y="-1371600"/>
+            <a:ext cx="3474720" cy="3474720"/>
+          </a:xfrm>
+          <a:prstGeom prst="ellipse">
+            <a:avLst/>
+          </a:prstGeom>
+          <a:solidFill>
+            <a:srgbClr val="7BA68A">
+              <a:alpha val="16000"/>
+            </a:srgbClr>
+          </a:solidFill>
+          <a:ln w="12700">
+            <a:solidFill>
+              <a:srgbClr val="7BA68A">
+                <a:alpha val="16000"/>
+              </a:srgbClr>
+            </a:solidFill>
+            <a:prstDash val="solid"/>
+          </a:ln>
+        </p:spPr>
+      </p:sp>
+      <p:sp>
+        <p:nvSpPr>
+          <p:cNvPr id="4" name="Shape 2"/>
+          <p:cNvSpPr/>
+          <p:nvPr/>
+        </p:nvSpPr>
+        <p:spPr>
+          <a:xfrm>
+            <a:off x="-365760" y="5303520"/>
+            <a:ext cx="2011680" cy="2011680"/>
+          </a:xfrm>
+          <a:prstGeom prst="ellipse">
+            <a:avLst/>
+          </a:prstGeom>
+          <a:solidFill>
+            <a:srgbClr val="A8C4DC">
+              <a:alpha val="20000"/>
+            </a:srgbClr>
+          </a:solidFill>
+          <a:ln w="12700">
+            <a:solidFill>
+              <a:srgbClr val="A8C4DC">
+                <a:alpha val="20000"/>
+              </a:srgbClr>
+            </a:solidFill>
+            <a:prstDash val="solid"/>
+          </a:ln>
+        </p:spPr>
+      </p:sp>
+      <p:sp>
+        <p:nvSpPr>
+          <p:cNvPr id="5" name="Shape 3"/>
+          <p:cNvSpPr/>
+          <p:nvPr/>
+        </p:nvSpPr>
+        <p:spPr>
+          <a:xfrm rot="-1080000">
+            <a:off x="274320" y="5943600"/>
+            <a:ext cx="2286000" cy="0"/>
+          </a:xfrm>
+          <a:prstGeom prst="line">
+            <a:avLst/>
+          </a:prstGeom>
+          <a:noFill/>
+          <a:ln w="12700">
+            <a:solidFill>
+              <a:srgbClr val="E2E8F0"/>
+            </a:solidFill>
+            <a:prstDash val="solid"/>
+          </a:ln>
+        </p:spPr>
+      </p:sp>
+      <p:sp>
+        <p:nvSpPr>
+          <p:cNvPr id="6" name="Shape 4"/>
+          <p:cNvSpPr/>
+          <p:nvPr/>
+        </p:nvSpPr>
+        <p:spPr>
+          <a:xfrm>
+            <a:off x="0" y="0"/>
+            <a:ext cx="12192000" cy="54864"/>
+          </a:xfrm>
+          <a:prstGeom prst="rect">
+            <a:avLst/>
+          </a:prstGeom>
+          <a:solidFill>
+            <a:srgbClr val="5B8DB8"/>
+          </a:solidFill>
+          <a:ln w="12700">
+            <a:solidFill>
+              <a:srgbClr val="5B8DB8"/>
+            </a:solidFill>
+            <a:prstDash val="solid"/>
+          </a:ln>
+        </p:spPr>
+      </p:sp>
+      <p:sp>
+        <p:nvSpPr>
+          <p:cNvPr id="7" name="Shape 5"/>
+          <p:cNvSpPr/>
+          <p:nvPr/>
+        </p:nvSpPr>
+        <p:spPr>
+          <a:xfrm>
+            <a:off x="0" y="6528816"/>
+            <a:ext cx="12192000" cy="54864"/>
+          </a:xfrm>
+          <a:prstGeom prst="rect">
+            <a:avLst/>
+          </a:prstGeom>
+          <a:solidFill>
+            <a:srgbClr val="C4786A"/>
+          </a:solidFill>
+          <a:ln w="12700">
+            <a:solidFill>
+              <a:srgbClr val="C4786A"/>
+            </a:solidFill>
+            <a:prstDash val="solid"/>
+          </a:ln>
+        </p:spPr>
+      </p:sp>
+      <p:sp>
+        <p:nvSpPr>
+          <p:cNvPr id="8" name="Text 6"/>
+          <p:cNvSpPr/>
+          <p:nvPr/>
+        </p:nvSpPr>
+        <p:spPr>
+          <a:xfrm>
+            <a:off x="457200" y="228600"/>
+            <a:ext cx="8375904" cy="502920"/>
+          </a:xfrm>
+          <a:prstGeom prst="rect">
+            <a:avLst/>
+          </a:prstGeom>
+          <a:noFill/>
+          <a:ln/>
+        </p:spPr>
+        <p:txBody>
+          <a:bodyPr wrap="square" rtlCol="0" anchor="ctr"/>
+          <a:lstStyle/>
+          <a:p>
+            <a:pPr indent="0" marL="0">
+              <a:buNone/>
+            </a:pPr>
+            <a:r>
+              <a:rPr lang="en-US" b="1" dirty="0">
+                <a:solidFill>
+                  <a:srgbClr val="2D3748"/>
+                </a:solidFill>
+                <a:latin typeface="Arial" pitchFamily="34" charset="0"/>
+                <a:ea typeface="Arial" pitchFamily="34" charset="-122"/>
+                <a:cs typeface="Arial" pitchFamily="34" charset="-120"/>
+              </a:rPr>
+              <a:t>💰  Modelo de negocio</a:t>
+            </a:r>
+            <a:endParaRPr lang="en-US" dirty="0"/>
+          </a:p>
+        </p:txBody>
+      </p:sp>
+      <p:sp>
+        <p:nvSpPr>
+          <p:cNvPr id="9" name="Text 7"/>
+          <p:cNvSpPr/>
+          <p:nvPr/>
+        </p:nvSpPr>
+        <p:spPr>
+          <a:xfrm>
+            <a:off x="457200" y="731520"/>
+            <a:ext cx="8375904" cy="320040"/>
+          </a:xfrm>
+          <a:prstGeom prst="rect">
+            <a:avLst/>
+          </a:prstGeom>
+          <a:noFill/>
+          <a:ln/>
+        </p:spPr>
+        <p:txBody>
+          <a:bodyPr wrap="square" rtlCol="0" anchor="ctr"/>
+          <a:lstStyle/>
+          <a:p>
+            <a:pPr indent="0" marL="0">
+              <a:buNone/>
+            </a:pPr>
+            <a:r>
+              <a:rPr lang="en-US" b="1" dirty="0">
+                <a:solidFill>
+                  <a:srgbClr val="5B8DB8"/>
+                </a:solidFill>
+                <a:latin typeface="Arial" pitchFamily="34" charset="0"/>
+                <a:ea typeface="Arial" pitchFamily="34" charset="-122"/>
+                <a:cs typeface="Arial" pitchFamily="34" charset="-120"/>
+              </a:rPr>
+              <a:t>SaaS B2B · por residencia / mes · margen bruto &gt; 97 %</a:t>
+            </a:r>
+            <a:endParaRPr lang="en-US" dirty="0"/>
+          </a:p>
+        </p:txBody>
+      </p:sp>
+      <p:sp>
+        <p:nvSpPr>
+          <p:cNvPr id="10" name="Shape 8"/>
+          <p:cNvSpPr/>
+          <p:nvPr/>
+        </p:nvSpPr>
+        <p:spPr>
+          <a:xfrm>
+            <a:off x="457200" y="1097280"/>
+            <a:ext cx="8375904" cy="0"/>
+          </a:xfrm>
+          <a:prstGeom prst="line">
+            <a:avLst/>
+          </a:prstGeom>
+          <a:noFill/>
+          <a:ln w="12700">
+            <a:solidFill>
+              <a:srgbClr val="E2E8F0"/>
+            </a:solidFill>
+            <a:prstDash val="solid"/>
+          </a:ln>
+        </p:spPr>
+      </p:sp>
+      <p:sp>
+        <p:nvSpPr>
+          <p:cNvPr id="11" name="Shape 9"/>
+          <p:cNvSpPr/>
+          <p:nvPr/>
+        </p:nvSpPr>
+        <p:spPr>
+          <a:xfrm>
+            <a:off x="457200" y="1261872"/>
+            <a:ext cx="2633472" cy="4206240"/>
+          </a:xfrm>
+          <a:prstGeom prst="roundRect">
+            <a:avLst>
+              <a:gd name="adj" fmla="val 4167"/>
+            </a:avLst>
+          </a:prstGeom>
+          <a:solidFill>
+            <a:srgbClr val="F0EDE8"/>
+          </a:solidFill>
+          <a:ln w="6350">
+            <a:solidFill>
+              <a:srgbClr val="E2E8F0"/>
+            </a:solidFill>
+            <a:prstDash val="solid"/>
+          </a:ln>
+        </p:spPr>
+      </p:sp>
+      <p:sp>
+        <p:nvSpPr>
+          <p:cNvPr id="12" name="Text 10"/>
+          <p:cNvSpPr/>
+          <p:nvPr/>
+        </p:nvSpPr>
+        <p:spPr>
+          <a:xfrm>
+            <a:off x="457200" y="1417320"/>
+            <a:ext cx="2633472" cy="365760"/>
+          </a:xfrm>
+          <a:prstGeom prst="rect">
+            <a:avLst/>
+          </a:prstGeom>
+          <a:noFill/>
+          <a:ln/>
+        </p:spPr>
+        <p:txBody>
+          <a:bodyPr wrap="square" rtlCol="0" anchor="ctr"/>
+          <a:lstStyle/>
+          <a:p>
+            <a:pPr algn="ctr" indent="0" marL="0">
+              <a:buNone/>
+            </a:pPr>
+            <a:r>
+              <a:rPr lang="en-US" sz="1500" b="1" dirty="0">
+                <a:solidFill>
+                  <a:srgbClr val="2D3748"/>
+                </a:solidFill>
+                <a:latin typeface="Arial" pitchFamily="34" charset="0"/>
+                <a:ea typeface="Arial" pitchFamily="34" charset="-122"/>
+                <a:cs typeface="Arial" pitchFamily="34" charset="-120"/>
+              </a:rPr>
+              <a:t>Esencial</a:t>
+            </a:r>
+            <a:endParaRPr lang="en-US" sz="1500" dirty="0"/>
+          </a:p>
+        </p:txBody>
+      </p:sp>
+      <p:sp>
+        <p:nvSpPr>
+          <p:cNvPr id="13" name="Text 11"/>
+          <p:cNvSpPr/>
+          <p:nvPr/>
+        </p:nvSpPr>
+        <p:spPr>
+          <a:xfrm>
+            <a:off x="457200" y="1828800"/>
+            <a:ext cx="2633472" cy="640080"/>
+          </a:xfrm>
+          <a:prstGeom prst="rect">
+            <a:avLst/>
+          </a:prstGeom>
+          <a:noFill/>
+          <a:ln/>
+        </p:spPr>
+        <p:txBody>
+          <a:bodyPr wrap="square" rtlCol="0" anchor="ctr"/>
+          <a:lstStyle/>
+          <a:p>
+            <a:pPr algn="ctr" indent="0" marL="0">
+              <a:buNone/>
+            </a:pPr>
+            <a:r>
+              <a:rPr lang="en-US" sz="3200" b="1" dirty="0">
+                <a:solidFill>
+                  <a:srgbClr val="5B8DB8"/>
+                </a:solidFill>
+                <a:latin typeface="Arial" pitchFamily="34" charset="0"/>
+                <a:ea typeface="Arial" pitchFamily="34" charset="-122"/>
+                <a:cs typeface="Arial" pitchFamily="34" charset="-120"/>
+              </a:rPr>
+              <a:t>$1,490</a:t>
+            </a:r>
+            <a:endParaRPr lang="en-US" sz="3200" dirty="0"/>
+          </a:p>
+        </p:txBody>
+      </p:sp>
+      <p:sp>
+        <p:nvSpPr>
+          <p:cNvPr id="14" name="Text 12"/>
+          <p:cNvSpPr/>
+          <p:nvPr/>
+        </p:nvSpPr>
+        <p:spPr>
+          <a:xfrm>
+            <a:off x="457200" y="2487168"/>
+            <a:ext cx="2633472" cy="274320"/>
+          </a:xfrm>
+          <a:prstGeom prst="rect">
+            <a:avLst/>
+          </a:prstGeom>
+          <a:noFill/>
+          <a:ln/>
+        </p:spPr>
+        <p:txBody>
+          <a:bodyPr wrap="square" rtlCol="0" anchor="ctr"/>
+          <a:lstStyle/>
+          <a:p>
+            <a:pPr algn="ctr" indent="0" marL="0">
+              <a:buNone/>
+            </a:pPr>
+            <a:r>
+              <a:rPr lang="en-US" sz="1100" dirty="0">
+                <a:solidFill>
+                  <a:srgbClr val="718096"/>
+                </a:solidFill>
+                <a:latin typeface="Arial" pitchFamily="34" charset="0"/>
+                <a:ea typeface="Arial" pitchFamily="34" charset="-122"/>
+                <a:cs typeface="Arial" pitchFamily="34" charset="-120"/>
+              </a:rPr>
+              <a:t>MXN / mes</a:t>
+            </a:r>
+            <a:endParaRPr lang="en-US" sz="1100" dirty="0"/>
+          </a:p>
+        </p:txBody>
+      </p:sp>
+      <p:sp>
+        <p:nvSpPr>
+          <p:cNvPr id="15" name="Shape 13"/>
+          <p:cNvSpPr/>
+          <p:nvPr/>
+        </p:nvSpPr>
+        <p:spPr>
+          <a:xfrm>
+            <a:off x="640080" y="2834640"/>
+            <a:ext cx="2267712" cy="0"/>
+          </a:xfrm>
+          <a:prstGeom prst="line">
+            <a:avLst/>
+          </a:prstGeom>
+          <a:noFill/>
+          <a:ln w="6350">
+            <a:solidFill>
+              <a:srgbClr val="E2E8F0"/>
+            </a:solidFill>
+            <a:prstDash val="solid"/>
+          </a:ln>
+        </p:spPr>
+      </p:sp>
+      <p:sp>
+        <p:nvSpPr>
+          <p:cNvPr id="16" name="Text 14"/>
+          <p:cNvSpPr/>
+          <p:nvPr/>
+        </p:nvSpPr>
+        <p:spPr>
+          <a:xfrm>
+            <a:off x="594360" y="2944368"/>
+            <a:ext cx="2359152" cy="420624"/>
+          </a:xfrm>
+          <a:prstGeom prst="rect">
+            <a:avLst/>
+          </a:prstGeom>
+          <a:noFill/>
+          <a:ln/>
+        </p:spPr>
+        <p:txBody>
+          <a:bodyPr wrap="square" rtlCol="0" anchor="ctr"/>
+          <a:lstStyle/>
+          <a:p>
+            <a:pPr algn="ctr" indent="0" marL="0">
+              <a:buNone/>
+            </a:pPr>
+            <a:r>
+              <a:rPr lang="en-US" sz="1150" dirty="0">
+                <a:solidFill>
+                  <a:srgbClr val="2D3748"/>
+                </a:solidFill>
+                <a:latin typeface="Arial" pitchFamily="34" charset="0"/>
+                <a:ea typeface="Arial" pitchFamily="34" charset="-122"/>
+                <a:cs typeface="Arial" pitchFamily="34" charset="-120"/>
+              </a:rPr>
+              <a:t>Hasta 25 residentes</a:t>
+            </a:r>
+            <a:endParaRPr lang="en-US" sz="1150" dirty="0"/>
+          </a:p>
+        </p:txBody>
+      </p:sp>
+      <p:sp>
+        <p:nvSpPr>
+          <p:cNvPr id="17" name="Text 15"/>
+          <p:cNvSpPr/>
+          <p:nvPr/>
+        </p:nvSpPr>
+        <p:spPr>
+          <a:xfrm>
+            <a:off x="594360" y="3438144"/>
+            <a:ext cx="2359152" cy="420624"/>
+          </a:xfrm>
+          <a:prstGeom prst="rect">
+            <a:avLst/>
+          </a:prstGeom>
+          <a:noFill/>
+          <a:ln/>
+        </p:spPr>
+        <p:txBody>
+          <a:bodyPr wrap="square" rtlCol="0" anchor="ctr"/>
+          <a:lstStyle/>
+          <a:p>
+            <a:pPr algn="ctr" indent="0" marL="0">
+              <a:buNone/>
+            </a:pPr>
+            <a:r>
+              <a:rPr lang="en-US" sz="1150" dirty="0">
+                <a:solidFill>
+                  <a:srgbClr val="2D3748"/>
+                </a:solidFill>
+                <a:latin typeface="Arial" pitchFamily="34" charset="0"/>
+                <a:ea typeface="Arial" pitchFamily="34" charset="-122"/>
+                <a:cs typeface="Arial" pitchFamily="34" charset="-120"/>
+              </a:rPr>
+              <a:t>1 supervisor</a:t>
+            </a:r>
+            <a:endParaRPr lang="en-US" sz="1150" dirty="0"/>
+          </a:p>
+        </p:txBody>
+      </p:sp>
+      <p:sp>
+        <p:nvSpPr>
+          <p:cNvPr id="18" name="Text 16"/>
+          <p:cNvSpPr/>
+          <p:nvPr/>
+        </p:nvSpPr>
+        <p:spPr>
+          <a:xfrm>
+            <a:off x="594360" y="3931920"/>
+            <a:ext cx="2359152" cy="420624"/>
+          </a:xfrm>
+          <a:prstGeom prst="rect">
+            <a:avLst/>
+          </a:prstGeom>
+          <a:noFill/>
+          <a:ln/>
+        </p:spPr>
+        <p:txBody>
+          <a:bodyPr wrap="square" rtlCol="0" anchor="ctr"/>
+          <a:lstStyle/>
+          <a:p>
+            <a:pPr algn="ctr" indent="0" marL="0">
+              <a:buNone/>
+            </a:pPr>
+            <a:r>
+              <a:rPr lang="en-US" sz="1150" dirty="0">
+                <a:solidFill>
+                  <a:srgbClr val="2D3748"/>
+                </a:solidFill>
+                <a:latin typeface="Arial" pitchFamily="34" charset="0"/>
+                <a:ea typeface="Arial" pitchFamily="34" charset="-122"/>
+                <a:cs typeface="Arial" pitchFamily="34" charset="-120"/>
+              </a:rPr>
+              <a:t>Hasta 5 cuidadores</a:t>
+            </a:r>
+            <a:endParaRPr lang="en-US" sz="1150" dirty="0"/>
+          </a:p>
+        </p:txBody>
+      </p:sp>
+      <p:sp>
+        <p:nvSpPr>
+          <p:cNvPr id="19" name="Text 17"/>
+          <p:cNvSpPr/>
+          <p:nvPr/>
+        </p:nvSpPr>
+        <p:spPr>
+          <a:xfrm>
+            <a:off x="594360" y="4425696"/>
+            <a:ext cx="2359152" cy="420624"/>
+          </a:xfrm>
+          <a:prstGeom prst="rect">
+            <a:avLst/>
+          </a:prstGeom>
+          <a:noFill/>
+          <a:ln/>
+        </p:spPr>
+        <p:txBody>
+          <a:bodyPr wrap="square" rtlCol="0" anchor="ctr"/>
+          <a:lstStyle/>
+          <a:p>
+            <a:pPr algn="ctr" indent="0" marL="0">
+              <a:buNone/>
+            </a:pPr>
+            <a:r>
+              <a:rPr lang="en-US" sz="1150" b="1" dirty="0">
+                <a:solidFill>
+                  <a:srgbClr val="5B8DB8"/>
+                </a:solidFill>
+                <a:latin typeface="Arial" pitchFamily="34" charset="0"/>
+                <a:ea typeface="Arial" pitchFamily="34" charset="-122"/>
+                <a:cs typeface="Arial" pitchFamily="34" charset="-120"/>
+              </a:rPr>
+              <a:t>Residencias pequeñas</a:t>
+            </a:r>
+            <a:endParaRPr lang="en-US" sz="1150" dirty="0"/>
+          </a:p>
+        </p:txBody>
+      </p:sp>
+      <p:sp>
+        <p:nvSpPr>
+          <p:cNvPr id="20" name="Shape 18"/>
+          <p:cNvSpPr/>
+          <p:nvPr/>
+        </p:nvSpPr>
+        <p:spPr>
+          <a:xfrm>
+            <a:off x="3273552" y="1261872"/>
+            <a:ext cx="2633472" cy="4206240"/>
+          </a:xfrm>
+          <a:prstGeom prst="roundRect">
+            <a:avLst>
+              <a:gd name="adj" fmla="val 4167"/>
+            </a:avLst>
+          </a:prstGeom>
+          <a:solidFill>
+            <a:srgbClr val="EFF6FF"/>
+          </a:solidFill>
+          <a:ln w="19050">
+            <a:solidFill>
+              <a:srgbClr val="5B8DB8"/>
+            </a:solidFill>
+            <a:prstDash val="solid"/>
+          </a:ln>
+        </p:spPr>
+      </p:sp>
+      <p:sp>
+        <p:nvSpPr>
+          <p:cNvPr id="21" name="Shape 19"/>
+          <p:cNvSpPr/>
+          <p:nvPr/>
+        </p:nvSpPr>
+        <p:spPr>
+          <a:xfrm>
+            <a:off x="3639312" y="1188720"/>
+            <a:ext cx="1874520" cy="292608"/>
+          </a:xfrm>
+          <a:prstGeom prst="roundRect">
+            <a:avLst>
+              <a:gd name="adj" fmla="val 18750"/>
+            </a:avLst>
+          </a:prstGeom>
+          <a:solidFill>
+            <a:srgbClr val="5B8DB8"/>
+          </a:solidFill>
+          <a:ln w="12700">
+            <a:solidFill>
+              <a:srgbClr val="5B8DB8"/>
+            </a:solidFill>
+            <a:prstDash val="solid"/>
+          </a:ln>
+        </p:spPr>
+      </p:sp>
+      <p:sp>
+        <p:nvSpPr>
+          <p:cNvPr id="22" name="Text 20"/>
+          <p:cNvSpPr/>
+          <p:nvPr/>
+        </p:nvSpPr>
+        <p:spPr>
+          <a:xfrm>
+            <a:off x="3639312" y="1188720"/>
+            <a:ext cx="1874520" cy="292608"/>
+          </a:xfrm>
+          <a:prstGeom prst="rect">
+            <a:avLst/>
+          </a:prstGeom>
+          <a:noFill/>
+          <a:ln/>
+        </p:spPr>
+        <p:txBody>
+          <a:bodyPr wrap="square" rtlCol="0" anchor="ctr"/>
+          <a:lstStyle/>
+          <a:p>
+            <a:pPr algn="ctr" indent="0" marL="0">
+              <a:buNone/>
+            </a:pPr>
+            <a:r>
+              <a:rPr lang="en-US" sz="900" b="1" dirty="0">
+                <a:solidFill>
+                  <a:srgbClr val="FFFFFF"/>
+                </a:solidFill>
+                <a:latin typeface="Arial" pitchFamily="34" charset="0"/>
+                <a:ea typeface="Arial" pitchFamily="34" charset="-122"/>
+                <a:cs typeface="Arial" pitchFamily="34" charset="-120"/>
+              </a:rPr>
+              <a:t>Más popular</a:t>
+            </a:r>
+            <a:endParaRPr lang="en-US" sz="900" dirty="0"/>
+          </a:p>
+        </p:txBody>
+      </p:sp>
+      <p:sp>
+        <p:nvSpPr>
+          <p:cNvPr id="23" name="Text 21"/>
+          <p:cNvSpPr/>
+          <p:nvPr/>
+        </p:nvSpPr>
+        <p:spPr>
+          <a:xfrm>
+            <a:off x="3273552" y="1417320"/>
+            <a:ext cx="2633472" cy="365760"/>
+          </a:xfrm>
+          <a:prstGeom prst="rect">
+            <a:avLst/>
+          </a:prstGeom>
+          <a:noFill/>
+          <a:ln/>
+        </p:spPr>
+        <p:txBody>
+          <a:bodyPr wrap="square" rtlCol="0" anchor="ctr"/>
+          <a:lstStyle/>
+          <a:p>
+            <a:pPr algn="ctr" indent="0" marL="0">
+              <a:buNone/>
+            </a:pPr>
+            <a:r>
+              <a:rPr lang="en-US" sz="1500" b="1" dirty="0">
+                <a:solidFill>
+                  <a:srgbClr val="2D3748"/>
+                </a:solidFill>
+                <a:latin typeface="Arial" pitchFamily="34" charset="0"/>
+                <a:ea typeface="Arial" pitchFamily="34" charset="-122"/>
+                <a:cs typeface="Arial" pitchFamily="34" charset="-120"/>
+              </a:rPr>
+              <a:t>Profesional</a:t>
+            </a:r>
+            <a:endParaRPr lang="en-US" sz="1500" dirty="0"/>
+          </a:p>
+        </p:txBody>
+      </p:sp>
+      <p:sp>
+        <p:nvSpPr>
+          <p:cNvPr id="24" name="Text 22"/>
+          <p:cNvSpPr/>
+          <p:nvPr/>
+        </p:nvSpPr>
+        <p:spPr>
+          <a:xfrm>
+            <a:off x="3273552" y="1828800"/>
+            <a:ext cx="2633472" cy="640080"/>
+          </a:xfrm>
+          <a:prstGeom prst="rect">
+            <a:avLst/>
+          </a:prstGeom>
+          <a:noFill/>
+          <a:ln/>
+        </p:spPr>
+        <p:txBody>
+          <a:bodyPr wrap="square" rtlCol="0" anchor="ctr"/>
+          <a:lstStyle/>
+          <a:p>
+            <a:pPr algn="ctr" indent="0" marL="0">
+              <a:buNone/>
+            </a:pPr>
+            <a:r>
+              <a:rPr lang="en-US" sz="3200" b="1" dirty="0">
+                <a:solidFill>
+                  <a:srgbClr val="3A6B96"/>
+                </a:solidFill>
+                <a:latin typeface="Arial" pitchFamily="34" charset="0"/>
+                <a:ea typeface="Arial" pitchFamily="34" charset="-122"/>
+                <a:cs typeface="Arial" pitchFamily="34" charset="-120"/>
+              </a:rPr>
+              <a:t>$3,490</a:t>
+            </a:r>
+            <a:endParaRPr lang="en-US" sz="3200" dirty="0"/>
+          </a:p>
+        </p:txBody>
+      </p:sp>
+      <p:sp>
+        <p:nvSpPr>
+          <p:cNvPr id="25" name="Text 23"/>
+          <p:cNvSpPr/>
+          <p:nvPr/>
+        </p:nvSpPr>
+        <p:spPr>
+          <a:xfrm>
+            <a:off x="3273552" y="2487168"/>
+            <a:ext cx="2633472" cy="274320"/>
+          </a:xfrm>
+          <a:prstGeom prst="rect">
+            <a:avLst/>
+          </a:prstGeom>
+          <a:noFill/>
+          <a:ln/>
+        </p:spPr>
+        <p:txBody>
+          <a:bodyPr wrap="square" rtlCol="0" anchor="ctr"/>
+          <a:lstStyle/>
+          <a:p>
+            <a:pPr algn="ctr" indent="0" marL="0">
+              <a:buNone/>
+            </a:pPr>
+            <a:r>
+              <a:rPr lang="en-US" sz="1100" dirty="0">
+                <a:solidFill>
+                  <a:srgbClr val="718096"/>
+                </a:solidFill>
+                <a:latin typeface="Arial" pitchFamily="34" charset="0"/>
+                <a:ea typeface="Arial" pitchFamily="34" charset="-122"/>
+                <a:cs typeface="Arial" pitchFamily="34" charset="-120"/>
+              </a:rPr>
+              <a:t>MXN / mes</a:t>
+            </a:r>
+            <a:endParaRPr lang="en-US" sz="1100" dirty="0"/>
+          </a:p>
+        </p:txBody>
+      </p:sp>
+      <p:sp>
+        <p:nvSpPr>
+          <p:cNvPr id="26" name="Shape 24"/>
+          <p:cNvSpPr/>
+          <p:nvPr/>
+        </p:nvSpPr>
+        <p:spPr>
+          <a:xfrm>
+            <a:off x="3456432" y="2834640"/>
+            <a:ext cx="2267712" cy="0"/>
+          </a:xfrm>
+          <a:prstGeom prst="line">
+            <a:avLst/>
+          </a:prstGeom>
+          <a:noFill/>
+          <a:ln w="6350">
+            <a:solidFill>
+              <a:srgbClr val="E2E8F0"/>
+            </a:solidFill>
+            <a:prstDash val="solid"/>
+          </a:ln>
+        </p:spPr>
+      </p:sp>
+      <p:sp>
+        <p:nvSpPr>
+          <p:cNvPr id="27" name="Text 25"/>
+          <p:cNvSpPr/>
+          <p:nvPr/>
+        </p:nvSpPr>
+        <p:spPr>
+          <a:xfrm>
+            <a:off x="3410712" y="2944368"/>
+            <a:ext cx="2359152" cy="420624"/>
+          </a:xfrm>
+          <a:prstGeom prst="rect">
+            <a:avLst/>
+          </a:prstGeom>
+          <a:noFill/>
+          <a:ln/>
+        </p:spPr>
+        <p:txBody>
+          <a:bodyPr wrap="square" rtlCol="0" anchor="ctr"/>
+          <a:lstStyle/>
+          <a:p>
+            <a:pPr algn="ctr" indent="0" marL="0">
+              <a:buNone/>
+            </a:pPr>
+            <a:r>
+              <a:rPr lang="en-US" sz="1150" dirty="0">
+                <a:solidFill>
+                  <a:srgbClr val="2D3748"/>
+                </a:solidFill>
+                <a:latin typeface="Arial" pitchFamily="34" charset="0"/>
+                <a:ea typeface="Arial" pitchFamily="34" charset="-122"/>
+                <a:cs typeface="Arial" pitchFamily="34" charset="-120"/>
+              </a:rPr>
+              <a:t>Hasta 75 residentes</a:t>
+            </a:r>
+            <a:endParaRPr lang="en-US" sz="1150" dirty="0"/>
+          </a:p>
+        </p:txBody>
+      </p:sp>
+      <p:sp>
+        <p:nvSpPr>
+          <p:cNvPr id="28" name="Text 26"/>
+          <p:cNvSpPr/>
+          <p:nvPr/>
+        </p:nvSpPr>
+        <p:spPr>
+          <a:xfrm>
+            <a:off x="3410712" y="3438144"/>
+            <a:ext cx="2359152" cy="420624"/>
+          </a:xfrm>
+          <a:prstGeom prst="rect">
+            <a:avLst/>
+          </a:prstGeom>
+          <a:noFill/>
+          <a:ln/>
+        </p:spPr>
+        <p:txBody>
+          <a:bodyPr wrap="square" rtlCol="0" anchor="ctr"/>
+          <a:lstStyle/>
+          <a:p>
+            <a:pPr algn="ctr" indent="0" marL="0">
+              <a:buNone/>
+            </a:pPr>
+            <a:r>
+              <a:rPr lang="en-US" sz="1150" dirty="0">
+                <a:solidFill>
+                  <a:srgbClr val="2D3748"/>
+                </a:solidFill>
+                <a:latin typeface="Arial" pitchFamily="34" charset="0"/>
+                <a:ea typeface="Arial" pitchFamily="34" charset="-122"/>
+                <a:cs typeface="Arial" pitchFamily="34" charset="-120"/>
+              </a:rPr>
+              <a:t>Hasta 3 supervisores</a:t>
+            </a:r>
+            <a:endParaRPr lang="en-US" sz="1150" dirty="0"/>
+          </a:p>
+        </p:txBody>
+      </p:sp>
+      <p:sp>
+        <p:nvSpPr>
+          <p:cNvPr id="29" name="Text 27"/>
+          <p:cNvSpPr/>
+          <p:nvPr/>
+        </p:nvSpPr>
+        <p:spPr>
+          <a:xfrm>
+            <a:off x="3410712" y="3931920"/>
+            <a:ext cx="2359152" cy="420624"/>
+          </a:xfrm>
+          <a:prstGeom prst="rect">
+            <a:avLst/>
+          </a:prstGeom>
+          <a:noFill/>
+          <a:ln/>
+        </p:spPr>
+        <p:txBody>
+          <a:bodyPr wrap="square" rtlCol="0" anchor="ctr"/>
+          <a:lstStyle/>
+          <a:p>
+            <a:pPr algn="ctr" indent="0" marL="0">
+              <a:buNone/>
+            </a:pPr>
+            <a:r>
+              <a:rPr lang="en-US" sz="1150" dirty="0">
+                <a:solidFill>
+                  <a:srgbClr val="2D3748"/>
+                </a:solidFill>
+                <a:latin typeface="Arial" pitchFamily="34" charset="0"/>
+                <a:ea typeface="Arial" pitchFamily="34" charset="-122"/>
+                <a:cs typeface="Arial" pitchFamily="34" charset="-120"/>
+              </a:rPr>
+              <a:t>Hasta 15 cuidadores</a:t>
+            </a:r>
+            <a:endParaRPr lang="en-US" sz="1150" dirty="0"/>
+          </a:p>
+        </p:txBody>
+      </p:sp>
+      <p:sp>
+        <p:nvSpPr>
+          <p:cNvPr id="30" name="Text 28"/>
+          <p:cNvSpPr/>
+          <p:nvPr/>
+        </p:nvSpPr>
+        <p:spPr>
+          <a:xfrm>
+            <a:off x="3410712" y="4425696"/>
+            <a:ext cx="2359152" cy="420624"/>
+          </a:xfrm>
+          <a:prstGeom prst="rect">
+            <a:avLst/>
+          </a:prstGeom>
+          <a:noFill/>
+          <a:ln/>
+        </p:spPr>
+        <p:txBody>
+          <a:bodyPr wrap="square" rtlCol="0" anchor="ctr"/>
+          <a:lstStyle/>
+          <a:p>
+            <a:pPr algn="ctr" indent="0" marL="0">
+              <a:buNone/>
+            </a:pPr>
+            <a:r>
+              <a:rPr lang="en-US" sz="1150" b="1" dirty="0">
+                <a:solidFill>
+                  <a:srgbClr val="5B8DB8"/>
+                </a:solidFill>
+                <a:latin typeface="Arial" pitchFamily="34" charset="0"/>
+                <a:ea typeface="Arial" pitchFamily="34" charset="-122"/>
+                <a:cs typeface="Arial" pitchFamily="34" charset="-120"/>
+              </a:rPr>
+              <a:t>Residencias medianas</a:t>
+            </a:r>
+            <a:endParaRPr lang="en-US" sz="1150" dirty="0"/>
+          </a:p>
+        </p:txBody>
+      </p:sp>
+      <p:sp>
+        <p:nvSpPr>
+          <p:cNvPr id="31" name="Shape 29"/>
+          <p:cNvSpPr/>
+          <p:nvPr/>
+        </p:nvSpPr>
+        <p:spPr>
+          <a:xfrm>
+            <a:off x="6089904" y="1261872"/>
+            <a:ext cx="2633472" cy="4206240"/>
+          </a:xfrm>
+          <a:prstGeom prst="roundRect">
+            <a:avLst>
+              <a:gd name="adj" fmla="val 4167"/>
+            </a:avLst>
+          </a:prstGeom>
+          <a:solidFill>
+            <a:srgbClr val="F0EDE8"/>
+          </a:solidFill>
+          <a:ln w="6350">
+            <a:solidFill>
+              <a:srgbClr val="E2E8F0"/>
+            </a:solidFill>
+            <a:prstDash val="solid"/>
+          </a:ln>
+        </p:spPr>
+      </p:sp>
+      <p:sp>
+        <p:nvSpPr>
+          <p:cNvPr id="32" name="Text 30"/>
+          <p:cNvSpPr/>
+          <p:nvPr/>
+        </p:nvSpPr>
+        <p:spPr>
+          <a:xfrm>
+            <a:off x="6089904" y="1417320"/>
+            <a:ext cx="2633472" cy="365760"/>
+          </a:xfrm>
+          <a:prstGeom prst="rect">
+            <a:avLst/>
+          </a:prstGeom>
+          <a:noFill/>
+          <a:ln/>
+        </p:spPr>
+        <p:txBody>
+          <a:bodyPr wrap="square" rtlCol="0" anchor="ctr"/>
+          <a:lstStyle/>
+          <a:p>
+            <a:pPr algn="ctr" indent="0" marL="0">
+              <a:buNone/>
+            </a:pPr>
+            <a:r>
+              <a:rPr lang="en-US" sz="1500" b="1" dirty="0">
+                <a:solidFill>
+                  <a:srgbClr val="2D3748"/>
+                </a:solidFill>
+                <a:latin typeface="Arial" pitchFamily="34" charset="0"/>
+                <a:ea typeface="Arial" pitchFamily="34" charset="-122"/>
+                <a:cs typeface="Arial" pitchFamily="34" charset="-120"/>
+              </a:rPr>
+              <a:t>Institucional</a:t>
+            </a:r>
+            <a:endParaRPr lang="en-US" sz="1500" dirty="0"/>
+          </a:p>
+        </p:txBody>
+      </p:sp>
+      <p:sp>
+        <p:nvSpPr>
+          <p:cNvPr id="33" name="Text 31"/>
+          <p:cNvSpPr/>
+          <p:nvPr/>
+        </p:nvSpPr>
+        <p:spPr>
+          <a:xfrm>
+            <a:off x="6089904" y="1828800"/>
+            <a:ext cx="2633472" cy="640080"/>
+          </a:xfrm>
+          <a:prstGeom prst="rect">
+            <a:avLst/>
+          </a:prstGeom>
+          <a:noFill/>
+          <a:ln/>
+        </p:spPr>
+        <p:txBody>
+          <a:bodyPr wrap="square" rtlCol="0" anchor="ctr"/>
+          <a:lstStyle/>
+          <a:p>
+            <a:pPr algn="ctr" indent="0" marL="0">
+              <a:buNone/>
+            </a:pPr>
+            <a:r>
+              <a:rPr lang="en-US" sz="3200" b="1" dirty="0">
+                <a:solidFill>
+                  <a:srgbClr val="5B8DB8"/>
+                </a:solidFill>
+                <a:latin typeface="Arial" pitchFamily="34" charset="0"/>
+                <a:ea typeface="Arial" pitchFamily="34" charset="-122"/>
+                <a:cs typeface="Arial" pitchFamily="34" charset="-120"/>
+              </a:rPr>
+              <a:t>$6,990</a:t>
+            </a:r>
+            <a:endParaRPr lang="en-US" sz="3200" dirty="0"/>
+          </a:p>
+        </p:txBody>
+      </p:sp>
+      <p:sp>
+        <p:nvSpPr>
+          <p:cNvPr id="34" name="Text 32"/>
+          <p:cNvSpPr/>
+          <p:nvPr/>
+        </p:nvSpPr>
+        <p:spPr>
+          <a:xfrm>
+            <a:off x="6089904" y="2487168"/>
+            <a:ext cx="2633472" cy="274320"/>
+          </a:xfrm>
+          <a:prstGeom prst="rect">
+            <a:avLst/>
+          </a:prstGeom>
+          <a:noFill/>
+          <a:ln/>
+        </p:spPr>
+        <p:txBody>
+          <a:bodyPr wrap="square" rtlCol="0" anchor="ctr"/>
+          <a:lstStyle/>
+          <a:p>
+            <a:pPr algn="ctr" indent="0" marL="0">
+              <a:buNone/>
+            </a:pPr>
+            <a:r>
+              <a:rPr lang="en-US" sz="1100" dirty="0">
+                <a:solidFill>
+                  <a:srgbClr val="718096"/>
+                </a:solidFill>
+                <a:latin typeface="Arial" pitchFamily="34" charset="0"/>
+                <a:ea typeface="Arial" pitchFamily="34" charset="-122"/>
+                <a:cs typeface="Arial" pitchFamily="34" charset="-120"/>
+              </a:rPr>
+              <a:t>MXN / mes</a:t>
+            </a:r>
+            <a:endParaRPr lang="en-US" sz="1100" dirty="0"/>
+          </a:p>
+        </p:txBody>
+      </p:sp>
+      <p:sp>
+        <p:nvSpPr>
+          <p:cNvPr id="35" name="Shape 33"/>
+          <p:cNvSpPr/>
+          <p:nvPr/>
+        </p:nvSpPr>
+        <p:spPr>
+          <a:xfrm>
+            <a:off x="6272784" y="2834640"/>
+            <a:ext cx="2267712" cy="0"/>
+          </a:xfrm>
+          <a:prstGeom prst="line">
+            <a:avLst/>
+          </a:prstGeom>
+          <a:noFill/>
+          <a:ln w="6350">
+            <a:solidFill>
+              <a:srgbClr val="E2E8F0"/>
+            </a:solidFill>
+            <a:prstDash val="solid"/>
+          </a:ln>
+        </p:spPr>
+      </p:sp>
+      <p:sp>
+        <p:nvSpPr>
+          <p:cNvPr id="36" name="Text 34"/>
+          <p:cNvSpPr/>
+          <p:nvPr/>
+        </p:nvSpPr>
+        <p:spPr>
+          <a:xfrm>
+            <a:off x="6227064" y="2944368"/>
+            <a:ext cx="2359152" cy="420624"/>
+          </a:xfrm>
+          <a:prstGeom prst="rect">
+            <a:avLst/>
+          </a:prstGeom>
+          <a:noFill/>
+          <a:ln/>
+        </p:spPr>
+        <p:txBody>
+          <a:bodyPr wrap="square" rtlCol="0" anchor="ctr"/>
+          <a:lstStyle/>
+          <a:p>
+            <a:pPr algn="ctr" indent="0" marL="0">
+              <a:buNone/>
+            </a:pPr>
+            <a:r>
+              <a:rPr lang="en-US" sz="1150" dirty="0">
+                <a:solidFill>
+                  <a:srgbClr val="2D3748"/>
+                </a:solidFill>
+                <a:latin typeface="Arial" pitchFamily="34" charset="0"/>
+                <a:ea typeface="Arial" pitchFamily="34" charset="-122"/>
+                <a:cs typeface="Arial" pitchFamily="34" charset="-120"/>
+              </a:rPr>
+              <a:t>Sin límite</a:t>
+            </a:r>
+            <a:endParaRPr lang="en-US" sz="1150" dirty="0"/>
+          </a:p>
+        </p:txBody>
+      </p:sp>
+      <p:sp>
+        <p:nvSpPr>
+          <p:cNvPr id="37" name="Text 35"/>
+          <p:cNvSpPr/>
+          <p:nvPr/>
+        </p:nvSpPr>
+        <p:spPr>
+          <a:xfrm>
+            <a:off x="6227064" y="3438144"/>
+            <a:ext cx="2359152" cy="420624"/>
+          </a:xfrm>
+          <a:prstGeom prst="rect">
+            <a:avLst/>
+          </a:prstGeom>
+          <a:noFill/>
+          <a:ln/>
+        </p:spPr>
+        <p:txBody>
+          <a:bodyPr wrap="square" rtlCol="0" anchor="ctr"/>
+          <a:lstStyle/>
+          <a:p>
+            <a:pPr algn="ctr" indent="0" marL="0">
+              <a:buNone/>
+            </a:pPr>
+            <a:r>
+              <a:rPr lang="en-US" sz="1150" dirty="0">
+                <a:solidFill>
+                  <a:srgbClr val="2D3748"/>
+                </a:solidFill>
+                <a:latin typeface="Arial" pitchFamily="34" charset="0"/>
+                <a:ea typeface="Arial" pitchFamily="34" charset="-122"/>
+                <a:cs typeface="Arial" pitchFamily="34" charset="-120"/>
+              </a:rPr>
+              <a:t>Sin límite</a:t>
+            </a:r>
+            <a:endParaRPr lang="en-US" sz="1150" dirty="0"/>
+          </a:p>
+        </p:txBody>
+      </p:sp>
+      <p:sp>
+        <p:nvSpPr>
+          <p:cNvPr id="38" name="Text 36"/>
+          <p:cNvSpPr/>
+          <p:nvPr/>
+        </p:nvSpPr>
+        <p:spPr>
+          <a:xfrm>
+            <a:off x="6227064" y="3931920"/>
+            <a:ext cx="2359152" cy="420624"/>
+          </a:xfrm>
+          <a:prstGeom prst="rect">
+            <a:avLst/>
+          </a:prstGeom>
+          <a:noFill/>
+          <a:ln/>
+        </p:spPr>
+        <p:txBody>
+          <a:bodyPr wrap="square" rtlCol="0" anchor="ctr"/>
+          <a:lstStyle/>
+          <a:p>
+            <a:pPr algn="ctr" indent="0" marL="0">
+              <a:buNone/>
+            </a:pPr>
+            <a:r>
+              <a:rPr lang="en-US" sz="1150" dirty="0">
+                <a:solidFill>
+                  <a:srgbClr val="2D3748"/>
+                </a:solidFill>
+                <a:latin typeface="Arial" pitchFamily="34" charset="0"/>
+                <a:ea typeface="Arial" pitchFamily="34" charset="-122"/>
+                <a:cs typeface="Arial" pitchFamily="34" charset="-120"/>
+              </a:rPr>
+              <a:t>Sin límite</a:t>
+            </a:r>
+            <a:endParaRPr lang="en-US" sz="1150" dirty="0"/>
+          </a:p>
+        </p:txBody>
+      </p:sp>
+      <p:sp>
+        <p:nvSpPr>
+          <p:cNvPr id="39" name="Text 37"/>
+          <p:cNvSpPr/>
+          <p:nvPr/>
+        </p:nvSpPr>
+        <p:spPr>
+          <a:xfrm>
+            <a:off x="6227064" y="4425696"/>
+            <a:ext cx="2359152" cy="420624"/>
+          </a:xfrm>
+          <a:prstGeom prst="rect">
+            <a:avLst/>
+          </a:prstGeom>
+          <a:noFill/>
+          <a:ln/>
+        </p:spPr>
+        <p:txBody>
+          <a:bodyPr wrap="square" rtlCol="0" anchor="ctr"/>
+          <a:lstStyle/>
+          <a:p>
+            <a:pPr algn="ctr" indent="0" marL="0">
+              <a:buNone/>
+            </a:pPr>
+            <a:r>
+              <a:rPr lang="en-US" sz="1150" b="1" dirty="0">
+                <a:solidFill>
+                  <a:srgbClr val="5B8DB8"/>
+                </a:solidFill>
+                <a:latin typeface="Arial" pitchFamily="34" charset="0"/>
+                <a:ea typeface="Arial" pitchFamily="34" charset="-122"/>
+                <a:cs typeface="Arial" pitchFamily="34" charset="-120"/>
+              </a:rPr>
+              <a:t>Cadenas · soporte prioritario</a:t>
+            </a:r>
+            <a:endParaRPr lang="en-US" sz="1150" dirty="0"/>
+          </a:p>
+        </p:txBody>
+      </p:sp>
+      <p:sp>
+        <p:nvSpPr>
+          <p:cNvPr id="40" name="Text 38"/>
+          <p:cNvSpPr/>
+          <p:nvPr/>
+        </p:nvSpPr>
+        <p:spPr>
+          <a:xfrm>
+            <a:off x="457200" y="6291072"/>
+            <a:ext cx="8375904" cy="201168"/>
+          </a:xfrm>
+          <a:prstGeom prst="rect">
+            <a:avLst/>
+          </a:prstGeom>
+          <a:noFill/>
+          <a:ln/>
+        </p:spPr>
+        <p:txBody>
+          <a:bodyPr wrap="square" rtlCol="0" anchor="ctr"/>
+          <a:lstStyle/>
+          <a:p>
+            <a:pPr algn="l" indent="0" marL="0">
+              <a:buNone/>
+            </a:pPr>
+            <a:r>
+              <a:rPr lang="en-US" dirty="0">
+                <a:solidFill>
+                  <a:srgbClr val="718096"/>
+                </a:solidFill>
+                <a:latin typeface="Arial" pitchFamily="34" charset="0"/>
+                <a:ea typeface="Arial" pitchFamily="34" charset="-122"/>
+                <a:cs typeface="Arial" pitchFamily="34" charset="-120"/>
+              </a:rPr>
+              <a:t>⚠️ Precios de referencia — no validados con clientes. Declarar ante jueces.</a:t>
+            </a:r>
+            <a:endParaRPr lang="en-US" dirty="0"/>
+          </a:p>
+        </p:txBody>
+      </p:sp>
+    </p:spTree>
+  </p:cSld>
+  <p:clrMapOvr>
+    <a:masterClrMapping/>
+  </p:clrMapOvr>
+</p:sld>
+</file>
+
 <file path=ppt/slides/slide2.xml><?xml version="1.0" encoding="utf-8"?>
 <p:sld xmlns:a="http://schemas.openxmlformats.org/drawingml/2006/main" xmlns:r="http://schemas.openxmlformats.org/officeDocument/2006/relationships" xmlns:p="http://schemas.openxmlformats.org/presentationml/2006/main">
   <p:cSld name="Slide 2">

--- a/business/CareSignal_Pitch_Deck.pptx
+++ b/business/CareSignal_Pitch_Deck.pptx
@@ -16,9 +16,10 @@
     <p:sldId id="264" r:id="rId10"/>
     <p:sldId id="265" r:id="rId11"/>
     <p:sldId id="266" r:id="rId12"/>
+    <p:sldId id="267" r:id="rId13"/>
   </p:sldIdLst>
   <p:notesMasterIdLst>
-    <p:notesMasterId r:id="rId13"/>
+    <p:notesMasterId r:id="rId14"/>
   </p:notesMasterIdLst>
   <p:sldSz cx="12192000" cy="6858000"/>
   <p:notesSz cx="6858000" cy="12192000"/>
@@ -712,6 +713,94 @@
             <a:fld id="{F7021451-1387-4CA6-816F-3879F97B5CBC}" type="slidenum">
               <a:rPr lang="en-US"/>
               <a:t>11</a:t>
+            </a:fld>
+            <a:endParaRPr lang="en-US"/>
+          </a:p>
+        </p:txBody>
+      </p:sp>
+    </p:spTree>
+    <p:extLst>
+      <p:ext uri="{BB962C8B-B14F-4D97-AF65-F5344CB8AC3E}">
+        <p14:creationId xmlns:p14="http://schemas.microsoft.com/office/powerpoint/2010/main" val="1024086991"/>
+      </p:ext>
+    </p:extLst>
+  </p:cSld>
+  <p:clrMapOvr>
+    <a:masterClrMapping/>
+  </p:clrMapOvr>
+</p:notes>
+</file>
+
+<file path=ppt/notesSlides/notesSlide12.xml><?xml version="1.0" encoding="utf-8"?>
+<p:notes xmlns:a="http://schemas.openxmlformats.org/drawingml/2006/main" xmlns:r="http://schemas.openxmlformats.org/officeDocument/2006/relationships" xmlns:p="http://schemas.openxmlformats.org/presentationml/2006/main">
+  <p:cSld>
+    <p:spTree>
+      <p:nvGrpSpPr>
+        <p:cNvPr id="1" name=""/>
+        <p:cNvGrpSpPr/>
+        <p:nvPr/>
+      </p:nvGrpSpPr>
+      <p:grpSpPr>
+        <a:xfrm>
+          <a:off x="0" y="0"/>
+          <a:ext cx="0" cy="0"/>
+          <a:chOff x="0" y="0"/>
+          <a:chExt cx="0" cy="0"/>
+        </a:xfrm>
+      </p:grpSpPr>
+      <p:sp>
+        <p:nvSpPr>
+          <p:cNvPr id="2" name="Slide Image Placeholder 1"/>
+          <p:cNvSpPr>
+            <a:spLocks noGrp="1" noRot="1" noChangeAspect="1"/>
+          </p:cNvSpPr>
+          <p:nvPr>
+            <p:ph type="sldImg"/>
+          </p:nvPr>
+        </p:nvSpPr>
+        <p:spPr/>
+      </p:sp>
+      <p:sp>
+        <p:nvSpPr>
+          <p:cNvPr id="3" name="Notes Placeholder 2"/>
+          <p:cNvSpPr>
+            <a:spLocks noGrp="1"/>
+          </p:cNvSpPr>
+          <p:nvPr>
+            <p:ph type="body" idx="1"/>
+          </p:nvPr>
+        </p:nvSpPr>
+        <p:spPr/>
+        <p:txBody>
+          <a:bodyPr/>
+          <a:lstStyle/>
+          <a:p>
+            <a:r>
+              <a:rPr lang="en-US" dirty="0"/>
+              <a:t/>
+            </a:r>
+            <a:endParaRPr lang="en-US" dirty="0"/>
+          </a:p>
+        </p:txBody>
+      </p:sp>
+      <p:sp>
+        <p:nvSpPr>
+          <p:cNvPr id="4" name="Slide Number Placeholder 3"/>
+          <p:cNvSpPr>
+            <a:spLocks noGrp="1"/>
+          </p:cNvSpPr>
+          <p:nvPr>
+            <p:ph type="sldNum" sz="quarter" idx="10"/>
+          </p:nvPr>
+        </p:nvSpPr>
+        <p:spPr/>
+        <p:txBody>
+          <a:bodyPr/>
+          <a:lstStyle/>
+          <a:p>
+            <a:fld id="{F7021451-1387-4CA6-816F-3879F97B5CBC}" type="slidenum">
+              <a:rPr lang="en-US"/>
+              <a:t>12</a:t>
             </a:fld>
             <a:endParaRPr lang="en-US"/>
           </a:p>
@@ -5469,6 +5558,1399 @@
 </p:sld>
 </file>
 
+<file path=ppt/slides/slide12.xml><?xml version="1.0" encoding="utf-8"?>
+<p:sld xmlns:a="http://schemas.openxmlformats.org/drawingml/2006/main" xmlns:r="http://schemas.openxmlformats.org/officeDocument/2006/relationships" xmlns:p="http://schemas.openxmlformats.org/presentationml/2006/main">
+  <p:cSld name="Slide 12">
+    <p:spTree>
+      <p:nvGrpSpPr>
+        <p:cNvPr id="1" name=""/>
+        <p:cNvGrpSpPr/>
+        <p:nvPr/>
+      </p:nvGrpSpPr>
+      <p:grpSpPr>
+        <a:xfrm>
+          <a:off x="0" y="0"/>
+          <a:ext cx="0" cy="0"/>
+          <a:chOff x="0" y="0"/>
+          <a:chExt cx="0" cy="0"/>
+        </a:xfrm>
+      </p:grpSpPr>
+      <p:sp>
+        <p:nvSpPr>
+          <p:cNvPr id="2" name="Shape 0"/>
+          <p:cNvSpPr/>
+          <p:nvPr/>
+        </p:nvSpPr>
+        <p:spPr>
+          <a:xfrm>
+            <a:off x="0" y="0"/>
+            <a:ext cx="12192000" cy="6858000"/>
+          </a:xfrm>
+          <a:prstGeom prst="rect">
+            <a:avLst/>
+          </a:prstGeom>
+          <a:solidFill>
+            <a:srgbClr val="FAFAF8"/>
+          </a:solidFill>
+          <a:ln w="12700">
+            <a:solidFill>
+              <a:srgbClr val="FAFAF8"/>
+            </a:solidFill>
+            <a:prstDash val="solid"/>
+          </a:ln>
+        </p:spPr>
+      </p:sp>
+      <p:sp>
+        <p:nvSpPr>
+          <p:cNvPr id="3" name="Shape 1"/>
+          <p:cNvSpPr/>
+          <p:nvPr/>
+        </p:nvSpPr>
+        <p:spPr>
+          <a:xfrm>
+            <a:off x="8138160" y="0"/>
+            <a:ext cx="694944" cy="6858000"/>
+          </a:xfrm>
+          <a:prstGeom prst="rect">
+            <a:avLst/>
+          </a:prstGeom>
+          <a:solidFill>
+            <a:srgbClr val="A8C4DC">
+              <a:alpha val="12000"/>
+            </a:srgbClr>
+          </a:solidFill>
+          <a:ln w="12700">
+            <a:solidFill>
+              <a:srgbClr val="A8C4DC">
+                <a:alpha val="12000"/>
+              </a:srgbClr>
+            </a:solidFill>
+            <a:prstDash val="solid"/>
+          </a:ln>
+        </p:spPr>
+      </p:sp>
+      <p:sp>
+        <p:nvSpPr>
+          <p:cNvPr id="4" name="Shape 2"/>
+          <p:cNvSpPr/>
+          <p:nvPr/>
+        </p:nvSpPr>
+        <p:spPr>
+          <a:xfrm>
+            <a:off x="3474720" y="5120640"/>
+            <a:ext cx="2377440" cy="2377440"/>
+          </a:xfrm>
+          <a:prstGeom prst="ellipse">
+            <a:avLst/>
+          </a:prstGeom>
+          <a:solidFill>
+            <a:srgbClr val="C4786A">
+              <a:alpha val="10000"/>
+            </a:srgbClr>
+          </a:solidFill>
+          <a:ln w="12700">
+            <a:solidFill>
+              <a:srgbClr val="C4786A">
+                <a:alpha val="10000"/>
+              </a:srgbClr>
+            </a:solidFill>
+            <a:prstDash val="solid"/>
+          </a:ln>
+        </p:spPr>
+      </p:sp>
+      <p:sp>
+        <p:nvSpPr>
+          <p:cNvPr id="5" name="Shape 3"/>
+          <p:cNvSpPr/>
+          <p:nvPr/>
+        </p:nvSpPr>
+        <p:spPr>
+          <a:xfrm>
+            <a:off x="0" y="0"/>
+            <a:ext cx="12192000" cy="54864"/>
+          </a:xfrm>
+          <a:prstGeom prst="rect">
+            <a:avLst/>
+          </a:prstGeom>
+          <a:solidFill>
+            <a:srgbClr val="5B8DB8"/>
+          </a:solidFill>
+          <a:ln w="12700">
+            <a:solidFill>
+              <a:srgbClr val="5B8DB8"/>
+            </a:solidFill>
+            <a:prstDash val="solid"/>
+          </a:ln>
+        </p:spPr>
+      </p:sp>
+      <p:sp>
+        <p:nvSpPr>
+          <p:cNvPr id="6" name="Shape 4"/>
+          <p:cNvSpPr/>
+          <p:nvPr/>
+        </p:nvSpPr>
+        <p:spPr>
+          <a:xfrm>
+            <a:off x="0" y="6528816"/>
+            <a:ext cx="12192000" cy="54864"/>
+          </a:xfrm>
+          <a:prstGeom prst="rect">
+            <a:avLst/>
+          </a:prstGeom>
+          <a:solidFill>
+            <a:srgbClr val="C4786A"/>
+          </a:solidFill>
+          <a:ln w="12700">
+            <a:solidFill>
+              <a:srgbClr val="C4786A"/>
+            </a:solidFill>
+            <a:prstDash val="solid"/>
+          </a:ln>
+        </p:spPr>
+      </p:sp>
+      <p:sp>
+        <p:nvSpPr>
+          <p:cNvPr id="7" name="Text 5"/>
+          <p:cNvSpPr/>
+          <p:nvPr/>
+        </p:nvSpPr>
+        <p:spPr>
+          <a:xfrm>
+            <a:off x="457200" y="228600"/>
+            <a:ext cx="8375904" cy="502920"/>
+          </a:xfrm>
+          <a:prstGeom prst="rect">
+            <a:avLst/>
+          </a:prstGeom>
+          <a:noFill/>
+          <a:ln/>
+        </p:spPr>
+        <p:txBody>
+          <a:bodyPr wrap="square" rtlCol="0" anchor="ctr"/>
+          <a:lstStyle/>
+          <a:p>
+            <a:pPr indent="0" marL="0">
+              <a:buNone/>
+            </a:pPr>
+            <a:r>
+              <a:rPr lang="en-US" b="1" dirty="0">
+                <a:solidFill>
+                  <a:srgbClr val="2D3748"/>
+                </a:solidFill>
+                <a:latin typeface="Arial" pitchFamily="34" charset="0"/>
+                <a:ea typeface="Arial" pitchFamily="34" charset="-122"/>
+                <a:cs typeface="Arial" pitchFamily="34" charset="-120"/>
+              </a:rPr>
+              <a:t>🔐  IA y Ciberseguridad</a:t>
+            </a:r>
+            <a:endParaRPr lang="en-US" dirty="0"/>
+          </a:p>
+        </p:txBody>
+      </p:sp>
+      <p:sp>
+        <p:nvSpPr>
+          <p:cNvPr id="8" name="Text 6"/>
+          <p:cNvSpPr/>
+          <p:nvPr/>
+        </p:nvSpPr>
+        <p:spPr>
+          <a:xfrm>
+            <a:off x="457200" y="731520"/>
+            <a:ext cx="8375904" cy="320040"/>
+          </a:xfrm>
+          <a:prstGeom prst="rect">
+            <a:avLst/>
+          </a:prstGeom>
+          <a:noFill/>
+          <a:ln/>
+        </p:spPr>
+        <p:txBody>
+          <a:bodyPr wrap="square" rtlCol="0" anchor="ctr"/>
+          <a:lstStyle/>
+          <a:p>
+            <a:pPr indent="0" marL="0">
+              <a:buNone/>
+            </a:pPr>
+            <a:r>
+              <a:rPr lang="en-US" b="1" dirty="0">
+                <a:solidFill>
+                  <a:srgbClr val="5B8DB8"/>
+                </a:solidFill>
+                <a:latin typeface="Arial" pitchFamily="34" charset="0"/>
+                <a:ea typeface="Arial" pitchFamily="34" charset="-122"/>
+                <a:cs typeface="Arial" pitchFamily="34" charset="-120"/>
+              </a:rPr>
+              <a:t>Datos sensibles por ley · arquitectura en GCP · roadmap de IA operativa</a:t>
+            </a:r>
+            <a:endParaRPr lang="en-US" dirty="0"/>
+          </a:p>
+        </p:txBody>
+      </p:sp>
+      <p:sp>
+        <p:nvSpPr>
+          <p:cNvPr id="9" name="Shape 7"/>
+          <p:cNvSpPr/>
+          <p:nvPr/>
+        </p:nvSpPr>
+        <p:spPr>
+          <a:xfrm>
+            <a:off x="457200" y="1097280"/>
+            <a:ext cx="8375904" cy="0"/>
+          </a:xfrm>
+          <a:prstGeom prst="line">
+            <a:avLst/>
+          </a:prstGeom>
+          <a:noFill/>
+          <a:ln w="12700">
+            <a:solidFill>
+              <a:srgbClr val="E2E8F0"/>
+            </a:solidFill>
+            <a:prstDash val="solid"/>
+          </a:ln>
+        </p:spPr>
+      </p:sp>
+      <p:sp>
+        <p:nvSpPr>
+          <p:cNvPr id="10" name="Shape 8"/>
+          <p:cNvSpPr/>
+          <p:nvPr/>
+        </p:nvSpPr>
+        <p:spPr>
+          <a:xfrm>
+            <a:off x="457200" y="1261872"/>
+            <a:ext cx="3977640" cy="3200400"/>
+          </a:xfrm>
+          <a:prstGeom prst="roundRect">
+            <a:avLst>
+              <a:gd name="adj" fmla="val 2286"/>
+            </a:avLst>
+          </a:prstGeom>
+          <a:solidFill>
+            <a:srgbClr val="FFF7ED"/>
+          </a:solidFill>
+          <a:ln w="6350">
+            <a:solidFill>
+              <a:srgbClr val="E2E8F0"/>
+            </a:solidFill>
+            <a:prstDash val="solid"/>
+          </a:ln>
+        </p:spPr>
+      </p:sp>
+      <p:sp>
+        <p:nvSpPr>
+          <p:cNvPr id="11" name="Text 9"/>
+          <p:cNvSpPr/>
+          <p:nvPr/>
+        </p:nvSpPr>
+        <p:spPr>
+          <a:xfrm>
+            <a:off x="594360" y="1371600"/>
+            <a:ext cx="3703320" cy="384048"/>
+          </a:xfrm>
+          <a:prstGeom prst="rect">
+            <a:avLst/>
+          </a:prstGeom>
+          <a:noFill/>
+          <a:ln/>
+        </p:spPr>
+        <p:txBody>
+          <a:bodyPr wrap="square" rtlCol="0" anchor="ctr"/>
+          <a:lstStyle/>
+          <a:p>
+            <a:pPr indent="0" marL="0">
+              <a:buNone/>
+            </a:pPr>
+            <a:r>
+              <a:rPr lang="en-US" sz="1400" b="1" dirty="0">
+                <a:solidFill>
+                  <a:srgbClr val="C4786A"/>
+                </a:solidFill>
+                <a:latin typeface="Arial" pitchFamily="34" charset="0"/>
+                <a:ea typeface="Arial" pitchFamily="34" charset="-122"/>
+                <a:cs typeface="Arial" pitchFamily="34" charset="-120"/>
+              </a:rPr>
+              <a:t>🛡️  Ciberseguridad</a:t>
+            </a:r>
+            <a:endParaRPr lang="en-US" sz="1400" dirty="0"/>
+          </a:p>
+        </p:txBody>
+      </p:sp>
+      <p:sp>
+        <p:nvSpPr>
+          <p:cNvPr id="12" name="Shape 10"/>
+          <p:cNvSpPr/>
+          <p:nvPr/>
+        </p:nvSpPr>
+        <p:spPr>
+          <a:xfrm>
+            <a:off x="594360" y="1783080"/>
+            <a:ext cx="3703320" cy="0"/>
+          </a:xfrm>
+          <a:prstGeom prst="line">
+            <a:avLst/>
+          </a:prstGeom>
+          <a:noFill/>
+          <a:ln w="7620">
+            <a:solidFill>
+              <a:srgbClr val="E2E8F0"/>
+            </a:solidFill>
+            <a:prstDash val="solid"/>
+          </a:ln>
+        </p:spPr>
+      </p:sp>
+      <p:sp>
+        <p:nvSpPr>
+          <p:cNvPr id="13" name="Text 11"/>
+          <p:cNvSpPr/>
+          <p:nvPr/>
+        </p:nvSpPr>
+        <p:spPr>
+          <a:xfrm>
+            <a:off x="594360" y="1920240"/>
+            <a:ext cx="548640" cy="530352"/>
+          </a:xfrm>
+          <a:prstGeom prst="rect">
+            <a:avLst/>
+          </a:prstGeom>
+          <a:noFill/>
+          <a:ln/>
+        </p:spPr>
+        <p:txBody>
+          <a:bodyPr wrap="square" rtlCol="0" anchor="ctr"/>
+          <a:lstStyle/>
+          <a:p>
+            <a:pPr algn="ctr" indent="0" marL="0">
+              <a:buNone/>
+            </a:pPr>
+            <a:r>
+              <a:rPr lang="en-US" sz="2000" dirty="0">
+                <a:solidFill>
+                  <a:srgbClr val="000000"/>
+                </a:solidFill>
+              </a:rPr>
+              <a:t>📜</a:t>
+            </a:r>
+            <a:endParaRPr lang="en-US" sz="2000" dirty="0"/>
+          </a:p>
+        </p:txBody>
+      </p:sp>
+      <p:sp>
+        <p:nvSpPr>
+          <p:cNvPr id="14" name="Text 12"/>
+          <p:cNvSpPr/>
+          <p:nvPr/>
+        </p:nvSpPr>
+        <p:spPr>
+          <a:xfrm>
+            <a:off x="1188720" y="1920240"/>
+            <a:ext cx="3063240" cy="530352"/>
+          </a:xfrm>
+          <a:prstGeom prst="rect">
+            <a:avLst/>
+          </a:prstGeom>
+          <a:noFill/>
+          <a:ln/>
+        </p:spPr>
+        <p:txBody>
+          <a:bodyPr wrap="square" rtlCol="0" anchor="ctr"/>
+          <a:lstStyle/>
+          <a:p>
+            <a:pPr indent="0" marL="0">
+              <a:buNone/>
+            </a:pPr>
+            <a:r>
+              <a:rPr lang="en-US" sz="1150" dirty="0">
+                <a:solidFill>
+                  <a:srgbClr val="2D3748"/>
+                </a:solidFill>
+                <a:latin typeface="Arial" pitchFamily="34" charset="0"/>
+                <a:ea typeface="Arial" pitchFamily="34" charset="-122"/>
+                <a:cs typeface="Arial" pitchFamily="34" charset="-120"/>
+              </a:rPr>
+              <a:t>LFPDPPP — datos de adultos</a:t>
+            </a:r>
+            <a:endParaRPr lang="en-US" sz="1150" dirty="0"/>
+          </a:p>
+          <a:p>
+            <a:pPr indent="0" marL="0">
+              <a:buNone/>
+            </a:pPr>
+            <a:r>
+              <a:rPr lang="en-US" sz="1150" dirty="0">
+                <a:solidFill>
+                  <a:srgbClr val="2D3748"/>
+                </a:solidFill>
+                <a:latin typeface="Arial" pitchFamily="34" charset="0"/>
+                <a:ea typeface="Arial" pitchFamily="34" charset="-122"/>
+                <a:cs typeface="Arial" pitchFamily="34" charset="-120"/>
+              </a:rPr>
+              <a:t>mayores son datos sensibles por ley</a:t>
+            </a:r>
+            <a:endParaRPr lang="en-US" sz="1150" dirty="0"/>
+          </a:p>
+        </p:txBody>
+      </p:sp>
+      <p:sp>
+        <p:nvSpPr>
+          <p:cNvPr id="15" name="Text 13"/>
+          <p:cNvSpPr/>
+          <p:nvPr/>
+        </p:nvSpPr>
+        <p:spPr>
+          <a:xfrm>
+            <a:off x="594360" y="2578608"/>
+            <a:ext cx="548640" cy="530352"/>
+          </a:xfrm>
+          <a:prstGeom prst="rect">
+            <a:avLst/>
+          </a:prstGeom>
+          <a:noFill/>
+          <a:ln/>
+        </p:spPr>
+        <p:txBody>
+          <a:bodyPr wrap="square" rtlCol="0" anchor="ctr"/>
+          <a:lstStyle/>
+          <a:p>
+            <a:pPr algn="ctr" indent="0" marL="0">
+              <a:buNone/>
+            </a:pPr>
+            <a:r>
+              <a:rPr lang="en-US" sz="2000" dirty="0">
+                <a:solidFill>
+                  <a:srgbClr val="000000"/>
+                </a:solidFill>
+              </a:rPr>
+              <a:t>☁️</a:t>
+            </a:r>
+            <a:endParaRPr lang="en-US" sz="2000" dirty="0"/>
+          </a:p>
+        </p:txBody>
+      </p:sp>
+      <p:sp>
+        <p:nvSpPr>
+          <p:cNvPr id="16" name="Text 14"/>
+          <p:cNvSpPr/>
+          <p:nvPr/>
+        </p:nvSpPr>
+        <p:spPr>
+          <a:xfrm>
+            <a:off x="1188720" y="2578608"/>
+            <a:ext cx="3063240" cy="530352"/>
+          </a:xfrm>
+          <a:prstGeom prst="rect">
+            <a:avLst/>
+          </a:prstGeom>
+          <a:noFill/>
+          <a:ln/>
+        </p:spPr>
+        <p:txBody>
+          <a:bodyPr wrap="square" rtlCol="0" anchor="ctr"/>
+          <a:lstStyle/>
+          <a:p>
+            <a:pPr indent="0" marL="0">
+              <a:buNone/>
+            </a:pPr>
+            <a:r>
+              <a:rPr lang="en-US" sz="1150" dirty="0">
+                <a:solidFill>
+                  <a:srgbClr val="2D3748"/>
+                </a:solidFill>
+                <a:latin typeface="Arial" pitchFamily="34" charset="0"/>
+                <a:ea typeface="Arial" pitchFamily="34" charset="-122"/>
+                <a:cs typeface="Arial" pitchFamily="34" charset="-120"/>
+              </a:rPr>
+              <a:t>Google Cloud Run + Firebase</a:t>
+            </a:r>
+            <a:endParaRPr lang="en-US" sz="1150" dirty="0"/>
+          </a:p>
+          <a:p>
+            <a:pPr indent="0" marL="0">
+              <a:buNone/>
+            </a:pPr>
+            <a:r>
+              <a:rPr lang="en-US" sz="1150" dirty="0">
+                <a:solidFill>
+                  <a:srgbClr val="2D3748"/>
+                </a:solidFill>
+                <a:latin typeface="Arial" pitchFamily="34" charset="0"/>
+                <a:ea typeface="Arial" pitchFamily="34" charset="-122"/>
+                <a:cs typeface="Arial" pitchFamily="34" charset="-120"/>
+              </a:rPr>
+              <a:t>con cifrado extremo a extremo</a:t>
+            </a:r>
+            <a:endParaRPr lang="en-US" sz="1150" dirty="0"/>
+          </a:p>
+        </p:txBody>
+      </p:sp>
+      <p:sp>
+        <p:nvSpPr>
+          <p:cNvPr id="17" name="Text 15"/>
+          <p:cNvSpPr/>
+          <p:nvPr/>
+        </p:nvSpPr>
+        <p:spPr>
+          <a:xfrm>
+            <a:off x="594360" y="3236976"/>
+            <a:ext cx="548640" cy="530352"/>
+          </a:xfrm>
+          <a:prstGeom prst="rect">
+            <a:avLst/>
+          </a:prstGeom>
+          <a:noFill/>
+          <a:ln/>
+        </p:spPr>
+        <p:txBody>
+          <a:bodyPr wrap="square" rtlCol="0" anchor="ctr"/>
+          <a:lstStyle/>
+          <a:p>
+            <a:pPr algn="ctr" indent="0" marL="0">
+              <a:buNone/>
+            </a:pPr>
+            <a:r>
+              <a:rPr lang="en-US" sz="2000" dirty="0">
+                <a:solidFill>
+                  <a:srgbClr val="000000"/>
+                </a:solidFill>
+              </a:rPr>
+              <a:t>🔒</a:t>
+            </a:r>
+            <a:endParaRPr lang="en-US" sz="2000" dirty="0"/>
+          </a:p>
+        </p:txBody>
+      </p:sp>
+      <p:sp>
+        <p:nvSpPr>
+          <p:cNvPr id="18" name="Text 16"/>
+          <p:cNvSpPr/>
+          <p:nvPr/>
+        </p:nvSpPr>
+        <p:spPr>
+          <a:xfrm>
+            <a:off x="1188720" y="3236976"/>
+            <a:ext cx="3063240" cy="530352"/>
+          </a:xfrm>
+          <a:prstGeom prst="rect">
+            <a:avLst/>
+          </a:prstGeom>
+          <a:noFill/>
+          <a:ln/>
+        </p:spPr>
+        <p:txBody>
+          <a:bodyPr wrap="square" rtlCol="0" anchor="ctr"/>
+          <a:lstStyle/>
+          <a:p>
+            <a:pPr indent="0" marL="0">
+              <a:buNone/>
+            </a:pPr>
+            <a:r>
+              <a:rPr lang="en-US" sz="1150" dirty="0">
+                <a:solidFill>
+                  <a:srgbClr val="2D3748"/>
+                </a:solidFill>
+                <a:latin typeface="Arial" pitchFamily="34" charset="0"/>
+                <a:ea typeface="Arial" pitchFamily="34" charset="-122"/>
+                <a:cs typeface="Arial" pitchFamily="34" charset="-120"/>
+              </a:rPr>
+              <a:t>Ningún dato de residente</a:t>
+            </a:r>
+            <a:endParaRPr lang="en-US" sz="1150" dirty="0"/>
+          </a:p>
+          <a:p>
+            <a:pPr indent="0" marL="0">
+              <a:buNone/>
+            </a:pPr>
+            <a:r>
+              <a:rPr lang="en-US" sz="1150" dirty="0">
+                <a:solidFill>
+                  <a:srgbClr val="2D3748"/>
+                </a:solidFill>
+                <a:latin typeface="Arial" pitchFamily="34" charset="0"/>
+                <a:ea typeface="Arial" pitchFamily="34" charset="-122"/>
+                <a:cs typeface="Arial" pitchFamily="34" charset="-120"/>
+              </a:rPr>
+              <a:t>sale del dispositivo — privacidad por diseño</a:t>
+            </a:r>
+            <a:endParaRPr lang="en-US" sz="1150" dirty="0"/>
+          </a:p>
+        </p:txBody>
+      </p:sp>
+      <p:sp>
+        <p:nvSpPr>
+          <p:cNvPr id="19" name="Text 17"/>
+          <p:cNvSpPr/>
+          <p:nvPr/>
+        </p:nvSpPr>
+        <p:spPr>
+          <a:xfrm>
+            <a:off x="594360" y="3895344"/>
+            <a:ext cx="548640" cy="530352"/>
+          </a:xfrm>
+          <a:prstGeom prst="rect">
+            <a:avLst/>
+          </a:prstGeom>
+          <a:noFill/>
+          <a:ln/>
+        </p:spPr>
+        <p:txBody>
+          <a:bodyPr wrap="square" rtlCol="0" anchor="ctr"/>
+          <a:lstStyle/>
+          <a:p>
+            <a:pPr algn="ctr" indent="0" marL="0">
+              <a:buNone/>
+            </a:pPr>
+            <a:r>
+              <a:rPr lang="en-US" sz="2000" dirty="0">
+                <a:solidFill>
+                  <a:srgbClr val="000000"/>
+                </a:solidFill>
+              </a:rPr>
+              <a:t>👮</a:t>
+            </a:r>
+            <a:endParaRPr lang="en-US" sz="2000" dirty="0"/>
+          </a:p>
+        </p:txBody>
+      </p:sp>
+      <p:sp>
+        <p:nvSpPr>
+          <p:cNvPr id="20" name="Text 18"/>
+          <p:cNvSpPr/>
+          <p:nvPr/>
+        </p:nvSpPr>
+        <p:spPr>
+          <a:xfrm>
+            <a:off x="1188720" y="3895344"/>
+            <a:ext cx="3063240" cy="530352"/>
+          </a:xfrm>
+          <a:prstGeom prst="rect">
+            <a:avLst/>
+          </a:prstGeom>
+          <a:noFill/>
+          <a:ln/>
+        </p:spPr>
+        <p:txBody>
+          <a:bodyPr wrap="square" rtlCol="0" anchor="ctr"/>
+          <a:lstStyle/>
+          <a:p>
+            <a:pPr indent="0" marL="0">
+              <a:buNone/>
+            </a:pPr>
+            <a:r>
+              <a:rPr lang="en-US" sz="1150" dirty="0">
+                <a:solidFill>
+                  <a:srgbClr val="2D3748"/>
+                </a:solidFill>
+                <a:latin typeface="Arial" pitchFamily="34" charset="0"/>
+                <a:ea typeface="Arial" pitchFamily="34" charset="-122"/>
+                <a:cs typeface="Arial" pitchFamily="34" charset="-120"/>
+              </a:rPr>
+              <a:t>Agente de ciberseguridad</a:t>
+            </a:r>
+            <a:endParaRPr lang="en-US" sz="1150" dirty="0"/>
+          </a:p>
+          <a:p>
+            <a:pPr indent="0" marL="0">
+              <a:buNone/>
+            </a:pPr>
+            <a:r>
+              <a:rPr lang="en-US" sz="1150" dirty="0">
+                <a:solidFill>
+                  <a:srgbClr val="2D3748"/>
+                </a:solidFill>
+                <a:latin typeface="Arial" pitchFamily="34" charset="0"/>
+                <a:ea typeface="Arial" pitchFamily="34" charset="-122"/>
+                <a:cs typeface="Arial" pitchFamily="34" charset="-120"/>
+              </a:rPr>
+              <a:t>activo 24 h sobre Gemini API</a:t>
+            </a:r>
+            <a:endParaRPr lang="en-US" sz="1150" dirty="0"/>
+          </a:p>
+        </p:txBody>
+      </p:sp>
+      <p:sp>
+        <p:nvSpPr>
+          <p:cNvPr id="21" name="Shape 19"/>
+          <p:cNvSpPr/>
+          <p:nvPr/>
+        </p:nvSpPr>
+        <p:spPr>
+          <a:xfrm>
+            <a:off x="4846320" y="1261872"/>
+            <a:ext cx="3977640" cy="3200400"/>
+          </a:xfrm>
+          <a:prstGeom prst="roundRect">
+            <a:avLst>
+              <a:gd name="adj" fmla="val 2286"/>
+            </a:avLst>
+          </a:prstGeom>
+          <a:solidFill>
+            <a:srgbClr val="EFF6FF"/>
+          </a:solidFill>
+          <a:ln w="6350">
+            <a:solidFill>
+              <a:srgbClr val="E2E8F0"/>
+            </a:solidFill>
+            <a:prstDash val="solid"/>
+          </a:ln>
+        </p:spPr>
+      </p:sp>
+      <p:sp>
+        <p:nvSpPr>
+          <p:cNvPr id="22" name="Text 20"/>
+          <p:cNvSpPr/>
+          <p:nvPr/>
+        </p:nvSpPr>
+        <p:spPr>
+          <a:xfrm>
+            <a:off x="4983480" y="1371600"/>
+            <a:ext cx="3703320" cy="384048"/>
+          </a:xfrm>
+          <a:prstGeom prst="rect">
+            <a:avLst/>
+          </a:prstGeom>
+          <a:noFill/>
+          <a:ln/>
+        </p:spPr>
+        <p:txBody>
+          <a:bodyPr wrap="square" rtlCol="0" anchor="ctr"/>
+          <a:lstStyle/>
+          <a:p>
+            <a:pPr indent="0" marL="0">
+              <a:buNone/>
+            </a:pPr>
+            <a:r>
+              <a:rPr lang="en-US" sz="1400" b="1" dirty="0">
+                <a:solidFill>
+                  <a:srgbClr val="3A6B96"/>
+                </a:solidFill>
+                <a:latin typeface="Arial" pitchFamily="34" charset="0"/>
+                <a:ea typeface="Arial" pitchFamily="34" charset="-122"/>
+                <a:cs typeface="Arial" pitchFamily="34" charset="-120"/>
+              </a:rPr>
+              <a:t>🤖  IA Operativa — roadmap v0.2</a:t>
+            </a:r>
+            <a:endParaRPr lang="en-US" sz="1400" dirty="0"/>
+          </a:p>
+        </p:txBody>
+      </p:sp>
+      <p:sp>
+        <p:nvSpPr>
+          <p:cNvPr id="23" name="Shape 21"/>
+          <p:cNvSpPr/>
+          <p:nvPr/>
+        </p:nvSpPr>
+        <p:spPr>
+          <a:xfrm>
+            <a:off x="4983480" y="1783080"/>
+            <a:ext cx="3703320" cy="0"/>
+          </a:xfrm>
+          <a:prstGeom prst="line">
+            <a:avLst/>
+          </a:prstGeom>
+          <a:noFill/>
+          <a:ln w="7620">
+            <a:solidFill>
+              <a:srgbClr val="E2E8F0"/>
+            </a:solidFill>
+            <a:prstDash val="solid"/>
+          </a:ln>
+        </p:spPr>
+      </p:sp>
+      <p:sp>
+        <p:nvSpPr>
+          <p:cNvPr id="24" name="Text 22"/>
+          <p:cNvSpPr/>
+          <p:nvPr/>
+        </p:nvSpPr>
+        <p:spPr>
+          <a:xfrm>
+            <a:off x="4983480" y="1920240"/>
+            <a:ext cx="548640" cy="530352"/>
+          </a:xfrm>
+          <a:prstGeom prst="rect">
+            <a:avLst/>
+          </a:prstGeom>
+          <a:noFill/>
+          <a:ln/>
+        </p:spPr>
+        <p:txBody>
+          <a:bodyPr wrap="square" rtlCol="0" anchor="ctr"/>
+          <a:lstStyle/>
+          <a:p>
+            <a:pPr algn="ctr" indent="0" marL="0">
+              <a:buNone/>
+            </a:pPr>
+            <a:r>
+              <a:rPr lang="en-US" sz="2000" dirty="0">
+                <a:solidFill>
+                  <a:srgbClr val="000000"/>
+                </a:solidFill>
+              </a:rPr>
+              <a:t>📈</a:t>
+            </a:r>
+            <a:endParaRPr lang="en-US" sz="2000" dirty="0"/>
+          </a:p>
+        </p:txBody>
+      </p:sp>
+      <p:sp>
+        <p:nvSpPr>
+          <p:cNvPr id="25" name="Text 23"/>
+          <p:cNvSpPr/>
+          <p:nvPr/>
+        </p:nvSpPr>
+        <p:spPr>
+          <a:xfrm>
+            <a:off x="5577840" y="1920240"/>
+            <a:ext cx="3108960" cy="530352"/>
+          </a:xfrm>
+          <a:prstGeom prst="rect">
+            <a:avLst/>
+          </a:prstGeom>
+          <a:noFill/>
+          <a:ln/>
+        </p:spPr>
+        <p:txBody>
+          <a:bodyPr wrap="square" rtlCol="0" anchor="ctr"/>
+          <a:lstStyle/>
+          <a:p>
+            <a:pPr indent="0" marL="0">
+              <a:buNone/>
+            </a:pPr>
+            <a:r>
+              <a:rPr lang="en-US" sz="1150" dirty="0">
+                <a:solidFill>
+                  <a:srgbClr val="2D3748"/>
+                </a:solidFill>
+                <a:latin typeface="Arial" pitchFamily="34" charset="0"/>
+                <a:ea typeface="Arial" pitchFamily="34" charset="-122"/>
+                <a:cs typeface="Arial" pitchFamily="34" charset="-120"/>
+              </a:rPr>
+              <a:t>Alertas predictivas</a:t>
+            </a:r>
+            <a:endParaRPr lang="en-US" sz="1150" dirty="0"/>
+          </a:p>
+          <a:p>
+            <a:pPr indent="0" marL="0">
+              <a:buNone/>
+            </a:pPr>
+            <a:r>
+              <a:rPr lang="en-US" sz="1150" dirty="0">
+                <a:solidFill>
+                  <a:srgbClr val="2D3748"/>
+                </a:solidFill>
+                <a:latin typeface="Arial" pitchFamily="34" charset="0"/>
+                <a:ea typeface="Arial" pitchFamily="34" charset="-122"/>
+                <a:cs typeface="Arial" pitchFamily="34" charset="-120"/>
+              </a:rPr>
+              <a:t>sobre histórico de tiempos de ronda</a:t>
+            </a:r>
+            <a:endParaRPr lang="en-US" sz="1150" dirty="0"/>
+          </a:p>
+        </p:txBody>
+      </p:sp>
+      <p:sp>
+        <p:nvSpPr>
+          <p:cNvPr id="26" name="Text 24"/>
+          <p:cNvSpPr/>
+          <p:nvPr/>
+        </p:nvSpPr>
+        <p:spPr>
+          <a:xfrm>
+            <a:off x="4983480" y="2578608"/>
+            <a:ext cx="548640" cy="530352"/>
+          </a:xfrm>
+          <a:prstGeom prst="rect">
+            <a:avLst/>
+          </a:prstGeom>
+          <a:noFill/>
+          <a:ln/>
+        </p:spPr>
+        <p:txBody>
+          <a:bodyPr wrap="square" rtlCol="0" anchor="ctr"/>
+          <a:lstStyle/>
+          <a:p>
+            <a:pPr algn="ctr" indent="0" marL="0">
+              <a:buNone/>
+            </a:pPr>
+            <a:r>
+              <a:rPr lang="en-US" sz="2000" dirty="0">
+                <a:solidFill>
+                  <a:srgbClr val="000000"/>
+                </a:solidFill>
+              </a:rPr>
+              <a:t>🔍</a:t>
+            </a:r>
+            <a:endParaRPr lang="en-US" sz="2000" dirty="0"/>
+          </a:p>
+        </p:txBody>
+      </p:sp>
+      <p:sp>
+        <p:nvSpPr>
+          <p:cNvPr id="27" name="Text 25"/>
+          <p:cNvSpPr/>
+          <p:nvPr/>
+        </p:nvSpPr>
+        <p:spPr>
+          <a:xfrm>
+            <a:off x="5577840" y="2578608"/>
+            <a:ext cx="3108960" cy="530352"/>
+          </a:xfrm>
+          <a:prstGeom prst="rect">
+            <a:avLst/>
+          </a:prstGeom>
+          <a:noFill/>
+          <a:ln/>
+        </p:spPr>
+        <p:txBody>
+          <a:bodyPr wrap="square" rtlCol="0" anchor="ctr"/>
+          <a:lstStyle/>
+          <a:p>
+            <a:pPr indent="0" marL="0">
+              <a:buNone/>
+            </a:pPr>
+            <a:r>
+              <a:rPr lang="en-US" sz="1150" dirty="0">
+                <a:solidFill>
+                  <a:srgbClr val="2D3748"/>
+                </a:solidFill>
+                <a:latin typeface="Arial" pitchFamily="34" charset="0"/>
+                <a:ea typeface="Arial" pitchFamily="34" charset="-122"/>
+                <a:cs typeface="Arial" pitchFamily="34" charset="-120"/>
+              </a:rPr>
+              <a:t>Detección de anomalías</a:t>
+            </a:r>
+            <a:endParaRPr lang="en-US" sz="1150" dirty="0"/>
+          </a:p>
+          <a:p>
+            <a:pPr indent="0" marL="0">
+              <a:buNone/>
+            </a:pPr>
+            <a:r>
+              <a:rPr lang="en-US" sz="1150" dirty="0">
+                <a:solidFill>
+                  <a:srgbClr val="2D3748"/>
+                </a:solidFill>
+                <a:latin typeface="Arial" pitchFamily="34" charset="0"/>
+                <a:ea typeface="Arial" pitchFamily="34" charset="-122"/>
+                <a:cs typeface="Arial" pitchFamily="34" charset="-120"/>
+              </a:rPr>
+              <a:t>en la bitácora de auditoría</a:t>
+            </a:r>
+            <a:endParaRPr lang="en-US" sz="1150" dirty="0"/>
+          </a:p>
+        </p:txBody>
+      </p:sp>
+      <p:sp>
+        <p:nvSpPr>
+          <p:cNvPr id="28" name="Text 26"/>
+          <p:cNvSpPr/>
+          <p:nvPr/>
+        </p:nvSpPr>
+        <p:spPr>
+          <a:xfrm>
+            <a:off x="4983480" y="3236976"/>
+            <a:ext cx="548640" cy="530352"/>
+          </a:xfrm>
+          <a:prstGeom prst="rect">
+            <a:avLst/>
+          </a:prstGeom>
+          <a:noFill/>
+          <a:ln/>
+        </p:spPr>
+        <p:txBody>
+          <a:bodyPr wrap="square" rtlCol="0" anchor="ctr"/>
+          <a:lstStyle/>
+          <a:p>
+            <a:pPr algn="ctr" indent="0" marL="0">
+              <a:buNone/>
+            </a:pPr>
+            <a:r>
+              <a:rPr lang="en-US" sz="2000" dirty="0">
+                <a:solidFill>
+                  <a:srgbClr val="000000"/>
+                </a:solidFill>
+              </a:rPr>
+              <a:t>📅</a:t>
+            </a:r>
+            <a:endParaRPr lang="en-US" sz="2000" dirty="0"/>
+          </a:p>
+        </p:txBody>
+      </p:sp>
+      <p:sp>
+        <p:nvSpPr>
+          <p:cNvPr id="29" name="Text 27"/>
+          <p:cNvSpPr/>
+          <p:nvPr/>
+        </p:nvSpPr>
+        <p:spPr>
+          <a:xfrm>
+            <a:off x="5577840" y="3236976"/>
+            <a:ext cx="3108960" cy="530352"/>
+          </a:xfrm>
+          <a:prstGeom prst="rect">
+            <a:avLst/>
+          </a:prstGeom>
+          <a:noFill/>
+          <a:ln/>
+        </p:spPr>
+        <p:txBody>
+          <a:bodyPr wrap="square" rtlCol="0" anchor="ctr"/>
+          <a:lstStyle/>
+          <a:p>
+            <a:pPr indent="0" marL="0">
+              <a:buNone/>
+            </a:pPr>
+            <a:r>
+              <a:rPr lang="en-US" sz="1150" dirty="0">
+                <a:solidFill>
+                  <a:srgbClr val="2D3748"/>
+                </a:solidFill>
+                <a:latin typeface="Arial" pitchFamily="34" charset="0"/>
+                <a:ea typeface="Arial" pitchFamily="34" charset="-122"/>
+                <a:cs typeface="Arial" pitchFamily="34" charset="-120"/>
+              </a:rPr>
+              <a:t>Optimización de asignación</a:t>
+            </a:r>
+            <a:endParaRPr lang="en-US" sz="1150" dirty="0"/>
+          </a:p>
+          <a:p>
+            <a:pPr indent="0" marL="0">
+              <a:buNone/>
+            </a:pPr>
+            <a:r>
+              <a:rPr lang="en-US" sz="1150" dirty="0">
+                <a:solidFill>
+                  <a:srgbClr val="2D3748"/>
+                </a:solidFill>
+                <a:latin typeface="Arial" pitchFamily="34" charset="0"/>
+                <a:ea typeface="Arial" pitchFamily="34" charset="-122"/>
+                <a:cs typeface="Arial" pitchFamily="34" charset="-120"/>
+              </a:rPr>
+              <a:t>de cuidadores por turno</a:t>
+            </a:r>
+            <a:endParaRPr lang="en-US" sz="1150" dirty="0"/>
+          </a:p>
+        </p:txBody>
+      </p:sp>
+      <p:sp>
+        <p:nvSpPr>
+          <p:cNvPr id="30" name="Text 28"/>
+          <p:cNvSpPr/>
+          <p:nvPr/>
+        </p:nvSpPr>
+        <p:spPr>
+          <a:xfrm>
+            <a:off x="4983480" y="3895344"/>
+            <a:ext cx="548640" cy="530352"/>
+          </a:xfrm>
+          <a:prstGeom prst="rect">
+            <a:avLst/>
+          </a:prstGeom>
+          <a:noFill/>
+          <a:ln/>
+        </p:spPr>
+        <p:txBody>
+          <a:bodyPr wrap="square" rtlCol="0" anchor="ctr"/>
+          <a:lstStyle/>
+          <a:p>
+            <a:pPr algn="ctr" indent="0" marL="0">
+              <a:buNone/>
+            </a:pPr>
+            <a:r>
+              <a:rPr lang="en-US" sz="2000" dirty="0">
+                <a:solidFill>
+                  <a:srgbClr val="000000"/>
+                </a:solidFill>
+              </a:rPr>
+              <a:t>📝</a:t>
+            </a:r>
+            <a:endParaRPr lang="en-US" sz="2000" dirty="0"/>
+          </a:p>
+        </p:txBody>
+      </p:sp>
+      <p:sp>
+        <p:nvSpPr>
+          <p:cNvPr id="31" name="Text 29"/>
+          <p:cNvSpPr/>
+          <p:nvPr/>
+        </p:nvSpPr>
+        <p:spPr>
+          <a:xfrm>
+            <a:off x="5577840" y="3895344"/>
+            <a:ext cx="3108960" cy="530352"/>
+          </a:xfrm>
+          <a:prstGeom prst="rect">
+            <a:avLst/>
+          </a:prstGeom>
+          <a:noFill/>
+          <a:ln/>
+        </p:spPr>
+        <p:txBody>
+          <a:bodyPr wrap="square" rtlCol="0" anchor="ctr"/>
+          <a:lstStyle/>
+          <a:p>
+            <a:pPr indent="0" marL="0">
+              <a:buNone/>
+            </a:pPr>
+            <a:r>
+              <a:rPr lang="en-US" sz="1150" dirty="0">
+                <a:solidFill>
+                  <a:srgbClr val="2D3748"/>
+                </a:solidFill>
+                <a:latin typeface="Arial" pitchFamily="34" charset="0"/>
+                <a:ea typeface="Arial" pitchFamily="34" charset="-122"/>
+                <a:cs typeface="Arial" pitchFamily="34" charset="-120"/>
+              </a:rPr>
+              <a:t>Resumen ejecutivo automático</a:t>
+            </a:r>
+            <a:endParaRPr lang="en-US" sz="1150" dirty="0"/>
+          </a:p>
+          <a:p>
+            <a:pPr indent="0" marL="0">
+              <a:buNone/>
+            </a:pPr>
+            <a:r>
+              <a:rPr lang="en-US" sz="1150" dirty="0">
+                <a:solidFill>
+                  <a:srgbClr val="2D3748"/>
+                </a:solidFill>
+                <a:latin typeface="Arial" pitchFamily="34" charset="0"/>
+                <a:ea typeface="Arial" pitchFamily="34" charset="-122"/>
+                <a:cs typeface="Arial" pitchFamily="34" charset="-120"/>
+              </a:rPr>
+              <a:t>del turno — sin transcripción manual</a:t>
+            </a:r>
+            <a:endParaRPr lang="en-US" sz="1150" dirty="0"/>
+          </a:p>
+        </p:txBody>
+      </p:sp>
+      <p:sp>
+        <p:nvSpPr>
+          <p:cNvPr id="32" name="Shape 30"/>
+          <p:cNvSpPr/>
+          <p:nvPr/>
+        </p:nvSpPr>
+        <p:spPr>
+          <a:xfrm>
+            <a:off x="4434840" y="1417320"/>
+            <a:ext cx="0" cy="2926080"/>
+          </a:xfrm>
+          <a:prstGeom prst="line">
+            <a:avLst/>
+          </a:prstGeom>
+          <a:noFill/>
+          <a:ln w="12700">
+            <a:solidFill>
+              <a:srgbClr val="E2E8F0"/>
+            </a:solidFill>
+            <a:prstDash val="solid"/>
+          </a:ln>
+        </p:spPr>
+      </p:sp>
+      <p:sp>
+        <p:nvSpPr>
+          <p:cNvPr id="33" name="Text 31"/>
+          <p:cNvSpPr/>
+          <p:nvPr/>
+        </p:nvSpPr>
+        <p:spPr>
+          <a:xfrm>
+            <a:off x="4315968" y="2606040"/>
+            <a:ext cx="411480" cy="365760"/>
+          </a:xfrm>
+          <a:prstGeom prst="rect">
+            <a:avLst/>
+          </a:prstGeom>
+          <a:noFill/>
+          <a:ln/>
+        </p:spPr>
+        <p:txBody>
+          <a:bodyPr wrap="square" rtlCol="0" anchor="ctr"/>
+          <a:lstStyle/>
+          <a:p>
+            <a:pPr algn="ctr" indent="0" marL="0">
+              <a:buNone/>
+            </a:pPr>
+            <a:r>
+              <a:rPr lang="en-US" sz="1800" dirty="0">
+                <a:solidFill>
+                  <a:srgbClr val="5B8DB8"/>
+                </a:solidFill>
+                <a:latin typeface="Arial" pitchFamily="34" charset="0"/>
+                <a:ea typeface="Arial" pitchFamily="34" charset="-122"/>
+                <a:cs typeface="Arial" pitchFamily="34" charset="-120"/>
+              </a:rPr>
+              <a:t>→</a:t>
+            </a:r>
+            <a:endParaRPr lang="en-US" sz="1800" dirty="0"/>
+          </a:p>
+        </p:txBody>
+      </p:sp>
+      <p:sp>
+        <p:nvSpPr>
+          <p:cNvPr id="34" name="Shape 32"/>
+          <p:cNvSpPr/>
+          <p:nvPr/>
+        </p:nvSpPr>
+        <p:spPr>
+          <a:xfrm>
+            <a:off x="457200" y="4663440"/>
+            <a:ext cx="8375904" cy="749808"/>
+          </a:xfrm>
+          <a:prstGeom prst="roundRect">
+            <a:avLst>
+              <a:gd name="adj" fmla="val 9756"/>
+            </a:avLst>
+          </a:prstGeom>
+          <a:solidFill>
+            <a:srgbClr val="F0EDE8"/>
+          </a:solidFill>
+          <a:ln w="6350">
+            <a:solidFill>
+              <a:srgbClr val="E2E8F0"/>
+            </a:solidFill>
+            <a:prstDash val="solid"/>
+          </a:ln>
+        </p:spPr>
+      </p:sp>
+      <p:sp>
+        <p:nvSpPr>
+          <p:cNvPr id="35" name="Text 33"/>
+          <p:cNvSpPr/>
+          <p:nvPr/>
+        </p:nvSpPr>
+        <p:spPr>
+          <a:xfrm>
+            <a:off x="566928" y="4773168"/>
+            <a:ext cx="640080" cy="548640"/>
+          </a:xfrm>
+          <a:prstGeom prst="rect">
+            <a:avLst/>
+          </a:prstGeom>
+          <a:noFill/>
+          <a:ln/>
+        </p:spPr>
+        <p:txBody>
+          <a:bodyPr wrap="square" rtlCol="0" anchor="ctr"/>
+          <a:lstStyle/>
+          <a:p>
+            <a:pPr algn="ctr" indent="0" marL="0">
+              <a:buNone/>
+            </a:pPr>
+            <a:r>
+              <a:rPr lang="en-US" sz="2400" dirty="0">
+                <a:solidFill>
+                  <a:srgbClr val="000000"/>
+                </a:solidFill>
+              </a:rPr>
+              <a:t>📊</a:t>
+            </a:r>
+            <a:endParaRPr lang="en-US" sz="2400" dirty="0"/>
+          </a:p>
+        </p:txBody>
+      </p:sp>
+      <p:sp>
+        <p:nvSpPr>
+          <p:cNvPr id="36" name="Text 34"/>
+          <p:cNvSpPr/>
+          <p:nvPr/>
+        </p:nvSpPr>
+        <p:spPr>
+          <a:xfrm>
+            <a:off x="1280160" y="4736592"/>
+            <a:ext cx="7406640" cy="603504"/>
+          </a:xfrm>
+          <a:prstGeom prst="rect">
+            <a:avLst/>
+          </a:prstGeom>
+          <a:noFill/>
+          <a:ln/>
+        </p:spPr>
+        <p:txBody>
+          <a:bodyPr wrap="square" rtlCol="0" anchor="ctr"/>
+          <a:lstStyle/>
+          <a:p>
+            <a:pPr indent="0" marL="0">
+              <a:buNone/>
+            </a:pPr>
+            <a:r>
+              <a:rPr lang="en-US" sz="1200" dirty="0">
+                <a:solidFill>
+                  <a:srgbClr val="2D3748"/>
+                </a:solidFill>
+                <a:latin typeface="Arial" pitchFamily="34" charset="0"/>
+                <a:ea typeface="Arial" pitchFamily="34" charset="-122"/>
+                <a:cs typeface="Arial" pitchFamily="34" charset="-120"/>
+              </a:rPr>
+              <a:t>La bitácora de 20 tipos de evento por turno es el insumo nativo para toda la IA operativa —</a:t>
+            </a:r>
+            <a:endParaRPr lang="en-US" sz="1200" dirty="0"/>
+          </a:p>
+          <a:p>
+            <a:pPr indent="0" marL="0">
+              <a:buNone/>
+            </a:pPr>
+            <a:r>
+              <a:rPr lang="en-US" sz="1200" dirty="0">
+                <a:solidFill>
+                  <a:srgbClr val="2D3748"/>
+                </a:solidFill>
+                <a:latin typeface="Arial" pitchFamily="34" charset="0"/>
+                <a:ea typeface="Arial" pitchFamily="34" charset="-122"/>
+                <a:cs typeface="Arial" pitchFamily="34" charset="-120"/>
+              </a:rPr>
+              <a:t>sin integración externa, sin datos sintéticos.</a:t>
+            </a:r>
+            <a:endParaRPr lang="en-US" sz="1200" dirty="0"/>
+          </a:p>
+        </p:txBody>
+      </p:sp>
+      <p:sp>
+        <p:nvSpPr>
+          <p:cNvPr id="37" name="Text 35"/>
+          <p:cNvSpPr/>
+          <p:nvPr/>
+        </p:nvSpPr>
+        <p:spPr>
+          <a:xfrm>
+            <a:off x="457200" y="6291072"/>
+            <a:ext cx="8375904" cy="201168"/>
+          </a:xfrm>
+          <a:prstGeom prst="rect">
+            <a:avLst/>
+          </a:prstGeom>
+          <a:noFill/>
+          <a:ln/>
+        </p:spPr>
+        <p:txBody>
+          <a:bodyPr wrap="square" rtlCol="0" anchor="ctr"/>
+          <a:lstStyle/>
+          <a:p>
+            <a:pPr algn="l" indent="0" marL="0">
+              <a:buNone/>
+            </a:pPr>
+            <a:r>
+              <a:rPr lang="en-US" dirty="0">
+                <a:solidFill>
+                  <a:srgbClr val="718096"/>
+                </a:solidFill>
+                <a:latin typeface="Arial" pitchFamily="34" charset="0"/>
+                <a:ea typeface="Arial" pitchFamily="34" charset="-122"/>
+                <a:cs typeface="Arial" pitchFamily="34" charset="-120"/>
+              </a:rPr>
+              <a:t>Criterios 1 y 11 del concurso: IA aplicada · ciberseguridad activa</a:t>
+            </a:r>
+            <a:endParaRPr lang="en-US" dirty="0"/>
+          </a:p>
+        </p:txBody>
+      </p:sp>
+    </p:spTree>
+  </p:cSld>
+  <p:clrMapOvr>
+    <a:masterClrMapping/>
+  </p:clrMapOvr>
+</p:sld>
+</file>
+
 <file path=ppt/slides/slide2.xml><?xml version="1.0" encoding="utf-8"?>
 <p:sld xmlns:a="http://schemas.openxmlformats.org/drawingml/2006/main" xmlns:r="http://schemas.openxmlformats.org/officeDocument/2006/relationships" xmlns:p="http://schemas.openxmlformats.org/presentationml/2006/main">
   <p:cSld name="Slide 2">

--- a/business/CareSignal_Pitch_Deck.pptx
+++ b/business/CareSignal_Pitch_Deck.pptx
@@ -17,9 +17,11 @@
     <p:sldId id="265" r:id="rId11"/>
     <p:sldId id="266" r:id="rId12"/>
     <p:sldId id="267" r:id="rId13"/>
+    <p:sldId id="268" r:id="rId14"/>
+    <p:sldId id="269" r:id="rId15"/>
   </p:sldIdLst>
   <p:notesMasterIdLst>
-    <p:notesMasterId r:id="rId14"/>
+    <p:notesMasterId r:id="rId16"/>
   </p:notesMasterIdLst>
   <p:sldSz cx="12192000" cy="6858000"/>
   <p:notesSz cx="6858000" cy="12192000"/>
@@ -801,6 +803,182 @@
             <a:fld id="{F7021451-1387-4CA6-816F-3879F97B5CBC}" type="slidenum">
               <a:rPr lang="en-US"/>
               <a:t>12</a:t>
+            </a:fld>
+            <a:endParaRPr lang="en-US"/>
+          </a:p>
+        </p:txBody>
+      </p:sp>
+    </p:spTree>
+    <p:extLst>
+      <p:ext uri="{BB962C8B-B14F-4D97-AF65-F5344CB8AC3E}">
+        <p14:creationId xmlns:p14="http://schemas.microsoft.com/office/powerpoint/2010/main" val="1024086991"/>
+      </p:ext>
+    </p:extLst>
+  </p:cSld>
+  <p:clrMapOvr>
+    <a:masterClrMapping/>
+  </p:clrMapOvr>
+</p:notes>
+</file>
+
+<file path=ppt/notesSlides/notesSlide13.xml><?xml version="1.0" encoding="utf-8"?>
+<p:notes xmlns:a="http://schemas.openxmlformats.org/drawingml/2006/main" xmlns:r="http://schemas.openxmlformats.org/officeDocument/2006/relationships" xmlns:p="http://schemas.openxmlformats.org/presentationml/2006/main">
+  <p:cSld>
+    <p:spTree>
+      <p:nvGrpSpPr>
+        <p:cNvPr id="1" name=""/>
+        <p:cNvGrpSpPr/>
+        <p:nvPr/>
+      </p:nvGrpSpPr>
+      <p:grpSpPr>
+        <a:xfrm>
+          <a:off x="0" y="0"/>
+          <a:ext cx="0" cy="0"/>
+          <a:chOff x="0" y="0"/>
+          <a:chExt cx="0" cy="0"/>
+        </a:xfrm>
+      </p:grpSpPr>
+      <p:sp>
+        <p:nvSpPr>
+          <p:cNvPr id="2" name="Slide Image Placeholder 1"/>
+          <p:cNvSpPr>
+            <a:spLocks noGrp="1" noRot="1" noChangeAspect="1"/>
+          </p:cNvSpPr>
+          <p:nvPr>
+            <p:ph type="sldImg"/>
+          </p:nvPr>
+        </p:nvSpPr>
+        <p:spPr/>
+      </p:sp>
+      <p:sp>
+        <p:nvSpPr>
+          <p:cNvPr id="3" name="Notes Placeholder 2"/>
+          <p:cNvSpPr>
+            <a:spLocks noGrp="1"/>
+          </p:cNvSpPr>
+          <p:nvPr>
+            <p:ph type="body" idx="1"/>
+          </p:nvPr>
+        </p:nvSpPr>
+        <p:spPr/>
+        <p:txBody>
+          <a:bodyPr/>
+          <a:lstStyle/>
+          <a:p>
+            <a:r>
+              <a:rPr lang="en-US" dirty="0"/>
+              <a:t/>
+            </a:r>
+            <a:endParaRPr lang="en-US" dirty="0"/>
+          </a:p>
+        </p:txBody>
+      </p:sp>
+      <p:sp>
+        <p:nvSpPr>
+          <p:cNvPr id="4" name="Slide Number Placeholder 3"/>
+          <p:cNvSpPr>
+            <a:spLocks noGrp="1"/>
+          </p:cNvSpPr>
+          <p:nvPr>
+            <p:ph type="sldNum" sz="quarter" idx="10"/>
+          </p:nvPr>
+        </p:nvSpPr>
+        <p:spPr/>
+        <p:txBody>
+          <a:bodyPr/>
+          <a:lstStyle/>
+          <a:p>
+            <a:fld id="{F7021451-1387-4CA6-816F-3879F97B5CBC}" type="slidenum">
+              <a:rPr lang="en-US"/>
+              <a:t>13</a:t>
+            </a:fld>
+            <a:endParaRPr lang="en-US"/>
+          </a:p>
+        </p:txBody>
+      </p:sp>
+    </p:spTree>
+    <p:extLst>
+      <p:ext uri="{BB962C8B-B14F-4D97-AF65-F5344CB8AC3E}">
+        <p14:creationId xmlns:p14="http://schemas.microsoft.com/office/powerpoint/2010/main" val="1024086991"/>
+      </p:ext>
+    </p:extLst>
+  </p:cSld>
+  <p:clrMapOvr>
+    <a:masterClrMapping/>
+  </p:clrMapOvr>
+</p:notes>
+</file>
+
+<file path=ppt/notesSlides/notesSlide14.xml><?xml version="1.0" encoding="utf-8"?>
+<p:notes xmlns:a="http://schemas.openxmlformats.org/drawingml/2006/main" xmlns:r="http://schemas.openxmlformats.org/officeDocument/2006/relationships" xmlns:p="http://schemas.openxmlformats.org/presentationml/2006/main">
+  <p:cSld>
+    <p:spTree>
+      <p:nvGrpSpPr>
+        <p:cNvPr id="1" name=""/>
+        <p:cNvGrpSpPr/>
+        <p:nvPr/>
+      </p:nvGrpSpPr>
+      <p:grpSpPr>
+        <a:xfrm>
+          <a:off x="0" y="0"/>
+          <a:ext cx="0" cy="0"/>
+          <a:chOff x="0" y="0"/>
+          <a:chExt cx="0" cy="0"/>
+        </a:xfrm>
+      </p:grpSpPr>
+      <p:sp>
+        <p:nvSpPr>
+          <p:cNvPr id="2" name="Slide Image Placeholder 1"/>
+          <p:cNvSpPr>
+            <a:spLocks noGrp="1" noRot="1" noChangeAspect="1"/>
+          </p:cNvSpPr>
+          <p:nvPr>
+            <p:ph type="sldImg"/>
+          </p:nvPr>
+        </p:nvSpPr>
+        <p:spPr/>
+      </p:sp>
+      <p:sp>
+        <p:nvSpPr>
+          <p:cNvPr id="3" name="Notes Placeholder 2"/>
+          <p:cNvSpPr>
+            <a:spLocks noGrp="1"/>
+          </p:cNvSpPr>
+          <p:nvPr>
+            <p:ph type="body" idx="1"/>
+          </p:nvPr>
+        </p:nvSpPr>
+        <p:spPr/>
+        <p:txBody>
+          <a:bodyPr/>
+          <a:lstStyle/>
+          <a:p>
+            <a:r>
+              <a:rPr lang="en-US" dirty="0"/>
+              <a:t/>
+            </a:r>
+            <a:endParaRPr lang="en-US" dirty="0"/>
+          </a:p>
+        </p:txBody>
+      </p:sp>
+      <p:sp>
+        <p:nvSpPr>
+          <p:cNvPr id="4" name="Slide Number Placeholder 3"/>
+          <p:cNvSpPr>
+            <a:spLocks noGrp="1"/>
+          </p:cNvSpPr>
+          <p:nvPr>
+            <p:ph type="sldNum" sz="quarter" idx="10"/>
+          </p:nvPr>
+        </p:nvSpPr>
+        <p:spPr/>
+        <p:txBody>
+          <a:bodyPr/>
+          <a:lstStyle/>
+          <a:p>
+            <a:fld id="{F7021451-1387-4CA6-816F-3879F97B5CBC}" type="slidenum">
+              <a:rPr lang="en-US"/>
+              <a:t>14</a:t>
             </a:fld>
             <a:endParaRPr lang="en-US"/>
           </a:p>
@@ -6951,6 +7129,1736 @@
 </p:sld>
 </file>
 
+<file path=ppt/slides/slide13.xml><?xml version="1.0" encoding="utf-8"?>
+<p:sld xmlns:a="http://schemas.openxmlformats.org/drawingml/2006/main" xmlns:r="http://schemas.openxmlformats.org/officeDocument/2006/relationships" xmlns:p="http://schemas.openxmlformats.org/presentationml/2006/main">
+  <p:cSld name="Slide 13">
+    <p:spTree>
+      <p:nvGrpSpPr>
+        <p:cNvPr id="1" name=""/>
+        <p:cNvGrpSpPr/>
+        <p:nvPr/>
+      </p:nvGrpSpPr>
+      <p:grpSpPr>
+        <a:xfrm>
+          <a:off x="0" y="0"/>
+          <a:ext cx="0" cy="0"/>
+          <a:chOff x="0" y="0"/>
+          <a:chExt cx="0" cy="0"/>
+        </a:xfrm>
+      </p:grpSpPr>
+      <p:sp>
+        <p:nvSpPr>
+          <p:cNvPr id="2" name="Shape 0"/>
+          <p:cNvSpPr/>
+          <p:nvPr/>
+        </p:nvSpPr>
+        <p:spPr>
+          <a:xfrm>
+            <a:off x="0" y="0"/>
+            <a:ext cx="12192000" cy="6858000"/>
+          </a:xfrm>
+          <a:prstGeom prst="rect">
+            <a:avLst/>
+          </a:prstGeom>
+          <a:solidFill>
+            <a:srgbClr val="FAFAF8"/>
+          </a:solidFill>
+          <a:ln w="12700">
+            <a:solidFill>
+              <a:srgbClr val="FAFAF8"/>
+            </a:solidFill>
+            <a:prstDash val="solid"/>
+          </a:ln>
+        </p:spPr>
+      </p:sp>
+      <p:sp>
+        <p:nvSpPr>
+          <p:cNvPr id="3" name="Shape 1"/>
+          <p:cNvSpPr/>
+          <p:nvPr/>
+        </p:nvSpPr>
+        <p:spPr>
+          <a:xfrm>
+            <a:off x="6583680" y="4389120"/>
+            <a:ext cx="3840480" cy="3840480"/>
+          </a:xfrm>
+          <a:prstGeom prst="ellipse">
+            <a:avLst/>
+          </a:prstGeom>
+          <a:solidFill>
+            <a:srgbClr val="A8C4DC">
+              <a:alpha val="18000"/>
+            </a:srgbClr>
+          </a:solidFill>
+          <a:ln w="12700">
+            <a:solidFill>
+              <a:srgbClr val="A8C4DC">
+                <a:alpha val="18000"/>
+              </a:srgbClr>
+            </a:solidFill>
+            <a:prstDash val="solid"/>
+          </a:ln>
+        </p:spPr>
+      </p:sp>
+      <p:sp>
+        <p:nvSpPr>
+          <p:cNvPr id="4" name="Shape 2"/>
+          <p:cNvSpPr/>
+          <p:nvPr/>
+        </p:nvSpPr>
+        <p:spPr>
+          <a:xfrm>
+            <a:off x="-1005840" y="-1097280"/>
+            <a:ext cx="2926080" cy="2926080"/>
+          </a:xfrm>
+          <a:prstGeom prst="ellipse">
+            <a:avLst/>
+          </a:prstGeom>
+          <a:solidFill>
+            <a:srgbClr val="C4786A">
+              <a:alpha val="12000"/>
+            </a:srgbClr>
+          </a:solidFill>
+          <a:ln w="12700">
+            <a:solidFill>
+              <a:srgbClr val="C4786A">
+                <a:alpha val="12000"/>
+              </a:srgbClr>
+            </a:solidFill>
+            <a:prstDash val="solid"/>
+          </a:ln>
+        </p:spPr>
+      </p:sp>
+      <p:sp>
+        <p:nvSpPr>
+          <p:cNvPr id="5" name="Shape 3"/>
+          <p:cNvSpPr/>
+          <p:nvPr/>
+        </p:nvSpPr>
+        <p:spPr>
+          <a:xfrm>
+            <a:off x="8778240" y="1645920"/>
+            <a:ext cx="54864" cy="2194560"/>
+          </a:xfrm>
+          <a:prstGeom prst="rect">
+            <a:avLst/>
+          </a:prstGeom>
+          <a:solidFill>
+            <a:srgbClr val="5B8DB8">
+              <a:alpha val="45000"/>
+            </a:srgbClr>
+          </a:solidFill>
+          <a:ln w="12700">
+            <a:solidFill>
+              <a:srgbClr val="5B8DB8">
+                <a:alpha val="45000"/>
+              </a:srgbClr>
+            </a:solidFill>
+            <a:prstDash val="solid"/>
+          </a:ln>
+        </p:spPr>
+      </p:sp>
+      <p:sp>
+        <p:nvSpPr>
+          <p:cNvPr id="6" name="Shape 4"/>
+          <p:cNvSpPr/>
+          <p:nvPr/>
+        </p:nvSpPr>
+        <p:spPr>
+          <a:xfrm>
+            <a:off x="0" y="0"/>
+            <a:ext cx="12192000" cy="54864"/>
+          </a:xfrm>
+          <a:prstGeom prst="rect">
+            <a:avLst/>
+          </a:prstGeom>
+          <a:solidFill>
+            <a:srgbClr val="5B8DB8"/>
+          </a:solidFill>
+          <a:ln w="12700">
+            <a:solidFill>
+              <a:srgbClr val="5B8DB8"/>
+            </a:solidFill>
+            <a:prstDash val="solid"/>
+          </a:ln>
+        </p:spPr>
+      </p:sp>
+      <p:sp>
+        <p:nvSpPr>
+          <p:cNvPr id="7" name="Shape 5"/>
+          <p:cNvSpPr/>
+          <p:nvPr/>
+        </p:nvSpPr>
+        <p:spPr>
+          <a:xfrm>
+            <a:off x="0" y="6528816"/>
+            <a:ext cx="12192000" cy="54864"/>
+          </a:xfrm>
+          <a:prstGeom prst="rect">
+            <a:avLst/>
+          </a:prstGeom>
+          <a:solidFill>
+            <a:srgbClr val="C4786A"/>
+          </a:solidFill>
+          <a:ln w="12700">
+            <a:solidFill>
+              <a:srgbClr val="C4786A"/>
+            </a:solidFill>
+            <a:prstDash val="solid"/>
+          </a:ln>
+        </p:spPr>
+      </p:sp>
+      <p:sp>
+        <p:nvSpPr>
+          <p:cNvPr id="8" name="Text 6"/>
+          <p:cNvSpPr/>
+          <p:nvPr/>
+        </p:nvSpPr>
+        <p:spPr>
+          <a:xfrm>
+            <a:off x="457200" y="228600"/>
+            <a:ext cx="8375904" cy="502920"/>
+          </a:xfrm>
+          <a:prstGeom prst="rect">
+            <a:avLst/>
+          </a:prstGeom>
+          <a:noFill/>
+          <a:ln/>
+        </p:spPr>
+        <p:txBody>
+          <a:bodyPr wrap="square" rtlCol="0" anchor="ctr"/>
+          <a:lstStyle/>
+          <a:p>
+            <a:pPr indent="0" marL="0">
+              <a:buNone/>
+            </a:pPr>
+            <a:r>
+              <a:rPr lang="en-US" b="1" dirty="0">
+                <a:solidFill>
+                  <a:srgbClr val="2D3748"/>
+                </a:solidFill>
+                <a:latin typeface="Arial" pitchFamily="34" charset="0"/>
+                <a:ea typeface="Arial" pitchFamily="34" charset="-122"/>
+                <a:cs typeface="Arial" pitchFamily="34" charset="-120"/>
+              </a:rPr>
+              <a:t>🚀  La oportunidad</a:t>
+            </a:r>
+            <a:endParaRPr lang="en-US" dirty="0"/>
+          </a:p>
+        </p:txBody>
+      </p:sp>
+      <p:sp>
+        <p:nvSpPr>
+          <p:cNvPr id="9" name="Shape 7"/>
+          <p:cNvSpPr/>
+          <p:nvPr/>
+        </p:nvSpPr>
+        <p:spPr>
+          <a:xfrm>
+            <a:off x="457200" y="804672"/>
+            <a:ext cx="8375904" cy="0"/>
+          </a:xfrm>
+          <a:prstGeom prst="line">
+            <a:avLst/>
+          </a:prstGeom>
+          <a:noFill/>
+          <a:ln w="12700">
+            <a:solidFill>
+              <a:srgbClr val="E2E8F0"/>
+            </a:solidFill>
+            <a:prstDash val="solid"/>
+          </a:ln>
+        </p:spPr>
+      </p:sp>
+      <p:sp>
+        <p:nvSpPr>
+          <p:cNvPr id="10" name="Shape 8"/>
+          <p:cNvSpPr/>
+          <p:nvPr/>
+        </p:nvSpPr>
+        <p:spPr>
+          <a:xfrm>
+            <a:off x="457200" y="960120"/>
+            <a:ext cx="2633472" cy="2331720"/>
+          </a:xfrm>
+          <a:prstGeom prst="roundRect">
+            <a:avLst>
+              <a:gd name="adj" fmla="val 4706"/>
+            </a:avLst>
+          </a:prstGeom>
+          <a:solidFill>
+            <a:srgbClr val="F0EDE8"/>
+          </a:solidFill>
+          <a:ln w="6350">
+            <a:solidFill>
+              <a:srgbClr val="E2E8F0"/>
+            </a:solidFill>
+            <a:prstDash val="solid"/>
+          </a:ln>
+        </p:spPr>
+      </p:sp>
+      <p:sp>
+        <p:nvSpPr>
+          <p:cNvPr id="11" name="Text 9"/>
+          <p:cNvSpPr/>
+          <p:nvPr/>
+        </p:nvSpPr>
+        <p:spPr>
+          <a:xfrm>
+            <a:off x="457200" y="1078992"/>
+            <a:ext cx="2633472" cy="640080"/>
+          </a:xfrm>
+          <a:prstGeom prst="rect">
+            <a:avLst/>
+          </a:prstGeom>
+          <a:noFill/>
+          <a:ln/>
+        </p:spPr>
+        <p:txBody>
+          <a:bodyPr wrap="square" rtlCol="0" anchor="ctr"/>
+          <a:lstStyle/>
+          <a:p>
+            <a:pPr algn="ctr" indent="0" marL="0">
+              <a:buNone/>
+            </a:pPr>
+            <a:r>
+              <a:rPr lang="en-US" sz="3200" dirty="0">
+                <a:solidFill>
+                  <a:srgbClr val="000000"/>
+                </a:solidFill>
+              </a:rPr>
+              <a:t>📈</a:t>
+            </a:r>
+            <a:endParaRPr lang="en-US" sz="3200" dirty="0"/>
+          </a:p>
+        </p:txBody>
+      </p:sp>
+      <p:sp>
+        <p:nvSpPr>
+          <p:cNvPr id="12" name="Text 10"/>
+          <p:cNvSpPr/>
+          <p:nvPr/>
+        </p:nvSpPr>
+        <p:spPr>
+          <a:xfrm>
+            <a:off x="457200" y="1755648"/>
+            <a:ext cx="2633472" cy="804672"/>
+          </a:xfrm>
+          <a:prstGeom prst="rect">
+            <a:avLst/>
+          </a:prstGeom>
+          <a:noFill/>
+          <a:ln/>
+        </p:spPr>
+        <p:txBody>
+          <a:bodyPr wrap="square" rtlCol="0" anchor="ctr"/>
+          <a:lstStyle/>
+          <a:p>
+            <a:pPr algn="ctr" indent="0" marL="0">
+              <a:buNone/>
+            </a:pPr>
+            <a:r>
+              <a:rPr lang="en-US" sz="1500" b="1" dirty="0">
+                <a:solidFill>
+                  <a:srgbClr val="2D3748"/>
+                </a:solidFill>
+                <a:latin typeface="Arial" pitchFamily="34" charset="0"/>
+                <a:ea typeface="Arial" pitchFamily="34" charset="-122"/>
+                <a:cs typeface="Arial" pitchFamily="34" charset="-120"/>
+              </a:rPr>
+              <a:t>El sector crece al</a:t>
+            </a:r>
+            <a:endParaRPr lang="en-US" sz="1500" dirty="0"/>
+          </a:p>
+          <a:p>
+            <a:pPr algn="ctr" indent="0" marL="0">
+              <a:buNone/>
+            </a:pPr>
+            <a:r>
+              <a:rPr lang="en-US" sz="1500" b="1" dirty="0">
+                <a:solidFill>
+                  <a:srgbClr val="2D3748"/>
+                </a:solidFill>
+                <a:latin typeface="Arial" pitchFamily="34" charset="0"/>
+                <a:ea typeface="Arial" pitchFamily="34" charset="-122"/>
+                <a:cs typeface="Arial" pitchFamily="34" charset="-120"/>
+              </a:rPr>
+              <a:t>18 % anual</a:t>
+            </a:r>
+            <a:endParaRPr lang="en-US" sz="1500" dirty="0"/>
+          </a:p>
+        </p:txBody>
+      </p:sp>
+      <p:sp>
+        <p:nvSpPr>
+          <p:cNvPr id="13" name="Text 11"/>
+          <p:cNvSpPr/>
+          <p:nvPr/>
+        </p:nvSpPr>
+        <p:spPr>
+          <a:xfrm>
+            <a:off x="457200" y="2578608"/>
+            <a:ext cx="2633472" cy="274320"/>
+          </a:xfrm>
+          <a:prstGeom prst="rect">
+            <a:avLst/>
+          </a:prstGeom>
+          <a:noFill/>
+          <a:ln/>
+        </p:spPr>
+        <p:txBody>
+          <a:bodyPr wrap="square" rtlCol="0" anchor="ctr"/>
+          <a:lstStyle/>
+          <a:p>
+            <a:pPr algn="ctr" indent="0" marL="0">
+              <a:buNone/>
+            </a:pPr>
+            <a:r>
+              <a:rPr lang="en-US" sz="950" dirty="0">
+                <a:solidFill>
+                  <a:srgbClr val="718096"/>
+                </a:solidFill>
+                <a:latin typeface="Arial" pitchFamily="34" charset="0"/>
+                <a:ea typeface="Arial" pitchFamily="34" charset="-122"/>
+                <a:cs typeface="Arial" pitchFamily="34" charset="-120"/>
+              </a:rPr>
+              <a:t>DENUE 2024→2025</a:t>
+            </a:r>
+            <a:endParaRPr lang="en-US" sz="950" dirty="0"/>
+          </a:p>
+        </p:txBody>
+      </p:sp>
+      <p:sp>
+        <p:nvSpPr>
+          <p:cNvPr id="14" name="Shape 12"/>
+          <p:cNvSpPr/>
+          <p:nvPr/>
+        </p:nvSpPr>
+        <p:spPr>
+          <a:xfrm>
+            <a:off x="3273552" y="960120"/>
+            <a:ext cx="2633472" cy="2331720"/>
+          </a:xfrm>
+          <a:prstGeom prst="roundRect">
+            <a:avLst>
+              <a:gd name="adj" fmla="val 4706"/>
+            </a:avLst>
+          </a:prstGeom>
+          <a:solidFill>
+            <a:srgbClr val="EFF6FF"/>
+          </a:solidFill>
+          <a:ln w="6350">
+            <a:solidFill>
+              <a:srgbClr val="E2E8F0"/>
+            </a:solidFill>
+            <a:prstDash val="solid"/>
+          </a:ln>
+        </p:spPr>
+      </p:sp>
+      <p:sp>
+        <p:nvSpPr>
+          <p:cNvPr id="15" name="Text 13"/>
+          <p:cNvSpPr/>
+          <p:nvPr/>
+        </p:nvSpPr>
+        <p:spPr>
+          <a:xfrm>
+            <a:off x="3273552" y="1078992"/>
+            <a:ext cx="2633472" cy="640080"/>
+          </a:xfrm>
+          <a:prstGeom prst="rect">
+            <a:avLst/>
+          </a:prstGeom>
+          <a:noFill/>
+          <a:ln/>
+        </p:spPr>
+        <p:txBody>
+          <a:bodyPr wrap="square" rtlCol="0" anchor="ctr"/>
+          <a:lstStyle/>
+          <a:p>
+            <a:pPr algn="ctr" indent="0" marL="0">
+              <a:buNone/>
+            </a:pPr>
+            <a:r>
+              <a:rPr lang="en-US" sz="3200" dirty="0">
+                <a:solidFill>
+                  <a:srgbClr val="000000"/>
+                </a:solidFill>
+              </a:rPr>
+              <a:t>📜</a:t>
+            </a:r>
+            <a:endParaRPr lang="en-US" sz="3200" dirty="0"/>
+          </a:p>
+        </p:txBody>
+      </p:sp>
+      <p:sp>
+        <p:nvSpPr>
+          <p:cNvPr id="16" name="Text 14"/>
+          <p:cNvSpPr/>
+          <p:nvPr/>
+        </p:nvSpPr>
+        <p:spPr>
+          <a:xfrm>
+            <a:off x="3273552" y="1755648"/>
+            <a:ext cx="2633472" cy="804672"/>
+          </a:xfrm>
+          <a:prstGeom prst="rect">
+            <a:avLst/>
+          </a:prstGeom>
+          <a:noFill/>
+          <a:ln/>
+        </p:spPr>
+        <p:txBody>
+          <a:bodyPr wrap="square" rtlCol="0" anchor="ctr"/>
+          <a:lstStyle/>
+          <a:p>
+            <a:pPr algn="ctr" indent="0" marL="0">
+              <a:buNone/>
+            </a:pPr>
+            <a:r>
+              <a:rPr lang="en-US" sz="1500" b="1" dirty="0">
+                <a:solidFill>
+                  <a:srgbClr val="2D3748"/>
+                </a:solidFill>
+                <a:latin typeface="Arial" pitchFamily="34" charset="0"/>
+                <a:ea typeface="Arial" pitchFamily="34" charset="-122"/>
+                <a:cs typeface="Arial" pitchFamily="34" charset="-120"/>
+              </a:rPr>
+              <a:t>La ley ya exige</a:t>
+            </a:r>
+            <a:endParaRPr lang="en-US" sz="1500" dirty="0"/>
+          </a:p>
+          <a:p>
+            <a:pPr algn="ctr" indent="0" marL="0">
+              <a:buNone/>
+            </a:pPr>
+            <a:r>
+              <a:rPr lang="en-US" sz="1500" b="1" dirty="0">
+                <a:solidFill>
+                  <a:srgbClr val="2D3748"/>
+                </a:solidFill>
+                <a:latin typeface="Arial" pitchFamily="34" charset="0"/>
+                <a:ea typeface="Arial" pitchFamily="34" charset="-122"/>
+                <a:cs typeface="Arial" pitchFamily="34" charset="-120"/>
+              </a:rPr>
+              <a:t>los registros</a:t>
+            </a:r>
+            <a:endParaRPr lang="en-US" sz="1500" dirty="0"/>
+          </a:p>
+        </p:txBody>
+      </p:sp>
+      <p:sp>
+        <p:nvSpPr>
+          <p:cNvPr id="17" name="Text 15"/>
+          <p:cNvSpPr/>
+          <p:nvPr/>
+        </p:nvSpPr>
+        <p:spPr>
+          <a:xfrm>
+            <a:off x="3273552" y="2578608"/>
+            <a:ext cx="2633472" cy="274320"/>
+          </a:xfrm>
+          <a:prstGeom prst="rect">
+            <a:avLst/>
+          </a:prstGeom>
+          <a:noFill/>
+          <a:ln/>
+        </p:spPr>
+        <p:txBody>
+          <a:bodyPr wrap="square" rtlCol="0" anchor="ctr"/>
+          <a:lstStyle/>
+          <a:p>
+            <a:pPr algn="ctr" indent="0" marL="0">
+              <a:buNone/>
+            </a:pPr>
+            <a:r>
+              <a:rPr lang="en-US" sz="950" dirty="0">
+                <a:solidFill>
+                  <a:srgbClr val="718096"/>
+                </a:solidFill>
+                <a:latin typeface="Arial" pitchFamily="34" charset="0"/>
+                <a:ea typeface="Arial" pitchFamily="34" charset="-122"/>
+                <a:cs typeface="Arial" pitchFamily="34" charset="-120"/>
+              </a:rPr>
+              <a:t>NOM-031-SSA3-2012 · vigente</a:t>
+            </a:r>
+            <a:endParaRPr lang="en-US" sz="950" dirty="0"/>
+          </a:p>
+        </p:txBody>
+      </p:sp>
+      <p:sp>
+        <p:nvSpPr>
+          <p:cNvPr id="18" name="Shape 16"/>
+          <p:cNvSpPr/>
+          <p:nvPr/>
+        </p:nvSpPr>
+        <p:spPr>
+          <a:xfrm>
+            <a:off x="6089904" y="960120"/>
+            <a:ext cx="2633472" cy="2331720"/>
+          </a:xfrm>
+          <a:prstGeom prst="roundRect">
+            <a:avLst>
+              <a:gd name="adj" fmla="val 4706"/>
+            </a:avLst>
+          </a:prstGeom>
+          <a:solidFill>
+            <a:srgbClr val="FFF7ED"/>
+          </a:solidFill>
+          <a:ln w="6350">
+            <a:solidFill>
+              <a:srgbClr val="E2E8F0"/>
+            </a:solidFill>
+            <a:prstDash val="solid"/>
+          </a:ln>
+        </p:spPr>
+      </p:sp>
+      <p:sp>
+        <p:nvSpPr>
+          <p:cNvPr id="19" name="Text 17"/>
+          <p:cNvSpPr/>
+          <p:nvPr/>
+        </p:nvSpPr>
+        <p:spPr>
+          <a:xfrm>
+            <a:off x="6089904" y="1078992"/>
+            <a:ext cx="2633472" cy="640080"/>
+          </a:xfrm>
+          <a:prstGeom prst="rect">
+            <a:avLst/>
+          </a:prstGeom>
+          <a:noFill/>
+          <a:ln/>
+        </p:spPr>
+        <p:txBody>
+          <a:bodyPr wrap="square" rtlCol="0" anchor="ctr"/>
+          <a:lstStyle/>
+          <a:p>
+            <a:pPr algn="ctr" indent="0" marL="0">
+              <a:buNone/>
+            </a:pPr>
+            <a:r>
+              <a:rPr lang="en-US" sz="3200" dirty="0">
+                <a:solidFill>
+                  <a:srgbClr val="000000"/>
+                </a:solidFill>
+              </a:rPr>
+              <a:t>❌</a:t>
+            </a:r>
+            <a:endParaRPr lang="en-US" sz="3200" dirty="0"/>
+          </a:p>
+        </p:txBody>
+      </p:sp>
+      <p:sp>
+        <p:nvSpPr>
+          <p:cNvPr id="20" name="Text 18"/>
+          <p:cNvSpPr/>
+          <p:nvPr/>
+        </p:nvSpPr>
+        <p:spPr>
+          <a:xfrm>
+            <a:off x="6089904" y="1755648"/>
+            <a:ext cx="2633472" cy="804672"/>
+          </a:xfrm>
+          <a:prstGeom prst="rect">
+            <a:avLst/>
+          </a:prstGeom>
+          <a:noFill/>
+          <a:ln/>
+        </p:spPr>
+        <p:txBody>
+          <a:bodyPr wrap="square" rtlCol="0" anchor="ctr"/>
+          <a:lstStyle/>
+          <a:p>
+            <a:pPr algn="ctr" indent="0" marL="0">
+              <a:buNone/>
+            </a:pPr>
+            <a:r>
+              <a:rPr lang="en-US" sz="1500" b="1" dirty="0">
+                <a:solidFill>
+                  <a:srgbClr val="2D3748"/>
+                </a:solidFill>
+                <a:latin typeface="Arial" pitchFamily="34" charset="0"/>
+                <a:ea typeface="Arial" pitchFamily="34" charset="-122"/>
+                <a:cs typeface="Arial" pitchFamily="34" charset="-120"/>
+              </a:rPr>
+              <a:t>Los competidores</a:t>
+            </a:r>
+            <a:endParaRPr lang="en-US" sz="1500" dirty="0"/>
+          </a:p>
+          <a:p>
+            <a:pPr algn="ctr" indent="0" marL="0">
+              <a:buNone/>
+            </a:pPr>
+            <a:r>
+              <a:rPr lang="en-US" sz="1500" b="1" dirty="0">
+                <a:solidFill>
+                  <a:srgbClr val="2D3748"/>
+                </a:solidFill>
+                <a:latin typeface="Arial" pitchFamily="34" charset="0"/>
+                <a:ea typeface="Arial" pitchFamily="34" charset="-122"/>
+                <a:cs typeface="Arial" pitchFamily="34" charset="-120"/>
+              </a:rPr>
+              <a:t>no los generan</a:t>
+            </a:r>
+            <a:endParaRPr lang="en-US" sz="1500" dirty="0"/>
+          </a:p>
+        </p:txBody>
+      </p:sp>
+      <p:sp>
+        <p:nvSpPr>
+          <p:cNvPr id="21" name="Text 19"/>
+          <p:cNvSpPr/>
+          <p:nvPr/>
+        </p:nvSpPr>
+        <p:spPr>
+          <a:xfrm>
+            <a:off x="6089904" y="2578608"/>
+            <a:ext cx="2633472" cy="274320"/>
+          </a:xfrm>
+          <a:prstGeom prst="rect">
+            <a:avLst/>
+          </a:prstGeom>
+          <a:noFill/>
+          <a:ln/>
+        </p:spPr>
+        <p:txBody>
+          <a:bodyPr wrap="square" rtlCol="0" anchor="ctr"/>
+          <a:lstStyle/>
+          <a:p>
+            <a:pPr algn="ctr" indent="0" marL="0">
+              <a:buNone/>
+            </a:pPr>
+            <a:r>
+              <a:rPr lang="en-US" sz="950" dirty="0">
+                <a:solidFill>
+                  <a:srgbClr val="718096"/>
+                </a:solidFill>
+                <a:latin typeface="Arial" pitchFamily="34" charset="0"/>
+                <a:ea typeface="Arial" pitchFamily="34" charset="-122"/>
+                <a:cs typeface="Arial" pitchFamily="34" charset="-120"/>
+              </a:rPr>
+              <a:t>Cronos Care · GERIGES</a:t>
+            </a:r>
+            <a:endParaRPr lang="en-US" sz="950" dirty="0"/>
+          </a:p>
+        </p:txBody>
+      </p:sp>
+      <p:sp>
+        <p:nvSpPr>
+          <p:cNvPr id="22" name="Text 20"/>
+          <p:cNvSpPr/>
+          <p:nvPr/>
+        </p:nvSpPr>
+        <p:spPr>
+          <a:xfrm>
+            <a:off x="4114800" y="3401568"/>
+            <a:ext cx="658368" cy="502920"/>
+          </a:xfrm>
+          <a:prstGeom prst="rect">
+            <a:avLst/>
+          </a:prstGeom>
+          <a:noFill/>
+          <a:ln/>
+        </p:spPr>
+        <p:txBody>
+          <a:bodyPr wrap="square" rtlCol="0" anchor="ctr"/>
+          <a:lstStyle/>
+          <a:p>
+            <a:pPr algn="ctr" indent="0" marL="0">
+              <a:buNone/>
+            </a:pPr>
+            <a:r>
+              <a:rPr lang="en-US" sz="2800" b="1" dirty="0">
+                <a:solidFill>
+                  <a:srgbClr val="5B8DB8"/>
+                </a:solidFill>
+                <a:latin typeface="Arial" pitchFamily="34" charset="0"/>
+                <a:ea typeface="Arial" pitchFamily="34" charset="-122"/>
+                <a:cs typeface="Arial" pitchFamily="34" charset="-120"/>
+              </a:rPr>
+              <a:t>↓</a:t>
+            </a:r>
+            <a:endParaRPr lang="en-US" sz="2800" dirty="0"/>
+          </a:p>
+        </p:txBody>
+      </p:sp>
+      <p:sp>
+        <p:nvSpPr>
+          <p:cNvPr id="23" name="Shape 21"/>
+          <p:cNvSpPr/>
+          <p:nvPr/>
+        </p:nvSpPr>
+        <p:spPr>
+          <a:xfrm>
+            <a:off x="457200" y="3977640"/>
+            <a:ext cx="8375904" cy="868680"/>
+          </a:xfrm>
+          <a:prstGeom prst="roundRect">
+            <a:avLst>
+              <a:gd name="adj" fmla="val 8421"/>
+            </a:avLst>
+          </a:prstGeom>
+          <a:solidFill>
+            <a:srgbClr val="EFF6FF"/>
+          </a:solidFill>
+          <a:ln w="6350">
+            <a:solidFill>
+              <a:srgbClr val="E2E8F0"/>
+            </a:solidFill>
+            <a:prstDash val="solid"/>
+          </a:ln>
+        </p:spPr>
+      </p:sp>
+      <p:sp>
+        <p:nvSpPr>
+          <p:cNvPr id="24" name="Text 22"/>
+          <p:cNvSpPr/>
+          <p:nvPr/>
+        </p:nvSpPr>
+        <p:spPr>
+          <a:xfrm>
+            <a:off x="640080" y="4041648"/>
+            <a:ext cx="8010144" cy="749808"/>
+          </a:xfrm>
+          <a:prstGeom prst="rect">
+            <a:avLst/>
+          </a:prstGeom>
+          <a:noFill/>
+          <a:ln/>
+        </p:spPr>
+        <p:txBody>
+          <a:bodyPr wrap="square" rtlCol="0" anchor="ctr"/>
+          <a:lstStyle/>
+          <a:p>
+            <a:pPr algn="ctr" indent="0" marL="0">
+              <a:buNone/>
+            </a:pPr>
+            <a:r>
+              <a:rPr lang="en-US" sz="1700" b="1" dirty="0">
+                <a:solidFill>
+                  <a:srgbClr val="3A6B96"/>
+                </a:solidFill>
+                <a:latin typeface="Arial" pitchFamily="34" charset="0"/>
+                <a:ea typeface="Arial" pitchFamily="34" charset="-122"/>
+                <a:cs typeface="Arial" pitchFamily="34" charset="-120"/>
+              </a:rPr>
+              <a:t>El primero que llegue con trazabilidad operativa real</a:t>
+            </a:r>
+            <a:endParaRPr lang="en-US" sz="1700" dirty="0"/>
+          </a:p>
+          <a:p>
+            <a:pPr algn="ctr" indent="0" marL="0">
+              <a:buNone/>
+            </a:pPr>
+            <a:r>
+              <a:rPr lang="en-US" sz="1700" b="1" dirty="0">
+                <a:solidFill>
+                  <a:srgbClr val="3A6B96"/>
+                </a:solidFill>
+                <a:latin typeface="Arial" pitchFamily="34" charset="0"/>
+                <a:ea typeface="Arial" pitchFamily="34" charset="-122"/>
+                <a:cs typeface="Arial" pitchFamily="34" charset="-120"/>
+              </a:rPr>
+              <a:t>se convierte en el estándar del sector.</a:t>
+            </a:r>
+            <a:endParaRPr lang="en-US" sz="1700" dirty="0"/>
+          </a:p>
+        </p:txBody>
+      </p:sp>
+      <p:sp>
+        <p:nvSpPr>
+          <p:cNvPr id="25" name="Shape 23"/>
+          <p:cNvSpPr/>
+          <p:nvPr/>
+        </p:nvSpPr>
+        <p:spPr>
+          <a:xfrm>
+            <a:off x="1645920" y="5029200"/>
+            <a:ext cx="5541264" cy="749808"/>
+          </a:xfrm>
+          <a:prstGeom prst="roundRect">
+            <a:avLst>
+              <a:gd name="adj" fmla="val 9756"/>
+            </a:avLst>
+          </a:prstGeom>
+          <a:solidFill>
+            <a:srgbClr val="F0EDE8"/>
+          </a:solidFill>
+          <a:ln w="6350">
+            <a:solidFill>
+              <a:srgbClr val="E2E8F0"/>
+            </a:solidFill>
+            <a:prstDash val="solid"/>
+          </a:ln>
+        </p:spPr>
+      </p:sp>
+      <p:sp>
+        <p:nvSpPr>
+          <p:cNvPr id="26" name="Text 24"/>
+          <p:cNvSpPr/>
+          <p:nvPr/>
+        </p:nvSpPr>
+        <p:spPr>
+          <a:xfrm>
+            <a:off x="1645920" y="5093208"/>
+            <a:ext cx="5541264" cy="594360"/>
+          </a:xfrm>
+          <a:prstGeom prst="rect">
+            <a:avLst/>
+          </a:prstGeom>
+          <a:noFill/>
+          <a:ln/>
+        </p:spPr>
+        <p:txBody>
+          <a:bodyPr wrap="square" rtlCol="0" anchor="ctr"/>
+          <a:lstStyle/>
+          <a:p>
+            <a:pPr algn="ctr" indent="0" marL="0">
+              <a:buNone/>
+            </a:pPr>
+            <a:r>
+              <a:rPr lang="en-US" sz="1400" b="1" dirty="0">
+                <a:solidFill>
+                  <a:srgbClr val="5B8DB8"/>
+                </a:solidFill>
+                <a:latin typeface="Arial" pitchFamily="34" charset="0"/>
+                <a:ea typeface="Arial" pitchFamily="34" charset="-122"/>
+                <a:cs typeface="Arial" pitchFamily="34" charset="-120"/>
+              </a:rPr>
+              <a:t>🤝  Buscamos 2–3 residencias piloto · Primer trimestre 2027</a:t>
+            </a:r>
+            <a:endParaRPr lang="en-US" sz="1400" dirty="0"/>
+          </a:p>
+        </p:txBody>
+      </p:sp>
+      <p:sp>
+        <p:nvSpPr>
+          <p:cNvPr id="27" name="Text 25"/>
+          <p:cNvSpPr/>
+          <p:nvPr/>
+        </p:nvSpPr>
+        <p:spPr>
+          <a:xfrm>
+            <a:off x="457200" y="5897880"/>
+            <a:ext cx="8375904" cy="365760"/>
+          </a:xfrm>
+          <a:prstGeom prst="rect">
+            <a:avLst/>
+          </a:prstGeom>
+          <a:noFill/>
+          <a:ln/>
+        </p:spPr>
+        <p:txBody>
+          <a:bodyPr wrap="square" rtlCol="0" anchor="ctr"/>
+          <a:lstStyle/>
+          <a:p>
+            <a:pPr algn="ctr" indent="0" marL="0">
+              <a:buNone/>
+            </a:pPr>
+            <a:r>
+              <a:rPr lang="en-US" sz="1800" b="1" dirty="0">
+                <a:solidFill>
+                  <a:srgbClr val="2D3748"/>
+                </a:solidFill>
+                <a:latin typeface="Arial" pitchFamily="34" charset="0"/>
+                <a:ea typeface="Arial" pitchFamily="34" charset="-122"/>
+                <a:cs typeface="Arial" pitchFamily="34" charset="-120"/>
+              </a:rPr>
+              <a:t>Gracias.</a:t>
+            </a:r>
+            <a:endParaRPr lang="en-US" sz="1800" dirty="0"/>
+          </a:p>
+        </p:txBody>
+      </p:sp>
+      <p:sp>
+        <p:nvSpPr>
+          <p:cNvPr id="28" name="Text 26"/>
+          <p:cNvSpPr/>
+          <p:nvPr/>
+        </p:nvSpPr>
+        <p:spPr>
+          <a:xfrm>
+            <a:off x="457200" y="6291072"/>
+            <a:ext cx="8375904" cy="201168"/>
+          </a:xfrm>
+          <a:prstGeom prst="rect">
+            <a:avLst/>
+          </a:prstGeom>
+          <a:noFill/>
+          <a:ln/>
+        </p:spPr>
+        <p:txBody>
+          <a:bodyPr wrap="square" rtlCol="0" anchor="ctr"/>
+          <a:lstStyle/>
+          <a:p>
+            <a:pPr algn="ctr" indent="0" marL="0">
+              <a:buNone/>
+            </a:pPr>
+            <a:r>
+              <a:rPr lang="en-US" dirty="0">
+                <a:solidFill>
+                  <a:srgbClr val="718096"/>
+                </a:solidFill>
+                <a:latin typeface="Arial" pitchFamily="34" charset="0"/>
+                <a:ea typeface="Arial" pitchFamily="34" charset="-122"/>
+                <a:cs typeface="Arial" pitchFamily="34" charset="-120"/>
+              </a:rPr>
+              <a:t>MVP operacional · No dispositivo médico · Datos ficticios · v0.1.0-workshop</a:t>
+            </a:r>
+            <a:endParaRPr lang="en-US" dirty="0"/>
+          </a:p>
+        </p:txBody>
+      </p:sp>
+    </p:spTree>
+  </p:cSld>
+  <p:clrMapOvr>
+    <a:masterClrMapping/>
+  </p:clrMapOvr>
+</p:sld>
+</file>
+
+<file path=ppt/slides/slide14.xml><?xml version="1.0" encoding="utf-8"?>
+<p:sld xmlns:a="http://schemas.openxmlformats.org/drawingml/2006/main" xmlns:r="http://schemas.openxmlformats.org/officeDocument/2006/relationships" xmlns:p="http://schemas.openxmlformats.org/presentationml/2006/main">
+  <p:cSld name="Slide 14">
+    <p:spTree>
+      <p:nvGrpSpPr>
+        <p:cNvPr id="1" name=""/>
+        <p:cNvGrpSpPr/>
+        <p:nvPr/>
+      </p:nvGrpSpPr>
+      <p:grpSpPr>
+        <a:xfrm>
+          <a:off x="0" y="0"/>
+          <a:ext cx="0" cy="0"/>
+          <a:chOff x="0" y="0"/>
+          <a:chExt cx="0" cy="0"/>
+        </a:xfrm>
+      </p:grpSpPr>
+      <p:sp>
+        <p:nvSpPr>
+          <p:cNvPr id="2" name="Shape 0"/>
+          <p:cNvSpPr/>
+          <p:nvPr/>
+        </p:nvSpPr>
+        <p:spPr>
+          <a:xfrm>
+            <a:off x="0" y="0"/>
+            <a:ext cx="12192000" cy="6858000"/>
+          </a:xfrm>
+          <a:prstGeom prst="rect">
+            <a:avLst/>
+          </a:prstGeom>
+          <a:solidFill>
+            <a:srgbClr val="FAFAF8"/>
+          </a:solidFill>
+          <a:ln w="12700">
+            <a:solidFill>
+              <a:srgbClr val="FAFAF8"/>
+            </a:solidFill>
+            <a:prstDash val="solid"/>
+          </a:ln>
+        </p:spPr>
+      </p:sp>
+      <p:sp>
+        <p:nvSpPr>
+          <p:cNvPr id="3" name="Shape 1"/>
+          <p:cNvSpPr/>
+          <p:nvPr/>
+        </p:nvSpPr>
+        <p:spPr>
+          <a:xfrm>
+            <a:off x="7132320" y="-1371600"/>
+            <a:ext cx="3474720" cy="3474720"/>
+          </a:xfrm>
+          <a:prstGeom prst="ellipse">
+            <a:avLst/>
+          </a:prstGeom>
+          <a:solidFill>
+            <a:srgbClr val="7BA68A">
+              <a:alpha val="16000"/>
+            </a:srgbClr>
+          </a:solidFill>
+          <a:ln w="12700">
+            <a:solidFill>
+              <a:srgbClr val="7BA68A">
+                <a:alpha val="16000"/>
+              </a:srgbClr>
+            </a:solidFill>
+            <a:prstDash val="solid"/>
+          </a:ln>
+        </p:spPr>
+      </p:sp>
+      <p:sp>
+        <p:nvSpPr>
+          <p:cNvPr id="4" name="Shape 2"/>
+          <p:cNvSpPr/>
+          <p:nvPr/>
+        </p:nvSpPr>
+        <p:spPr>
+          <a:xfrm>
+            <a:off x="-365760" y="5303520"/>
+            <a:ext cx="2011680" cy="2011680"/>
+          </a:xfrm>
+          <a:prstGeom prst="ellipse">
+            <a:avLst/>
+          </a:prstGeom>
+          <a:solidFill>
+            <a:srgbClr val="A8C4DC">
+              <a:alpha val="20000"/>
+            </a:srgbClr>
+          </a:solidFill>
+          <a:ln w="12700">
+            <a:solidFill>
+              <a:srgbClr val="A8C4DC">
+                <a:alpha val="20000"/>
+              </a:srgbClr>
+            </a:solidFill>
+            <a:prstDash val="solid"/>
+          </a:ln>
+        </p:spPr>
+      </p:sp>
+      <p:sp>
+        <p:nvSpPr>
+          <p:cNvPr id="5" name="Shape 3"/>
+          <p:cNvSpPr/>
+          <p:nvPr/>
+        </p:nvSpPr>
+        <p:spPr>
+          <a:xfrm rot="-1080000">
+            <a:off x="274320" y="5943600"/>
+            <a:ext cx="2286000" cy="0"/>
+          </a:xfrm>
+          <a:prstGeom prst="line">
+            <a:avLst/>
+          </a:prstGeom>
+          <a:noFill/>
+          <a:ln w="12700">
+            <a:solidFill>
+              <a:srgbClr val="E2E8F0"/>
+            </a:solidFill>
+            <a:prstDash val="solid"/>
+          </a:ln>
+        </p:spPr>
+      </p:sp>
+      <p:sp>
+        <p:nvSpPr>
+          <p:cNvPr id="6" name="Shape 4"/>
+          <p:cNvSpPr/>
+          <p:nvPr/>
+        </p:nvSpPr>
+        <p:spPr>
+          <a:xfrm>
+            <a:off x="0" y="0"/>
+            <a:ext cx="12192000" cy="54864"/>
+          </a:xfrm>
+          <a:prstGeom prst="rect">
+            <a:avLst/>
+          </a:prstGeom>
+          <a:solidFill>
+            <a:srgbClr val="5B8DB8"/>
+          </a:solidFill>
+          <a:ln w="12700">
+            <a:solidFill>
+              <a:srgbClr val="5B8DB8"/>
+            </a:solidFill>
+            <a:prstDash val="solid"/>
+          </a:ln>
+        </p:spPr>
+      </p:sp>
+      <p:sp>
+        <p:nvSpPr>
+          <p:cNvPr id="7" name="Shape 5"/>
+          <p:cNvSpPr/>
+          <p:nvPr/>
+        </p:nvSpPr>
+        <p:spPr>
+          <a:xfrm>
+            <a:off x="0" y="6528816"/>
+            <a:ext cx="12192000" cy="54864"/>
+          </a:xfrm>
+          <a:prstGeom prst="rect">
+            <a:avLst/>
+          </a:prstGeom>
+          <a:solidFill>
+            <a:srgbClr val="C4786A"/>
+          </a:solidFill>
+          <a:ln w="12700">
+            <a:solidFill>
+              <a:srgbClr val="C4786A"/>
+            </a:solidFill>
+            <a:prstDash val="solid"/>
+          </a:ln>
+        </p:spPr>
+      </p:sp>
+      <p:sp>
+        <p:nvSpPr>
+          <p:cNvPr id="8" name="Text 6"/>
+          <p:cNvSpPr/>
+          <p:nvPr/>
+        </p:nvSpPr>
+        <p:spPr>
+          <a:xfrm>
+            <a:off x="457200" y="228600"/>
+            <a:ext cx="8375904" cy="502920"/>
+          </a:xfrm>
+          <a:prstGeom prst="rect">
+            <a:avLst/>
+          </a:prstGeom>
+          <a:noFill/>
+          <a:ln/>
+        </p:spPr>
+        <p:txBody>
+          <a:bodyPr wrap="square" rtlCol="0" anchor="ctr"/>
+          <a:lstStyle/>
+          <a:p>
+            <a:pPr indent="0" marL="0">
+              <a:buNone/>
+            </a:pPr>
+            <a:r>
+              <a:rPr lang="en-US" b="1" dirty="0">
+                <a:solidFill>
+                  <a:srgbClr val="2D3748"/>
+                </a:solidFill>
+                <a:latin typeface="Arial" pitchFamily="34" charset="0"/>
+                <a:ea typeface="Arial" pitchFamily="34" charset="-122"/>
+                <a:cs typeface="Arial" pitchFamily="34" charset="-120"/>
+              </a:rPr>
+              <a:t>❓  Preguntas frecuentes — respuestas preparadas</a:t>
+            </a:r>
+            <a:endParaRPr lang="en-US" dirty="0"/>
+          </a:p>
+        </p:txBody>
+      </p:sp>
+      <p:sp>
+        <p:nvSpPr>
+          <p:cNvPr id="9" name="Text 7"/>
+          <p:cNvSpPr/>
+          <p:nvPr/>
+        </p:nvSpPr>
+        <p:spPr>
+          <a:xfrm>
+            <a:off x="457200" y="731520"/>
+            <a:ext cx="8375904" cy="320040"/>
+          </a:xfrm>
+          <a:prstGeom prst="rect">
+            <a:avLst/>
+          </a:prstGeom>
+          <a:noFill/>
+          <a:ln/>
+        </p:spPr>
+        <p:txBody>
+          <a:bodyPr wrap="square" rtlCol="0" anchor="ctr"/>
+          <a:lstStyle/>
+          <a:p>
+            <a:pPr indent="0" marL="0">
+              <a:buNone/>
+            </a:pPr>
+            <a:r>
+              <a:rPr lang="en-US" b="1" dirty="0">
+                <a:solidFill>
+                  <a:srgbClr val="5B8DB8"/>
+                </a:solidFill>
+                <a:latin typeface="Arial" pitchFamily="34" charset="0"/>
+                <a:ea typeface="Arial" pitchFamily="34" charset="-122"/>
+                <a:cs typeface="Arial" pitchFamily="34" charset="-120"/>
+              </a:rPr>
+              <a:t>Solo para uso interno durante la sesión de Q&amp;A</a:t>
+            </a:r>
+            <a:endParaRPr lang="en-US" dirty="0"/>
+          </a:p>
+        </p:txBody>
+      </p:sp>
+      <p:sp>
+        <p:nvSpPr>
+          <p:cNvPr id="10" name="Shape 8"/>
+          <p:cNvSpPr/>
+          <p:nvPr/>
+        </p:nvSpPr>
+        <p:spPr>
+          <a:xfrm>
+            <a:off x="457200" y="1097280"/>
+            <a:ext cx="8375904" cy="0"/>
+          </a:xfrm>
+          <a:prstGeom prst="line">
+            <a:avLst/>
+          </a:prstGeom>
+          <a:noFill/>
+          <a:ln w="12700">
+            <a:solidFill>
+              <a:srgbClr val="E2E8F0"/>
+            </a:solidFill>
+            <a:prstDash val="solid"/>
+          </a:ln>
+        </p:spPr>
+      </p:sp>
+      <p:sp>
+        <p:nvSpPr>
+          <p:cNvPr id="11" name="Shape 9"/>
+          <p:cNvSpPr/>
+          <p:nvPr/>
+        </p:nvSpPr>
+        <p:spPr>
+          <a:xfrm>
+            <a:off x="457200" y="1234440"/>
+            <a:ext cx="8375904" cy="1051560"/>
+          </a:xfrm>
+          <a:prstGeom prst="roundRect">
+            <a:avLst>
+              <a:gd name="adj" fmla="val 8696"/>
+            </a:avLst>
+          </a:prstGeom>
+          <a:solidFill>
+            <a:srgbClr val="F0EDE8"/>
+          </a:solidFill>
+          <a:ln w="6350">
+            <a:solidFill>
+              <a:srgbClr val="E2E8F0"/>
+            </a:solidFill>
+            <a:prstDash val="solid"/>
+          </a:ln>
+        </p:spPr>
+      </p:sp>
+      <p:sp>
+        <p:nvSpPr>
+          <p:cNvPr id="12" name="Text 10"/>
+          <p:cNvSpPr/>
+          <p:nvPr/>
+        </p:nvSpPr>
+        <p:spPr>
+          <a:xfrm>
+            <a:off x="640080" y="1325880"/>
+            <a:ext cx="8010144" cy="329184"/>
+          </a:xfrm>
+          <a:prstGeom prst="rect">
+            <a:avLst/>
+          </a:prstGeom>
+          <a:noFill/>
+          <a:ln/>
+        </p:spPr>
+        <p:txBody>
+          <a:bodyPr wrap="square" rtlCol="0" anchor="ctr"/>
+          <a:lstStyle/>
+          <a:p>
+            <a:pPr indent="0" marL="0">
+              <a:buNone/>
+            </a:pPr>
+            <a:r>
+              <a:rPr lang="en-US" sz="1200" b="1" dirty="0">
+                <a:solidFill>
+                  <a:srgbClr val="3A6B96"/>
+                </a:solidFill>
+                <a:latin typeface="Arial" pitchFamily="34" charset="0"/>
+                <a:ea typeface="Arial" pitchFamily="34" charset="-122"/>
+                <a:cs typeface="Arial" pitchFamily="34" charset="-120"/>
+              </a:rPr>
+              <a:t>P: ¿Tienen clientes?</a:t>
+            </a:r>
+            <a:endParaRPr lang="en-US" sz="1200" dirty="0"/>
+          </a:p>
+        </p:txBody>
+      </p:sp>
+      <p:sp>
+        <p:nvSpPr>
+          <p:cNvPr id="13" name="Text 11"/>
+          <p:cNvSpPr/>
+          <p:nvPr/>
+        </p:nvSpPr>
+        <p:spPr>
+          <a:xfrm>
+            <a:off x="640080" y="1673352"/>
+            <a:ext cx="8010144" cy="530352"/>
+          </a:xfrm>
+          <a:prstGeom prst="rect">
+            <a:avLst/>
+          </a:prstGeom>
+          <a:noFill/>
+          <a:ln/>
+        </p:spPr>
+        <p:txBody>
+          <a:bodyPr wrap="square" rtlCol="0" anchor="ctr"/>
+          <a:lstStyle/>
+          <a:p>
+            <a:pPr indent="0" marL="0">
+              <a:buNone/>
+            </a:pPr>
+            <a:r>
+              <a:rPr lang="en-US" sz="1200" dirty="0">
+                <a:solidFill>
+                  <a:srgbClr val="2D3748"/>
+                </a:solidFill>
+                <a:latin typeface="Arial" pitchFamily="34" charset="0"/>
+                <a:ea typeface="Arial" pitchFamily="34" charset="-122"/>
+                <a:cs typeface="Arial" pitchFamily="34" charset="-120"/>
+              </a:rPr>
+              <a:t>R: Cero clientes hoy. La tracción es de producto. Buscamos los primeros pilotos con este pitch.</a:t>
+            </a:r>
+            <a:endParaRPr lang="en-US" sz="1200" dirty="0"/>
+          </a:p>
+        </p:txBody>
+      </p:sp>
+      <p:sp>
+        <p:nvSpPr>
+          <p:cNvPr id="14" name="Shape 12"/>
+          <p:cNvSpPr/>
+          <p:nvPr/>
+        </p:nvSpPr>
+        <p:spPr>
+          <a:xfrm>
+            <a:off x="457200" y="2404872"/>
+            <a:ext cx="8375904" cy="1051560"/>
+          </a:xfrm>
+          <a:prstGeom prst="roundRect">
+            <a:avLst>
+              <a:gd name="adj" fmla="val 8696"/>
+            </a:avLst>
+          </a:prstGeom>
+          <a:solidFill>
+            <a:srgbClr val="EFF6FF"/>
+          </a:solidFill>
+          <a:ln w="6350">
+            <a:solidFill>
+              <a:srgbClr val="E2E8F0"/>
+            </a:solidFill>
+            <a:prstDash val="solid"/>
+          </a:ln>
+        </p:spPr>
+      </p:sp>
+      <p:sp>
+        <p:nvSpPr>
+          <p:cNvPr id="15" name="Text 13"/>
+          <p:cNvSpPr/>
+          <p:nvPr/>
+        </p:nvSpPr>
+        <p:spPr>
+          <a:xfrm>
+            <a:off x="640080" y="2496312"/>
+            <a:ext cx="8010144" cy="329184"/>
+          </a:xfrm>
+          <a:prstGeom prst="rect">
+            <a:avLst/>
+          </a:prstGeom>
+          <a:noFill/>
+          <a:ln/>
+        </p:spPr>
+        <p:txBody>
+          <a:bodyPr wrap="square" rtlCol="0" anchor="ctr"/>
+          <a:lstStyle/>
+          <a:p>
+            <a:pPr indent="0" marL="0">
+              <a:buNone/>
+            </a:pPr>
+            <a:r>
+              <a:rPr lang="en-US" sz="1200" b="1" dirty="0">
+                <a:solidFill>
+                  <a:srgbClr val="3A6B96"/>
+                </a:solidFill>
+                <a:latin typeface="Arial" pitchFamily="34" charset="0"/>
+                <a:ea typeface="Arial" pitchFamily="34" charset="-122"/>
+                <a:cs typeface="Arial" pitchFamily="34" charset="-120"/>
+              </a:rPr>
+              <a:t>P: ¿Por qué no hay IA en el producto actual?</a:t>
+            </a:r>
+            <a:endParaRPr lang="en-US" sz="1200" dirty="0"/>
+          </a:p>
+        </p:txBody>
+      </p:sp>
+      <p:sp>
+        <p:nvSpPr>
+          <p:cNvPr id="16" name="Text 14"/>
+          <p:cNvSpPr/>
+          <p:nvPr/>
+        </p:nvSpPr>
+        <p:spPr>
+          <a:xfrm>
+            <a:off x="640080" y="2843784"/>
+            <a:ext cx="8010144" cy="530352"/>
+          </a:xfrm>
+          <a:prstGeom prst="rect">
+            <a:avLst/>
+          </a:prstGeom>
+          <a:noFill/>
+          <a:ln/>
+        </p:spPr>
+        <p:txBody>
+          <a:bodyPr wrap="square" rtlCol="0" anchor="ctr"/>
+          <a:lstStyle/>
+          <a:p>
+            <a:pPr indent="0" marL="0">
+              <a:buNone/>
+            </a:pPr>
+            <a:r>
+              <a:rPr lang="en-US" sz="1200" dirty="0">
+                <a:solidFill>
+                  <a:srgbClr val="2D3748"/>
+                </a:solidFill>
+                <a:latin typeface="Arial" pitchFamily="34" charset="0"/>
+                <a:ea typeface="Arial" pitchFamily="34" charset="-122"/>
+                <a:cs typeface="Arial" pitchFamily="34" charset="-120"/>
+              </a:rPr>
+              <a:t>R: Decisión de privacidad: ningún dato de residente sale del dispositivo. La IA entra en v0.2 cuando tengamos datos reales con consentimiento.</a:t>
+            </a:r>
+            <a:endParaRPr lang="en-US" sz="1200" dirty="0"/>
+          </a:p>
+        </p:txBody>
+      </p:sp>
+      <p:sp>
+        <p:nvSpPr>
+          <p:cNvPr id="17" name="Shape 15"/>
+          <p:cNvSpPr/>
+          <p:nvPr/>
+        </p:nvSpPr>
+        <p:spPr>
+          <a:xfrm>
+            <a:off x="457200" y="3575304"/>
+            <a:ext cx="8375904" cy="1051560"/>
+          </a:xfrm>
+          <a:prstGeom prst="roundRect">
+            <a:avLst>
+              <a:gd name="adj" fmla="val 8696"/>
+            </a:avLst>
+          </a:prstGeom>
+          <a:solidFill>
+            <a:srgbClr val="F0EDE8"/>
+          </a:solidFill>
+          <a:ln w="6350">
+            <a:solidFill>
+              <a:srgbClr val="E2E8F0"/>
+            </a:solidFill>
+            <a:prstDash val="solid"/>
+          </a:ln>
+        </p:spPr>
+      </p:sp>
+      <p:sp>
+        <p:nvSpPr>
+          <p:cNvPr id="18" name="Text 16"/>
+          <p:cNvSpPr/>
+          <p:nvPr/>
+        </p:nvSpPr>
+        <p:spPr>
+          <a:xfrm>
+            <a:off x="640080" y="3666744"/>
+            <a:ext cx="8010144" cy="329184"/>
+          </a:xfrm>
+          <a:prstGeom prst="rect">
+            <a:avLst/>
+          </a:prstGeom>
+          <a:noFill/>
+          <a:ln/>
+        </p:spPr>
+        <p:txBody>
+          <a:bodyPr wrap="square" rtlCol="0" anchor="ctr"/>
+          <a:lstStyle/>
+          <a:p>
+            <a:pPr indent="0" marL="0">
+              <a:buNone/>
+            </a:pPr>
+            <a:r>
+              <a:rPr lang="en-US" sz="1200" b="1" dirty="0">
+                <a:solidFill>
+                  <a:srgbClr val="3A6B96"/>
+                </a:solidFill>
+                <a:latin typeface="Arial" pitchFamily="34" charset="0"/>
+                <a:ea typeface="Arial" pitchFamily="34" charset="-122"/>
+                <a:cs typeface="Arial" pitchFamily="34" charset="-120"/>
+              </a:rPr>
+              <a:t>P: ¿Cómo se comparan con Cronos Care?</a:t>
+            </a:r>
+            <a:endParaRPr lang="en-US" sz="1200" dirty="0"/>
+          </a:p>
+        </p:txBody>
+      </p:sp>
+      <p:sp>
+        <p:nvSpPr>
+          <p:cNvPr id="19" name="Text 17"/>
+          <p:cNvSpPr/>
+          <p:nvPr/>
+        </p:nvSpPr>
+        <p:spPr>
+          <a:xfrm>
+            <a:off x="640080" y="4014216"/>
+            <a:ext cx="8010144" cy="530352"/>
+          </a:xfrm>
+          <a:prstGeom prst="rect">
+            <a:avLst/>
+          </a:prstGeom>
+          <a:noFill/>
+          <a:ln/>
+        </p:spPr>
+        <p:txBody>
+          <a:bodyPr wrap="square" rtlCol="0" anchor="ctr"/>
+          <a:lstStyle/>
+          <a:p>
+            <a:pPr indent="0" marL="0">
+              <a:buNone/>
+            </a:pPr>
+            <a:r>
+              <a:rPr lang="en-US" sz="1200" dirty="0">
+                <a:solidFill>
+                  <a:srgbClr val="2D3748"/>
+                </a:solidFill>
+                <a:latin typeface="Arial" pitchFamily="34" charset="0"/>
+                <a:ea typeface="Arial" pitchFamily="34" charset="-122"/>
+                <a:cs typeface="Arial" pitchFamily="34" charset="-120"/>
+              </a:rPr>
+              <a:t>R: Cronos Care tiene +50 residencias en México. Somos complementarios en expediente clínico, directamente superiores en ciclo operativo de ronda.</a:t>
+            </a:r>
+            <a:endParaRPr lang="en-US" sz="1200" dirty="0"/>
+          </a:p>
+        </p:txBody>
+      </p:sp>
+      <p:sp>
+        <p:nvSpPr>
+          <p:cNvPr id="20" name="Shape 18"/>
+          <p:cNvSpPr/>
+          <p:nvPr/>
+        </p:nvSpPr>
+        <p:spPr>
+          <a:xfrm>
+            <a:off x="457200" y="4745736"/>
+            <a:ext cx="8375904" cy="1051560"/>
+          </a:xfrm>
+          <a:prstGeom prst="roundRect">
+            <a:avLst>
+              <a:gd name="adj" fmla="val 8696"/>
+            </a:avLst>
+          </a:prstGeom>
+          <a:solidFill>
+            <a:srgbClr val="EFF6FF"/>
+          </a:solidFill>
+          <a:ln w="6350">
+            <a:solidFill>
+              <a:srgbClr val="E2E8F0"/>
+            </a:solidFill>
+            <a:prstDash val="solid"/>
+          </a:ln>
+        </p:spPr>
+      </p:sp>
+      <p:sp>
+        <p:nvSpPr>
+          <p:cNvPr id="21" name="Text 19"/>
+          <p:cNvSpPr/>
+          <p:nvPr/>
+        </p:nvSpPr>
+        <p:spPr>
+          <a:xfrm>
+            <a:off x="640080" y="4837176"/>
+            <a:ext cx="8010144" cy="329184"/>
+          </a:xfrm>
+          <a:prstGeom prst="rect">
+            <a:avLst/>
+          </a:prstGeom>
+          <a:noFill/>
+          <a:ln/>
+        </p:spPr>
+        <p:txBody>
+          <a:bodyPr wrap="square" rtlCol="0" anchor="ctr"/>
+          <a:lstStyle/>
+          <a:p>
+            <a:pPr indent="0" marL="0">
+              <a:buNone/>
+            </a:pPr>
+            <a:r>
+              <a:rPr lang="en-US" sz="1200" b="1" dirty="0">
+                <a:solidFill>
+                  <a:srgbClr val="3A6B96"/>
+                </a:solidFill>
+                <a:latin typeface="Arial" pitchFamily="34" charset="0"/>
+                <a:ea typeface="Arial" pitchFamily="34" charset="-122"/>
+                <a:cs typeface="Arial" pitchFamily="34" charset="-120"/>
+              </a:rPr>
+              <a:t>P: ¿Quién es el equipo?</a:t>
+            </a:r>
+            <a:endParaRPr lang="en-US" sz="1200" dirty="0"/>
+          </a:p>
+        </p:txBody>
+      </p:sp>
+      <p:sp>
+        <p:nvSpPr>
+          <p:cNvPr id="22" name="Text 20"/>
+          <p:cNvSpPr/>
+          <p:nvPr/>
+        </p:nvSpPr>
+        <p:spPr>
+          <a:xfrm>
+            <a:off x="640080" y="5184648"/>
+            <a:ext cx="8010144" cy="530352"/>
+          </a:xfrm>
+          <a:prstGeom prst="rect">
+            <a:avLst/>
+          </a:prstGeom>
+          <a:noFill/>
+          <a:ln/>
+        </p:spPr>
+        <p:txBody>
+          <a:bodyPr wrap="square" rtlCol="0" anchor="ctr"/>
+          <a:lstStyle/>
+          <a:p>
+            <a:pPr indent="0" marL="0">
+              <a:buNone/>
+            </a:pPr>
+            <a:r>
+              <a:rPr lang="en-US" sz="1200" dirty="0">
+                <a:solidFill>
+                  <a:srgbClr val="2D3748"/>
+                </a:solidFill>
+                <a:latin typeface="Arial" pitchFamily="34" charset="0"/>
+                <a:ea typeface="Arial" pitchFamily="34" charset="-122"/>
+                <a:cs typeface="Arial" pitchFamily="34" charset="-120"/>
+              </a:rPr>
+              <a:t>R: Proyecto individual — 5 roles, 8 fases con gate review en cada una. El método es la evidencia de colaboración estructurada.</a:t>
+            </a:r>
+            <a:endParaRPr lang="en-US" sz="1200" dirty="0"/>
+          </a:p>
+        </p:txBody>
+      </p:sp>
+      <p:sp>
+        <p:nvSpPr>
+          <p:cNvPr id="23" name="Text 21"/>
+          <p:cNvSpPr/>
+          <p:nvPr/>
+        </p:nvSpPr>
+        <p:spPr>
+          <a:xfrm>
+            <a:off x="457200" y="6291072"/>
+            <a:ext cx="8375904" cy="201168"/>
+          </a:xfrm>
+          <a:prstGeom prst="rect">
+            <a:avLst/>
+          </a:prstGeom>
+          <a:noFill/>
+          <a:ln/>
+        </p:spPr>
+        <p:txBody>
+          <a:bodyPr wrap="square" rtlCol="0" anchor="ctr"/>
+          <a:lstStyle/>
+          <a:p>
+            <a:pPr algn="ctr" indent="0" marL="0">
+              <a:buNone/>
+            </a:pPr>
+            <a:r>
+              <a:rPr lang="en-US" dirty="0">
+                <a:solidFill>
+                  <a:srgbClr val="718096"/>
+                </a:solidFill>
+                <a:latin typeface="Arial" pitchFamily="34" charset="0"/>
+                <a:ea typeface="Arial" pitchFamily="34" charset="-122"/>
+                <a:cs typeface="Arial" pitchFamily="34" charset="-120"/>
+              </a:rPr>
+              <a:t>MVP operacional · No dispositivo médico · Datos ficticios</a:t>
+            </a:r>
+            <a:endParaRPr lang="en-US" dirty="0"/>
+          </a:p>
+        </p:txBody>
+      </p:sp>
+    </p:spTree>
+  </p:cSld>
+  <p:clrMapOvr>
+    <a:masterClrMapping/>
+  </p:clrMapOvr>
+</p:sld>
+</file>
+
 <file path=ppt/slides/slide2.xml><?xml version="1.0" encoding="utf-8"?>
 <p:sld xmlns:a="http://schemas.openxmlformats.org/drawingml/2006/main" xmlns:r="http://schemas.openxmlformats.org/officeDocument/2006/relationships" xmlns:p="http://schemas.openxmlformats.org/presentationml/2006/main">
   <p:cSld name="Slide 2">

--- a/business/CareSignal_Pitch_Deck.pptx
+++ b/business/CareSignal_Pitch_Deck.pptx
@@ -19,9 +19,10 @@
     <p:sldId id="267" r:id="rId13"/>
     <p:sldId id="268" r:id="rId14"/>
     <p:sldId id="269" r:id="rId15"/>
+    <p:sldId id="270" r:id="rId16"/>
   </p:sldIdLst>
   <p:notesMasterIdLst>
-    <p:notesMasterId r:id="rId16"/>
+    <p:notesMasterId r:id="rId17"/>
   </p:notesMasterIdLst>
   <p:sldSz cx="12192000" cy="6858000"/>
   <p:notesSz cx="6858000" cy="12192000"/>
@@ -979,6 +980,94 @@
             <a:fld id="{F7021451-1387-4CA6-816F-3879F97B5CBC}" type="slidenum">
               <a:rPr lang="en-US"/>
               <a:t>14</a:t>
+            </a:fld>
+            <a:endParaRPr lang="en-US"/>
+          </a:p>
+        </p:txBody>
+      </p:sp>
+    </p:spTree>
+    <p:extLst>
+      <p:ext uri="{BB962C8B-B14F-4D97-AF65-F5344CB8AC3E}">
+        <p14:creationId xmlns:p14="http://schemas.microsoft.com/office/powerpoint/2010/main" val="1024086991"/>
+      </p:ext>
+    </p:extLst>
+  </p:cSld>
+  <p:clrMapOvr>
+    <a:masterClrMapping/>
+  </p:clrMapOvr>
+</p:notes>
+</file>
+
+<file path=ppt/notesSlides/notesSlide15.xml><?xml version="1.0" encoding="utf-8"?>
+<p:notes xmlns:a="http://schemas.openxmlformats.org/drawingml/2006/main" xmlns:r="http://schemas.openxmlformats.org/officeDocument/2006/relationships" xmlns:p="http://schemas.openxmlformats.org/presentationml/2006/main">
+  <p:cSld>
+    <p:spTree>
+      <p:nvGrpSpPr>
+        <p:cNvPr id="1" name=""/>
+        <p:cNvGrpSpPr/>
+        <p:nvPr/>
+      </p:nvGrpSpPr>
+      <p:grpSpPr>
+        <a:xfrm>
+          <a:off x="0" y="0"/>
+          <a:ext cx="0" cy="0"/>
+          <a:chOff x="0" y="0"/>
+          <a:chExt cx="0" cy="0"/>
+        </a:xfrm>
+      </p:grpSpPr>
+      <p:sp>
+        <p:nvSpPr>
+          <p:cNvPr id="2" name="Slide Image Placeholder 1"/>
+          <p:cNvSpPr>
+            <a:spLocks noGrp="1" noRot="1" noChangeAspect="1"/>
+          </p:cNvSpPr>
+          <p:nvPr>
+            <p:ph type="sldImg"/>
+          </p:nvPr>
+        </p:nvSpPr>
+        <p:spPr/>
+      </p:sp>
+      <p:sp>
+        <p:nvSpPr>
+          <p:cNvPr id="3" name="Notes Placeholder 2"/>
+          <p:cNvSpPr>
+            <a:spLocks noGrp="1"/>
+          </p:cNvSpPr>
+          <p:nvPr>
+            <p:ph type="body" idx="1"/>
+          </p:nvPr>
+        </p:nvSpPr>
+        <p:spPr/>
+        <p:txBody>
+          <a:bodyPr/>
+          <a:lstStyle/>
+          <a:p>
+            <a:r>
+              <a:rPr lang="en-US" dirty="0"/>
+              <a:t/>
+            </a:r>
+            <a:endParaRPr lang="en-US" dirty="0"/>
+          </a:p>
+        </p:txBody>
+      </p:sp>
+      <p:sp>
+        <p:nvSpPr>
+          <p:cNvPr id="4" name="Slide Number Placeholder 3"/>
+          <p:cNvSpPr>
+            <a:spLocks noGrp="1"/>
+          </p:cNvSpPr>
+          <p:nvPr>
+            <p:ph type="sldNum" sz="quarter" idx="10"/>
+          </p:nvPr>
+        </p:nvSpPr>
+        <p:spPr/>
+        <p:txBody>
+          <a:bodyPr/>
+          <a:lstStyle/>
+          <a:p>
+            <a:fld id="{F7021451-1387-4CA6-816F-3879F97B5CBC}" type="slidenum">
+              <a:rPr lang="en-US"/>
+              <a:t>15</a:t>
             </a:fld>
             <a:endParaRPr lang="en-US"/>
           </a:p>
@@ -4625,7 +4714,7 @@
                 <a:ea typeface="Arial" pitchFamily="34" charset="-122"/>
                 <a:cs typeface="Arial" pitchFamily="34" charset="-120"/>
               </a:rPr>
-              <a:t>SaaS B2B · por residencia / mes · margen bruto &gt; 97 %</a:t>
+              <a:t>Freemium + SaaS B2B · por residencia / mes · margen bruto &gt; 80 %</a:t>
             </a:r>
             <a:endParaRPr lang="en-US" dirty="0"/>
           </a:p>
@@ -4662,12 +4751,335 @@
         </p:nvSpPr>
         <p:spPr>
           <a:xfrm>
-            <a:off x="457200" y="1261872"/>
-            <a:ext cx="2633472" cy="4206240"/>
+            <a:off x="164592" y="1261872"/>
+            <a:ext cx="2011680" cy="4206240"/>
           </a:xfrm>
           <a:prstGeom prst="roundRect">
             <a:avLst>
-              <a:gd name="adj" fmla="val 4167"/>
+              <a:gd name="adj" fmla="val 5455"/>
+            </a:avLst>
+          </a:prstGeom>
+          <a:solidFill>
+            <a:srgbClr val="F0FAF4"/>
+          </a:solidFill>
+          <a:ln w="6350">
+            <a:solidFill>
+              <a:srgbClr val="E2E8F0"/>
+            </a:solidFill>
+            <a:prstDash val="solid"/>
+          </a:ln>
+        </p:spPr>
+      </p:sp>
+      <p:sp>
+        <p:nvSpPr>
+          <p:cNvPr id="12" name="Text 10"/>
+          <p:cNvSpPr/>
+          <p:nvPr/>
+        </p:nvSpPr>
+        <p:spPr>
+          <a:xfrm>
+            <a:off x="164592" y="1417320"/>
+            <a:ext cx="2011680" cy="365760"/>
+          </a:xfrm>
+          <a:prstGeom prst="rect">
+            <a:avLst/>
+          </a:prstGeom>
+          <a:noFill/>
+          <a:ln/>
+        </p:spPr>
+        <p:txBody>
+          <a:bodyPr wrap="square" rtlCol="0" anchor="ctr"/>
+          <a:lstStyle/>
+          <a:p>
+            <a:pPr algn="ctr" indent="0" marL="0">
+              <a:buNone/>
+            </a:pPr>
+            <a:r>
+              <a:rPr lang="en-US" sz="1100" b="1" dirty="0">
+                <a:solidFill>
+                  <a:srgbClr val="2D3748"/>
+                </a:solidFill>
+                <a:latin typeface="Arial" pitchFamily="34" charset="0"/>
+                <a:ea typeface="Arial" pitchFamily="34" charset="-122"/>
+                <a:cs typeface="Arial" pitchFamily="34" charset="-120"/>
+              </a:rPr>
+              <a:t>Demo Operacional</a:t>
+            </a:r>
+            <a:endParaRPr lang="en-US" sz="1100" dirty="0"/>
+          </a:p>
+        </p:txBody>
+      </p:sp>
+      <p:sp>
+        <p:nvSpPr>
+          <p:cNvPr id="13" name="Text 11"/>
+          <p:cNvSpPr/>
+          <p:nvPr/>
+        </p:nvSpPr>
+        <p:spPr>
+          <a:xfrm>
+            <a:off x="164592" y="1828800"/>
+            <a:ext cx="2011680" cy="594360"/>
+          </a:xfrm>
+          <a:prstGeom prst="rect">
+            <a:avLst/>
+          </a:prstGeom>
+          <a:noFill/>
+          <a:ln/>
+        </p:spPr>
+        <p:txBody>
+          <a:bodyPr wrap="square" rtlCol="0" anchor="ctr"/>
+          <a:lstStyle/>
+          <a:p>
+            <a:pPr algn="ctr" indent="0" marL="0">
+              <a:buNone/>
+            </a:pPr>
+            <a:r>
+              <a:rPr lang="en-US" sz="2600" b="1" dirty="0">
+                <a:solidFill>
+                  <a:srgbClr val="1A6B3C"/>
+                </a:solidFill>
+                <a:latin typeface="Arial" pitchFamily="34" charset="0"/>
+                <a:ea typeface="Arial" pitchFamily="34" charset="-122"/>
+                <a:cs typeface="Arial" pitchFamily="34" charset="-120"/>
+              </a:rPr>
+              <a:t>$0</a:t>
+            </a:r>
+            <a:endParaRPr lang="en-US" sz="2600" dirty="0"/>
+          </a:p>
+        </p:txBody>
+      </p:sp>
+      <p:sp>
+        <p:nvSpPr>
+          <p:cNvPr id="14" name="Text 12"/>
+          <p:cNvSpPr/>
+          <p:nvPr/>
+        </p:nvSpPr>
+        <p:spPr>
+          <a:xfrm>
+            <a:off x="164592" y="2423160"/>
+            <a:ext cx="2011680" cy="320040"/>
+          </a:xfrm>
+          <a:prstGeom prst="rect">
+            <a:avLst/>
+          </a:prstGeom>
+          <a:noFill/>
+          <a:ln/>
+        </p:spPr>
+        <p:txBody>
+          <a:bodyPr wrap="square" rtlCol="0" anchor="ctr"/>
+          <a:lstStyle/>
+          <a:p>
+            <a:pPr algn="ctr" indent="0" marL="0">
+              <a:buNone/>
+            </a:pPr>
+            <a:r>
+              <a:rPr lang="en-US" sz="900" dirty="0">
+                <a:solidFill>
+                  <a:srgbClr val="718096"/>
+                </a:solidFill>
+                <a:latin typeface="Arial" pitchFamily="34" charset="0"/>
+                <a:ea typeface="Arial" pitchFamily="34" charset="-122"/>
+                <a:cs typeface="Arial" pitchFamily="34" charset="-120"/>
+              </a:rPr>
+              <a:t>Sin tarjeta · sin límite de tiempo</a:t>
+            </a:r>
+            <a:endParaRPr lang="en-US" sz="900" dirty="0"/>
+          </a:p>
+        </p:txBody>
+      </p:sp>
+      <p:sp>
+        <p:nvSpPr>
+          <p:cNvPr id="15" name="Shape 13"/>
+          <p:cNvSpPr/>
+          <p:nvPr/>
+        </p:nvSpPr>
+        <p:spPr>
+          <a:xfrm>
+            <a:off x="301752" y="2816352"/>
+            <a:ext cx="1737360" cy="0"/>
+          </a:xfrm>
+          <a:prstGeom prst="line">
+            <a:avLst/>
+          </a:prstGeom>
+          <a:noFill/>
+          <a:ln w="6350">
+            <a:solidFill>
+              <a:srgbClr val="E2E8F0"/>
+            </a:solidFill>
+            <a:prstDash val="solid"/>
+          </a:ln>
+        </p:spPr>
+      </p:sp>
+      <p:sp>
+        <p:nvSpPr>
+          <p:cNvPr id="16" name="Text 14"/>
+          <p:cNvSpPr/>
+          <p:nvPr/>
+        </p:nvSpPr>
+        <p:spPr>
+          <a:xfrm>
+            <a:off x="256032" y="2926080"/>
+            <a:ext cx="1828800" cy="420624"/>
+          </a:xfrm>
+          <a:prstGeom prst="rect">
+            <a:avLst/>
+          </a:prstGeom>
+          <a:noFill/>
+          <a:ln/>
+        </p:spPr>
+        <p:txBody>
+          <a:bodyPr wrap="square" rtlCol="0" anchor="ctr"/>
+          <a:lstStyle/>
+          <a:p>
+            <a:pPr algn="ctr" indent="0" marL="0">
+              <a:buNone/>
+            </a:pPr>
+            <a:r>
+              <a:rPr lang="en-US" sz="1000" dirty="0">
+                <a:solidFill>
+                  <a:srgbClr val="2D3748"/>
+                </a:solidFill>
+                <a:latin typeface="Arial" pitchFamily="34" charset="0"/>
+                <a:ea typeface="Arial" pitchFamily="34" charset="-122"/>
+                <a:cs typeface="Arial" pitchFamily="34" charset="-120"/>
+              </a:rPr>
+              <a:t>Hasta 8 residentes</a:t>
+            </a:r>
+            <a:endParaRPr lang="en-US" sz="1000" dirty="0"/>
+          </a:p>
+        </p:txBody>
+      </p:sp>
+      <p:sp>
+        <p:nvSpPr>
+          <p:cNvPr id="17" name="Text 15"/>
+          <p:cNvSpPr/>
+          <p:nvPr/>
+        </p:nvSpPr>
+        <p:spPr>
+          <a:xfrm>
+            <a:off x="256032" y="3419856"/>
+            <a:ext cx="1828800" cy="420624"/>
+          </a:xfrm>
+          <a:prstGeom prst="rect">
+            <a:avLst/>
+          </a:prstGeom>
+          <a:noFill/>
+          <a:ln/>
+        </p:spPr>
+        <p:txBody>
+          <a:bodyPr wrap="square" rtlCol="0" anchor="ctr"/>
+          <a:lstStyle/>
+          <a:p>
+            <a:pPr algn="ctr" indent="0" marL="0">
+              <a:buNone/>
+            </a:pPr>
+            <a:r>
+              <a:rPr lang="en-US" sz="1000" dirty="0">
+                <a:solidFill>
+                  <a:srgbClr val="2D3748"/>
+                </a:solidFill>
+                <a:latin typeface="Arial" pitchFamily="34" charset="0"/>
+                <a:ea typeface="Arial" pitchFamily="34" charset="-122"/>
+                <a:cs typeface="Arial" pitchFamily="34" charset="-120"/>
+              </a:rPr>
+              <a:t>1 usuario activo</a:t>
+            </a:r>
+            <a:endParaRPr lang="en-US" sz="1000" dirty="0"/>
+          </a:p>
+        </p:txBody>
+      </p:sp>
+      <p:sp>
+        <p:nvSpPr>
+          <p:cNvPr id="18" name="Text 16"/>
+          <p:cNvSpPr/>
+          <p:nvPr/>
+        </p:nvSpPr>
+        <p:spPr>
+          <a:xfrm>
+            <a:off x="256032" y="3913632"/>
+            <a:ext cx="1828800" cy="420624"/>
+          </a:xfrm>
+          <a:prstGeom prst="rect">
+            <a:avLst/>
+          </a:prstGeom>
+          <a:noFill/>
+          <a:ln/>
+        </p:spPr>
+        <p:txBody>
+          <a:bodyPr wrap="square" rtlCol="0" anchor="ctr"/>
+          <a:lstStyle/>
+          <a:p>
+            <a:pPr algn="ctr" indent="0" marL="0">
+              <a:buNone/>
+            </a:pPr>
+            <a:r>
+              <a:rPr lang="en-US" sz="1000" dirty="0">
+                <a:solidFill>
+                  <a:srgbClr val="2D3748"/>
+                </a:solidFill>
+                <a:latin typeface="Arial" pitchFamily="34" charset="0"/>
+                <a:ea typeface="Arial" pitchFamily="34" charset="-122"/>
+                <a:cs typeface="Arial" pitchFamily="34" charset="-120"/>
+              </a:rPr>
+              <a:t>Rondas básicas</a:t>
+            </a:r>
+            <a:endParaRPr lang="en-US" sz="1000" dirty="0"/>
+          </a:p>
+        </p:txBody>
+      </p:sp>
+      <p:sp>
+        <p:nvSpPr>
+          <p:cNvPr id="19" name="Text 17"/>
+          <p:cNvSpPr/>
+          <p:nvPr/>
+        </p:nvSpPr>
+        <p:spPr>
+          <a:xfrm>
+            <a:off x="256032" y="4407408"/>
+            <a:ext cx="1828800" cy="420624"/>
+          </a:xfrm>
+          <a:prstGeom prst="rect">
+            <a:avLst/>
+          </a:prstGeom>
+          <a:noFill/>
+          <a:ln/>
+        </p:spPr>
+        <p:txBody>
+          <a:bodyPr wrap="square" rtlCol="0" anchor="ctr"/>
+          <a:lstStyle/>
+          <a:p>
+            <a:pPr algn="ctr" indent="0" marL="0">
+              <a:buNone/>
+            </a:pPr>
+            <a:r>
+              <a:rPr lang="en-US" sz="1000" b="1" dirty="0">
+                <a:solidFill>
+                  <a:srgbClr val="5B8DB8"/>
+                </a:solidFill>
+                <a:latin typeface="Arial" pitchFamily="34" charset="0"/>
+                <a:ea typeface="Arial" pitchFamily="34" charset="-122"/>
+                <a:cs typeface="Arial" pitchFamily="34" charset="-120"/>
+              </a:rPr>
+              <a:t>Sin responsabilidad legal</a:t>
+            </a:r>
+            <a:endParaRPr lang="en-US" sz="1000" dirty="0"/>
+          </a:p>
+        </p:txBody>
+      </p:sp>
+      <p:sp>
+        <p:nvSpPr>
+          <p:cNvPr id="20" name="Shape 18"/>
+          <p:cNvSpPr/>
+          <p:nvPr/>
+        </p:nvSpPr>
+        <p:spPr>
+          <a:xfrm>
+            <a:off x="2340864" y="1261872"/>
+            <a:ext cx="2011680" cy="4206240"/>
+          </a:xfrm>
+          <a:prstGeom prst="roundRect">
+            <a:avLst>
+              <a:gd name="adj" fmla="val 5455"/>
             </a:avLst>
           </a:prstGeom>
           <a:solidFill>
@@ -4683,30 +5095,30 @@
       </p:sp>
       <p:sp>
         <p:nvSpPr>
-          <p:cNvPr id="12" name="Text 10"/>
-          <p:cNvSpPr/>
-          <p:nvPr/>
-        </p:nvSpPr>
-        <p:spPr>
-          <a:xfrm>
-            <a:off x="457200" y="1417320"/>
-            <a:ext cx="2633472" cy="365760"/>
-          </a:xfrm>
-          <a:prstGeom prst="rect">
-            <a:avLst/>
-          </a:prstGeom>
-          <a:noFill/>
-          <a:ln/>
-        </p:spPr>
-        <p:txBody>
-          <a:bodyPr wrap="square" rtlCol="0" anchor="ctr"/>
-          <a:lstStyle/>
-          <a:p>
-            <a:pPr algn="ctr" indent="0" marL="0">
-              <a:buNone/>
-            </a:pPr>
-            <a:r>
-              <a:rPr lang="en-US" sz="1500" b="1" dirty="0">
+          <p:cNvPr id="21" name="Text 19"/>
+          <p:cNvSpPr/>
+          <p:nvPr/>
+        </p:nvSpPr>
+        <p:spPr>
+          <a:xfrm>
+            <a:off x="2340864" y="1417320"/>
+            <a:ext cx="2011680" cy="365760"/>
+          </a:xfrm>
+          <a:prstGeom prst="rect">
+            <a:avLst/>
+          </a:prstGeom>
+          <a:noFill/>
+          <a:ln/>
+        </p:spPr>
+        <p:txBody>
+          <a:bodyPr wrap="square" rtlCol="0" anchor="ctr"/>
+          <a:lstStyle/>
+          <a:p>
+            <a:pPr algn="ctr" indent="0" marL="0">
+              <a:buNone/>
+            </a:pPr>
+            <a:r>
+              <a:rPr lang="en-US" sz="1100" b="1" dirty="0">
                 <a:solidFill>
                   <a:srgbClr val="2D3748"/>
                 </a:solidFill>
@@ -4716,36 +5128,36 @@
               </a:rPr>
               <a:t>Esencial</a:t>
             </a:r>
-            <a:endParaRPr lang="en-US" sz="1500" dirty="0"/>
-          </a:p>
-        </p:txBody>
-      </p:sp>
-      <p:sp>
-        <p:nvSpPr>
-          <p:cNvPr id="13" name="Text 11"/>
-          <p:cNvSpPr/>
-          <p:nvPr/>
-        </p:nvSpPr>
-        <p:spPr>
-          <a:xfrm>
-            <a:off x="457200" y="1828800"/>
-            <a:ext cx="2633472" cy="640080"/>
-          </a:xfrm>
-          <a:prstGeom prst="rect">
-            <a:avLst/>
-          </a:prstGeom>
-          <a:noFill/>
-          <a:ln/>
-        </p:spPr>
-        <p:txBody>
-          <a:bodyPr wrap="square" rtlCol="0" anchor="ctr"/>
-          <a:lstStyle/>
-          <a:p>
-            <a:pPr algn="ctr" indent="0" marL="0">
-              <a:buNone/>
-            </a:pPr>
-            <a:r>
-              <a:rPr lang="en-US" sz="3200" b="1" dirty="0">
+            <a:endParaRPr lang="en-US" sz="1100" dirty="0"/>
+          </a:p>
+        </p:txBody>
+      </p:sp>
+      <p:sp>
+        <p:nvSpPr>
+          <p:cNvPr id="22" name="Text 20"/>
+          <p:cNvSpPr/>
+          <p:nvPr/>
+        </p:nvSpPr>
+        <p:spPr>
+          <a:xfrm>
+            <a:off x="2340864" y="1828800"/>
+            <a:ext cx="2011680" cy="594360"/>
+          </a:xfrm>
+          <a:prstGeom prst="rect">
+            <a:avLst/>
+          </a:prstGeom>
+          <a:noFill/>
+          <a:ln/>
+        </p:spPr>
+        <p:txBody>
+          <a:bodyPr wrap="square" rtlCol="0" anchor="ctr"/>
+          <a:lstStyle/>
+          <a:p>
+            <a:pPr algn="ctr" indent="0" marL="0">
+              <a:buNone/>
+            </a:pPr>
+            <a:r>
+              <a:rPr lang="en-US" sz="2600" b="1" dirty="0">
                 <a:solidFill>
                   <a:srgbClr val="5B8DB8"/>
                 </a:solidFill>
@@ -4753,38 +5165,38 @@
                 <a:ea typeface="Arial" pitchFamily="34" charset="-122"/>
                 <a:cs typeface="Arial" pitchFamily="34" charset="-120"/>
               </a:rPr>
-              <a:t>$1,490</a:t>
-            </a:r>
-            <a:endParaRPr lang="en-US" sz="3200" dirty="0"/>
-          </a:p>
-        </p:txBody>
-      </p:sp>
-      <p:sp>
-        <p:nvSpPr>
-          <p:cNvPr id="14" name="Text 12"/>
-          <p:cNvSpPr/>
-          <p:nvPr/>
-        </p:nvSpPr>
-        <p:spPr>
-          <a:xfrm>
-            <a:off x="457200" y="2487168"/>
-            <a:ext cx="2633472" cy="274320"/>
-          </a:xfrm>
-          <a:prstGeom prst="rect">
-            <a:avLst/>
-          </a:prstGeom>
-          <a:noFill/>
-          <a:ln/>
-        </p:spPr>
-        <p:txBody>
-          <a:bodyPr wrap="square" rtlCol="0" anchor="ctr"/>
-          <a:lstStyle/>
-          <a:p>
-            <a:pPr algn="ctr" indent="0" marL="0">
-              <a:buNone/>
-            </a:pPr>
-            <a:r>
-              <a:rPr lang="en-US" sz="1100" dirty="0">
+              <a:t>$1,990</a:t>
+            </a:r>
+            <a:endParaRPr lang="en-US" sz="2600" dirty="0"/>
+          </a:p>
+        </p:txBody>
+      </p:sp>
+      <p:sp>
+        <p:nvSpPr>
+          <p:cNvPr id="23" name="Text 21"/>
+          <p:cNvSpPr/>
+          <p:nvPr/>
+        </p:nvSpPr>
+        <p:spPr>
+          <a:xfrm>
+            <a:off x="2340864" y="2423160"/>
+            <a:ext cx="2011680" cy="320040"/>
+          </a:xfrm>
+          <a:prstGeom prst="rect">
+            <a:avLst/>
+          </a:prstGeom>
+          <a:noFill/>
+          <a:ln/>
+        </p:spPr>
+        <p:txBody>
+          <a:bodyPr wrap="square" rtlCol="0" anchor="ctr"/>
+          <a:lstStyle/>
+          <a:p>
+            <a:pPr algn="ctr" indent="0" marL="0">
+              <a:buNone/>
+            </a:pPr>
+            <a:r>
+              <a:rPr lang="en-US" sz="900" dirty="0">
                 <a:solidFill>
                   <a:srgbClr val="718096"/>
                 </a:solidFill>
@@ -4794,20 +5206,20 @@
               </a:rPr>
               <a:t>MXN / mes</a:t>
             </a:r>
-            <a:endParaRPr lang="en-US" sz="1100" dirty="0"/>
-          </a:p>
-        </p:txBody>
-      </p:sp>
-      <p:sp>
-        <p:nvSpPr>
-          <p:cNvPr id="15" name="Shape 13"/>
-          <p:cNvSpPr/>
-          <p:nvPr/>
-        </p:nvSpPr>
-        <p:spPr>
-          <a:xfrm>
-            <a:off x="640080" y="2834640"/>
-            <a:ext cx="2267712" cy="0"/>
+            <a:endParaRPr lang="en-US" sz="900" dirty="0"/>
+          </a:p>
+        </p:txBody>
+      </p:sp>
+      <p:sp>
+        <p:nvSpPr>
+          <p:cNvPr id="24" name="Shape 22"/>
+          <p:cNvSpPr/>
+          <p:nvPr/>
+        </p:nvSpPr>
+        <p:spPr>
+          <a:xfrm>
+            <a:off x="2478024" y="2816352"/>
+            <a:ext cx="1737360" cy="0"/>
           </a:xfrm>
           <a:prstGeom prst="line">
             <a:avLst/>
@@ -4823,30 +5235,30 @@
       </p:sp>
       <p:sp>
         <p:nvSpPr>
-          <p:cNvPr id="16" name="Text 14"/>
-          <p:cNvSpPr/>
-          <p:nvPr/>
-        </p:nvSpPr>
-        <p:spPr>
-          <a:xfrm>
-            <a:off x="594360" y="2944368"/>
-            <a:ext cx="2359152" cy="420624"/>
-          </a:xfrm>
-          <a:prstGeom prst="rect">
-            <a:avLst/>
-          </a:prstGeom>
-          <a:noFill/>
-          <a:ln/>
-        </p:spPr>
-        <p:txBody>
-          <a:bodyPr wrap="square" rtlCol="0" anchor="ctr"/>
-          <a:lstStyle/>
-          <a:p>
-            <a:pPr algn="ctr" indent="0" marL="0">
-              <a:buNone/>
-            </a:pPr>
-            <a:r>
-              <a:rPr lang="en-US" sz="1150" dirty="0">
+          <p:cNvPr id="25" name="Text 23"/>
+          <p:cNvSpPr/>
+          <p:nvPr/>
+        </p:nvSpPr>
+        <p:spPr>
+          <a:xfrm>
+            <a:off x="2432304" y="2926080"/>
+            <a:ext cx="1828800" cy="420624"/>
+          </a:xfrm>
+          <a:prstGeom prst="rect">
+            <a:avLst/>
+          </a:prstGeom>
+          <a:noFill/>
+          <a:ln/>
+        </p:spPr>
+        <p:txBody>
+          <a:bodyPr wrap="square" rtlCol="0" anchor="ctr"/>
+          <a:lstStyle/>
+          <a:p>
+            <a:pPr algn="ctr" indent="0" marL="0">
+              <a:buNone/>
+            </a:pPr>
+            <a:r>
+              <a:rPr lang="en-US" sz="1000" dirty="0">
                 <a:solidFill>
                   <a:srgbClr val="2D3748"/>
                 </a:solidFill>
@@ -4854,38 +5266,38 @@
                 <a:ea typeface="Arial" pitchFamily="34" charset="-122"/>
                 <a:cs typeface="Arial" pitchFamily="34" charset="-120"/>
               </a:rPr>
-              <a:t>Hasta 25 residentes</a:t>
-            </a:r>
-            <a:endParaRPr lang="en-US" sz="1150" dirty="0"/>
-          </a:p>
-        </p:txBody>
-      </p:sp>
-      <p:sp>
-        <p:nvSpPr>
-          <p:cNvPr id="17" name="Text 15"/>
-          <p:cNvSpPr/>
-          <p:nvPr/>
-        </p:nvSpPr>
-        <p:spPr>
-          <a:xfrm>
-            <a:off x="594360" y="3438144"/>
-            <a:ext cx="2359152" cy="420624"/>
-          </a:xfrm>
-          <a:prstGeom prst="rect">
-            <a:avLst/>
-          </a:prstGeom>
-          <a:noFill/>
-          <a:ln/>
-        </p:spPr>
-        <p:txBody>
-          <a:bodyPr wrap="square" rtlCol="0" anchor="ctr"/>
-          <a:lstStyle/>
-          <a:p>
-            <a:pPr algn="ctr" indent="0" marL="0">
-              <a:buNone/>
-            </a:pPr>
-            <a:r>
-              <a:rPr lang="en-US" sz="1150" dirty="0">
+              <a:t>Hasta 30 residentes</a:t>
+            </a:r>
+            <a:endParaRPr lang="en-US" sz="1000" dirty="0"/>
+          </a:p>
+        </p:txBody>
+      </p:sp>
+      <p:sp>
+        <p:nvSpPr>
+          <p:cNvPr id="26" name="Text 24"/>
+          <p:cNvSpPr/>
+          <p:nvPr/>
+        </p:nvSpPr>
+        <p:spPr>
+          <a:xfrm>
+            <a:off x="2432304" y="3419856"/>
+            <a:ext cx="1828800" cy="420624"/>
+          </a:xfrm>
+          <a:prstGeom prst="rect">
+            <a:avLst/>
+          </a:prstGeom>
+          <a:noFill/>
+          <a:ln/>
+        </p:spPr>
+        <p:txBody>
+          <a:bodyPr wrap="square" rtlCol="0" anchor="ctr"/>
+          <a:lstStyle/>
+          <a:p>
+            <a:pPr algn="ctr" indent="0" marL="0">
+              <a:buNone/>
+            </a:pPr>
+            <a:r>
+              <a:rPr lang="en-US" sz="1000" dirty="0">
                 <a:solidFill>
                   <a:srgbClr val="2D3748"/>
                 </a:solidFill>
@@ -4893,38 +5305,38 @@
                 <a:ea typeface="Arial" pitchFamily="34" charset="-122"/>
                 <a:cs typeface="Arial" pitchFamily="34" charset="-120"/>
               </a:rPr>
-              <a:t>1 supervisor</a:t>
-            </a:r>
-            <a:endParaRPr lang="en-US" sz="1150" dirty="0"/>
-          </a:p>
-        </p:txBody>
-      </p:sp>
-      <p:sp>
-        <p:nvSpPr>
-          <p:cNvPr id="18" name="Text 16"/>
-          <p:cNvSpPr/>
-          <p:nvPr/>
-        </p:nvSpPr>
-        <p:spPr>
-          <a:xfrm>
-            <a:off x="594360" y="3931920"/>
-            <a:ext cx="2359152" cy="420624"/>
-          </a:xfrm>
-          <a:prstGeom prst="rect">
-            <a:avLst/>
-          </a:prstGeom>
-          <a:noFill/>
-          <a:ln/>
-        </p:spPr>
-        <p:txBody>
-          <a:bodyPr wrap="square" rtlCol="0" anchor="ctr"/>
-          <a:lstStyle/>
-          <a:p>
-            <a:pPr algn="ctr" indent="0" marL="0">
-              <a:buNone/>
-            </a:pPr>
-            <a:r>
-              <a:rPr lang="en-US" sz="1150" dirty="0">
+              <a:t>3 usuarios</a:t>
+            </a:r>
+            <a:endParaRPr lang="en-US" sz="1000" dirty="0"/>
+          </a:p>
+        </p:txBody>
+      </p:sp>
+      <p:sp>
+        <p:nvSpPr>
+          <p:cNvPr id="27" name="Text 25"/>
+          <p:cNvSpPr/>
+          <p:nvPr/>
+        </p:nvSpPr>
+        <p:spPr>
+          <a:xfrm>
+            <a:off x="2432304" y="3913632"/>
+            <a:ext cx="1828800" cy="420624"/>
+          </a:xfrm>
+          <a:prstGeom prst="rect">
+            <a:avLst/>
+          </a:prstGeom>
+          <a:noFill/>
+          <a:ln/>
+        </p:spPr>
+        <p:txBody>
+          <a:bodyPr wrap="square" rtlCol="0" anchor="ctr"/>
+          <a:lstStyle/>
+          <a:p>
+            <a:pPr algn="ctr" indent="0" marL="0">
+              <a:buNone/>
+            </a:pPr>
+            <a:r>
+              <a:rPr lang="en-US" sz="1000" dirty="0">
                 <a:solidFill>
                   <a:srgbClr val="2D3748"/>
                 </a:solidFill>
@@ -4932,38 +5344,38 @@
                 <a:ea typeface="Arial" pitchFamily="34" charset="-122"/>
                 <a:cs typeface="Arial" pitchFamily="34" charset="-120"/>
               </a:rPr>
-              <a:t>Hasta 5 cuidadores</a:t>
-            </a:r>
-            <a:endParaRPr lang="en-US" sz="1150" dirty="0"/>
-          </a:p>
-        </p:txBody>
-      </p:sp>
-      <p:sp>
-        <p:nvSpPr>
-          <p:cNvPr id="19" name="Text 17"/>
-          <p:cNvSpPr/>
-          <p:nvPr/>
-        </p:nvSpPr>
-        <p:spPr>
-          <a:xfrm>
-            <a:off x="594360" y="4425696"/>
-            <a:ext cx="2359152" cy="420624"/>
-          </a:xfrm>
-          <a:prstGeom prst="rect">
-            <a:avLst/>
-          </a:prstGeom>
-          <a:noFill/>
-          <a:ln/>
-        </p:spPr>
-        <p:txBody>
-          <a:bodyPr wrap="square" rtlCol="0" anchor="ctr"/>
-          <a:lstStyle/>
-          <a:p>
-            <a:pPr algn="ctr" indent="0" marL="0">
-              <a:buNone/>
-            </a:pPr>
-            <a:r>
-              <a:rPr lang="en-US" sz="1150" b="1" dirty="0">
+              <a:t>Alertas + auditoría</a:t>
+            </a:r>
+            <a:endParaRPr lang="en-US" sz="1000" dirty="0"/>
+          </a:p>
+        </p:txBody>
+      </p:sp>
+      <p:sp>
+        <p:nvSpPr>
+          <p:cNvPr id="28" name="Text 26"/>
+          <p:cNvSpPr/>
+          <p:nvPr/>
+        </p:nvSpPr>
+        <p:spPr>
+          <a:xfrm>
+            <a:off x="2432304" y="4407408"/>
+            <a:ext cx="1828800" cy="420624"/>
+          </a:xfrm>
+          <a:prstGeom prst="rect">
+            <a:avLst/>
+          </a:prstGeom>
+          <a:noFill/>
+          <a:ln/>
+        </p:spPr>
+        <p:txBody>
+          <a:bodyPr wrap="square" rtlCol="0" anchor="ctr"/>
+          <a:lstStyle/>
+          <a:p>
+            <a:pPr algn="ctr" indent="0" marL="0">
+              <a:buNone/>
+            </a:pPr>
+            <a:r>
+              <a:rPr lang="en-US" sz="1000" b="1" dirty="0">
                 <a:solidFill>
                   <a:srgbClr val="5B8DB8"/>
                 </a:solidFill>
@@ -4973,24 +5385,24 @@
               </a:rPr>
               <a:t>Residencias pequeñas</a:t>
             </a:r>
-            <a:endParaRPr lang="en-US" sz="1150" dirty="0"/>
-          </a:p>
-        </p:txBody>
-      </p:sp>
-      <p:sp>
-        <p:nvSpPr>
-          <p:cNvPr id="20" name="Shape 18"/>
-          <p:cNvSpPr/>
-          <p:nvPr/>
-        </p:nvSpPr>
-        <p:spPr>
-          <a:xfrm>
-            <a:off x="3273552" y="1261872"/>
-            <a:ext cx="2633472" cy="4206240"/>
+            <a:endParaRPr lang="en-US" sz="1000" dirty="0"/>
+          </a:p>
+        </p:txBody>
+      </p:sp>
+      <p:sp>
+        <p:nvSpPr>
+          <p:cNvPr id="29" name="Shape 27"/>
+          <p:cNvSpPr/>
+          <p:nvPr/>
+        </p:nvSpPr>
+        <p:spPr>
+          <a:xfrm>
+            <a:off x="4517136" y="1261872"/>
+            <a:ext cx="2011680" cy="4206240"/>
           </a:xfrm>
           <a:prstGeom prst="roundRect">
             <a:avLst>
-              <a:gd name="adj" fmla="val 4167"/>
+              <a:gd name="adj" fmla="val 5455"/>
             </a:avLst>
           </a:prstGeom>
           <a:solidFill>
@@ -5006,14 +5418,14 @@
       </p:sp>
       <p:sp>
         <p:nvSpPr>
-          <p:cNvPr id="21" name="Shape 19"/>
-          <p:cNvSpPr/>
-          <p:nvPr/>
-        </p:nvSpPr>
-        <p:spPr>
-          <a:xfrm>
-            <a:off x="3639312" y="1188720"/>
-            <a:ext cx="1874520" cy="292608"/>
+          <p:cNvPr id="30" name="Shape 28"/>
+          <p:cNvSpPr/>
+          <p:nvPr/>
+        </p:nvSpPr>
+        <p:spPr>
+          <a:xfrm>
+            <a:off x="4791456" y="1188720"/>
+            <a:ext cx="1463040" cy="292608"/>
           </a:xfrm>
           <a:prstGeom prst="roundRect">
             <a:avLst>
@@ -5033,14 +5445,14 @@
       </p:sp>
       <p:sp>
         <p:nvSpPr>
-          <p:cNvPr id="22" name="Text 20"/>
-          <p:cNvSpPr/>
-          <p:nvPr/>
-        </p:nvSpPr>
-        <p:spPr>
-          <a:xfrm>
-            <a:off x="3639312" y="1188720"/>
-            <a:ext cx="1874520" cy="292608"/>
+          <p:cNvPr id="31" name="Text 29"/>
+          <p:cNvSpPr/>
+          <p:nvPr/>
+        </p:nvSpPr>
+        <p:spPr>
+          <a:xfrm>
+            <a:off x="4791456" y="1188720"/>
+            <a:ext cx="1463040" cy="292608"/>
           </a:xfrm>
           <a:prstGeom prst="rect">
             <a:avLst/>
@@ -5064,7 +5476,7 @@
                 <a:ea typeface="Arial" pitchFamily="34" charset="-122"/>
                 <a:cs typeface="Arial" pitchFamily="34" charset="-120"/>
               </a:rPr>
-              <a:t>Más popular</a:t>
+              <a:t>Sweet spot</a:t>
             </a:r>
             <a:endParaRPr lang="en-US" sz="900" dirty="0"/>
           </a:p>
@@ -5072,30 +5484,30 @@
       </p:sp>
       <p:sp>
         <p:nvSpPr>
-          <p:cNvPr id="23" name="Text 21"/>
-          <p:cNvSpPr/>
-          <p:nvPr/>
-        </p:nvSpPr>
-        <p:spPr>
-          <a:xfrm>
-            <a:off x="3273552" y="1417320"/>
-            <a:ext cx="2633472" cy="365760"/>
-          </a:xfrm>
-          <a:prstGeom prst="rect">
-            <a:avLst/>
-          </a:prstGeom>
-          <a:noFill/>
-          <a:ln/>
-        </p:spPr>
-        <p:txBody>
-          <a:bodyPr wrap="square" rtlCol="0" anchor="ctr"/>
-          <a:lstStyle/>
-          <a:p>
-            <a:pPr algn="ctr" indent="0" marL="0">
-              <a:buNone/>
-            </a:pPr>
-            <a:r>
-              <a:rPr lang="en-US" sz="1500" b="1" dirty="0">
+          <p:cNvPr id="32" name="Text 30"/>
+          <p:cNvSpPr/>
+          <p:nvPr/>
+        </p:nvSpPr>
+        <p:spPr>
+          <a:xfrm>
+            <a:off x="4517136" y="1417320"/>
+            <a:ext cx="2011680" cy="365760"/>
+          </a:xfrm>
+          <a:prstGeom prst="rect">
+            <a:avLst/>
+          </a:prstGeom>
+          <a:noFill/>
+          <a:ln/>
+        </p:spPr>
+        <p:txBody>
+          <a:bodyPr wrap="square" rtlCol="0" anchor="ctr"/>
+          <a:lstStyle/>
+          <a:p>
+            <a:pPr algn="ctr" indent="0" marL="0">
+              <a:buNone/>
+            </a:pPr>
+            <a:r>
+              <a:rPr lang="en-US" sz="1100" b="1" dirty="0">
                 <a:solidFill>
                   <a:srgbClr val="2D3748"/>
                 </a:solidFill>
@@ -5105,36 +5517,36 @@
               </a:rPr>
               <a:t>Profesional</a:t>
             </a:r>
-            <a:endParaRPr lang="en-US" sz="1500" dirty="0"/>
-          </a:p>
-        </p:txBody>
-      </p:sp>
-      <p:sp>
-        <p:nvSpPr>
-          <p:cNvPr id="24" name="Text 22"/>
-          <p:cNvSpPr/>
-          <p:nvPr/>
-        </p:nvSpPr>
-        <p:spPr>
-          <a:xfrm>
-            <a:off x="3273552" y="1828800"/>
-            <a:ext cx="2633472" cy="640080"/>
-          </a:xfrm>
-          <a:prstGeom prst="rect">
-            <a:avLst/>
-          </a:prstGeom>
-          <a:noFill/>
-          <a:ln/>
-        </p:spPr>
-        <p:txBody>
-          <a:bodyPr wrap="square" rtlCol="0" anchor="ctr"/>
-          <a:lstStyle/>
-          <a:p>
-            <a:pPr algn="ctr" indent="0" marL="0">
-              <a:buNone/>
-            </a:pPr>
-            <a:r>
-              <a:rPr lang="en-US" sz="3200" b="1" dirty="0">
+            <a:endParaRPr lang="en-US" sz="1100" dirty="0"/>
+          </a:p>
+        </p:txBody>
+      </p:sp>
+      <p:sp>
+        <p:nvSpPr>
+          <p:cNvPr id="33" name="Text 31"/>
+          <p:cNvSpPr/>
+          <p:nvPr/>
+        </p:nvSpPr>
+        <p:spPr>
+          <a:xfrm>
+            <a:off x="4517136" y="1828800"/>
+            <a:ext cx="2011680" cy="594360"/>
+          </a:xfrm>
+          <a:prstGeom prst="rect">
+            <a:avLst/>
+          </a:prstGeom>
+          <a:noFill/>
+          <a:ln/>
+        </p:spPr>
+        <p:txBody>
+          <a:bodyPr wrap="square" rtlCol="0" anchor="ctr"/>
+          <a:lstStyle/>
+          <a:p>
+            <a:pPr algn="ctr" indent="0" marL="0">
+              <a:buNone/>
+            </a:pPr>
+            <a:r>
+              <a:rPr lang="en-US" sz="2600" b="1" dirty="0">
                 <a:solidFill>
                   <a:srgbClr val="3A6B96"/>
                 </a:solidFill>
@@ -5142,38 +5554,38 @@
                 <a:ea typeface="Arial" pitchFamily="34" charset="-122"/>
                 <a:cs typeface="Arial" pitchFamily="34" charset="-120"/>
               </a:rPr>
-              <a:t>$3,490</a:t>
-            </a:r>
-            <a:endParaRPr lang="en-US" sz="3200" dirty="0"/>
-          </a:p>
-        </p:txBody>
-      </p:sp>
-      <p:sp>
-        <p:nvSpPr>
-          <p:cNvPr id="25" name="Text 23"/>
-          <p:cNvSpPr/>
-          <p:nvPr/>
-        </p:nvSpPr>
-        <p:spPr>
-          <a:xfrm>
-            <a:off x="3273552" y="2487168"/>
-            <a:ext cx="2633472" cy="274320"/>
-          </a:xfrm>
-          <a:prstGeom prst="rect">
-            <a:avLst/>
-          </a:prstGeom>
-          <a:noFill/>
-          <a:ln/>
-        </p:spPr>
-        <p:txBody>
-          <a:bodyPr wrap="square" rtlCol="0" anchor="ctr"/>
-          <a:lstStyle/>
-          <a:p>
-            <a:pPr algn="ctr" indent="0" marL="0">
-              <a:buNone/>
-            </a:pPr>
-            <a:r>
-              <a:rPr lang="en-US" sz="1100" dirty="0">
+              <a:t>$3,990</a:t>
+            </a:r>
+            <a:endParaRPr lang="en-US" sz="2600" dirty="0"/>
+          </a:p>
+        </p:txBody>
+      </p:sp>
+      <p:sp>
+        <p:nvSpPr>
+          <p:cNvPr id="34" name="Text 32"/>
+          <p:cNvSpPr/>
+          <p:nvPr/>
+        </p:nvSpPr>
+        <p:spPr>
+          <a:xfrm>
+            <a:off x="4517136" y="2423160"/>
+            <a:ext cx="2011680" cy="320040"/>
+          </a:xfrm>
+          <a:prstGeom prst="rect">
+            <a:avLst/>
+          </a:prstGeom>
+          <a:noFill/>
+          <a:ln/>
+        </p:spPr>
+        <p:txBody>
+          <a:bodyPr wrap="square" rtlCol="0" anchor="ctr"/>
+          <a:lstStyle/>
+          <a:p>
+            <a:pPr algn="ctr" indent="0" marL="0">
+              <a:buNone/>
+            </a:pPr>
+            <a:r>
+              <a:rPr lang="en-US" sz="900" dirty="0">
                 <a:solidFill>
                   <a:srgbClr val="718096"/>
                 </a:solidFill>
@@ -5183,20 +5595,20 @@
               </a:rPr>
               <a:t>MXN / mes</a:t>
             </a:r>
-            <a:endParaRPr lang="en-US" sz="1100" dirty="0"/>
-          </a:p>
-        </p:txBody>
-      </p:sp>
-      <p:sp>
-        <p:nvSpPr>
-          <p:cNvPr id="26" name="Shape 24"/>
-          <p:cNvSpPr/>
-          <p:nvPr/>
-        </p:nvSpPr>
-        <p:spPr>
-          <a:xfrm>
-            <a:off x="3456432" y="2834640"/>
-            <a:ext cx="2267712" cy="0"/>
+            <a:endParaRPr lang="en-US" sz="900" dirty="0"/>
+          </a:p>
+        </p:txBody>
+      </p:sp>
+      <p:sp>
+        <p:nvSpPr>
+          <p:cNvPr id="35" name="Shape 33"/>
+          <p:cNvSpPr/>
+          <p:nvPr/>
+        </p:nvSpPr>
+        <p:spPr>
+          <a:xfrm>
+            <a:off x="4654296" y="2816352"/>
+            <a:ext cx="1737360" cy="0"/>
           </a:xfrm>
           <a:prstGeom prst="line">
             <a:avLst/>
@@ -5212,30 +5624,30 @@
       </p:sp>
       <p:sp>
         <p:nvSpPr>
-          <p:cNvPr id="27" name="Text 25"/>
-          <p:cNvSpPr/>
-          <p:nvPr/>
-        </p:nvSpPr>
-        <p:spPr>
-          <a:xfrm>
-            <a:off x="3410712" y="2944368"/>
-            <a:ext cx="2359152" cy="420624"/>
-          </a:xfrm>
-          <a:prstGeom prst="rect">
-            <a:avLst/>
-          </a:prstGeom>
-          <a:noFill/>
-          <a:ln/>
-        </p:spPr>
-        <p:txBody>
-          <a:bodyPr wrap="square" rtlCol="0" anchor="ctr"/>
-          <a:lstStyle/>
-          <a:p>
-            <a:pPr algn="ctr" indent="0" marL="0">
-              <a:buNone/>
-            </a:pPr>
-            <a:r>
-              <a:rPr lang="en-US" sz="1150" dirty="0">
+          <p:cNvPr id="36" name="Text 34"/>
+          <p:cNvSpPr/>
+          <p:nvPr/>
+        </p:nvSpPr>
+        <p:spPr>
+          <a:xfrm>
+            <a:off x="4608576" y="2926080"/>
+            <a:ext cx="1828800" cy="420624"/>
+          </a:xfrm>
+          <a:prstGeom prst="rect">
+            <a:avLst/>
+          </a:prstGeom>
+          <a:noFill/>
+          <a:ln/>
+        </p:spPr>
+        <p:txBody>
+          <a:bodyPr wrap="square" rtlCol="0" anchor="ctr"/>
+          <a:lstStyle/>
+          <a:p>
+            <a:pPr algn="ctr" indent="0" marL="0">
+              <a:buNone/>
+            </a:pPr>
+            <a:r>
+              <a:rPr lang="en-US" sz="1000" dirty="0">
                 <a:solidFill>
                   <a:srgbClr val="2D3748"/>
                 </a:solidFill>
@@ -5243,38 +5655,38 @@
                 <a:ea typeface="Arial" pitchFamily="34" charset="-122"/>
                 <a:cs typeface="Arial" pitchFamily="34" charset="-120"/>
               </a:rPr>
-              <a:t>Hasta 75 residentes</a:t>
-            </a:r>
-            <a:endParaRPr lang="en-US" sz="1150" dirty="0"/>
-          </a:p>
-        </p:txBody>
-      </p:sp>
-      <p:sp>
-        <p:nvSpPr>
-          <p:cNvPr id="28" name="Text 26"/>
-          <p:cNvSpPr/>
-          <p:nvPr/>
-        </p:nvSpPr>
-        <p:spPr>
-          <a:xfrm>
-            <a:off x="3410712" y="3438144"/>
-            <a:ext cx="2359152" cy="420624"/>
-          </a:xfrm>
-          <a:prstGeom prst="rect">
-            <a:avLst/>
-          </a:prstGeom>
-          <a:noFill/>
-          <a:ln/>
-        </p:spPr>
-        <p:txBody>
-          <a:bodyPr wrap="square" rtlCol="0" anchor="ctr"/>
-          <a:lstStyle/>
-          <a:p>
-            <a:pPr algn="ctr" indent="0" marL="0">
-              <a:buNone/>
-            </a:pPr>
-            <a:r>
-              <a:rPr lang="en-US" sz="1150" dirty="0">
+              <a:t>Hasta 80 residentes</a:t>
+            </a:r>
+            <a:endParaRPr lang="en-US" sz="1000" dirty="0"/>
+          </a:p>
+        </p:txBody>
+      </p:sp>
+      <p:sp>
+        <p:nvSpPr>
+          <p:cNvPr id="37" name="Text 35"/>
+          <p:cNvSpPr/>
+          <p:nvPr/>
+        </p:nvSpPr>
+        <p:spPr>
+          <a:xfrm>
+            <a:off x="4608576" y="3419856"/>
+            <a:ext cx="1828800" cy="420624"/>
+          </a:xfrm>
+          <a:prstGeom prst="rect">
+            <a:avLst/>
+          </a:prstGeom>
+          <a:noFill/>
+          <a:ln/>
+        </p:spPr>
+        <p:txBody>
+          <a:bodyPr wrap="square" rtlCol="0" anchor="ctr"/>
+          <a:lstStyle/>
+          <a:p>
+            <a:pPr algn="ctr" indent="0" marL="0">
+              <a:buNone/>
+            </a:pPr>
+            <a:r>
+              <a:rPr lang="en-US" sz="1000" dirty="0">
                 <a:solidFill>
                   <a:srgbClr val="2D3748"/>
                 </a:solidFill>
@@ -5282,38 +5694,38 @@
                 <a:ea typeface="Arial" pitchFamily="34" charset="-122"/>
                 <a:cs typeface="Arial" pitchFamily="34" charset="-120"/>
               </a:rPr>
-              <a:t>Hasta 3 supervisores</a:t>
-            </a:r>
-            <a:endParaRPr lang="en-US" sz="1150" dirty="0"/>
-          </a:p>
-        </p:txBody>
-      </p:sp>
-      <p:sp>
-        <p:nvSpPr>
-          <p:cNvPr id="29" name="Text 27"/>
-          <p:cNvSpPr/>
-          <p:nvPr/>
-        </p:nvSpPr>
-        <p:spPr>
-          <a:xfrm>
-            <a:off x="3410712" y="3931920"/>
-            <a:ext cx="2359152" cy="420624"/>
-          </a:xfrm>
-          <a:prstGeom prst="rect">
-            <a:avLst/>
-          </a:prstGeom>
-          <a:noFill/>
-          <a:ln/>
-        </p:spPr>
-        <p:txBody>
-          <a:bodyPr wrap="square" rtlCol="0" anchor="ctr"/>
-          <a:lstStyle/>
-          <a:p>
-            <a:pPr algn="ctr" indent="0" marL="0">
-              <a:buNone/>
-            </a:pPr>
-            <a:r>
-              <a:rPr lang="en-US" sz="1150" dirty="0">
+              <a:t>Hasta 10 usuarios</a:t>
+            </a:r>
+            <a:endParaRPr lang="en-US" sz="1000" dirty="0"/>
+          </a:p>
+        </p:txBody>
+      </p:sp>
+      <p:sp>
+        <p:nvSpPr>
+          <p:cNvPr id="38" name="Text 36"/>
+          <p:cNvSpPr/>
+          <p:nvPr/>
+        </p:nvSpPr>
+        <p:spPr>
+          <a:xfrm>
+            <a:off x="4608576" y="3913632"/>
+            <a:ext cx="1828800" cy="420624"/>
+          </a:xfrm>
+          <a:prstGeom prst="rect">
+            <a:avLst/>
+          </a:prstGeom>
+          <a:noFill/>
+          <a:ln/>
+        </p:spPr>
+        <p:txBody>
+          <a:bodyPr wrap="square" rtlCol="0" anchor="ctr"/>
+          <a:lstStyle/>
+          <a:p>
+            <a:pPr algn="ctr" indent="0" marL="0">
+              <a:buNone/>
+            </a:pPr>
+            <a:r>
+              <a:rPr lang="en-US" sz="1000" dirty="0">
                 <a:solidFill>
                   <a:srgbClr val="2D3748"/>
                 </a:solidFill>
@@ -5321,38 +5733,38 @@
                 <a:ea typeface="Arial" pitchFamily="34" charset="-122"/>
                 <a:cs typeface="Arial" pitchFamily="34" charset="-120"/>
               </a:rPr>
-              <a:t>Hasta 15 cuidadores</a:t>
-            </a:r>
-            <a:endParaRPr lang="en-US" sz="1150" dirty="0"/>
-          </a:p>
-        </p:txBody>
-      </p:sp>
-      <p:sp>
-        <p:nvSpPr>
-          <p:cNvPr id="30" name="Text 28"/>
-          <p:cNvSpPr/>
-          <p:nvPr/>
-        </p:nvSpPr>
-        <p:spPr>
-          <a:xfrm>
-            <a:off x="3410712" y="4425696"/>
-            <a:ext cx="2359152" cy="420624"/>
-          </a:xfrm>
-          <a:prstGeom prst="rect">
-            <a:avLst/>
-          </a:prstGeom>
-          <a:noFill/>
-          <a:ln/>
-        </p:spPr>
-        <p:txBody>
-          <a:bodyPr wrap="square" rtlCol="0" anchor="ctr"/>
-          <a:lstStyle/>
-          <a:p>
-            <a:pPr algn="ctr" indent="0" marL="0">
-              <a:buNone/>
-            </a:pPr>
-            <a:r>
-              <a:rPr lang="en-US" sz="1150" b="1" dirty="0">
+              <a:t>Dashboard supervisor</a:t>
+            </a:r>
+            <a:endParaRPr lang="en-US" sz="1000" dirty="0"/>
+          </a:p>
+        </p:txBody>
+      </p:sp>
+      <p:sp>
+        <p:nvSpPr>
+          <p:cNvPr id="39" name="Text 37"/>
+          <p:cNvSpPr/>
+          <p:nvPr/>
+        </p:nvSpPr>
+        <p:spPr>
+          <a:xfrm>
+            <a:off x="4608576" y="4407408"/>
+            <a:ext cx="1828800" cy="420624"/>
+          </a:xfrm>
+          <a:prstGeom prst="rect">
+            <a:avLst/>
+          </a:prstGeom>
+          <a:noFill/>
+          <a:ln/>
+        </p:spPr>
+        <p:txBody>
+          <a:bodyPr wrap="square" rtlCol="0" anchor="ctr"/>
+          <a:lstStyle/>
+          <a:p>
+            <a:pPr algn="ctr" indent="0" marL="0">
+              <a:buNone/>
+            </a:pPr>
+            <a:r>
+              <a:rPr lang="en-US" sz="1000" b="1" dirty="0">
                 <a:solidFill>
                   <a:srgbClr val="5B8DB8"/>
                 </a:solidFill>
@@ -5362,24 +5774,24 @@
               </a:rPr>
               <a:t>Residencias medianas</a:t>
             </a:r>
-            <a:endParaRPr lang="en-US" sz="1150" dirty="0"/>
-          </a:p>
-        </p:txBody>
-      </p:sp>
-      <p:sp>
-        <p:nvSpPr>
-          <p:cNvPr id="31" name="Shape 29"/>
-          <p:cNvSpPr/>
-          <p:nvPr/>
-        </p:nvSpPr>
-        <p:spPr>
-          <a:xfrm>
-            <a:off x="6089904" y="1261872"/>
-            <a:ext cx="2633472" cy="4206240"/>
+            <a:endParaRPr lang="en-US" sz="1000" dirty="0"/>
+          </a:p>
+        </p:txBody>
+      </p:sp>
+      <p:sp>
+        <p:nvSpPr>
+          <p:cNvPr id="40" name="Shape 38"/>
+          <p:cNvSpPr/>
+          <p:nvPr/>
+        </p:nvSpPr>
+        <p:spPr>
+          <a:xfrm>
+            <a:off x="6693408" y="1261872"/>
+            <a:ext cx="2011680" cy="4206240"/>
           </a:xfrm>
           <a:prstGeom prst="roundRect">
             <a:avLst>
-              <a:gd name="adj" fmla="val 4167"/>
+              <a:gd name="adj" fmla="val 5455"/>
             </a:avLst>
           </a:prstGeom>
           <a:solidFill>
@@ -5395,30 +5807,30 @@
       </p:sp>
       <p:sp>
         <p:nvSpPr>
-          <p:cNvPr id="32" name="Text 30"/>
-          <p:cNvSpPr/>
-          <p:nvPr/>
-        </p:nvSpPr>
-        <p:spPr>
-          <a:xfrm>
-            <a:off x="6089904" y="1417320"/>
-            <a:ext cx="2633472" cy="365760"/>
-          </a:xfrm>
-          <a:prstGeom prst="rect">
-            <a:avLst/>
-          </a:prstGeom>
-          <a:noFill/>
-          <a:ln/>
-        </p:spPr>
-        <p:txBody>
-          <a:bodyPr wrap="square" rtlCol="0" anchor="ctr"/>
-          <a:lstStyle/>
-          <a:p>
-            <a:pPr algn="ctr" indent="0" marL="0">
-              <a:buNone/>
-            </a:pPr>
-            <a:r>
-              <a:rPr lang="en-US" sz="1500" b="1" dirty="0">
+          <p:cNvPr id="41" name="Text 39"/>
+          <p:cNvSpPr/>
+          <p:nvPr/>
+        </p:nvSpPr>
+        <p:spPr>
+          <a:xfrm>
+            <a:off x="6693408" y="1417320"/>
+            <a:ext cx="2011680" cy="365760"/>
+          </a:xfrm>
+          <a:prstGeom prst="rect">
+            <a:avLst/>
+          </a:prstGeom>
+          <a:noFill/>
+          <a:ln/>
+        </p:spPr>
+        <p:txBody>
+          <a:bodyPr wrap="square" rtlCol="0" anchor="ctr"/>
+          <a:lstStyle/>
+          <a:p>
+            <a:pPr algn="ctr" indent="0" marL="0">
+              <a:buNone/>
+            </a:pPr>
+            <a:r>
+              <a:rPr lang="en-US" sz="1100" b="1" dirty="0">
                 <a:solidFill>
                   <a:srgbClr val="2D3748"/>
                 </a:solidFill>
@@ -5428,36 +5840,36 @@
               </a:rPr>
               <a:t>Institucional</a:t>
             </a:r>
-            <a:endParaRPr lang="en-US" sz="1500" dirty="0"/>
-          </a:p>
-        </p:txBody>
-      </p:sp>
-      <p:sp>
-        <p:nvSpPr>
-          <p:cNvPr id="33" name="Text 31"/>
-          <p:cNvSpPr/>
-          <p:nvPr/>
-        </p:nvSpPr>
-        <p:spPr>
-          <a:xfrm>
-            <a:off x="6089904" y="1828800"/>
-            <a:ext cx="2633472" cy="640080"/>
-          </a:xfrm>
-          <a:prstGeom prst="rect">
-            <a:avLst/>
-          </a:prstGeom>
-          <a:noFill/>
-          <a:ln/>
-        </p:spPr>
-        <p:txBody>
-          <a:bodyPr wrap="square" rtlCol="0" anchor="ctr"/>
-          <a:lstStyle/>
-          <a:p>
-            <a:pPr algn="ctr" indent="0" marL="0">
-              <a:buNone/>
-            </a:pPr>
-            <a:r>
-              <a:rPr lang="en-US" sz="3200" b="1" dirty="0">
+            <a:endParaRPr lang="en-US" sz="1100" dirty="0"/>
+          </a:p>
+        </p:txBody>
+      </p:sp>
+      <p:sp>
+        <p:nvSpPr>
+          <p:cNvPr id="42" name="Text 40"/>
+          <p:cNvSpPr/>
+          <p:nvPr/>
+        </p:nvSpPr>
+        <p:spPr>
+          <a:xfrm>
+            <a:off x="6693408" y="1828800"/>
+            <a:ext cx="2011680" cy="594360"/>
+          </a:xfrm>
+          <a:prstGeom prst="rect">
+            <a:avLst/>
+          </a:prstGeom>
+          <a:noFill/>
+          <a:ln/>
+        </p:spPr>
+        <p:txBody>
+          <a:bodyPr wrap="square" rtlCol="0" anchor="ctr"/>
+          <a:lstStyle/>
+          <a:p>
+            <a:pPr algn="ctr" indent="0" marL="0">
+              <a:buNone/>
+            </a:pPr>
+            <a:r>
+              <a:rPr lang="en-US" sz="2600" b="1" dirty="0">
                 <a:solidFill>
                   <a:srgbClr val="5B8DB8"/>
                 </a:solidFill>
@@ -5465,38 +5877,38 @@
                 <a:ea typeface="Arial" pitchFamily="34" charset="-122"/>
                 <a:cs typeface="Arial" pitchFamily="34" charset="-120"/>
               </a:rPr>
-              <a:t>$6,990</a:t>
-            </a:r>
-            <a:endParaRPr lang="en-US" sz="3200" dirty="0"/>
-          </a:p>
-        </p:txBody>
-      </p:sp>
-      <p:sp>
-        <p:nvSpPr>
-          <p:cNvPr id="34" name="Text 32"/>
-          <p:cNvSpPr/>
-          <p:nvPr/>
-        </p:nvSpPr>
-        <p:spPr>
-          <a:xfrm>
-            <a:off x="6089904" y="2487168"/>
-            <a:ext cx="2633472" cy="274320"/>
-          </a:xfrm>
-          <a:prstGeom prst="rect">
-            <a:avLst/>
-          </a:prstGeom>
-          <a:noFill/>
-          <a:ln/>
-        </p:spPr>
-        <p:txBody>
-          <a:bodyPr wrap="square" rtlCol="0" anchor="ctr"/>
-          <a:lstStyle/>
-          <a:p>
-            <a:pPr algn="ctr" indent="0" marL="0">
-              <a:buNone/>
-            </a:pPr>
-            <a:r>
-              <a:rPr lang="en-US" sz="1100" dirty="0">
+              <a:t>$8,490</a:t>
+            </a:r>
+            <a:endParaRPr lang="en-US" sz="2600" dirty="0"/>
+          </a:p>
+        </p:txBody>
+      </p:sp>
+      <p:sp>
+        <p:nvSpPr>
+          <p:cNvPr id="43" name="Text 41"/>
+          <p:cNvSpPr/>
+          <p:nvPr/>
+        </p:nvSpPr>
+        <p:spPr>
+          <a:xfrm>
+            <a:off x="6693408" y="2423160"/>
+            <a:ext cx="2011680" cy="320040"/>
+          </a:xfrm>
+          <a:prstGeom prst="rect">
+            <a:avLst/>
+          </a:prstGeom>
+          <a:noFill/>
+          <a:ln/>
+        </p:spPr>
+        <p:txBody>
+          <a:bodyPr wrap="square" rtlCol="0" anchor="ctr"/>
+          <a:lstStyle/>
+          <a:p>
+            <a:pPr algn="ctr" indent="0" marL="0">
+              <a:buNone/>
+            </a:pPr>
+            <a:r>
+              <a:rPr lang="en-US" sz="900" dirty="0">
                 <a:solidFill>
                   <a:srgbClr val="718096"/>
                 </a:solidFill>
@@ -5506,20 +5918,20 @@
               </a:rPr>
               <a:t>MXN / mes</a:t>
             </a:r>
-            <a:endParaRPr lang="en-US" sz="1100" dirty="0"/>
-          </a:p>
-        </p:txBody>
-      </p:sp>
-      <p:sp>
-        <p:nvSpPr>
-          <p:cNvPr id="35" name="Shape 33"/>
-          <p:cNvSpPr/>
-          <p:nvPr/>
-        </p:nvSpPr>
-        <p:spPr>
-          <a:xfrm>
-            <a:off x="6272784" y="2834640"/>
-            <a:ext cx="2267712" cy="0"/>
+            <a:endParaRPr lang="en-US" sz="900" dirty="0"/>
+          </a:p>
+        </p:txBody>
+      </p:sp>
+      <p:sp>
+        <p:nvSpPr>
+          <p:cNvPr id="44" name="Shape 42"/>
+          <p:cNvSpPr/>
+          <p:nvPr/>
+        </p:nvSpPr>
+        <p:spPr>
+          <a:xfrm>
+            <a:off x="6830568" y="2816352"/>
+            <a:ext cx="1737360" cy="0"/>
           </a:xfrm>
           <a:prstGeom prst="line">
             <a:avLst/>
@@ -5535,30 +5947,30 @@
       </p:sp>
       <p:sp>
         <p:nvSpPr>
-          <p:cNvPr id="36" name="Text 34"/>
-          <p:cNvSpPr/>
-          <p:nvPr/>
-        </p:nvSpPr>
-        <p:spPr>
-          <a:xfrm>
-            <a:off x="6227064" y="2944368"/>
-            <a:ext cx="2359152" cy="420624"/>
-          </a:xfrm>
-          <a:prstGeom prst="rect">
-            <a:avLst/>
-          </a:prstGeom>
-          <a:noFill/>
-          <a:ln/>
-        </p:spPr>
-        <p:txBody>
-          <a:bodyPr wrap="square" rtlCol="0" anchor="ctr"/>
-          <a:lstStyle/>
-          <a:p>
-            <a:pPr algn="ctr" indent="0" marL="0">
-              <a:buNone/>
-            </a:pPr>
-            <a:r>
-              <a:rPr lang="en-US" sz="1150" dirty="0">
+          <p:cNvPr id="45" name="Text 43"/>
+          <p:cNvSpPr/>
+          <p:nvPr/>
+        </p:nvSpPr>
+        <p:spPr>
+          <a:xfrm>
+            <a:off x="6784848" y="2926080"/>
+            <a:ext cx="1828800" cy="420624"/>
+          </a:xfrm>
+          <a:prstGeom prst="rect">
+            <a:avLst/>
+          </a:prstGeom>
+          <a:noFill/>
+          <a:ln/>
+        </p:spPr>
+        <p:txBody>
+          <a:bodyPr wrap="square" rtlCol="0" anchor="ctr"/>
+          <a:lstStyle/>
+          <a:p>
+            <a:pPr algn="ctr" indent="0" marL="0">
+              <a:buNone/>
+            </a:pPr>
+            <a:r>
+              <a:rPr lang="en-US" sz="1000" dirty="0">
                 <a:solidFill>
                   <a:srgbClr val="2D3748"/>
                 </a:solidFill>
@@ -5566,38 +5978,77 @@
                 <a:ea typeface="Arial" pitchFamily="34" charset="-122"/>
                 <a:cs typeface="Arial" pitchFamily="34" charset="-120"/>
               </a:rPr>
+              <a:t>Sin límite · multi-sede</a:t>
+            </a:r>
+            <a:endParaRPr lang="en-US" sz="1000" dirty="0"/>
+          </a:p>
+        </p:txBody>
+      </p:sp>
+      <p:sp>
+        <p:nvSpPr>
+          <p:cNvPr id="46" name="Text 44"/>
+          <p:cNvSpPr/>
+          <p:nvPr/>
+        </p:nvSpPr>
+        <p:spPr>
+          <a:xfrm>
+            <a:off x="6784848" y="3419856"/>
+            <a:ext cx="1828800" cy="420624"/>
+          </a:xfrm>
+          <a:prstGeom prst="rect">
+            <a:avLst/>
+          </a:prstGeom>
+          <a:noFill/>
+          <a:ln/>
+        </p:spPr>
+        <p:txBody>
+          <a:bodyPr wrap="square" rtlCol="0" anchor="ctr"/>
+          <a:lstStyle/>
+          <a:p>
+            <a:pPr algn="ctr" indent="0" marL="0">
+              <a:buNone/>
+            </a:pPr>
+            <a:r>
+              <a:rPr lang="en-US" sz="1000" dirty="0">
+                <a:solidFill>
+                  <a:srgbClr val="2D3748"/>
+                </a:solidFill>
+                <a:latin typeface="Arial" pitchFamily="34" charset="0"/>
+                <a:ea typeface="Arial" pitchFamily="34" charset="-122"/>
+                <a:cs typeface="Arial" pitchFamily="34" charset="-120"/>
+              </a:rPr>
               <a:t>Sin límite</a:t>
             </a:r>
-            <a:endParaRPr lang="en-US" sz="1150" dirty="0"/>
-          </a:p>
-        </p:txBody>
-      </p:sp>
-      <p:sp>
-        <p:nvSpPr>
-          <p:cNvPr id="37" name="Text 35"/>
-          <p:cNvSpPr/>
-          <p:nvPr/>
-        </p:nvSpPr>
-        <p:spPr>
-          <a:xfrm>
-            <a:off x="6227064" y="3438144"/>
-            <a:ext cx="2359152" cy="420624"/>
-          </a:xfrm>
-          <a:prstGeom prst="rect">
-            <a:avLst/>
-          </a:prstGeom>
-          <a:noFill/>
-          <a:ln/>
-        </p:spPr>
-        <p:txBody>
-          <a:bodyPr wrap="square" rtlCol="0" anchor="ctr"/>
-          <a:lstStyle/>
-          <a:p>
-            <a:pPr algn="ctr" indent="0" marL="0">
-              <a:buNone/>
-            </a:pPr>
-            <a:r>
-              <a:rPr lang="en-US" sz="1150" dirty="0">
+            <a:endParaRPr lang="en-US" sz="1000" dirty="0"/>
+          </a:p>
+        </p:txBody>
+      </p:sp>
+      <p:sp>
+        <p:nvSpPr>
+          <p:cNvPr id="47" name="Text 45"/>
+          <p:cNvSpPr/>
+          <p:nvPr/>
+        </p:nvSpPr>
+        <p:spPr>
+          <a:xfrm>
+            <a:off x="6784848" y="3913632"/>
+            <a:ext cx="1828800" cy="420624"/>
+          </a:xfrm>
+          <a:prstGeom prst="rect">
+            <a:avLst/>
+          </a:prstGeom>
+          <a:noFill/>
+          <a:ln/>
+        </p:spPr>
+        <p:txBody>
+          <a:bodyPr wrap="square" rtlCol="0" anchor="ctr"/>
+          <a:lstStyle/>
+          <a:p>
+            <a:pPr algn="ctr" indent="0" marL="0">
+              <a:buNone/>
+            </a:pPr>
+            <a:r>
+              <a:rPr lang="en-US" sz="1000" dirty="0">
                 <a:solidFill>
                   <a:srgbClr val="2D3748"/>
                 </a:solidFill>
@@ -5605,77 +6056,38 @@
                 <a:ea typeface="Arial" pitchFamily="34" charset="-122"/>
                 <a:cs typeface="Arial" pitchFamily="34" charset="-120"/>
               </a:rPr>
-              <a:t>Sin límite</a:t>
-            </a:r>
-            <a:endParaRPr lang="en-US" sz="1150" dirty="0"/>
-          </a:p>
-        </p:txBody>
-      </p:sp>
-      <p:sp>
-        <p:nvSpPr>
-          <p:cNvPr id="38" name="Text 36"/>
-          <p:cNvSpPr/>
-          <p:nvPr/>
-        </p:nvSpPr>
-        <p:spPr>
-          <a:xfrm>
-            <a:off x="6227064" y="3931920"/>
-            <a:ext cx="2359152" cy="420624"/>
-          </a:xfrm>
-          <a:prstGeom prst="rect">
-            <a:avLst/>
-          </a:prstGeom>
-          <a:noFill/>
-          <a:ln/>
-        </p:spPr>
-        <p:txBody>
-          <a:bodyPr wrap="square" rtlCol="0" anchor="ctr"/>
-          <a:lstStyle/>
-          <a:p>
-            <a:pPr algn="ctr" indent="0" marL="0">
-              <a:buNone/>
-            </a:pPr>
-            <a:r>
-              <a:rPr lang="en-US" sz="1150" dirty="0">
-                <a:solidFill>
-                  <a:srgbClr val="2D3748"/>
-                </a:solidFill>
-                <a:latin typeface="Arial" pitchFamily="34" charset="0"/>
-                <a:ea typeface="Arial" pitchFamily="34" charset="-122"/>
-                <a:cs typeface="Arial" pitchFamily="34" charset="-120"/>
-              </a:rPr>
-              <a:t>Sin límite</a:t>
-            </a:r>
-            <a:endParaRPr lang="en-US" sz="1150" dirty="0"/>
-          </a:p>
-        </p:txBody>
-      </p:sp>
-      <p:sp>
-        <p:nvSpPr>
-          <p:cNvPr id="39" name="Text 37"/>
-          <p:cNvSpPr/>
-          <p:nvPr/>
-        </p:nvSpPr>
-        <p:spPr>
-          <a:xfrm>
-            <a:off x="6227064" y="4425696"/>
-            <a:ext cx="2359152" cy="420624"/>
-          </a:xfrm>
-          <a:prstGeom prst="rect">
-            <a:avLst/>
-          </a:prstGeom>
-          <a:noFill/>
-          <a:ln/>
-        </p:spPr>
-        <p:txBody>
-          <a:bodyPr wrap="square" rtlCol="0" anchor="ctr"/>
-          <a:lstStyle/>
-          <a:p>
-            <a:pPr algn="ctr" indent="0" marL="0">
-              <a:buNone/>
-            </a:pPr>
-            <a:r>
-              <a:rPr lang="en-US" sz="1150" b="1" dirty="0">
+              <a:t>SLA + soporte dedicado</a:t>
+            </a:r>
+            <a:endParaRPr lang="en-US" sz="1000" dirty="0"/>
+          </a:p>
+        </p:txBody>
+      </p:sp>
+      <p:sp>
+        <p:nvSpPr>
+          <p:cNvPr id="48" name="Text 46"/>
+          <p:cNvSpPr/>
+          <p:nvPr/>
+        </p:nvSpPr>
+        <p:spPr>
+          <a:xfrm>
+            <a:off x="6784848" y="4407408"/>
+            <a:ext cx="1828800" cy="420624"/>
+          </a:xfrm>
+          <a:prstGeom prst="rect">
+            <a:avLst/>
+          </a:prstGeom>
+          <a:noFill/>
+          <a:ln/>
+        </p:spPr>
+        <p:txBody>
+          <a:bodyPr wrap="square" rtlCol="0" anchor="ctr"/>
+          <a:lstStyle/>
+          <a:p>
+            <a:pPr algn="ctr" indent="0" marL="0">
+              <a:buNone/>
+            </a:pPr>
+            <a:r>
+              <a:rPr lang="en-US" sz="1000" b="1" dirty="0">
                 <a:solidFill>
                   <a:srgbClr val="5B8DB8"/>
                 </a:solidFill>
@@ -5683,15 +6095,15 @@
                 <a:ea typeface="Arial" pitchFamily="34" charset="-122"/>
                 <a:cs typeface="Arial" pitchFamily="34" charset="-120"/>
               </a:rPr>
-              <a:t>Cadenas · soporte prioritario</a:t>
-            </a:r>
-            <a:endParaRPr lang="en-US" sz="1150" dirty="0"/>
-          </a:p>
-        </p:txBody>
-      </p:sp>
-      <p:sp>
-        <p:nvSpPr>
-          <p:cNvPr id="40" name="Text 38"/>
+              <a:t>Cadenas institucionales</a:t>
+            </a:r>
+            <a:endParaRPr lang="en-US" sz="1000" dirty="0"/>
+          </a:p>
+        </p:txBody>
+      </p:sp>
+      <p:sp>
+        <p:nvSpPr>
+          <p:cNvPr id="49" name="Text 47"/>
           <p:cNvSpPr/>
           <p:nvPr/>
         </p:nvSpPr>
@@ -5722,7 +6134,7 @@
                 <a:ea typeface="Arial" pitchFamily="34" charset="-122"/>
                 <a:cs typeface="Arial" pitchFamily="34" charset="-120"/>
               </a:rPr>
-              <a:t>⚠️ Precios de referencia — no validados con clientes. Declarar ante jueces.</a:t>
+              <a:t>⚠️ Precios de referencia — no validados con clientes reales. El tier Freemium opera sin SLA ni responsabilidad legal. Declarar ante jueces.</a:t>
             </a:r>
             <a:endParaRPr lang="en-US" dirty="0"/>
           </a:p>
@@ -7179,6 +7591,2022 @@
         </p:nvSpPr>
         <p:spPr>
           <a:xfrm>
+            <a:off x="8138160" y="0"/>
+            <a:ext cx="694944" cy="6858000"/>
+          </a:xfrm>
+          <a:prstGeom prst="rect">
+            <a:avLst/>
+          </a:prstGeom>
+          <a:solidFill>
+            <a:srgbClr val="A8C4DC">
+              <a:alpha val="12000"/>
+            </a:srgbClr>
+          </a:solidFill>
+          <a:ln w="12700">
+            <a:solidFill>
+              <a:srgbClr val="A8C4DC">
+                <a:alpha val="12000"/>
+              </a:srgbClr>
+            </a:solidFill>
+            <a:prstDash val="solid"/>
+          </a:ln>
+        </p:spPr>
+      </p:sp>
+      <p:sp>
+        <p:nvSpPr>
+          <p:cNvPr id="4" name="Shape 2"/>
+          <p:cNvSpPr/>
+          <p:nvPr/>
+        </p:nvSpPr>
+        <p:spPr>
+          <a:xfrm>
+            <a:off x="3474720" y="5120640"/>
+            <a:ext cx="2377440" cy="2377440"/>
+          </a:xfrm>
+          <a:prstGeom prst="ellipse">
+            <a:avLst/>
+          </a:prstGeom>
+          <a:solidFill>
+            <a:srgbClr val="C4786A">
+              <a:alpha val="10000"/>
+            </a:srgbClr>
+          </a:solidFill>
+          <a:ln w="12700">
+            <a:solidFill>
+              <a:srgbClr val="C4786A">
+                <a:alpha val="10000"/>
+              </a:srgbClr>
+            </a:solidFill>
+            <a:prstDash val="solid"/>
+          </a:ln>
+        </p:spPr>
+      </p:sp>
+      <p:sp>
+        <p:nvSpPr>
+          <p:cNvPr id="5" name="Shape 3"/>
+          <p:cNvSpPr/>
+          <p:nvPr/>
+        </p:nvSpPr>
+        <p:spPr>
+          <a:xfrm>
+            <a:off x="0" y="0"/>
+            <a:ext cx="12192000" cy="54864"/>
+          </a:xfrm>
+          <a:prstGeom prst="rect">
+            <a:avLst/>
+          </a:prstGeom>
+          <a:solidFill>
+            <a:srgbClr val="5B8DB8"/>
+          </a:solidFill>
+          <a:ln w="12700">
+            <a:solidFill>
+              <a:srgbClr val="5B8DB8"/>
+            </a:solidFill>
+            <a:prstDash val="solid"/>
+          </a:ln>
+        </p:spPr>
+      </p:sp>
+      <p:sp>
+        <p:nvSpPr>
+          <p:cNvPr id="6" name="Shape 4"/>
+          <p:cNvSpPr/>
+          <p:nvPr/>
+        </p:nvSpPr>
+        <p:spPr>
+          <a:xfrm>
+            <a:off x="0" y="6528816"/>
+            <a:ext cx="12192000" cy="54864"/>
+          </a:xfrm>
+          <a:prstGeom prst="rect">
+            <a:avLst/>
+          </a:prstGeom>
+          <a:solidFill>
+            <a:srgbClr val="C4786A"/>
+          </a:solidFill>
+          <a:ln w="12700">
+            <a:solidFill>
+              <a:srgbClr val="C4786A"/>
+            </a:solidFill>
+            <a:prstDash val="solid"/>
+          </a:ln>
+        </p:spPr>
+      </p:sp>
+      <p:sp>
+        <p:nvSpPr>
+          <p:cNvPr id="7" name="Text 5"/>
+          <p:cNvSpPr/>
+          <p:nvPr/>
+        </p:nvSpPr>
+        <p:spPr>
+          <a:xfrm>
+            <a:off x="457200" y="201168"/>
+            <a:ext cx="8375904" cy="502920"/>
+          </a:xfrm>
+          <a:prstGeom prst="rect">
+            <a:avLst/>
+          </a:prstGeom>
+          <a:noFill/>
+          <a:ln/>
+        </p:spPr>
+        <p:txBody>
+          <a:bodyPr wrap="square" rtlCol="0" anchor="ctr"/>
+          <a:lstStyle/>
+          <a:p>
+            <a:pPr indent="0" marL="0">
+              <a:buNone/>
+            </a:pPr>
+            <a:r>
+              <a:rPr lang="en-US" b="1" dirty="0">
+                <a:solidFill>
+                  <a:srgbClr val="2D3748"/>
+                </a:solidFill>
+                <a:latin typeface="Arial" pitchFamily="34" charset="0"/>
+                <a:ea typeface="Arial" pitchFamily="34" charset="-122"/>
+                <a:cs typeface="Arial" pitchFamily="34" charset="-120"/>
+              </a:rPr>
+              <a:t>👨‍👩‍👧  Fase paralela — Mercado familiar (B2C)</a:t>
+            </a:r>
+            <a:endParaRPr lang="en-US" dirty="0"/>
+          </a:p>
+        </p:txBody>
+      </p:sp>
+      <p:sp>
+        <p:nvSpPr>
+          <p:cNvPr id="8" name="Text 6"/>
+          <p:cNvSpPr/>
+          <p:nvPr/>
+        </p:nvSpPr>
+        <p:spPr>
+          <a:xfrm>
+            <a:off x="457200" y="713232"/>
+            <a:ext cx="8375904" cy="292608"/>
+          </a:xfrm>
+          <a:prstGeom prst="rect">
+            <a:avLst/>
+          </a:prstGeom>
+          <a:noFill/>
+          <a:ln/>
+        </p:spPr>
+        <p:txBody>
+          <a:bodyPr wrap="square" rtlCol="0" anchor="ctr"/>
+          <a:lstStyle/>
+          <a:p>
+            <a:pPr indent="0" marL="0">
+              <a:buNone/>
+            </a:pPr>
+            <a:r>
+              <a:rPr lang="en-US" b="1" dirty="0">
+                <a:solidFill>
+                  <a:srgbClr val="5B8DB8"/>
+                </a:solidFill>
+                <a:latin typeface="Arial" pitchFamily="34" charset="0"/>
+                <a:ea typeface="Arial" pitchFamily="34" charset="-122"/>
+                <a:cs typeface="Arial" pitchFamily="34" charset="-120"/>
+              </a:rPr>
+              <a:t>La misma plataforma · dos puertas de entrada · conversión cruzada B2C → B2B</a:t>
+            </a:r>
+            <a:endParaRPr lang="en-US" dirty="0"/>
+          </a:p>
+        </p:txBody>
+      </p:sp>
+      <p:sp>
+        <p:nvSpPr>
+          <p:cNvPr id="9" name="Shape 7"/>
+          <p:cNvSpPr/>
+          <p:nvPr/>
+        </p:nvSpPr>
+        <p:spPr>
+          <a:xfrm>
+            <a:off x="457200" y="1060704"/>
+            <a:ext cx="8375904" cy="0"/>
+          </a:xfrm>
+          <a:prstGeom prst="line">
+            <a:avLst/>
+          </a:prstGeom>
+          <a:noFill/>
+          <a:ln w="12700">
+            <a:solidFill>
+              <a:srgbClr val="E2E8F0"/>
+            </a:solidFill>
+            <a:prstDash val="solid"/>
+          </a:ln>
+        </p:spPr>
+      </p:sp>
+      <p:sp>
+        <p:nvSpPr>
+          <p:cNvPr id="10" name="Shape 8"/>
+          <p:cNvSpPr/>
+          <p:nvPr/>
+        </p:nvSpPr>
+        <p:spPr>
+          <a:xfrm>
+            <a:off x="365760" y="1170432"/>
+            <a:ext cx="3840480" cy="3383280"/>
+          </a:xfrm>
+          <a:prstGeom prst="roundRect">
+            <a:avLst>
+              <a:gd name="adj" fmla="val 2162"/>
+            </a:avLst>
+          </a:prstGeom>
+          <a:solidFill>
+            <a:srgbClr val="EFF6FF"/>
+          </a:solidFill>
+          <a:ln w="6350">
+            <a:solidFill>
+              <a:srgbClr val="E2E8F0"/>
+            </a:solidFill>
+            <a:prstDash val="solid"/>
+          </a:ln>
+        </p:spPr>
+      </p:sp>
+      <p:sp>
+        <p:nvSpPr>
+          <p:cNvPr id="11" name="Text 9"/>
+          <p:cNvSpPr/>
+          <p:nvPr/>
+        </p:nvSpPr>
+        <p:spPr>
+          <a:xfrm>
+            <a:off x="502920" y="1243584"/>
+            <a:ext cx="3547872" cy="329184"/>
+          </a:xfrm>
+          <a:prstGeom prst="rect">
+            <a:avLst/>
+          </a:prstGeom>
+          <a:noFill/>
+          <a:ln/>
+        </p:spPr>
+        <p:txBody>
+          <a:bodyPr wrap="square" rtlCol="0" anchor="ctr"/>
+          <a:lstStyle/>
+          <a:p>
+            <a:pPr algn="ctr" indent="0" marL="0">
+              <a:buNone/>
+            </a:pPr>
+            <a:r>
+              <a:rPr lang="en-US" sz="1200" b="1" dirty="0">
+                <a:solidFill>
+                  <a:srgbClr val="3A6B96"/>
+                </a:solidFill>
+                <a:latin typeface="Arial" pitchFamily="34" charset="0"/>
+                <a:ea typeface="Arial" pitchFamily="34" charset="-122"/>
+                <a:cs typeface="Arial" pitchFamily="34" charset="-120"/>
+              </a:rPr>
+              <a:t>B2B (canal actual)</a:t>
+            </a:r>
+            <a:endParaRPr lang="en-US" sz="1200" dirty="0"/>
+          </a:p>
+        </p:txBody>
+      </p:sp>
+      <p:sp>
+        <p:nvSpPr>
+          <p:cNvPr id="12" name="Text 10"/>
+          <p:cNvSpPr/>
+          <p:nvPr/>
+        </p:nvSpPr>
+        <p:spPr>
+          <a:xfrm>
+            <a:off x="502920" y="1645920"/>
+            <a:ext cx="365760" cy="384048"/>
+          </a:xfrm>
+          <a:prstGeom prst="rect">
+            <a:avLst/>
+          </a:prstGeom>
+          <a:noFill/>
+          <a:ln/>
+        </p:spPr>
+        <p:txBody>
+          <a:bodyPr wrap="square" rtlCol="0" anchor="ctr"/>
+          <a:lstStyle/>
+          <a:p>
+            <a:pPr algn="ctr" indent="0" marL="0">
+              <a:buNone/>
+            </a:pPr>
+            <a:r>
+              <a:rPr lang="en-US" sz="1400" dirty="0">
+                <a:solidFill>
+                  <a:srgbClr val="000000"/>
+                </a:solidFill>
+              </a:rPr>
+              <a:t>🏢</a:t>
+            </a:r>
+            <a:endParaRPr lang="en-US" sz="1400" dirty="0"/>
+          </a:p>
+        </p:txBody>
+      </p:sp>
+      <p:sp>
+        <p:nvSpPr>
+          <p:cNvPr id="13" name="Text 11"/>
+          <p:cNvSpPr/>
+          <p:nvPr/>
+        </p:nvSpPr>
+        <p:spPr>
+          <a:xfrm>
+            <a:off x="896112" y="1645920"/>
+            <a:ext cx="1097280" cy="384048"/>
+          </a:xfrm>
+          <a:prstGeom prst="rect">
+            <a:avLst/>
+          </a:prstGeom>
+          <a:noFill/>
+          <a:ln/>
+        </p:spPr>
+        <p:txBody>
+          <a:bodyPr wrap="square" rtlCol="0" anchor="ctr"/>
+          <a:lstStyle/>
+          <a:p>
+            <a:pPr indent="0" marL="0">
+              <a:buNone/>
+            </a:pPr>
+            <a:r>
+              <a:rPr lang="en-US" sz="1000" b="1" dirty="0">
+                <a:solidFill>
+                  <a:srgbClr val="718096"/>
+                </a:solidFill>
+                <a:latin typeface="Arial" pitchFamily="34" charset="0"/>
+                <a:ea typeface="Arial" pitchFamily="34" charset="-122"/>
+                <a:cs typeface="Arial" pitchFamily="34" charset="-120"/>
+              </a:rPr>
+              <a:t>Cliente</a:t>
+            </a:r>
+            <a:endParaRPr lang="en-US" sz="1000" dirty="0"/>
+          </a:p>
+        </p:txBody>
+      </p:sp>
+      <p:sp>
+        <p:nvSpPr>
+          <p:cNvPr id="14" name="Text 12"/>
+          <p:cNvSpPr/>
+          <p:nvPr/>
+        </p:nvSpPr>
+        <p:spPr>
+          <a:xfrm>
+            <a:off x="2011680" y="1645920"/>
+            <a:ext cx="2011680" cy="384048"/>
+          </a:xfrm>
+          <a:prstGeom prst="rect">
+            <a:avLst/>
+          </a:prstGeom>
+          <a:noFill/>
+          <a:ln/>
+        </p:spPr>
+        <p:txBody>
+          <a:bodyPr wrap="square" rtlCol="0" anchor="ctr"/>
+          <a:lstStyle/>
+          <a:p>
+            <a:pPr indent="0" marL="0">
+              <a:buNone/>
+            </a:pPr>
+            <a:r>
+              <a:rPr lang="en-US" sz="1050" dirty="0">
+                <a:solidFill>
+                  <a:srgbClr val="2D3748"/>
+                </a:solidFill>
+                <a:latin typeface="Arial" pitchFamily="34" charset="0"/>
+                <a:ea typeface="Arial" pitchFamily="34" charset="-122"/>
+                <a:cs typeface="Arial" pitchFamily="34" charset="-120"/>
+              </a:rPr>
+              <a:t>Director de residencia</a:t>
+            </a:r>
+            <a:endParaRPr lang="en-US" sz="1050" dirty="0"/>
+          </a:p>
+        </p:txBody>
+      </p:sp>
+      <p:sp>
+        <p:nvSpPr>
+          <p:cNvPr id="15" name="Text 13"/>
+          <p:cNvSpPr/>
+          <p:nvPr/>
+        </p:nvSpPr>
+        <p:spPr>
+          <a:xfrm>
+            <a:off x="502920" y="2103120"/>
+            <a:ext cx="365760" cy="384048"/>
+          </a:xfrm>
+          <a:prstGeom prst="rect">
+            <a:avLst/>
+          </a:prstGeom>
+          <a:noFill/>
+          <a:ln/>
+        </p:spPr>
+        <p:txBody>
+          <a:bodyPr wrap="square" rtlCol="0" anchor="ctr"/>
+          <a:lstStyle/>
+          <a:p>
+            <a:pPr algn="ctr" indent="0" marL="0">
+              <a:buNone/>
+            </a:pPr>
+            <a:r>
+              <a:rPr lang="en-US" sz="1400" dirty="0">
+                <a:solidFill>
+                  <a:srgbClr val="000000"/>
+                </a:solidFill>
+              </a:rPr>
+              <a:t>💰</a:t>
+            </a:r>
+            <a:endParaRPr lang="en-US" sz="1400" dirty="0"/>
+          </a:p>
+        </p:txBody>
+      </p:sp>
+      <p:sp>
+        <p:nvSpPr>
+          <p:cNvPr id="16" name="Text 14"/>
+          <p:cNvSpPr/>
+          <p:nvPr/>
+        </p:nvSpPr>
+        <p:spPr>
+          <a:xfrm>
+            <a:off x="896112" y="2103120"/>
+            <a:ext cx="1097280" cy="384048"/>
+          </a:xfrm>
+          <a:prstGeom prst="rect">
+            <a:avLst/>
+          </a:prstGeom>
+          <a:noFill/>
+          <a:ln/>
+        </p:spPr>
+        <p:txBody>
+          <a:bodyPr wrap="square" rtlCol="0" anchor="ctr"/>
+          <a:lstStyle/>
+          <a:p>
+            <a:pPr indent="0" marL="0">
+              <a:buNone/>
+            </a:pPr>
+            <a:r>
+              <a:rPr lang="en-US" sz="1000" b="1" dirty="0">
+                <a:solidFill>
+                  <a:srgbClr val="718096"/>
+                </a:solidFill>
+                <a:latin typeface="Arial" pitchFamily="34" charset="0"/>
+                <a:ea typeface="Arial" pitchFamily="34" charset="-122"/>
+                <a:cs typeface="Arial" pitchFamily="34" charset="-120"/>
+              </a:rPr>
+              <a:t>Ticket</a:t>
+            </a:r>
+            <a:endParaRPr lang="en-US" sz="1000" dirty="0"/>
+          </a:p>
+        </p:txBody>
+      </p:sp>
+      <p:sp>
+        <p:nvSpPr>
+          <p:cNvPr id="17" name="Text 15"/>
+          <p:cNvSpPr/>
+          <p:nvPr/>
+        </p:nvSpPr>
+        <p:spPr>
+          <a:xfrm>
+            <a:off x="2011680" y="2103120"/>
+            <a:ext cx="2011680" cy="384048"/>
+          </a:xfrm>
+          <a:prstGeom prst="rect">
+            <a:avLst/>
+          </a:prstGeom>
+          <a:noFill/>
+          <a:ln/>
+        </p:spPr>
+        <p:txBody>
+          <a:bodyPr wrap="square" rtlCol="0" anchor="ctr"/>
+          <a:lstStyle/>
+          <a:p>
+            <a:pPr indent="0" marL="0">
+              <a:buNone/>
+            </a:pPr>
+            <a:r>
+              <a:rPr lang="en-US" sz="1050" dirty="0">
+                <a:solidFill>
+                  <a:srgbClr val="2D3748"/>
+                </a:solidFill>
+                <a:latin typeface="Arial" pitchFamily="34" charset="0"/>
+                <a:ea typeface="Arial" pitchFamily="34" charset="-122"/>
+                <a:cs typeface="Arial" pitchFamily="34" charset="-120"/>
+              </a:rPr>
+              <a:t>$1,990 – $8,490 MXN/mes</a:t>
+            </a:r>
+            <a:endParaRPr lang="en-US" sz="1050" dirty="0"/>
+          </a:p>
+        </p:txBody>
+      </p:sp>
+      <p:sp>
+        <p:nvSpPr>
+          <p:cNvPr id="18" name="Text 16"/>
+          <p:cNvSpPr/>
+          <p:nvPr/>
+        </p:nvSpPr>
+        <p:spPr>
+          <a:xfrm>
+            <a:off x="502920" y="2560320"/>
+            <a:ext cx="365760" cy="384048"/>
+          </a:xfrm>
+          <a:prstGeom prst="rect">
+            <a:avLst/>
+          </a:prstGeom>
+          <a:noFill/>
+          <a:ln/>
+        </p:spPr>
+        <p:txBody>
+          <a:bodyPr wrap="square" rtlCol="0" anchor="ctr"/>
+          <a:lstStyle/>
+          <a:p>
+            <a:pPr algn="ctr" indent="0" marL="0">
+              <a:buNone/>
+            </a:pPr>
+            <a:r>
+              <a:rPr lang="en-US" sz="1400" dirty="0">
+                <a:solidFill>
+                  <a:srgbClr val="000000"/>
+                </a:solidFill>
+              </a:rPr>
+              <a:t>⏱</a:t>
+            </a:r>
+            <a:endParaRPr lang="en-US" sz="1400" dirty="0"/>
+          </a:p>
+        </p:txBody>
+      </p:sp>
+      <p:sp>
+        <p:nvSpPr>
+          <p:cNvPr id="19" name="Text 17"/>
+          <p:cNvSpPr/>
+          <p:nvPr/>
+        </p:nvSpPr>
+        <p:spPr>
+          <a:xfrm>
+            <a:off x="896112" y="2560320"/>
+            <a:ext cx="1097280" cy="384048"/>
+          </a:xfrm>
+          <a:prstGeom prst="rect">
+            <a:avLst/>
+          </a:prstGeom>
+          <a:noFill/>
+          <a:ln/>
+        </p:spPr>
+        <p:txBody>
+          <a:bodyPr wrap="square" rtlCol="0" anchor="ctr"/>
+          <a:lstStyle/>
+          <a:p>
+            <a:pPr indent="0" marL="0">
+              <a:buNone/>
+            </a:pPr>
+            <a:r>
+              <a:rPr lang="en-US" sz="1000" b="1" dirty="0">
+                <a:solidFill>
+                  <a:srgbClr val="718096"/>
+                </a:solidFill>
+                <a:latin typeface="Arial" pitchFamily="34" charset="0"/>
+                <a:ea typeface="Arial" pitchFamily="34" charset="-122"/>
+                <a:cs typeface="Arial" pitchFamily="34" charset="-120"/>
+              </a:rPr>
+              <a:t>Ciclo de venta</a:t>
+            </a:r>
+            <a:endParaRPr lang="en-US" sz="1000" dirty="0"/>
+          </a:p>
+        </p:txBody>
+      </p:sp>
+      <p:sp>
+        <p:nvSpPr>
+          <p:cNvPr id="20" name="Text 18"/>
+          <p:cNvSpPr/>
+          <p:nvPr/>
+        </p:nvSpPr>
+        <p:spPr>
+          <a:xfrm>
+            <a:off x="2011680" y="2560320"/>
+            <a:ext cx="2011680" cy="384048"/>
+          </a:xfrm>
+          <a:prstGeom prst="rect">
+            <a:avLst/>
+          </a:prstGeom>
+          <a:noFill/>
+          <a:ln/>
+        </p:spPr>
+        <p:txBody>
+          <a:bodyPr wrap="square" rtlCol="0" anchor="ctr"/>
+          <a:lstStyle/>
+          <a:p>
+            <a:pPr indent="0" marL="0">
+              <a:buNone/>
+            </a:pPr>
+            <a:r>
+              <a:rPr lang="en-US" sz="1050" dirty="0">
+                <a:solidFill>
+                  <a:srgbClr val="2D3748"/>
+                </a:solidFill>
+                <a:latin typeface="Arial" pitchFamily="34" charset="0"/>
+                <a:ea typeface="Arial" pitchFamily="34" charset="-122"/>
+                <a:cs typeface="Arial" pitchFamily="34" charset="-120"/>
+              </a:rPr>
+              <a:t>2–6 meses · B2B largo</a:t>
+            </a:r>
+            <a:endParaRPr lang="en-US" sz="1050" dirty="0"/>
+          </a:p>
+        </p:txBody>
+      </p:sp>
+      <p:sp>
+        <p:nvSpPr>
+          <p:cNvPr id="21" name="Text 19"/>
+          <p:cNvSpPr/>
+          <p:nvPr/>
+        </p:nvSpPr>
+        <p:spPr>
+          <a:xfrm>
+            <a:off x="502920" y="3017520"/>
+            <a:ext cx="365760" cy="384048"/>
+          </a:xfrm>
+          <a:prstGeom prst="rect">
+            <a:avLst/>
+          </a:prstGeom>
+          <a:noFill/>
+          <a:ln/>
+        </p:spPr>
+        <p:txBody>
+          <a:bodyPr wrap="square" rtlCol="0" anchor="ctr"/>
+          <a:lstStyle/>
+          <a:p>
+            <a:pPr algn="ctr" indent="0" marL="0">
+              <a:buNone/>
+            </a:pPr>
+            <a:r>
+              <a:rPr lang="en-US" sz="1400" dirty="0">
+                <a:solidFill>
+                  <a:srgbClr val="000000"/>
+                </a:solidFill>
+              </a:rPr>
+              <a:t>📣</a:t>
+            </a:r>
+            <a:endParaRPr lang="en-US" sz="1400" dirty="0"/>
+          </a:p>
+        </p:txBody>
+      </p:sp>
+      <p:sp>
+        <p:nvSpPr>
+          <p:cNvPr id="22" name="Text 20"/>
+          <p:cNvSpPr/>
+          <p:nvPr/>
+        </p:nvSpPr>
+        <p:spPr>
+          <a:xfrm>
+            <a:off x="896112" y="3017520"/>
+            <a:ext cx="1097280" cy="384048"/>
+          </a:xfrm>
+          <a:prstGeom prst="rect">
+            <a:avLst/>
+          </a:prstGeom>
+          <a:noFill/>
+          <a:ln/>
+        </p:spPr>
+        <p:txBody>
+          <a:bodyPr wrap="square" rtlCol="0" anchor="ctr"/>
+          <a:lstStyle/>
+          <a:p>
+            <a:pPr indent="0" marL="0">
+              <a:buNone/>
+            </a:pPr>
+            <a:r>
+              <a:rPr lang="en-US" sz="1000" b="1" dirty="0">
+                <a:solidFill>
+                  <a:srgbClr val="718096"/>
+                </a:solidFill>
+                <a:latin typeface="Arial" pitchFamily="34" charset="0"/>
+                <a:ea typeface="Arial" pitchFamily="34" charset="-122"/>
+                <a:cs typeface="Arial" pitchFamily="34" charset="-120"/>
+              </a:rPr>
+              <a:t>Adquisición</a:t>
+            </a:r>
+            <a:endParaRPr lang="en-US" sz="1000" dirty="0"/>
+          </a:p>
+        </p:txBody>
+      </p:sp>
+      <p:sp>
+        <p:nvSpPr>
+          <p:cNvPr id="23" name="Text 21"/>
+          <p:cNvSpPr/>
+          <p:nvPr/>
+        </p:nvSpPr>
+        <p:spPr>
+          <a:xfrm>
+            <a:off x="2011680" y="3017520"/>
+            <a:ext cx="2011680" cy="384048"/>
+          </a:xfrm>
+          <a:prstGeom prst="rect">
+            <a:avLst/>
+          </a:prstGeom>
+          <a:noFill/>
+          <a:ln/>
+        </p:spPr>
+        <p:txBody>
+          <a:bodyPr wrap="square" rtlCol="0" anchor="ctr"/>
+          <a:lstStyle/>
+          <a:p>
+            <a:pPr indent="0" marL="0">
+              <a:buNone/>
+            </a:pPr>
+            <a:r>
+              <a:rPr lang="en-US" sz="1050" dirty="0">
+                <a:solidFill>
+                  <a:srgbClr val="2D3748"/>
+                </a:solidFill>
+                <a:latin typeface="Arial" pitchFamily="34" charset="0"/>
+                <a:ea typeface="Arial" pitchFamily="34" charset="-122"/>
+                <a:cs typeface="Arial" pitchFamily="34" charset="-120"/>
+              </a:rPr>
+              <a:t>Ventas de campo</a:t>
+            </a:r>
+            <a:endParaRPr lang="en-US" sz="1050" dirty="0"/>
+          </a:p>
+        </p:txBody>
+      </p:sp>
+      <p:sp>
+        <p:nvSpPr>
+          <p:cNvPr id="24" name="Text 22"/>
+          <p:cNvSpPr/>
+          <p:nvPr/>
+        </p:nvSpPr>
+        <p:spPr>
+          <a:xfrm>
+            <a:off x="502920" y="3474720"/>
+            <a:ext cx="365760" cy="384048"/>
+          </a:xfrm>
+          <a:prstGeom prst="rect">
+            <a:avLst/>
+          </a:prstGeom>
+          <a:noFill/>
+          <a:ln/>
+        </p:spPr>
+        <p:txBody>
+          <a:bodyPr wrap="square" rtlCol="0" anchor="ctr"/>
+          <a:lstStyle/>
+          <a:p>
+            <a:pPr algn="ctr" indent="0" marL="0">
+              <a:buNone/>
+            </a:pPr>
+            <a:r>
+              <a:rPr lang="en-US" sz="1400" dirty="0">
+                <a:solidFill>
+                  <a:srgbClr val="000000"/>
+                </a:solidFill>
+              </a:rPr>
+              <a:t>📊</a:t>
+            </a:r>
+            <a:endParaRPr lang="en-US" sz="1400" dirty="0"/>
+          </a:p>
+        </p:txBody>
+      </p:sp>
+      <p:sp>
+        <p:nvSpPr>
+          <p:cNvPr id="25" name="Text 23"/>
+          <p:cNvSpPr/>
+          <p:nvPr/>
+        </p:nvSpPr>
+        <p:spPr>
+          <a:xfrm>
+            <a:off x="896112" y="3474720"/>
+            <a:ext cx="1097280" cy="384048"/>
+          </a:xfrm>
+          <a:prstGeom prst="rect">
+            <a:avLst/>
+          </a:prstGeom>
+          <a:noFill/>
+          <a:ln/>
+        </p:spPr>
+        <p:txBody>
+          <a:bodyPr wrap="square" rtlCol="0" anchor="ctr"/>
+          <a:lstStyle/>
+          <a:p>
+            <a:pPr indent="0" marL="0">
+              <a:buNone/>
+            </a:pPr>
+            <a:r>
+              <a:rPr lang="en-US" sz="1000" b="1" dirty="0">
+                <a:solidFill>
+                  <a:srgbClr val="718096"/>
+                </a:solidFill>
+                <a:latin typeface="Arial" pitchFamily="34" charset="0"/>
+                <a:ea typeface="Arial" pitchFamily="34" charset="-122"/>
+                <a:cs typeface="Arial" pitchFamily="34" charset="-120"/>
+              </a:rPr>
+              <a:t>SAM México</a:t>
+            </a:r>
+            <a:endParaRPr lang="en-US" sz="1000" dirty="0"/>
+          </a:p>
+        </p:txBody>
+      </p:sp>
+      <p:sp>
+        <p:nvSpPr>
+          <p:cNvPr id="26" name="Text 24"/>
+          <p:cNvSpPr/>
+          <p:nvPr/>
+        </p:nvSpPr>
+        <p:spPr>
+          <a:xfrm>
+            <a:off x="2011680" y="3474720"/>
+            <a:ext cx="2011680" cy="384048"/>
+          </a:xfrm>
+          <a:prstGeom prst="rect">
+            <a:avLst/>
+          </a:prstGeom>
+          <a:noFill/>
+          <a:ln/>
+        </p:spPr>
+        <p:txBody>
+          <a:bodyPr wrap="square" rtlCol="0" anchor="ctr"/>
+          <a:lstStyle/>
+          <a:p>
+            <a:pPr indent="0" marL="0">
+              <a:buNone/>
+            </a:pPr>
+            <a:r>
+              <a:rPr lang="en-US" sz="1050" dirty="0">
+                <a:solidFill>
+                  <a:srgbClr val="2D3748"/>
+                </a:solidFill>
+                <a:latin typeface="Arial" pitchFamily="34" charset="0"/>
+                <a:ea typeface="Arial" pitchFamily="34" charset="-122"/>
+                <a:cs typeface="Arial" pitchFamily="34" charset="-120"/>
+              </a:rPr>
+              <a:t>~1,200 residencias</a:t>
+            </a:r>
+            <a:endParaRPr lang="en-US" sz="1050" dirty="0"/>
+          </a:p>
+        </p:txBody>
+      </p:sp>
+      <p:sp>
+        <p:nvSpPr>
+          <p:cNvPr id="27" name="Text 25"/>
+          <p:cNvSpPr/>
+          <p:nvPr/>
+        </p:nvSpPr>
+        <p:spPr>
+          <a:xfrm>
+            <a:off x="4160520" y="2651760"/>
+            <a:ext cx="548640" cy="502920"/>
+          </a:xfrm>
+          <a:prstGeom prst="rect">
+            <a:avLst/>
+          </a:prstGeom>
+          <a:noFill/>
+          <a:ln/>
+        </p:spPr>
+        <p:txBody>
+          <a:bodyPr wrap="square" rtlCol="0" anchor="ctr"/>
+          <a:lstStyle/>
+          <a:p>
+            <a:pPr algn="ctr" indent="0" marL="0">
+              <a:buNone/>
+            </a:pPr>
+            <a:r>
+              <a:rPr lang="en-US" sz="2400" b="1" dirty="0">
+                <a:solidFill>
+                  <a:srgbClr val="5B8DB8"/>
+                </a:solidFill>
+                <a:latin typeface="Arial" pitchFamily="34" charset="0"/>
+                <a:ea typeface="Arial" pitchFamily="34" charset="-122"/>
+                <a:cs typeface="Arial" pitchFamily="34" charset="-120"/>
+              </a:rPr>
+              <a:t>⇄</a:t>
+            </a:r>
+            <a:endParaRPr lang="en-US" sz="2400" dirty="0"/>
+          </a:p>
+        </p:txBody>
+      </p:sp>
+      <p:sp>
+        <p:nvSpPr>
+          <p:cNvPr id="28" name="Shape 26"/>
+          <p:cNvSpPr/>
+          <p:nvPr/>
+        </p:nvSpPr>
+        <p:spPr>
+          <a:xfrm>
+            <a:off x="4626864" y="1170432"/>
+            <a:ext cx="4151376" cy="3383280"/>
+          </a:xfrm>
+          <a:prstGeom prst="roundRect">
+            <a:avLst>
+              <a:gd name="adj" fmla="val 2162"/>
+            </a:avLst>
+          </a:prstGeom>
+          <a:solidFill>
+            <a:srgbClr val="FFF7ED"/>
+          </a:solidFill>
+          <a:ln w="6350">
+            <a:solidFill>
+              <a:srgbClr val="E2E8F0"/>
+            </a:solidFill>
+            <a:prstDash val="solid"/>
+          </a:ln>
+        </p:spPr>
+      </p:sp>
+      <p:sp>
+        <p:nvSpPr>
+          <p:cNvPr id="29" name="Text 27"/>
+          <p:cNvSpPr/>
+          <p:nvPr/>
+        </p:nvSpPr>
+        <p:spPr>
+          <a:xfrm>
+            <a:off x="4736592" y="1243584"/>
+            <a:ext cx="3840480" cy="329184"/>
+          </a:xfrm>
+          <a:prstGeom prst="rect">
+            <a:avLst/>
+          </a:prstGeom>
+          <a:noFill/>
+          <a:ln/>
+        </p:spPr>
+        <p:txBody>
+          <a:bodyPr wrap="square" rtlCol="0" anchor="ctr"/>
+          <a:lstStyle/>
+          <a:p>
+            <a:pPr algn="ctr" indent="0" marL="0">
+              <a:buNone/>
+            </a:pPr>
+            <a:r>
+              <a:rPr lang="en-US" sz="1200" b="1" dirty="0">
+                <a:solidFill>
+                  <a:srgbClr val="C4786A"/>
+                </a:solidFill>
+                <a:latin typeface="Arial" pitchFamily="34" charset="0"/>
+                <a:ea typeface="Arial" pitchFamily="34" charset="-122"/>
+                <a:cs typeface="Arial" pitchFamily="34" charset="-120"/>
+              </a:rPr>
+              <a:t>B2C — Fase paralela  🆕</a:t>
+            </a:r>
+            <a:endParaRPr lang="en-US" sz="1200" dirty="0"/>
+          </a:p>
+        </p:txBody>
+      </p:sp>
+      <p:sp>
+        <p:nvSpPr>
+          <p:cNvPr id="30" name="Text 28"/>
+          <p:cNvSpPr/>
+          <p:nvPr/>
+        </p:nvSpPr>
+        <p:spPr>
+          <a:xfrm>
+            <a:off x="4736592" y="1645920"/>
+            <a:ext cx="365760" cy="384048"/>
+          </a:xfrm>
+          <a:prstGeom prst="rect">
+            <a:avLst/>
+          </a:prstGeom>
+          <a:noFill/>
+          <a:ln/>
+        </p:spPr>
+        <p:txBody>
+          <a:bodyPr wrap="square" rtlCol="0" anchor="ctr"/>
+          <a:lstStyle/>
+          <a:p>
+            <a:pPr algn="ctr" indent="0" marL="0">
+              <a:buNone/>
+            </a:pPr>
+            <a:r>
+              <a:rPr lang="en-US" sz="1400" dirty="0">
+                <a:solidFill>
+                  <a:srgbClr val="000000"/>
+                </a:solidFill>
+              </a:rPr>
+              <a:t>👪</a:t>
+            </a:r>
+            <a:endParaRPr lang="en-US" sz="1400" dirty="0"/>
+          </a:p>
+        </p:txBody>
+      </p:sp>
+      <p:sp>
+        <p:nvSpPr>
+          <p:cNvPr id="31" name="Text 29"/>
+          <p:cNvSpPr/>
+          <p:nvPr/>
+        </p:nvSpPr>
+        <p:spPr>
+          <a:xfrm>
+            <a:off x="5138928" y="1645920"/>
+            <a:ext cx="1097280" cy="384048"/>
+          </a:xfrm>
+          <a:prstGeom prst="rect">
+            <a:avLst/>
+          </a:prstGeom>
+          <a:noFill/>
+          <a:ln/>
+        </p:spPr>
+        <p:txBody>
+          <a:bodyPr wrap="square" rtlCol="0" anchor="ctr"/>
+          <a:lstStyle/>
+          <a:p>
+            <a:pPr indent="0" marL="0">
+              <a:buNone/>
+            </a:pPr>
+            <a:r>
+              <a:rPr lang="en-US" sz="1000" b="1" dirty="0">
+                <a:solidFill>
+                  <a:srgbClr val="718096"/>
+                </a:solidFill>
+                <a:latin typeface="Arial" pitchFamily="34" charset="0"/>
+                <a:ea typeface="Arial" pitchFamily="34" charset="-122"/>
+                <a:cs typeface="Arial" pitchFamily="34" charset="-120"/>
+              </a:rPr>
+              <a:t>Cliente</a:t>
+            </a:r>
+            <a:endParaRPr lang="en-US" sz="1000" dirty="0"/>
+          </a:p>
+        </p:txBody>
+      </p:sp>
+      <p:sp>
+        <p:nvSpPr>
+          <p:cNvPr id="32" name="Text 30"/>
+          <p:cNvSpPr/>
+          <p:nvPr/>
+        </p:nvSpPr>
+        <p:spPr>
+          <a:xfrm>
+            <a:off x="6254496" y="1645920"/>
+            <a:ext cx="2450592" cy="384048"/>
+          </a:xfrm>
+          <a:prstGeom prst="rect">
+            <a:avLst/>
+          </a:prstGeom>
+          <a:noFill/>
+          <a:ln/>
+        </p:spPr>
+        <p:txBody>
+          <a:bodyPr wrap="square" rtlCol="0" anchor="ctr"/>
+          <a:lstStyle/>
+          <a:p>
+            <a:pPr indent="0" marL="0">
+              <a:buNone/>
+            </a:pPr>
+            <a:r>
+              <a:rPr lang="en-US" sz="1050" dirty="0">
+                <a:solidFill>
+                  <a:srgbClr val="2D3748"/>
+                </a:solidFill>
+                <a:latin typeface="Arial" pitchFamily="34" charset="0"/>
+                <a:ea typeface="Arial" pitchFamily="34" charset="-122"/>
+                <a:cs typeface="Arial" pitchFamily="34" charset="-120"/>
+              </a:rPr>
+              <a:t>Familia de adulto mayor</a:t>
+            </a:r>
+            <a:endParaRPr lang="en-US" sz="1050" dirty="0"/>
+          </a:p>
+        </p:txBody>
+      </p:sp>
+      <p:sp>
+        <p:nvSpPr>
+          <p:cNvPr id="33" name="Text 31"/>
+          <p:cNvSpPr/>
+          <p:nvPr/>
+        </p:nvSpPr>
+        <p:spPr>
+          <a:xfrm>
+            <a:off x="4736592" y="2103120"/>
+            <a:ext cx="365760" cy="384048"/>
+          </a:xfrm>
+          <a:prstGeom prst="rect">
+            <a:avLst/>
+          </a:prstGeom>
+          <a:noFill/>
+          <a:ln/>
+        </p:spPr>
+        <p:txBody>
+          <a:bodyPr wrap="square" rtlCol="0" anchor="ctr"/>
+          <a:lstStyle/>
+          <a:p>
+            <a:pPr algn="ctr" indent="0" marL="0">
+              <a:buNone/>
+            </a:pPr>
+            <a:r>
+              <a:rPr lang="en-US" sz="1400" dirty="0">
+                <a:solidFill>
+                  <a:srgbClr val="000000"/>
+                </a:solidFill>
+              </a:rPr>
+              <a:t>💰</a:t>
+            </a:r>
+            <a:endParaRPr lang="en-US" sz="1400" dirty="0"/>
+          </a:p>
+        </p:txBody>
+      </p:sp>
+      <p:sp>
+        <p:nvSpPr>
+          <p:cNvPr id="34" name="Text 32"/>
+          <p:cNvSpPr/>
+          <p:nvPr/>
+        </p:nvSpPr>
+        <p:spPr>
+          <a:xfrm>
+            <a:off x="5138928" y="2103120"/>
+            <a:ext cx="1097280" cy="384048"/>
+          </a:xfrm>
+          <a:prstGeom prst="rect">
+            <a:avLst/>
+          </a:prstGeom>
+          <a:noFill/>
+          <a:ln/>
+        </p:spPr>
+        <p:txBody>
+          <a:bodyPr wrap="square" rtlCol="0" anchor="ctr"/>
+          <a:lstStyle/>
+          <a:p>
+            <a:pPr indent="0" marL="0">
+              <a:buNone/>
+            </a:pPr>
+            <a:r>
+              <a:rPr lang="en-US" sz="1000" b="1" dirty="0">
+                <a:solidFill>
+                  <a:srgbClr val="718096"/>
+                </a:solidFill>
+                <a:latin typeface="Arial" pitchFamily="34" charset="0"/>
+                <a:ea typeface="Arial" pitchFamily="34" charset="-122"/>
+                <a:cs typeface="Arial" pitchFamily="34" charset="-120"/>
+              </a:rPr>
+              <a:t>Ticket</a:t>
+            </a:r>
+            <a:endParaRPr lang="en-US" sz="1000" dirty="0"/>
+          </a:p>
+        </p:txBody>
+      </p:sp>
+      <p:sp>
+        <p:nvSpPr>
+          <p:cNvPr id="35" name="Text 33"/>
+          <p:cNvSpPr/>
+          <p:nvPr/>
+        </p:nvSpPr>
+        <p:spPr>
+          <a:xfrm>
+            <a:off x="6254496" y="2103120"/>
+            <a:ext cx="2450592" cy="384048"/>
+          </a:xfrm>
+          <a:prstGeom prst="rect">
+            <a:avLst/>
+          </a:prstGeom>
+          <a:noFill/>
+          <a:ln/>
+        </p:spPr>
+        <p:txBody>
+          <a:bodyPr wrap="square" rtlCol="0" anchor="ctr"/>
+          <a:lstStyle/>
+          <a:p>
+            <a:pPr indent="0" marL="0">
+              <a:buNone/>
+            </a:pPr>
+            <a:r>
+              <a:rPr lang="en-US" sz="1050" dirty="0">
+                <a:solidFill>
+                  <a:srgbClr val="2D3748"/>
+                </a:solidFill>
+                <a:latin typeface="Arial" pitchFamily="34" charset="0"/>
+                <a:ea typeface="Arial" pitchFamily="34" charset="-122"/>
+                <a:cs typeface="Arial" pitchFamily="34" charset="-120"/>
+              </a:rPr>
+              <a:t>$199 – $399 MXN/mes</a:t>
+            </a:r>
+            <a:endParaRPr lang="en-US" sz="1050" dirty="0"/>
+          </a:p>
+        </p:txBody>
+      </p:sp>
+      <p:sp>
+        <p:nvSpPr>
+          <p:cNvPr id="36" name="Text 34"/>
+          <p:cNvSpPr/>
+          <p:nvPr/>
+        </p:nvSpPr>
+        <p:spPr>
+          <a:xfrm>
+            <a:off x="4736592" y="2560320"/>
+            <a:ext cx="365760" cy="384048"/>
+          </a:xfrm>
+          <a:prstGeom prst="rect">
+            <a:avLst/>
+          </a:prstGeom>
+          <a:noFill/>
+          <a:ln/>
+        </p:spPr>
+        <p:txBody>
+          <a:bodyPr wrap="square" rtlCol="0" anchor="ctr"/>
+          <a:lstStyle/>
+          <a:p>
+            <a:pPr algn="ctr" indent="0" marL="0">
+              <a:buNone/>
+            </a:pPr>
+            <a:r>
+              <a:rPr lang="en-US" sz="1400" dirty="0">
+                <a:solidFill>
+                  <a:srgbClr val="000000"/>
+                </a:solidFill>
+              </a:rPr>
+              <a:t>⚡</a:t>
+            </a:r>
+            <a:endParaRPr lang="en-US" sz="1400" dirty="0"/>
+          </a:p>
+        </p:txBody>
+      </p:sp>
+      <p:sp>
+        <p:nvSpPr>
+          <p:cNvPr id="37" name="Text 35"/>
+          <p:cNvSpPr/>
+          <p:nvPr/>
+        </p:nvSpPr>
+        <p:spPr>
+          <a:xfrm>
+            <a:off x="5138928" y="2560320"/>
+            <a:ext cx="1097280" cy="384048"/>
+          </a:xfrm>
+          <a:prstGeom prst="rect">
+            <a:avLst/>
+          </a:prstGeom>
+          <a:noFill/>
+          <a:ln/>
+        </p:spPr>
+        <p:txBody>
+          <a:bodyPr wrap="square" rtlCol="0" anchor="ctr"/>
+          <a:lstStyle/>
+          <a:p>
+            <a:pPr indent="0" marL="0">
+              <a:buNone/>
+            </a:pPr>
+            <a:r>
+              <a:rPr lang="en-US" sz="1000" b="1" dirty="0">
+                <a:solidFill>
+                  <a:srgbClr val="718096"/>
+                </a:solidFill>
+                <a:latin typeface="Arial" pitchFamily="34" charset="0"/>
+                <a:ea typeface="Arial" pitchFamily="34" charset="-122"/>
+                <a:cs typeface="Arial" pitchFamily="34" charset="-120"/>
+              </a:rPr>
+              <a:t>Ciclo de venta</a:t>
+            </a:r>
+            <a:endParaRPr lang="en-US" sz="1000" dirty="0"/>
+          </a:p>
+        </p:txBody>
+      </p:sp>
+      <p:sp>
+        <p:nvSpPr>
+          <p:cNvPr id="38" name="Text 36"/>
+          <p:cNvSpPr/>
+          <p:nvPr/>
+        </p:nvSpPr>
+        <p:spPr>
+          <a:xfrm>
+            <a:off x="6254496" y="2560320"/>
+            <a:ext cx="2450592" cy="384048"/>
+          </a:xfrm>
+          <a:prstGeom prst="rect">
+            <a:avLst/>
+          </a:prstGeom>
+          <a:noFill/>
+          <a:ln/>
+        </p:spPr>
+        <p:txBody>
+          <a:bodyPr wrap="square" rtlCol="0" anchor="ctr"/>
+          <a:lstStyle/>
+          <a:p>
+            <a:pPr indent="0" marL="0">
+              <a:buNone/>
+            </a:pPr>
+            <a:r>
+              <a:rPr lang="en-US" sz="1050" dirty="0">
+                <a:solidFill>
+                  <a:srgbClr val="2D3748"/>
+                </a:solidFill>
+                <a:latin typeface="Arial" pitchFamily="34" charset="0"/>
+                <a:ea typeface="Arial" pitchFamily="34" charset="-122"/>
+                <a:cs typeface="Arial" pitchFamily="34" charset="-120"/>
+              </a:rPr>
+              <a:t>&lt; 5 min · autoservicio</a:t>
+            </a:r>
+            <a:endParaRPr lang="en-US" sz="1050" dirty="0"/>
+          </a:p>
+        </p:txBody>
+      </p:sp>
+      <p:sp>
+        <p:nvSpPr>
+          <p:cNvPr id="39" name="Text 37"/>
+          <p:cNvSpPr/>
+          <p:nvPr/>
+        </p:nvSpPr>
+        <p:spPr>
+          <a:xfrm>
+            <a:off x="4736592" y="3017520"/>
+            <a:ext cx="365760" cy="384048"/>
+          </a:xfrm>
+          <a:prstGeom prst="rect">
+            <a:avLst/>
+          </a:prstGeom>
+          <a:noFill/>
+          <a:ln/>
+        </p:spPr>
+        <p:txBody>
+          <a:bodyPr wrap="square" rtlCol="0" anchor="ctr"/>
+          <a:lstStyle/>
+          <a:p>
+            <a:pPr algn="ctr" indent="0" marL="0">
+              <a:buNone/>
+            </a:pPr>
+            <a:r>
+              <a:rPr lang="en-US" sz="1400" dirty="0">
+                <a:solidFill>
+                  <a:srgbClr val="000000"/>
+                </a:solidFill>
+              </a:rPr>
+              <a:t>📱</a:t>
+            </a:r>
+            <a:endParaRPr lang="en-US" sz="1400" dirty="0"/>
+          </a:p>
+        </p:txBody>
+      </p:sp>
+      <p:sp>
+        <p:nvSpPr>
+          <p:cNvPr id="40" name="Text 38"/>
+          <p:cNvSpPr/>
+          <p:nvPr/>
+        </p:nvSpPr>
+        <p:spPr>
+          <a:xfrm>
+            <a:off x="5138928" y="3017520"/>
+            <a:ext cx="1097280" cy="384048"/>
+          </a:xfrm>
+          <a:prstGeom prst="rect">
+            <a:avLst/>
+          </a:prstGeom>
+          <a:noFill/>
+          <a:ln/>
+        </p:spPr>
+        <p:txBody>
+          <a:bodyPr wrap="square" rtlCol="0" anchor="ctr"/>
+          <a:lstStyle/>
+          <a:p>
+            <a:pPr indent="0" marL="0">
+              <a:buNone/>
+            </a:pPr>
+            <a:r>
+              <a:rPr lang="en-US" sz="1000" b="1" dirty="0">
+                <a:solidFill>
+                  <a:srgbClr val="718096"/>
+                </a:solidFill>
+                <a:latin typeface="Arial" pitchFamily="34" charset="0"/>
+                <a:ea typeface="Arial" pitchFamily="34" charset="-122"/>
+                <a:cs typeface="Arial" pitchFamily="34" charset="-120"/>
+              </a:rPr>
+              <a:t>Adquisición</a:t>
+            </a:r>
+            <a:endParaRPr lang="en-US" sz="1000" dirty="0"/>
+          </a:p>
+        </p:txBody>
+      </p:sp>
+      <p:sp>
+        <p:nvSpPr>
+          <p:cNvPr id="41" name="Text 39"/>
+          <p:cNvSpPr/>
+          <p:nvPr/>
+        </p:nvSpPr>
+        <p:spPr>
+          <a:xfrm>
+            <a:off x="6254496" y="3017520"/>
+            <a:ext cx="2450592" cy="384048"/>
+          </a:xfrm>
+          <a:prstGeom prst="rect">
+            <a:avLst/>
+          </a:prstGeom>
+          <a:noFill/>
+          <a:ln/>
+        </p:spPr>
+        <p:txBody>
+          <a:bodyPr wrap="square" rtlCol="0" anchor="ctr"/>
+          <a:lstStyle/>
+          <a:p>
+            <a:pPr indent="0" marL="0">
+              <a:buNone/>
+            </a:pPr>
+            <a:r>
+              <a:rPr lang="en-US" sz="1050" dirty="0">
+                <a:solidFill>
+                  <a:srgbClr val="2D3748"/>
+                </a:solidFill>
+                <a:latin typeface="Arial" pitchFamily="34" charset="0"/>
+                <a:ea typeface="Arial" pitchFamily="34" charset="-122"/>
+                <a:cs typeface="Arial" pitchFamily="34" charset="-120"/>
+              </a:rPr>
+              <a:t>App stores · redes sociales</a:t>
+            </a:r>
+            <a:endParaRPr lang="en-US" sz="1050" dirty="0"/>
+          </a:p>
+        </p:txBody>
+      </p:sp>
+      <p:sp>
+        <p:nvSpPr>
+          <p:cNvPr id="42" name="Text 40"/>
+          <p:cNvSpPr/>
+          <p:nvPr/>
+        </p:nvSpPr>
+        <p:spPr>
+          <a:xfrm>
+            <a:off x="4736592" y="3474720"/>
+            <a:ext cx="365760" cy="384048"/>
+          </a:xfrm>
+          <a:prstGeom prst="rect">
+            <a:avLst/>
+          </a:prstGeom>
+          <a:noFill/>
+          <a:ln/>
+        </p:spPr>
+        <p:txBody>
+          <a:bodyPr wrap="square" rtlCol="0" anchor="ctr"/>
+          <a:lstStyle/>
+          <a:p>
+            <a:pPr algn="ctr" indent="0" marL="0">
+              <a:buNone/>
+            </a:pPr>
+            <a:r>
+              <a:rPr lang="en-US" sz="1400" dirty="0">
+                <a:solidFill>
+                  <a:srgbClr val="000000"/>
+                </a:solidFill>
+              </a:rPr>
+              <a:t>📊</a:t>
+            </a:r>
+            <a:endParaRPr lang="en-US" sz="1400" dirty="0"/>
+          </a:p>
+        </p:txBody>
+      </p:sp>
+      <p:sp>
+        <p:nvSpPr>
+          <p:cNvPr id="43" name="Text 41"/>
+          <p:cNvSpPr/>
+          <p:nvPr/>
+        </p:nvSpPr>
+        <p:spPr>
+          <a:xfrm>
+            <a:off x="5138928" y="3474720"/>
+            <a:ext cx="1097280" cy="384048"/>
+          </a:xfrm>
+          <a:prstGeom prst="rect">
+            <a:avLst/>
+          </a:prstGeom>
+          <a:noFill/>
+          <a:ln/>
+        </p:spPr>
+        <p:txBody>
+          <a:bodyPr wrap="square" rtlCol="0" anchor="ctr"/>
+          <a:lstStyle/>
+          <a:p>
+            <a:pPr indent="0" marL="0">
+              <a:buNone/>
+            </a:pPr>
+            <a:r>
+              <a:rPr lang="en-US" sz="1000" b="1" dirty="0">
+                <a:solidFill>
+                  <a:srgbClr val="718096"/>
+                </a:solidFill>
+                <a:latin typeface="Arial" pitchFamily="34" charset="0"/>
+                <a:ea typeface="Arial" pitchFamily="34" charset="-122"/>
+                <a:cs typeface="Arial" pitchFamily="34" charset="-120"/>
+              </a:rPr>
+              <a:t>SAM México</a:t>
+            </a:r>
+            <a:endParaRPr lang="en-US" sz="1000" dirty="0"/>
+          </a:p>
+        </p:txBody>
+      </p:sp>
+      <p:sp>
+        <p:nvSpPr>
+          <p:cNvPr id="44" name="Text 42"/>
+          <p:cNvSpPr/>
+          <p:nvPr/>
+        </p:nvSpPr>
+        <p:spPr>
+          <a:xfrm>
+            <a:off x="6254496" y="3474720"/>
+            <a:ext cx="2450592" cy="384048"/>
+          </a:xfrm>
+          <a:prstGeom prst="rect">
+            <a:avLst/>
+          </a:prstGeom>
+          <a:noFill/>
+          <a:ln/>
+        </p:spPr>
+        <p:txBody>
+          <a:bodyPr wrap="square" rtlCol="0" anchor="ctr"/>
+          <a:lstStyle/>
+          <a:p>
+            <a:pPr indent="0" marL="0">
+              <a:buNone/>
+            </a:pPr>
+            <a:r>
+              <a:rPr lang="en-US" sz="1050" dirty="0">
+                <a:solidFill>
+                  <a:srgbClr val="2D3748"/>
+                </a:solidFill>
+                <a:latin typeface="Arial" pitchFamily="34" charset="0"/>
+                <a:ea typeface="Arial" pitchFamily="34" charset="-122"/>
+                <a:cs typeface="Arial" pitchFamily="34" charset="-120"/>
+              </a:rPr>
+              <a:t>~2M familias con cuidado activo</a:t>
+            </a:r>
+            <a:endParaRPr lang="en-US" sz="1050" dirty="0"/>
+          </a:p>
+        </p:txBody>
+      </p:sp>
+      <p:sp>
+        <p:nvSpPr>
+          <p:cNvPr id="45" name="Shape 43"/>
+          <p:cNvSpPr/>
+          <p:nvPr/>
+        </p:nvSpPr>
+        <p:spPr>
+          <a:xfrm>
+            <a:off x="365760" y="4663440"/>
+            <a:ext cx="8375904" cy="1005840"/>
+          </a:xfrm>
+          <a:prstGeom prst="roundRect">
+            <a:avLst>
+              <a:gd name="adj" fmla="val 7273"/>
+            </a:avLst>
+          </a:prstGeom>
+          <a:solidFill>
+            <a:srgbClr val="F0FAF4"/>
+          </a:solidFill>
+          <a:ln w="6350">
+            <a:solidFill>
+              <a:srgbClr val="E2E8F0"/>
+            </a:solidFill>
+            <a:prstDash val="solid"/>
+          </a:ln>
+        </p:spPr>
+      </p:sp>
+      <p:sp>
+        <p:nvSpPr>
+          <p:cNvPr id="46" name="Text 44"/>
+          <p:cNvSpPr/>
+          <p:nvPr/>
+        </p:nvSpPr>
+        <p:spPr>
+          <a:xfrm>
+            <a:off x="548640" y="4709160"/>
+            <a:ext cx="1828800" cy="320040"/>
+          </a:xfrm>
+          <a:prstGeom prst="rect">
+            <a:avLst/>
+          </a:prstGeom>
+          <a:noFill/>
+          <a:ln/>
+        </p:spPr>
+        <p:txBody>
+          <a:bodyPr wrap="square" rtlCol="0" anchor="ctr"/>
+          <a:lstStyle/>
+          <a:p>
+            <a:pPr indent="0" marL="0">
+              <a:buNone/>
+            </a:pPr>
+            <a:r>
+              <a:rPr lang="en-US" sz="1100" b="1" dirty="0">
+                <a:solidFill>
+                  <a:srgbClr val="7BA68A"/>
+                </a:solidFill>
+                <a:latin typeface="Arial" pitchFamily="34" charset="0"/>
+                <a:ea typeface="Arial" pitchFamily="34" charset="-122"/>
+                <a:cs typeface="Arial" pitchFamily="34" charset="-120"/>
+              </a:rPr>
+              <a:t>🔄  El flywheel</a:t>
+            </a:r>
+            <a:endParaRPr lang="en-US" sz="1100" dirty="0"/>
+          </a:p>
+        </p:txBody>
+      </p:sp>
+      <p:sp>
+        <p:nvSpPr>
+          <p:cNvPr id="47" name="Text 45"/>
+          <p:cNvSpPr/>
+          <p:nvPr/>
+        </p:nvSpPr>
+        <p:spPr>
+          <a:xfrm>
+            <a:off x="457200" y="5047488"/>
+            <a:ext cx="1078992" cy="530352"/>
+          </a:xfrm>
+          <a:prstGeom prst="rect">
+            <a:avLst/>
+          </a:prstGeom>
+          <a:noFill/>
+          <a:ln/>
+        </p:spPr>
+        <p:txBody>
+          <a:bodyPr wrap="square" rtlCol="0" anchor="ctr"/>
+          <a:lstStyle/>
+          <a:p>
+            <a:pPr algn="ctr" indent="0" marL="0">
+              <a:buNone/>
+            </a:pPr>
+            <a:r>
+              <a:rPr lang="en-US" sz="900" b="1" dirty="0">
+                <a:solidFill>
+                  <a:srgbClr val="2D3748"/>
+                </a:solidFill>
+                <a:latin typeface="Arial" pitchFamily="34" charset="0"/>
+                <a:ea typeface="Arial" pitchFamily="34" charset="-122"/>
+                <a:cs typeface="Arial" pitchFamily="34" charset="-120"/>
+              </a:rPr>
+              <a:t>Familia adopta</a:t>
+            </a:r>
+            <a:endParaRPr lang="en-US" sz="900" dirty="0"/>
+          </a:p>
+          <a:p>
+            <a:pPr algn="ctr" indent="0" marL="0">
+              <a:buNone/>
+            </a:pPr>
+            <a:r>
+              <a:rPr lang="en-US" sz="900" b="1" dirty="0">
+                <a:solidFill>
+                  <a:srgbClr val="2D3748"/>
+                </a:solidFill>
+                <a:latin typeface="Arial" pitchFamily="34" charset="0"/>
+                <a:ea typeface="Arial" pitchFamily="34" charset="-122"/>
+                <a:cs typeface="Arial" pitchFamily="34" charset="-120"/>
+              </a:rPr>
+              <a:t>CareSignal en casa</a:t>
+            </a:r>
+            <a:endParaRPr lang="en-US" sz="900" dirty="0"/>
+          </a:p>
+        </p:txBody>
+      </p:sp>
+      <p:sp>
+        <p:nvSpPr>
+          <p:cNvPr id="48" name="Text 46"/>
+          <p:cNvSpPr/>
+          <p:nvPr/>
+        </p:nvSpPr>
+        <p:spPr>
+          <a:xfrm>
+            <a:off x="1627632" y="5047488"/>
+            <a:ext cx="365760" cy="530352"/>
+          </a:xfrm>
+          <a:prstGeom prst="rect">
+            <a:avLst/>
+          </a:prstGeom>
+          <a:noFill/>
+          <a:ln/>
+        </p:spPr>
+        <p:txBody>
+          <a:bodyPr wrap="square" rtlCol="0" anchor="ctr"/>
+          <a:lstStyle/>
+          <a:p>
+            <a:pPr algn="ctr" indent="0" marL="0">
+              <a:buNone/>
+            </a:pPr>
+            <a:r>
+              <a:rPr lang="en-US" sz="1600" dirty="0">
+                <a:solidFill>
+                  <a:srgbClr val="5B8DB8"/>
+                </a:solidFill>
+                <a:latin typeface="Arial" pitchFamily="34" charset="0"/>
+                <a:ea typeface="Arial" pitchFamily="34" charset="-122"/>
+                <a:cs typeface="Arial" pitchFamily="34" charset="-120"/>
+              </a:rPr>
+              <a:t>→</a:t>
+            </a:r>
+            <a:endParaRPr lang="en-US" sz="1600" dirty="0"/>
+          </a:p>
+        </p:txBody>
+      </p:sp>
+      <p:sp>
+        <p:nvSpPr>
+          <p:cNvPr id="49" name="Text 47"/>
+          <p:cNvSpPr/>
+          <p:nvPr/>
+        </p:nvSpPr>
+        <p:spPr>
+          <a:xfrm>
+            <a:off x="2798064" y="5047488"/>
+            <a:ext cx="1078992" cy="530352"/>
+          </a:xfrm>
+          <a:prstGeom prst="rect">
+            <a:avLst/>
+          </a:prstGeom>
+          <a:noFill/>
+          <a:ln/>
+        </p:spPr>
+        <p:txBody>
+          <a:bodyPr wrap="square" rtlCol="0" anchor="ctr"/>
+          <a:lstStyle/>
+          <a:p>
+            <a:pPr algn="ctr" indent="0" marL="0">
+              <a:buNone/>
+            </a:pPr>
+            <a:r>
+              <a:rPr lang="en-US" sz="900" b="1" dirty="0">
+                <a:solidFill>
+                  <a:srgbClr val="2D3748"/>
+                </a:solidFill>
+                <a:latin typeface="Arial" pitchFamily="34" charset="0"/>
+                <a:ea typeface="Arial" pitchFamily="34" charset="-122"/>
+                <a:cs typeface="Arial" pitchFamily="34" charset="-120"/>
+              </a:rPr>
+              <a:t>Familiar ingresa</a:t>
+            </a:r>
+            <a:endParaRPr lang="en-US" sz="900" dirty="0"/>
+          </a:p>
+          <a:p>
+            <a:pPr algn="ctr" indent="0" marL="0">
+              <a:buNone/>
+            </a:pPr>
+            <a:r>
+              <a:rPr lang="en-US" sz="900" b="1" dirty="0">
+                <a:solidFill>
+                  <a:srgbClr val="2D3748"/>
+                </a:solidFill>
+                <a:latin typeface="Arial" pitchFamily="34" charset="0"/>
+                <a:ea typeface="Arial" pitchFamily="34" charset="-122"/>
+                <a:cs typeface="Arial" pitchFamily="34" charset="-120"/>
+              </a:rPr>
+              <a:t>a una residencia</a:t>
+            </a:r>
+            <a:endParaRPr lang="en-US" sz="900" dirty="0"/>
+          </a:p>
+        </p:txBody>
+      </p:sp>
+      <p:sp>
+        <p:nvSpPr>
+          <p:cNvPr id="50" name="Text 48"/>
+          <p:cNvSpPr/>
+          <p:nvPr/>
+        </p:nvSpPr>
+        <p:spPr>
+          <a:xfrm>
+            <a:off x="3968496" y="5047488"/>
+            <a:ext cx="365760" cy="530352"/>
+          </a:xfrm>
+          <a:prstGeom prst="rect">
+            <a:avLst/>
+          </a:prstGeom>
+          <a:noFill/>
+          <a:ln/>
+        </p:spPr>
+        <p:txBody>
+          <a:bodyPr wrap="square" rtlCol="0" anchor="ctr"/>
+          <a:lstStyle/>
+          <a:p>
+            <a:pPr algn="ctr" indent="0" marL="0">
+              <a:buNone/>
+            </a:pPr>
+            <a:r>
+              <a:rPr lang="en-US" sz="1600" dirty="0">
+                <a:solidFill>
+                  <a:srgbClr val="5B8DB8"/>
+                </a:solidFill>
+                <a:latin typeface="Arial" pitchFamily="34" charset="0"/>
+                <a:ea typeface="Arial" pitchFamily="34" charset="-122"/>
+                <a:cs typeface="Arial" pitchFamily="34" charset="-120"/>
+              </a:rPr>
+              <a:t>→</a:t>
+            </a:r>
+            <a:endParaRPr lang="en-US" sz="1600" dirty="0"/>
+          </a:p>
+        </p:txBody>
+      </p:sp>
+      <p:sp>
+        <p:nvSpPr>
+          <p:cNvPr id="51" name="Text 49"/>
+          <p:cNvSpPr/>
+          <p:nvPr/>
+        </p:nvSpPr>
+        <p:spPr>
+          <a:xfrm>
+            <a:off x="5138928" y="5047488"/>
+            <a:ext cx="1078992" cy="530352"/>
+          </a:xfrm>
+          <a:prstGeom prst="rect">
+            <a:avLst/>
+          </a:prstGeom>
+          <a:noFill/>
+          <a:ln/>
+        </p:spPr>
+        <p:txBody>
+          <a:bodyPr wrap="square" rtlCol="0" anchor="ctr"/>
+          <a:lstStyle/>
+          <a:p>
+            <a:pPr algn="ctr" indent="0" marL="0">
+              <a:buNone/>
+            </a:pPr>
+            <a:r>
+              <a:rPr lang="en-US" sz="900" b="1" dirty="0">
+                <a:solidFill>
+                  <a:srgbClr val="2D3748"/>
+                </a:solidFill>
+                <a:latin typeface="Arial" pitchFamily="34" charset="0"/>
+                <a:ea typeface="Arial" pitchFamily="34" charset="-122"/>
+                <a:cs typeface="Arial" pitchFamily="34" charset="-120"/>
+              </a:rPr>
+              <a:t>Familia recomienda</a:t>
+            </a:r>
+            <a:endParaRPr lang="en-US" sz="900" dirty="0"/>
+          </a:p>
+          <a:p>
+            <a:pPr algn="ctr" indent="0" marL="0">
+              <a:buNone/>
+            </a:pPr>
+            <a:r>
+              <a:rPr lang="en-US" sz="900" b="1" dirty="0">
+                <a:solidFill>
+                  <a:srgbClr val="2D3748"/>
+                </a:solidFill>
+                <a:latin typeface="Arial" pitchFamily="34" charset="0"/>
+                <a:ea typeface="Arial" pitchFamily="34" charset="-122"/>
+                <a:cs typeface="Arial" pitchFamily="34" charset="-120"/>
+              </a:rPr>
+              <a:t>CareSignal al director</a:t>
+            </a:r>
+            <a:endParaRPr lang="en-US" sz="900" dirty="0"/>
+          </a:p>
+        </p:txBody>
+      </p:sp>
+      <p:sp>
+        <p:nvSpPr>
+          <p:cNvPr id="52" name="Text 50"/>
+          <p:cNvSpPr/>
+          <p:nvPr/>
+        </p:nvSpPr>
+        <p:spPr>
+          <a:xfrm>
+            <a:off x="6309360" y="5047488"/>
+            <a:ext cx="365760" cy="530352"/>
+          </a:xfrm>
+          <a:prstGeom prst="rect">
+            <a:avLst/>
+          </a:prstGeom>
+          <a:noFill/>
+          <a:ln/>
+        </p:spPr>
+        <p:txBody>
+          <a:bodyPr wrap="square" rtlCol="0" anchor="ctr"/>
+          <a:lstStyle/>
+          <a:p>
+            <a:pPr algn="ctr" indent="0" marL="0">
+              <a:buNone/>
+            </a:pPr>
+            <a:r>
+              <a:rPr lang="en-US" sz="1600" dirty="0">
+                <a:solidFill>
+                  <a:srgbClr val="5B8DB8"/>
+                </a:solidFill>
+                <a:latin typeface="Arial" pitchFamily="34" charset="0"/>
+                <a:ea typeface="Arial" pitchFamily="34" charset="-122"/>
+                <a:cs typeface="Arial" pitchFamily="34" charset="-120"/>
+              </a:rPr>
+              <a:t>→</a:t>
+            </a:r>
+            <a:endParaRPr lang="en-US" sz="1600" dirty="0"/>
+          </a:p>
+        </p:txBody>
+      </p:sp>
+      <p:sp>
+        <p:nvSpPr>
+          <p:cNvPr id="53" name="Text 51"/>
+          <p:cNvSpPr/>
+          <p:nvPr/>
+        </p:nvSpPr>
+        <p:spPr>
+          <a:xfrm>
+            <a:off x="7479792" y="5047488"/>
+            <a:ext cx="1078992" cy="530352"/>
+          </a:xfrm>
+          <a:prstGeom prst="rect">
+            <a:avLst/>
+          </a:prstGeom>
+          <a:noFill/>
+          <a:ln/>
+        </p:spPr>
+        <p:txBody>
+          <a:bodyPr wrap="square" rtlCol="0" anchor="ctr"/>
+          <a:lstStyle/>
+          <a:p>
+            <a:pPr algn="ctr" indent="0" marL="0">
+              <a:buNone/>
+            </a:pPr>
+            <a:r>
+              <a:rPr lang="en-US" sz="900" b="1" dirty="0">
+                <a:solidFill>
+                  <a:srgbClr val="2D3748"/>
+                </a:solidFill>
+                <a:latin typeface="Arial" pitchFamily="34" charset="0"/>
+                <a:ea typeface="Arial" pitchFamily="34" charset="-122"/>
+                <a:cs typeface="Arial" pitchFamily="34" charset="-120"/>
+              </a:rPr>
+              <a:t>Residencia</a:t>
+            </a:r>
+            <a:endParaRPr lang="en-US" sz="900" dirty="0"/>
+          </a:p>
+          <a:p>
+            <a:pPr algn="ctr" indent="0" marL="0">
+              <a:buNone/>
+            </a:pPr>
+            <a:r>
+              <a:rPr lang="en-US" sz="900" b="1" dirty="0">
+                <a:solidFill>
+                  <a:srgbClr val="2D3748"/>
+                </a:solidFill>
+                <a:latin typeface="Arial" pitchFamily="34" charset="0"/>
+                <a:ea typeface="Arial" pitchFamily="34" charset="-122"/>
+                <a:cs typeface="Arial" pitchFamily="34" charset="-120"/>
+              </a:rPr>
+              <a:t>contrata (B2B)</a:t>
+            </a:r>
+            <a:endParaRPr lang="en-US" sz="900" dirty="0"/>
+          </a:p>
+        </p:txBody>
+      </p:sp>
+      <p:sp>
+        <p:nvSpPr>
+          <p:cNvPr id="54" name="Text 52"/>
+          <p:cNvSpPr/>
+          <p:nvPr/>
+        </p:nvSpPr>
+        <p:spPr>
+          <a:xfrm>
+            <a:off x="457200" y="6291072"/>
+            <a:ext cx="8375904" cy="201168"/>
+          </a:xfrm>
+          <a:prstGeom prst="rect">
+            <a:avLst/>
+          </a:prstGeom>
+          <a:noFill/>
+          <a:ln/>
+        </p:spPr>
+        <p:txBody>
+          <a:bodyPr wrap="square" rtlCol="0" anchor="ctr"/>
+          <a:lstStyle/>
+          <a:p>
+            <a:pPr algn="l" indent="0" marL="0">
+              <a:buNone/>
+            </a:pPr>
+            <a:r>
+              <a:rPr lang="en-US" dirty="0">
+                <a:solidFill>
+                  <a:srgbClr val="718096"/>
+                </a:solidFill>
+                <a:latin typeface="Arial" pitchFamily="34" charset="0"/>
+                <a:ea typeface="Arial" pitchFamily="34" charset="-122"/>
+                <a:cs typeface="Arial" pitchFamily="34" charset="-120"/>
+              </a:rPr>
+              <a:t>⚠️ Fase B2C proyectada — requiere versión móvil y validación de mercado. No comprometida en v0.1.0.</a:t>
+            </a:r>
+            <a:endParaRPr lang="en-US" dirty="0"/>
+          </a:p>
+        </p:txBody>
+      </p:sp>
+    </p:spTree>
+  </p:cSld>
+  <p:clrMapOvr>
+    <a:masterClrMapping/>
+  </p:clrMapOvr>
+</p:sld>
+</file>
+
+<file path=ppt/slides/slide14.xml><?xml version="1.0" encoding="utf-8"?>
+<p:sld xmlns:a="http://schemas.openxmlformats.org/drawingml/2006/main" xmlns:r="http://schemas.openxmlformats.org/officeDocument/2006/relationships" xmlns:p="http://schemas.openxmlformats.org/presentationml/2006/main">
+  <p:cSld name="Slide 14">
+    <p:spTree>
+      <p:nvGrpSpPr>
+        <p:cNvPr id="1" name=""/>
+        <p:cNvGrpSpPr/>
+        <p:nvPr/>
+      </p:nvGrpSpPr>
+      <p:grpSpPr>
+        <a:xfrm>
+          <a:off x="0" y="0"/>
+          <a:ext cx="0" cy="0"/>
+          <a:chOff x="0" y="0"/>
+          <a:chExt cx="0" cy="0"/>
+        </a:xfrm>
+      </p:grpSpPr>
+      <p:sp>
+        <p:nvSpPr>
+          <p:cNvPr id="2" name="Shape 0"/>
+          <p:cNvSpPr/>
+          <p:nvPr/>
+        </p:nvSpPr>
+        <p:spPr>
+          <a:xfrm>
+            <a:off x="0" y="0"/>
+            <a:ext cx="12192000" cy="6858000"/>
+          </a:xfrm>
+          <a:prstGeom prst="rect">
+            <a:avLst/>
+          </a:prstGeom>
+          <a:solidFill>
+            <a:srgbClr val="FAFAF8"/>
+          </a:solidFill>
+          <a:ln w="12700">
+            <a:solidFill>
+              <a:srgbClr val="FAFAF8"/>
+            </a:solidFill>
+            <a:prstDash val="solid"/>
+          </a:ln>
+        </p:spPr>
+      </p:sp>
+      <p:sp>
+        <p:nvSpPr>
+          <p:cNvPr id="3" name="Shape 1"/>
+          <p:cNvSpPr/>
+          <p:nvPr/>
+        </p:nvSpPr>
+        <p:spPr>
+          <a:xfrm>
             <a:off x="6583680" y="4389120"/>
             <a:ext cx="3840480" cy="3840480"/>
           </a:xfrm>
@@ -8118,9 +10546,9 @@
 </p:sld>
 </file>
 
-<file path=ppt/slides/slide14.xml><?xml version="1.0" encoding="utf-8"?>
+<file path=ppt/slides/slide15.xml><?xml version="1.0" encoding="utf-8"?>
 <p:sld xmlns:a="http://schemas.openxmlformats.org/drawingml/2006/main" xmlns:r="http://schemas.openxmlformats.org/officeDocument/2006/relationships" xmlns:p="http://schemas.openxmlformats.org/presentationml/2006/main">
-  <p:cSld name="Slide 14">
+  <p:cSld name="Slide 15">
     <p:spTree>
       <p:nvGrpSpPr>
         <p:cNvPr id="1" name=""/>

--- a/business/CareSignal_Pitch_Deck.pptx
+++ b/business/CareSignal_Pitch_Deck.pptx
@@ -4,6 +4,9 @@
   <p:sldMasterIdLst>
     <p:sldMasterId id="2147483648" r:id="rId1"/>
   </p:sldMasterIdLst>
+  <p:notesMasterIdLst>
+    <p:notesMasterId r:id="rId17"/>
+  </p:notesMasterIdLst>
   <p:sldIdLst>
     <p:sldId id="256" r:id="rId2"/>
     <p:sldId id="257" r:id="rId3"/>
@@ -21,9 +24,6 @@
     <p:sldId id="269" r:id="rId15"/>
     <p:sldId id="270" r:id="rId16"/>
   </p:sldIdLst>
-  <p:notesMasterIdLst>
-    <p:notesMasterId r:id="rId17"/>
-  </p:notesMasterIdLst>
   <p:sldSz cx="12192000" cy="6858000"/>
   <p:notesSz cx="6858000" cy="12192000"/>
   <p:defaultTextStyle>
@@ -118,6 +118,11 @@
       </a:defRPr>
     </a:lvl9pPr>
   </p:defaultTextStyle>
+  <p:extLst>
+    <p:ext uri="{EFAFB233-063F-42B5-8137-9DF3F51BA10A}">
+      <p15:sldGuideLst xmlns:p15="http://schemas.microsoft.com/office/powerpoint/2012/main"/>
+    </p:ext>
+  </p:extLst>
 </p:presentation>
 </file>
 
@@ -143,234 +148,10 @@
           <a:chExt cx="0" cy="0"/>
         </a:xfrm>
       </p:grpSpPr>
-      <p:sp>
-        <p:nvSpPr>
-          <p:cNvPr id="2" name="Header Placeholder 1"/>
-          <p:cNvSpPr>
-            <a:spLocks noGrp="1"/>
-          </p:cNvSpPr>
-          <p:nvPr>
-            <p:ph type="hdr" sz="quarter"/>
-          </p:nvPr>
-        </p:nvSpPr>
-        <p:spPr>
-          <a:xfrm>
-            <a:off x="0" y="0"/>
-            <a:ext cx="2971800" cy="458788"/>
-          </a:xfrm>
-          <a:prstGeom prst="rect">
-            <a:avLst/>
-          </a:prstGeom>
-        </p:spPr>
-        <p:txBody>
-          <a:bodyPr vert="horz" lIns="91440" tIns="45720" rIns="91440" bIns="45720" rtlCol="0"/>
-          <a:lstStyle>
-            <a:lvl1pPr algn="l">
-              <a:defRPr sz="1200"/>
-            </a:lvl1pPr>
-          </a:lstStyle>
-          <a:p>
-            <a:endParaRPr lang="en-US"/>
-          </a:p>
-        </p:txBody>
-      </p:sp>
-      <p:sp>
-        <p:nvSpPr>
-          <p:cNvPr id="3" name="Date Placeholder 2"/>
-          <p:cNvSpPr>
-            <a:spLocks noGrp="1"/>
-          </p:cNvSpPr>
-          <p:nvPr>
-            <p:ph type="dt" idx="1"/>
-          </p:nvPr>
-        </p:nvSpPr>
-        <p:spPr>
-          <a:xfrm>
-            <a:off x="3884613" y="0"/>
-            <a:ext cx="2971800" cy="458788"/>
-          </a:xfrm>
-          <a:prstGeom prst="rect">
-            <a:avLst/>
-          </a:prstGeom>
-        </p:spPr>
-        <p:txBody>
-          <a:bodyPr vert="horz" lIns="91440" tIns="45720" rIns="91440" bIns="45720" rtlCol="0"/>
-          <a:lstStyle>
-            <a:lvl1pPr algn="r">
-              <a:defRPr sz="1200"/>
-            </a:lvl1pPr>
-          </a:lstStyle>
-          <a:p>
-            <a:fld id="{5282F153-3F37-0F45-9E97-73ACFA13230C}" type="datetimeFigureOut">
-              <a:rPr lang="en-US"/>
-              <a:t>7/23/19</a:t>
-            </a:fld>
-            <a:endParaRPr lang="en-US"/>
-          </a:p>
-        </p:txBody>
-      </p:sp>
-      <p:sp>
-        <p:nvSpPr>
-          <p:cNvPr id="4" name="Slide Image Placeholder 3"/>
-          <p:cNvSpPr>
-            <a:spLocks noGrp="1" noRot="1" noChangeAspect="1"/>
-          </p:cNvSpPr>
-          <p:nvPr>
-            <p:ph type="sldImg" idx="2"/>
-          </p:nvPr>
-        </p:nvSpPr>
-        <p:spPr>
-          <a:xfrm>
-            <a:off x="685800" y="1143000"/>
-            <a:ext cx="5486400" cy="3086100"/>
-          </a:xfrm>
-          <a:prstGeom prst="rect">
-            <a:avLst/>
-          </a:prstGeom>
-          <a:noFill/>
-          <a:ln w="12700">
-            <a:solidFill>
-              <a:prstClr val="black"/>
-            </a:solidFill>
-          </a:ln>
-        </p:spPr>
-        <p:txBody>
-          <a:bodyPr vert="horz" lIns="91440" tIns="45720" rIns="91440" bIns="45720" rtlCol="0" anchor="ctr"/>
-          <a:lstStyle/>
-          <a:p>
-            <a:endParaRPr lang="en-US"/>
-          </a:p>
-        </p:txBody>
-      </p:sp>
-      <p:sp>
-        <p:nvSpPr>
-          <p:cNvPr id="5" name="Notes Placeholder 4"/>
-          <p:cNvSpPr>
-            <a:spLocks noGrp="1"/>
-          </p:cNvSpPr>
-          <p:nvPr>
-            <p:ph type="body" sz="quarter" idx="3"/>
-          </p:nvPr>
-        </p:nvSpPr>
-        <p:spPr>
-          <a:xfrm>
-            <a:off x="685800" y="4400550"/>
-            <a:ext cx="5486400" cy="3600450"/>
-          </a:xfrm>
-          <a:prstGeom prst="rect">
-            <a:avLst/>
-          </a:prstGeom>
-        </p:spPr>
-        <p:txBody>
-          <a:bodyPr vert="horz" lIns="91440" tIns="45720" rIns="91440" bIns="45720" rtlCol="0"/>
-          <a:lstStyle/>
-          <a:p>
-            <a:pPr lvl="0"/>
-            <a:r>
-              <a:rPr lang="en-US"/>
-              <a:t>Click to edit Master text styles</a:t>
-            </a:r>
-          </a:p>
-          <a:p>
-            <a:pPr lvl="1"/>
-            <a:r>
-              <a:rPr lang="en-US"/>
-              <a:t>Second level</a:t>
-            </a:r>
-          </a:p>
-          <a:p>
-            <a:pPr lvl="2"/>
-            <a:r>
-              <a:rPr lang="en-US"/>
-              <a:t>Third level</a:t>
-            </a:r>
-          </a:p>
-          <a:p>
-            <a:pPr lvl="3"/>
-            <a:r>
-              <a:rPr lang="en-US"/>
-              <a:t>Fourth level</a:t>
-            </a:r>
-          </a:p>
-          <a:p>
-            <a:pPr lvl="4"/>
-            <a:r>
-              <a:rPr lang="en-US"/>
-              <a:t>Fifth level</a:t>
-            </a:r>
-          </a:p>
-        </p:txBody>
-      </p:sp>
-      <p:sp>
-        <p:nvSpPr>
-          <p:cNvPr id="6" name="Footer Placeholder 5"/>
-          <p:cNvSpPr>
-            <a:spLocks noGrp="1"/>
-          </p:cNvSpPr>
-          <p:nvPr>
-            <p:ph type="ftr" sz="quarter" idx="4"/>
-          </p:nvPr>
-        </p:nvSpPr>
-        <p:spPr>
-          <a:xfrm>
-            <a:off x="0" y="8685213"/>
-            <a:ext cx="2971800" cy="458787"/>
-          </a:xfrm>
-          <a:prstGeom prst="rect">
-            <a:avLst/>
-          </a:prstGeom>
-        </p:spPr>
-        <p:txBody>
-          <a:bodyPr vert="horz" lIns="91440" tIns="45720" rIns="91440" bIns="45720" rtlCol="0" anchor="b"/>
-          <a:lstStyle>
-            <a:lvl1pPr algn="l">
-              <a:defRPr sz="1200"/>
-            </a:lvl1pPr>
-          </a:lstStyle>
-          <a:p>
-            <a:endParaRPr lang="en-US"/>
-          </a:p>
-        </p:txBody>
-      </p:sp>
-      <p:sp>
-        <p:nvSpPr>
-          <p:cNvPr id="7" name="Slide Number Placeholder 6"/>
-          <p:cNvSpPr>
-            <a:spLocks noGrp="1"/>
-          </p:cNvSpPr>
-          <p:nvPr>
-            <p:ph type="sldNum" sz="quarter" idx="5"/>
-          </p:nvPr>
-        </p:nvSpPr>
-        <p:spPr>
-          <a:xfrm>
-            <a:off x="3884613" y="8685213"/>
-            <a:ext cx="2971800" cy="458787"/>
-          </a:xfrm>
-          <a:prstGeom prst="rect">
-            <a:avLst/>
-          </a:prstGeom>
-        </p:spPr>
-        <p:txBody>
-          <a:bodyPr vert="horz" lIns="91440" tIns="45720" rIns="91440" bIns="45720" rtlCol="0" anchor="b"/>
-          <a:lstStyle>
-            <a:lvl1pPr algn="r">
-              <a:defRPr sz="1200"/>
-            </a:lvl1pPr>
-          </a:lstStyle>
-          <a:p>
-            <a:fld id="{CE5E9CC1-C706-0F49-92D6-E571CC5EEA8F}" type="slidenum">
-              <a:rPr lang="en-US"/>
-              <a:t>‹#›</a:t>
-            </a:fld>
-            <a:endParaRPr lang="en-US"/>
-          </a:p>
-        </p:txBody>
-      </p:sp>
     </p:spTree>
     <p:extLst>
       <p:ext uri="{BB962C8B-B14F-4D97-AF65-F5344CB8AC3E}">
-        <p14:creationId xmlns:p14="http://schemas.microsoft.com/office/powerpoint/2010/main" val="1024086991"/>
+        <p14:creationId xmlns:p14="http://schemas.microsoft.com/office/powerpoint/2010/main" val="3989164733"/>
       </p:ext>
     </p:extLst>
   </p:cSld>
@@ -514,10 +295,6 @@
           <a:bodyPr/>
           <a:lstStyle/>
           <a:p>
-            <a:r>
-              <a:rPr lang="en-US" dirty="0"/>
-              <a:t/>
-            </a:r>
             <a:endParaRPr lang="en-US" dirty="0"/>
           </a:p>
         </p:txBody>
@@ -602,10 +379,6 @@
           <a:bodyPr/>
           <a:lstStyle/>
           <a:p>
-            <a:r>
-              <a:rPr lang="en-US" dirty="0"/>
-              <a:t/>
-            </a:r>
             <a:endParaRPr lang="en-US" dirty="0"/>
           </a:p>
         </p:txBody>
@@ -690,10 +463,6 @@
           <a:bodyPr/>
           <a:lstStyle/>
           <a:p>
-            <a:r>
-              <a:rPr lang="en-US" dirty="0"/>
-              <a:t/>
-            </a:r>
             <a:endParaRPr lang="en-US" dirty="0"/>
           </a:p>
         </p:txBody>
@@ -778,10 +547,6 @@
           <a:bodyPr/>
           <a:lstStyle/>
           <a:p>
-            <a:r>
-              <a:rPr lang="en-US" dirty="0"/>
-              <a:t/>
-            </a:r>
             <a:endParaRPr lang="en-US" dirty="0"/>
           </a:p>
         </p:txBody>
@@ -866,10 +631,6 @@
           <a:bodyPr/>
           <a:lstStyle/>
           <a:p>
-            <a:r>
-              <a:rPr lang="en-US" dirty="0"/>
-              <a:t/>
-            </a:r>
             <a:endParaRPr lang="en-US" dirty="0"/>
           </a:p>
         </p:txBody>
@@ -954,10 +715,6 @@
           <a:bodyPr/>
           <a:lstStyle/>
           <a:p>
-            <a:r>
-              <a:rPr lang="en-US" dirty="0"/>
-              <a:t/>
-            </a:r>
             <a:endParaRPr lang="en-US" dirty="0"/>
           </a:p>
         </p:txBody>
@@ -1042,10 +799,6 @@
           <a:bodyPr/>
           <a:lstStyle/>
           <a:p>
-            <a:r>
-              <a:rPr lang="en-US" dirty="0"/>
-              <a:t/>
-            </a:r>
             <a:endParaRPr lang="en-US" dirty="0"/>
           </a:p>
         </p:txBody>
@@ -1130,10 +883,6 @@
           <a:bodyPr/>
           <a:lstStyle/>
           <a:p>
-            <a:r>
-              <a:rPr lang="en-US" dirty="0"/>
-              <a:t/>
-            </a:r>
             <a:endParaRPr lang="en-US" dirty="0"/>
           </a:p>
         </p:txBody>
@@ -1218,10 +967,6 @@
           <a:bodyPr/>
           <a:lstStyle/>
           <a:p>
-            <a:r>
-              <a:rPr lang="en-US" dirty="0"/>
-              <a:t/>
-            </a:r>
             <a:endParaRPr lang="en-US" dirty="0"/>
           </a:p>
         </p:txBody>
@@ -1306,10 +1051,6 @@
           <a:bodyPr/>
           <a:lstStyle/>
           <a:p>
-            <a:r>
-              <a:rPr lang="en-US" dirty="0"/>
-              <a:t/>
-            </a:r>
             <a:endParaRPr lang="en-US" dirty="0"/>
           </a:p>
         </p:txBody>
@@ -1394,10 +1135,6 @@
           <a:bodyPr/>
           <a:lstStyle/>
           <a:p>
-            <a:r>
-              <a:rPr lang="en-US" dirty="0"/>
-              <a:t/>
-            </a:r>
             <a:endParaRPr lang="en-US" dirty="0"/>
           </a:p>
         </p:txBody>
@@ -1482,10 +1219,6 @@
           <a:bodyPr/>
           <a:lstStyle/>
           <a:p>
-            <a:r>
-              <a:rPr lang="en-US" dirty="0"/>
-              <a:t/>
-            </a:r>
             <a:endParaRPr lang="en-US" dirty="0"/>
           </a:p>
         </p:txBody>
@@ -1570,10 +1303,6 @@
           <a:bodyPr/>
           <a:lstStyle/>
           <a:p>
-            <a:r>
-              <a:rPr lang="en-US" dirty="0"/>
-              <a:t/>
-            </a:r>
             <a:endParaRPr lang="en-US" dirty="0"/>
           </a:p>
         </p:txBody>
@@ -1658,10 +1387,6 @@
           <a:bodyPr/>
           <a:lstStyle/>
           <a:p>
-            <a:r>
-              <a:rPr lang="en-US" dirty="0"/>
-              <a:t/>
-            </a:r>
             <a:endParaRPr lang="en-US" dirty="0"/>
           </a:p>
         </p:txBody>
@@ -1746,10 +1471,6 @@
           <a:bodyPr/>
           <a:lstStyle/>
           <a:p>
-            <a:r>
-              <a:rPr lang="en-US" dirty="0"/>
-              <a:t/>
-            </a:r>
             <a:endParaRPr lang="en-US" dirty="0"/>
           </a:p>
         </p:txBody>
@@ -1823,6 +1544,11 @@
 <file path=ppt/slideMasters/slideMaster1.xml><?xml version="1.0" encoding="utf-8"?>
 <p:sldMaster xmlns:a="http://schemas.openxmlformats.org/drawingml/2006/main" xmlns:r="http://schemas.openxmlformats.org/officeDocument/2006/relationships" xmlns:p="http://schemas.openxmlformats.org/presentationml/2006/main">
   <p:cSld>
+    <p:bg>
+      <p:bgRef idx="1001">
+        <a:schemeClr val="bg1"/>
+      </p:bgRef>
+    </p:bg>
     <p:spTree>
       <p:nvGrpSpPr>
         <p:cNvPr id="1" name=""/>
@@ -2138,6 +1864,13 @@
             <a:prstDash val="solid"/>
           </a:ln>
         </p:spPr>
+        <p:txBody>
+          <a:bodyPr/>
+          <a:lstStyle/>
+          <a:p>
+            <a:endParaRPr lang="en-US"/>
+          </a:p>
+        </p:txBody>
       </p:sp>
       <p:sp>
         <p:nvSpPr>
@@ -2167,6 +1900,13 @@
             <a:prstDash val="solid"/>
           </a:ln>
         </p:spPr>
+        <p:txBody>
+          <a:bodyPr/>
+          <a:lstStyle/>
+          <a:p>
+            <a:endParaRPr lang="en-US"/>
+          </a:p>
+        </p:txBody>
       </p:sp>
       <p:sp>
         <p:nvSpPr>
@@ -2196,6 +1936,13 @@
             <a:prstDash val="solid"/>
           </a:ln>
         </p:spPr>
+        <p:txBody>
+          <a:bodyPr/>
+          <a:lstStyle/>
+          <a:p>
+            <a:endParaRPr lang="en-US"/>
+          </a:p>
+        </p:txBody>
       </p:sp>
       <p:sp>
         <p:nvSpPr>
@@ -2225,6 +1972,13 @@
             <a:prstDash val="solid"/>
           </a:ln>
         </p:spPr>
+        <p:txBody>
+          <a:bodyPr/>
+          <a:lstStyle/>
+          <a:p>
+            <a:endParaRPr lang="en-US"/>
+          </a:p>
+        </p:txBody>
       </p:sp>
       <p:sp>
         <p:nvSpPr>
@@ -2250,6 +2004,13 @@
             <a:prstDash val="solid"/>
           </a:ln>
         </p:spPr>
+        <p:txBody>
+          <a:bodyPr/>
+          <a:lstStyle/>
+          <a:p>
+            <a:endParaRPr lang="en-US"/>
+          </a:p>
+        </p:txBody>
       </p:sp>
       <p:sp>
         <p:nvSpPr>
@@ -2275,6 +2036,13 @@
             <a:prstDash val="solid"/>
           </a:ln>
         </p:spPr>
+        <p:txBody>
+          <a:bodyPr/>
+          <a:lstStyle/>
+          <a:p>
+            <a:endParaRPr lang="en-US"/>
+          </a:p>
+        </p:txBody>
       </p:sp>
       <p:sp>
         <p:nvSpPr>
@@ -2297,7 +2065,7 @@
           <a:bodyPr wrap="square" rtlCol="0" anchor="ctr"/>
           <a:lstStyle/>
           <a:p>
-            <a:pPr algn="ctr" indent="0" marL="0">
+            <a:pPr marL="0" indent="0" algn="ctr">
               <a:buNone/>
             </a:pPr>
             <a:r>
@@ -2333,7 +2101,7 @@
           <a:bodyPr wrap="square" rtlCol="0" anchor="ctr"/>
           <a:lstStyle/>
           <a:p>
-            <a:pPr indent="0" marL="0">
+            <a:pPr marL="0" indent="0">
               <a:buNone/>
             </a:pPr>
             <a:r>
@@ -2372,7 +2140,7 @@
           <a:bodyPr wrap="square" rtlCol="0" anchor="ctr"/>
           <a:lstStyle/>
           <a:p>
-            <a:pPr indent="0" marL="0">
+            <a:pPr marL="0" indent="0">
               <a:buNone/>
             </a:pPr>
             <a:r>
@@ -2412,6 +2180,13 @@
             <a:prstDash val="solid"/>
           </a:ln>
         </p:spPr>
+        <p:txBody>
+          <a:bodyPr/>
+          <a:lstStyle/>
+          <a:p>
+            <a:endParaRPr lang="en-US"/>
+          </a:p>
+        </p:txBody>
       </p:sp>
       <p:sp>
         <p:nvSpPr>
@@ -2439,6 +2214,13 @@
             <a:prstDash val="solid"/>
           </a:ln>
         </p:spPr>
+        <p:txBody>
+          <a:bodyPr/>
+          <a:lstStyle/>
+          <a:p>
+            <a:endParaRPr lang="en-US"/>
+          </a:p>
+        </p:txBody>
       </p:sp>
       <p:sp>
         <p:nvSpPr>
@@ -2461,7 +2243,7 @@
           <a:bodyPr wrap="square" rtlCol="0" anchor="ctr"/>
           <a:lstStyle/>
           <a:p>
-            <a:pPr algn="ctr" indent="0" marL="0">
+            <a:pPr marL="0" indent="0" algn="ctr">
               <a:buNone/>
             </a:pPr>
             <a:r>
@@ -2497,7 +2279,7 @@
           <a:bodyPr wrap="square" rtlCol="0" anchor="ctr"/>
           <a:lstStyle/>
           <a:p>
-            <a:pPr algn="ctr" indent="0" marL="0">
+            <a:pPr marL="0" indent="0" algn="ctr">
               <a:buNone/>
             </a:pPr>
             <a:r>
@@ -2514,7 +2296,7 @@
             <a:endParaRPr lang="en-US" sz="1300" dirty="0"/>
           </a:p>
           <a:p>
-            <a:pPr algn="ctr" indent="0" marL="0">
+            <a:pPr marL="0" indent="0" algn="ctr">
               <a:buNone/>
             </a:pPr>
             <a:r>
@@ -2531,7 +2313,7 @@
             <a:endParaRPr lang="en-US" sz="1300" dirty="0"/>
           </a:p>
           <a:p>
-            <a:pPr algn="ctr" indent="0" marL="0">
+            <a:pPr marL="0" indent="0" algn="ctr">
               <a:buNone/>
             </a:pPr>
             <a:r>
@@ -2575,6 +2357,13 @@
             <a:prstDash val="solid"/>
           </a:ln>
         </p:spPr>
+        <p:txBody>
+          <a:bodyPr/>
+          <a:lstStyle/>
+          <a:p>
+            <a:endParaRPr lang="en-US"/>
+          </a:p>
+        </p:txBody>
       </p:sp>
       <p:sp>
         <p:nvSpPr>
@@ -2597,7 +2386,7 @@
           <a:bodyPr wrap="square" rtlCol="0" anchor="ctr"/>
           <a:lstStyle/>
           <a:p>
-            <a:pPr algn="ctr" indent="0" marL="0">
+            <a:pPr marL="0" indent="0" algn="ctr">
               <a:buNone/>
             </a:pPr>
             <a:r>
@@ -2633,7 +2422,7 @@
           <a:bodyPr wrap="square" rtlCol="0" anchor="ctr"/>
           <a:lstStyle/>
           <a:p>
-            <a:pPr algn="ctr" indent="0" marL="0">
+            <a:pPr marL="0" indent="0" algn="ctr">
               <a:buNone/>
             </a:pPr>
             <a:r>
@@ -2650,7 +2439,7 @@
             <a:endParaRPr lang="en-US" sz="1300" dirty="0"/>
           </a:p>
           <a:p>
-            <a:pPr algn="ctr" indent="0" marL="0">
+            <a:pPr marL="0" indent="0" algn="ctr">
               <a:buNone/>
             </a:pPr>
             <a:r>
@@ -2667,7 +2456,7 @@
             <a:endParaRPr lang="en-US" sz="1300" dirty="0"/>
           </a:p>
           <a:p>
-            <a:pPr algn="ctr" indent="0" marL="0">
+            <a:pPr marL="0" indent="0" algn="ctr">
               <a:buNone/>
             </a:pPr>
             <a:r>
@@ -2711,6 +2500,13 @@
             <a:prstDash val="solid"/>
           </a:ln>
         </p:spPr>
+        <p:txBody>
+          <a:bodyPr/>
+          <a:lstStyle/>
+          <a:p>
+            <a:endParaRPr lang="en-US"/>
+          </a:p>
+        </p:txBody>
       </p:sp>
       <p:sp>
         <p:nvSpPr>
@@ -2733,7 +2529,7 @@
           <a:bodyPr wrap="square" rtlCol="0" anchor="ctr"/>
           <a:lstStyle/>
           <a:p>
-            <a:pPr algn="ctr" indent="0" marL="0">
+            <a:pPr marL="0" indent="0" algn="ctr">
               <a:buNone/>
             </a:pPr>
             <a:r>
@@ -2769,7 +2565,7 @@
           <a:bodyPr wrap="square" rtlCol="0" anchor="ctr"/>
           <a:lstStyle/>
           <a:p>
-            <a:pPr algn="ctr" indent="0" marL="0">
+            <a:pPr marL="0" indent="0" algn="ctr">
               <a:buNone/>
             </a:pPr>
             <a:r>
@@ -2786,7 +2582,7 @@
             <a:endParaRPr lang="en-US" sz="1300" dirty="0"/>
           </a:p>
           <a:p>
-            <a:pPr algn="ctr" indent="0" marL="0">
+            <a:pPr marL="0" indent="0" algn="ctr">
               <a:buNone/>
             </a:pPr>
             <a:r>
@@ -2803,7 +2599,7 @@
             <a:endParaRPr lang="en-US" sz="1300" dirty="0"/>
           </a:p>
           <a:p>
-            <a:pPr algn="ctr" indent="0" marL="0">
+            <a:pPr marL="0" indent="0" algn="ctr">
               <a:buNone/>
             </a:pPr>
             <a:r>
@@ -2842,7 +2638,7 @@
           <a:bodyPr wrap="square" rtlCol="0" anchor="ctr"/>
           <a:lstStyle/>
           <a:p>
-            <a:pPr algn="ctr" indent="0" marL="0">
+            <a:pPr marL="0" indent="0" algn="ctr">
               <a:buNone/>
             </a:pPr>
             <a:r>
@@ -2881,7 +2677,7 @@
           <a:bodyPr wrap="square" rtlCol="0" anchor="ctr"/>
           <a:lstStyle/>
           <a:p>
-            <a:pPr algn="ctr" indent="0" marL="0">
+            <a:pPr marL="0" indent="0" algn="ctr">
               <a:buNone/>
             </a:pPr>
             <a:r>
@@ -2948,6 +2744,13 @@
             <a:prstDash val="solid"/>
           </a:ln>
         </p:spPr>
+        <p:txBody>
+          <a:bodyPr/>
+          <a:lstStyle/>
+          <a:p>
+            <a:endParaRPr lang="en-US"/>
+          </a:p>
+        </p:txBody>
       </p:sp>
       <p:sp>
         <p:nvSpPr>
@@ -2977,6 +2780,13 @@
             <a:prstDash val="solid"/>
           </a:ln>
         </p:spPr>
+        <p:txBody>
+          <a:bodyPr/>
+          <a:lstStyle/>
+          <a:p>
+            <a:endParaRPr lang="en-US"/>
+          </a:p>
+        </p:txBody>
       </p:sp>
       <p:sp>
         <p:nvSpPr>
@@ -3006,6 +2816,13 @@
             <a:prstDash val="solid"/>
           </a:ln>
         </p:spPr>
+        <p:txBody>
+          <a:bodyPr/>
+          <a:lstStyle/>
+          <a:p>
+            <a:endParaRPr lang="en-US"/>
+          </a:p>
+        </p:txBody>
       </p:sp>
       <p:sp>
         <p:nvSpPr>
@@ -3031,6 +2848,13 @@
             <a:prstDash val="solid"/>
           </a:ln>
         </p:spPr>
+        <p:txBody>
+          <a:bodyPr/>
+          <a:lstStyle/>
+          <a:p>
+            <a:endParaRPr lang="en-US"/>
+          </a:p>
+        </p:txBody>
       </p:sp>
       <p:sp>
         <p:nvSpPr>
@@ -3056,6 +2880,13 @@
             <a:prstDash val="solid"/>
           </a:ln>
         </p:spPr>
+        <p:txBody>
+          <a:bodyPr/>
+          <a:lstStyle/>
+          <a:p>
+            <a:endParaRPr lang="en-US"/>
+          </a:p>
+        </p:txBody>
       </p:sp>
       <p:sp>
         <p:nvSpPr>
@@ -3078,7 +2909,7 @@
           <a:bodyPr wrap="square" rtlCol="0" anchor="ctr"/>
           <a:lstStyle/>
           <a:p>
-            <a:pPr indent="0" marL="0">
+            <a:pPr marL="0" indent="0">
               <a:buNone/>
             </a:pPr>
             <a:r>
@@ -3117,7 +2948,7 @@
           <a:bodyPr wrap="square" rtlCol="0" anchor="ctr"/>
           <a:lstStyle/>
           <a:p>
-            <a:pPr indent="0" marL="0">
+            <a:pPr marL="0" indent="0">
               <a:buNone/>
             </a:pPr>
             <a:r>
@@ -3157,6 +2988,13 @@
             <a:prstDash val="solid"/>
           </a:ln>
         </p:spPr>
+        <p:txBody>
+          <a:bodyPr/>
+          <a:lstStyle/>
+          <a:p>
+            <a:endParaRPr lang="en-US"/>
+          </a:p>
+        </p:txBody>
       </p:sp>
       <p:sp>
         <p:nvSpPr>
@@ -3184,6 +3022,13 @@
             <a:prstDash val="solid"/>
           </a:ln>
         </p:spPr>
+        <p:txBody>
+          <a:bodyPr/>
+          <a:lstStyle/>
+          <a:p>
+            <a:endParaRPr lang="en-US"/>
+          </a:p>
+        </p:txBody>
       </p:sp>
       <p:sp>
         <p:nvSpPr>
@@ -3206,7 +3051,7 @@
           <a:bodyPr wrap="square" rtlCol="0" anchor="ctr"/>
           <a:lstStyle/>
           <a:p>
-            <a:pPr algn="ctr" indent="0" marL="0">
+            <a:pPr marL="0" indent="0" algn="ctr">
               <a:buNone/>
             </a:pPr>
             <a:r>
@@ -3242,7 +3087,7 @@
           <a:bodyPr wrap="square" rtlCol="0" anchor="ctr"/>
           <a:lstStyle/>
           <a:p>
-            <a:pPr algn="ctr" indent="0" marL="0">
+            <a:pPr marL="0" indent="0" algn="ctr">
               <a:buNone/>
             </a:pPr>
             <a:r>
@@ -3281,7 +3126,7 @@
           <a:bodyPr wrap="square" rtlCol="0" anchor="ctr"/>
           <a:lstStyle/>
           <a:p>
-            <a:pPr algn="ctr" indent="0" marL="0">
+            <a:pPr marL="0" indent="0" algn="ctr">
               <a:buNone/>
             </a:pPr>
             <a:r>
@@ -3298,7 +3143,7 @@
             <a:endParaRPr lang="en-US" sz="1050" dirty="0"/>
           </a:p>
           <a:p>
-            <a:pPr algn="ctr" indent="0" marL="0">
+            <a:pPr marL="0" indent="0" algn="ctr">
               <a:buNone/>
             </a:pPr>
             <a:r>
@@ -3342,6 +3187,13 @@
             <a:prstDash val="solid"/>
           </a:ln>
         </p:spPr>
+        <p:txBody>
+          <a:bodyPr/>
+          <a:lstStyle/>
+          <a:p>
+            <a:endParaRPr lang="en-US"/>
+          </a:p>
+        </p:txBody>
       </p:sp>
       <p:sp>
         <p:nvSpPr>
@@ -3364,7 +3216,7 @@
           <a:bodyPr wrap="square" rtlCol="0" anchor="ctr"/>
           <a:lstStyle/>
           <a:p>
-            <a:pPr algn="ctr" indent="0" marL="0">
+            <a:pPr marL="0" indent="0" algn="ctr">
               <a:buNone/>
             </a:pPr>
             <a:r>
@@ -3400,7 +3252,7 @@
           <a:bodyPr wrap="square" rtlCol="0" anchor="ctr"/>
           <a:lstStyle/>
           <a:p>
-            <a:pPr algn="ctr" indent="0" marL="0">
+            <a:pPr marL="0" indent="0" algn="ctr">
               <a:buNone/>
             </a:pPr>
             <a:r>
@@ -3439,7 +3291,7 @@
           <a:bodyPr wrap="square" rtlCol="0" anchor="ctr"/>
           <a:lstStyle/>
           <a:p>
-            <a:pPr algn="ctr" indent="0" marL="0">
+            <a:pPr marL="0" indent="0" algn="ctr">
               <a:buNone/>
             </a:pPr>
             <a:r>
@@ -3456,7 +3308,7 @@
             <a:endParaRPr lang="en-US" sz="1050" dirty="0"/>
           </a:p>
           <a:p>
-            <a:pPr algn="ctr" indent="0" marL="0">
+            <a:pPr marL="0" indent="0" algn="ctr">
               <a:buNone/>
             </a:pPr>
             <a:r>
@@ -3500,6 +3352,13 @@
             <a:prstDash val="solid"/>
           </a:ln>
         </p:spPr>
+        <p:txBody>
+          <a:bodyPr/>
+          <a:lstStyle/>
+          <a:p>
+            <a:endParaRPr lang="en-US"/>
+          </a:p>
+        </p:txBody>
       </p:sp>
       <p:sp>
         <p:nvSpPr>
@@ -3522,7 +3381,7 @@
           <a:bodyPr wrap="square" rtlCol="0" anchor="ctr"/>
           <a:lstStyle/>
           <a:p>
-            <a:pPr algn="ctr" indent="0" marL="0">
+            <a:pPr marL="0" indent="0" algn="ctr">
               <a:buNone/>
             </a:pPr>
             <a:r>
@@ -3558,7 +3417,7 @@
           <a:bodyPr wrap="square" rtlCol="0" anchor="ctr"/>
           <a:lstStyle/>
           <a:p>
-            <a:pPr algn="ctr" indent="0" marL="0">
+            <a:pPr marL="0" indent="0" algn="ctr">
               <a:buNone/>
             </a:pPr>
             <a:r>
@@ -3597,7 +3456,7 @@
           <a:bodyPr wrap="square" rtlCol="0" anchor="ctr"/>
           <a:lstStyle/>
           <a:p>
-            <a:pPr algn="ctr" indent="0" marL="0">
+            <a:pPr marL="0" indent="0" algn="ctr">
               <a:buNone/>
             </a:pPr>
             <a:r>
@@ -3614,7 +3473,7 @@
             <a:endParaRPr lang="en-US" sz="1050" dirty="0"/>
           </a:p>
           <a:p>
-            <a:pPr algn="ctr" indent="0" marL="0">
+            <a:pPr marL="0" indent="0" algn="ctr">
               <a:buNone/>
             </a:pPr>
             <a:r>
@@ -3658,6 +3517,13 @@
             <a:prstDash val="solid"/>
           </a:ln>
         </p:spPr>
+        <p:txBody>
+          <a:bodyPr/>
+          <a:lstStyle/>
+          <a:p>
+            <a:endParaRPr lang="en-US"/>
+          </a:p>
+        </p:txBody>
       </p:sp>
       <p:sp>
         <p:nvSpPr>
@@ -3680,7 +3546,7 @@
           <a:bodyPr wrap="square" rtlCol="0" anchor="ctr"/>
           <a:lstStyle/>
           <a:p>
-            <a:pPr algn="ctr" indent="0" marL="0">
+            <a:pPr marL="0" indent="0" algn="ctr">
               <a:buNone/>
             </a:pPr>
             <a:r>
@@ -3716,7 +3582,7 @@
           <a:bodyPr wrap="square" rtlCol="0" anchor="ctr"/>
           <a:lstStyle/>
           <a:p>
-            <a:pPr algn="ctr" indent="0" marL="0">
+            <a:pPr marL="0" indent="0" algn="ctr">
               <a:buNone/>
             </a:pPr>
             <a:r>
@@ -3755,7 +3621,7 @@
           <a:bodyPr wrap="square" rtlCol="0" anchor="ctr"/>
           <a:lstStyle/>
           <a:p>
-            <a:pPr algn="ctr" indent="0" marL="0">
+            <a:pPr marL="0" indent="0" algn="ctr">
               <a:buNone/>
             </a:pPr>
             <a:r>
@@ -3772,7 +3638,7 @@
             <a:endParaRPr lang="en-US" sz="1050" dirty="0"/>
           </a:p>
           <a:p>
-            <a:pPr algn="ctr" indent="0" marL="0">
+            <a:pPr marL="0" indent="0" algn="ctr">
               <a:buNone/>
             </a:pPr>
             <a:r>
@@ -3816,6 +3682,13 @@
             <a:prstDash val="solid"/>
           </a:ln>
         </p:spPr>
+        <p:txBody>
+          <a:bodyPr/>
+          <a:lstStyle/>
+          <a:p>
+            <a:endParaRPr lang="en-US"/>
+          </a:p>
+        </p:txBody>
       </p:sp>
       <p:sp>
         <p:nvSpPr>
@@ -3838,7 +3711,7 @@
           <a:bodyPr wrap="square" rtlCol="0" anchor="ctr"/>
           <a:lstStyle/>
           <a:p>
-            <a:pPr algn="ctr" indent="0" marL="0">
+            <a:pPr marL="0" indent="0" algn="ctr">
               <a:buNone/>
             </a:pPr>
             <a:r>
@@ -3874,7 +3747,7 @@
           <a:bodyPr wrap="square" rtlCol="0" anchor="ctr"/>
           <a:lstStyle/>
           <a:p>
-            <a:pPr algn="ctr" indent="0" marL="0">
+            <a:pPr marL="0" indent="0" algn="ctr">
               <a:buNone/>
             </a:pPr>
             <a:r>
@@ -3913,7 +3786,7 @@
           <a:bodyPr wrap="square" rtlCol="0" anchor="ctr"/>
           <a:lstStyle/>
           <a:p>
-            <a:pPr algn="ctr" indent="0" marL="0">
+            <a:pPr marL="0" indent="0" algn="ctr">
               <a:buNone/>
             </a:pPr>
             <a:r>
@@ -3930,7 +3803,7 @@
             <a:endParaRPr lang="en-US" sz="1000" dirty="0"/>
           </a:p>
           <a:p>
-            <a:pPr algn="ctr" indent="0" marL="0">
+            <a:pPr marL="0" indent="0" algn="ctr">
               <a:buNone/>
             </a:pPr>
             <a:r>
@@ -3974,6 +3847,13 @@
             <a:prstDash val="solid"/>
           </a:ln>
         </p:spPr>
+        <p:txBody>
+          <a:bodyPr/>
+          <a:lstStyle/>
+          <a:p>
+            <a:endParaRPr lang="en-US"/>
+          </a:p>
+        </p:txBody>
       </p:sp>
       <p:sp>
         <p:nvSpPr>
@@ -3996,7 +3876,7 @@
           <a:bodyPr wrap="square" rtlCol="0" anchor="ctr"/>
           <a:lstStyle/>
           <a:p>
-            <a:pPr algn="ctr" indent="0" marL="0">
+            <a:pPr marL="0" indent="0" algn="ctr">
               <a:buNone/>
             </a:pPr>
             <a:r>
@@ -4032,7 +3912,7 @@
           <a:bodyPr wrap="square" rtlCol="0" anchor="ctr"/>
           <a:lstStyle/>
           <a:p>
-            <a:pPr algn="ctr" indent="0" marL="0">
+            <a:pPr marL="0" indent="0" algn="ctr">
               <a:buNone/>
             </a:pPr>
             <a:r>
@@ -4071,7 +3951,7 @@
           <a:bodyPr wrap="square" rtlCol="0" anchor="ctr"/>
           <a:lstStyle/>
           <a:p>
-            <a:pPr algn="ctr" indent="0" marL="0">
+            <a:pPr marL="0" indent="0" algn="ctr">
               <a:buNone/>
             </a:pPr>
             <a:r>
@@ -4088,7 +3968,7 @@
             <a:endParaRPr lang="en-US" sz="1000" dirty="0"/>
           </a:p>
           <a:p>
-            <a:pPr algn="ctr" indent="0" marL="0">
+            <a:pPr marL="0" indent="0" algn="ctr">
               <a:buNone/>
             </a:pPr>
             <a:r>
@@ -4132,6 +4012,13 @@
             <a:prstDash val="solid"/>
           </a:ln>
         </p:spPr>
+        <p:txBody>
+          <a:bodyPr/>
+          <a:lstStyle/>
+          <a:p>
+            <a:endParaRPr lang="en-US"/>
+          </a:p>
+        </p:txBody>
       </p:sp>
       <p:sp>
         <p:nvSpPr>
@@ -4154,7 +4041,7 @@
           <a:bodyPr wrap="square" rtlCol="0" anchor="ctr"/>
           <a:lstStyle/>
           <a:p>
-            <a:pPr algn="ctr" indent="0" marL="0">
+            <a:pPr marL="0" indent="0" algn="ctr">
               <a:buNone/>
             </a:pPr>
             <a:r>
@@ -4190,7 +4077,7 @@
           <a:bodyPr wrap="square" rtlCol="0" anchor="ctr"/>
           <a:lstStyle/>
           <a:p>
-            <a:pPr algn="ctr" indent="0" marL="0">
+            <a:pPr marL="0" indent="0" algn="ctr">
               <a:buNone/>
             </a:pPr>
             <a:r>
@@ -4229,7 +4116,7 @@
           <a:bodyPr wrap="square" rtlCol="0" anchor="ctr"/>
           <a:lstStyle/>
           <a:p>
-            <a:pPr algn="ctr" indent="0" marL="0">
+            <a:pPr marL="0" indent="0" algn="ctr">
               <a:buNone/>
             </a:pPr>
             <a:r>
@@ -4246,7 +4133,7 @@
             <a:endParaRPr lang="en-US" sz="1000" dirty="0"/>
           </a:p>
           <a:p>
-            <a:pPr algn="ctr" indent="0" marL="0">
+            <a:pPr marL="0" indent="0" algn="ctr">
               <a:buNone/>
             </a:pPr>
             <a:r>
@@ -4290,6 +4177,13 @@
             <a:prstDash val="solid"/>
           </a:ln>
         </p:spPr>
+        <p:txBody>
+          <a:bodyPr/>
+          <a:lstStyle/>
+          <a:p>
+            <a:endParaRPr lang="en-US"/>
+          </a:p>
+        </p:txBody>
       </p:sp>
       <p:sp>
         <p:nvSpPr>
@@ -4312,7 +4206,7 @@
           <a:bodyPr wrap="square" rtlCol="0" anchor="ctr"/>
           <a:lstStyle/>
           <a:p>
-            <a:pPr algn="ctr" indent="0" marL="0">
+            <a:pPr marL="0" indent="0" algn="ctr">
               <a:buNone/>
             </a:pPr>
             <a:r>
@@ -4348,7 +4242,7 @@
           <a:bodyPr wrap="square" rtlCol="0" anchor="ctr"/>
           <a:lstStyle/>
           <a:p>
-            <a:pPr algn="ctr" indent="0" marL="0">
+            <a:pPr marL="0" indent="0" algn="ctr">
               <a:buNone/>
             </a:pPr>
             <a:r>
@@ -4387,7 +4281,7 @@
           <a:bodyPr wrap="square" rtlCol="0" anchor="ctr"/>
           <a:lstStyle/>
           <a:p>
-            <a:pPr algn="ctr" indent="0" marL="0">
+            <a:pPr marL="0" indent="0" algn="ctr">
               <a:buNone/>
             </a:pPr>
             <a:r>
@@ -4404,7 +4298,7 @@
             <a:endParaRPr lang="en-US" sz="1000" dirty="0"/>
           </a:p>
           <a:p>
-            <a:pPr algn="ctr" indent="0" marL="0">
+            <a:pPr marL="0" indent="0" algn="ctr">
               <a:buNone/>
             </a:pPr>
             <a:r>
@@ -4443,7 +4337,7 @@
           <a:bodyPr wrap="square" rtlCol="0" anchor="ctr"/>
           <a:lstStyle/>
           <a:p>
-            <a:pPr algn="ctr" indent="0" marL="0">
+            <a:pPr marL="0" indent="0" algn="ctr">
               <a:buNone/>
             </a:pPr>
             <a:r>
@@ -4510,6 +4404,13 @@
             <a:prstDash val="solid"/>
           </a:ln>
         </p:spPr>
+        <p:txBody>
+          <a:bodyPr/>
+          <a:lstStyle/>
+          <a:p>
+            <a:endParaRPr lang="en-US"/>
+          </a:p>
+        </p:txBody>
       </p:sp>
       <p:sp>
         <p:nvSpPr>
@@ -4539,6 +4440,13 @@
             <a:prstDash val="solid"/>
           </a:ln>
         </p:spPr>
+        <p:txBody>
+          <a:bodyPr/>
+          <a:lstStyle/>
+          <a:p>
+            <a:endParaRPr lang="en-US"/>
+          </a:p>
+        </p:txBody>
       </p:sp>
       <p:sp>
         <p:nvSpPr>
@@ -4568,6 +4476,13 @@
             <a:prstDash val="solid"/>
           </a:ln>
         </p:spPr>
+        <p:txBody>
+          <a:bodyPr/>
+          <a:lstStyle/>
+          <a:p>
+            <a:endParaRPr lang="en-US"/>
+          </a:p>
+        </p:txBody>
       </p:sp>
       <p:sp>
         <p:nvSpPr>
@@ -4591,6 +4506,13 @@
             <a:prstDash val="solid"/>
           </a:ln>
         </p:spPr>
+        <p:txBody>
+          <a:bodyPr/>
+          <a:lstStyle/>
+          <a:p>
+            <a:endParaRPr lang="en-US"/>
+          </a:p>
+        </p:txBody>
       </p:sp>
       <p:sp>
         <p:nvSpPr>
@@ -4616,6 +4538,13 @@
             <a:prstDash val="solid"/>
           </a:ln>
         </p:spPr>
+        <p:txBody>
+          <a:bodyPr/>
+          <a:lstStyle/>
+          <a:p>
+            <a:endParaRPr lang="en-US"/>
+          </a:p>
+        </p:txBody>
       </p:sp>
       <p:sp>
         <p:nvSpPr>
@@ -4641,6 +4570,13 @@
             <a:prstDash val="solid"/>
           </a:ln>
         </p:spPr>
+        <p:txBody>
+          <a:bodyPr/>
+          <a:lstStyle/>
+          <a:p>
+            <a:endParaRPr lang="en-US"/>
+          </a:p>
+        </p:txBody>
       </p:sp>
       <p:sp>
         <p:nvSpPr>
@@ -4663,7 +4599,7 @@
           <a:bodyPr wrap="square" rtlCol="0" anchor="ctr"/>
           <a:lstStyle/>
           <a:p>
-            <a:pPr indent="0" marL="0">
+            <a:pPr marL="0" indent="0">
               <a:buNone/>
             </a:pPr>
             <a:r>
@@ -4702,7 +4638,7 @@
           <a:bodyPr wrap="square" rtlCol="0" anchor="ctr"/>
           <a:lstStyle/>
           <a:p>
-            <a:pPr indent="0" marL="0">
+            <a:pPr marL="0" indent="0">
               <a:buNone/>
             </a:pPr>
             <a:r>
@@ -4742,6 +4678,13 @@
             <a:prstDash val="solid"/>
           </a:ln>
         </p:spPr>
+        <p:txBody>
+          <a:bodyPr/>
+          <a:lstStyle/>
+          <a:p>
+            <a:endParaRPr lang="en-US"/>
+          </a:p>
+        </p:txBody>
       </p:sp>
       <p:sp>
         <p:nvSpPr>
@@ -4769,6 +4712,13 @@
             <a:prstDash val="solid"/>
           </a:ln>
         </p:spPr>
+        <p:txBody>
+          <a:bodyPr/>
+          <a:lstStyle/>
+          <a:p>
+            <a:endParaRPr lang="en-US"/>
+          </a:p>
+        </p:txBody>
       </p:sp>
       <p:sp>
         <p:nvSpPr>
@@ -4791,7 +4741,7 @@
           <a:bodyPr wrap="square" rtlCol="0" anchor="ctr"/>
           <a:lstStyle/>
           <a:p>
-            <a:pPr algn="ctr" indent="0" marL="0">
+            <a:pPr marL="0" indent="0" algn="ctr">
               <a:buNone/>
             </a:pPr>
             <a:r>
@@ -4830,7 +4780,7 @@
           <a:bodyPr wrap="square" rtlCol="0" anchor="ctr"/>
           <a:lstStyle/>
           <a:p>
-            <a:pPr algn="ctr" indent="0" marL="0">
+            <a:pPr marL="0" indent="0" algn="ctr">
               <a:buNone/>
             </a:pPr>
             <a:r>
@@ -4869,7 +4819,7 @@
           <a:bodyPr wrap="square" rtlCol="0" anchor="ctr"/>
           <a:lstStyle/>
           <a:p>
-            <a:pPr algn="ctr" indent="0" marL="0">
+            <a:pPr marL="0" indent="0" algn="ctr">
               <a:buNone/>
             </a:pPr>
             <a:r>
@@ -4909,6 +4859,13 @@
             <a:prstDash val="solid"/>
           </a:ln>
         </p:spPr>
+        <p:txBody>
+          <a:bodyPr/>
+          <a:lstStyle/>
+          <a:p>
+            <a:endParaRPr lang="en-US"/>
+          </a:p>
+        </p:txBody>
       </p:sp>
       <p:sp>
         <p:nvSpPr>
@@ -4931,7 +4888,7 @@
           <a:bodyPr wrap="square" rtlCol="0" anchor="ctr"/>
           <a:lstStyle/>
           <a:p>
-            <a:pPr algn="ctr" indent="0" marL="0">
+            <a:pPr marL="0" indent="0" algn="ctr">
               <a:buNone/>
             </a:pPr>
             <a:r>
@@ -4970,7 +4927,7 @@
           <a:bodyPr wrap="square" rtlCol="0" anchor="ctr"/>
           <a:lstStyle/>
           <a:p>
-            <a:pPr algn="ctr" indent="0" marL="0">
+            <a:pPr marL="0" indent="0" algn="ctr">
               <a:buNone/>
             </a:pPr>
             <a:r>
@@ -5009,7 +4966,7 @@
           <a:bodyPr wrap="square" rtlCol="0" anchor="ctr"/>
           <a:lstStyle/>
           <a:p>
-            <a:pPr algn="ctr" indent="0" marL="0">
+            <a:pPr marL="0" indent="0" algn="ctr">
               <a:buNone/>
             </a:pPr>
             <a:r>
@@ -5048,7 +5005,7 @@
           <a:bodyPr wrap="square" rtlCol="0" anchor="ctr"/>
           <a:lstStyle/>
           <a:p>
-            <a:pPr algn="ctr" indent="0" marL="0">
+            <a:pPr marL="0" indent="0" algn="ctr">
               <a:buNone/>
             </a:pPr>
             <a:r>
@@ -5092,6 +5049,13 @@
             <a:prstDash val="solid"/>
           </a:ln>
         </p:spPr>
+        <p:txBody>
+          <a:bodyPr/>
+          <a:lstStyle/>
+          <a:p>
+            <a:endParaRPr lang="en-US"/>
+          </a:p>
+        </p:txBody>
       </p:sp>
       <p:sp>
         <p:nvSpPr>
@@ -5114,7 +5078,7 @@
           <a:bodyPr wrap="square" rtlCol="0" anchor="ctr"/>
           <a:lstStyle/>
           <a:p>
-            <a:pPr algn="ctr" indent="0" marL="0">
+            <a:pPr marL="0" indent="0" algn="ctr">
               <a:buNone/>
             </a:pPr>
             <a:r>
@@ -5153,7 +5117,7 @@
           <a:bodyPr wrap="square" rtlCol="0" anchor="ctr"/>
           <a:lstStyle/>
           <a:p>
-            <a:pPr algn="ctr" indent="0" marL="0">
+            <a:pPr marL="0" indent="0" algn="ctr">
               <a:buNone/>
             </a:pPr>
             <a:r>
@@ -5192,7 +5156,7 @@
           <a:bodyPr wrap="square" rtlCol="0" anchor="ctr"/>
           <a:lstStyle/>
           <a:p>
-            <a:pPr algn="ctr" indent="0" marL="0">
+            <a:pPr marL="0" indent="0" algn="ctr">
               <a:buNone/>
             </a:pPr>
             <a:r>
@@ -5232,6 +5196,13 @@
             <a:prstDash val="solid"/>
           </a:ln>
         </p:spPr>
+        <p:txBody>
+          <a:bodyPr/>
+          <a:lstStyle/>
+          <a:p>
+            <a:endParaRPr lang="en-US"/>
+          </a:p>
+        </p:txBody>
       </p:sp>
       <p:sp>
         <p:nvSpPr>
@@ -5254,7 +5225,7 @@
           <a:bodyPr wrap="square" rtlCol="0" anchor="ctr"/>
           <a:lstStyle/>
           <a:p>
-            <a:pPr algn="ctr" indent="0" marL="0">
+            <a:pPr marL="0" indent="0" algn="ctr">
               <a:buNone/>
             </a:pPr>
             <a:r>
@@ -5293,7 +5264,7 @@
           <a:bodyPr wrap="square" rtlCol="0" anchor="ctr"/>
           <a:lstStyle/>
           <a:p>
-            <a:pPr algn="ctr" indent="0" marL="0">
+            <a:pPr marL="0" indent="0" algn="ctr">
               <a:buNone/>
             </a:pPr>
             <a:r>
@@ -5332,7 +5303,7 @@
           <a:bodyPr wrap="square" rtlCol="0" anchor="ctr"/>
           <a:lstStyle/>
           <a:p>
-            <a:pPr algn="ctr" indent="0" marL="0">
+            <a:pPr marL="0" indent="0" algn="ctr">
               <a:buNone/>
             </a:pPr>
             <a:r>
@@ -5371,7 +5342,7 @@
           <a:bodyPr wrap="square" rtlCol="0" anchor="ctr"/>
           <a:lstStyle/>
           <a:p>
-            <a:pPr algn="ctr" indent="0" marL="0">
+            <a:pPr marL="0" indent="0" algn="ctr">
               <a:buNone/>
             </a:pPr>
             <a:r>
@@ -5415,6 +5386,13 @@
             <a:prstDash val="solid"/>
           </a:ln>
         </p:spPr>
+        <p:txBody>
+          <a:bodyPr/>
+          <a:lstStyle/>
+          <a:p>
+            <a:endParaRPr lang="en-US"/>
+          </a:p>
+        </p:txBody>
       </p:sp>
       <p:sp>
         <p:nvSpPr>
@@ -5442,6 +5420,13 @@
             <a:prstDash val="solid"/>
           </a:ln>
         </p:spPr>
+        <p:txBody>
+          <a:bodyPr/>
+          <a:lstStyle/>
+          <a:p>
+            <a:endParaRPr lang="en-US"/>
+          </a:p>
+        </p:txBody>
       </p:sp>
       <p:sp>
         <p:nvSpPr>
@@ -5464,7 +5449,7 @@
           <a:bodyPr wrap="square" rtlCol="0" anchor="ctr"/>
           <a:lstStyle/>
           <a:p>
-            <a:pPr algn="ctr" indent="0" marL="0">
+            <a:pPr marL="0" indent="0" algn="ctr">
               <a:buNone/>
             </a:pPr>
             <a:r>
@@ -5503,7 +5488,7 @@
           <a:bodyPr wrap="square" rtlCol="0" anchor="ctr"/>
           <a:lstStyle/>
           <a:p>
-            <a:pPr algn="ctr" indent="0" marL="0">
+            <a:pPr marL="0" indent="0" algn="ctr">
               <a:buNone/>
             </a:pPr>
             <a:r>
@@ -5542,7 +5527,7 @@
           <a:bodyPr wrap="square" rtlCol="0" anchor="ctr"/>
           <a:lstStyle/>
           <a:p>
-            <a:pPr algn="ctr" indent="0" marL="0">
+            <a:pPr marL="0" indent="0" algn="ctr">
               <a:buNone/>
             </a:pPr>
             <a:r>
@@ -5581,7 +5566,7 @@
           <a:bodyPr wrap="square" rtlCol="0" anchor="ctr"/>
           <a:lstStyle/>
           <a:p>
-            <a:pPr algn="ctr" indent="0" marL="0">
+            <a:pPr marL="0" indent="0" algn="ctr">
               <a:buNone/>
             </a:pPr>
             <a:r>
@@ -5621,6 +5606,13 @@
             <a:prstDash val="solid"/>
           </a:ln>
         </p:spPr>
+        <p:txBody>
+          <a:bodyPr/>
+          <a:lstStyle/>
+          <a:p>
+            <a:endParaRPr lang="en-US"/>
+          </a:p>
+        </p:txBody>
       </p:sp>
       <p:sp>
         <p:nvSpPr>
@@ -5643,7 +5635,7 @@
           <a:bodyPr wrap="square" rtlCol="0" anchor="ctr"/>
           <a:lstStyle/>
           <a:p>
-            <a:pPr algn="ctr" indent="0" marL="0">
+            <a:pPr marL="0" indent="0" algn="ctr">
               <a:buNone/>
             </a:pPr>
             <a:r>
@@ -5682,7 +5674,7 @@
           <a:bodyPr wrap="square" rtlCol="0" anchor="ctr"/>
           <a:lstStyle/>
           <a:p>
-            <a:pPr algn="ctr" indent="0" marL="0">
+            <a:pPr marL="0" indent="0" algn="ctr">
               <a:buNone/>
             </a:pPr>
             <a:r>
@@ -5721,7 +5713,7 @@
           <a:bodyPr wrap="square" rtlCol="0" anchor="ctr"/>
           <a:lstStyle/>
           <a:p>
-            <a:pPr algn="ctr" indent="0" marL="0">
+            <a:pPr marL="0" indent="0" algn="ctr">
               <a:buNone/>
             </a:pPr>
             <a:r>
@@ -5760,7 +5752,7 @@
           <a:bodyPr wrap="square" rtlCol="0" anchor="ctr"/>
           <a:lstStyle/>
           <a:p>
-            <a:pPr algn="ctr" indent="0" marL="0">
+            <a:pPr marL="0" indent="0" algn="ctr">
               <a:buNone/>
             </a:pPr>
             <a:r>
@@ -5804,6 +5796,13 @@
             <a:prstDash val="solid"/>
           </a:ln>
         </p:spPr>
+        <p:txBody>
+          <a:bodyPr/>
+          <a:lstStyle/>
+          <a:p>
+            <a:endParaRPr lang="en-US"/>
+          </a:p>
+        </p:txBody>
       </p:sp>
       <p:sp>
         <p:nvSpPr>
@@ -5826,7 +5825,7 @@
           <a:bodyPr wrap="square" rtlCol="0" anchor="ctr"/>
           <a:lstStyle/>
           <a:p>
-            <a:pPr algn="ctr" indent="0" marL="0">
+            <a:pPr marL="0" indent="0" algn="ctr">
               <a:buNone/>
             </a:pPr>
             <a:r>
@@ -5865,7 +5864,7 @@
           <a:bodyPr wrap="square" rtlCol="0" anchor="ctr"/>
           <a:lstStyle/>
           <a:p>
-            <a:pPr algn="ctr" indent="0" marL="0">
+            <a:pPr marL="0" indent="0" algn="ctr">
               <a:buNone/>
             </a:pPr>
             <a:r>
@@ -5904,7 +5903,7 @@
           <a:bodyPr wrap="square" rtlCol="0" anchor="ctr"/>
           <a:lstStyle/>
           <a:p>
-            <a:pPr algn="ctr" indent="0" marL="0">
+            <a:pPr marL="0" indent="0" algn="ctr">
               <a:buNone/>
             </a:pPr>
             <a:r>
@@ -5944,6 +5943,13 @@
             <a:prstDash val="solid"/>
           </a:ln>
         </p:spPr>
+        <p:txBody>
+          <a:bodyPr/>
+          <a:lstStyle/>
+          <a:p>
+            <a:endParaRPr lang="en-US"/>
+          </a:p>
+        </p:txBody>
       </p:sp>
       <p:sp>
         <p:nvSpPr>
@@ -5966,7 +5972,7 @@
           <a:bodyPr wrap="square" rtlCol="0" anchor="ctr"/>
           <a:lstStyle/>
           <a:p>
-            <a:pPr algn="ctr" indent="0" marL="0">
+            <a:pPr marL="0" indent="0" algn="ctr">
               <a:buNone/>
             </a:pPr>
             <a:r>
@@ -6005,7 +6011,7 @@
           <a:bodyPr wrap="square" rtlCol="0" anchor="ctr"/>
           <a:lstStyle/>
           <a:p>
-            <a:pPr algn="ctr" indent="0" marL="0">
+            <a:pPr marL="0" indent="0" algn="ctr">
               <a:buNone/>
             </a:pPr>
             <a:r>
@@ -6044,7 +6050,7 @@
           <a:bodyPr wrap="square" rtlCol="0" anchor="ctr"/>
           <a:lstStyle/>
           <a:p>
-            <a:pPr algn="ctr" indent="0" marL="0">
+            <a:pPr marL="0" indent="0" algn="ctr">
               <a:buNone/>
             </a:pPr>
             <a:r>
@@ -6083,7 +6089,7 @@
           <a:bodyPr wrap="square" rtlCol="0" anchor="ctr"/>
           <a:lstStyle/>
           <a:p>
-            <a:pPr algn="ctr" indent="0" marL="0">
+            <a:pPr marL="0" indent="0" algn="ctr">
               <a:buNone/>
             </a:pPr>
             <a:r>
@@ -6122,7 +6128,7 @@
           <a:bodyPr wrap="square" rtlCol="0" anchor="ctr"/>
           <a:lstStyle/>
           <a:p>
-            <a:pPr algn="l" indent="0" marL="0">
+            <a:pPr marL="0" indent="0" algn="l">
               <a:buNone/>
             </a:pPr>
             <a:r>
@@ -6189,6 +6195,13 @@
             <a:prstDash val="solid"/>
           </a:ln>
         </p:spPr>
+        <p:txBody>
+          <a:bodyPr/>
+          <a:lstStyle/>
+          <a:p>
+            <a:endParaRPr lang="en-US"/>
+          </a:p>
+        </p:txBody>
       </p:sp>
       <p:sp>
         <p:nvSpPr>
@@ -6218,6 +6231,13 @@
             <a:prstDash val="solid"/>
           </a:ln>
         </p:spPr>
+        <p:txBody>
+          <a:bodyPr/>
+          <a:lstStyle/>
+          <a:p>
+            <a:endParaRPr lang="en-US"/>
+          </a:p>
+        </p:txBody>
       </p:sp>
       <p:sp>
         <p:nvSpPr>
@@ -6247,6 +6267,13 @@
             <a:prstDash val="solid"/>
           </a:ln>
         </p:spPr>
+        <p:txBody>
+          <a:bodyPr/>
+          <a:lstStyle/>
+          <a:p>
+            <a:endParaRPr lang="en-US"/>
+          </a:p>
+        </p:txBody>
       </p:sp>
       <p:sp>
         <p:nvSpPr>
@@ -6272,6 +6299,13 @@
             <a:prstDash val="solid"/>
           </a:ln>
         </p:spPr>
+        <p:txBody>
+          <a:bodyPr/>
+          <a:lstStyle/>
+          <a:p>
+            <a:endParaRPr lang="en-US"/>
+          </a:p>
+        </p:txBody>
       </p:sp>
       <p:sp>
         <p:nvSpPr>
@@ -6297,6 +6331,13 @@
             <a:prstDash val="solid"/>
           </a:ln>
         </p:spPr>
+        <p:txBody>
+          <a:bodyPr/>
+          <a:lstStyle/>
+          <a:p>
+            <a:endParaRPr lang="en-US"/>
+          </a:p>
+        </p:txBody>
       </p:sp>
       <p:sp>
         <p:nvSpPr>
@@ -6319,7 +6360,7 @@
           <a:bodyPr wrap="square" rtlCol="0" anchor="ctr"/>
           <a:lstStyle/>
           <a:p>
-            <a:pPr indent="0" marL="0">
+            <a:pPr marL="0" indent="0">
               <a:buNone/>
             </a:pPr>
             <a:r>
@@ -6358,7 +6399,7 @@
           <a:bodyPr wrap="square" rtlCol="0" anchor="ctr"/>
           <a:lstStyle/>
           <a:p>
-            <a:pPr indent="0" marL="0">
+            <a:pPr marL="0" indent="0">
               <a:buNone/>
             </a:pPr>
             <a:r>
@@ -6398,6 +6439,13 @@
             <a:prstDash val="solid"/>
           </a:ln>
         </p:spPr>
+        <p:txBody>
+          <a:bodyPr/>
+          <a:lstStyle/>
+          <a:p>
+            <a:endParaRPr lang="en-US"/>
+          </a:p>
+        </p:txBody>
       </p:sp>
       <p:sp>
         <p:nvSpPr>
@@ -6425,6 +6473,13 @@
             <a:prstDash val="solid"/>
           </a:ln>
         </p:spPr>
+        <p:txBody>
+          <a:bodyPr/>
+          <a:lstStyle/>
+          <a:p>
+            <a:endParaRPr lang="en-US"/>
+          </a:p>
+        </p:txBody>
       </p:sp>
       <p:sp>
         <p:nvSpPr>
@@ -6447,7 +6502,7 @@
           <a:bodyPr wrap="square" rtlCol="0" anchor="ctr"/>
           <a:lstStyle/>
           <a:p>
-            <a:pPr indent="0" marL="0">
+            <a:pPr marL="0" indent="0">
               <a:buNone/>
             </a:pPr>
             <a:r>
@@ -6487,6 +6542,13 @@
             <a:prstDash val="solid"/>
           </a:ln>
         </p:spPr>
+        <p:txBody>
+          <a:bodyPr/>
+          <a:lstStyle/>
+          <a:p>
+            <a:endParaRPr lang="en-US"/>
+          </a:p>
+        </p:txBody>
       </p:sp>
       <p:sp>
         <p:nvSpPr>
@@ -6509,7 +6571,7 @@
           <a:bodyPr wrap="square" rtlCol="0" anchor="ctr"/>
           <a:lstStyle/>
           <a:p>
-            <a:pPr algn="ctr" indent="0" marL="0">
+            <a:pPr marL="0" indent="0" algn="ctr">
               <a:buNone/>
             </a:pPr>
             <a:r>
@@ -6545,7 +6607,7 @@
           <a:bodyPr wrap="square" rtlCol="0" anchor="ctr"/>
           <a:lstStyle/>
           <a:p>
-            <a:pPr indent="0" marL="0">
+            <a:pPr marL="0" indent="0">
               <a:buNone/>
             </a:pPr>
             <a:r>
@@ -6562,7 +6624,7 @@
             <a:endParaRPr lang="en-US" sz="1150" dirty="0"/>
           </a:p>
           <a:p>
-            <a:pPr indent="0" marL="0">
+            <a:pPr marL="0" indent="0">
               <a:buNone/>
             </a:pPr>
             <a:r>
@@ -6601,7 +6663,7 @@
           <a:bodyPr wrap="square" rtlCol="0" anchor="ctr"/>
           <a:lstStyle/>
           <a:p>
-            <a:pPr algn="ctr" indent="0" marL="0">
+            <a:pPr marL="0" indent="0" algn="ctr">
               <a:buNone/>
             </a:pPr>
             <a:r>
@@ -6637,7 +6699,7 @@
           <a:bodyPr wrap="square" rtlCol="0" anchor="ctr"/>
           <a:lstStyle/>
           <a:p>
-            <a:pPr indent="0" marL="0">
+            <a:pPr marL="0" indent="0">
               <a:buNone/>
             </a:pPr>
             <a:r>
@@ -6654,7 +6716,7 @@
             <a:endParaRPr lang="en-US" sz="1150" dirty="0"/>
           </a:p>
           <a:p>
-            <a:pPr indent="0" marL="0">
+            <a:pPr marL="0" indent="0">
               <a:buNone/>
             </a:pPr>
             <a:r>
@@ -6693,7 +6755,7 @@
           <a:bodyPr wrap="square" rtlCol="0" anchor="ctr"/>
           <a:lstStyle/>
           <a:p>
-            <a:pPr algn="ctr" indent="0" marL="0">
+            <a:pPr marL="0" indent="0" algn="ctr">
               <a:buNone/>
             </a:pPr>
             <a:r>
@@ -6729,7 +6791,7 @@
           <a:bodyPr wrap="square" rtlCol="0" anchor="ctr"/>
           <a:lstStyle/>
           <a:p>
-            <a:pPr indent="0" marL="0">
+            <a:pPr marL="0" indent="0">
               <a:buNone/>
             </a:pPr>
             <a:r>
@@ -6746,7 +6808,7 @@
             <a:endParaRPr lang="en-US" sz="1150" dirty="0"/>
           </a:p>
           <a:p>
-            <a:pPr indent="0" marL="0">
+            <a:pPr marL="0" indent="0">
               <a:buNone/>
             </a:pPr>
             <a:r>
@@ -6785,7 +6847,7 @@
           <a:bodyPr wrap="square" rtlCol="0" anchor="ctr"/>
           <a:lstStyle/>
           <a:p>
-            <a:pPr algn="ctr" indent="0" marL="0">
+            <a:pPr marL="0" indent="0" algn="ctr">
               <a:buNone/>
             </a:pPr>
             <a:r>
@@ -6821,7 +6883,7 @@
           <a:bodyPr wrap="square" rtlCol="0" anchor="ctr"/>
           <a:lstStyle/>
           <a:p>
-            <a:pPr indent="0" marL="0">
+            <a:pPr marL="0" indent="0">
               <a:buNone/>
             </a:pPr>
             <a:r>
@@ -6838,7 +6900,7 @@
             <a:endParaRPr lang="en-US" sz="1150" dirty="0"/>
           </a:p>
           <a:p>
-            <a:pPr indent="0" marL="0">
+            <a:pPr marL="0" indent="0">
               <a:buNone/>
             </a:pPr>
             <a:r>
@@ -6882,6 +6944,13 @@
             <a:prstDash val="solid"/>
           </a:ln>
         </p:spPr>
+        <p:txBody>
+          <a:bodyPr/>
+          <a:lstStyle/>
+          <a:p>
+            <a:endParaRPr lang="en-US"/>
+          </a:p>
+        </p:txBody>
       </p:sp>
       <p:sp>
         <p:nvSpPr>
@@ -6904,7 +6973,7 @@
           <a:bodyPr wrap="square" rtlCol="0" anchor="ctr"/>
           <a:lstStyle/>
           <a:p>
-            <a:pPr indent="0" marL="0">
+            <a:pPr marL="0" indent="0">
               <a:buNone/>
             </a:pPr>
             <a:r>
@@ -6944,6 +7013,13 @@
             <a:prstDash val="solid"/>
           </a:ln>
         </p:spPr>
+        <p:txBody>
+          <a:bodyPr/>
+          <a:lstStyle/>
+          <a:p>
+            <a:endParaRPr lang="en-US"/>
+          </a:p>
+        </p:txBody>
       </p:sp>
       <p:sp>
         <p:nvSpPr>
@@ -6966,7 +7042,7 @@
           <a:bodyPr wrap="square" rtlCol="0" anchor="ctr"/>
           <a:lstStyle/>
           <a:p>
-            <a:pPr algn="ctr" indent="0" marL="0">
+            <a:pPr marL="0" indent="0" algn="ctr">
               <a:buNone/>
             </a:pPr>
             <a:r>
@@ -7002,7 +7078,7 @@
           <a:bodyPr wrap="square" rtlCol="0" anchor="ctr"/>
           <a:lstStyle/>
           <a:p>
-            <a:pPr indent="0" marL="0">
+            <a:pPr marL="0" indent="0">
               <a:buNone/>
             </a:pPr>
             <a:r>
@@ -7019,7 +7095,7 @@
             <a:endParaRPr lang="en-US" sz="1150" dirty="0"/>
           </a:p>
           <a:p>
-            <a:pPr indent="0" marL="0">
+            <a:pPr marL="0" indent="0">
               <a:buNone/>
             </a:pPr>
             <a:r>
@@ -7058,7 +7134,7 @@
           <a:bodyPr wrap="square" rtlCol="0" anchor="ctr"/>
           <a:lstStyle/>
           <a:p>
-            <a:pPr algn="ctr" indent="0" marL="0">
+            <a:pPr marL="0" indent="0" algn="ctr">
               <a:buNone/>
             </a:pPr>
             <a:r>
@@ -7094,7 +7170,7 @@
           <a:bodyPr wrap="square" rtlCol="0" anchor="ctr"/>
           <a:lstStyle/>
           <a:p>
-            <a:pPr indent="0" marL="0">
+            <a:pPr marL="0" indent="0">
               <a:buNone/>
             </a:pPr>
             <a:r>
@@ -7111,7 +7187,7 @@
             <a:endParaRPr lang="en-US" sz="1150" dirty="0"/>
           </a:p>
           <a:p>
-            <a:pPr indent="0" marL="0">
+            <a:pPr marL="0" indent="0">
               <a:buNone/>
             </a:pPr>
             <a:r>
@@ -7150,7 +7226,7 @@
           <a:bodyPr wrap="square" rtlCol="0" anchor="ctr"/>
           <a:lstStyle/>
           <a:p>
-            <a:pPr algn="ctr" indent="0" marL="0">
+            <a:pPr marL="0" indent="0" algn="ctr">
               <a:buNone/>
             </a:pPr>
             <a:r>
@@ -7186,7 +7262,7 @@
           <a:bodyPr wrap="square" rtlCol="0" anchor="ctr"/>
           <a:lstStyle/>
           <a:p>
-            <a:pPr indent="0" marL="0">
+            <a:pPr marL="0" indent="0">
               <a:buNone/>
             </a:pPr>
             <a:r>
@@ -7203,7 +7279,7 @@
             <a:endParaRPr lang="en-US" sz="1150" dirty="0"/>
           </a:p>
           <a:p>
-            <a:pPr indent="0" marL="0">
+            <a:pPr marL="0" indent="0">
               <a:buNone/>
             </a:pPr>
             <a:r>
@@ -7242,7 +7318,7 @@
           <a:bodyPr wrap="square" rtlCol="0" anchor="ctr"/>
           <a:lstStyle/>
           <a:p>
-            <a:pPr algn="ctr" indent="0" marL="0">
+            <a:pPr marL="0" indent="0" algn="ctr">
               <a:buNone/>
             </a:pPr>
             <a:r>
@@ -7278,7 +7354,7 @@
           <a:bodyPr wrap="square" rtlCol="0" anchor="ctr"/>
           <a:lstStyle/>
           <a:p>
-            <a:pPr indent="0" marL="0">
+            <a:pPr marL="0" indent="0">
               <a:buNone/>
             </a:pPr>
             <a:r>
@@ -7295,7 +7371,7 @@
             <a:endParaRPr lang="en-US" sz="1150" dirty="0"/>
           </a:p>
           <a:p>
-            <a:pPr indent="0" marL="0">
+            <a:pPr marL="0" indent="0">
               <a:buNone/>
             </a:pPr>
             <a:r>
@@ -7335,6 +7411,13 @@
             <a:prstDash val="solid"/>
           </a:ln>
         </p:spPr>
+        <p:txBody>
+          <a:bodyPr/>
+          <a:lstStyle/>
+          <a:p>
+            <a:endParaRPr lang="en-US"/>
+          </a:p>
+        </p:txBody>
       </p:sp>
       <p:sp>
         <p:nvSpPr>
@@ -7357,7 +7440,7 @@
           <a:bodyPr wrap="square" rtlCol="0" anchor="ctr"/>
           <a:lstStyle/>
           <a:p>
-            <a:pPr algn="ctr" indent="0" marL="0">
+            <a:pPr marL="0" indent="0" algn="ctr">
               <a:buNone/>
             </a:pPr>
             <a:r>
@@ -7401,6 +7484,13 @@
             <a:prstDash val="solid"/>
           </a:ln>
         </p:spPr>
+        <p:txBody>
+          <a:bodyPr/>
+          <a:lstStyle/>
+          <a:p>
+            <a:endParaRPr lang="en-US"/>
+          </a:p>
+        </p:txBody>
       </p:sp>
       <p:sp>
         <p:nvSpPr>
@@ -7423,7 +7513,7 @@
           <a:bodyPr wrap="square" rtlCol="0" anchor="ctr"/>
           <a:lstStyle/>
           <a:p>
-            <a:pPr algn="ctr" indent="0" marL="0">
+            <a:pPr marL="0" indent="0" algn="ctr">
               <a:buNone/>
             </a:pPr>
             <a:r>
@@ -7459,7 +7549,7 @@
           <a:bodyPr wrap="square" rtlCol="0" anchor="ctr"/>
           <a:lstStyle/>
           <a:p>
-            <a:pPr indent="0" marL="0">
+            <a:pPr marL="0" indent="0">
               <a:buNone/>
             </a:pPr>
             <a:r>
@@ -7476,7 +7566,7 @@
             <a:endParaRPr lang="en-US" sz="1200" dirty="0"/>
           </a:p>
           <a:p>
-            <a:pPr indent="0" marL="0">
+            <a:pPr marL="0" indent="0">
               <a:buNone/>
             </a:pPr>
             <a:r>
@@ -7515,7 +7605,7 @@
           <a:bodyPr wrap="square" rtlCol="0" anchor="ctr"/>
           <a:lstStyle/>
           <a:p>
-            <a:pPr algn="l" indent="0" marL="0">
+            <a:pPr marL="0" indent="0" algn="l">
               <a:buNone/>
             </a:pPr>
             <a:r>
@@ -7582,6 +7672,13 @@
             <a:prstDash val="solid"/>
           </a:ln>
         </p:spPr>
+        <p:txBody>
+          <a:bodyPr/>
+          <a:lstStyle/>
+          <a:p>
+            <a:endParaRPr lang="en-US"/>
+          </a:p>
+        </p:txBody>
       </p:sp>
       <p:sp>
         <p:nvSpPr>
@@ -7611,6 +7708,13 @@
             <a:prstDash val="solid"/>
           </a:ln>
         </p:spPr>
+        <p:txBody>
+          <a:bodyPr/>
+          <a:lstStyle/>
+          <a:p>
+            <a:endParaRPr lang="en-US"/>
+          </a:p>
+        </p:txBody>
       </p:sp>
       <p:sp>
         <p:nvSpPr>
@@ -7640,6 +7744,13 @@
             <a:prstDash val="solid"/>
           </a:ln>
         </p:spPr>
+        <p:txBody>
+          <a:bodyPr/>
+          <a:lstStyle/>
+          <a:p>
+            <a:endParaRPr lang="en-US"/>
+          </a:p>
+        </p:txBody>
       </p:sp>
       <p:sp>
         <p:nvSpPr>
@@ -7665,6 +7776,13 @@
             <a:prstDash val="solid"/>
           </a:ln>
         </p:spPr>
+        <p:txBody>
+          <a:bodyPr/>
+          <a:lstStyle/>
+          <a:p>
+            <a:endParaRPr lang="en-US"/>
+          </a:p>
+        </p:txBody>
       </p:sp>
       <p:sp>
         <p:nvSpPr>
@@ -7690,6 +7808,13 @@
             <a:prstDash val="solid"/>
           </a:ln>
         </p:spPr>
+        <p:txBody>
+          <a:bodyPr/>
+          <a:lstStyle/>
+          <a:p>
+            <a:endParaRPr lang="en-US"/>
+          </a:p>
+        </p:txBody>
       </p:sp>
       <p:sp>
         <p:nvSpPr>
@@ -7712,7 +7837,7 @@
           <a:bodyPr wrap="square" rtlCol="0" anchor="ctr"/>
           <a:lstStyle/>
           <a:p>
-            <a:pPr indent="0" marL="0">
+            <a:pPr marL="0" indent="0">
               <a:buNone/>
             </a:pPr>
             <a:r>
@@ -7751,7 +7876,7 @@
           <a:bodyPr wrap="square" rtlCol="0" anchor="ctr"/>
           <a:lstStyle/>
           <a:p>
-            <a:pPr indent="0" marL="0">
+            <a:pPr marL="0" indent="0">
               <a:buNone/>
             </a:pPr>
             <a:r>
@@ -7791,6 +7916,13 @@
             <a:prstDash val="solid"/>
           </a:ln>
         </p:spPr>
+        <p:txBody>
+          <a:bodyPr/>
+          <a:lstStyle/>
+          <a:p>
+            <a:endParaRPr lang="en-US"/>
+          </a:p>
+        </p:txBody>
       </p:sp>
       <p:sp>
         <p:nvSpPr>
@@ -7818,6 +7950,13 @@
             <a:prstDash val="solid"/>
           </a:ln>
         </p:spPr>
+        <p:txBody>
+          <a:bodyPr/>
+          <a:lstStyle/>
+          <a:p>
+            <a:endParaRPr lang="en-US"/>
+          </a:p>
+        </p:txBody>
       </p:sp>
       <p:sp>
         <p:nvSpPr>
@@ -7840,7 +7979,7 @@
           <a:bodyPr wrap="square" rtlCol="0" anchor="ctr"/>
           <a:lstStyle/>
           <a:p>
-            <a:pPr algn="ctr" indent="0" marL="0">
+            <a:pPr marL="0" indent="0" algn="ctr">
               <a:buNone/>
             </a:pPr>
             <a:r>
@@ -7879,7 +8018,7 @@
           <a:bodyPr wrap="square" rtlCol="0" anchor="ctr"/>
           <a:lstStyle/>
           <a:p>
-            <a:pPr algn="ctr" indent="0" marL="0">
+            <a:pPr marL="0" indent="0" algn="ctr">
               <a:buNone/>
             </a:pPr>
             <a:r>
@@ -7915,7 +8054,7 @@
           <a:bodyPr wrap="square" rtlCol="0" anchor="ctr"/>
           <a:lstStyle/>
           <a:p>
-            <a:pPr indent="0" marL="0">
+            <a:pPr marL="0" indent="0">
               <a:buNone/>
             </a:pPr>
             <a:r>
@@ -7954,7 +8093,7 @@
           <a:bodyPr wrap="square" rtlCol="0" anchor="ctr"/>
           <a:lstStyle/>
           <a:p>
-            <a:pPr indent="0" marL="0">
+            <a:pPr marL="0" indent="0">
               <a:buNone/>
             </a:pPr>
             <a:r>
@@ -7993,7 +8132,7 @@
           <a:bodyPr wrap="square" rtlCol="0" anchor="ctr"/>
           <a:lstStyle/>
           <a:p>
-            <a:pPr algn="ctr" indent="0" marL="0">
+            <a:pPr marL="0" indent="0" algn="ctr">
               <a:buNone/>
             </a:pPr>
             <a:r>
@@ -8029,7 +8168,7 @@
           <a:bodyPr wrap="square" rtlCol="0" anchor="ctr"/>
           <a:lstStyle/>
           <a:p>
-            <a:pPr indent="0" marL="0">
+            <a:pPr marL="0" indent="0">
               <a:buNone/>
             </a:pPr>
             <a:r>
@@ -8068,7 +8207,7 @@
           <a:bodyPr wrap="square" rtlCol="0" anchor="ctr"/>
           <a:lstStyle/>
           <a:p>
-            <a:pPr indent="0" marL="0">
+            <a:pPr marL="0" indent="0">
               <a:buNone/>
             </a:pPr>
             <a:r>
@@ -8107,7 +8246,7 @@
           <a:bodyPr wrap="square" rtlCol="0" anchor="ctr"/>
           <a:lstStyle/>
           <a:p>
-            <a:pPr algn="ctr" indent="0" marL="0">
+            <a:pPr marL="0" indent="0" algn="ctr">
               <a:buNone/>
             </a:pPr>
             <a:r>
@@ -8143,7 +8282,7 @@
           <a:bodyPr wrap="square" rtlCol="0" anchor="ctr"/>
           <a:lstStyle/>
           <a:p>
-            <a:pPr indent="0" marL="0">
+            <a:pPr marL="0" indent="0">
               <a:buNone/>
             </a:pPr>
             <a:r>
@@ -8182,7 +8321,7 @@
           <a:bodyPr wrap="square" rtlCol="0" anchor="ctr"/>
           <a:lstStyle/>
           <a:p>
-            <a:pPr indent="0" marL="0">
+            <a:pPr marL="0" indent="0">
               <a:buNone/>
             </a:pPr>
             <a:r>
@@ -8221,7 +8360,7 @@
           <a:bodyPr wrap="square" rtlCol="0" anchor="ctr"/>
           <a:lstStyle/>
           <a:p>
-            <a:pPr algn="ctr" indent="0" marL="0">
+            <a:pPr marL="0" indent="0" algn="ctr">
               <a:buNone/>
             </a:pPr>
             <a:r>
@@ -8257,7 +8396,7 @@
           <a:bodyPr wrap="square" rtlCol="0" anchor="ctr"/>
           <a:lstStyle/>
           <a:p>
-            <a:pPr indent="0" marL="0">
+            <a:pPr marL="0" indent="0">
               <a:buNone/>
             </a:pPr>
             <a:r>
@@ -8296,7 +8435,7 @@
           <a:bodyPr wrap="square" rtlCol="0" anchor="ctr"/>
           <a:lstStyle/>
           <a:p>
-            <a:pPr indent="0" marL="0">
+            <a:pPr marL="0" indent="0">
               <a:buNone/>
             </a:pPr>
             <a:r>
@@ -8335,7 +8474,7 @@
           <a:bodyPr wrap="square" rtlCol="0" anchor="ctr"/>
           <a:lstStyle/>
           <a:p>
-            <a:pPr algn="ctr" indent="0" marL="0">
+            <a:pPr marL="0" indent="0" algn="ctr">
               <a:buNone/>
             </a:pPr>
             <a:r>
@@ -8371,7 +8510,7 @@
           <a:bodyPr wrap="square" rtlCol="0" anchor="ctr"/>
           <a:lstStyle/>
           <a:p>
-            <a:pPr indent="0" marL="0">
+            <a:pPr marL="0" indent="0">
               <a:buNone/>
             </a:pPr>
             <a:r>
@@ -8410,7 +8549,7 @@
           <a:bodyPr wrap="square" rtlCol="0" anchor="ctr"/>
           <a:lstStyle/>
           <a:p>
-            <a:pPr indent="0" marL="0">
+            <a:pPr marL="0" indent="0">
               <a:buNone/>
             </a:pPr>
             <a:r>
@@ -8449,7 +8588,7 @@
           <a:bodyPr wrap="square" rtlCol="0" anchor="ctr"/>
           <a:lstStyle/>
           <a:p>
-            <a:pPr algn="ctr" indent="0" marL="0">
+            <a:pPr marL="0" indent="0" algn="ctr">
               <a:buNone/>
             </a:pPr>
             <a:r>
@@ -8493,6 +8632,13 @@
             <a:prstDash val="solid"/>
           </a:ln>
         </p:spPr>
+        <p:txBody>
+          <a:bodyPr/>
+          <a:lstStyle/>
+          <a:p>
+            <a:endParaRPr lang="en-US"/>
+          </a:p>
+        </p:txBody>
       </p:sp>
       <p:sp>
         <p:nvSpPr>
@@ -8515,7 +8661,7 @@
           <a:bodyPr wrap="square" rtlCol="0" anchor="ctr"/>
           <a:lstStyle/>
           <a:p>
-            <a:pPr algn="ctr" indent="0" marL="0">
+            <a:pPr marL="0" indent="0" algn="ctr">
               <a:buNone/>
             </a:pPr>
             <a:r>
@@ -8554,7 +8700,7 @@
           <a:bodyPr wrap="square" rtlCol="0" anchor="ctr"/>
           <a:lstStyle/>
           <a:p>
-            <a:pPr algn="ctr" indent="0" marL="0">
+            <a:pPr marL="0" indent="0" algn="ctr">
               <a:buNone/>
             </a:pPr>
             <a:r>
@@ -8590,7 +8736,7 @@
           <a:bodyPr wrap="square" rtlCol="0" anchor="ctr"/>
           <a:lstStyle/>
           <a:p>
-            <a:pPr indent="0" marL="0">
+            <a:pPr marL="0" indent="0">
               <a:buNone/>
             </a:pPr>
             <a:r>
@@ -8629,7 +8775,7 @@
           <a:bodyPr wrap="square" rtlCol="0" anchor="ctr"/>
           <a:lstStyle/>
           <a:p>
-            <a:pPr indent="0" marL="0">
+            <a:pPr marL="0" indent="0">
               <a:buNone/>
             </a:pPr>
             <a:r>
@@ -8668,7 +8814,7 @@
           <a:bodyPr wrap="square" rtlCol="0" anchor="ctr"/>
           <a:lstStyle/>
           <a:p>
-            <a:pPr algn="ctr" indent="0" marL="0">
+            <a:pPr marL="0" indent="0" algn="ctr">
               <a:buNone/>
             </a:pPr>
             <a:r>
@@ -8704,7 +8850,7 @@
           <a:bodyPr wrap="square" rtlCol="0" anchor="ctr"/>
           <a:lstStyle/>
           <a:p>
-            <a:pPr indent="0" marL="0">
+            <a:pPr marL="0" indent="0">
               <a:buNone/>
             </a:pPr>
             <a:r>
@@ -8743,7 +8889,7 @@
           <a:bodyPr wrap="square" rtlCol="0" anchor="ctr"/>
           <a:lstStyle/>
           <a:p>
-            <a:pPr indent="0" marL="0">
+            <a:pPr marL="0" indent="0">
               <a:buNone/>
             </a:pPr>
             <a:r>
@@ -8782,7 +8928,7 @@
           <a:bodyPr wrap="square" rtlCol="0" anchor="ctr"/>
           <a:lstStyle/>
           <a:p>
-            <a:pPr algn="ctr" indent="0" marL="0">
+            <a:pPr marL="0" indent="0" algn="ctr">
               <a:buNone/>
             </a:pPr>
             <a:r>
@@ -8818,7 +8964,7 @@
           <a:bodyPr wrap="square" rtlCol="0" anchor="ctr"/>
           <a:lstStyle/>
           <a:p>
-            <a:pPr indent="0" marL="0">
+            <a:pPr marL="0" indent="0">
               <a:buNone/>
             </a:pPr>
             <a:r>
@@ -8857,7 +9003,7 @@
           <a:bodyPr wrap="square" rtlCol="0" anchor="ctr"/>
           <a:lstStyle/>
           <a:p>
-            <a:pPr indent="0" marL="0">
+            <a:pPr marL="0" indent="0">
               <a:buNone/>
             </a:pPr>
             <a:r>
@@ -8896,7 +9042,7 @@
           <a:bodyPr wrap="square" rtlCol="0" anchor="ctr"/>
           <a:lstStyle/>
           <a:p>
-            <a:pPr algn="ctr" indent="0" marL="0">
+            <a:pPr marL="0" indent="0" algn="ctr">
               <a:buNone/>
             </a:pPr>
             <a:r>
@@ -8932,7 +9078,7 @@
           <a:bodyPr wrap="square" rtlCol="0" anchor="ctr"/>
           <a:lstStyle/>
           <a:p>
-            <a:pPr indent="0" marL="0">
+            <a:pPr marL="0" indent="0">
               <a:buNone/>
             </a:pPr>
             <a:r>
@@ -8971,7 +9117,7 @@
           <a:bodyPr wrap="square" rtlCol="0" anchor="ctr"/>
           <a:lstStyle/>
           <a:p>
-            <a:pPr indent="0" marL="0">
+            <a:pPr marL="0" indent="0">
               <a:buNone/>
             </a:pPr>
             <a:r>
@@ -9010,7 +9156,7 @@
           <a:bodyPr wrap="square" rtlCol="0" anchor="ctr"/>
           <a:lstStyle/>
           <a:p>
-            <a:pPr algn="ctr" indent="0" marL="0">
+            <a:pPr marL="0" indent="0" algn="ctr">
               <a:buNone/>
             </a:pPr>
             <a:r>
@@ -9046,7 +9192,7 @@
           <a:bodyPr wrap="square" rtlCol="0" anchor="ctr"/>
           <a:lstStyle/>
           <a:p>
-            <a:pPr indent="0" marL="0">
+            <a:pPr marL="0" indent="0">
               <a:buNone/>
             </a:pPr>
             <a:r>
@@ -9085,7 +9231,7 @@
           <a:bodyPr wrap="square" rtlCol="0" anchor="ctr"/>
           <a:lstStyle/>
           <a:p>
-            <a:pPr indent="0" marL="0">
+            <a:pPr marL="0" indent="0">
               <a:buNone/>
             </a:pPr>
             <a:r>
@@ -9129,6 +9275,13 @@
             <a:prstDash val="solid"/>
           </a:ln>
         </p:spPr>
+        <p:txBody>
+          <a:bodyPr/>
+          <a:lstStyle/>
+          <a:p>
+            <a:endParaRPr lang="en-US"/>
+          </a:p>
+        </p:txBody>
       </p:sp>
       <p:sp>
         <p:nvSpPr>
@@ -9151,7 +9304,7 @@
           <a:bodyPr wrap="square" rtlCol="0" anchor="ctr"/>
           <a:lstStyle/>
           <a:p>
-            <a:pPr indent="0" marL="0">
+            <a:pPr marL="0" indent="0">
               <a:buNone/>
             </a:pPr>
             <a:r>
@@ -9190,7 +9343,7 @@
           <a:bodyPr wrap="square" rtlCol="0" anchor="ctr"/>
           <a:lstStyle/>
           <a:p>
-            <a:pPr algn="ctr" indent="0" marL="0">
+            <a:pPr marL="0" indent="0" algn="ctr">
               <a:buNone/>
             </a:pPr>
             <a:r>
@@ -9207,7 +9360,7 @@
             <a:endParaRPr lang="en-US" sz="900" dirty="0"/>
           </a:p>
           <a:p>
-            <a:pPr algn="ctr" indent="0" marL="0">
+            <a:pPr marL="0" indent="0" algn="ctr">
               <a:buNone/>
             </a:pPr>
             <a:r>
@@ -9246,7 +9399,7 @@
           <a:bodyPr wrap="square" rtlCol="0" anchor="ctr"/>
           <a:lstStyle/>
           <a:p>
-            <a:pPr algn="ctr" indent="0" marL="0">
+            <a:pPr marL="0" indent="0" algn="ctr">
               <a:buNone/>
             </a:pPr>
             <a:r>
@@ -9285,7 +9438,7 @@
           <a:bodyPr wrap="square" rtlCol="0" anchor="ctr"/>
           <a:lstStyle/>
           <a:p>
-            <a:pPr algn="ctr" indent="0" marL="0">
+            <a:pPr marL="0" indent="0" algn="ctr">
               <a:buNone/>
             </a:pPr>
             <a:r>
@@ -9302,7 +9455,7 @@
             <a:endParaRPr lang="en-US" sz="900" dirty="0"/>
           </a:p>
           <a:p>
-            <a:pPr algn="ctr" indent="0" marL="0">
+            <a:pPr marL="0" indent="0" algn="ctr">
               <a:buNone/>
             </a:pPr>
             <a:r>
@@ -9341,7 +9494,7 @@
           <a:bodyPr wrap="square" rtlCol="0" anchor="ctr"/>
           <a:lstStyle/>
           <a:p>
-            <a:pPr algn="ctr" indent="0" marL="0">
+            <a:pPr marL="0" indent="0" algn="ctr">
               <a:buNone/>
             </a:pPr>
             <a:r>
@@ -9380,7 +9533,7 @@
           <a:bodyPr wrap="square" rtlCol="0" anchor="ctr"/>
           <a:lstStyle/>
           <a:p>
-            <a:pPr algn="ctr" indent="0" marL="0">
+            <a:pPr marL="0" indent="0" algn="ctr">
               <a:buNone/>
             </a:pPr>
             <a:r>
@@ -9397,7 +9550,7 @@
             <a:endParaRPr lang="en-US" sz="900" dirty="0"/>
           </a:p>
           <a:p>
-            <a:pPr algn="ctr" indent="0" marL="0">
+            <a:pPr marL="0" indent="0" algn="ctr">
               <a:buNone/>
             </a:pPr>
             <a:r>
@@ -9436,7 +9589,7 @@
           <a:bodyPr wrap="square" rtlCol="0" anchor="ctr"/>
           <a:lstStyle/>
           <a:p>
-            <a:pPr algn="ctr" indent="0" marL="0">
+            <a:pPr marL="0" indent="0" algn="ctr">
               <a:buNone/>
             </a:pPr>
             <a:r>
@@ -9475,7 +9628,7 @@
           <a:bodyPr wrap="square" rtlCol="0" anchor="ctr"/>
           <a:lstStyle/>
           <a:p>
-            <a:pPr algn="ctr" indent="0" marL="0">
+            <a:pPr marL="0" indent="0" algn="ctr">
               <a:buNone/>
             </a:pPr>
             <a:r>
@@ -9492,7 +9645,7 @@
             <a:endParaRPr lang="en-US" sz="900" dirty="0"/>
           </a:p>
           <a:p>
-            <a:pPr algn="ctr" indent="0" marL="0">
+            <a:pPr marL="0" indent="0" algn="ctr">
               <a:buNone/>
             </a:pPr>
             <a:r>
@@ -9531,7 +9684,7 @@
           <a:bodyPr wrap="square" rtlCol="0" anchor="ctr"/>
           <a:lstStyle/>
           <a:p>
-            <a:pPr algn="l" indent="0" marL="0">
+            <a:pPr marL="0" indent="0" algn="l">
               <a:buNone/>
             </a:pPr>
             <a:r>
@@ -9598,6 +9751,13 @@
             <a:prstDash val="solid"/>
           </a:ln>
         </p:spPr>
+        <p:txBody>
+          <a:bodyPr/>
+          <a:lstStyle/>
+          <a:p>
+            <a:endParaRPr lang="en-US"/>
+          </a:p>
+        </p:txBody>
       </p:sp>
       <p:sp>
         <p:nvSpPr>
@@ -9627,6 +9787,13 @@
             <a:prstDash val="solid"/>
           </a:ln>
         </p:spPr>
+        <p:txBody>
+          <a:bodyPr/>
+          <a:lstStyle/>
+          <a:p>
+            <a:endParaRPr lang="en-US"/>
+          </a:p>
+        </p:txBody>
       </p:sp>
       <p:sp>
         <p:nvSpPr>
@@ -9656,6 +9823,13 @@
             <a:prstDash val="solid"/>
           </a:ln>
         </p:spPr>
+        <p:txBody>
+          <a:bodyPr/>
+          <a:lstStyle/>
+          <a:p>
+            <a:endParaRPr lang="en-US"/>
+          </a:p>
+        </p:txBody>
       </p:sp>
       <p:sp>
         <p:nvSpPr>
@@ -9685,6 +9859,13 @@
             <a:prstDash val="solid"/>
           </a:ln>
         </p:spPr>
+        <p:txBody>
+          <a:bodyPr/>
+          <a:lstStyle/>
+          <a:p>
+            <a:endParaRPr lang="en-US"/>
+          </a:p>
+        </p:txBody>
       </p:sp>
       <p:sp>
         <p:nvSpPr>
@@ -9710,6 +9891,13 @@
             <a:prstDash val="solid"/>
           </a:ln>
         </p:spPr>
+        <p:txBody>
+          <a:bodyPr/>
+          <a:lstStyle/>
+          <a:p>
+            <a:endParaRPr lang="en-US"/>
+          </a:p>
+        </p:txBody>
       </p:sp>
       <p:sp>
         <p:nvSpPr>
@@ -9735,6 +9923,13 @@
             <a:prstDash val="solid"/>
           </a:ln>
         </p:spPr>
+        <p:txBody>
+          <a:bodyPr/>
+          <a:lstStyle/>
+          <a:p>
+            <a:endParaRPr lang="en-US"/>
+          </a:p>
+        </p:txBody>
       </p:sp>
       <p:sp>
         <p:nvSpPr>
@@ -9757,7 +9952,7 @@
           <a:bodyPr wrap="square" rtlCol="0" anchor="ctr"/>
           <a:lstStyle/>
           <a:p>
-            <a:pPr indent="0" marL="0">
+            <a:pPr marL="0" indent="0">
               <a:buNone/>
             </a:pPr>
             <a:r>
@@ -9797,6 +9992,13 @@
             <a:prstDash val="solid"/>
           </a:ln>
         </p:spPr>
+        <p:txBody>
+          <a:bodyPr/>
+          <a:lstStyle/>
+          <a:p>
+            <a:endParaRPr lang="en-US"/>
+          </a:p>
+        </p:txBody>
       </p:sp>
       <p:sp>
         <p:nvSpPr>
@@ -9824,6 +10026,13 @@
             <a:prstDash val="solid"/>
           </a:ln>
         </p:spPr>
+        <p:txBody>
+          <a:bodyPr/>
+          <a:lstStyle/>
+          <a:p>
+            <a:endParaRPr lang="en-US"/>
+          </a:p>
+        </p:txBody>
       </p:sp>
       <p:sp>
         <p:nvSpPr>
@@ -9846,7 +10055,7 @@
           <a:bodyPr wrap="square" rtlCol="0" anchor="ctr"/>
           <a:lstStyle/>
           <a:p>
-            <a:pPr algn="ctr" indent="0" marL="0">
+            <a:pPr marL="0" indent="0" algn="ctr">
               <a:buNone/>
             </a:pPr>
             <a:r>
@@ -9882,7 +10091,7 @@
           <a:bodyPr wrap="square" rtlCol="0" anchor="ctr"/>
           <a:lstStyle/>
           <a:p>
-            <a:pPr algn="ctr" indent="0" marL="0">
+            <a:pPr marL="0" indent="0" algn="ctr">
               <a:buNone/>
             </a:pPr>
             <a:r>
@@ -9899,7 +10108,7 @@
             <a:endParaRPr lang="en-US" sz="1500" dirty="0"/>
           </a:p>
           <a:p>
-            <a:pPr algn="ctr" indent="0" marL="0">
+            <a:pPr marL="0" indent="0" algn="ctr">
               <a:buNone/>
             </a:pPr>
             <a:r>
@@ -9938,7 +10147,7 @@
           <a:bodyPr wrap="square" rtlCol="0" anchor="ctr"/>
           <a:lstStyle/>
           <a:p>
-            <a:pPr algn="ctr" indent="0" marL="0">
+            <a:pPr marL="0" indent="0" algn="ctr">
               <a:buNone/>
             </a:pPr>
             <a:r>
@@ -9982,6 +10191,13 @@
             <a:prstDash val="solid"/>
           </a:ln>
         </p:spPr>
+        <p:txBody>
+          <a:bodyPr/>
+          <a:lstStyle/>
+          <a:p>
+            <a:endParaRPr lang="en-US"/>
+          </a:p>
+        </p:txBody>
       </p:sp>
       <p:sp>
         <p:nvSpPr>
@@ -10004,7 +10220,7 @@
           <a:bodyPr wrap="square" rtlCol="0" anchor="ctr"/>
           <a:lstStyle/>
           <a:p>
-            <a:pPr algn="ctr" indent="0" marL="0">
+            <a:pPr marL="0" indent="0" algn="ctr">
               <a:buNone/>
             </a:pPr>
             <a:r>
@@ -10040,7 +10256,7 @@
           <a:bodyPr wrap="square" rtlCol="0" anchor="ctr"/>
           <a:lstStyle/>
           <a:p>
-            <a:pPr algn="ctr" indent="0" marL="0">
+            <a:pPr marL="0" indent="0" algn="ctr">
               <a:buNone/>
             </a:pPr>
             <a:r>
@@ -10057,7 +10273,7 @@
             <a:endParaRPr lang="en-US" sz="1500" dirty="0"/>
           </a:p>
           <a:p>
-            <a:pPr algn="ctr" indent="0" marL="0">
+            <a:pPr marL="0" indent="0" algn="ctr">
               <a:buNone/>
             </a:pPr>
             <a:r>
@@ -10096,7 +10312,7 @@
           <a:bodyPr wrap="square" rtlCol="0" anchor="ctr"/>
           <a:lstStyle/>
           <a:p>
-            <a:pPr algn="ctr" indent="0" marL="0">
+            <a:pPr marL="0" indent="0" algn="ctr">
               <a:buNone/>
             </a:pPr>
             <a:r>
@@ -10140,6 +10356,13 @@
             <a:prstDash val="solid"/>
           </a:ln>
         </p:spPr>
+        <p:txBody>
+          <a:bodyPr/>
+          <a:lstStyle/>
+          <a:p>
+            <a:endParaRPr lang="en-US"/>
+          </a:p>
+        </p:txBody>
       </p:sp>
       <p:sp>
         <p:nvSpPr>
@@ -10162,7 +10385,7 @@
           <a:bodyPr wrap="square" rtlCol="0" anchor="ctr"/>
           <a:lstStyle/>
           <a:p>
-            <a:pPr algn="ctr" indent="0" marL="0">
+            <a:pPr marL="0" indent="0" algn="ctr">
               <a:buNone/>
             </a:pPr>
             <a:r>
@@ -10198,7 +10421,7 @@
           <a:bodyPr wrap="square" rtlCol="0" anchor="ctr"/>
           <a:lstStyle/>
           <a:p>
-            <a:pPr algn="ctr" indent="0" marL="0">
+            <a:pPr marL="0" indent="0" algn="ctr">
               <a:buNone/>
             </a:pPr>
             <a:r>
@@ -10215,7 +10438,7 @@
             <a:endParaRPr lang="en-US" sz="1500" dirty="0"/>
           </a:p>
           <a:p>
-            <a:pPr algn="ctr" indent="0" marL="0">
+            <a:pPr marL="0" indent="0" algn="ctr">
               <a:buNone/>
             </a:pPr>
             <a:r>
@@ -10254,7 +10477,7 @@
           <a:bodyPr wrap="square" rtlCol="0" anchor="ctr"/>
           <a:lstStyle/>
           <a:p>
-            <a:pPr algn="ctr" indent="0" marL="0">
+            <a:pPr marL="0" indent="0" algn="ctr">
               <a:buNone/>
             </a:pPr>
             <a:r>
@@ -10293,7 +10516,7 @@
           <a:bodyPr wrap="square" rtlCol="0" anchor="ctr"/>
           <a:lstStyle/>
           <a:p>
-            <a:pPr algn="ctr" indent="0" marL="0">
+            <a:pPr marL="0" indent="0" algn="ctr">
               <a:buNone/>
             </a:pPr>
             <a:r>
@@ -10337,6 +10560,13 @@
             <a:prstDash val="solid"/>
           </a:ln>
         </p:spPr>
+        <p:txBody>
+          <a:bodyPr/>
+          <a:lstStyle/>
+          <a:p>
+            <a:endParaRPr lang="en-US"/>
+          </a:p>
+        </p:txBody>
       </p:sp>
       <p:sp>
         <p:nvSpPr>
@@ -10359,7 +10589,7 @@
           <a:bodyPr wrap="square" rtlCol="0" anchor="ctr"/>
           <a:lstStyle/>
           <a:p>
-            <a:pPr algn="ctr" indent="0" marL="0">
+            <a:pPr marL="0" indent="0" algn="ctr">
               <a:buNone/>
             </a:pPr>
             <a:r>
@@ -10376,7 +10606,7 @@
             <a:endParaRPr lang="en-US" sz="1700" dirty="0"/>
           </a:p>
           <a:p>
-            <a:pPr algn="ctr" indent="0" marL="0">
+            <a:pPr marL="0" indent="0" algn="ctr">
               <a:buNone/>
             </a:pPr>
             <a:r>
@@ -10420,6 +10650,13 @@
             <a:prstDash val="solid"/>
           </a:ln>
         </p:spPr>
+        <p:txBody>
+          <a:bodyPr/>
+          <a:lstStyle/>
+          <a:p>
+            <a:endParaRPr lang="en-US"/>
+          </a:p>
+        </p:txBody>
       </p:sp>
       <p:sp>
         <p:nvSpPr>
@@ -10442,7 +10679,7 @@
           <a:bodyPr wrap="square" rtlCol="0" anchor="ctr"/>
           <a:lstStyle/>
           <a:p>
-            <a:pPr algn="ctr" indent="0" marL="0">
+            <a:pPr marL="0" indent="0" algn="ctr">
               <a:buNone/>
             </a:pPr>
             <a:r>
@@ -10481,7 +10718,7 @@
           <a:bodyPr wrap="square" rtlCol="0" anchor="ctr"/>
           <a:lstStyle/>
           <a:p>
-            <a:pPr algn="ctr" indent="0" marL="0">
+            <a:pPr marL="0" indent="0" algn="ctr">
               <a:buNone/>
             </a:pPr>
             <a:r>
@@ -10520,7 +10757,7 @@
           <a:bodyPr wrap="square" rtlCol="0" anchor="ctr"/>
           <a:lstStyle/>
           <a:p>
-            <a:pPr algn="ctr" indent="0" marL="0">
+            <a:pPr marL="0" indent="0" algn="ctr">
               <a:buNone/>
             </a:pPr>
             <a:r>
@@ -10587,6 +10824,13 @@
             <a:prstDash val="solid"/>
           </a:ln>
         </p:spPr>
+        <p:txBody>
+          <a:bodyPr/>
+          <a:lstStyle/>
+          <a:p>
+            <a:endParaRPr lang="en-US"/>
+          </a:p>
+        </p:txBody>
       </p:sp>
       <p:sp>
         <p:nvSpPr>
@@ -10616,6 +10860,13 @@
             <a:prstDash val="solid"/>
           </a:ln>
         </p:spPr>
+        <p:txBody>
+          <a:bodyPr/>
+          <a:lstStyle/>
+          <a:p>
+            <a:endParaRPr lang="en-US"/>
+          </a:p>
+        </p:txBody>
       </p:sp>
       <p:sp>
         <p:nvSpPr>
@@ -10645,6 +10896,13 @@
             <a:prstDash val="solid"/>
           </a:ln>
         </p:spPr>
+        <p:txBody>
+          <a:bodyPr/>
+          <a:lstStyle/>
+          <a:p>
+            <a:endParaRPr lang="en-US"/>
+          </a:p>
+        </p:txBody>
       </p:sp>
       <p:sp>
         <p:nvSpPr>
@@ -10668,6 +10926,13 @@
             <a:prstDash val="solid"/>
           </a:ln>
         </p:spPr>
+        <p:txBody>
+          <a:bodyPr/>
+          <a:lstStyle/>
+          <a:p>
+            <a:endParaRPr lang="en-US"/>
+          </a:p>
+        </p:txBody>
       </p:sp>
       <p:sp>
         <p:nvSpPr>
@@ -10693,6 +10958,13 @@
             <a:prstDash val="solid"/>
           </a:ln>
         </p:spPr>
+        <p:txBody>
+          <a:bodyPr/>
+          <a:lstStyle/>
+          <a:p>
+            <a:endParaRPr lang="en-US"/>
+          </a:p>
+        </p:txBody>
       </p:sp>
       <p:sp>
         <p:nvSpPr>
@@ -10718,6 +10990,13 @@
             <a:prstDash val="solid"/>
           </a:ln>
         </p:spPr>
+        <p:txBody>
+          <a:bodyPr/>
+          <a:lstStyle/>
+          <a:p>
+            <a:endParaRPr lang="en-US"/>
+          </a:p>
+        </p:txBody>
       </p:sp>
       <p:sp>
         <p:nvSpPr>
@@ -10740,7 +11019,7 @@
           <a:bodyPr wrap="square" rtlCol="0" anchor="ctr"/>
           <a:lstStyle/>
           <a:p>
-            <a:pPr indent="0" marL="0">
+            <a:pPr marL="0" indent="0">
               <a:buNone/>
             </a:pPr>
             <a:r>
@@ -10779,7 +11058,7 @@
           <a:bodyPr wrap="square" rtlCol="0" anchor="ctr"/>
           <a:lstStyle/>
           <a:p>
-            <a:pPr indent="0" marL="0">
+            <a:pPr marL="0" indent="0">
               <a:buNone/>
             </a:pPr>
             <a:r>
@@ -10819,6 +11098,13 @@
             <a:prstDash val="solid"/>
           </a:ln>
         </p:spPr>
+        <p:txBody>
+          <a:bodyPr/>
+          <a:lstStyle/>
+          <a:p>
+            <a:endParaRPr lang="en-US"/>
+          </a:p>
+        </p:txBody>
       </p:sp>
       <p:sp>
         <p:nvSpPr>
@@ -10846,6 +11132,13 @@
             <a:prstDash val="solid"/>
           </a:ln>
         </p:spPr>
+        <p:txBody>
+          <a:bodyPr/>
+          <a:lstStyle/>
+          <a:p>
+            <a:endParaRPr lang="en-US"/>
+          </a:p>
+        </p:txBody>
       </p:sp>
       <p:sp>
         <p:nvSpPr>
@@ -10868,7 +11161,7 @@
           <a:bodyPr wrap="square" rtlCol="0" anchor="ctr"/>
           <a:lstStyle/>
           <a:p>
-            <a:pPr indent="0" marL="0">
+            <a:pPr marL="0" indent="0">
               <a:buNone/>
             </a:pPr>
             <a:r>
@@ -10907,7 +11200,7 @@
           <a:bodyPr wrap="square" rtlCol="0" anchor="ctr"/>
           <a:lstStyle/>
           <a:p>
-            <a:pPr indent="0" marL="0">
+            <a:pPr marL="0" indent="0">
               <a:buNone/>
             </a:pPr>
             <a:r>
@@ -10951,6 +11244,13 @@
             <a:prstDash val="solid"/>
           </a:ln>
         </p:spPr>
+        <p:txBody>
+          <a:bodyPr/>
+          <a:lstStyle/>
+          <a:p>
+            <a:endParaRPr lang="en-US"/>
+          </a:p>
+        </p:txBody>
       </p:sp>
       <p:sp>
         <p:nvSpPr>
@@ -10973,7 +11273,7 @@
           <a:bodyPr wrap="square" rtlCol="0" anchor="ctr"/>
           <a:lstStyle/>
           <a:p>
-            <a:pPr indent="0" marL="0">
+            <a:pPr marL="0" indent="0">
               <a:buNone/>
             </a:pPr>
             <a:r>
@@ -11012,7 +11312,7 @@
           <a:bodyPr wrap="square" rtlCol="0" anchor="ctr"/>
           <a:lstStyle/>
           <a:p>
-            <a:pPr indent="0" marL="0">
+            <a:pPr marL="0" indent="0">
               <a:buNone/>
             </a:pPr>
             <a:r>
@@ -11056,6 +11356,13 @@
             <a:prstDash val="solid"/>
           </a:ln>
         </p:spPr>
+        <p:txBody>
+          <a:bodyPr/>
+          <a:lstStyle/>
+          <a:p>
+            <a:endParaRPr lang="en-US"/>
+          </a:p>
+        </p:txBody>
       </p:sp>
       <p:sp>
         <p:nvSpPr>
@@ -11078,7 +11385,7 @@
           <a:bodyPr wrap="square" rtlCol="0" anchor="ctr"/>
           <a:lstStyle/>
           <a:p>
-            <a:pPr indent="0" marL="0">
+            <a:pPr marL="0" indent="0">
               <a:buNone/>
             </a:pPr>
             <a:r>
@@ -11117,7 +11424,7 @@
           <a:bodyPr wrap="square" rtlCol="0" anchor="ctr"/>
           <a:lstStyle/>
           <a:p>
-            <a:pPr indent="0" marL="0">
+            <a:pPr marL="0" indent="0">
               <a:buNone/>
             </a:pPr>
             <a:r>
@@ -11161,6 +11468,13 @@
             <a:prstDash val="solid"/>
           </a:ln>
         </p:spPr>
+        <p:txBody>
+          <a:bodyPr/>
+          <a:lstStyle/>
+          <a:p>
+            <a:endParaRPr lang="en-US"/>
+          </a:p>
+        </p:txBody>
       </p:sp>
       <p:sp>
         <p:nvSpPr>
@@ -11183,7 +11497,7 @@
           <a:bodyPr wrap="square" rtlCol="0" anchor="ctr"/>
           <a:lstStyle/>
           <a:p>
-            <a:pPr indent="0" marL="0">
+            <a:pPr marL="0" indent="0">
               <a:buNone/>
             </a:pPr>
             <a:r>
@@ -11222,7 +11536,7 @@
           <a:bodyPr wrap="square" rtlCol="0" anchor="ctr"/>
           <a:lstStyle/>
           <a:p>
-            <a:pPr indent="0" marL="0">
+            <a:pPr marL="0" indent="0">
               <a:buNone/>
             </a:pPr>
             <a:r>
@@ -11261,7 +11575,7 @@
           <a:bodyPr wrap="square" rtlCol="0" anchor="ctr"/>
           <a:lstStyle/>
           <a:p>
-            <a:pPr algn="ctr" indent="0" marL="0">
+            <a:pPr marL="0" indent="0" algn="ctr">
               <a:buNone/>
             </a:pPr>
             <a:r>
@@ -11328,6 +11642,13 @@
             <a:prstDash val="solid"/>
           </a:ln>
         </p:spPr>
+        <p:txBody>
+          <a:bodyPr/>
+          <a:lstStyle/>
+          <a:p>
+            <a:endParaRPr lang="en-US"/>
+          </a:p>
+        </p:txBody>
       </p:sp>
       <p:sp>
         <p:nvSpPr>
@@ -11357,6 +11678,13 @@
             <a:prstDash val="solid"/>
           </a:ln>
         </p:spPr>
+        <p:txBody>
+          <a:bodyPr/>
+          <a:lstStyle/>
+          <a:p>
+            <a:endParaRPr lang="en-US"/>
+          </a:p>
+        </p:txBody>
       </p:sp>
       <p:sp>
         <p:nvSpPr>
@@ -11386,6 +11714,13 @@
             <a:prstDash val="solid"/>
           </a:ln>
         </p:spPr>
+        <p:txBody>
+          <a:bodyPr/>
+          <a:lstStyle/>
+          <a:p>
+            <a:endParaRPr lang="en-US"/>
+          </a:p>
+        </p:txBody>
       </p:sp>
       <p:sp>
         <p:nvSpPr>
@@ -11409,6 +11744,13 @@
             <a:prstDash val="solid"/>
           </a:ln>
         </p:spPr>
+        <p:txBody>
+          <a:bodyPr/>
+          <a:lstStyle/>
+          <a:p>
+            <a:endParaRPr lang="en-US"/>
+          </a:p>
+        </p:txBody>
       </p:sp>
       <p:sp>
         <p:nvSpPr>
@@ -11434,6 +11776,13 @@
             <a:prstDash val="solid"/>
           </a:ln>
         </p:spPr>
+        <p:txBody>
+          <a:bodyPr/>
+          <a:lstStyle/>
+          <a:p>
+            <a:endParaRPr lang="en-US"/>
+          </a:p>
+        </p:txBody>
       </p:sp>
       <p:sp>
         <p:nvSpPr>
@@ -11459,6 +11808,13 @@
             <a:prstDash val="solid"/>
           </a:ln>
         </p:spPr>
+        <p:txBody>
+          <a:bodyPr/>
+          <a:lstStyle/>
+          <a:p>
+            <a:endParaRPr lang="en-US"/>
+          </a:p>
+        </p:txBody>
       </p:sp>
       <p:sp>
         <p:nvSpPr>
@@ -11481,7 +11837,7 @@
           <a:bodyPr wrap="square" rtlCol="0" anchor="ctr"/>
           <a:lstStyle/>
           <a:p>
-            <a:pPr indent="0" marL="0">
+            <a:pPr marL="0" indent="0">
               <a:buNone/>
             </a:pPr>
             <a:r>
@@ -11520,7 +11876,7 @@
           <a:bodyPr wrap="square" rtlCol="0" anchor="ctr"/>
           <a:lstStyle/>
           <a:p>
-            <a:pPr indent="0" marL="0">
+            <a:pPr marL="0" indent="0">
               <a:buNone/>
             </a:pPr>
             <a:r>
@@ -11560,6 +11916,13 @@
             <a:prstDash val="solid"/>
           </a:ln>
         </p:spPr>
+        <p:txBody>
+          <a:bodyPr/>
+          <a:lstStyle/>
+          <a:p>
+            <a:endParaRPr lang="en-US"/>
+          </a:p>
+        </p:txBody>
       </p:sp>
       <p:sp>
         <p:nvSpPr>
@@ -11587,6 +11950,13 @@
             <a:prstDash val="solid"/>
           </a:ln>
         </p:spPr>
+        <p:txBody>
+          <a:bodyPr/>
+          <a:lstStyle/>
+          <a:p>
+            <a:endParaRPr lang="en-US"/>
+          </a:p>
+        </p:txBody>
       </p:sp>
       <p:sp>
         <p:nvSpPr>
@@ -11609,7 +11979,7 @@
           <a:bodyPr wrap="square" rtlCol="0" anchor="ctr"/>
           <a:lstStyle/>
           <a:p>
-            <a:pPr algn="ctr" indent="0" marL="0">
+            <a:pPr marL="0" indent="0" algn="ctr">
               <a:buNone/>
             </a:pPr>
             <a:r>
@@ -11645,7 +12015,7 @@
           <a:bodyPr wrap="square" rtlCol="0" anchor="ctr"/>
           <a:lstStyle/>
           <a:p>
-            <a:pPr algn="ctr" indent="0" marL="0">
+            <a:pPr marL="0" indent="0" algn="ctr">
               <a:buNone/>
             </a:pPr>
             <a:r>
@@ -11684,7 +12054,7 @@
           <a:bodyPr wrap="square" rtlCol="0" anchor="ctr"/>
           <a:lstStyle/>
           <a:p>
-            <a:pPr algn="ctr" indent="0" marL="0">
+            <a:pPr marL="0" indent="0" algn="ctr">
               <a:buNone/>
             </a:pPr>
             <a:r>
@@ -11723,7 +12093,7 @@
           <a:bodyPr wrap="square" rtlCol="0" anchor="ctr"/>
           <a:lstStyle/>
           <a:p>
-            <a:pPr algn="ctr" indent="0" marL="0">
+            <a:pPr marL="0" indent="0" algn="ctr">
               <a:buNone/>
             </a:pPr>
             <a:r>
@@ -11767,6 +12137,13 @@
             <a:prstDash val="solid"/>
           </a:ln>
         </p:spPr>
+        <p:txBody>
+          <a:bodyPr/>
+          <a:lstStyle/>
+          <a:p>
+            <a:endParaRPr lang="en-US"/>
+          </a:p>
+        </p:txBody>
       </p:sp>
       <p:sp>
         <p:nvSpPr>
@@ -11789,7 +12166,7 @@
           <a:bodyPr wrap="square" rtlCol="0" anchor="ctr"/>
           <a:lstStyle/>
           <a:p>
-            <a:pPr algn="ctr" indent="0" marL="0">
+            <a:pPr marL="0" indent="0" algn="ctr">
               <a:buNone/>
             </a:pPr>
             <a:r>
@@ -11825,7 +12202,7 @@
           <a:bodyPr wrap="square" rtlCol="0" anchor="ctr"/>
           <a:lstStyle/>
           <a:p>
-            <a:pPr algn="ctr" indent="0" marL="0">
+            <a:pPr marL="0" indent="0" algn="ctr">
               <a:buNone/>
             </a:pPr>
             <a:r>
@@ -11864,7 +12241,7 @@
           <a:bodyPr wrap="square" rtlCol="0" anchor="ctr"/>
           <a:lstStyle/>
           <a:p>
-            <a:pPr algn="ctr" indent="0" marL="0">
+            <a:pPr marL="0" indent="0" algn="ctr">
               <a:buNone/>
             </a:pPr>
             <a:r>
@@ -11903,7 +12280,7 @@
           <a:bodyPr wrap="square" rtlCol="0" anchor="ctr"/>
           <a:lstStyle/>
           <a:p>
-            <a:pPr algn="ctr" indent="0" marL="0">
+            <a:pPr marL="0" indent="0" algn="ctr">
               <a:buNone/>
             </a:pPr>
             <a:r>
@@ -11947,6 +12324,13 @@
             <a:prstDash val="solid"/>
           </a:ln>
         </p:spPr>
+        <p:txBody>
+          <a:bodyPr/>
+          <a:lstStyle/>
+          <a:p>
+            <a:endParaRPr lang="en-US"/>
+          </a:p>
+        </p:txBody>
       </p:sp>
       <p:sp>
         <p:nvSpPr>
@@ -11969,7 +12353,7 @@
           <a:bodyPr wrap="square" rtlCol="0" anchor="ctr"/>
           <a:lstStyle/>
           <a:p>
-            <a:pPr algn="ctr" indent="0" marL="0">
+            <a:pPr marL="0" indent="0" algn="ctr">
               <a:buNone/>
             </a:pPr>
             <a:r>
@@ -12005,7 +12389,7 @@
           <a:bodyPr wrap="square" rtlCol="0" anchor="ctr"/>
           <a:lstStyle/>
           <a:p>
-            <a:pPr algn="ctr" indent="0" marL="0">
+            <a:pPr marL="0" indent="0" algn="ctr">
               <a:buNone/>
             </a:pPr>
             <a:r>
@@ -12044,7 +12428,7 @@
           <a:bodyPr wrap="square" rtlCol="0" anchor="ctr"/>
           <a:lstStyle/>
           <a:p>
-            <a:pPr algn="ctr" indent="0" marL="0">
+            <a:pPr marL="0" indent="0" algn="ctr">
               <a:buNone/>
             </a:pPr>
             <a:r>
@@ -12083,7 +12467,7 @@
           <a:bodyPr wrap="square" rtlCol="0" anchor="ctr"/>
           <a:lstStyle/>
           <a:p>
-            <a:pPr algn="ctr" indent="0" marL="0">
+            <a:pPr marL="0" indent="0" algn="ctr">
               <a:buNone/>
             </a:pPr>
             <a:r>
@@ -12127,6 +12511,13 @@
             <a:prstDash val="solid"/>
           </a:ln>
         </p:spPr>
+        <p:txBody>
+          <a:bodyPr/>
+          <a:lstStyle/>
+          <a:p>
+            <a:endParaRPr lang="en-US"/>
+          </a:p>
+        </p:txBody>
       </p:sp>
       <p:sp>
         <p:nvSpPr>
@@ -12149,7 +12540,7 @@
           <a:bodyPr wrap="square" rtlCol="0" anchor="ctr"/>
           <a:lstStyle/>
           <a:p>
-            <a:pPr algn="ctr" indent="0" marL="0">
+            <a:pPr marL="0" indent="0" algn="ctr">
               <a:buNone/>
             </a:pPr>
             <a:r>
@@ -12185,7 +12576,7 @@
           <a:bodyPr wrap="square" rtlCol="0" anchor="ctr"/>
           <a:lstStyle/>
           <a:p>
-            <a:pPr algn="ctr" indent="0" marL="0">
+            <a:pPr marL="0" indent="0" algn="ctr">
               <a:buNone/>
             </a:pPr>
             <a:r>
@@ -12224,7 +12615,7 @@
           <a:bodyPr wrap="square" rtlCol="0" anchor="ctr"/>
           <a:lstStyle/>
           <a:p>
-            <a:pPr algn="ctr" indent="0" marL="0">
+            <a:pPr marL="0" indent="0" algn="ctr">
               <a:buNone/>
             </a:pPr>
             <a:r>
@@ -12263,7 +12654,7 @@
           <a:bodyPr wrap="square" rtlCol="0" anchor="ctr"/>
           <a:lstStyle/>
           <a:p>
-            <a:pPr algn="ctr" indent="0" marL="0">
+            <a:pPr marL="0" indent="0" algn="ctr">
               <a:buNone/>
             </a:pPr>
             <a:r>
@@ -12307,6 +12698,13 @@
             <a:prstDash val="solid"/>
           </a:ln>
         </p:spPr>
+        <p:txBody>
+          <a:bodyPr/>
+          <a:lstStyle/>
+          <a:p>
+            <a:endParaRPr lang="en-US"/>
+          </a:p>
+        </p:txBody>
       </p:sp>
       <p:sp>
         <p:nvSpPr>
@@ -12329,7 +12727,7 @@
           <a:bodyPr wrap="square" rtlCol="0" anchor="ctr"/>
           <a:lstStyle/>
           <a:p>
-            <a:pPr algn="ctr" indent="0" marL="0">
+            <a:pPr marL="0" indent="0" algn="ctr">
               <a:buNone/>
             </a:pPr>
             <a:r>
@@ -12365,7 +12763,7 @@
           <a:bodyPr wrap="square" rtlCol="0" anchor="ctr"/>
           <a:lstStyle/>
           <a:p>
-            <a:pPr algn="ctr" indent="0" marL="0">
+            <a:pPr marL="0" indent="0" algn="ctr">
               <a:buNone/>
             </a:pPr>
             <a:r>
@@ -12404,7 +12802,7 @@
           <a:bodyPr wrap="square" rtlCol="0" anchor="ctr"/>
           <a:lstStyle/>
           <a:p>
-            <a:pPr algn="ctr" indent="0" marL="0">
+            <a:pPr marL="0" indent="0" algn="ctr">
               <a:buNone/>
             </a:pPr>
             <a:r>
@@ -12443,7 +12841,7 @@
           <a:bodyPr wrap="square" rtlCol="0" anchor="ctr"/>
           <a:lstStyle/>
           <a:p>
-            <a:pPr algn="ctr" indent="0" marL="0">
+            <a:pPr marL="0" indent="0" algn="ctr">
               <a:buNone/>
             </a:pPr>
             <a:r>
@@ -12487,6 +12885,13 @@
             <a:prstDash val="solid"/>
           </a:ln>
         </p:spPr>
+        <p:txBody>
+          <a:bodyPr/>
+          <a:lstStyle/>
+          <a:p>
+            <a:endParaRPr lang="en-US"/>
+          </a:p>
+        </p:txBody>
       </p:sp>
       <p:sp>
         <p:nvSpPr>
@@ -12509,7 +12914,7 @@
           <a:bodyPr wrap="square" rtlCol="0" anchor="ctr"/>
           <a:lstStyle/>
           <a:p>
-            <a:pPr algn="ctr" indent="0" marL="0">
+            <a:pPr marL="0" indent="0" algn="ctr">
               <a:buNone/>
             </a:pPr>
             <a:r>
@@ -12545,7 +12950,7 @@
           <a:bodyPr wrap="square" rtlCol="0" anchor="ctr"/>
           <a:lstStyle/>
           <a:p>
-            <a:pPr algn="ctr" indent="0" marL="0">
+            <a:pPr marL="0" indent="0" algn="ctr">
               <a:buNone/>
             </a:pPr>
             <a:r>
@@ -12584,7 +12989,7 @@
           <a:bodyPr wrap="square" rtlCol="0" anchor="ctr"/>
           <a:lstStyle/>
           <a:p>
-            <a:pPr algn="ctr" indent="0" marL="0">
+            <a:pPr marL="0" indent="0" algn="ctr">
               <a:buNone/>
             </a:pPr>
             <a:r>
@@ -12623,7 +13028,7 @@
           <a:bodyPr wrap="square" rtlCol="0" anchor="ctr"/>
           <a:lstStyle/>
           <a:p>
-            <a:pPr algn="ctr" indent="0" marL="0">
+            <a:pPr marL="0" indent="0" algn="ctr">
               <a:buNone/>
             </a:pPr>
             <a:r>
@@ -12663,6 +13068,13 @@
             <a:prstDash val="solid"/>
           </a:ln>
         </p:spPr>
+        <p:txBody>
+          <a:bodyPr/>
+          <a:lstStyle/>
+          <a:p>
+            <a:endParaRPr lang="en-US"/>
+          </a:p>
+        </p:txBody>
       </p:sp>
       <p:sp>
         <p:nvSpPr>
@@ -12685,7 +13097,7 @@
           <a:bodyPr wrap="square" rtlCol="0" anchor="ctr"/>
           <a:lstStyle/>
           <a:p>
-            <a:pPr indent="0" marL="0">
+            <a:pPr marL="0" indent="0">
               <a:buNone/>
             </a:pPr>
             <a:r>
@@ -12724,7 +13136,7 @@
           <a:bodyPr wrap="square" rtlCol="0" anchor="ctr"/>
           <a:lstStyle/>
           <a:p>
-            <a:pPr algn="l" indent="0" marL="0">
+            <a:pPr marL="0" indent="0" algn="l">
               <a:buNone/>
             </a:pPr>
             <a:r>
@@ -12791,6 +13203,13 @@
             <a:prstDash val="solid"/>
           </a:ln>
         </p:spPr>
+        <p:txBody>
+          <a:bodyPr/>
+          <a:lstStyle/>
+          <a:p>
+            <a:endParaRPr lang="en-US"/>
+          </a:p>
+        </p:txBody>
       </p:sp>
       <p:sp>
         <p:nvSpPr>
@@ -12820,6 +13239,13 @@
             <a:prstDash val="solid"/>
           </a:ln>
         </p:spPr>
+        <p:txBody>
+          <a:bodyPr/>
+          <a:lstStyle/>
+          <a:p>
+            <a:endParaRPr lang="en-US"/>
+          </a:p>
+        </p:txBody>
       </p:sp>
       <p:sp>
         <p:nvSpPr>
@@ -12849,6 +13275,13 @@
             <a:prstDash val="solid"/>
           </a:ln>
         </p:spPr>
+        <p:txBody>
+          <a:bodyPr/>
+          <a:lstStyle/>
+          <a:p>
+            <a:endParaRPr lang="en-US"/>
+          </a:p>
+        </p:txBody>
       </p:sp>
       <p:sp>
         <p:nvSpPr>
@@ -12878,6 +13311,13 @@
             <a:prstDash val="solid"/>
           </a:ln>
         </p:spPr>
+        <p:txBody>
+          <a:bodyPr/>
+          <a:lstStyle/>
+          <a:p>
+            <a:endParaRPr lang="en-US"/>
+          </a:p>
+        </p:txBody>
       </p:sp>
       <p:sp>
         <p:nvSpPr>
@@ -12903,6 +13343,13 @@
             <a:prstDash val="solid"/>
           </a:ln>
         </p:spPr>
+        <p:txBody>
+          <a:bodyPr/>
+          <a:lstStyle/>
+          <a:p>
+            <a:endParaRPr lang="en-US"/>
+          </a:p>
+        </p:txBody>
       </p:sp>
       <p:sp>
         <p:nvSpPr>
@@ -12928,6 +13375,13 @@
             <a:prstDash val="solid"/>
           </a:ln>
         </p:spPr>
+        <p:txBody>
+          <a:bodyPr/>
+          <a:lstStyle/>
+          <a:p>
+            <a:endParaRPr lang="en-US"/>
+          </a:p>
+        </p:txBody>
       </p:sp>
       <p:sp>
         <p:nvSpPr>
@@ -12950,7 +13404,7 @@
           <a:bodyPr wrap="square" rtlCol="0" anchor="ctr"/>
           <a:lstStyle/>
           <a:p>
-            <a:pPr algn="ctr" indent="0" marL="0">
+            <a:pPr marL="0" indent="0" algn="ctr">
               <a:buNone/>
             </a:pPr>
             <a:r>
@@ -12986,7 +13440,7 @@
           <a:bodyPr wrap="square" rtlCol="0" anchor="ctr"/>
           <a:lstStyle/>
           <a:p>
-            <a:pPr algn="ctr" indent="0" marL="0">
+            <a:pPr marL="0" indent="0" algn="ctr">
               <a:buNone/>
             </a:pPr>
             <a:r>
@@ -13026,6 +13480,13 @@
             <a:prstDash val="solid"/>
           </a:ln>
         </p:spPr>
+        <p:txBody>
+          <a:bodyPr/>
+          <a:lstStyle/>
+          <a:p>
+            <a:endParaRPr lang="en-US"/>
+          </a:p>
+        </p:txBody>
       </p:sp>
       <p:sp>
         <p:nvSpPr>
@@ -13048,7 +13509,7 @@
           <a:bodyPr wrap="square" rtlCol="0" anchor="ctr"/>
           <a:lstStyle/>
           <a:p>
-            <a:pPr algn="ctr" indent="0" marL="0">
+            <a:pPr marL="0" indent="0" algn="ctr">
               <a:lnSpc>
                 <a:spcPct val="140000"/>
               </a:lnSpc>
@@ -13068,7 +13529,7 @@
             <a:endParaRPr lang="en-US" sz="2000" dirty="0"/>
           </a:p>
           <a:p>
-            <a:pPr algn="ctr" indent="0" marL="0">
+            <a:pPr marL="0" indent="0" algn="ctr">
               <a:lnSpc>
                 <a:spcPct val="140000"/>
               </a:lnSpc>
@@ -13088,7 +13549,7 @@
             <a:endParaRPr lang="en-US" sz="2000" dirty="0"/>
           </a:p>
           <a:p>
-            <a:pPr algn="ctr" indent="0" marL="0">
+            <a:pPr marL="0" indent="0" algn="ctr">
               <a:lnSpc>
                 <a:spcPct val="140000"/>
               </a:lnSpc>
@@ -13135,6 +13596,13 @@
             <a:prstDash val="solid"/>
           </a:ln>
         </p:spPr>
+        <p:txBody>
+          <a:bodyPr/>
+          <a:lstStyle/>
+          <a:p>
+            <a:endParaRPr lang="en-US"/>
+          </a:p>
+        </p:txBody>
       </p:sp>
       <p:sp>
         <p:nvSpPr>
@@ -13157,7 +13625,7 @@
           <a:bodyPr wrap="square" rtlCol="0" anchor="ctr"/>
           <a:lstStyle/>
           <a:p>
-            <a:pPr algn="ctr" indent="0" marL="0">
+            <a:pPr marL="0" indent="0" algn="ctr">
               <a:buNone/>
             </a:pPr>
             <a:r>
@@ -13201,6 +13669,13 @@
             <a:prstDash val="solid"/>
           </a:ln>
         </p:spPr>
+        <p:txBody>
+          <a:bodyPr/>
+          <a:lstStyle/>
+          <a:p>
+            <a:endParaRPr lang="en-US"/>
+          </a:p>
+        </p:txBody>
       </p:sp>
       <p:sp>
         <p:nvSpPr>
@@ -13223,7 +13698,7 @@
           <a:bodyPr wrap="square" rtlCol="0" anchor="ctr"/>
           <a:lstStyle/>
           <a:p>
-            <a:pPr algn="ctr" indent="0" marL="0">
+            <a:pPr marL="0" indent="0" algn="ctr">
               <a:buNone/>
             </a:pPr>
             <a:r>
@@ -13267,6 +13742,13 @@
             <a:prstDash val="solid"/>
           </a:ln>
         </p:spPr>
+        <p:txBody>
+          <a:bodyPr/>
+          <a:lstStyle/>
+          <a:p>
+            <a:endParaRPr lang="en-US"/>
+          </a:p>
+        </p:txBody>
       </p:sp>
       <p:sp>
         <p:nvSpPr>
@@ -13289,7 +13771,7 @@
           <a:bodyPr wrap="square" rtlCol="0" anchor="ctr"/>
           <a:lstStyle/>
           <a:p>
-            <a:pPr algn="ctr" indent="0" marL="0">
+            <a:pPr marL="0" indent="0" algn="ctr">
               <a:buNone/>
             </a:pPr>
             <a:r>
@@ -13328,7 +13810,7 @@
           <a:bodyPr wrap="square" rtlCol="0" anchor="ctr"/>
           <a:lstStyle/>
           <a:p>
-            <a:pPr algn="ctr" indent="0" marL="0">
+            <a:pPr marL="0" indent="0" algn="ctr">
               <a:buNone/>
             </a:pPr>
             <a:r>
@@ -13395,6 +13877,13 @@
             <a:prstDash val="solid"/>
           </a:ln>
         </p:spPr>
+        <p:txBody>
+          <a:bodyPr/>
+          <a:lstStyle/>
+          <a:p>
+            <a:endParaRPr lang="en-US"/>
+          </a:p>
+        </p:txBody>
       </p:sp>
       <p:sp>
         <p:nvSpPr>
@@ -13424,6 +13913,13 @@
             <a:prstDash val="solid"/>
           </a:ln>
         </p:spPr>
+        <p:txBody>
+          <a:bodyPr/>
+          <a:lstStyle/>
+          <a:p>
+            <a:endParaRPr lang="en-US"/>
+          </a:p>
+        </p:txBody>
       </p:sp>
       <p:sp>
         <p:nvSpPr>
@@ -13453,6 +13949,13 @@
             <a:prstDash val="solid"/>
           </a:ln>
         </p:spPr>
+        <p:txBody>
+          <a:bodyPr/>
+          <a:lstStyle/>
+          <a:p>
+            <a:endParaRPr lang="en-US"/>
+          </a:p>
+        </p:txBody>
       </p:sp>
       <p:sp>
         <p:nvSpPr>
@@ -13476,6 +13979,13 @@
             <a:prstDash val="solid"/>
           </a:ln>
         </p:spPr>
+        <p:txBody>
+          <a:bodyPr/>
+          <a:lstStyle/>
+          <a:p>
+            <a:endParaRPr lang="en-US"/>
+          </a:p>
+        </p:txBody>
       </p:sp>
       <p:sp>
         <p:nvSpPr>
@@ -13501,6 +14011,13 @@
             <a:prstDash val="solid"/>
           </a:ln>
         </p:spPr>
+        <p:txBody>
+          <a:bodyPr/>
+          <a:lstStyle/>
+          <a:p>
+            <a:endParaRPr lang="en-US"/>
+          </a:p>
+        </p:txBody>
       </p:sp>
       <p:sp>
         <p:nvSpPr>
@@ -13526,6 +14043,13 @@
             <a:prstDash val="solid"/>
           </a:ln>
         </p:spPr>
+        <p:txBody>
+          <a:bodyPr/>
+          <a:lstStyle/>
+          <a:p>
+            <a:endParaRPr lang="en-US"/>
+          </a:p>
+        </p:txBody>
       </p:sp>
       <p:sp>
         <p:nvSpPr>
@@ -13548,7 +14072,7 @@
           <a:bodyPr wrap="square" rtlCol="0" anchor="ctr"/>
           <a:lstStyle/>
           <a:p>
-            <a:pPr indent="0" marL="0">
+            <a:pPr marL="0" indent="0">
               <a:buNone/>
             </a:pPr>
             <a:r>
@@ -13587,7 +14111,7 @@
           <a:bodyPr wrap="square" rtlCol="0" anchor="ctr"/>
           <a:lstStyle/>
           <a:p>
-            <a:pPr indent="0" marL="0">
+            <a:pPr marL="0" indent="0">
               <a:buNone/>
             </a:pPr>
             <a:r>
@@ -13627,6 +14151,13 @@
             <a:prstDash val="solid"/>
           </a:ln>
         </p:spPr>
+        <p:txBody>
+          <a:bodyPr/>
+          <a:lstStyle/>
+          <a:p>
+            <a:endParaRPr lang="en-US"/>
+          </a:p>
+        </p:txBody>
       </p:sp>
       <p:sp>
         <p:nvSpPr>
@@ -13654,6 +14185,13 @@
             <a:prstDash val="solid"/>
           </a:ln>
         </p:spPr>
+        <p:txBody>
+          <a:bodyPr/>
+          <a:lstStyle/>
+          <a:p>
+            <a:endParaRPr lang="en-US"/>
+          </a:p>
+        </p:txBody>
       </p:sp>
       <p:sp>
         <p:nvSpPr>
@@ -13676,7 +14214,7 @@
           <a:bodyPr wrap="square" rtlCol="0" anchor="ctr"/>
           <a:lstStyle/>
           <a:p>
-            <a:pPr algn="ctr" indent="0" marL="0">
+            <a:pPr marL="0" indent="0" algn="ctr">
               <a:buNone/>
             </a:pPr>
             <a:r>
@@ -13712,7 +14250,7 @@
           <a:bodyPr wrap="square" rtlCol="0" anchor="ctr"/>
           <a:lstStyle/>
           <a:p>
-            <a:pPr algn="ctr" indent="0" marL="0">
+            <a:pPr marL="0" indent="0" algn="ctr">
               <a:buNone/>
             </a:pPr>
             <a:r>
@@ -13729,7 +14267,7 @@
             <a:endParaRPr lang="en-US" sz="1200" dirty="0"/>
           </a:p>
           <a:p>
-            <a:pPr algn="ctr" indent="0" marL="0">
+            <a:pPr marL="0" indent="0" algn="ctr">
               <a:buNone/>
             </a:pPr>
             <a:r>
@@ -13768,7 +14306,7 @@
           <a:bodyPr wrap="square" rtlCol="0" anchor="ctr"/>
           <a:lstStyle/>
           <a:p>
-            <a:pPr algn="ctr" indent="0" marL="0">
+            <a:pPr marL="0" indent="0" algn="ctr">
               <a:buNone/>
             </a:pPr>
             <a:r>
@@ -13812,6 +14350,13 @@
             <a:prstDash val="solid"/>
           </a:ln>
         </p:spPr>
+        <p:txBody>
+          <a:bodyPr/>
+          <a:lstStyle/>
+          <a:p>
+            <a:endParaRPr lang="en-US"/>
+          </a:p>
+        </p:txBody>
       </p:sp>
       <p:sp>
         <p:nvSpPr>
@@ -13834,7 +14379,7 @@
           <a:bodyPr wrap="square" rtlCol="0" anchor="ctr"/>
           <a:lstStyle/>
           <a:p>
-            <a:pPr algn="ctr" indent="0" marL="0">
+            <a:pPr marL="0" indent="0" algn="ctr">
               <a:buNone/>
             </a:pPr>
             <a:r>
@@ -13870,7 +14415,7 @@
           <a:bodyPr wrap="square" rtlCol="0" anchor="ctr"/>
           <a:lstStyle/>
           <a:p>
-            <a:pPr algn="ctr" indent="0" marL="0">
+            <a:pPr marL="0" indent="0" algn="ctr">
               <a:buNone/>
             </a:pPr>
             <a:r>
@@ -13887,7 +14432,7 @@
             <a:endParaRPr lang="en-US" sz="1200" dirty="0"/>
           </a:p>
           <a:p>
-            <a:pPr algn="ctr" indent="0" marL="0">
+            <a:pPr marL="0" indent="0" algn="ctr">
               <a:buNone/>
             </a:pPr>
             <a:r>
@@ -13926,7 +14471,7 @@
           <a:bodyPr wrap="square" rtlCol="0" anchor="ctr"/>
           <a:lstStyle/>
           <a:p>
-            <a:pPr algn="ctr" indent="0" marL="0">
+            <a:pPr marL="0" indent="0" algn="ctr">
               <a:buNone/>
             </a:pPr>
             <a:r>
@@ -13970,6 +14515,13 @@
             <a:prstDash val="solid"/>
           </a:ln>
         </p:spPr>
+        <p:txBody>
+          <a:bodyPr/>
+          <a:lstStyle/>
+          <a:p>
+            <a:endParaRPr lang="en-US"/>
+          </a:p>
+        </p:txBody>
       </p:sp>
       <p:sp>
         <p:nvSpPr>
@@ -13992,7 +14544,7 @@
           <a:bodyPr wrap="square" rtlCol="0" anchor="ctr"/>
           <a:lstStyle/>
           <a:p>
-            <a:pPr algn="ctr" indent="0" marL="0">
+            <a:pPr marL="0" indent="0" algn="ctr">
               <a:buNone/>
             </a:pPr>
             <a:r>
@@ -14028,7 +14580,7 @@
           <a:bodyPr wrap="square" rtlCol="0" anchor="ctr"/>
           <a:lstStyle/>
           <a:p>
-            <a:pPr algn="ctr" indent="0" marL="0">
+            <a:pPr marL="0" indent="0" algn="ctr">
               <a:buNone/>
             </a:pPr>
             <a:r>
@@ -14045,7 +14597,7 @@
             <a:endParaRPr lang="en-US" sz="1200" dirty="0"/>
           </a:p>
           <a:p>
-            <a:pPr algn="ctr" indent="0" marL="0">
+            <a:pPr marL="0" indent="0" algn="ctr">
               <a:buNone/>
             </a:pPr>
             <a:r>
@@ -14084,7 +14636,7 @@
           <a:bodyPr wrap="square" rtlCol="0" anchor="ctr"/>
           <a:lstStyle/>
           <a:p>
-            <a:pPr algn="ctr" indent="0" marL="0">
+            <a:pPr marL="0" indent="0" algn="ctr">
               <a:buNone/>
             </a:pPr>
             <a:r>
@@ -14128,6 +14680,13 @@
             <a:prstDash val="solid"/>
           </a:ln>
         </p:spPr>
+        <p:txBody>
+          <a:bodyPr/>
+          <a:lstStyle/>
+          <a:p>
+            <a:endParaRPr lang="en-US"/>
+          </a:p>
+        </p:txBody>
       </p:sp>
       <p:sp>
         <p:nvSpPr>
@@ -14150,7 +14709,7 @@
           <a:bodyPr wrap="square" rtlCol="0" anchor="ctr"/>
           <a:lstStyle/>
           <a:p>
-            <a:pPr algn="ctr" indent="0" marL="0">
+            <a:pPr marL="0" indent="0" algn="ctr">
               <a:buNone/>
             </a:pPr>
             <a:r>
@@ -14186,7 +14745,7 @@
           <a:bodyPr wrap="square" rtlCol="0" anchor="ctr"/>
           <a:lstStyle/>
           <a:p>
-            <a:pPr algn="ctr" indent="0" marL="0">
+            <a:pPr marL="0" indent="0" algn="ctr">
               <a:buNone/>
             </a:pPr>
             <a:r>
@@ -14203,7 +14762,7 @@
             <a:endParaRPr lang="en-US" sz="1200" dirty="0"/>
           </a:p>
           <a:p>
-            <a:pPr algn="ctr" indent="0" marL="0">
+            <a:pPr marL="0" indent="0" algn="ctr">
               <a:buNone/>
             </a:pPr>
             <a:r>
@@ -14247,6 +14806,13 @@
             <a:prstDash val="solid"/>
           </a:ln>
         </p:spPr>
+        <p:txBody>
+          <a:bodyPr/>
+          <a:lstStyle/>
+          <a:p>
+            <a:endParaRPr lang="en-US"/>
+          </a:p>
+        </p:txBody>
       </p:sp>
       <p:sp>
         <p:nvSpPr>
@@ -14269,7 +14835,7 @@
           <a:bodyPr wrap="square" rtlCol="0" anchor="ctr"/>
           <a:lstStyle/>
           <a:p>
-            <a:pPr algn="ctr" indent="0" marL="0">
+            <a:pPr marL="0" indent="0" algn="ctr">
               <a:buNone/>
             </a:pPr>
             <a:r>
@@ -14305,7 +14871,7 @@
           <a:bodyPr wrap="square" rtlCol="0" anchor="ctr"/>
           <a:lstStyle/>
           <a:p>
-            <a:pPr indent="0" marL="0">
+            <a:pPr marL="0" indent="0">
               <a:buNone/>
             </a:pPr>
             <a:r>
@@ -14322,7 +14888,7 @@
             <a:endParaRPr lang="en-US" sz="1300" dirty="0"/>
           </a:p>
           <a:p>
-            <a:pPr indent="0" marL="0">
+            <a:pPr marL="0" indent="0">
               <a:buNone/>
             </a:pPr>
             <a:r>
@@ -14361,7 +14927,7 @@
           <a:bodyPr wrap="square" rtlCol="0" anchor="ctr"/>
           <a:lstStyle/>
           <a:p>
-            <a:pPr algn="ctr" indent="0" marL="0">
+            <a:pPr marL="0" indent="0" algn="ctr">
               <a:buNone/>
             </a:pPr>
             <a:r>
@@ -14428,6 +14994,13 @@
             <a:prstDash val="solid"/>
           </a:ln>
         </p:spPr>
+        <p:txBody>
+          <a:bodyPr/>
+          <a:lstStyle/>
+          <a:p>
+            <a:endParaRPr lang="en-US"/>
+          </a:p>
+        </p:txBody>
       </p:sp>
       <p:sp>
         <p:nvSpPr>
@@ -14457,6 +15030,13 @@
             <a:prstDash val="solid"/>
           </a:ln>
         </p:spPr>
+        <p:txBody>
+          <a:bodyPr/>
+          <a:lstStyle/>
+          <a:p>
+            <a:endParaRPr lang="en-US"/>
+          </a:p>
+        </p:txBody>
       </p:sp>
       <p:sp>
         <p:nvSpPr>
@@ -14486,6 +15066,13 @@
             <a:prstDash val="solid"/>
           </a:ln>
         </p:spPr>
+        <p:txBody>
+          <a:bodyPr/>
+          <a:lstStyle/>
+          <a:p>
+            <a:endParaRPr lang="en-US"/>
+          </a:p>
+        </p:txBody>
       </p:sp>
       <p:sp>
         <p:nvSpPr>
@@ -14511,6 +15098,13 @@
             <a:prstDash val="solid"/>
           </a:ln>
         </p:spPr>
+        <p:txBody>
+          <a:bodyPr/>
+          <a:lstStyle/>
+          <a:p>
+            <a:endParaRPr lang="en-US"/>
+          </a:p>
+        </p:txBody>
       </p:sp>
       <p:sp>
         <p:nvSpPr>
@@ -14536,6 +15130,13 @@
             <a:prstDash val="solid"/>
           </a:ln>
         </p:spPr>
+        <p:txBody>
+          <a:bodyPr/>
+          <a:lstStyle/>
+          <a:p>
+            <a:endParaRPr lang="en-US"/>
+          </a:p>
+        </p:txBody>
       </p:sp>
       <p:sp>
         <p:nvSpPr>
@@ -14558,7 +15159,7 @@
           <a:bodyPr wrap="square" rtlCol="0" anchor="ctr"/>
           <a:lstStyle/>
           <a:p>
-            <a:pPr indent="0" marL="0">
+            <a:pPr marL="0" indent="0">
               <a:buNone/>
             </a:pPr>
             <a:r>
@@ -14597,7 +15198,7 @@
           <a:bodyPr wrap="square" rtlCol="0" anchor="ctr"/>
           <a:lstStyle/>
           <a:p>
-            <a:pPr indent="0" marL="0">
+            <a:pPr marL="0" indent="0">
               <a:buNone/>
             </a:pPr>
             <a:r>
@@ -14637,6 +15238,13 @@
             <a:prstDash val="solid"/>
           </a:ln>
         </p:spPr>
+        <p:txBody>
+          <a:bodyPr/>
+          <a:lstStyle/>
+          <a:p>
+            <a:endParaRPr lang="en-US"/>
+          </a:p>
+        </p:txBody>
       </p:sp>
       <p:sp>
         <p:nvSpPr>
@@ -14664,6 +15272,13 @@
             <a:prstDash val="solid"/>
           </a:ln>
         </p:spPr>
+        <p:txBody>
+          <a:bodyPr/>
+          <a:lstStyle/>
+          <a:p>
+            <a:endParaRPr lang="en-US"/>
+          </a:p>
+        </p:txBody>
       </p:sp>
       <p:sp>
         <p:nvSpPr>
@@ -14686,7 +15301,7 @@
           <a:bodyPr wrap="square" rtlCol="0" anchor="ctr"/>
           <a:lstStyle/>
           <a:p>
-            <a:pPr algn="ctr" indent="0" marL="0">
+            <a:pPr marL="0" indent="0" algn="ctr">
               <a:buNone/>
             </a:pPr>
             <a:r>
@@ -14722,7 +15337,7 @@
           <a:bodyPr wrap="square" rtlCol="0" anchor="ctr"/>
           <a:lstStyle/>
           <a:p>
-            <a:pPr indent="0" marL="0">
+            <a:pPr marL="0" indent="0">
               <a:buNone/>
             </a:pPr>
             <a:r>
@@ -14761,7 +15376,7 @@
           <a:bodyPr wrap="square" rtlCol="0" anchor="ctr"/>
           <a:lstStyle/>
           <a:p>
-            <a:pPr indent="0" marL="0">
+            <a:pPr marL="0" indent="0">
               <a:buNone/>
             </a:pPr>
             <a:r>
@@ -14805,6 +15420,13 @@
             <a:prstDash val="solid"/>
           </a:ln>
         </p:spPr>
+        <p:txBody>
+          <a:bodyPr/>
+          <a:lstStyle/>
+          <a:p>
+            <a:endParaRPr lang="en-US"/>
+          </a:p>
+        </p:txBody>
       </p:sp>
       <p:sp>
         <p:nvSpPr>
@@ -14827,7 +15449,7 @@
           <a:bodyPr wrap="square" rtlCol="0" anchor="ctr"/>
           <a:lstStyle/>
           <a:p>
-            <a:pPr algn="ctr" indent="0" marL="0">
+            <a:pPr marL="0" indent="0" algn="ctr">
               <a:buNone/>
             </a:pPr>
             <a:r>
@@ -14863,7 +15485,7 @@
           <a:bodyPr wrap="square" rtlCol="0" anchor="ctr"/>
           <a:lstStyle/>
           <a:p>
-            <a:pPr indent="0" marL="0">
+            <a:pPr marL="0" indent="0">
               <a:buNone/>
             </a:pPr>
             <a:r>
@@ -14902,7 +15524,7 @@
           <a:bodyPr wrap="square" rtlCol="0" anchor="ctr"/>
           <a:lstStyle/>
           <a:p>
-            <a:pPr indent="0" marL="0">
+            <a:pPr marL="0" indent="0">
               <a:buNone/>
             </a:pPr>
             <a:r>
@@ -14946,6 +15568,13 @@
             <a:prstDash val="solid"/>
           </a:ln>
         </p:spPr>
+        <p:txBody>
+          <a:bodyPr/>
+          <a:lstStyle/>
+          <a:p>
+            <a:endParaRPr lang="en-US"/>
+          </a:p>
+        </p:txBody>
       </p:sp>
       <p:sp>
         <p:nvSpPr>
@@ -14968,7 +15597,7 @@
           <a:bodyPr wrap="square" rtlCol="0" anchor="ctr"/>
           <a:lstStyle/>
           <a:p>
-            <a:pPr algn="ctr" indent="0" marL="0">
+            <a:pPr marL="0" indent="0" algn="ctr">
               <a:buNone/>
             </a:pPr>
             <a:r>
@@ -15004,7 +15633,7 @@
           <a:bodyPr wrap="square" rtlCol="0" anchor="ctr"/>
           <a:lstStyle/>
           <a:p>
-            <a:pPr indent="0" marL="0">
+            <a:pPr marL="0" indent="0">
               <a:buNone/>
             </a:pPr>
             <a:r>
@@ -15043,7 +15672,7 @@
           <a:bodyPr wrap="square" rtlCol="0" anchor="ctr"/>
           <a:lstStyle/>
           <a:p>
-            <a:pPr indent="0" marL="0">
+            <a:pPr marL="0" indent="0">
               <a:buNone/>
             </a:pPr>
             <a:r>
@@ -15082,7 +15711,7 @@
           <a:bodyPr wrap="square" rtlCol="0" anchor="ctr"/>
           <a:lstStyle/>
           <a:p>
-            <a:pPr algn="ctr" indent="0" marL="0">
+            <a:pPr marL="0" indent="0" algn="ctr">
               <a:buNone/>
             </a:pPr>
             <a:r>
@@ -15121,7 +15750,7 @@
           <a:bodyPr wrap="square" rtlCol="0" anchor="ctr"/>
           <a:lstStyle/>
           <a:p>
-            <a:pPr algn="ctr" indent="0" marL="0">
+            <a:pPr marL="0" indent="0" algn="ctr">
               <a:buNone/>
             </a:pPr>
             <a:r>
@@ -15188,6 +15817,13 @@
             <a:prstDash val="solid"/>
           </a:ln>
         </p:spPr>
+        <p:txBody>
+          <a:bodyPr/>
+          <a:lstStyle/>
+          <a:p>
+            <a:endParaRPr lang="en-US"/>
+          </a:p>
+        </p:txBody>
       </p:sp>
       <p:sp>
         <p:nvSpPr>
@@ -15217,6 +15853,13 @@
             <a:prstDash val="solid"/>
           </a:ln>
         </p:spPr>
+        <p:txBody>
+          <a:bodyPr/>
+          <a:lstStyle/>
+          <a:p>
+            <a:endParaRPr lang="en-US"/>
+          </a:p>
+        </p:txBody>
       </p:sp>
       <p:sp>
         <p:nvSpPr>
@@ -15246,6 +15889,13 @@
             <a:prstDash val="solid"/>
           </a:ln>
         </p:spPr>
+        <p:txBody>
+          <a:bodyPr/>
+          <a:lstStyle/>
+          <a:p>
+            <a:endParaRPr lang="en-US"/>
+          </a:p>
+        </p:txBody>
       </p:sp>
       <p:sp>
         <p:nvSpPr>
@@ -15275,6 +15925,13 @@
             <a:prstDash val="solid"/>
           </a:ln>
         </p:spPr>
+        <p:txBody>
+          <a:bodyPr/>
+          <a:lstStyle/>
+          <a:p>
+            <a:endParaRPr lang="en-US"/>
+          </a:p>
+        </p:txBody>
       </p:sp>
       <p:sp>
         <p:nvSpPr>
@@ -15300,6 +15957,13 @@
             <a:prstDash val="solid"/>
           </a:ln>
         </p:spPr>
+        <p:txBody>
+          <a:bodyPr/>
+          <a:lstStyle/>
+          <a:p>
+            <a:endParaRPr lang="en-US"/>
+          </a:p>
+        </p:txBody>
       </p:sp>
       <p:sp>
         <p:nvSpPr>
@@ -15325,6 +15989,13 @@
             <a:prstDash val="solid"/>
           </a:ln>
         </p:spPr>
+        <p:txBody>
+          <a:bodyPr/>
+          <a:lstStyle/>
+          <a:p>
+            <a:endParaRPr lang="en-US"/>
+          </a:p>
+        </p:txBody>
       </p:sp>
       <p:sp>
         <p:nvSpPr>
@@ -15347,7 +16018,7 @@
           <a:bodyPr wrap="square" rtlCol="0" anchor="ctr"/>
           <a:lstStyle/>
           <a:p>
-            <a:pPr indent="0" marL="0">
+            <a:pPr marL="0" indent="0">
               <a:buNone/>
             </a:pPr>
             <a:r>
@@ -15386,7 +16057,7 @@
           <a:bodyPr wrap="square" rtlCol="0" anchor="ctr"/>
           <a:lstStyle/>
           <a:p>
-            <a:pPr indent="0" marL="0">
+            <a:pPr marL="0" indent="0">
               <a:buNone/>
             </a:pPr>
             <a:r>
@@ -15426,6 +16097,13 @@
             <a:prstDash val="solid"/>
           </a:ln>
         </p:spPr>
+        <p:txBody>
+          <a:bodyPr/>
+          <a:lstStyle/>
+          <a:p>
+            <a:endParaRPr lang="en-US"/>
+          </a:p>
+        </p:txBody>
       </p:sp>
       <p:sp>
         <p:nvSpPr>
@@ -15453,6 +16131,13 @@
             <a:prstDash val="solid"/>
           </a:ln>
         </p:spPr>
+        <p:txBody>
+          <a:bodyPr/>
+          <a:lstStyle/>
+          <a:p>
+            <a:endParaRPr lang="en-US"/>
+          </a:p>
+        </p:txBody>
       </p:sp>
       <p:sp>
         <p:nvSpPr>
@@ -15475,7 +16160,7 @@
           <a:bodyPr wrap="square" rtlCol="0" anchor="ctr"/>
           <a:lstStyle/>
           <a:p>
-            <a:pPr algn="ctr" indent="0" marL="0">
+            <a:pPr marL="0" indent="0" algn="ctr">
               <a:buNone/>
             </a:pPr>
             <a:r>
@@ -15511,7 +16196,7 @@
           <a:bodyPr wrap="square" rtlCol="0" anchor="ctr"/>
           <a:lstStyle/>
           <a:p>
-            <a:pPr indent="0" marL="0">
+            <a:pPr marL="0" indent="0">
               <a:buNone/>
             </a:pPr>
             <a:r>
@@ -15550,7 +16235,7 @@
           <a:bodyPr wrap="square" rtlCol="0" anchor="ctr"/>
           <a:lstStyle/>
           <a:p>
-            <a:pPr indent="0" marL="0">
+            <a:pPr marL="0" indent="0">
               <a:buNone/>
             </a:pPr>
             <a:r>
@@ -15594,6 +16279,13 @@
             <a:prstDash val="solid"/>
           </a:ln>
         </p:spPr>
+        <p:txBody>
+          <a:bodyPr/>
+          <a:lstStyle/>
+          <a:p>
+            <a:endParaRPr lang="en-US"/>
+          </a:p>
+        </p:txBody>
       </p:sp>
       <p:sp>
         <p:nvSpPr>
@@ -15616,7 +16308,7 @@
           <a:bodyPr wrap="square" rtlCol="0" anchor="ctr"/>
           <a:lstStyle/>
           <a:p>
-            <a:pPr algn="ctr" indent="0" marL="0">
+            <a:pPr marL="0" indent="0" algn="ctr">
               <a:buNone/>
             </a:pPr>
             <a:r>
@@ -15652,7 +16344,7 @@
           <a:bodyPr wrap="square" rtlCol="0" anchor="ctr"/>
           <a:lstStyle/>
           <a:p>
-            <a:pPr indent="0" marL="0">
+            <a:pPr marL="0" indent="0">
               <a:buNone/>
             </a:pPr>
             <a:r>
@@ -15691,7 +16383,7 @@
           <a:bodyPr wrap="square" rtlCol="0" anchor="ctr"/>
           <a:lstStyle/>
           <a:p>
-            <a:pPr indent="0" marL="0">
+            <a:pPr marL="0" indent="0">
               <a:buNone/>
             </a:pPr>
             <a:r>
@@ -15735,6 +16427,13 @@
             <a:prstDash val="solid"/>
           </a:ln>
         </p:spPr>
+        <p:txBody>
+          <a:bodyPr/>
+          <a:lstStyle/>
+          <a:p>
+            <a:endParaRPr lang="en-US"/>
+          </a:p>
+        </p:txBody>
       </p:sp>
       <p:sp>
         <p:nvSpPr>
@@ -15757,7 +16456,7 @@
           <a:bodyPr wrap="square" rtlCol="0" anchor="ctr"/>
           <a:lstStyle/>
           <a:p>
-            <a:pPr algn="ctr" indent="0" marL="0">
+            <a:pPr marL="0" indent="0" algn="ctr">
               <a:buNone/>
             </a:pPr>
             <a:r>
@@ -15793,7 +16492,7 @@
           <a:bodyPr wrap="square" rtlCol="0" anchor="ctr"/>
           <a:lstStyle/>
           <a:p>
-            <a:pPr indent="0" marL="0">
+            <a:pPr marL="0" indent="0">
               <a:buNone/>
             </a:pPr>
             <a:r>
@@ -15832,7 +16531,7 @@
           <a:bodyPr wrap="square" rtlCol="0" anchor="ctr"/>
           <a:lstStyle/>
           <a:p>
-            <a:pPr indent="0" marL="0">
+            <a:pPr marL="0" indent="0">
               <a:buNone/>
             </a:pPr>
             <a:r>
@@ -15871,7 +16570,7 @@
           <a:bodyPr wrap="square" rtlCol="0" anchor="ctr"/>
           <a:lstStyle/>
           <a:p>
-            <a:pPr algn="l" indent="0" marL="0">
+            <a:pPr marL="0" indent="0" algn="l">
               <a:buNone/>
             </a:pPr>
             <a:r>
@@ -15938,6 +16637,13 @@
             <a:prstDash val="solid"/>
           </a:ln>
         </p:spPr>
+        <p:txBody>
+          <a:bodyPr/>
+          <a:lstStyle/>
+          <a:p>
+            <a:endParaRPr lang="en-US"/>
+          </a:p>
+        </p:txBody>
       </p:sp>
       <p:sp>
         <p:nvSpPr>
@@ -15967,6 +16673,13 @@
             <a:prstDash val="solid"/>
           </a:ln>
         </p:spPr>
+        <p:txBody>
+          <a:bodyPr/>
+          <a:lstStyle/>
+          <a:p>
+            <a:endParaRPr lang="en-US"/>
+          </a:p>
+        </p:txBody>
       </p:sp>
       <p:sp>
         <p:nvSpPr>
@@ -15996,6 +16709,13 @@
             <a:prstDash val="solid"/>
           </a:ln>
         </p:spPr>
+        <p:txBody>
+          <a:bodyPr/>
+          <a:lstStyle/>
+          <a:p>
+            <a:endParaRPr lang="en-US"/>
+          </a:p>
+        </p:txBody>
       </p:sp>
       <p:sp>
         <p:nvSpPr>
@@ -16021,6 +16741,13 @@
             <a:prstDash val="solid"/>
           </a:ln>
         </p:spPr>
+        <p:txBody>
+          <a:bodyPr/>
+          <a:lstStyle/>
+          <a:p>
+            <a:endParaRPr lang="en-US"/>
+          </a:p>
+        </p:txBody>
       </p:sp>
       <p:sp>
         <p:nvSpPr>
@@ -16046,6 +16773,13 @@
             <a:prstDash val="solid"/>
           </a:ln>
         </p:spPr>
+        <p:txBody>
+          <a:bodyPr/>
+          <a:lstStyle/>
+          <a:p>
+            <a:endParaRPr lang="en-US"/>
+          </a:p>
+        </p:txBody>
       </p:sp>
       <p:sp>
         <p:nvSpPr>
@@ -16068,7 +16802,7 @@
           <a:bodyPr wrap="square" rtlCol="0" anchor="ctr"/>
           <a:lstStyle/>
           <a:p>
-            <a:pPr indent="0" marL="0">
+            <a:pPr marL="0" indent="0">
               <a:buNone/>
             </a:pPr>
             <a:r>
@@ -16107,7 +16841,7 @@
           <a:bodyPr wrap="square" rtlCol="0" anchor="ctr"/>
           <a:lstStyle/>
           <a:p>
-            <a:pPr indent="0" marL="0">
+            <a:pPr marL="0" indent="0">
               <a:buNone/>
             </a:pPr>
             <a:r>
@@ -16147,6 +16881,13 @@
             <a:prstDash val="solid"/>
           </a:ln>
         </p:spPr>
+        <p:txBody>
+          <a:bodyPr/>
+          <a:lstStyle/>
+          <a:p>
+            <a:endParaRPr lang="en-US"/>
+          </a:p>
+        </p:txBody>
       </p:sp>
       <p:sp>
         <p:nvSpPr>
@@ -16174,6 +16915,13 @@
             <a:prstDash val="solid"/>
           </a:ln>
         </p:spPr>
+        <p:txBody>
+          <a:bodyPr/>
+          <a:lstStyle/>
+          <a:p>
+            <a:endParaRPr lang="en-US"/>
+          </a:p>
+        </p:txBody>
       </p:sp>
       <p:sp>
         <p:nvSpPr>
@@ -16196,7 +16944,7 @@
           <a:bodyPr wrap="square" rtlCol="0" anchor="ctr"/>
           <a:lstStyle/>
           <a:p>
-            <a:pPr indent="0" marL="0">
+            <a:pPr marL="0" indent="0">
               <a:buNone/>
             </a:pPr>
             <a:r>
@@ -16236,6 +16984,13 @@
             <a:prstDash val="solid"/>
           </a:ln>
         </p:spPr>
+        <p:txBody>
+          <a:bodyPr/>
+          <a:lstStyle/>
+          <a:p>
+            <a:endParaRPr lang="en-US"/>
+          </a:p>
+        </p:txBody>
       </p:sp>
       <p:sp>
         <p:nvSpPr>
@@ -16258,7 +17013,7 @@
           <a:bodyPr wrap="square" rtlCol="0" anchor="ctr"/>
           <a:lstStyle/>
           <a:p>
-            <a:pPr indent="0" marL="0">
+            <a:pPr marL="0" indent="0">
               <a:buNone/>
             </a:pPr>
             <a:r>
@@ -16297,7 +17052,7 @@
           <a:bodyPr wrap="square" rtlCol="0" anchor="ctr"/>
           <a:lstStyle/>
           <a:p>
-            <a:pPr algn="ctr" indent="0" marL="0">
+            <a:pPr marL="0" indent="0" algn="ctr">
               <a:buNone/>
             </a:pPr>
             <a:r>
@@ -16333,7 +17088,7 @@
           <a:bodyPr wrap="square" rtlCol="0" anchor="ctr"/>
           <a:lstStyle/>
           <a:p>
-            <a:pPr indent="0" marL="0">
+            <a:pPr marL="0" indent="0">
               <a:buNone/>
             </a:pPr>
             <a:r>
@@ -16350,7 +17105,7 @@
             <a:endParaRPr lang="en-US" sz="1300" dirty="0"/>
           </a:p>
           <a:p>
-            <a:pPr indent="0" marL="0">
+            <a:pPr marL="0" indent="0">
               <a:buNone/>
             </a:pPr>
             <a:r>
@@ -16389,7 +17144,7 @@
           <a:bodyPr wrap="square" rtlCol="0" anchor="ctr"/>
           <a:lstStyle/>
           <a:p>
-            <a:pPr algn="ctr" indent="0" marL="0">
+            <a:pPr marL="0" indent="0" algn="ctr">
               <a:buNone/>
             </a:pPr>
             <a:r>
@@ -16425,7 +17180,7 @@
           <a:bodyPr wrap="square" rtlCol="0" anchor="ctr"/>
           <a:lstStyle/>
           <a:p>
-            <a:pPr indent="0" marL="0">
+            <a:pPr marL="0" indent="0">
               <a:buNone/>
             </a:pPr>
             <a:r>
@@ -16442,7 +17197,7 @@
             <a:endParaRPr lang="en-US" sz="1300" dirty="0"/>
           </a:p>
           <a:p>
-            <a:pPr indent="0" marL="0">
+            <a:pPr marL="0" indent="0">
               <a:buNone/>
             </a:pPr>
             <a:r>
@@ -16481,7 +17236,7 @@
           <a:bodyPr wrap="square" rtlCol="0" anchor="ctr"/>
           <a:lstStyle/>
           <a:p>
-            <a:pPr algn="ctr" indent="0" marL="0">
+            <a:pPr marL="0" indent="0" algn="ctr">
               <a:buNone/>
             </a:pPr>
             <a:r>
@@ -16517,7 +17272,7 @@
           <a:bodyPr wrap="square" rtlCol="0" anchor="ctr"/>
           <a:lstStyle/>
           <a:p>
-            <a:pPr indent="0" marL="0">
+            <a:pPr marL="0" indent="0">
               <a:buNone/>
             </a:pPr>
             <a:r>
@@ -16534,7 +17289,7 @@
             <a:endParaRPr lang="en-US" sz="1300" dirty="0"/>
           </a:p>
           <a:p>
-            <a:pPr indent="0" marL="0">
+            <a:pPr marL="0" indent="0">
               <a:buNone/>
             </a:pPr>
             <a:r>
@@ -16578,6 +17333,13 @@
             <a:prstDash val="solid"/>
           </a:ln>
         </p:spPr>
+        <p:txBody>
+          <a:bodyPr/>
+          <a:lstStyle/>
+          <a:p>
+            <a:endParaRPr lang="en-US"/>
+          </a:p>
+        </p:txBody>
       </p:sp>
       <p:sp>
         <p:nvSpPr>
@@ -16600,7 +17362,7 @@
           <a:bodyPr wrap="square" rtlCol="0" anchor="ctr"/>
           <a:lstStyle/>
           <a:p>
-            <a:pPr indent="0" marL="0">
+            <a:pPr marL="0" indent="0">
               <a:buNone/>
             </a:pPr>
             <a:r>
@@ -16640,6 +17402,13 @@
             <a:prstDash val="solid"/>
           </a:ln>
         </p:spPr>
+        <p:txBody>
+          <a:bodyPr/>
+          <a:lstStyle/>
+          <a:p>
+            <a:endParaRPr lang="en-US"/>
+          </a:p>
+        </p:txBody>
       </p:sp>
       <p:sp>
         <p:nvSpPr>
@@ -16662,7 +17431,7 @@
           <a:bodyPr wrap="square" rtlCol="0" anchor="ctr"/>
           <a:lstStyle/>
           <a:p>
-            <a:pPr indent="0" marL="0">
+            <a:pPr marL="0" indent="0">
               <a:buNone/>
             </a:pPr>
             <a:r>
@@ -16701,7 +17470,7 @@
           <a:bodyPr wrap="square" rtlCol="0" anchor="ctr"/>
           <a:lstStyle/>
           <a:p>
-            <a:pPr algn="ctr" indent="0" marL="0">
+            <a:pPr marL="0" indent="0" algn="ctr">
               <a:buNone/>
             </a:pPr>
             <a:r>
@@ -16737,7 +17506,7 @@
           <a:bodyPr wrap="square" rtlCol="0" anchor="ctr"/>
           <a:lstStyle/>
           <a:p>
-            <a:pPr indent="0" marL="0">
+            <a:pPr marL="0" indent="0">
               <a:buNone/>
             </a:pPr>
             <a:r>
@@ -16754,7 +17523,7 @@
             <a:endParaRPr lang="en-US" sz="1300" dirty="0"/>
           </a:p>
           <a:p>
-            <a:pPr indent="0" marL="0">
+            <a:pPr marL="0" indent="0">
               <a:buNone/>
             </a:pPr>
             <a:r>
@@ -16793,7 +17562,7 @@
           <a:bodyPr wrap="square" rtlCol="0" anchor="ctr"/>
           <a:lstStyle/>
           <a:p>
-            <a:pPr algn="ctr" indent="0" marL="0">
+            <a:pPr marL="0" indent="0" algn="ctr">
               <a:buNone/>
             </a:pPr>
             <a:r>
@@ -16829,7 +17598,7 @@
           <a:bodyPr wrap="square" rtlCol="0" anchor="ctr"/>
           <a:lstStyle/>
           <a:p>
-            <a:pPr indent="0" marL="0">
+            <a:pPr marL="0" indent="0">
               <a:buNone/>
             </a:pPr>
             <a:r>
@@ -16846,7 +17615,7 @@
             <a:endParaRPr lang="en-US" sz="1300" dirty="0"/>
           </a:p>
           <a:p>
-            <a:pPr indent="0" marL="0">
+            <a:pPr marL="0" indent="0">
               <a:buNone/>
             </a:pPr>
             <a:r>
@@ -16885,7 +17654,7 @@
           <a:bodyPr wrap="square" rtlCol="0" anchor="ctr"/>
           <a:lstStyle/>
           <a:p>
-            <a:pPr algn="ctr" indent="0" marL="0">
+            <a:pPr marL="0" indent="0" algn="ctr">
               <a:buNone/>
             </a:pPr>
             <a:r>
@@ -16921,7 +17690,7 @@
           <a:bodyPr wrap="square" rtlCol="0" anchor="ctr"/>
           <a:lstStyle/>
           <a:p>
-            <a:pPr indent="0" marL="0">
+            <a:pPr marL="0" indent="0">
               <a:buNone/>
             </a:pPr>
             <a:r>
@@ -16938,7 +17707,7 @@
             <a:endParaRPr lang="en-US" sz="1300" dirty="0"/>
           </a:p>
           <a:p>
-            <a:pPr indent="0" marL="0">
+            <a:pPr marL="0" indent="0">
               <a:buNone/>
             </a:pPr>
             <a:r>
@@ -16977,7 +17746,7 @@
           <a:bodyPr wrap="square" rtlCol="0" anchor="ctr"/>
           <a:lstStyle/>
           <a:p>
-            <a:pPr algn="ctr" indent="0" marL="0">
+            <a:pPr marL="0" indent="0" algn="ctr">
               <a:buNone/>
             </a:pPr>
             <a:r>
@@ -17021,6 +17790,13 @@
             <a:prstDash val="solid"/>
           </a:ln>
         </p:spPr>
+        <p:txBody>
+          <a:bodyPr/>
+          <a:lstStyle/>
+          <a:p>
+            <a:endParaRPr lang="en-US"/>
+          </a:p>
+        </p:txBody>
       </p:sp>
       <p:sp>
         <p:nvSpPr>
@@ -17043,7 +17819,7 @@
           <a:bodyPr wrap="square" rtlCol="0" anchor="ctr"/>
           <a:lstStyle/>
           <a:p>
-            <a:pPr algn="ctr" indent="0" marL="0">
+            <a:pPr marL="0" indent="0" algn="ctr">
               <a:buNone/>
             </a:pPr>
             <a:r>
@@ -17082,7 +17858,7 @@
           <a:bodyPr wrap="square" rtlCol="0" anchor="ctr"/>
           <a:lstStyle/>
           <a:p>
-            <a:pPr algn="ctr" indent="0" marL="0">
+            <a:pPr marL="0" indent="0" algn="ctr">
               <a:buNone/>
             </a:pPr>
             <a:r>
@@ -17149,6 +17925,13 @@
             <a:prstDash val="solid"/>
           </a:ln>
         </p:spPr>
+        <p:txBody>
+          <a:bodyPr/>
+          <a:lstStyle/>
+          <a:p>
+            <a:endParaRPr lang="en-US"/>
+          </a:p>
+        </p:txBody>
       </p:sp>
       <p:sp>
         <p:nvSpPr>
@@ -17178,6 +17961,13 @@
             <a:prstDash val="solid"/>
           </a:ln>
         </p:spPr>
+        <p:txBody>
+          <a:bodyPr/>
+          <a:lstStyle/>
+          <a:p>
+            <a:endParaRPr lang="en-US"/>
+          </a:p>
+        </p:txBody>
       </p:sp>
       <p:sp>
         <p:nvSpPr>
@@ -17207,6 +17997,13 @@
             <a:prstDash val="solid"/>
           </a:ln>
         </p:spPr>
+        <p:txBody>
+          <a:bodyPr/>
+          <a:lstStyle/>
+          <a:p>
+            <a:endParaRPr lang="en-US"/>
+          </a:p>
+        </p:txBody>
       </p:sp>
       <p:sp>
         <p:nvSpPr>
@@ -17230,6 +18027,13 @@
             <a:prstDash val="solid"/>
           </a:ln>
         </p:spPr>
+        <p:txBody>
+          <a:bodyPr/>
+          <a:lstStyle/>
+          <a:p>
+            <a:endParaRPr lang="en-US"/>
+          </a:p>
+        </p:txBody>
       </p:sp>
       <p:sp>
         <p:nvSpPr>
@@ -17255,6 +18059,13 @@
             <a:prstDash val="solid"/>
           </a:ln>
         </p:spPr>
+        <p:txBody>
+          <a:bodyPr/>
+          <a:lstStyle/>
+          <a:p>
+            <a:endParaRPr lang="en-US"/>
+          </a:p>
+        </p:txBody>
       </p:sp>
       <p:sp>
         <p:nvSpPr>
@@ -17280,6 +18091,13 @@
             <a:prstDash val="solid"/>
           </a:ln>
         </p:spPr>
+        <p:txBody>
+          <a:bodyPr/>
+          <a:lstStyle/>
+          <a:p>
+            <a:endParaRPr lang="en-US"/>
+          </a:p>
+        </p:txBody>
       </p:sp>
       <p:sp>
         <p:nvSpPr>
@@ -17302,7 +18120,7 @@
           <a:bodyPr wrap="square" rtlCol="0" anchor="ctr"/>
           <a:lstStyle/>
           <a:p>
-            <a:pPr indent="0" marL="0">
+            <a:pPr marL="0" indent="0">
               <a:buNone/>
             </a:pPr>
             <a:r>
@@ -17341,7 +18159,7 @@
           <a:bodyPr wrap="square" rtlCol="0" anchor="ctr"/>
           <a:lstStyle/>
           <a:p>
-            <a:pPr indent="0" marL="0">
+            <a:pPr marL="0" indent="0">
               <a:buNone/>
             </a:pPr>
             <a:r>
@@ -17381,6 +18199,13 @@
             <a:prstDash val="solid"/>
           </a:ln>
         </p:spPr>
+        <p:txBody>
+          <a:bodyPr/>
+          <a:lstStyle/>
+          <a:p>
+            <a:endParaRPr lang="en-US"/>
+          </a:p>
+        </p:txBody>
       </p:sp>
       <p:sp>
         <p:nvSpPr>
@@ -17408,6 +18233,13 @@
             <a:prstDash val="solid"/>
           </a:ln>
         </p:spPr>
+        <p:txBody>
+          <a:bodyPr/>
+          <a:lstStyle/>
+          <a:p>
+            <a:endParaRPr lang="en-US"/>
+          </a:p>
+        </p:txBody>
       </p:sp>
       <p:sp>
         <p:nvSpPr>
@@ -17430,7 +18262,7 @@
           <a:bodyPr wrap="square" rtlCol="0" anchor="ctr"/>
           <a:lstStyle/>
           <a:p>
-            <a:pPr indent="0" marL="0">
+            <a:pPr marL="0" indent="0">
               <a:buNone/>
             </a:pPr>
             <a:r>
@@ -17469,7 +18301,7 @@
           <a:bodyPr wrap="square" rtlCol="0" anchor="ctr"/>
           <a:lstStyle/>
           <a:p>
-            <a:pPr indent="0" marL="0">
+            <a:pPr marL="0" indent="0">
               <a:buNone/>
             </a:pPr>
             <a:r>
@@ -17486,7 +18318,7 @@
             <a:endParaRPr lang="en-US" sz="1100" dirty="0"/>
           </a:p>
           <a:p>
-            <a:pPr indent="0" marL="0">
+            <a:pPr marL="0" indent="0">
               <a:buNone/>
             </a:pPr>
             <a:r>
@@ -17525,7 +18357,7 @@
           <a:bodyPr wrap="square" rtlCol="0" anchor="ctr"/>
           <a:lstStyle/>
           <a:p>
-            <a:pPr algn="r" indent="0" marL="0">
+            <a:pPr marL="0" indent="0" algn="r">
               <a:buNone/>
             </a:pPr>
             <a:r>
@@ -17569,6 +18401,13 @@
             <a:prstDash val="solid"/>
           </a:ln>
         </p:spPr>
+        <p:txBody>
+          <a:bodyPr/>
+          <a:lstStyle/>
+          <a:p>
+            <a:endParaRPr lang="en-US"/>
+          </a:p>
+        </p:txBody>
       </p:sp>
       <p:sp>
         <p:nvSpPr>
@@ -17591,7 +18430,7 @@
           <a:bodyPr wrap="square" rtlCol="0" anchor="ctr"/>
           <a:lstStyle/>
           <a:p>
-            <a:pPr indent="0" marL="0">
+            <a:pPr marL="0" indent="0">
               <a:buNone/>
             </a:pPr>
             <a:r>
@@ -17630,7 +18469,7 @@
           <a:bodyPr wrap="square" rtlCol="0" anchor="ctr"/>
           <a:lstStyle/>
           <a:p>
-            <a:pPr indent="0" marL="0">
+            <a:pPr marL="0" indent="0">
               <a:buNone/>
             </a:pPr>
             <a:r>
@@ -17647,7 +18486,7 @@
             <a:endParaRPr lang="en-US" sz="1100" dirty="0"/>
           </a:p>
           <a:p>
-            <a:pPr indent="0" marL="0">
+            <a:pPr marL="0" indent="0">
               <a:buNone/>
             </a:pPr>
             <a:r>
@@ -17686,7 +18525,7 @@
           <a:bodyPr wrap="square" rtlCol="0" anchor="ctr"/>
           <a:lstStyle/>
           <a:p>
-            <a:pPr algn="r" indent="0" marL="0">
+            <a:pPr marL="0" indent="0" algn="r">
               <a:buNone/>
             </a:pPr>
             <a:r>
@@ -17730,6 +18569,13 @@
             <a:prstDash val="solid"/>
           </a:ln>
         </p:spPr>
+        <p:txBody>
+          <a:bodyPr/>
+          <a:lstStyle/>
+          <a:p>
+            <a:endParaRPr lang="en-US"/>
+          </a:p>
+        </p:txBody>
       </p:sp>
       <p:sp>
         <p:nvSpPr>
@@ -17752,7 +18598,7 @@
           <a:bodyPr wrap="square" rtlCol="0" anchor="ctr"/>
           <a:lstStyle/>
           <a:p>
-            <a:pPr indent="0" marL="0">
+            <a:pPr marL="0" indent="0">
               <a:buNone/>
             </a:pPr>
             <a:r>
@@ -17791,7 +18637,7 @@
           <a:bodyPr wrap="square" rtlCol="0" anchor="ctr"/>
           <a:lstStyle/>
           <a:p>
-            <a:pPr indent="0" marL="0">
+            <a:pPr marL="0" indent="0">
               <a:buNone/>
             </a:pPr>
             <a:r>
@@ -17808,7 +18654,7 @@
             <a:endParaRPr lang="en-US" sz="1100" dirty="0"/>
           </a:p>
           <a:p>
-            <a:pPr indent="0" marL="0">
+            <a:pPr marL="0" indent="0">
               <a:buNone/>
             </a:pPr>
             <a:r>
@@ -17847,7 +18693,7 @@
           <a:bodyPr wrap="square" rtlCol="0" anchor="ctr"/>
           <a:lstStyle/>
           <a:p>
-            <a:pPr algn="r" indent="0" marL="0">
+            <a:pPr marL="0" indent="0" algn="r">
               <a:buNone/>
             </a:pPr>
             <a:r>
@@ -17891,6 +18737,13 @@
             <a:prstDash val="solid"/>
           </a:ln>
         </p:spPr>
+        <p:txBody>
+          <a:bodyPr/>
+          <a:lstStyle/>
+          <a:p>
+            <a:endParaRPr lang="en-US"/>
+          </a:p>
+        </p:txBody>
       </p:sp>
       <p:sp>
         <p:nvSpPr>
@@ -17913,7 +18766,7 @@
           <a:bodyPr wrap="square" rtlCol="0" anchor="ctr"/>
           <a:lstStyle/>
           <a:p>
-            <a:pPr indent="0" marL="0">
+            <a:pPr marL="0" indent="0">
               <a:buNone/>
             </a:pPr>
             <a:r>
@@ -17952,7 +18805,7 @@
           <a:bodyPr wrap="square" rtlCol="0" anchor="ctr"/>
           <a:lstStyle/>
           <a:p>
-            <a:pPr algn="l" indent="0" marL="0">
+            <a:pPr marL="0" indent="0" algn="l">
               <a:buNone/>
             </a:pPr>
             <a:r>
@@ -18019,6 +18872,13 @@
             <a:prstDash val="solid"/>
           </a:ln>
         </p:spPr>
+        <p:txBody>
+          <a:bodyPr/>
+          <a:lstStyle/>
+          <a:p>
+            <a:endParaRPr lang="en-US"/>
+          </a:p>
+        </p:txBody>
       </p:sp>
       <p:sp>
         <p:nvSpPr>
@@ -18048,6 +18908,13 @@
             <a:prstDash val="solid"/>
           </a:ln>
         </p:spPr>
+        <p:txBody>
+          <a:bodyPr/>
+          <a:lstStyle/>
+          <a:p>
+            <a:endParaRPr lang="en-US"/>
+          </a:p>
+        </p:txBody>
       </p:sp>
       <p:sp>
         <p:nvSpPr>
@@ -18077,6 +18944,13 @@
             <a:prstDash val="solid"/>
           </a:ln>
         </p:spPr>
+        <p:txBody>
+          <a:bodyPr/>
+          <a:lstStyle/>
+          <a:p>
+            <a:endParaRPr lang="en-US"/>
+          </a:p>
+        </p:txBody>
       </p:sp>
       <p:sp>
         <p:nvSpPr>
@@ -18106,6 +18980,13 @@
             <a:prstDash val="solid"/>
           </a:ln>
         </p:spPr>
+        <p:txBody>
+          <a:bodyPr/>
+          <a:lstStyle/>
+          <a:p>
+            <a:endParaRPr lang="en-US"/>
+          </a:p>
+        </p:txBody>
       </p:sp>
       <p:sp>
         <p:nvSpPr>
@@ -18131,6 +19012,13 @@
             <a:prstDash val="solid"/>
           </a:ln>
         </p:spPr>
+        <p:txBody>
+          <a:bodyPr/>
+          <a:lstStyle/>
+          <a:p>
+            <a:endParaRPr lang="en-US"/>
+          </a:p>
+        </p:txBody>
       </p:sp>
       <p:sp>
         <p:nvSpPr>
@@ -18156,6 +19044,13 @@
             <a:prstDash val="solid"/>
           </a:ln>
         </p:spPr>
+        <p:txBody>
+          <a:bodyPr/>
+          <a:lstStyle/>
+          <a:p>
+            <a:endParaRPr lang="en-US"/>
+          </a:p>
+        </p:txBody>
       </p:sp>
       <p:sp>
         <p:nvSpPr>
@@ -18178,7 +19073,7 @@
           <a:bodyPr wrap="square" rtlCol="0" anchor="ctr"/>
           <a:lstStyle/>
           <a:p>
-            <a:pPr indent="0" marL="0">
+            <a:pPr marL="0" indent="0">
               <a:buNone/>
             </a:pPr>
             <a:r>
@@ -18217,7 +19112,7 @@
           <a:bodyPr wrap="square" rtlCol="0" anchor="ctr"/>
           <a:lstStyle/>
           <a:p>
-            <a:pPr indent="0" marL="0">
+            <a:pPr marL="0" indent="0">
               <a:buNone/>
             </a:pPr>
             <a:r>
@@ -18257,6 +19152,13 @@
             <a:prstDash val="solid"/>
           </a:ln>
         </p:spPr>
+        <p:txBody>
+          <a:bodyPr/>
+          <a:lstStyle/>
+          <a:p>
+            <a:endParaRPr lang="en-US"/>
+          </a:p>
+        </p:txBody>
       </p:sp>
       <p:sp>
         <p:nvSpPr>
@@ -18284,6 +19186,13 @@
             <a:prstDash val="solid"/>
           </a:ln>
         </p:spPr>
+        <p:txBody>
+          <a:bodyPr/>
+          <a:lstStyle/>
+          <a:p>
+            <a:endParaRPr lang="en-US"/>
+          </a:p>
+        </p:txBody>
       </p:sp>
       <p:sp>
         <p:nvSpPr>
@@ -18306,7 +19215,7 @@
           <a:bodyPr wrap="square" rtlCol="0" anchor="ctr"/>
           <a:lstStyle/>
           <a:p>
-            <a:pPr indent="0" marL="0">
+            <a:pPr marL="0" indent="0">
               <a:buNone/>
             </a:pPr>
             <a:r>
@@ -18345,7 +19254,7 @@
           <a:bodyPr wrap="square" rtlCol="0" anchor="ctr"/>
           <a:lstStyle/>
           <a:p>
-            <a:pPr indent="0" marL="0">
+            <a:pPr marL="0" indent="0">
               <a:buNone/>
             </a:pPr>
             <a:r>
@@ -18384,7 +19293,7 @@
           <a:bodyPr wrap="square" rtlCol="0" anchor="ctr"/>
           <a:lstStyle/>
           <a:p>
-            <a:pPr indent="0" marL="0">
+            <a:pPr marL="0" indent="0">
               <a:buNone/>
             </a:pPr>
             <a:r>
@@ -18423,7 +19332,7 @@
           <a:bodyPr wrap="square" rtlCol="0" anchor="ctr"/>
           <a:lstStyle/>
           <a:p>
-            <a:pPr indent="0" marL="0">
+            <a:pPr marL="0" indent="0">
               <a:buNone/>
             </a:pPr>
             <a:r>
@@ -18467,6 +19376,13 @@
             <a:prstDash val="solid"/>
           </a:ln>
         </p:spPr>
+        <p:txBody>
+          <a:bodyPr/>
+          <a:lstStyle/>
+          <a:p>
+            <a:endParaRPr lang="en-US"/>
+          </a:p>
+        </p:txBody>
       </p:sp>
       <p:sp>
         <p:nvSpPr>
@@ -18489,7 +19405,7 @@
           <a:bodyPr wrap="square" rtlCol="0" anchor="ctr"/>
           <a:lstStyle/>
           <a:p>
-            <a:pPr indent="0" marL="0">
+            <a:pPr marL="0" indent="0">
               <a:buNone/>
             </a:pPr>
             <a:r>
@@ -18528,7 +19444,7 @@
           <a:bodyPr wrap="square" rtlCol="0" anchor="ctr"/>
           <a:lstStyle/>
           <a:p>
-            <a:pPr algn="ctr" indent="0" marL="0">
+            <a:pPr marL="0" indent="0" algn="ctr">
               <a:buNone/>
             </a:pPr>
             <a:r>
@@ -18564,7 +19480,7 @@
           <a:bodyPr wrap="square" rtlCol="0" anchor="ctr"/>
           <a:lstStyle/>
           <a:p>
-            <a:pPr algn="ctr" indent="0" marL="0">
+            <a:pPr marL="0" indent="0" algn="ctr">
               <a:buNone/>
             </a:pPr>
             <a:r>
@@ -18600,7 +19516,7 @@
           <a:bodyPr wrap="square" rtlCol="0" anchor="ctr"/>
           <a:lstStyle/>
           <a:p>
-            <a:pPr algn="ctr" indent="0" marL="0">
+            <a:pPr marL="0" indent="0" algn="ctr">
               <a:buNone/>
             </a:pPr>
             <a:r>
@@ -18641,6 +19557,13 @@
             <a:prstDash val="solid"/>
           </a:ln>
         </p:spPr>
+        <p:txBody>
+          <a:bodyPr/>
+          <a:lstStyle/>
+          <a:p>
+            <a:endParaRPr lang="en-US"/>
+          </a:p>
+        </p:txBody>
       </p:sp>
       <p:sp>
         <p:nvSpPr>
@@ -18663,7 +19586,7 @@
           <a:bodyPr wrap="square" rtlCol="0" anchor="ctr"/>
           <a:lstStyle/>
           <a:p>
-            <a:pPr indent="0" marL="0">
+            <a:pPr marL="0" indent="0">
               <a:buNone/>
             </a:pPr>
             <a:r>
@@ -18702,7 +19625,7 @@
           <a:bodyPr wrap="square" rtlCol="0" anchor="ctr"/>
           <a:lstStyle/>
           <a:p>
-            <a:pPr algn="ctr" indent="0" marL="0">
+            <a:pPr marL="0" indent="0" algn="ctr">
               <a:buNone/>
             </a:pPr>
             <a:r>
@@ -18738,7 +19661,7 @@
           <a:bodyPr wrap="square" rtlCol="0" anchor="ctr"/>
           <a:lstStyle/>
           <a:p>
-            <a:pPr algn="ctr" indent="0" marL="0">
+            <a:pPr marL="0" indent="0" algn="ctr">
               <a:buNone/>
             </a:pPr>
             <a:r>
@@ -18774,7 +19697,7 @@
           <a:bodyPr wrap="square" rtlCol="0" anchor="ctr"/>
           <a:lstStyle/>
           <a:p>
-            <a:pPr algn="ctr" indent="0" marL="0">
+            <a:pPr marL="0" indent="0" algn="ctr">
               <a:buNone/>
             </a:pPr>
             <a:r>
@@ -18815,6 +19738,13 @@
             <a:prstDash val="solid"/>
           </a:ln>
         </p:spPr>
+        <p:txBody>
+          <a:bodyPr/>
+          <a:lstStyle/>
+          <a:p>
+            <a:endParaRPr lang="en-US"/>
+          </a:p>
+        </p:txBody>
       </p:sp>
       <p:sp>
         <p:nvSpPr>
@@ -18837,7 +19767,7 @@
           <a:bodyPr wrap="square" rtlCol="0" anchor="ctr"/>
           <a:lstStyle/>
           <a:p>
-            <a:pPr indent="0" marL="0">
+            <a:pPr marL="0" indent="0">
               <a:buNone/>
             </a:pPr>
             <a:r>
@@ -18876,7 +19806,7 @@
           <a:bodyPr wrap="square" rtlCol="0" anchor="ctr"/>
           <a:lstStyle/>
           <a:p>
-            <a:pPr algn="ctr" indent="0" marL="0">
+            <a:pPr marL="0" indent="0" algn="ctr">
               <a:buNone/>
             </a:pPr>
             <a:r>
@@ -18912,7 +19842,7 @@
           <a:bodyPr wrap="square" rtlCol="0" anchor="ctr"/>
           <a:lstStyle/>
           <a:p>
-            <a:pPr algn="ctr" indent="0" marL="0">
+            <a:pPr marL="0" indent="0" algn="ctr">
               <a:buNone/>
             </a:pPr>
             <a:r>
@@ -18948,7 +19878,7 @@
           <a:bodyPr wrap="square" rtlCol="0" anchor="ctr"/>
           <a:lstStyle/>
           <a:p>
-            <a:pPr algn="ctr" indent="0" marL="0">
+            <a:pPr marL="0" indent="0" algn="ctr">
               <a:buNone/>
             </a:pPr>
             <a:r>
@@ -18989,6 +19919,13 @@
             <a:prstDash val="solid"/>
           </a:ln>
         </p:spPr>
+        <p:txBody>
+          <a:bodyPr/>
+          <a:lstStyle/>
+          <a:p>
+            <a:endParaRPr lang="en-US"/>
+          </a:p>
+        </p:txBody>
       </p:sp>
       <p:sp>
         <p:nvSpPr>
@@ -19011,7 +19948,7 @@
           <a:bodyPr wrap="square" rtlCol="0" anchor="ctr"/>
           <a:lstStyle/>
           <a:p>
-            <a:pPr indent="0" marL="0">
+            <a:pPr marL="0" indent="0">
               <a:buNone/>
             </a:pPr>
             <a:r>
@@ -19050,7 +19987,7 @@
           <a:bodyPr wrap="square" rtlCol="0" anchor="ctr"/>
           <a:lstStyle/>
           <a:p>
-            <a:pPr algn="ctr" indent="0" marL="0">
+            <a:pPr marL="0" indent="0" algn="ctr">
               <a:buNone/>
             </a:pPr>
             <a:r>
@@ -19086,7 +20023,7 @@
           <a:bodyPr wrap="square" rtlCol="0" anchor="ctr"/>
           <a:lstStyle/>
           <a:p>
-            <a:pPr algn="ctr" indent="0" marL="0">
+            <a:pPr marL="0" indent="0" algn="ctr">
               <a:buNone/>
             </a:pPr>
             <a:r>
@@ -19122,7 +20059,7 @@
           <a:bodyPr wrap="square" rtlCol="0" anchor="ctr"/>
           <a:lstStyle/>
           <a:p>
-            <a:pPr algn="ctr" indent="0" marL="0">
+            <a:pPr marL="0" indent="0" algn="ctr">
               <a:buNone/>
             </a:pPr>
             <a:r>
@@ -19163,6 +20100,13 @@
             <a:prstDash val="solid"/>
           </a:ln>
         </p:spPr>
+        <p:txBody>
+          <a:bodyPr/>
+          <a:lstStyle/>
+          <a:p>
+            <a:endParaRPr lang="en-US"/>
+          </a:p>
+        </p:txBody>
       </p:sp>
       <p:sp>
         <p:nvSpPr>
@@ -19185,7 +20129,7 @@
           <a:bodyPr wrap="square" rtlCol="0" anchor="ctr"/>
           <a:lstStyle/>
           <a:p>
-            <a:pPr indent="0" marL="0">
+            <a:pPr marL="0" indent="0">
               <a:buNone/>
             </a:pPr>
             <a:r>
@@ -19224,7 +20168,7 @@
           <a:bodyPr wrap="square" rtlCol="0" anchor="ctr"/>
           <a:lstStyle/>
           <a:p>
-            <a:pPr algn="ctr" indent="0" marL="0">
+            <a:pPr marL="0" indent="0" algn="ctr">
               <a:buNone/>
             </a:pPr>
             <a:r>
@@ -19260,7 +20204,7 @@
           <a:bodyPr wrap="square" rtlCol="0" anchor="ctr"/>
           <a:lstStyle/>
           <a:p>
-            <a:pPr algn="ctr" indent="0" marL="0">
+            <a:pPr marL="0" indent="0" algn="ctr">
               <a:buNone/>
             </a:pPr>
             <a:r>
@@ -19296,7 +20240,7 @@
           <a:bodyPr wrap="square" rtlCol="0" anchor="ctr"/>
           <a:lstStyle/>
           <a:p>
-            <a:pPr algn="ctr" indent="0" marL="0">
+            <a:pPr marL="0" indent="0" algn="ctr">
               <a:buNone/>
             </a:pPr>
             <a:r>
@@ -19337,6 +20281,13 @@
             <a:prstDash val="solid"/>
           </a:ln>
         </p:spPr>
+        <p:txBody>
+          <a:bodyPr/>
+          <a:lstStyle/>
+          <a:p>
+            <a:endParaRPr lang="en-US"/>
+          </a:p>
+        </p:txBody>
       </p:sp>
       <p:sp>
         <p:nvSpPr>
@@ -19359,7 +20310,7 @@
           <a:bodyPr wrap="square" rtlCol="0" anchor="ctr"/>
           <a:lstStyle/>
           <a:p>
-            <a:pPr indent="0" marL="0">
+            <a:pPr marL="0" indent="0">
               <a:buNone/>
             </a:pPr>
             <a:r>
@@ -19398,7 +20349,7 @@
           <a:bodyPr wrap="square" rtlCol="0" anchor="ctr"/>
           <a:lstStyle/>
           <a:p>
-            <a:pPr algn="ctr" indent="0" marL="0">
+            <a:pPr marL="0" indent="0" algn="ctr">
               <a:buNone/>
             </a:pPr>
             <a:r>
@@ -19434,7 +20385,7 @@
           <a:bodyPr wrap="square" rtlCol="0" anchor="ctr"/>
           <a:lstStyle/>
           <a:p>
-            <a:pPr algn="ctr" indent="0" marL="0">
+            <a:pPr marL="0" indent="0" algn="ctr">
               <a:buNone/>
             </a:pPr>
             <a:r>
@@ -19470,7 +20421,7 @@
           <a:bodyPr wrap="square" rtlCol="0" anchor="ctr"/>
           <a:lstStyle/>
           <a:p>
-            <a:pPr algn="ctr" indent="0" marL="0">
+            <a:pPr marL="0" indent="0" algn="ctr">
               <a:buNone/>
             </a:pPr>
             <a:r>
@@ -19506,7 +20457,7 @@
           <a:bodyPr wrap="square" rtlCol="0" anchor="ctr"/>
           <a:lstStyle/>
           <a:p>
-            <a:pPr algn="l" indent="0" marL="0">
+            <a:pPr marL="0" indent="0" algn="l">
               <a:buNone/>
             </a:pPr>
             <a:r>
@@ -19825,4 +20776,319 @@
     </a:ext>
   </a:extLst>
 </a:theme>
+</file>
+
+<file path=ppt/theme/theme2.xml><?xml version="1.0" encoding="utf-8"?>
+<a:theme xmlns:a="http://schemas.openxmlformats.org/drawingml/2006/main" name="Office Theme">
+  <a:themeElements>
+    <a:clrScheme name="Office">
+      <a:dk1>
+        <a:sysClr val="windowText" lastClr="000000"/>
+      </a:dk1>
+      <a:lt1>
+        <a:sysClr val="window" lastClr="FFFFFF"/>
+      </a:lt1>
+      <a:dk2>
+        <a:srgbClr val="0E2841"/>
+      </a:dk2>
+      <a:lt2>
+        <a:srgbClr val="E8E8E8"/>
+      </a:lt2>
+      <a:accent1>
+        <a:srgbClr val="156082"/>
+      </a:accent1>
+      <a:accent2>
+        <a:srgbClr val="E97132"/>
+      </a:accent2>
+      <a:accent3>
+        <a:srgbClr val="196B24"/>
+      </a:accent3>
+      <a:accent4>
+        <a:srgbClr val="0F9ED5"/>
+      </a:accent4>
+      <a:accent5>
+        <a:srgbClr val="A02B93"/>
+      </a:accent5>
+      <a:accent6>
+        <a:srgbClr val="4EA72E"/>
+      </a:accent6>
+      <a:hlink>
+        <a:srgbClr val="467886"/>
+      </a:hlink>
+      <a:folHlink>
+        <a:srgbClr val="96607D"/>
+      </a:folHlink>
+    </a:clrScheme>
+    <a:fontScheme name="Office">
+      <a:majorFont>
+        <a:latin typeface="Aptos Display" panose="02110004020202020204"/>
+        <a:ea typeface=""/>
+        <a:cs typeface=""/>
+        <a:font script="Jpan" typeface="游ゴシック Light"/>
+        <a:font script="Hang" typeface="맑은 고딕"/>
+        <a:font script="Hans" typeface="等线 Light"/>
+        <a:font script="Hant" typeface="新細明體"/>
+        <a:font script="Arab" typeface="Times New Roman"/>
+        <a:font script="Hebr" typeface="Times New Roman"/>
+        <a:font script="Thai" typeface="Angsana New"/>
+        <a:font script="Ethi" typeface="Nyala"/>
+        <a:font script="Beng" typeface="Vrinda"/>
+        <a:font script="Gujr" typeface="Shruti"/>
+        <a:font script="Khmr" typeface="MoolBoran"/>
+        <a:font script="Knda" typeface="Tunga"/>
+        <a:font script="Guru" typeface="Raavi"/>
+        <a:font script="Cans" typeface="Euphemia"/>
+        <a:font script="Cher" typeface="Plantagenet Cherokee"/>
+        <a:font script="Yiii" typeface="Microsoft Yi Baiti"/>
+        <a:font script="Tibt" typeface="Microsoft Himalaya"/>
+        <a:font script="Thaa" typeface="MV Boli"/>
+        <a:font script="Deva" typeface="Mangal"/>
+        <a:font script="Telu" typeface="Gautami"/>
+        <a:font script="Taml" typeface="Latha"/>
+        <a:font script="Syrc" typeface="Estrangelo Edessa"/>
+        <a:font script="Orya" typeface="Kalinga"/>
+        <a:font script="Mlym" typeface="Kartika"/>
+        <a:font script="Laoo" typeface="DokChampa"/>
+        <a:font script="Sinh" typeface="Iskoola Pota"/>
+        <a:font script="Mong" typeface="Mongolian Baiti"/>
+        <a:font script="Viet" typeface="Times New Roman"/>
+        <a:font script="Uigh" typeface="Microsoft Uighur"/>
+        <a:font script="Geor" typeface="Sylfaen"/>
+        <a:font script="Armn" typeface="Arial"/>
+        <a:font script="Bugi" typeface="Leelawadee UI"/>
+        <a:font script="Bopo" typeface="Microsoft JhengHei"/>
+        <a:font script="Java" typeface="Javanese Text"/>
+        <a:font script="Lisu" typeface="Segoe UI"/>
+        <a:font script="Mymr" typeface="Myanmar Text"/>
+        <a:font script="Nkoo" typeface="Ebrima"/>
+        <a:font script="Olck" typeface="Nirmala UI"/>
+        <a:font script="Osma" typeface="Ebrima"/>
+        <a:font script="Phag" typeface="Phagspa"/>
+        <a:font script="Syrn" typeface="Estrangelo Edessa"/>
+        <a:font script="Syrj" typeface="Estrangelo Edessa"/>
+        <a:font script="Syre" typeface="Estrangelo Edessa"/>
+        <a:font script="Sora" typeface="Nirmala UI"/>
+        <a:font script="Tale" typeface="Microsoft Tai Le"/>
+        <a:font script="Talu" typeface="Microsoft New Tai Lue"/>
+        <a:font script="Tfng" typeface="Ebrima"/>
+      </a:majorFont>
+      <a:minorFont>
+        <a:latin typeface="Aptos" panose="02110004020202020204"/>
+        <a:ea typeface=""/>
+        <a:cs typeface=""/>
+        <a:font script="Jpan" typeface="游ゴシック"/>
+        <a:font script="Hang" typeface="맑은 고딕"/>
+        <a:font script="Hans" typeface="等线"/>
+        <a:font script="Hant" typeface="新細明體"/>
+        <a:font script="Arab" typeface="Arial"/>
+        <a:font script="Hebr" typeface="Arial"/>
+        <a:font script="Thai" typeface="Cordia New"/>
+        <a:font script="Ethi" typeface="Nyala"/>
+        <a:font script="Beng" typeface="Vrinda"/>
+        <a:font script="Gujr" typeface="Shruti"/>
+        <a:font script="Khmr" typeface="DaunPenh"/>
+        <a:font script="Knda" typeface="Tunga"/>
+        <a:font script="Guru" typeface="Raavi"/>
+        <a:font script="Cans" typeface="Euphemia"/>
+        <a:font script="Cher" typeface="Plantagenet Cherokee"/>
+        <a:font script="Yiii" typeface="Microsoft Yi Baiti"/>
+        <a:font script="Tibt" typeface="Microsoft Himalaya"/>
+        <a:font script="Thaa" typeface="MV Boli"/>
+        <a:font script="Deva" typeface="Mangal"/>
+        <a:font script="Telu" typeface="Gautami"/>
+        <a:font script="Taml" typeface="Latha"/>
+        <a:font script="Syrc" typeface="Estrangelo Edessa"/>
+        <a:font script="Orya" typeface="Kalinga"/>
+        <a:font script="Mlym" typeface="Kartika"/>
+        <a:font script="Laoo" typeface="DokChampa"/>
+        <a:font script="Sinh" typeface="Iskoola Pota"/>
+        <a:font script="Mong" typeface="Mongolian Baiti"/>
+        <a:font script="Viet" typeface="Arial"/>
+        <a:font script="Uigh" typeface="Microsoft Uighur"/>
+        <a:font script="Geor" typeface="Sylfaen"/>
+        <a:font script="Armn" typeface="Arial"/>
+        <a:font script="Bugi" typeface="Leelawadee UI"/>
+        <a:font script="Bopo" typeface="Microsoft JhengHei"/>
+        <a:font script="Java" typeface="Javanese Text"/>
+        <a:font script="Lisu" typeface="Segoe UI"/>
+        <a:font script="Mymr" typeface="Myanmar Text"/>
+        <a:font script="Nkoo" typeface="Ebrima"/>
+        <a:font script="Olck" typeface="Nirmala UI"/>
+        <a:font script="Osma" typeface="Ebrima"/>
+        <a:font script="Phag" typeface="Phagspa"/>
+        <a:font script="Syrn" typeface="Estrangelo Edessa"/>
+        <a:font script="Syrj" typeface="Estrangelo Edessa"/>
+        <a:font script="Syre" typeface="Estrangelo Edessa"/>
+        <a:font script="Sora" typeface="Nirmala UI"/>
+        <a:font script="Tale" typeface="Microsoft Tai Le"/>
+        <a:font script="Talu" typeface="Microsoft New Tai Lue"/>
+        <a:font script="Tfng" typeface="Ebrima"/>
+      </a:minorFont>
+    </a:fontScheme>
+    <a:fmtScheme name="Office">
+      <a:fillStyleLst>
+        <a:solidFill>
+          <a:schemeClr val="phClr"/>
+        </a:solidFill>
+        <a:gradFill rotWithShape="1">
+          <a:gsLst>
+            <a:gs pos="0">
+              <a:schemeClr val="phClr">
+                <a:lumMod val="110000"/>
+                <a:satMod val="105000"/>
+                <a:tint val="67000"/>
+              </a:schemeClr>
+            </a:gs>
+            <a:gs pos="50000">
+              <a:schemeClr val="phClr">
+                <a:lumMod val="105000"/>
+                <a:satMod val="103000"/>
+                <a:tint val="73000"/>
+              </a:schemeClr>
+            </a:gs>
+            <a:gs pos="100000">
+              <a:schemeClr val="phClr">
+                <a:lumMod val="105000"/>
+                <a:satMod val="109000"/>
+                <a:tint val="81000"/>
+              </a:schemeClr>
+            </a:gs>
+          </a:gsLst>
+          <a:lin ang="5400000" scaled="0"/>
+        </a:gradFill>
+        <a:gradFill rotWithShape="1">
+          <a:gsLst>
+            <a:gs pos="0">
+              <a:schemeClr val="phClr">
+                <a:satMod val="103000"/>
+                <a:lumMod val="102000"/>
+                <a:tint val="94000"/>
+              </a:schemeClr>
+            </a:gs>
+            <a:gs pos="50000">
+              <a:schemeClr val="phClr">
+                <a:satMod val="110000"/>
+                <a:lumMod val="100000"/>
+                <a:shade val="100000"/>
+              </a:schemeClr>
+            </a:gs>
+            <a:gs pos="100000">
+              <a:schemeClr val="phClr">
+                <a:lumMod val="99000"/>
+                <a:satMod val="120000"/>
+                <a:shade val="78000"/>
+              </a:schemeClr>
+            </a:gs>
+          </a:gsLst>
+          <a:lin ang="5400000" scaled="0"/>
+        </a:gradFill>
+      </a:fillStyleLst>
+      <a:lnStyleLst>
+        <a:ln w="12700" cap="flat" cmpd="sng" algn="ctr">
+          <a:solidFill>
+            <a:schemeClr val="phClr"/>
+          </a:solidFill>
+          <a:prstDash val="solid"/>
+          <a:miter lim="800000"/>
+        </a:ln>
+        <a:ln w="19050" cap="flat" cmpd="sng" algn="ctr">
+          <a:solidFill>
+            <a:schemeClr val="phClr"/>
+          </a:solidFill>
+          <a:prstDash val="solid"/>
+          <a:miter lim="800000"/>
+        </a:ln>
+        <a:ln w="25400" cap="flat" cmpd="sng" algn="ctr">
+          <a:solidFill>
+            <a:schemeClr val="phClr"/>
+          </a:solidFill>
+          <a:prstDash val="solid"/>
+          <a:miter lim="800000"/>
+        </a:ln>
+      </a:lnStyleLst>
+      <a:effectStyleLst>
+        <a:effectStyle>
+          <a:effectLst/>
+        </a:effectStyle>
+        <a:effectStyle>
+          <a:effectLst/>
+        </a:effectStyle>
+        <a:effectStyle>
+          <a:effectLst>
+            <a:outerShdw blurRad="57150" dist="19050" dir="5400000" algn="ctr" rotWithShape="0">
+              <a:srgbClr val="000000">
+                <a:alpha val="63000"/>
+              </a:srgbClr>
+            </a:outerShdw>
+          </a:effectLst>
+        </a:effectStyle>
+      </a:effectStyleLst>
+      <a:bgFillStyleLst>
+        <a:solidFill>
+          <a:schemeClr val="phClr"/>
+        </a:solidFill>
+        <a:solidFill>
+          <a:schemeClr val="phClr">
+            <a:tint val="95000"/>
+            <a:satMod val="170000"/>
+          </a:schemeClr>
+        </a:solidFill>
+        <a:gradFill rotWithShape="1">
+          <a:gsLst>
+            <a:gs pos="0">
+              <a:schemeClr val="phClr">
+                <a:tint val="93000"/>
+                <a:satMod val="150000"/>
+                <a:shade val="98000"/>
+                <a:lumMod val="102000"/>
+              </a:schemeClr>
+            </a:gs>
+            <a:gs pos="50000">
+              <a:schemeClr val="phClr">
+                <a:tint val="98000"/>
+                <a:satMod val="130000"/>
+                <a:shade val="90000"/>
+                <a:lumMod val="103000"/>
+              </a:schemeClr>
+            </a:gs>
+            <a:gs pos="100000">
+              <a:schemeClr val="phClr">
+                <a:shade val="63000"/>
+                <a:satMod val="120000"/>
+              </a:schemeClr>
+            </a:gs>
+          </a:gsLst>
+          <a:lin ang="5400000" scaled="0"/>
+        </a:gradFill>
+      </a:bgFillStyleLst>
+    </a:fmtScheme>
+  </a:themeElements>
+  <a:objectDefaults>
+    <a:lnDef>
+      <a:spPr/>
+      <a:bodyPr/>
+      <a:lstStyle/>
+      <a:style>
+        <a:lnRef idx="2">
+          <a:schemeClr val="accent1"/>
+        </a:lnRef>
+        <a:fillRef idx="0">
+          <a:schemeClr val="accent1"/>
+        </a:fillRef>
+        <a:effectRef idx="1">
+          <a:schemeClr val="accent1"/>
+        </a:effectRef>
+        <a:fontRef idx="minor">
+          <a:schemeClr val="tx1"/>
+        </a:fontRef>
+      </a:style>
+    </a:lnDef>
+  </a:objectDefaults>
+  <a:extraClrSchemeLst/>
+  <a:extLst>
+    <a:ext uri="{05A4C25C-085E-4340-85A3-A5531E510DB2}">
+      <thm15:themeFamily xmlns:thm15="http://schemas.microsoft.com/office/thememl/2012/main" name="Office Theme" id="{2E142A2C-CD16-42D6-873A-C26D2A0506FA}" vid="{1BDDFF52-6CD6-40A5-AB3C-68EB2F1E4D0A}"/>
+    </a:ext>
+  </a:extLst>
+</a:theme>
 </file>
--- a/business/CareSignal_Pitch_Deck.pptx
+++ b/business/CareSignal_Pitch_Deck.pptx
@@ -4,9 +4,6 @@
   <p:sldMasterIdLst>
     <p:sldMasterId id="2147483648" r:id="rId1"/>
   </p:sldMasterIdLst>
-  <p:notesMasterIdLst>
-    <p:notesMasterId r:id="rId17"/>
-  </p:notesMasterIdLst>
   <p:sldIdLst>
     <p:sldId id="256" r:id="rId2"/>
     <p:sldId id="257" r:id="rId3"/>
@@ -24,6 +21,9 @@
     <p:sldId id="269" r:id="rId15"/>
     <p:sldId id="270" r:id="rId16"/>
   </p:sldIdLst>
+  <p:notesMasterIdLst>
+    <p:notesMasterId r:id="rId17"/>
+  </p:notesMasterIdLst>
   <p:sldSz cx="12192000" cy="6858000"/>
   <p:notesSz cx="6858000" cy="12192000"/>
   <p:defaultTextStyle>
@@ -118,11 +118,6 @@
       </a:defRPr>
     </a:lvl9pPr>
   </p:defaultTextStyle>
-  <p:extLst>
-    <p:ext uri="{EFAFB233-063F-42B5-8137-9DF3F51BA10A}">
-      <p15:sldGuideLst xmlns:p15="http://schemas.microsoft.com/office/powerpoint/2012/main"/>
-    </p:ext>
-  </p:extLst>
 </p:presentation>
 </file>
 
@@ -148,10 +143,234 @@
           <a:chExt cx="0" cy="0"/>
         </a:xfrm>
       </p:grpSpPr>
+      <p:sp>
+        <p:nvSpPr>
+          <p:cNvPr id="2" name="Header Placeholder 1"/>
+          <p:cNvSpPr>
+            <a:spLocks noGrp="1"/>
+          </p:cNvSpPr>
+          <p:nvPr>
+            <p:ph type="hdr" sz="quarter"/>
+          </p:nvPr>
+        </p:nvSpPr>
+        <p:spPr>
+          <a:xfrm>
+            <a:off x="0" y="0"/>
+            <a:ext cx="2971800" cy="458788"/>
+          </a:xfrm>
+          <a:prstGeom prst="rect">
+            <a:avLst/>
+          </a:prstGeom>
+        </p:spPr>
+        <p:txBody>
+          <a:bodyPr vert="horz" lIns="91440" tIns="45720" rIns="91440" bIns="45720" rtlCol="0"/>
+          <a:lstStyle>
+            <a:lvl1pPr algn="l">
+              <a:defRPr sz="1200"/>
+            </a:lvl1pPr>
+          </a:lstStyle>
+          <a:p>
+            <a:endParaRPr lang="en-US"/>
+          </a:p>
+        </p:txBody>
+      </p:sp>
+      <p:sp>
+        <p:nvSpPr>
+          <p:cNvPr id="3" name="Date Placeholder 2"/>
+          <p:cNvSpPr>
+            <a:spLocks noGrp="1"/>
+          </p:cNvSpPr>
+          <p:nvPr>
+            <p:ph type="dt" idx="1"/>
+          </p:nvPr>
+        </p:nvSpPr>
+        <p:spPr>
+          <a:xfrm>
+            <a:off x="3884613" y="0"/>
+            <a:ext cx="2971800" cy="458788"/>
+          </a:xfrm>
+          <a:prstGeom prst="rect">
+            <a:avLst/>
+          </a:prstGeom>
+        </p:spPr>
+        <p:txBody>
+          <a:bodyPr vert="horz" lIns="91440" tIns="45720" rIns="91440" bIns="45720" rtlCol="0"/>
+          <a:lstStyle>
+            <a:lvl1pPr algn="r">
+              <a:defRPr sz="1200"/>
+            </a:lvl1pPr>
+          </a:lstStyle>
+          <a:p>
+            <a:fld id="{5282F153-3F37-0F45-9E97-73ACFA13230C}" type="datetimeFigureOut">
+              <a:rPr lang="en-US"/>
+              <a:t>7/23/19</a:t>
+            </a:fld>
+            <a:endParaRPr lang="en-US"/>
+          </a:p>
+        </p:txBody>
+      </p:sp>
+      <p:sp>
+        <p:nvSpPr>
+          <p:cNvPr id="4" name="Slide Image Placeholder 3"/>
+          <p:cNvSpPr>
+            <a:spLocks noGrp="1" noRot="1" noChangeAspect="1"/>
+          </p:cNvSpPr>
+          <p:nvPr>
+            <p:ph type="sldImg" idx="2"/>
+          </p:nvPr>
+        </p:nvSpPr>
+        <p:spPr>
+          <a:xfrm>
+            <a:off x="685800" y="1143000"/>
+            <a:ext cx="5486400" cy="3086100"/>
+          </a:xfrm>
+          <a:prstGeom prst="rect">
+            <a:avLst/>
+          </a:prstGeom>
+          <a:noFill/>
+          <a:ln w="12700">
+            <a:solidFill>
+              <a:prstClr val="black"/>
+            </a:solidFill>
+          </a:ln>
+        </p:spPr>
+        <p:txBody>
+          <a:bodyPr vert="horz" lIns="91440" tIns="45720" rIns="91440" bIns="45720" rtlCol="0" anchor="ctr"/>
+          <a:lstStyle/>
+          <a:p>
+            <a:endParaRPr lang="en-US"/>
+          </a:p>
+        </p:txBody>
+      </p:sp>
+      <p:sp>
+        <p:nvSpPr>
+          <p:cNvPr id="5" name="Notes Placeholder 4"/>
+          <p:cNvSpPr>
+            <a:spLocks noGrp="1"/>
+          </p:cNvSpPr>
+          <p:nvPr>
+            <p:ph type="body" sz="quarter" idx="3"/>
+          </p:nvPr>
+        </p:nvSpPr>
+        <p:spPr>
+          <a:xfrm>
+            <a:off x="685800" y="4400550"/>
+            <a:ext cx="5486400" cy="3600450"/>
+          </a:xfrm>
+          <a:prstGeom prst="rect">
+            <a:avLst/>
+          </a:prstGeom>
+        </p:spPr>
+        <p:txBody>
+          <a:bodyPr vert="horz" lIns="91440" tIns="45720" rIns="91440" bIns="45720" rtlCol="0"/>
+          <a:lstStyle/>
+          <a:p>
+            <a:pPr lvl="0"/>
+            <a:r>
+              <a:rPr lang="en-US"/>
+              <a:t>Click to edit Master text styles</a:t>
+            </a:r>
+          </a:p>
+          <a:p>
+            <a:pPr lvl="1"/>
+            <a:r>
+              <a:rPr lang="en-US"/>
+              <a:t>Second level</a:t>
+            </a:r>
+          </a:p>
+          <a:p>
+            <a:pPr lvl="2"/>
+            <a:r>
+              <a:rPr lang="en-US"/>
+              <a:t>Third level</a:t>
+            </a:r>
+          </a:p>
+          <a:p>
+            <a:pPr lvl="3"/>
+            <a:r>
+              <a:rPr lang="en-US"/>
+              <a:t>Fourth level</a:t>
+            </a:r>
+          </a:p>
+          <a:p>
+            <a:pPr lvl="4"/>
+            <a:r>
+              <a:rPr lang="en-US"/>
+              <a:t>Fifth level</a:t>
+            </a:r>
+          </a:p>
+        </p:txBody>
+      </p:sp>
+      <p:sp>
+        <p:nvSpPr>
+          <p:cNvPr id="6" name="Footer Placeholder 5"/>
+          <p:cNvSpPr>
+            <a:spLocks noGrp="1"/>
+          </p:cNvSpPr>
+          <p:nvPr>
+            <p:ph type="ftr" sz="quarter" idx="4"/>
+          </p:nvPr>
+        </p:nvSpPr>
+        <p:spPr>
+          <a:xfrm>
+            <a:off x="0" y="8685213"/>
+            <a:ext cx="2971800" cy="458787"/>
+          </a:xfrm>
+          <a:prstGeom prst="rect">
+            <a:avLst/>
+          </a:prstGeom>
+        </p:spPr>
+        <p:txBody>
+          <a:bodyPr vert="horz" lIns="91440" tIns="45720" rIns="91440" bIns="45720" rtlCol="0" anchor="b"/>
+          <a:lstStyle>
+            <a:lvl1pPr algn="l">
+              <a:defRPr sz="1200"/>
+            </a:lvl1pPr>
+          </a:lstStyle>
+          <a:p>
+            <a:endParaRPr lang="en-US"/>
+          </a:p>
+        </p:txBody>
+      </p:sp>
+      <p:sp>
+        <p:nvSpPr>
+          <p:cNvPr id="7" name="Slide Number Placeholder 6"/>
+          <p:cNvSpPr>
+            <a:spLocks noGrp="1"/>
+          </p:cNvSpPr>
+          <p:nvPr>
+            <p:ph type="sldNum" sz="quarter" idx="5"/>
+          </p:nvPr>
+        </p:nvSpPr>
+        <p:spPr>
+          <a:xfrm>
+            <a:off x="3884613" y="8685213"/>
+            <a:ext cx="2971800" cy="458787"/>
+          </a:xfrm>
+          <a:prstGeom prst="rect">
+            <a:avLst/>
+          </a:prstGeom>
+        </p:spPr>
+        <p:txBody>
+          <a:bodyPr vert="horz" lIns="91440" tIns="45720" rIns="91440" bIns="45720" rtlCol="0" anchor="b"/>
+          <a:lstStyle>
+            <a:lvl1pPr algn="r">
+              <a:defRPr sz="1200"/>
+            </a:lvl1pPr>
+          </a:lstStyle>
+          <a:p>
+            <a:fld id="{CE5E9CC1-C706-0F49-92D6-E571CC5EEA8F}" type="slidenum">
+              <a:rPr lang="en-US"/>
+              <a:t>‹#›</a:t>
+            </a:fld>
+            <a:endParaRPr lang="en-US"/>
+          </a:p>
+        </p:txBody>
+      </p:sp>
     </p:spTree>
     <p:extLst>
       <p:ext uri="{BB962C8B-B14F-4D97-AF65-F5344CB8AC3E}">
-        <p14:creationId xmlns:p14="http://schemas.microsoft.com/office/powerpoint/2010/main" val="3989164733"/>
+        <p14:creationId xmlns:p14="http://schemas.microsoft.com/office/powerpoint/2010/main" val="1024086991"/>
       </p:ext>
     </p:extLst>
   </p:cSld>
@@ -295,6 +514,10 @@
           <a:bodyPr/>
           <a:lstStyle/>
           <a:p>
+            <a:r>
+              <a:rPr lang="en-US" dirty="0"/>
+              <a:t/>
+            </a:r>
             <a:endParaRPr lang="en-US" dirty="0"/>
           </a:p>
         </p:txBody>
@@ -379,6 +602,10 @@
           <a:bodyPr/>
           <a:lstStyle/>
           <a:p>
+            <a:r>
+              <a:rPr lang="en-US" dirty="0"/>
+              <a:t/>
+            </a:r>
             <a:endParaRPr lang="en-US" dirty="0"/>
           </a:p>
         </p:txBody>
@@ -463,6 +690,10 @@
           <a:bodyPr/>
           <a:lstStyle/>
           <a:p>
+            <a:r>
+              <a:rPr lang="en-US" dirty="0"/>
+              <a:t/>
+            </a:r>
             <a:endParaRPr lang="en-US" dirty="0"/>
           </a:p>
         </p:txBody>
@@ -547,6 +778,10 @@
           <a:bodyPr/>
           <a:lstStyle/>
           <a:p>
+            <a:r>
+              <a:rPr lang="en-US" dirty="0"/>
+              <a:t/>
+            </a:r>
             <a:endParaRPr lang="en-US" dirty="0"/>
           </a:p>
         </p:txBody>
@@ -631,6 +866,10 @@
           <a:bodyPr/>
           <a:lstStyle/>
           <a:p>
+            <a:r>
+              <a:rPr lang="en-US" dirty="0"/>
+              <a:t/>
+            </a:r>
             <a:endParaRPr lang="en-US" dirty="0"/>
           </a:p>
         </p:txBody>
@@ -715,6 +954,10 @@
           <a:bodyPr/>
           <a:lstStyle/>
           <a:p>
+            <a:r>
+              <a:rPr lang="en-US" dirty="0"/>
+              <a:t/>
+            </a:r>
             <a:endParaRPr lang="en-US" dirty="0"/>
           </a:p>
         </p:txBody>
@@ -799,6 +1042,10 @@
           <a:bodyPr/>
           <a:lstStyle/>
           <a:p>
+            <a:r>
+              <a:rPr lang="en-US" dirty="0"/>
+              <a:t/>
+            </a:r>
             <a:endParaRPr lang="en-US" dirty="0"/>
           </a:p>
         </p:txBody>
@@ -883,6 +1130,10 @@
           <a:bodyPr/>
           <a:lstStyle/>
           <a:p>
+            <a:r>
+              <a:rPr lang="en-US" dirty="0"/>
+              <a:t/>
+            </a:r>
             <a:endParaRPr lang="en-US" dirty="0"/>
           </a:p>
         </p:txBody>
@@ -967,6 +1218,10 @@
           <a:bodyPr/>
           <a:lstStyle/>
           <a:p>
+            <a:r>
+              <a:rPr lang="en-US" dirty="0"/>
+              <a:t/>
+            </a:r>
             <a:endParaRPr lang="en-US" dirty="0"/>
           </a:p>
         </p:txBody>
@@ -1051,6 +1306,10 @@
           <a:bodyPr/>
           <a:lstStyle/>
           <a:p>
+            <a:r>
+              <a:rPr lang="en-US" dirty="0"/>
+              <a:t/>
+            </a:r>
             <a:endParaRPr lang="en-US" dirty="0"/>
           </a:p>
         </p:txBody>
@@ -1135,6 +1394,10 @@
           <a:bodyPr/>
           <a:lstStyle/>
           <a:p>
+            <a:r>
+              <a:rPr lang="en-US" dirty="0"/>
+              <a:t/>
+            </a:r>
             <a:endParaRPr lang="en-US" dirty="0"/>
           </a:p>
         </p:txBody>
@@ -1219,6 +1482,10 @@
           <a:bodyPr/>
           <a:lstStyle/>
           <a:p>
+            <a:r>
+              <a:rPr lang="en-US" dirty="0"/>
+              <a:t/>
+            </a:r>
             <a:endParaRPr lang="en-US" dirty="0"/>
           </a:p>
         </p:txBody>
@@ -1303,6 +1570,10 @@
           <a:bodyPr/>
           <a:lstStyle/>
           <a:p>
+            <a:r>
+              <a:rPr lang="en-US" dirty="0"/>
+              <a:t/>
+            </a:r>
             <a:endParaRPr lang="en-US" dirty="0"/>
           </a:p>
         </p:txBody>
@@ -1387,6 +1658,10 @@
           <a:bodyPr/>
           <a:lstStyle/>
           <a:p>
+            <a:r>
+              <a:rPr lang="en-US" dirty="0"/>
+              <a:t/>
+            </a:r>
             <a:endParaRPr lang="en-US" dirty="0"/>
           </a:p>
         </p:txBody>
@@ -1471,6 +1746,10 @@
           <a:bodyPr/>
           <a:lstStyle/>
           <a:p>
+            <a:r>
+              <a:rPr lang="en-US" dirty="0"/>
+              <a:t/>
+            </a:r>
             <a:endParaRPr lang="en-US" dirty="0"/>
           </a:p>
         </p:txBody>
@@ -1544,11 +1823,6 @@
 <file path=ppt/slideMasters/slideMaster1.xml><?xml version="1.0" encoding="utf-8"?>
 <p:sldMaster xmlns:a="http://schemas.openxmlformats.org/drawingml/2006/main" xmlns:r="http://schemas.openxmlformats.org/officeDocument/2006/relationships" xmlns:p="http://schemas.openxmlformats.org/presentationml/2006/main">
   <p:cSld>
-    <p:bg>
-      <p:bgRef idx="1001">
-        <a:schemeClr val="bg1"/>
-      </p:bgRef>
-    </p:bg>
     <p:spTree>
       <p:nvGrpSpPr>
         <p:cNvPr id="1" name=""/>
@@ -1864,13 +2138,6 @@
             <a:prstDash val="solid"/>
           </a:ln>
         </p:spPr>
-        <p:txBody>
-          <a:bodyPr/>
-          <a:lstStyle/>
-          <a:p>
-            <a:endParaRPr lang="en-US"/>
-          </a:p>
-        </p:txBody>
       </p:sp>
       <p:sp>
         <p:nvSpPr>
@@ -1900,13 +2167,6 @@
             <a:prstDash val="solid"/>
           </a:ln>
         </p:spPr>
-        <p:txBody>
-          <a:bodyPr/>
-          <a:lstStyle/>
-          <a:p>
-            <a:endParaRPr lang="en-US"/>
-          </a:p>
-        </p:txBody>
       </p:sp>
       <p:sp>
         <p:nvSpPr>
@@ -1936,13 +2196,6 @@
             <a:prstDash val="solid"/>
           </a:ln>
         </p:spPr>
-        <p:txBody>
-          <a:bodyPr/>
-          <a:lstStyle/>
-          <a:p>
-            <a:endParaRPr lang="en-US"/>
-          </a:p>
-        </p:txBody>
       </p:sp>
       <p:sp>
         <p:nvSpPr>
@@ -1972,13 +2225,6 @@
             <a:prstDash val="solid"/>
           </a:ln>
         </p:spPr>
-        <p:txBody>
-          <a:bodyPr/>
-          <a:lstStyle/>
-          <a:p>
-            <a:endParaRPr lang="en-US"/>
-          </a:p>
-        </p:txBody>
       </p:sp>
       <p:sp>
         <p:nvSpPr>
@@ -2004,13 +2250,6 @@
             <a:prstDash val="solid"/>
           </a:ln>
         </p:spPr>
-        <p:txBody>
-          <a:bodyPr/>
-          <a:lstStyle/>
-          <a:p>
-            <a:endParaRPr lang="en-US"/>
-          </a:p>
-        </p:txBody>
       </p:sp>
       <p:sp>
         <p:nvSpPr>
@@ -2036,13 +2275,6 @@
             <a:prstDash val="solid"/>
           </a:ln>
         </p:spPr>
-        <p:txBody>
-          <a:bodyPr/>
-          <a:lstStyle/>
-          <a:p>
-            <a:endParaRPr lang="en-US"/>
-          </a:p>
-        </p:txBody>
       </p:sp>
       <p:sp>
         <p:nvSpPr>
@@ -2065,7 +2297,7 @@
           <a:bodyPr wrap="square" rtlCol="0" anchor="ctr"/>
           <a:lstStyle/>
           <a:p>
-            <a:pPr marL="0" indent="0" algn="ctr">
+            <a:pPr algn="ctr" indent="0" marL="0">
               <a:buNone/>
             </a:pPr>
             <a:r>
@@ -2101,7 +2333,7 @@
           <a:bodyPr wrap="square" rtlCol="0" anchor="ctr"/>
           <a:lstStyle/>
           <a:p>
-            <a:pPr marL="0" indent="0">
+            <a:pPr indent="0" marL="0">
               <a:buNone/>
             </a:pPr>
             <a:r>
@@ -2140,7 +2372,7 @@
           <a:bodyPr wrap="square" rtlCol="0" anchor="ctr"/>
           <a:lstStyle/>
           <a:p>
-            <a:pPr marL="0" indent="0">
+            <a:pPr indent="0" marL="0">
               <a:buNone/>
             </a:pPr>
             <a:r>
@@ -2180,13 +2412,6 @@
             <a:prstDash val="solid"/>
           </a:ln>
         </p:spPr>
-        <p:txBody>
-          <a:bodyPr/>
-          <a:lstStyle/>
-          <a:p>
-            <a:endParaRPr lang="en-US"/>
-          </a:p>
-        </p:txBody>
       </p:sp>
       <p:sp>
         <p:nvSpPr>
@@ -2214,13 +2439,6 @@
             <a:prstDash val="solid"/>
           </a:ln>
         </p:spPr>
-        <p:txBody>
-          <a:bodyPr/>
-          <a:lstStyle/>
-          <a:p>
-            <a:endParaRPr lang="en-US"/>
-          </a:p>
-        </p:txBody>
       </p:sp>
       <p:sp>
         <p:nvSpPr>
@@ -2243,7 +2461,7 @@
           <a:bodyPr wrap="square" rtlCol="0" anchor="ctr"/>
           <a:lstStyle/>
           <a:p>
-            <a:pPr marL="0" indent="0" algn="ctr">
+            <a:pPr algn="ctr" indent="0" marL="0">
               <a:buNone/>
             </a:pPr>
             <a:r>
@@ -2279,7 +2497,7 @@
           <a:bodyPr wrap="square" rtlCol="0" anchor="ctr"/>
           <a:lstStyle/>
           <a:p>
-            <a:pPr marL="0" indent="0" algn="ctr">
+            <a:pPr algn="ctr" indent="0" marL="0">
               <a:buNone/>
             </a:pPr>
             <a:r>
@@ -2296,7 +2514,7 @@
             <a:endParaRPr lang="en-US" sz="1300" dirty="0"/>
           </a:p>
           <a:p>
-            <a:pPr marL="0" indent="0" algn="ctr">
+            <a:pPr algn="ctr" indent="0" marL="0">
               <a:buNone/>
             </a:pPr>
             <a:r>
@@ -2313,7 +2531,7 @@
             <a:endParaRPr lang="en-US" sz="1300" dirty="0"/>
           </a:p>
           <a:p>
-            <a:pPr marL="0" indent="0" algn="ctr">
+            <a:pPr algn="ctr" indent="0" marL="0">
               <a:buNone/>
             </a:pPr>
             <a:r>
@@ -2357,13 +2575,6 @@
             <a:prstDash val="solid"/>
           </a:ln>
         </p:spPr>
-        <p:txBody>
-          <a:bodyPr/>
-          <a:lstStyle/>
-          <a:p>
-            <a:endParaRPr lang="en-US"/>
-          </a:p>
-        </p:txBody>
       </p:sp>
       <p:sp>
         <p:nvSpPr>
@@ -2386,7 +2597,7 @@
           <a:bodyPr wrap="square" rtlCol="0" anchor="ctr"/>
           <a:lstStyle/>
           <a:p>
-            <a:pPr marL="0" indent="0" algn="ctr">
+            <a:pPr algn="ctr" indent="0" marL="0">
               <a:buNone/>
             </a:pPr>
             <a:r>
@@ -2422,7 +2633,7 @@
           <a:bodyPr wrap="square" rtlCol="0" anchor="ctr"/>
           <a:lstStyle/>
           <a:p>
-            <a:pPr marL="0" indent="0" algn="ctr">
+            <a:pPr algn="ctr" indent="0" marL="0">
               <a:buNone/>
             </a:pPr>
             <a:r>
@@ -2439,7 +2650,7 @@
             <a:endParaRPr lang="en-US" sz="1300" dirty="0"/>
           </a:p>
           <a:p>
-            <a:pPr marL="0" indent="0" algn="ctr">
+            <a:pPr algn="ctr" indent="0" marL="0">
               <a:buNone/>
             </a:pPr>
             <a:r>
@@ -2456,7 +2667,7 @@
             <a:endParaRPr lang="en-US" sz="1300" dirty="0"/>
           </a:p>
           <a:p>
-            <a:pPr marL="0" indent="0" algn="ctr">
+            <a:pPr algn="ctr" indent="0" marL="0">
               <a:buNone/>
             </a:pPr>
             <a:r>
@@ -2500,13 +2711,6 @@
             <a:prstDash val="solid"/>
           </a:ln>
         </p:spPr>
-        <p:txBody>
-          <a:bodyPr/>
-          <a:lstStyle/>
-          <a:p>
-            <a:endParaRPr lang="en-US"/>
-          </a:p>
-        </p:txBody>
       </p:sp>
       <p:sp>
         <p:nvSpPr>
@@ -2529,7 +2733,7 @@
           <a:bodyPr wrap="square" rtlCol="0" anchor="ctr"/>
           <a:lstStyle/>
           <a:p>
-            <a:pPr marL="0" indent="0" algn="ctr">
+            <a:pPr algn="ctr" indent="0" marL="0">
               <a:buNone/>
             </a:pPr>
             <a:r>
@@ -2565,7 +2769,7 @@
           <a:bodyPr wrap="square" rtlCol="0" anchor="ctr"/>
           <a:lstStyle/>
           <a:p>
-            <a:pPr marL="0" indent="0" algn="ctr">
+            <a:pPr algn="ctr" indent="0" marL="0">
               <a:buNone/>
             </a:pPr>
             <a:r>
@@ -2582,7 +2786,7 @@
             <a:endParaRPr lang="en-US" sz="1300" dirty="0"/>
           </a:p>
           <a:p>
-            <a:pPr marL="0" indent="0" algn="ctr">
+            <a:pPr algn="ctr" indent="0" marL="0">
               <a:buNone/>
             </a:pPr>
             <a:r>
@@ -2599,7 +2803,7 @@
             <a:endParaRPr lang="en-US" sz="1300" dirty="0"/>
           </a:p>
           <a:p>
-            <a:pPr marL="0" indent="0" algn="ctr">
+            <a:pPr algn="ctr" indent="0" marL="0">
               <a:buNone/>
             </a:pPr>
             <a:r>
@@ -2638,7 +2842,7 @@
           <a:bodyPr wrap="square" rtlCol="0" anchor="ctr"/>
           <a:lstStyle/>
           <a:p>
-            <a:pPr marL="0" indent="0" algn="ctr">
+            <a:pPr algn="ctr" indent="0" marL="0">
               <a:buNone/>
             </a:pPr>
             <a:r>
@@ -2677,7 +2881,7 @@
           <a:bodyPr wrap="square" rtlCol="0" anchor="ctr"/>
           <a:lstStyle/>
           <a:p>
-            <a:pPr marL="0" indent="0" algn="ctr">
+            <a:pPr algn="ctr" indent="0" marL="0">
               <a:buNone/>
             </a:pPr>
             <a:r>
@@ -2744,13 +2948,6 @@
             <a:prstDash val="solid"/>
           </a:ln>
         </p:spPr>
-        <p:txBody>
-          <a:bodyPr/>
-          <a:lstStyle/>
-          <a:p>
-            <a:endParaRPr lang="en-US"/>
-          </a:p>
-        </p:txBody>
       </p:sp>
       <p:sp>
         <p:nvSpPr>
@@ -2780,13 +2977,6 @@
             <a:prstDash val="solid"/>
           </a:ln>
         </p:spPr>
-        <p:txBody>
-          <a:bodyPr/>
-          <a:lstStyle/>
-          <a:p>
-            <a:endParaRPr lang="en-US"/>
-          </a:p>
-        </p:txBody>
       </p:sp>
       <p:sp>
         <p:nvSpPr>
@@ -2816,13 +3006,6 @@
             <a:prstDash val="solid"/>
           </a:ln>
         </p:spPr>
-        <p:txBody>
-          <a:bodyPr/>
-          <a:lstStyle/>
-          <a:p>
-            <a:endParaRPr lang="en-US"/>
-          </a:p>
-        </p:txBody>
       </p:sp>
       <p:sp>
         <p:nvSpPr>
@@ -2848,13 +3031,6 @@
             <a:prstDash val="solid"/>
           </a:ln>
         </p:spPr>
-        <p:txBody>
-          <a:bodyPr/>
-          <a:lstStyle/>
-          <a:p>
-            <a:endParaRPr lang="en-US"/>
-          </a:p>
-        </p:txBody>
       </p:sp>
       <p:sp>
         <p:nvSpPr>
@@ -2880,13 +3056,6 @@
             <a:prstDash val="solid"/>
           </a:ln>
         </p:spPr>
-        <p:txBody>
-          <a:bodyPr/>
-          <a:lstStyle/>
-          <a:p>
-            <a:endParaRPr lang="en-US"/>
-          </a:p>
-        </p:txBody>
       </p:sp>
       <p:sp>
         <p:nvSpPr>
@@ -2909,7 +3078,7 @@
           <a:bodyPr wrap="square" rtlCol="0" anchor="ctr"/>
           <a:lstStyle/>
           <a:p>
-            <a:pPr marL="0" indent="0">
+            <a:pPr indent="0" marL="0">
               <a:buNone/>
             </a:pPr>
             <a:r>
@@ -2948,7 +3117,7 @@
           <a:bodyPr wrap="square" rtlCol="0" anchor="ctr"/>
           <a:lstStyle/>
           <a:p>
-            <a:pPr marL="0" indent="0">
+            <a:pPr indent="0" marL="0">
               <a:buNone/>
             </a:pPr>
             <a:r>
@@ -2988,13 +3157,6 @@
             <a:prstDash val="solid"/>
           </a:ln>
         </p:spPr>
-        <p:txBody>
-          <a:bodyPr/>
-          <a:lstStyle/>
-          <a:p>
-            <a:endParaRPr lang="en-US"/>
-          </a:p>
-        </p:txBody>
       </p:sp>
       <p:sp>
         <p:nvSpPr>
@@ -3022,13 +3184,6 @@
             <a:prstDash val="solid"/>
           </a:ln>
         </p:spPr>
-        <p:txBody>
-          <a:bodyPr/>
-          <a:lstStyle/>
-          <a:p>
-            <a:endParaRPr lang="en-US"/>
-          </a:p>
-        </p:txBody>
       </p:sp>
       <p:sp>
         <p:nvSpPr>
@@ -3051,7 +3206,7 @@
           <a:bodyPr wrap="square" rtlCol="0" anchor="ctr"/>
           <a:lstStyle/>
           <a:p>
-            <a:pPr marL="0" indent="0" algn="ctr">
+            <a:pPr algn="ctr" indent="0" marL="0">
               <a:buNone/>
             </a:pPr>
             <a:r>
@@ -3087,7 +3242,7 @@
           <a:bodyPr wrap="square" rtlCol="0" anchor="ctr"/>
           <a:lstStyle/>
           <a:p>
-            <a:pPr marL="0" indent="0" algn="ctr">
+            <a:pPr algn="ctr" indent="0" marL="0">
               <a:buNone/>
             </a:pPr>
             <a:r>
@@ -3126,7 +3281,7 @@
           <a:bodyPr wrap="square" rtlCol="0" anchor="ctr"/>
           <a:lstStyle/>
           <a:p>
-            <a:pPr marL="0" indent="0" algn="ctr">
+            <a:pPr algn="ctr" indent="0" marL="0">
               <a:buNone/>
             </a:pPr>
             <a:r>
@@ -3143,7 +3298,7 @@
             <a:endParaRPr lang="en-US" sz="1050" dirty="0"/>
           </a:p>
           <a:p>
-            <a:pPr marL="0" indent="0" algn="ctr">
+            <a:pPr algn="ctr" indent="0" marL="0">
               <a:buNone/>
             </a:pPr>
             <a:r>
@@ -3187,13 +3342,6 @@
             <a:prstDash val="solid"/>
           </a:ln>
         </p:spPr>
-        <p:txBody>
-          <a:bodyPr/>
-          <a:lstStyle/>
-          <a:p>
-            <a:endParaRPr lang="en-US"/>
-          </a:p>
-        </p:txBody>
       </p:sp>
       <p:sp>
         <p:nvSpPr>
@@ -3216,7 +3364,7 @@
           <a:bodyPr wrap="square" rtlCol="0" anchor="ctr"/>
           <a:lstStyle/>
           <a:p>
-            <a:pPr marL="0" indent="0" algn="ctr">
+            <a:pPr algn="ctr" indent="0" marL="0">
               <a:buNone/>
             </a:pPr>
             <a:r>
@@ -3252,7 +3400,7 @@
           <a:bodyPr wrap="square" rtlCol="0" anchor="ctr"/>
           <a:lstStyle/>
           <a:p>
-            <a:pPr marL="0" indent="0" algn="ctr">
+            <a:pPr algn="ctr" indent="0" marL="0">
               <a:buNone/>
             </a:pPr>
             <a:r>
@@ -3291,7 +3439,7 @@
           <a:bodyPr wrap="square" rtlCol="0" anchor="ctr"/>
           <a:lstStyle/>
           <a:p>
-            <a:pPr marL="0" indent="0" algn="ctr">
+            <a:pPr algn="ctr" indent="0" marL="0">
               <a:buNone/>
             </a:pPr>
             <a:r>
@@ -3308,7 +3456,7 @@
             <a:endParaRPr lang="en-US" sz="1050" dirty="0"/>
           </a:p>
           <a:p>
-            <a:pPr marL="0" indent="0" algn="ctr">
+            <a:pPr algn="ctr" indent="0" marL="0">
               <a:buNone/>
             </a:pPr>
             <a:r>
@@ -3352,13 +3500,6 @@
             <a:prstDash val="solid"/>
           </a:ln>
         </p:spPr>
-        <p:txBody>
-          <a:bodyPr/>
-          <a:lstStyle/>
-          <a:p>
-            <a:endParaRPr lang="en-US"/>
-          </a:p>
-        </p:txBody>
       </p:sp>
       <p:sp>
         <p:nvSpPr>
@@ -3381,7 +3522,7 @@
           <a:bodyPr wrap="square" rtlCol="0" anchor="ctr"/>
           <a:lstStyle/>
           <a:p>
-            <a:pPr marL="0" indent="0" algn="ctr">
+            <a:pPr algn="ctr" indent="0" marL="0">
               <a:buNone/>
             </a:pPr>
             <a:r>
@@ -3417,7 +3558,7 @@
           <a:bodyPr wrap="square" rtlCol="0" anchor="ctr"/>
           <a:lstStyle/>
           <a:p>
-            <a:pPr marL="0" indent="0" algn="ctr">
+            <a:pPr algn="ctr" indent="0" marL="0">
               <a:buNone/>
             </a:pPr>
             <a:r>
@@ -3456,7 +3597,7 @@
           <a:bodyPr wrap="square" rtlCol="0" anchor="ctr"/>
           <a:lstStyle/>
           <a:p>
-            <a:pPr marL="0" indent="0" algn="ctr">
+            <a:pPr algn="ctr" indent="0" marL="0">
               <a:buNone/>
             </a:pPr>
             <a:r>
@@ -3473,7 +3614,7 @@
             <a:endParaRPr lang="en-US" sz="1050" dirty="0"/>
           </a:p>
           <a:p>
-            <a:pPr marL="0" indent="0" algn="ctr">
+            <a:pPr algn="ctr" indent="0" marL="0">
               <a:buNone/>
             </a:pPr>
             <a:r>
@@ -3517,13 +3658,6 @@
             <a:prstDash val="solid"/>
           </a:ln>
         </p:spPr>
-        <p:txBody>
-          <a:bodyPr/>
-          <a:lstStyle/>
-          <a:p>
-            <a:endParaRPr lang="en-US"/>
-          </a:p>
-        </p:txBody>
       </p:sp>
       <p:sp>
         <p:nvSpPr>
@@ -3546,7 +3680,7 @@
           <a:bodyPr wrap="square" rtlCol="0" anchor="ctr"/>
           <a:lstStyle/>
           <a:p>
-            <a:pPr marL="0" indent="0" algn="ctr">
+            <a:pPr algn="ctr" indent="0" marL="0">
               <a:buNone/>
             </a:pPr>
             <a:r>
@@ -3582,7 +3716,7 @@
           <a:bodyPr wrap="square" rtlCol="0" anchor="ctr"/>
           <a:lstStyle/>
           <a:p>
-            <a:pPr marL="0" indent="0" algn="ctr">
+            <a:pPr algn="ctr" indent="0" marL="0">
               <a:buNone/>
             </a:pPr>
             <a:r>
@@ -3621,7 +3755,7 @@
           <a:bodyPr wrap="square" rtlCol="0" anchor="ctr"/>
           <a:lstStyle/>
           <a:p>
-            <a:pPr marL="0" indent="0" algn="ctr">
+            <a:pPr algn="ctr" indent="0" marL="0">
               <a:buNone/>
             </a:pPr>
             <a:r>
@@ -3638,7 +3772,7 @@
             <a:endParaRPr lang="en-US" sz="1050" dirty="0"/>
           </a:p>
           <a:p>
-            <a:pPr marL="0" indent="0" algn="ctr">
+            <a:pPr algn="ctr" indent="0" marL="0">
               <a:buNone/>
             </a:pPr>
             <a:r>
@@ -3682,13 +3816,6 @@
             <a:prstDash val="solid"/>
           </a:ln>
         </p:spPr>
-        <p:txBody>
-          <a:bodyPr/>
-          <a:lstStyle/>
-          <a:p>
-            <a:endParaRPr lang="en-US"/>
-          </a:p>
-        </p:txBody>
       </p:sp>
       <p:sp>
         <p:nvSpPr>
@@ -3711,7 +3838,7 @@
           <a:bodyPr wrap="square" rtlCol="0" anchor="ctr"/>
           <a:lstStyle/>
           <a:p>
-            <a:pPr marL="0" indent="0" algn="ctr">
+            <a:pPr algn="ctr" indent="0" marL="0">
               <a:buNone/>
             </a:pPr>
             <a:r>
@@ -3747,7 +3874,7 @@
           <a:bodyPr wrap="square" rtlCol="0" anchor="ctr"/>
           <a:lstStyle/>
           <a:p>
-            <a:pPr marL="0" indent="0" algn="ctr">
+            <a:pPr algn="ctr" indent="0" marL="0">
               <a:buNone/>
             </a:pPr>
             <a:r>
@@ -3786,7 +3913,7 @@
           <a:bodyPr wrap="square" rtlCol="0" anchor="ctr"/>
           <a:lstStyle/>
           <a:p>
-            <a:pPr marL="0" indent="0" algn="ctr">
+            <a:pPr algn="ctr" indent="0" marL="0">
               <a:buNone/>
             </a:pPr>
             <a:r>
@@ -3803,7 +3930,7 @@
             <a:endParaRPr lang="en-US" sz="1000" dirty="0"/>
           </a:p>
           <a:p>
-            <a:pPr marL="0" indent="0" algn="ctr">
+            <a:pPr algn="ctr" indent="0" marL="0">
               <a:buNone/>
             </a:pPr>
             <a:r>
@@ -3847,13 +3974,6 @@
             <a:prstDash val="solid"/>
           </a:ln>
         </p:spPr>
-        <p:txBody>
-          <a:bodyPr/>
-          <a:lstStyle/>
-          <a:p>
-            <a:endParaRPr lang="en-US"/>
-          </a:p>
-        </p:txBody>
       </p:sp>
       <p:sp>
         <p:nvSpPr>
@@ -3876,7 +3996,7 @@
           <a:bodyPr wrap="square" rtlCol="0" anchor="ctr"/>
           <a:lstStyle/>
           <a:p>
-            <a:pPr marL="0" indent="0" algn="ctr">
+            <a:pPr algn="ctr" indent="0" marL="0">
               <a:buNone/>
             </a:pPr>
             <a:r>
@@ -3912,7 +4032,7 @@
           <a:bodyPr wrap="square" rtlCol="0" anchor="ctr"/>
           <a:lstStyle/>
           <a:p>
-            <a:pPr marL="0" indent="0" algn="ctr">
+            <a:pPr algn="ctr" indent="0" marL="0">
               <a:buNone/>
             </a:pPr>
             <a:r>
@@ -3951,7 +4071,7 @@
           <a:bodyPr wrap="square" rtlCol="0" anchor="ctr"/>
           <a:lstStyle/>
           <a:p>
-            <a:pPr marL="0" indent="0" algn="ctr">
+            <a:pPr algn="ctr" indent="0" marL="0">
               <a:buNone/>
             </a:pPr>
             <a:r>
@@ -3968,7 +4088,7 @@
             <a:endParaRPr lang="en-US" sz="1000" dirty="0"/>
           </a:p>
           <a:p>
-            <a:pPr marL="0" indent="0" algn="ctr">
+            <a:pPr algn="ctr" indent="0" marL="0">
               <a:buNone/>
             </a:pPr>
             <a:r>
@@ -4012,13 +4132,6 @@
             <a:prstDash val="solid"/>
           </a:ln>
         </p:spPr>
-        <p:txBody>
-          <a:bodyPr/>
-          <a:lstStyle/>
-          <a:p>
-            <a:endParaRPr lang="en-US"/>
-          </a:p>
-        </p:txBody>
       </p:sp>
       <p:sp>
         <p:nvSpPr>
@@ -4041,7 +4154,7 @@
           <a:bodyPr wrap="square" rtlCol="0" anchor="ctr"/>
           <a:lstStyle/>
           <a:p>
-            <a:pPr marL="0" indent="0" algn="ctr">
+            <a:pPr algn="ctr" indent="0" marL="0">
               <a:buNone/>
             </a:pPr>
             <a:r>
@@ -4077,7 +4190,7 @@
           <a:bodyPr wrap="square" rtlCol="0" anchor="ctr"/>
           <a:lstStyle/>
           <a:p>
-            <a:pPr marL="0" indent="0" algn="ctr">
+            <a:pPr algn="ctr" indent="0" marL="0">
               <a:buNone/>
             </a:pPr>
             <a:r>
@@ -4116,7 +4229,7 @@
           <a:bodyPr wrap="square" rtlCol="0" anchor="ctr"/>
           <a:lstStyle/>
           <a:p>
-            <a:pPr marL="0" indent="0" algn="ctr">
+            <a:pPr algn="ctr" indent="0" marL="0">
               <a:buNone/>
             </a:pPr>
             <a:r>
@@ -4133,7 +4246,7 @@
             <a:endParaRPr lang="en-US" sz="1000" dirty="0"/>
           </a:p>
           <a:p>
-            <a:pPr marL="0" indent="0" algn="ctr">
+            <a:pPr algn="ctr" indent="0" marL="0">
               <a:buNone/>
             </a:pPr>
             <a:r>
@@ -4177,13 +4290,6 @@
             <a:prstDash val="solid"/>
           </a:ln>
         </p:spPr>
-        <p:txBody>
-          <a:bodyPr/>
-          <a:lstStyle/>
-          <a:p>
-            <a:endParaRPr lang="en-US"/>
-          </a:p>
-        </p:txBody>
       </p:sp>
       <p:sp>
         <p:nvSpPr>
@@ -4206,7 +4312,7 @@
           <a:bodyPr wrap="square" rtlCol="0" anchor="ctr"/>
           <a:lstStyle/>
           <a:p>
-            <a:pPr marL="0" indent="0" algn="ctr">
+            <a:pPr algn="ctr" indent="0" marL="0">
               <a:buNone/>
             </a:pPr>
             <a:r>
@@ -4242,7 +4348,7 @@
           <a:bodyPr wrap="square" rtlCol="0" anchor="ctr"/>
           <a:lstStyle/>
           <a:p>
-            <a:pPr marL="0" indent="0" algn="ctr">
+            <a:pPr algn="ctr" indent="0" marL="0">
               <a:buNone/>
             </a:pPr>
             <a:r>
@@ -4281,7 +4387,7 @@
           <a:bodyPr wrap="square" rtlCol="0" anchor="ctr"/>
           <a:lstStyle/>
           <a:p>
-            <a:pPr marL="0" indent="0" algn="ctr">
+            <a:pPr algn="ctr" indent="0" marL="0">
               <a:buNone/>
             </a:pPr>
             <a:r>
@@ -4298,7 +4404,7 @@
             <a:endParaRPr lang="en-US" sz="1000" dirty="0"/>
           </a:p>
           <a:p>
-            <a:pPr marL="0" indent="0" algn="ctr">
+            <a:pPr algn="ctr" indent="0" marL="0">
               <a:buNone/>
             </a:pPr>
             <a:r>
@@ -4337,7 +4443,7 @@
           <a:bodyPr wrap="square" rtlCol="0" anchor="ctr"/>
           <a:lstStyle/>
           <a:p>
-            <a:pPr marL="0" indent="0" algn="ctr">
+            <a:pPr algn="ctr" indent="0" marL="0">
               <a:buNone/>
             </a:pPr>
             <a:r>
@@ -4404,13 +4510,6 @@
             <a:prstDash val="solid"/>
           </a:ln>
         </p:spPr>
-        <p:txBody>
-          <a:bodyPr/>
-          <a:lstStyle/>
-          <a:p>
-            <a:endParaRPr lang="en-US"/>
-          </a:p>
-        </p:txBody>
       </p:sp>
       <p:sp>
         <p:nvSpPr>
@@ -4440,13 +4539,6 @@
             <a:prstDash val="solid"/>
           </a:ln>
         </p:spPr>
-        <p:txBody>
-          <a:bodyPr/>
-          <a:lstStyle/>
-          <a:p>
-            <a:endParaRPr lang="en-US"/>
-          </a:p>
-        </p:txBody>
       </p:sp>
       <p:sp>
         <p:nvSpPr>
@@ -4476,13 +4568,6 @@
             <a:prstDash val="solid"/>
           </a:ln>
         </p:spPr>
-        <p:txBody>
-          <a:bodyPr/>
-          <a:lstStyle/>
-          <a:p>
-            <a:endParaRPr lang="en-US"/>
-          </a:p>
-        </p:txBody>
       </p:sp>
       <p:sp>
         <p:nvSpPr>
@@ -4506,13 +4591,6 @@
             <a:prstDash val="solid"/>
           </a:ln>
         </p:spPr>
-        <p:txBody>
-          <a:bodyPr/>
-          <a:lstStyle/>
-          <a:p>
-            <a:endParaRPr lang="en-US"/>
-          </a:p>
-        </p:txBody>
       </p:sp>
       <p:sp>
         <p:nvSpPr>
@@ -4538,13 +4616,6 @@
             <a:prstDash val="solid"/>
           </a:ln>
         </p:spPr>
-        <p:txBody>
-          <a:bodyPr/>
-          <a:lstStyle/>
-          <a:p>
-            <a:endParaRPr lang="en-US"/>
-          </a:p>
-        </p:txBody>
       </p:sp>
       <p:sp>
         <p:nvSpPr>
@@ -4570,13 +4641,6 @@
             <a:prstDash val="solid"/>
           </a:ln>
         </p:spPr>
-        <p:txBody>
-          <a:bodyPr/>
-          <a:lstStyle/>
-          <a:p>
-            <a:endParaRPr lang="en-US"/>
-          </a:p>
-        </p:txBody>
       </p:sp>
       <p:sp>
         <p:nvSpPr>
@@ -4599,7 +4663,7 @@
           <a:bodyPr wrap="square" rtlCol="0" anchor="ctr"/>
           <a:lstStyle/>
           <a:p>
-            <a:pPr marL="0" indent="0">
+            <a:pPr indent="0" marL="0">
               <a:buNone/>
             </a:pPr>
             <a:r>
@@ -4638,7 +4702,7 @@
           <a:bodyPr wrap="square" rtlCol="0" anchor="ctr"/>
           <a:lstStyle/>
           <a:p>
-            <a:pPr marL="0" indent="0">
+            <a:pPr indent="0" marL="0">
               <a:buNone/>
             </a:pPr>
             <a:r>
@@ -4678,13 +4742,6 @@
             <a:prstDash val="solid"/>
           </a:ln>
         </p:spPr>
-        <p:txBody>
-          <a:bodyPr/>
-          <a:lstStyle/>
-          <a:p>
-            <a:endParaRPr lang="en-US"/>
-          </a:p>
-        </p:txBody>
       </p:sp>
       <p:sp>
         <p:nvSpPr>
@@ -4712,13 +4769,6 @@
             <a:prstDash val="solid"/>
           </a:ln>
         </p:spPr>
-        <p:txBody>
-          <a:bodyPr/>
-          <a:lstStyle/>
-          <a:p>
-            <a:endParaRPr lang="en-US"/>
-          </a:p>
-        </p:txBody>
       </p:sp>
       <p:sp>
         <p:nvSpPr>
@@ -4741,7 +4791,7 @@
           <a:bodyPr wrap="square" rtlCol="0" anchor="ctr"/>
           <a:lstStyle/>
           <a:p>
-            <a:pPr marL="0" indent="0" algn="ctr">
+            <a:pPr algn="ctr" indent="0" marL="0">
               <a:buNone/>
             </a:pPr>
             <a:r>
@@ -4780,7 +4830,7 @@
           <a:bodyPr wrap="square" rtlCol="0" anchor="ctr"/>
           <a:lstStyle/>
           <a:p>
-            <a:pPr marL="0" indent="0" algn="ctr">
+            <a:pPr algn="ctr" indent="0" marL="0">
               <a:buNone/>
             </a:pPr>
             <a:r>
@@ -4819,7 +4869,7 @@
           <a:bodyPr wrap="square" rtlCol="0" anchor="ctr"/>
           <a:lstStyle/>
           <a:p>
-            <a:pPr marL="0" indent="0" algn="ctr">
+            <a:pPr algn="ctr" indent="0" marL="0">
               <a:buNone/>
             </a:pPr>
             <a:r>
@@ -4859,13 +4909,6 @@
             <a:prstDash val="solid"/>
           </a:ln>
         </p:spPr>
-        <p:txBody>
-          <a:bodyPr/>
-          <a:lstStyle/>
-          <a:p>
-            <a:endParaRPr lang="en-US"/>
-          </a:p>
-        </p:txBody>
       </p:sp>
       <p:sp>
         <p:nvSpPr>
@@ -4888,7 +4931,7 @@
           <a:bodyPr wrap="square" rtlCol="0" anchor="ctr"/>
           <a:lstStyle/>
           <a:p>
-            <a:pPr marL="0" indent="0" algn="ctr">
+            <a:pPr algn="ctr" indent="0" marL="0">
               <a:buNone/>
             </a:pPr>
             <a:r>
@@ -4927,7 +4970,7 @@
           <a:bodyPr wrap="square" rtlCol="0" anchor="ctr"/>
           <a:lstStyle/>
           <a:p>
-            <a:pPr marL="0" indent="0" algn="ctr">
+            <a:pPr algn="ctr" indent="0" marL="0">
               <a:buNone/>
             </a:pPr>
             <a:r>
@@ -4966,7 +5009,7 @@
           <a:bodyPr wrap="square" rtlCol="0" anchor="ctr"/>
           <a:lstStyle/>
           <a:p>
-            <a:pPr marL="0" indent="0" algn="ctr">
+            <a:pPr algn="ctr" indent="0" marL="0">
               <a:buNone/>
             </a:pPr>
             <a:r>
@@ -5005,7 +5048,7 @@
           <a:bodyPr wrap="square" rtlCol="0" anchor="ctr"/>
           <a:lstStyle/>
           <a:p>
-            <a:pPr marL="0" indent="0" algn="ctr">
+            <a:pPr algn="ctr" indent="0" marL="0">
               <a:buNone/>
             </a:pPr>
             <a:r>
@@ -5049,13 +5092,6 @@
             <a:prstDash val="solid"/>
           </a:ln>
         </p:spPr>
-        <p:txBody>
-          <a:bodyPr/>
-          <a:lstStyle/>
-          <a:p>
-            <a:endParaRPr lang="en-US"/>
-          </a:p>
-        </p:txBody>
       </p:sp>
       <p:sp>
         <p:nvSpPr>
@@ -5078,7 +5114,7 @@
           <a:bodyPr wrap="square" rtlCol="0" anchor="ctr"/>
           <a:lstStyle/>
           <a:p>
-            <a:pPr marL="0" indent="0" algn="ctr">
+            <a:pPr algn="ctr" indent="0" marL="0">
               <a:buNone/>
             </a:pPr>
             <a:r>
@@ -5117,7 +5153,7 @@
           <a:bodyPr wrap="square" rtlCol="0" anchor="ctr"/>
           <a:lstStyle/>
           <a:p>
-            <a:pPr marL="0" indent="0" algn="ctr">
+            <a:pPr algn="ctr" indent="0" marL="0">
               <a:buNone/>
             </a:pPr>
             <a:r>
@@ -5156,7 +5192,7 @@
           <a:bodyPr wrap="square" rtlCol="0" anchor="ctr"/>
           <a:lstStyle/>
           <a:p>
-            <a:pPr marL="0" indent="0" algn="ctr">
+            <a:pPr algn="ctr" indent="0" marL="0">
               <a:buNone/>
             </a:pPr>
             <a:r>
@@ -5196,13 +5232,6 @@
             <a:prstDash val="solid"/>
           </a:ln>
         </p:spPr>
-        <p:txBody>
-          <a:bodyPr/>
-          <a:lstStyle/>
-          <a:p>
-            <a:endParaRPr lang="en-US"/>
-          </a:p>
-        </p:txBody>
       </p:sp>
       <p:sp>
         <p:nvSpPr>
@@ -5225,7 +5254,7 @@
           <a:bodyPr wrap="square" rtlCol="0" anchor="ctr"/>
           <a:lstStyle/>
           <a:p>
-            <a:pPr marL="0" indent="0" algn="ctr">
+            <a:pPr algn="ctr" indent="0" marL="0">
               <a:buNone/>
             </a:pPr>
             <a:r>
@@ -5264,7 +5293,7 @@
           <a:bodyPr wrap="square" rtlCol="0" anchor="ctr"/>
           <a:lstStyle/>
           <a:p>
-            <a:pPr marL="0" indent="0" algn="ctr">
+            <a:pPr algn="ctr" indent="0" marL="0">
               <a:buNone/>
             </a:pPr>
             <a:r>
@@ -5303,7 +5332,7 @@
           <a:bodyPr wrap="square" rtlCol="0" anchor="ctr"/>
           <a:lstStyle/>
           <a:p>
-            <a:pPr marL="0" indent="0" algn="ctr">
+            <a:pPr algn="ctr" indent="0" marL="0">
               <a:buNone/>
             </a:pPr>
             <a:r>
@@ -5342,7 +5371,7 @@
           <a:bodyPr wrap="square" rtlCol="0" anchor="ctr"/>
           <a:lstStyle/>
           <a:p>
-            <a:pPr marL="0" indent="0" algn="ctr">
+            <a:pPr algn="ctr" indent="0" marL="0">
               <a:buNone/>
             </a:pPr>
             <a:r>
@@ -5386,13 +5415,6 @@
             <a:prstDash val="solid"/>
           </a:ln>
         </p:spPr>
-        <p:txBody>
-          <a:bodyPr/>
-          <a:lstStyle/>
-          <a:p>
-            <a:endParaRPr lang="en-US"/>
-          </a:p>
-        </p:txBody>
       </p:sp>
       <p:sp>
         <p:nvSpPr>
@@ -5420,13 +5442,6 @@
             <a:prstDash val="solid"/>
           </a:ln>
         </p:spPr>
-        <p:txBody>
-          <a:bodyPr/>
-          <a:lstStyle/>
-          <a:p>
-            <a:endParaRPr lang="en-US"/>
-          </a:p>
-        </p:txBody>
       </p:sp>
       <p:sp>
         <p:nvSpPr>
@@ -5449,7 +5464,7 @@
           <a:bodyPr wrap="square" rtlCol="0" anchor="ctr"/>
           <a:lstStyle/>
           <a:p>
-            <a:pPr marL="0" indent="0" algn="ctr">
+            <a:pPr algn="ctr" indent="0" marL="0">
               <a:buNone/>
             </a:pPr>
             <a:r>
@@ -5488,7 +5503,7 @@
           <a:bodyPr wrap="square" rtlCol="0" anchor="ctr"/>
           <a:lstStyle/>
           <a:p>
-            <a:pPr marL="0" indent="0" algn="ctr">
+            <a:pPr algn="ctr" indent="0" marL="0">
               <a:buNone/>
             </a:pPr>
             <a:r>
@@ -5527,7 +5542,7 @@
           <a:bodyPr wrap="square" rtlCol="0" anchor="ctr"/>
           <a:lstStyle/>
           <a:p>
-            <a:pPr marL="0" indent="0" algn="ctr">
+            <a:pPr algn="ctr" indent="0" marL="0">
               <a:buNone/>
             </a:pPr>
             <a:r>
@@ -5566,7 +5581,7 @@
           <a:bodyPr wrap="square" rtlCol="0" anchor="ctr"/>
           <a:lstStyle/>
           <a:p>
-            <a:pPr marL="0" indent="0" algn="ctr">
+            <a:pPr algn="ctr" indent="0" marL="0">
               <a:buNone/>
             </a:pPr>
             <a:r>
@@ -5606,13 +5621,6 @@
             <a:prstDash val="solid"/>
           </a:ln>
         </p:spPr>
-        <p:txBody>
-          <a:bodyPr/>
-          <a:lstStyle/>
-          <a:p>
-            <a:endParaRPr lang="en-US"/>
-          </a:p>
-        </p:txBody>
       </p:sp>
       <p:sp>
         <p:nvSpPr>
@@ -5635,7 +5643,7 @@
           <a:bodyPr wrap="square" rtlCol="0" anchor="ctr"/>
           <a:lstStyle/>
           <a:p>
-            <a:pPr marL="0" indent="0" algn="ctr">
+            <a:pPr algn="ctr" indent="0" marL="0">
               <a:buNone/>
             </a:pPr>
             <a:r>
@@ -5674,7 +5682,7 @@
           <a:bodyPr wrap="square" rtlCol="0" anchor="ctr"/>
           <a:lstStyle/>
           <a:p>
-            <a:pPr marL="0" indent="0" algn="ctr">
+            <a:pPr algn="ctr" indent="0" marL="0">
               <a:buNone/>
             </a:pPr>
             <a:r>
@@ -5713,7 +5721,7 @@
           <a:bodyPr wrap="square" rtlCol="0" anchor="ctr"/>
           <a:lstStyle/>
           <a:p>
-            <a:pPr marL="0" indent="0" algn="ctr">
+            <a:pPr algn="ctr" indent="0" marL="0">
               <a:buNone/>
             </a:pPr>
             <a:r>
@@ -5752,7 +5760,7 @@
           <a:bodyPr wrap="square" rtlCol="0" anchor="ctr"/>
           <a:lstStyle/>
           <a:p>
-            <a:pPr marL="0" indent="0" algn="ctr">
+            <a:pPr algn="ctr" indent="0" marL="0">
               <a:buNone/>
             </a:pPr>
             <a:r>
@@ -5796,13 +5804,6 @@
             <a:prstDash val="solid"/>
           </a:ln>
         </p:spPr>
-        <p:txBody>
-          <a:bodyPr/>
-          <a:lstStyle/>
-          <a:p>
-            <a:endParaRPr lang="en-US"/>
-          </a:p>
-        </p:txBody>
       </p:sp>
       <p:sp>
         <p:nvSpPr>
@@ -5825,7 +5826,7 @@
           <a:bodyPr wrap="square" rtlCol="0" anchor="ctr"/>
           <a:lstStyle/>
           <a:p>
-            <a:pPr marL="0" indent="0" algn="ctr">
+            <a:pPr algn="ctr" indent="0" marL="0">
               <a:buNone/>
             </a:pPr>
             <a:r>
@@ -5864,7 +5865,7 @@
           <a:bodyPr wrap="square" rtlCol="0" anchor="ctr"/>
           <a:lstStyle/>
           <a:p>
-            <a:pPr marL="0" indent="0" algn="ctr">
+            <a:pPr algn="ctr" indent="0" marL="0">
               <a:buNone/>
             </a:pPr>
             <a:r>
@@ -5903,7 +5904,7 @@
           <a:bodyPr wrap="square" rtlCol="0" anchor="ctr"/>
           <a:lstStyle/>
           <a:p>
-            <a:pPr marL="0" indent="0" algn="ctr">
+            <a:pPr algn="ctr" indent="0" marL="0">
               <a:buNone/>
             </a:pPr>
             <a:r>
@@ -5943,13 +5944,6 @@
             <a:prstDash val="solid"/>
           </a:ln>
         </p:spPr>
-        <p:txBody>
-          <a:bodyPr/>
-          <a:lstStyle/>
-          <a:p>
-            <a:endParaRPr lang="en-US"/>
-          </a:p>
-        </p:txBody>
       </p:sp>
       <p:sp>
         <p:nvSpPr>
@@ -5972,7 +5966,7 @@
           <a:bodyPr wrap="square" rtlCol="0" anchor="ctr"/>
           <a:lstStyle/>
           <a:p>
-            <a:pPr marL="0" indent="0" algn="ctr">
+            <a:pPr algn="ctr" indent="0" marL="0">
               <a:buNone/>
             </a:pPr>
             <a:r>
@@ -6011,7 +6005,7 @@
           <a:bodyPr wrap="square" rtlCol="0" anchor="ctr"/>
           <a:lstStyle/>
           <a:p>
-            <a:pPr marL="0" indent="0" algn="ctr">
+            <a:pPr algn="ctr" indent="0" marL="0">
               <a:buNone/>
             </a:pPr>
             <a:r>
@@ -6050,7 +6044,7 @@
           <a:bodyPr wrap="square" rtlCol="0" anchor="ctr"/>
           <a:lstStyle/>
           <a:p>
-            <a:pPr marL="0" indent="0" algn="ctr">
+            <a:pPr algn="ctr" indent="0" marL="0">
               <a:buNone/>
             </a:pPr>
             <a:r>
@@ -6089,7 +6083,7 @@
           <a:bodyPr wrap="square" rtlCol="0" anchor="ctr"/>
           <a:lstStyle/>
           <a:p>
-            <a:pPr marL="0" indent="0" algn="ctr">
+            <a:pPr algn="ctr" indent="0" marL="0">
               <a:buNone/>
             </a:pPr>
             <a:r>
@@ -6128,7 +6122,7 @@
           <a:bodyPr wrap="square" rtlCol="0" anchor="ctr"/>
           <a:lstStyle/>
           <a:p>
-            <a:pPr marL="0" indent="0" algn="l">
+            <a:pPr algn="l" indent="0" marL="0">
               <a:buNone/>
             </a:pPr>
             <a:r>
@@ -6195,13 +6189,6 @@
             <a:prstDash val="solid"/>
           </a:ln>
         </p:spPr>
-        <p:txBody>
-          <a:bodyPr/>
-          <a:lstStyle/>
-          <a:p>
-            <a:endParaRPr lang="en-US"/>
-          </a:p>
-        </p:txBody>
       </p:sp>
       <p:sp>
         <p:nvSpPr>
@@ -6231,13 +6218,6 @@
             <a:prstDash val="solid"/>
           </a:ln>
         </p:spPr>
-        <p:txBody>
-          <a:bodyPr/>
-          <a:lstStyle/>
-          <a:p>
-            <a:endParaRPr lang="en-US"/>
-          </a:p>
-        </p:txBody>
       </p:sp>
       <p:sp>
         <p:nvSpPr>
@@ -6267,13 +6247,6 @@
             <a:prstDash val="solid"/>
           </a:ln>
         </p:spPr>
-        <p:txBody>
-          <a:bodyPr/>
-          <a:lstStyle/>
-          <a:p>
-            <a:endParaRPr lang="en-US"/>
-          </a:p>
-        </p:txBody>
       </p:sp>
       <p:sp>
         <p:nvSpPr>
@@ -6299,13 +6272,6 @@
             <a:prstDash val="solid"/>
           </a:ln>
         </p:spPr>
-        <p:txBody>
-          <a:bodyPr/>
-          <a:lstStyle/>
-          <a:p>
-            <a:endParaRPr lang="en-US"/>
-          </a:p>
-        </p:txBody>
       </p:sp>
       <p:sp>
         <p:nvSpPr>
@@ -6331,13 +6297,6 @@
             <a:prstDash val="solid"/>
           </a:ln>
         </p:spPr>
-        <p:txBody>
-          <a:bodyPr/>
-          <a:lstStyle/>
-          <a:p>
-            <a:endParaRPr lang="en-US"/>
-          </a:p>
-        </p:txBody>
       </p:sp>
       <p:sp>
         <p:nvSpPr>
@@ -6360,7 +6319,7 @@
           <a:bodyPr wrap="square" rtlCol="0" anchor="ctr"/>
           <a:lstStyle/>
           <a:p>
-            <a:pPr marL="0" indent="0">
+            <a:pPr indent="0" marL="0">
               <a:buNone/>
             </a:pPr>
             <a:r>
@@ -6399,7 +6358,7 @@
           <a:bodyPr wrap="square" rtlCol="0" anchor="ctr"/>
           <a:lstStyle/>
           <a:p>
-            <a:pPr marL="0" indent="0">
+            <a:pPr indent="0" marL="0">
               <a:buNone/>
             </a:pPr>
             <a:r>
@@ -6439,13 +6398,6 @@
             <a:prstDash val="solid"/>
           </a:ln>
         </p:spPr>
-        <p:txBody>
-          <a:bodyPr/>
-          <a:lstStyle/>
-          <a:p>
-            <a:endParaRPr lang="en-US"/>
-          </a:p>
-        </p:txBody>
       </p:sp>
       <p:sp>
         <p:nvSpPr>
@@ -6473,13 +6425,6 @@
             <a:prstDash val="solid"/>
           </a:ln>
         </p:spPr>
-        <p:txBody>
-          <a:bodyPr/>
-          <a:lstStyle/>
-          <a:p>
-            <a:endParaRPr lang="en-US"/>
-          </a:p>
-        </p:txBody>
       </p:sp>
       <p:sp>
         <p:nvSpPr>
@@ -6502,7 +6447,7 @@
           <a:bodyPr wrap="square" rtlCol="0" anchor="ctr"/>
           <a:lstStyle/>
           <a:p>
-            <a:pPr marL="0" indent="0">
+            <a:pPr indent="0" marL="0">
               <a:buNone/>
             </a:pPr>
             <a:r>
@@ -6542,13 +6487,6 @@
             <a:prstDash val="solid"/>
           </a:ln>
         </p:spPr>
-        <p:txBody>
-          <a:bodyPr/>
-          <a:lstStyle/>
-          <a:p>
-            <a:endParaRPr lang="en-US"/>
-          </a:p>
-        </p:txBody>
       </p:sp>
       <p:sp>
         <p:nvSpPr>
@@ -6571,7 +6509,7 @@
           <a:bodyPr wrap="square" rtlCol="0" anchor="ctr"/>
           <a:lstStyle/>
           <a:p>
-            <a:pPr marL="0" indent="0" algn="ctr">
+            <a:pPr algn="ctr" indent="0" marL="0">
               <a:buNone/>
             </a:pPr>
             <a:r>
@@ -6607,7 +6545,7 @@
           <a:bodyPr wrap="square" rtlCol="0" anchor="ctr"/>
           <a:lstStyle/>
           <a:p>
-            <a:pPr marL="0" indent="0">
+            <a:pPr indent="0" marL="0">
               <a:buNone/>
             </a:pPr>
             <a:r>
@@ -6624,7 +6562,7 @@
             <a:endParaRPr lang="en-US" sz="1150" dirty="0"/>
           </a:p>
           <a:p>
-            <a:pPr marL="0" indent="0">
+            <a:pPr indent="0" marL="0">
               <a:buNone/>
             </a:pPr>
             <a:r>
@@ -6663,7 +6601,7 @@
           <a:bodyPr wrap="square" rtlCol="0" anchor="ctr"/>
           <a:lstStyle/>
           <a:p>
-            <a:pPr marL="0" indent="0" algn="ctr">
+            <a:pPr algn="ctr" indent="0" marL="0">
               <a:buNone/>
             </a:pPr>
             <a:r>
@@ -6699,7 +6637,7 @@
           <a:bodyPr wrap="square" rtlCol="0" anchor="ctr"/>
           <a:lstStyle/>
           <a:p>
-            <a:pPr marL="0" indent="0">
+            <a:pPr indent="0" marL="0">
               <a:buNone/>
             </a:pPr>
             <a:r>
@@ -6716,7 +6654,7 @@
             <a:endParaRPr lang="en-US" sz="1150" dirty="0"/>
           </a:p>
           <a:p>
-            <a:pPr marL="0" indent="0">
+            <a:pPr indent="0" marL="0">
               <a:buNone/>
             </a:pPr>
             <a:r>
@@ -6755,7 +6693,7 @@
           <a:bodyPr wrap="square" rtlCol="0" anchor="ctr"/>
           <a:lstStyle/>
           <a:p>
-            <a:pPr marL="0" indent="0" algn="ctr">
+            <a:pPr algn="ctr" indent="0" marL="0">
               <a:buNone/>
             </a:pPr>
             <a:r>
@@ -6791,7 +6729,7 @@
           <a:bodyPr wrap="square" rtlCol="0" anchor="ctr"/>
           <a:lstStyle/>
           <a:p>
-            <a:pPr marL="0" indent="0">
+            <a:pPr indent="0" marL="0">
               <a:buNone/>
             </a:pPr>
             <a:r>
@@ -6808,7 +6746,7 @@
             <a:endParaRPr lang="en-US" sz="1150" dirty="0"/>
           </a:p>
           <a:p>
-            <a:pPr marL="0" indent="0">
+            <a:pPr indent="0" marL="0">
               <a:buNone/>
             </a:pPr>
             <a:r>
@@ -6847,7 +6785,7 @@
           <a:bodyPr wrap="square" rtlCol="0" anchor="ctr"/>
           <a:lstStyle/>
           <a:p>
-            <a:pPr marL="0" indent="0" algn="ctr">
+            <a:pPr algn="ctr" indent="0" marL="0">
               <a:buNone/>
             </a:pPr>
             <a:r>
@@ -6883,7 +6821,7 @@
           <a:bodyPr wrap="square" rtlCol="0" anchor="ctr"/>
           <a:lstStyle/>
           <a:p>
-            <a:pPr marL="0" indent="0">
+            <a:pPr indent="0" marL="0">
               <a:buNone/>
             </a:pPr>
             <a:r>
@@ -6900,7 +6838,7 @@
             <a:endParaRPr lang="en-US" sz="1150" dirty="0"/>
           </a:p>
           <a:p>
-            <a:pPr marL="0" indent="0">
+            <a:pPr indent="0" marL="0">
               <a:buNone/>
             </a:pPr>
             <a:r>
@@ -6944,13 +6882,6 @@
             <a:prstDash val="solid"/>
           </a:ln>
         </p:spPr>
-        <p:txBody>
-          <a:bodyPr/>
-          <a:lstStyle/>
-          <a:p>
-            <a:endParaRPr lang="en-US"/>
-          </a:p>
-        </p:txBody>
       </p:sp>
       <p:sp>
         <p:nvSpPr>
@@ -6973,7 +6904,7 @@
           <a:bodyPr wrap="square" rtlCol="0" anchor="ctr"/>
           <a:lstStyle/>
           <a:p>
-            <a:pPr marL="0" indent="0">
+            <a:pPr indent="0" marL="0">
               <a:buNone/>
             </a:pPr>
             <a:r>
@@ -7013,13 +6944,6 @@
             <a:prstDash val="solid"/>
           </a:ln>
         </p:spPr>
-        <p:txBody>
-          <a:bodyPr/>
-          <a:lstStyle/>
-          <a:p>
-            <a:endParaRPr lang="en-US"/>
-          </a:p>
-        </p:txBody>
       </p:sp>
       <p:sp>
         <p:nvSpPr>
@@ -7042,7 +6966,7 @@
           <a:bodyPr wrap="square" rtlCol="0" anchor="ctr"/>
           <a:lstStyle/>
           <a:p>
-            <a:pPr marL="0" indent="0" algn="ctr">
+            <a:pPr algn="ctr" indent="0" marL="0">
               <a:buNone/>
             </a:pPr>
             <a:r>
@@ -7078,7 +7002,7 @@
           <a:bodyPr wrap="square" rtlCol="0" anchor="ctr"/>
           <a:lstStyle/>
           <a:p>
-            <a:pPr marL="0" indent="0">
+            <a:pPr indent="0" marL="0">
               <a:buNone/>
             </a:pPr>
             <a:r>
@@ -7095,7 +7019,7 @@
             <a:endParaRPr lang="en-US" sz="1150" dirty="0"/>
           </a:p>
           <a:p>
-            <a:pPr marL="0" indent="0">
+            <a:pPr indent="0" marL="0">
               <a:buNone/>
             </a:pPr>
             <a:r>
@@ -7134,7 +7058,7 @@
           <a:bodyPr wrap="square" rtlCol="0" anchor="ctr"/>
           <a:lstStyle/>
           <a:p>
-            <a:pPr marL="0" indent="0" algn="ctr">
+            <a:pPr algn="ctr" indent="0" marL="0">
               <a:buNone/>
             </a:pPr>
             <a:r>
@@ -7170,7 +7094,7 @@
           <a:bodyPr wrap="square" rtlCol="0" anchor="ctr"/>
           <a:lstStyle/>
           <a:p>
-            <a:pPr marL="0" indent="0">
+            <a:pPr indent="0" marL="0">
               <a:buNone/>
             </a:pPr>
             <a:r>
@@ -7187,7 +7111,7 @@
             <a:endParaRPr lang="en-US" sz="1150" dirty="0"/>
           </a:p>
           <a:p>
-            <a:pPr marL="0" indent="0">
+            <a:pPr indent="0" marL="0">
               <a:buNone/>
             </a:pPr>
             <a:r>
@@ -7226,7 +7150,7 @@
           <a:bodyPr wrap="square" rtlCol="0" anchor="ctr"/>
           <a:lstStyle/>
           <a:p>
-            <a:pPr marL="0" indent="0" algn="ctr">
+            <a:pPr algn="ctr" indent="0" marL="0">
               <a:buNone/>
             </a:pPr>
             <a:r>
@@ -7262,7 +7186,7 @@
           <a:bodyPr wrap="square" rtlCol="0" anchor="ctr"/>
           <a:lstStyle/>
           <a:p>
-            <a:pPr marL="0" indent="0">
+            <a:pPr indent="0" marL="0">
               <a:buNone/>
             </a:pPr>
             <a:r>
@@ -7279,7 +7203,7 @@
             <a:endParaRPr lang="en-US" sz="1150" dirty="0"/>
           </a:p>
           <a:p>
-            <a:pPr marL="0" indent="0">
+            <a:pPr indent="0" marL="0">
               <a:buNone/>
             </a:pPr>
             <a:r>
@@ -7318,7 +7242,7 @@
           <a:bodyPr wrap="square" rtlCol="0" anchor="ctr"/>
           <a:lstStyle/>
           <a:p>
-            <a:pPr marL="0" indent="0" algn="ctr">
+            <a:pPr algn="ctr" indent="0" marL="0">
               <a:buNone/>
             </a:pPr>
             <a:r>
@@ -7354,7 +7278,7 @@
           <a:bodyPr wrap="square" rtlCol="0" anchor="ctr"/>
           <a:lstStyle/>
           <a:p>
-            <a:pPr marL="0" indent="0">
+            <a:pPr indent="0" marL="0">
               <a:buNone/>
             </a:pPr>
             <a:r>
@@ -7371,7 +7295,7 @@
             <a:endParaRPr lang="en-US" sz="1150" dirty="0"/>
           </a:p>
           <a:p>
-            <a:pPr marL="0" indent="0">
+            <a:pPr indent="0" marL="0">
               <a:buNone/>
             </a:pPr>
             <a:r>
@@ -7411,13 +7335,6 @@
             <a:prstDash val="solid"/>
           </a:ln>
         </p:spPr>
-        <p:txBody>
-          <a:bodyPr/>
-          <a:lstStyle/>
-          <a:p>
-            <a:endParaRPr lang="en-US"/>
-          </a:p>
-        </p:txBody>
       </p:sp>
       <p:sp>
         <p:nvSpPr>
@@ -7440,7 +7357,7 @@
           <a:bodyPr wrap="square" rtlCol="0" anchor="ctr"/>
           <a:lstStyle/>
           <a:p>
-            <a:pPr marL="0" indent="0" algn="ctr">
+            <a:pPr algn="ctr" indent="0" marL="0">
               <a:buNone/>
             </a:pPr>
             <a:r>
@@ -7484,13 +7401,6 @@
             <a:prstDash val="solid"/>
           </a:ln>
         </p:spPr>
-        <p:txBody>
-          <a:bodyPr/>
-          <a:lstStyle/>
-          <a:p>
-            <a:endParaRPr lang="en-US"/>
-          </a:p>
-        </p:txBody>
       </p:sp>
       <p:sp>
         <p:nvSpPr>
@@ -7513,7 +7423,7 @@
           <a:bodyPr wrap="square" rtlCol="0" anchor="ctr"/>
           <a:lstStyle/>
           <a:p>
-            <a:pPr marL="0" indent="0" algn="ctr">
+            <a:pPr algn="ctr" indent="0" marL="0">
               <a:buNone/>
             </a:pPr>
             <a:r>
@@ -7549,7 +7459,7 @@
           <a:bodyPr wrap="square" rtlCol="0" anchor="ctr"/>
           <a:lstStyle/>
           <a:p>
-            <a:pPr marL="0" indent="0">
+            <a:pPr indent="0" marL="0">
               <a:buNone/>
             </a:pPr>
             <a:r>
@@ -7566,7 +7476,7 @@
             <a:endParaRPr lang="en-US" sz="1200" dirty="0"/>
           </a:p>
           <a:p>
-            <a:pPr marL="0" indent="0">
+            <a:pPr indent="0" marL="0">
               <a:buNone/>
             </a:pPr>
             <a:r>
@@ -7605,7 +7515,7 @@
           <a:bodyPr wrap="square" rtlCol="0" anchor="ctr"/>
           <a:lstStyle/>
           <a:p>
-            <a:pPr marL="0" indent="0" algn="l">
+            <a:pPr algn="l" indent="0" marL="0">
               <a:buNone/>
             </a:pPr>
             <a:r>
@@ -7672,13 +7582,6 @@
             <a:prstDash val="solid"/>
           </a:ln>
         </p:spPr>
-        <p:txBody>
-          <a:bodyPr/>
-          <a:lstStyle/>
-          <a:p>
-            <a:endParaRPr lang="en-US"/>
-          </a:p>
-        </p:txBody>
       </p:sp>
       <p:sp>
         <p:nvSpPr>
@@ -7708,13 +7611,6 @@
             <a:prstDash val="solid"/>
           </a:ln>
         </p:spPr>
-        <p:txBody>
-          <a:bodyPr/>
-          <a:lstStyle/>
-          <a:p>
-            <a:endParaRPr lang="en-US"/>
-          </a:p>
-        </p:txBody>
       </p:sp>
       <p:sp>
         <p:nvSpPr>
@@ -7744,13 +7640,6 @@
             <a:prstDash val="solid"/>
           </a:ln>
         </p:spPr>
-        <p:txBody>
-          <a:bodyPr/>
-          <a:lstStyle/>
-          <a:p>
-            <a:endParaRPr lang="en-US"/>
-          </a:p>
-        </p:txBody>
       </p:sp>
       <p:sp>
         <p:nvSpPr>
@@ -7776,13 +7665,6 @@
             <a:prstDash val="solid"/>
           </a:ln>
         </p:spPr>
-        <p:txBody>
-          <a:bodyPr/>
-          <a:lstStyle/>
-          <a:p>
-            <a:endParaRPr lang="en-US"/>
-          </a:p>
-        </p:txBody>
       </p:sp>
       <p:sp>
         <p:nvSpPr>
@@ -7808,13 +7690,6 @@
             <a:prstDash val="solid"/>
           </a:ln>
         </p:spPr>
-        <p:txBody>
-          <a:bodyPr/>
-          <a:lstStyle/>
-          <a:p>
-            <a:endParaRPr lang="en-US"/>
-          </a:p>
-        </p:txBody>
       </p:sp>
       <p:sp>
         <p:nvSpPr>
@@ -7837,7 +7712,7 @@
           <a:bodyPr wrap="square" rtlCol="0" anchor="ctr"/>
           <a:lstStyle/>
           <a:p>
-            <a:pPr marL="0" indent="0">
+            <a:pPr indent="0" marL="0">
               <a:buNone/>
             </a:pPr>
             <a:r>
@@ -7876,7 +7751,7 @@
           <a:bodyPr wrap="square" rtlCol="0" anchor="ctr"/>
           <a:lstStyle/>
           <a:p>
-            <a:pPr marL="0" indent="0">
+            <a:pPr indent="0" marL="0">
               <a:buNone/>
             </a:pPr>
             <a:r>
@@ -7916,13 +7791,6 @@
             <a:prstDash val="solid"/>
           </a:ln>
         </p:spPr>
-        <p:txBody>
-          <a:bodyPr/>
-          <a:lstStyle/>
-          <a:p>
-            <a:endParaRPr lang="en-US"/>
-          </a:p>
-        </p:txBody>
       </p:sp>
       <p:sp>
         <p:nvSpPr>
@@ -7950,13 +7818,6 @@
             <a:prstDash val="solid"/>
           </a:ln>
         </p:spPr>
-        <p:txBody>
-          <a:bodyPr/>
-          <a:lstStyle/>
-          <a:p>
-            <a:endParaRPr lang="en-US"/>
-          </a:p>
-        </p:txBody>
       </p:sp>
       <p:sp>
         <p:nvSpPr>
@@ -7979,7 +7840,7 @@
           <a:bodyPr wrap="square" rtlCol="0" anchor="ctr"/>
           <a:lstStyle/>
           <a:p>
-            <a:pPr marL="0" indent="0" algn="ctr">
+            <a:pPr algn="ctr" indent="0" marL="0">
               <a:buNone/>
             </a:pPr>
             <a:r>
@@ -8018,7 +7879,7 @@
           <a:bodyPr wrap="square" rtlCol="0" anchor="ctr"/>
           <a:lstStyle/>
           <a:p>
-            <a:pPr marL="0" indent="0" algn="ctr">
+            <a:pPr algn="ctr" indent="0" marL="0">
               <a:buNone/>
             </a:pPr>
             <a:r>
@@ -8054,7 +7915,7 @@
           <a:bodyPr wrap="square" rtlCol="0" anchor="ctr"/>
           <a:lstStyle/>
           <a:p>
-            <a:pPr marL="0" indent="0">
+            <a:pPr indent="0" marL="0">
               <a:buNone/>
             </a:pPr>
             <a:r>
@@ -8093,7 +7954,7 @@
           <a:bodyPr wrap="square" rtlCol="0" anchor="ctr"/>
           <a:lstStyle/>
           <a:p>
-            <a:pPr marL="0" indent="0">
+            <a:pPr indent="0" marL="0">
               <a:buNone/>
             </a:pPr>
             <a:r>
@@ -8132,7 +7993,7 @@
           <a:bodyPr wrap="square" rtlCol="0" anchor="ctr"/>
           <a:lstStyle/>
           <a:p>
-            <a:pPr marL="0" indent="0" algn="ctr">
+            <a:pPr algn="ctr" indent="0" marL="0">
               <a:buNone/>
             </a:pPr>
             <a:r>
@@ -8168,7 +8029,7 @@
           <a:bodyPr wrap="square" rtlCol="0" anchor="ctr"/>
           <a:lstStyle/>
           <a:p>
-            <a:pPr marL="0" indent="0">
+            <a:pPr indent="0" marL="0">
               <a:buNone/>
             </a:pPr>
             <a:r>
@@ -8207,7 +8068,7 @@
           <a:bodyPr wrap="square" rtlCol="0" anchor="ctr"/>
           <a:lstStyle/>
           <a:p>
-            <a:pPr marL="0" indent="0">
+            <a:pPr indent="0" marL="0">
               <a:buNone/>
             </a:pPr>
             <a:r>
@@ -8246,7 +8107,7 @@
           <a:bodyPr wrap="square" rtlCol="0" anchor="ctr"/>
           <a:lstStyle/>
           <a:p>
-            <a:pPr marL="0" indent="0" algn="ctr">
+            <a:pPr algn="ctr" indent="0" marL="0">
               <a:buNone/>
             </a:pPr>
             <a:r>
@@ -8282,7 +8143,7 @@
           <a:bodyPr wrap="square" rtlCol="0" anchor="ctr"/>
           <a:lstStyle/>
           <a:p>
-            <a:pPr marL="0" indent="0">
+            <a:pPr indent="0" marL="0">
               <a:buNone/>
             </a:pPr>
             <a:r>
@@ -8321,7 +8182,7 @@
           <a:bodyPr wrap="square" rtlCol="0" anchor="ctr"/>
           <a:lstStyle/>
           <a:p>
-            <a:pPr marL="0" indent="0">
+            <a:pPr indent="0" marL="0">
               <a:buNone/>
             </a:pPr>
             <a:r>
@@ -8360,7 +8221,7 @@
           <a:bodyPr wrap="square" rtlCol="0" anchor="ctr"/>
           <a:lstStyle/>
           <a:p>
-            <a:pPr marL="0" indent="0" algn="ctr">
+            <a:pPr algn="ctr" indent="0" marL="0">
               <a:buNone/>
             </a:pPr>
             <a:r>
@@ -8396,7 +8257,7 @@
           <a:bodyPr wrap="square" rtlCol="0" anchor="ctr"/>
           <a:lstStyle/>
           <a:p>
-            <a:pPr marL="0" indent="0">
+            <a:pPr indent="0" marL="0">
               <a:buNone/>
             </a:pPr>
             <a:r>
@@ -8435,7 +8296,7 @@
           <a:bodyPr wrap="square" rtlCol="0" anchor="ctr"/>
           <a:lstStyle/>
           <a:p>
-            <a:pPr marL="0" indent="0">
+            <a:pPr indent="0" marL="0">
               <a:buNone/>
             </a:pPr>
             <a:r>
@@ -8474,7 +8335,7 @@
           <a:bodyPr wrap="square" rtlCol="0" anchor="ctr"/>
           <a:lstStyle/>
           <a:p>
-            <a:pPr marL="0" indent="0" algn="ctr">
+            <a:pPr algn="ctr" indent="0" marL="0">
               <a:buNone/>
             </a:pPr>
             <a:r>
@@ -8510,7 +8371,7 @@
           <a:bodyPr wrap="square" rtlCol="0" anchor="ctr"/>
           <a:lstStyle/>
           <a:p>
-            <a:pPr marL="0" indent="0">
+            <a:pPr indent="0" marL="0">
               <a:buNone/>
             </a:pPr>
             <a:r>
@@ -8549,7 +8410,7 @@
           <a:bodyPr wrap="square" rtlCol="0" anchor="ctr"/>
           <a:lstStyle/>
           <a:p>
-            <a:pPr marL="0" indent="0">
+            <a:pPr indent="0" marL="0">
               <a:buNone/>
             </a:pPr>
             <a:r>
@@ -8588,7 +8449,7 @@
           <a:bodyPr wrap="square" rtlCol="0" anchor="ctr"/>
           <a:lstStyle/>
           <a:p>
-            <a:pPr marL="0" indent="0" algn="ctr">
+            <a:pPr algn="ctr" indent="0" marL="0">
               <a:buNone/>
             </a:pPr>
             <a:r>
@@ -8632,13 +8493,6 @@
             <a:prstDash val="solid"/>
           </a:ln>
         </p:spPr>
-        <p:txBody>
-          <a:bodyPr/>
-          <a:lstStyle/>
-          <a:p>
-            <a:endParaRPr lang="en-US"/>
-          </a:p>
-        </p:txBody>
       </p:sp>
       <p:sp>
         <p:nvSpPr>
@@ -8661,7 +8515,7 @@
           <a:bodyPr wrap="square" rtlCol="0" anchor="ctr"/>
           <a:lstStyle/>
           <a:p>
-            <a:pPr marL="0" indent="0" algn="ctr">
+            <a:pPr algn="ctr" indent="0" marL="0">
               <a:buNone/>
             </a:pPr>
             <a:r>
@@ -8700,7 +8554,7 @@
           <a:bodyPr wrap="square" rtlCol="0" anchor="ctr"/>
           <a:lstStyle/>
           <a:p>
-            <a:pPr marL="0" indent="0" algn="ctr">
+            <a:pPr algn="ctr" indent="0" marL="0">
               <a:buNone/>
             </a:pPr>
             <a:r>
@@ -8736,7 +8590,7 @@
           <a:bodyPr wrap="square" rtlCol="0" anchor="ctr"/>
           <a:lstStyle/>
           <a:p>
-            <a:pPr marL="0" indent="0">
+            <a:pPr indent="0" marL="0">
               <a:buNone/>
             </a:pPr>
             <a:r>
@@ -8775,7 +8629,7 @@
           <a:bodyPr wrap="square" rtlCol="0" anchor="ctr"/>
           <a:lstStyle/>
           <a:p>
-            <a:pPr marL="0" indent="0">
+            <a:pPr indent="0" marL="0">
               <a:buNone/>
             </a:pPr>
             <a:r>
@@ -8814,7 +8668,7 @@
           <a:bodyPr wrap="square" rtlCol="0" anchor="ctr"/>
           <a:lstStyle/>
           <a:p>
-            <a:pPr marL="0" indent="0" algn="ctr">
+            <a:pPr algn="ctr" indent="0" marL="0">
               <a:buNone/>
             </a:pPr>
             <a:r>
@@ -8850,7 +8704,7 @@
           <a:bodyPr wrap="square" rtlCol="0" anchor="ctr"/>
           <a:lstStyle/>
           <a:p>
-            <a:pPr marL="0" indent="0">
+            <a:pPr indent="0" marL="0">
               <a:buNone/>
             </a:pPr>
             <a:r>
@@ -8889,7 +8743,7 @@
           <a:bodyPr wrap="square" rtlCol="0" anchor="ctr"/>
           <a:lstStyle/>
           <a:p>
-            <a:pPr marL="0" indent="0">
+            <a:pPr indent="0" marL="0">
               <a:buNone/>
             </a:pPr>
             <a:r>
@@ -8928,7 +8782,7 @@
           <a:bodyPr wrap="square" rtlCol="0" anchor="ctr"/>
           <a:lstStyle/>
           <a:p>
-            <a:pPr marL="0" indent="0" algn="ctr">
+            <a:pPr algn="ctr" indent="0" marL="0">
               <a:buNone/>
             </a:pPr>
             <a:r>
@@ -8964,7 +8818,7 @@
           <a:bodyPr wrap="square" rtlCol="0" anchor="ctr"/>
           <a:lstStyle/>
           <a:p>
-            <a:pPr marL="0" indent="0">
+            <a:pPr indent="0" marL="0">
               <a:buNone/>
             </a:pPr>
             <a:r>
@@ -9003,7 +8857,7 @@
           <a:bodyPr wrap="square" rtlCol="0" anchor="ctr"/>
           <a:lstStyle/>
           <a:p>
-            <a:pPr marL="0" indent="0">
+            <a:pPr indent="0" marL="0">
               <a:buNone/>
             </a:pPr>
             <a:r>
@@ -9042,7 +8896,7 @@
           <a:bodyPr wrap="square" rtlCol="0" anchor="ctr"/>
           <a:lstStyle/>
           <a:p>
-            <a:pPr marL="0" indent="0" algn="ctr">
+            <a:pPr algn="ctr" indent="0" marL="0">
               <a:buNone/>
             </a:pPr>
             <a:r>
@@ -9078,7 +8932,7 @@
           <a:bodyPr wrap="square" rtlCol="0" anchor="ctr"/>
           <a:lstStyle/>
           <a:p>
-            <a:pPr marL="0" indent="0">
+            <a:pPr indent="0" marL="0">
               <a:buNone/>
             </a:pPr>
             <a:r>
@@ -9117,7 +8971,7 @@
           <a:bodyPr wrap="square" rtlCol="0" anchor="ctr"/>
           <a:lstStyle/>
           <a:p>
-            <a:pPr marL="0" indent="0">
+            <a:pPr indent="0" marL="0">
               <a:buNone/>
             </a:pPr>
             <a:r>
@@ -9156,7 +9010,7 @@
           <a:bodyPr wrap="square" rtlCol="0" anchor="ctr"/>
           <a:lstStyle/>
           <a:p>
-            <a:pPr marL="0" indent="0" algn="ctr">
+            <a:pPr algn="ctr" indent="0" marL="0">
               <a:buNone/>
             </a:pPr>
             <a:r>
@@ -9192,7 +9046,7 @@
           <a:bodyPr wrap="square" rtlCol="0" anchor="ctr"/>
           <a:lstStyle/>
           <a:p>
-            <a:pPr marL="0" indent="0">
+            <a:pPr indent="0" marL="0">
               <a:buNone/>
             </a:pPr>
             <a:r>
@@ -9231,7 +9085,7 @@
           <a:bodyPr wrap="square" rtlCol="0" anchor="ctr"/>
           <a:lstStyle/>
           <a:p>
-            <a:pPr marL="0" indent="0">
+            <a:pPr indent="0" marL="0">
               <a:buNone/>
             </a:pPr>
             <a:r>
@@ -9275,13 +9129,6 @@
             <a:prstDash val="solid"/>
           </a:ln>
         </p:spPr>
-        <p:txBody>
-          <a:bodyPr/>
-          <a:lstStyle/>
-          <a:p>
-            <a:endParaRPr lang="en-US"/>
-          </a:p>
-        </p:txBody>
       </p:sp>
       <p:sp>
         <p:nvSpPr>
@@ -9304,7 +9151,7 @@
           <a:bodyPr wrap="square" rtlCol="0" anchor="ctr"/>
           <a:lstStyle/>
           <a:p>
-            <a:pPr marL="0" indent="0">
+            <a:pPr indent="0" marL="0">
               <a:buNone/>
             </a:pPr>
             <a:r>
@@ -9343,7 +9190,7 @@
           <a:bodyPr wrap="square" rtlCol="0" anchor="ctr"/>
           <a:lstStyle/>
           <a:p>
-            <a:pPr marL="0" indent="0" algn="ctr">
+            <a:pPr algn="ctr" indent="0" marL="0">
               <a:buNone/>
             </a:pPr>
             <a:r>
@@ -9360,7 +9207,7 @@
             <a:endParaRPr lang="en-US" sz="900" dirty="0"/>
           </a:p>
           <a:p>
-            <a:pPr marL="0" indent="0" algn="ctr">
+            <a:pPr algn="ctr" indent="0" marL="0">
               <a:buNone/>
             </a:pPr>
             <a:r>
@@ -9399,7 +9246,7 @@
           <a:bodyPr wrap="square" rtlCol="0" anchor="ctr"/>
           <a:lstStyle/>
           <a:p>
-            <a:pPr marL="0" indent="0" algn="ctr">
+            <a:pPr algn="ctr" indent="0" marL="0">
               <a:buNone/>
             </a:pPr>
             <a:r>
@@ -9438,7 +9285,7 @@
           <a:bodyPr wrap="square" rtlCol="0" anchor="ctr"/>
           <a:lstStyle/>
           <a:p>
-            <a:pPr marL="0" indent="0" algn="ctr">
+            <a:pPr algn="ctr" indent="0" marL="0">
               <a:buNone/>
             </a:pPr>
             <a:r>
@@ -9455,7 +9302,7 @@
             <a:endParaRPr lang="en-US" sz="900" dirty="0"/>
           </a:p>
           <a:p>
-            <a:pPr marL="0" indent="0" algn="ctr">
+            <a:pPr algn="ctr" indent="0" marL="0">
               <a:buNone/>
             </a:pPr>
             <a:r>
@@ -9494,7 +9341,7 @@
           <a:bodyPr wrap="square" rtlCol="0" anchor="ctr"/>
           <a:lstStyle/>
           <a:p>
-            <a:pPr marL="0" indent="0" algn="ctr">
+            <a:pPr algn="ctr" indent="0" marL="0">
               <a:buNone/>
             </a:pPr>
             <a:r>
@@ -9533,7 +9380,7 @@
           <a:bodyPr wrap="square" rtlCol="0" anchor="ctr"/>
           <a:lstStyle/>
           <a:p>
-            <a:pPr marL="0" indent="0" algn="ctr">
+            <a:pPr algn="ctr" indent="0" marL="0">
               <a:buNone/>
             </a:pPr>
             <a:r>
@@ -9550,7 +9397,7 @@
             <a:endParaRPr lang="en-US" sz="900" dirty="0"/>
           </a:p>
           <a:p>
-            <a:pPr marL="0" indent="0" algn="ctr">
+            <a:pPr algn="ctr" indent="0" marL="0">
               <a:buNone/>
             </a:pPr>
             <a:r>
@@ -9589,7 +9436,7 @@
           <a:bodyPr wrap="square" rtlCol="0" anchor="ctr"/>
           <a:lstStyle/>
           <a:p>
-            <a:pPr marL="0" indent="0" algn="ctr">
+            <a:pPr algn="ctr" indent="0" marL="0">
               <a:buNone/>
             </a:pPr>
             <a:r>
@@ -9628,7 +9475,7 @@
           <a:bodyPr wrap="square" rtlCol="0" anchor="ctr"/>
           <a:lstStyle/>
           <a:p>
-            <a:pPr marL="0" indent="0" algn="ctr">
+            <a:pPr algn="ctr" indent="0" marL="0">
               <a:buNone/>
             </a:pPr>
             <a:r>
@@ -9645,7 +9492,7 @@
             <a:endParaRPr lang="en-US" sz="900" dirty="0"/>
           </a:p>
           <a:p>
-            <a:pPr marL="0" indent="0" algn="ctr">
+            <a:pPr algn="ctr" indent="0" marL="0">
               <a:buNone/>
             </a:pPr>
             <a:r>
@@ -9684,7 +9531,7 @@
           <a:bodyPr wrap="square" rtlCol="0" anchor="ctr"/>
           <a:lstStyle/>
           <a:p>
-            <a:pPr marL="0" indent="0" algn="l">
+            <a:pPr algn="l" indent="0" marL="0">
               <a:buNone/>
             </a:pPr>
             <a:r>
@@ -9751,13 +9598,6 @@
             <a:prstDash val="solid"/>
           </a:ln>
         </p:spPr>
-        <p:txBody>
-          <a:bodyPr/>
-          <a:lstStyle/>
-          <a:p>
-            <a:endParaRPr lang="en-US"/>
-          </a:p>
-        </p:txBody>
       </p:sp>
       <p:sp>
         <p:nvSpPr>
@@ -9787,13 +9627,6 @@
             <a:prstDash val="solid"/>
           </a:ln>
         </p:spPr>
-        <p:txBody>
-          <a:bodyPr/>
-          <a:lstStyle/>
-          <a:p>
-            <a:endParaRPr lang="en-US"/>
-          </a:p>
-        </p:txBody>
       </p:sp>
       <p:sp>
         <p:nvSpPr>
@@ -9823,13 +9656,6 @@
             <a:prstDash val="solid"/>
           </a:ln>
         </p:spPr>
-        <p:txBody>
-          <a:bodyPr/>
-          <a:lstStyle/>
-          <a:p>
-            <a:endParaRPr lang="en-US"/>
-          </a:p>
-        </p:txBody>
       </p:sp>
       <p:sp>
         <p:nvSpPr>
@@ -9859,13 +9685,6 @@
             <a:prstDash val="solid"/>
           </a:ln>
         </p:spPr>
-        <p:txBody>
-          <a:bodyPr/>
-          <a:lstStyle/>
-          <a:p>
-            <a:endParaRPr lang="en-US"/>
-          </a:p>
-        </p:txBody>
       </p:sp>
       <p:sp>
         <p:nvSpPr>
@@ -9891,13 +9710,6 @@
             <a:prstDash val="solid"/>
           </a:ln>
         </p:spPr>
-        <p:txBody>
-          <a:bodyPr/>
-          <a:lstStyle/>
-          <a:p>
-            <a:endParaRPr lang="en-US"/>
-          </a:p>
-        </p:txBody>
       </p:sp>
       <p:sp>
         <p:nvSpPr>
@@ -9923,13 +9735,6 @@
             <a:prstDash val="solid"/>
           </a:ln>
         </p:spPr>
-        <p:txBody>
-          <a:bodyPr/>
-          <a:lstStyle/>
-          <a:p>
-            <a:endParaRPr lang="en-US"/>
-          </a:p>
-        </p:txBody>
       </p:sp>
       <p:sp>
         <p:nvSpPr>
@@ -9952,7 +9757,7 @@
           <a:bodyPr wrap="square" rtlCol="0" anchor="ctr"/>
           <a:lstStyle/>
           <a:p>
-            <a:pPr marL="0" indent="0">
+            <a:pPr indent="0" marL="0">
               <a:buNone/>
             </a:pPr>
             <a:r>
@@ -9992,13 +9797,6 @@
             <a:prstDash val="solid"/>
           </a:ln>
         </p:spPr>
-        <p:txBody>
-          <a:bodyPr/>
-          <a:lstStyle/>
-          <a:p>
-            <a:endParaRPr lang="en-US"/>
-          </a:p>
-        </p:txBody>
       </p:sp>
       <p:sp>
         <p:nvSpPr>
@@ -10026,13 +9824,6 @@
             <a:prstDash val="solid"/>
           </a:ln>
         </p:spPr>
-        <p:txBody>
-          <a:bodyPr/>
-          <a:lstStyle/>
-          <a:p>
-            <a:endParaRPr lang="en-US"/>
-          </a:p>
-        </p:txBody>
       </p:sp>
       <p:sp>
         <p:nvSpPr>
@@ -10055,7 +9846,7 @@
           <a:bodyPr wrap="square" rtlCol="0" anchor="ctr"/>
           <a:lstStyle/>
           <a:p>
-            <a:pPr marL="0" indent="0" algn="ctr">
+            <a:pPr algn="ctr" indent="0" marL="0">
               <a:buNone/>
             </a:pPr>
             <a:r>
@@ -10091,7 +9882,7 @@
           <a:bodyPr wrap="square" rtlCol="0" anchor="ctr"/>
           <a:lstStyle/>
           <a:p>
-            <a:pPr marL="0" indent="0" algn="ctr">
+            <a:pPr algn="ctr" indent="0" marL="0">
               <a:buNone/>
             </a:pPr>
             <a:r>
@@ -10108,7 +9899,7 @@
             <a:endParaRPr lang="en-US" sz="1500" dirty="0"/>
           </a:p>
           <a:p>
-            <a:pPr marL="0" indent="0" algn="ctr">
+            <a:pPr algn="ctr" indent="0" marL="0">
               <a:buNone/>
             </a:pPr>
             <a:r>
@@ -10147,7 +9938,7 @@
           <a:bodyPr wrap="square" rtlCol="0" anchor="ctr"/>
           <a:lstStyle/>
           <a:p>
-            <a:pPr marL="0" indent="0" algn="ctr">
+            <a:pPr algn="ctr" indent="0" marL="0">
               <a:buNone/>
             </a:pPr>
             <a:r>
@@ -10191,13 +9982,6 @@
             <a:prstDash val="solid"/>
           </a:ln>
         </p:spPr>
-        <p:txBody>
-          <a:bodyPr/>
-          <a:lstStyle/>
-          <a:p>
-            <a:endParaRPr lang="en-US"/>
-          </a:p>
-        </p:txBody>
       </p:sp>
       <p:sp>
         <p:nvSpPr>
@@ -10220,7 +10004,7 @@
           <a:bodyPr wrap="square" rtlCol="0" anchor="ctr"/>
           <a:lstStyle/>
           <a:p>
-            <a:pPr marL="0" indent="0" algn="ctr">
+            <a:pPr algn="ctr" indent="0" marL="0">
               <a:buNone/>
             </a:pPr>
             <a:r>
@@ -10256,7 +10040,7 @@
           <a:bodyPr wrap="square" rtlCol="0" anchor="ctr"/>
           <a:lstStyle/>
           <a:p>
-            <a:pPr marL="0" indent="0" algn="ctr">
+            <a:pPr algn="ctr" indent="0" marL="0">
               <a:buNone/>
             </a:pPr>
             <a:r>
@@ -10273,7 +10057,7 @@
             <a:endParaRPr lang="en-US" sz="1500" dirty="0"/>
           </a:p>
           <a:p>
-            <a:pPr marL="0" indent="0" algn="ctr">
+            <a:pPr algn="ctr" indent="0" marL="0">
               <a:buNone/>
             </a:pPr>
             <a:r>
@@ -10312,7 +10096,7 @@
           <a:bodyPr wrap="square" rtlCol="0" anchor="ctr"/>
           <a:lstStyle/>
           <a:p>
-            <a:pPr marL="0" indent="0" algn="ctr">
+            <a:pPr algn="ctr" indent="0" marL="0">
               <a:buNone/>
             </a:pPr>
             <a:r>
@@ -10356,13 +10140,6 @@
             <a:prstDash val="solid"/>
           </a:ln>
         </p:spPr>
-        <p:txBody>
-          <a:bodyPr/>
-          <a:lstStyle/>
-          <a:p>
-            <a:endParaRPr lang="en-US"/>
-          </a:p>
-        </p:txBody>
       </p:sp>
       <p:sp>
         <p:nvSpPr>
@@ -10385,7 +10162,7 @@
           <a:bodyPr wrap="square" rtlCol="0" anchor="ctr"/>
           <a:lstStyle/>
           <a:p>
-            <a:pPr marL="0" indent="0" algn="ctr">
+            <a:pPr algn="ctr" indent="0" marL="0">
               <a:buNone/>
             </a:pPr>
             <a:r>
@@ -10421,7 +10198,7 @@
           <a:bodyPr wrap="square" rtlCol="0" anchor="ctr"/>
           <a:lstStyle/>
           <a:p>
-            <a:pPr marL="0" indent="0" algn="ctr">
+            <a:pPr algn="ctr" indent="0" marL="0">
               <a:buNone/>
             </a:pPr>
             <a:r>
@@ -10438,7 +10215,7 @@
             <a:endParaRPr lang="en-US" sz="1500" dirty="0"/>
           </a:p>
           <a:p>
-            <a:pPr marL="0" indent="0" algn="ctr">
+            <a:pPr algn="ctr" indent="0" marL="0">
               <a:buNone/>
             </a:pPr>
             <a:r>
@@ -10477,7 +10254,7 @@
           <a:bodyPr wrap="square" rtlCol="0" anchor="ctr"/>
           <a:lstStyle/>
           <a:p>
-            <a:pPr marL="0" indent="0" algn="ctr">
+            <a:pPr algn="ctr" indent="0" marL="0">
               <a:buNone/>
             </a:pPr>
             <a:r>
@@ -10516,7 +10293,7 @@
           <a:bodyPr wrap="square" rtlCol="0" anchor="ctr"/>
           <a:lstStyle/>
           <a:p>
-            <a:pPr marL="0" indent="0" algn="ctr">
+            <a:pPr algn="ctr" indent="0" marL="0">
               <a:buNone/>
             </a:pPr>
             <a:r>
@@ -10560,13 +10337,6 @@
             <a:prstDash val="solid"/>
           </a:ln>
         </p:spPr>
-        <p:txBody>
-          <a:bodyPr/>
-          <a:lstStyle/>
-          <a:p>
-            <a:endParaRPr lang="en-US"/>
-          </a:p>
-        </p:txBody>
       </p:sp>
       <p:sp>
         <p:nvSpPr>
@@ -10589,7 +10359,7 @@
           <a:bodyPr wrap="square" rtlCol="0" anchor="ctr"/>
           <a:lstStyle/>
           <a:p>
-            <a:pPr marL="0" indent="0" algn="ctr">
+            <a:pPr algn="ctr" indent="0" marL="0">
               <a:buNone/>
             </a:pPr>
             <a:r>
@@ -10606,7 +10376,7 @@
             <a:endParaRPr lang="en-US" sz="1700" dirty="0"/>
           </a:p>
           <a:p>
-            <a:pPr marL="0" indent="0" algn="ctr">
+            <a:pPr algn="ctr" indent="0" marL="0">
               <a:buNone/>
             </a:pPr>
             <a:r>
@@ -10650,13 +10420,6 @@
             <a:prstDash val="solid"/>
           </a:ln>
         </p:spPr>
-        <p:txBody>
-          <a:bodyPr/>
-          <a:lstStyle/>
-          <a:p>
-            <a:endParaRPr lang="en-US"/>
-          </a:p>
-        </p:txBody>
       </p:sp>
       <p:sp>
         <p:nvSpPr>
@@ -10679,7 +10442,7 @@
           <a:bodyPr wrap="square" rtlCol="0" anchor="ctr"/>
           <a:lstStyle/>
           <a:p>
-            <a:pPr marL="0" indent="0" algn="ctr">
+            <a:pPr algn="ctr" indent="0" marL="0">
               <a:buNone/>
             </a:pPr>
             <a:r>
@@ -10705,20 +10468,20 @@
         </p:nvSpPr>
         <p:spPr>
           <a:xfrm>
-            <a:off x="457200" y="5897880"/>
-            <a:ext cx="8375904" cy="365760"/>
-          </a:xfrm>
-          <a:prstGeom prst="rect">
-            <a:avLst/>
-          </a:prstGeom>
-          <a:noFill/>
-          <a:ln/>
-        </p:spPr>
-        <p:txBody>
-          <a:bodyPr wrap="square" rtlCol="0" anchor="ctr"/>
-          <a:lstStyle/>
-          <a:p>
-            <a:pPr marL="0" indent="0" algn="ctr">
+            <a:off x="457200" y="5669280"/>
+            <a:ext cx="8375904" cy="347472"/>
+          </a:xfrm>
+          <a:prstGeom prst="rect">
+            <a:avLst/>
+          </a:prstGeom>
+          <a:noFill/>
+          <a:ln/>
+        </p:spPr>
+        <p:txBody>
+          <a:bodyPr wrap="square" rtlCol="0" anchor="ctr"/>
+          <a:lstStyle/>
+          <a:p>
+            <a:pPr algn="ctr" indent="0" marL="0">
               <a:buNone/>
             </a:pPr>
             <a:r>
@@ -10739,6 +10502,45 @@
       <p:sp>
         <p:nvSpPr>
           <p:cNvPr id="28" name="Text 26"/>
+          <p:cNvSpPr/>
+          <p:nvPr/>
+        </p:nvSpPr>
+        <p:spPr>
+          <a:xfrm>
+            <a:off x="457200" y="6035040"/>
+            <a:ext cx="8375904" cy="228600"/>
+          </a:xfrm>
+          <a:prstGeom prst="rect">
+            <a:avLst/>
+          </a:prstGeom>
+          <a:noFill/>
+          <a:ln/>
+        </p:spPr>
+        <p:txBody>
+          <a:bodyPr wrap="square" rtlCol="0" anchor="ctr"/>
+          <a:lstStyle/>
+          <a:p>
+            <a:pPr algn="ctr" indent="0" marL="0">
+              <a:buNone/>
+            </a:pPr>
+            <a:r>
+              <a:rPr lang="en-US" sz="1000" dirty="0">
+                <a:solidFill>
+                  <a:srgbClr val="5B8DB8"/>
+                </a:solidFill>
+                <a:latin typeface="Arial" pitchFamily="34" charset="0"/>
+                <a:ea typeface="Arial" pitchFamily="34" charset="-122"/>
+                <a:cs typeface="Arial" pitchFamily="34" charset="-120"/>
+              </a:rPr>
+              <a:t>Roberto García  ·  robertogarciaits@gmail.com  ·  linkedin.com/in/robertogarciaits  ·  844 588 1313</a:t>
+            </a:r>
+            <a:endParaRPr lang="en-US" sz="1000" dirty="0"/>
+          </a:p>
+        </p:txBody>
+      </p:sp>
+      <p:sp>
+        <p:nvSpPr>
+          <p:cNvPr id="29" name="Text 27"/>
           <p:cNvSpPr/>
           <p:nvPr/>
         </p:nvSpPr>
@@ -10757,7 +10559,7 @@
           <a:bodyPr wrap="square" rtlCol="0" anchor="ctr"/>
           <a:lstStyle/>
           <a:p>
-            <a:pPr marL="0" indent="0" algn="ctr">
+            <a:pPr algn="ctr" indent="0" marL="0">
               <a:buNone/>
             </a:pPr>
             <a:r>
@@ -10824,13 +10626,6 @@
             <a:prstDash val="solid"/>
           </a:ln>
         </p:spPr>
-        <p:txBody>
-          <a:bodyPr/>
-          <a:lstStyle/>
-          <a:p>
-            <a:endParaRPr lang="en-US"/>
-          </a:p>
-        </p:txBody>
       </p:sp>
       <p:sp>
         <p:nvSpPr>
@@ -10860,13 +10655,6 @@
             <a:prstDash val="solid"/>
           </a:ln>
         </p:spPr>
-        <p:txBody>
-          <a:bodyPr/>
-          <a:lstStyle/>
-          <a:p>
-            <a:endParaRPr lang="en-US"/>
-          </a:p>
-        </p:txBody>
       </p:sp>
       <p:sp>
         <p:nvSpPr>
@@ -10896,13 +10684,6 @@
             <a:prstDash val="solid"/>
           </a:ln>
         </p:spPr>
-        <p:txBody>
-          <a:bodyPr/>
-          <a:lstStyle/>
-          <a:p>
-            <a:endParaRPr lang="en-US"/>
-          </a:p>
-        </p:txBody>
       </p:sp>
       <p:sp>
         <p:nvSpPr>
@@ -10926,13 +10707,6 @@
             <a:prstDash val="solid"/>
           </a:ln>
         </p:spPr>
-        <p:txBody>
-          <a:bodyPr/>
-          <a:lstStyle/>
-          <a:p>
-            <a:endParaRPr lang="en-US"/>
-          </a:p>
-        </p:txBody>
       </p:sp>
       <p:sp>
         <p:nvSpPr>
@@ -10958,13 +10732,6 @@
             <a:prstDash val="solid"/>
           </a:ln>
         </p:spPr>
-        <p:txBody>
-          <a:bodyPr/>
-          <a:lstStyle/>
-          <a:p>
-            <a:endParaRPr lang="en-US"/>
-          </a:p>
-        </p:txBody>
       </p:sp>
       <p:sp>
         <p:nvSpPr>
@@ -10990,13 +10757,6 @@
             <a:prstDash val="solid"/>
           </a:ln>
         </p:spPr>
-        <p:txBody>
-          <a:bodyPr/>
-          <a:lstStyle/>
-          <a:p>
-            <a:endParaRPr lang="en-US"/>
-          </a:p>
-        </p:txBody>
       </p:sp>
       <p:sp>
         <p:nvSpPr>
@@ -11019,7 +10779,7 @@
           <a:bodyPr wrap="square" rtlCol="0" anchor="ctr"/>
           <a:lstStyle/>
           <a:p>
-            <a:pPr marL="0" indent="0">
+            <a:pPr indent="0" marL="0">
               <a:buNone/>
             </a:pPr>
             <a:r>
@@ -11058,7 +10818,7 @@
           <a:bodyPr wrap="square" rtlCol="0" anchor="ctr"/>
           <a:lstStyle/>
           <a:p>
-            <a:pPr marL="0" indent="0">
+            <a:pPr indent="0" marL="0">
               <a:buNone/>
             </a:pPr>
             <a:r>
@@ -11098,13 +10858,6 @@
             <a:prstDash val="solid"/>
           </a:ln>
         </p:spPr>
-        <p:txBody>
-          <a:bodyPr/>
-          <a:lstStyle/>
-          <a:p>
-            <a:endParaRPr lang="en-US"/>
-          </a:p>
-        </p:txBody>
       </p:sp>
       <p:sp>
         <p:nvSpPr>
@@ -11132,13 +10885,6 @@
             <a:prstDash val="solid"/>
           </a:ln>
         </p:spPr>
-        <p:txBody>
-          <a:bodyPr/>
-          <a:lstStyle/>
-          <a:p>
-            <a:endParaRPr lang="en-US"/>
-          </a:p>
-        </p:txBody>
       </p:sp>
       <p:sp>
         <p:nvSpPr>
@@ -11161,7 +10907,7 @@
           <a:bodyPr wrap="square" rtlCol="0" anchor="ctr"/>
           <a:lstStyle/>
           <a:p>
-            <a:pPr marL="0" indent="0">
+            <a:pPr indent="0" marL="0">
               <a:buNone/>
             </a:pPr>
             <a:r>
@@ -11200,7 +10946,7 @@
           <a:bodyPr wrap="square" rtlCol="0" anchor="ctr"/>
           <a:lstStyle/>
           <a:p>
-            <a:pPr marL="0" indent="0">
+            <a:pPr indent="0" marL="0">
               <a:buNone/>
             </a:pPr>
             <a:r>
@@ -11244,13 +10990,6 @@
             <a:prstDash val="solid"/>
           </a:ln>
         </p:spPr>
-        <p:txBody>
-          <a:bodyPr/>
-          <a:lstStyle/>
-          <a:p>
-            <a:endParaRPr lang="en-US"/>
-          </a:p>
-        </p:txBody>
       </p:sp>
       <p:sp>
         <p:nvSpPr>
@@ -11273,7 +11012,7 @@
           <a:bodyPr wrap="square" rtlCol="0" anchor="ctr"/>
           <a:lstStyle/>
           <a:p>
-            <a:pPr marL="0" indent="0">
+            <a:pPr indent="0" marL="0">
               <a:buNone/>
             </a:pPr>
             <a:r>
@@ -11312,7 +11051,7 @@
           <a:bodyPr wrap="square" rtlCol="0" anchor="ctr"/>
           <a:lstStyle/>
           <a:p>
-            <a:pPr marL="0" indent="0">
+            <a:pPr indent="0" marL="0">
               <a:buNone/>
             </a:pPr>
             <a:r>
@@ -11356,13 +11095,6 @@
             <a:prstDash val="solid"/>
           </a:ln>
         </p:spPr>
-        <p:txBody>
-          <a:bodyPr/>
-          <a:lstStyle/>
-          <a:p>
-            <a:endParaRPr lang="en-US"/>
-          </a:p>
-        </p:txBody>
       </p:sp>
       <p:sp>
         <p:nvSpPr>
@@ -11385,7 +11117,7 @@
           <a:bodyPr wrap="square" rtlCol="0" anchor="ctr"/>
           <a:lstStyle/>
           <a:p>
-            <a:pPr marL="0" indent="0">
+            <a:pPr indent="0" marL="0">
               <a:buNone/>
             </a:pPr>
             <a:r>
@@ -11424,7 +11156,7 @@
           <a:bodyPr wrap="square" rtlCol="0" anchor="ctr"/>
           <a:lstStyle/>
           <a:p>
-            <a:pPr marL="0" indent="0">
+            <a:pPr indent="0" marL="0">
               <a:buNone/>
             </a:pPr>
             <a:r>
@@ -11468,13 +11200,6 @@
             <a:prstDash val="solid"/>
           </a:ln>
         </p:spPr>
-        <p:txBody>
-          <a:bodyPr/>
-          <a:lstStyle/>
-          <a:p>
-            <a:endParaRPr lang="en-US"/>
-          </a:p>
-        </p:txBody>
       </p:sp>
       <p:sp>
         <p:nvSpPr>
@@ -11497,7 +11222,7 @@
           <a:bodyPr wrap="square" rtlCol="0" anchor="ctr"/>
           <a:lstStyle/>
           <a:p>
-            <a:pPr marL="0" indent="0">
+            <a:pPr indent="0" marL="0">
               <a:buNone/>
             </a:pPr>
             <a:r>
@@ -11536,7 +11261,7 @@
           <a:bodyPr wrap="square" rtlCol="0" anchor="ctr"/>
           <a:lstStyle/>
           <a:p>
-            <a:pPr marL="0" indent="0">
+            <a:pPr indent="0" marL="0">
               <a:buNone/>
             </a:pPr>
             <a:r>
@@ -11575,7 +11300,7 @@
           <a:bodyPr wrap="square" rtlCol="0" anchor="ctr"/>
           <a:lstStyle/>
           <a:p>
-            <a:pPr marL="0" indent="0" algn="ctr">
+            <a:pPr algn="ctr" indent="0" marL="0">
               <a:buNone/>
             </a:pPr>
             <a:r>
@@ -11642,13 +11367,6 @@
             <a:prstDash val="solid"/>
           </a:ln>
         </p:spPr>
-        <p:txBody>
-          <a:bodyPr/>
-          <a:lstStyle/>
-          <a:p>
-            <a:endParaRPr lang="en-US"/>
-          </a:p>
-        </p:txBody>
       </p:sp>
       <p:sp>
         <p:nvSpPr>
@@ -11678,13 +11396,6 @@
             <a:prstDash val="solid"/>
           </a:ln>
         </p:spPr>
-        <p:txBody>
-          <a:bodyPr/>
-          <a:lstStyle/>
-          <a:p>
-            <a:endParaRPr lang="en-US"/>
-          </a:p>
-        </p:txBody>
       </p:sp>
       <p:sp>
         <p:nvSpPr>
@@ -11714,13 +11425,6 @@
             <a:prstDash val="solid"/>
           </a:ln>
         </p:spPr>
-        <p:txBody>
-          <a:bodyPr/>
-          <a:lstStyle/>
-          <a:p>
-            <a:endParaRPr lang="en-US"/>
-          </a:p>
-        </p:txBody>
       </p:sp>
       <p:sp>
         <p:nvSpPr>
@@ -11744,13 +11448,6 @@
             <a:prstDash val="solid"/>
           </a:ln>
         </p:spPr>
-        <p:txBody>
-          <a:bodyPr/>
-          <a:lstStyle/>
-          <a:p>
-            <a:endParaRPr lang="en-US"/>
-          </a:p>
-        </p:txBody>
       </p:sp>
       <p:sp>
         <p:nvSpPr>
@@ -11776,13 +11473,6 @@
             <a:prstDash val="solid"/>
           </a:ln>
         </p:spPr>
-        <p:txBody>
-          <a:bodyPr/>
-          <a:lstStyle/>
-          <a:p>
-            <a:endParaRPr lang="en-US"/>
-          </a:p>
-        </p:txBody>
       </p:sp>
       <p:sp>
         <p:nvSpPr>
@@ -11808,13 +11498,6 @@
             <a:prstDash val="solid"/>
           </a:ln>
         </p:spPr>
-        <p:txBody>
-          <a:bodyPr/>
-          <a:lstStyle/>
-          <a:p>
-            <a:endParaRPr lang="en-US"/>
-          </a:p>
-        </p:txBody>
       </p:sp>
       <p:sp>
         <p:nvSpPr>
@@ -11837,7 +11520,7 @@
           <a:bodyPr wrap="square" rtlCol="0" anchor="ctr"/>
           <a:lstStyle/>
           <a:p>
-            <a:pPr marL="0" indent="0">
+            <a:pPr indent="0" marL="0">
               <a:buNone/>
             </a:pPr>
             <a:r>
@@ -11876,7 +11559,7 @@
           <a:bodyPr wrap="square" rtlCol="0" anchor="ctr"/>
           <a:lstStyle/>
           <a:p>
-            <a:pPr marL="0" indent="0">
+            <a:pPr indent="0" marL="0">
               <a:buNone/>
             </a:pPr>
             <a:r>
@@ -11916,13 +11599,6 @@
             <a:prstDash val="solid"/>
           </a:ln>
         </p:spPr>
-        <p:txBody>
-          <a:bodyPr/>
-          <a:lstStyle/>
-          <a:p>
-            <a:endParaRPr lang="en-US"/>
-          </a:p>
-        </p:txBody>
       </p:sp>
       <p:sp>
         <p:nvSpPr>
@@ -11950,13 +11626,6 @@
             <a:prstDash val="solid"/>
           </a:ln>
         </p:spPr>
-        <p:txBody>
-          <a:bodyPr/>
-          <a:lstStyle/>
-          <a:p>
-            <a:endParaRPr lang="en-US"/>
-          </a:p>
-        </p:txBody>
       </p:sp>
       <p:sp>
         <p:nvSpPr>
@@ -11979,7 +11648,7 @@
           <a:bodyPr wrap="square" rtlCol="0" anchor="ctr"/>
           <a:lstStyle/>
           <a:p>
-            <a:pPr marL="0" indent="0" algn="ctr">
+            <a:pPr algn="ctr" indent="0" marL="0">
               <a:buNone/>
             </a:pPr>
             <a:r>
@@ -12015,7 +11684,7 @@
           <a:bodyPr wrap="square" rtlCol="0" anchor="ctr"/>
           <a:lstStyle/>
           <a:p>
-            <a:pPr marL="0" indent="0" algn="ctr">
+            <a:pPr algn="ctr" indent="0" marL="0">
               <a:buNone/>
             </a:pPr>
             <a:r>
@@ -12054,7 +11723,7 @@
           <a:bodyPr wrap="square" rtlCol="0" anchor="ctr"/>
           <a:lstStyle/>
           <a:p>
-            <a:pPr marL="0" indent="0" algn="ctr">
+            <a:pPr algn="ctr" indent="0" marL="0">
               <a:buNone/>
             </a:pPr>
             <a:r>
@@ -12093,7 +11762,7 @@
           <a:bodyPr wrap="square" rtlCol="0" anchor="ctr"/>
           <a:lstStyle/>
           <a:p>
-            <a:pPr marL="0" indent="0" algn="ctr">
+            <a:pPr algn="ctr" indent="0" marL="0">
               <a:buNone/>
             </a:pPr>
             <a:r>
@@ -12137,13 +11806,6 @@
             <a:prstDash val="solid"/>
           </a:ln>
         </p:spPr>
-        <p:txBody>
-          <a:bodyPr/>
-          <a:lstStyle/>
-          <a:p>
-            <a:endParaRPr lang="en-US"/>
-          </a:p>
-        </p:txBody>
       </p:sp>
       <p:sp>
         <p:nvSpPr>
@@ -12166,7 +11828,7 @@
           <a:bodyPr wrap="square" rtlCol="0" anchor="ctr"/>
           <a:lstStyle/>
           <a:p>
-            <a:pPr marL="0" indent="0" algn="ctr">
+            <a:pPr algn="ctr" indent="0" marL="0">
               <a:buNone/>
             </a:pPr>
             <a:r>
@@ -12202,7 +11864,7 @@
           <a:bodyPr wrap="square" rtlCol="0" anchor="ctr"/>
           <a:lstStyle/>
           <a:p>
-            <a:pPr marL="0" indent="0" algn="ctr">
+            <a:pPr algn="ctr" indent="0" marL="0">
               <a:buNone/>
             </a:pPr>
             <a:r>
@@ -12241,7 +11903,7 @@
           <a:bodyPr wrap="square" rtlCol="0" anchor="ctr"/>
           <a:lstStyle/>
           <a:p>
-            <a:pPr marL="0" indent="0" algn="ctr">
+            <a:pPr algn="ctr" indent="0" marL="0">
               <a:buNone/>
             </a:pPr>
             <a:r>
@@ -12280,7 +11942,7 @@
           <a:bodyPr wrap="square" rtlCol="0" anchor="ctr"/>
           <a:lstStyle/>
           <a:p>
-            <a:pPr marL="0" indent="0" algn="ctr">
+            <a:pPr algn="ctr" indent="0" marL="0">
               <a:buNone/>
             </a:pPr>
             <a:r>
@@ -12324,13 +11986,6 @@
             <a:prstDash val="solid"/>
           </a:ln>
         </p:spPr>
-        <p:txBody>
-          <a:bodyPr/>
-          <a:lstStyle/>
-          <a:p>
-            <a:endParaRPr lang="en-US"/>
-          </a:p>
-        </p:txBody>
       </p:sp>
       <p:sp>
         <p:nvSpPr>
@@ -12353,7 +12008,7 @@
           <a:bodyPr wrap="square" rtlCol="0" anchor="ctr"/>
           <a:lstStyle/>
           <a:p>
-            <a:pPr marL="0" indent="0" algn="ctr">
+            <a:pPr algn="ctr" indent="0" marL="0">
               <a:buNone/>
             </a:pPr>
             <a:r>
@@ -12389,7 +12044,7 @@
           <a:bodyPr wrap="square" rtlCol="0" anchor="ctr"/>
           <a:lstStyle/>
           <a:p>
-            <a:pPr marL="0" indent="0" algn="ctr">
+            <a:pPr algn="ctr" indent="0" marL="0">
               <a:buNone/>
             </a:pPr>
             <a:r>
@@ -12428,7 +12083,7 @@
           <a:bodyPr wrap="square" rtlCol="0" anchor="ctr"/>
           <a:lstStyle/>
           <a:p>
-            <a:pPr marL="0" indent="0" algn="ctr">
+            <a:pPr algn="ctr" indent="0" marL="0">
               <a:buNone/>
             </a:pPr>
             <a:r>
@@ -12467,7 +12122,7 @@
           <a:bodyPr wrap="square" rtlCol="0" anchor="ctr"/>
           <a:lstStyle/>
           <a:p>
-            <a:pPr marL="0" indent="0" algn="ctr">
+            <a:pPr algn="ctr" indent="0" marL="0">
               <a:buNone/>
             </a:pPr>
             <a:r>
@@ -12511,13 +12166,6 @@
             <a:prstDash val="solid"/>
           </a:ln>
         </p:spPr>
-        <p:txBody>
-          <a:bodyPr/>
-          <a:lstStyle/>
-          <a:p>
-            <a:endParaRPr lang="en-US"/>
-          </a:p>
-        </p:txBody>
       </p:sp>
       <p:sp>
         <p:nvSpPr>
@@ -12540,7 +12188,7 @@
           <a:bodyPr wrap="square" rtlCol="0" anchor="ctr"/>
           <a:lstStyle/>
           <a:p>
-            <a:pPr marL="0" indent="0" algn="ctr">
+            <a:pPr algn="ctr" indent="0" marL="0">
               <a:buNone/>
             </a:pPr>
             <a:r>
@@ -12576,7 +12224,7 @@
           <a:bodyPr wrap="square" rtlCol="0" anchor="ctr"/>
           <a:lstStyle/>
           <a:p>
-            <a:pPr marL="0" indent="0" algn="ctr">
+            <a:pPr algn="ctr" indent="0" marL="0">
               <a:buNone/>
             </a:pPr>
             <a:r>
@@ -12615,7 +12263,7 @@
           <a:bodyPr wrap="square" rtlCol="0" anchor="ctr"/>
           <a:lstStyle/>
           <a:p>
-            <a:pPr marL="0" indent="0" algn="ctr">
+            <a:pPr algn="ctr" indent="0" marL="0">
               <a:buNone/>
             </a:pPr>
             <a:r>
@@ -12654,7 +12302,7 @@
           <a:bodyPr wrap="square" rtlCol="0" anchor="ctr"/>
           <a:lstStyle/>
           <a:p>
-            <a:pPr marL="0" indent="0" algn="ctr">
+            <a:pPr algn="ctr" indent="0" marL="0">
               <a:buNone/>
             </a:pPr>
             <a:r>
@@ -12698,13 +12346,6 @@
             <a:prstDash val="solid"/>
           </a:ln>
         </p:spPr>
-        <p:txBody>
-          <a:bodyPr/>
-          <a:lstStyle/>
-          <a:p>
-            <a:endParaRPr lang="en-US"/>
-          </a:p>
-        </p:txBody>
       </p:sp>
       <p:sp>
         <p:nvSpPr>
@@ -12727,7 +12368,7 @@
           <a:bodyPr wrap="square" rtlCol="0" anchor="ctr"/>
           <a:lstStyle/>
           <a:p>
-            <a:pPr marL="0" indent="0" algn="ctr">
+            <a:pPr algn="ctr" indent="0" marL="0">
               <a:buNone/>
             </a:pPr>
             <a:r>
@@ -12763,7 +12404,7 @@
           <a:bodyPr wrap="square" rtlCol="0" anchor="ctr"/>
           <a:lstStyle/>
           <a:p>
-            <a:pPr marL="0" indent="0" algn="ctr">
+            <a:pPr algn="ctr" indent="0" marL="0">
               <a:buNone/>
             </a:pPr>
             <a:r>
@@ -12802,7 +12443,7 @@
           <a:bodyPr wrap="square" rtlCol="0" anchor="ctr"/>
           <a:lstStyle/>
           <a:p>
-            <a:pPr marL="0" indent="0" algn="ctr">
+            <a:pPr algn="ctr" indent="0" marL="0">
               <a:buNone/>
             </a:pPr>
             <a:r>
@@ -12841,7 +12482,7 @@
           <a:bodyPr wrap="square" rtlCol="0" anchor="ctr"/>
           <a:lstStyle/>
           <a:p>
-            <a:pPr marL="0" indent="0" algn="ctr">
+            <a:pPr algn="ctr" indent="0" marL="0">
               <a:buNone/>
             </a:pPr>
             <a:r>
@@ -12885,13 +12526,6 @@
             <a:prstDash val="solid"/>
           </a:ln>
         </p:spPr>
-        <p:txBody>
-          <a:bodyPr/>
-          <a:lstStyle/>
-          <a:p>
-            <a:endParaRPr lang="en-US"/>
-          </a:p>
-        </p:txBody>
       </p:sp>
       <p:sp>
         <p:nvSpPr>
@@ -12914,7 +12548,7 @@
           <a:bodyPr wrap="square" rtlCol="0" anchor="ctr"/>
           <a:lstStyle/>
           <a:p>
-            <a:pPr marL="0" indent="0" algn="ctr">
+            <a:pPr algn="ctr" indent="0" marL="0">
               <a:buNone/>
             </a:pPr>
             <a:r>
@@ -12950,7 +12584,7 @@
           <a:bodyPr wrap="square" rtlCol="0" anchor="ctr"/>
           <a:lstStyle/>
           <a:p>
-            <a:pPr marL="0" indent="0" algn="ctr">
+            <a:pPr algn="ctr" indent="0" marL="0">
               <a:buNone/>
             </a:pPr>
             <a:r>
@@ -12989,7 +12623,7 @@
           <a:bodyPr wrap="square" rtlCol="0" anchor="ctr"/>
           <a:lstStyle/>
           <a:p>
-            <a:pPr marL="0" indent="0" algn="ctr">
+            <a:pPr algn="ctr" indent="0" marL="0">
               <a:buNone/>
             </a:pPr>
             <a:r>
@@ -13028,7 +12662,7 @@
           <a:bodyPr wrap="square" rtlCol="0" anchor="ctr"/>
           <a:lstStyle/>
           <a:p>
-            <a:pPr marL="0" indent="0" algn="ctr">
+            <a:pPr algn="ctr" indent="0" marL="0">
               <a:buNone/>
             </a:pPr>
             <a:r>
@@ -13068,13 +12702,6 @@
             <a:prstDash val="solid"/>
           </a:ln>
         </p:spPr>
-        <p:txBody>
-          <a:bodyPr/>
-          <a:lstStyle/>
-          <a:p>
-            <a:endParaRPr lang="en-US"/>
-          </a:p>
-        </p:txBody>
       </p:sp>
       <p:sp>
         <p:nvSpPr>
@@ -13097,7 +12724,7 @@
           <a:bodyPr wrap="square" rtlCol="0" anchor="ctr"/>
           <a:lstStyle/>
           <a:p>
-            <a:pPr marL="0" indent="0">
+            <a:pPr indent="0" marL="0">
               <a:buNone/>
             </a:pPr>
             <a:r>
@@ -13136,7 +12763,7 @@
           <a:bodyPr wrap="square" rtlCol="0" anchor="ctr"/>
           <a:lstStyle/>
           <a:p>
-            <a:pPr marL="0" indent="0" algn="l">
+            <a:pPr algn="l" indent="0" marL="0">
               <a:buNone/>
             </a:pPr>
             <a:r>
@@ -13203,13 +12830,6 @@
             <a:prstDash val="solid"/>
           </a:ln>
         </p:spPr>
-        <p:txBody>
-          <a:bodyPr/>
-          <a:lstStyle/>
-          <a:p>
-            <a:endParaRPr lang="en-US"/>
-          </a:p>
-        </p:txBody>
       </p:sp>
       <p:sp>
         <p:nvSpPr>
@@ -13239,13 +12859,6 @@
             <a:prstDash val="solid"/>
           </a:ln>
         </p:spPr>
-        <p:txBody>
-          <a:bodyPr/>
-          <a:lstStyle/>
-          <a:p>
-            <a:endParaRPr lang="en-US"/>
-          </a:p>
-        </p:txBody>
       </p:sp>
       <p:sp>
         <p:nvSpPr>
@@ -13275,13 +12888,6 @@
             <a:prstDash val="solid"/>
           </a:ln>
         </p:spPr>
-        <p:txBody>
-          <a:bodyPr/>
-          <a:lstStyle/>
-          <a:p>
-            <a:endParaRPr lang="en-US"/>
-          </a:p>
-        </p:txBody>
       </p:sp>
       <p:sp>
         <p:nvSpPr>
@@ -13311,13 +12917,6 @@
             <a:prstDash val="solid"/>
           </a:ln>
         </p:spPr>
-        <p:txBody>
-          <a:bodyPr/>
-          <a:lstStyle/>
-          <a:p>
-            <a:endParaRPr lang="en-US"/>
-          </a:p>
-        </p:txBody>
       </p:sp>
       <p:sp>
         <p:nvSpPr>
@@ -13343,13 +12942,6 @@
             <a:prstDash val="solid"/>
           </a:ln>
         </p:spPr>
-        <p:txBody>
-          <a:bodyPr/>
-          <a:lstStyle/>
-          <a:p>
-            <a:endParaRPr lang="en-US"/>
-          </a:p>
-        </p:txBody>
       </p:sp>
       <p:sp>
         <p:nvSpPr>
@@ -13375,13 +12967,6 @@
             <a:prstDash val="solid"/>
           </a:ln>
         </p:spPr>
-        <p:txBody>
-          <a:bodyPr/>
-          <a:lstStyle/>
-          <a:p>
-            <a:endParaRPr lang="en-US"/>
-          </a:p>
-        </p:txBody>
       </p:sp>
       <p:sp>
         <p:nvSpPr>
@@ -13404,7 +12989,7 @@
           <a:bodyPr wrap="square" rtlCol="0" anchor="ctr"/>
           <a:lstStyle/>
           <a:p>
-            <a:pPr marL="0" indent="0" algn="ctr">
+            <a:pPr algn="ctr" indent="0" marL="0">
               <a:buNone/>
             </a:pPr>
             <a:r>
@@ -13440,7 +13025,7 @@
           <a:bodyPr wrap="square" rtlCol="0" anchor="ctr"/>
           <a:lstStyle/>
           <a:p>
-            <a:pPr marL="0" indent="0" algn="ctr">
+            <a:pPr algn="ctr" indent="0" marL="0">
               <a:buNone/>
             </a:pPr>
             <a:r>
@@ -13480,13 +13065,6 @@
             <a:prstDash val="solid"/>
           </a:ln>
         </p:spPr>
-        <p:txBody>
-          <a:bodyPr/>
-          <a:lstStyle/>
-          <a:p>
-            <a:endParaRPr lang="en-US"/>
-          </a:p>
-        </p:txBody>
       </p:sp>
       <p:sp>
         <p:nvSpPr>
@@ -13509,7 +13087,7 @@
           <a:bodyPr wrap="square" rtlCol="0" anchor="ctr"/>
           <a:lstStyle/>
           <a:p>
-            <a:pPr marL="0" indent="0" algn="ctr">
+            <a:pPr algn="ctr" indent="0" marL="0">
               <a:lnSpc>
                 <a:spcPct val="140000"/>
               </a:lnSpc>
@@ -13529,7 +13107,7 @@
             <a:endParaRPr lang="en-US" sz="2000" dirty="0"/>
           </a:p>
           <a:p>
-            <a:pPr marL="0" indent="0" algn="ctr">
+            <a:pPr algn="ctr" indent="0" marL="0">
               <a:lnSpc>
                 <a:spcPct val="140000"/>
               </a:lnSpc>
@@ -13549,7 +13127,7 @@
             <a:endParaRPr lang="en-US" sz="2000" dirty="0"/>
           </a:p>
           <a:p>
-            <a:pPr marL="0" indent="0" algn="ctr">
+            <a:pPr algn="ctr" indent="0" marL="0">
               <a:lnSpc>
                 <a:spcPct val="140000"/>
               </a:lnSpc>
@@ -13596,13 +13174,6 @@
             <a:prstDash val="solid"/>
           </a:ln>
         </p:spPr>
-        <p:txBody>
-          <a:bodyPr/>
-          <a:lstStyle/>
-          <a:p>
-            <a:endParaRPr lang="en-US"/>
-          </a:p>
-        </p:txBody>
       </p:sp>
       <p:sp>
         <p:nvSpPr>
@@ -13625,7 +13196,7 @@
           <a:bodyPr wrap="square" rtlCol="0" anchor="ctr"/>
           <a:lstStyle/>
           <a:p>
-            <a:pPr marL="0" indent="0" algn="ctr">
+            <a:pPr algn="ctr" indent="0" marL="0">
               <a:buNone/>
             </a:pPr>
             <a:r>
@@ -13669,13 +13240,6 @@
             <a:prstDash val="solid"/>
           </a:ln>
         </p:spPr>
-        <p:txBody>
-          <a:bodyPr/>
-          <a:lstStyle/>
-          <a:p>
-            <a:endParaRPr lang="en-US"/>
-          </a:p>
-        </p:txBody>
       </p:sp>
       <p:sp>
         <p:nvSpPr>
@@ -13698,7 +13262,7 @@
           <a:bodyPr wrap="square" rtlCol="0" anchor="ctr"/>
           <a:lstStyle/>
           <a:p>
-            <a:pPr marL="0" indent="0" algn="ctr">
+            <a:pPr algn="ctr" indent="0" marL="0">
               <a:buNone/>
             </a:pPr>
             <a:r>
@@ -13742,13 +13306,6 @@
             <a:prstDash val="solid"/>
           </a:ln>
         </p:spPr>
-        <p:txBody>
-          <a:bodyPr/>
-          <a:lstStyle/>
-          <a:p>
-            <a:endParaRPr lang="en-US"/>
-          </a:p>
-        </p:txBody>
       </p:sp>
       <p:sp>
         <p:nvSpPr>
@@ -13771,7 +13328,7 @@
           <a:bodyPr wrap="square" rtlCol="0" anchor="ctr"/>
           <a:lstStyle/>
           <a:p>
-            <a:pPr marL="0" indent="0" algn="ctr">
+            <a:pPr algn="ctr" indent="0" marL="0">
               <a:buNone/>
             </a:pPr>
             <a:r>
@@ -13810,7 +13367,7 @@
           <a:bodyPr wrap="square" rtlCol="0" anchor="ctr"/>
           <a:lstStyle/>
           <a:p>
-            <a:pPr marL="0" indent="0" algn="ctr">
+            <a:pPr algn="ctr" indent="0" marL="0">
               <a:buNone/>
             </a:pPr>
             <a:r>
@@ -13877,13 +13434,6 @@
             <a:prstDash val="solid"/>
           </a:ln>
         </p:spPr>
-        <p:txBody>
-          <a:bodyPr/>
-          <a:lstStyle/>
-          <a:p>
-            <a:endParaRPr lang="en-US"/>
-          </a:p>
-        </p:txBody>
       </p:sp>
       <p:sp>
         <p:nvSpPr>
@@ -13913,13 +13463,6 @@
             <a:prstDash val="solid"/>
           </a:ln>
         </p:spPr>
-        <p:txBody>
-          <a:bodyPr/>
-          <a:lstStyle/>
-          <a:p>
-            <a:endParaRPr lang="en-US"/>
-          </a:p>
-        </p:txBody>
       </p:sp>
       <p:sp>
         <p:nvSpPr>
@@ -13949,13 +13492,6 @@
             <a:prstDash val="solid"/>
           </a:ln>
         </p:spPr>
-        <p:txBody>
-          <a:bodyPr/>
-          <a:lstStyle/>
-          <a:p>
-            <a:endParaRPr lang="en-US"/>
-          </a:p>
-        </p:txBody>
       </p:sp>
       <p:sp>
         <p:nvSpPr>
@@ -13979,13 +13515,6 @@
             <a:prstDash val="solid"/>
           </a:ln>
         </p:spPr>
-        <p:txBody>
-          <a:bodyPr/>
-          <a:lstStyle/>
-          <a:p>
-            <a:endParaRPr lang="en-US"/>
-          </a:p>
-        </p:txBody>
       </p:sp>
       <p:sp>
         <p:nvSpPr>
@@ -14011,13 +13540,6 @@
             <a:prstDash val="solid"/>
           </a:ln>
         </p:spPr>
-        <p:txBody>
-          <a:bodyPr/>
-          <a:lstStyle/>
-          <a:p>
-            <a:endParaRPr lang="en-US"/>
-          </a:p>
-        </p:txBody>
       </p:sp>
       <p:sp>
         <p:nvSpPr>
@@ -14043,13 +13565,6 @@
             <a:prstDash val="solid"/>
           </a:ln>
         </p:spPr>
-        <p:txBody>
-          <a:bodyPr/>
-          <a:lstStyle/>
-          <a:p>
-            <a:endParaRPr lang="en-US"/>
-          </a:p>
-        </p:txBody>
       </p:sp>
       <p:sp>
         <p:nvSpPr>
@@ -14072,7 +13587,7 @@
           <a:bodyPr wrap="square" rtlCol="0" anchor="ctr"/>
           <a:lstStyle/>
           <a:p>
-            <a:pPr marL="0" indent="0">
+            <a:pPr indent="0" marL="0">
               <a:buNone/>
             </a:pPr>
             <a:r>
@@ -14111,7 +13626,7 @@
           <a:bodyPr wrap="square" rtlCol="0" anchor="ctr"/>
           <a:lstStyle/>
           <a:p>
-            <a:pPr marL="0" indent="0">
+            <a:pPr indent="0" marL="0">
               <a:buNone/>
             </a:pPr>
             <a:r>
@@ -14151,13 +13666,6 @@
             <a:prstDash val="solid"/>
           </a:ln>
         </p:spPr>
-        <p:txBody>
-          <a:bodyPr/>
-          <a:lstStyle/>
-          <a:p>
-            <a:endParaRPr lang="en-US"/>
-          </a:p>
-        </p:txBody>
       </p:sp>
       <p:sp>
         <p:nvSpPr>
@@ -14185,13 +13693,6 @@
             <a:prstDash val="solid"/>
           </a:ln>
         </p:spPr>
-        <p:txBody>
-          <a:bodyPr/>
-          <a:lstStyle/>
-          <a:p>
-            <a:endParaRPr lang="en-US"/>
-          </a:p>
-        </p:txBody>
       </p:sp>
       <p:sp>
         <p:nvSpPr>
@@ -14214,7 +13715,7 @@
           <a:bodyPr wrap="square" rtlCol="0" anchor="ctr"/>
           <a:lstStyle/>
           <a:p>
-            <a:pPr marL="0" indent="0" algn="ctr">
+            <a:pPr algn="ctr" indent="0" marL="0">
               <a:buNone/>
             </a:pPr>
             <a:r>
@@ -14250,7 +13751,7 @@
           <a:bodyPr wrap="square" rtlCol="0" anchor="ctr"/>
           <a:lstStyle/>
           <a:p>
-            <a:pPr marL="0" indent="0" algn="ctr">
+            <a:pPr algn="ctr" indent="0" marL="0">
               <a:buNone/>
             </a:pPr>
             <a:r>
@@ -14267,7 +13768,7 @@
             <a:endParaRPr lang="en-US" sz="1200" dirty="0"/>
           </a:p>
           <a:p>
-            <a:pPr marL="0" indent="0" algn="ctr">
+            <a:pPr algn="ctr" indent="0" marL="0">
               <a:buNone/>
             </a:pPr>
             <a:r>
@@ -14306,7 +13807,7 @@
           <a:bodyPr wrap="square" rtlCol="0" anchor="ctr"/>
           <a:lstStyle/>
           <a:p>
-            <a:pPr marL="0" indent="0" algn="ctr">
+            <a:pPr algn="ctr" indent="0" marL="0">
               <a:buNone/>
             </a:pPr>
             <a:r>
@@ -14350,13 +13851,6 @@
             <a:prstDash val="solid"/>
           </a:ln>
         </p:spPr>
-        <p:txBody>
-          <a:bodyPr/>
-          <a:lstStyle/>
-          <a:p>
-            <a:endParaRPr lang="en-US"/>
-          </a:p>
-        </p:txBody>
       </p:sp>
       <p:sp>
         <p:nvSpPr>
@@ -14379,7 +13873,7 @@
           <a:bodyPr wrap="square" rtlCol="0" anchor="ctr"/>
           <a:lstStyle/>
           <a:p>
-            <a:pPr marL="0" indent="0" algn="ctr">
+            <a:pPr algn="ctr" indent="0" marL="0">
               <a:buNone/>
             </a:pPr>
             <a:r>
@@ -14415,7 +13909,7 @@
           <a:bodyPr wrap="square" rtlCol="0" anchor="ctr"/>
           <a:lstStyle/>
           <a:p>
-            <a:pPr marL="0" indent="0" algn="ctr">
+            <a:pPr algn="ctr" indent="0" marL="0">
               <a:buNone/>
             </a:pPr>
             <a:r>
@@ -14432,7 +13926,7 @@
             <a:endParaRPr lang="en-US" sz="1200" dirty="0"/>
           </a:p>
           <a:p>
-            <a:pPr marL="0" indent="0" algn="ctr">
+            <a:pPr algn="ctr" indent="0" marL="0">
               <a:buNone/>
             </a:pPr>
             <a:r>
@@ -14471,7 +13965,7 @@
           <a:bodyPr wrap="square" rtlCol="0" anchor="ctr"/>
           <a:lstStyle/>
           <a:p>
-            <a:pPr marL="0" indent="0" algn="ctr">
+            <a:pPr algn="ctr" indent="0" marL="0">
               <a:buNone/>
             </a:pPr>
             <a:r>
@@ -14515,13 +14009,6 @@
             <a:prstDash val="solid"/>
           </a:ln>
         </p:spPr>
-        <p:txBody>
-          <a:bodyPr/>
-          <a:lstStyle/>
-          <a:p>
-            <a:endParaRPr lang="en-US"/>
-          </a:p>
-        </p:txBody>
       </p:sp>
       <p:sp>
         <p:nvSpPr>
@@ -14544,7 +14031,7 @@
           <a:bodyPr wrap="square" rtlCol="0" anchor="ctr"/>
           <a:lstStyle/>
           <a:p>
-            <a:pPr marL="0" indent="0" algn="ctr">
+            <a:pPr algn="ctr" indent="0" marL="0">
               <a:buNone/>
             </a:pPr>
             <a:r>
@@ -14580,7 +14067,7 @@
           <a:bodyPr wrap="square" rtlCol="0" anchor="ctr"/>
           <a:lstStyle/>
           <a:p>
-            <a:pPr marL="0" indent="0" algn="ctr">
+            <a:pPr algn="ctr" indent="0" marL="0">
               <a:buNone/>
             </a:pPr>
             <a:r>
@@ -14597,7 +14084,7 @@
             <a:endParaRPr lang="en-US" sz="1200" dirty="0"/>
           </a:p>
           <a:p>
-            <a:pPr marL="0" indent="0" algn="ctr">
+            <a:pPr algn="ctr" indent="0" marL="0">
               <a:buNone/>
             </a:pPr>
             <a:r>
@@ -14636,7 +14123,7 @@
           <a:bodyPr wrap="square" rtlCol="0" anchor="ctr"/>
           <a:lstStyle/>
           <a:p>
-            <a:pPr marL="0" indent="0" algn="ctr">
+            <a:pPr algn="ctr" indent="0" marL="0">
               <a:buNone/>
             </a:pPr>
             <a:r>
@@ -14680,13 +14167,6 @@
             <a:prstDash val="solid"/>
           </a:ln>
         </p:spPr>
-        <p:txBody>
-          <a:bodyPr/>
-          <a:lstStyle/>
-          <a:p>
-            <a:endParaRPr lang="en-US"/>
-          </a:p>
-        </p:txBody>
       </p:sp>
       <p:sp>
         <p:nvSpPr>
@@ -14709,7 +14189,7 @@
           <a:bodyPr wrap="square" rtlCol="0" anchor="ctr"/>
           <a:lstStyle/>
           <a:p>
-            <a:pPr marL="0" indent="0" algn="ctr">
+            <a:pPr algn="ctr" indent="0" marL="0">
               <a:buNone/>
             </a:pPr>
             <a:r>
@@ -14745,7 +14225,7 @@
           <a:bodyPr wrap="square" rtlCol="0" anchor="ctr"/>
           <a:lstStyle/>
           <a:p>
-            <a:pPr marL="0" indent="0" algn="ctr">
+            <a:pPr algn="ctr" indent="0" marL="0">
               <a:buNone/>
             </a:pPr>
             <a:r>
@@ -14762,7 +14242,7 @@
             <a:endParaRPr lang="en-US" sz="1200" dirty="0"/>
           </a:p>
           <a:p>
-            <a:pPr marL="0" indent="0" algn="ctr">
+            <a:pPr algn="ctr" indent="0" marL="0">
               <a:buNone/>
             </a:pPr>
             <a:r>
@@ -14806,13 +14286,6 @@
             <a:prstDash val="solid"/>
           </a:ln>
         </p:spPr>
-        <p:txBody>
-          <a:bodyPr/>
-          <a:lstStyle/>
-          <a:p>
-            <a:endParaRPr lang="en-US"/>
-          </a:p>
-        </p:txBody>
       </p:sp>
       <p:sp>
         <p:nvSpPr>
@@ -14835,7 +14308,7 @@
           <a:bodyPr wrap="square" rtlCol="0" anchor="ctr"/>
           <a:lstStyle/>
           <a:p>
-            <a:pPr marL="0" indent="0" algn="ctr">
+            <a:pPr algn="ctr" indent="0" marL="0">
               <a:buNone/>
             </a:pPr>
             <a:r>
@@ -14871,7 +14344,7 @@
           <a:bodyPr wrap="square" rtlCol="0" anchor="ctr"/>
           <a:lstStyle/>
           <a:p>
-            <a:pPr marL="0" indent="0">
+            <a:pPr indent="0" marL="0">
               <a:buNone/>
             </a:pPr>
             <a:r>
@@ -14888,7 +14361,7 @@
             <a:endParaRPr lang="en-US" sz="1300" dirty="0"/>
           </a:p>
           <a:p>
-            <a:pPr marL="0" indent="0">
+            <a:pPr indent="0" marL="0">
               <a:buNone/>
             </a:pPr>
             <a:r>
@@ -14927,7 +14400,7 @@
           <a:bodyPr wrap="square" rtlCol="0" anchor="ctr"/>
           <a:lstStyle/>
           <a:p>
-            <a:pPr marL="0" indent="0" algn="ctr">
+            <a:pPr algn="ctr" indent="0" marL="0">
               <a:buNone/>
             </a:pPr>
             <a:r>
@@ -14994,13 +14467,6 @@
             <a:prstDash val="solid"/>
           </a:ln>
         </p:spPr>
-        <p:txBody>
-          <a:bodyPr/>
-          <a:lstStyle/>
-          <a:p>
-            <a:endParaRPr lang="en-US"/>
-          </a:p>
-        </p:txBody>
       </p:sp>
       <p:sp>
         <p:nvSpPr>
@@ -15030,13 +14496,6 @@
             <a:prstDash val="solid"/>
           </a:ln>
         </p:spPr>
-        <p:txBody>
-          <a:bodyPr/>
-          <a:lstStyle/>
-          <a:p>
-            <a:endParaRPr lang="en-US"/>
-          </a:p>
-        </p:txBody>
       </p:sp>
       <p:sp>
         <p:nvSpPr>
@@ -15066,13 +14525,6 @@
             <a:prstDash val="solid"/>
           </a:ln>
         </p:spPr>
-        <p:txBody>
-          <a:bodyPr/>
-          <a:lstStyle/>
-          <a:p>
-            <a:endParaRPr lang="en-US"/>
-          </a:p>
-        </p:txBody>
       </p:sp>
       <p:sp>
         <p:nvSpPr>
@@ -15098,13 +14550,6 @@
             <a:prstDash val="solid"/>
           </a:ln>
         </p:spPr>
-        <p:txBody>
-          <a:bodyPr/>
-          <a:lstStyle/>
-          <a:p>
-            <a:endParaRPr lang="en-US"/>
-          </a:p>
-        </p:txBody>
       </p:sp>
       <p:sp>
         <p:nvSpPr>
@@ -15130,13 +14575,6 @@
             <a:prstDash val="solid"/>
           </a:ln>
         </p:spPr>
-        <p:txBody>
-          <a:bodyPr/>
-          <a:lstStyle/>
-          <a:p>
-            <a:endParaRPr lang="en-US"/>
-          </a:p>
-        </p:txBody>
       </p:sp>
       <p:sp>
         <p:nvSpPr>
@@ -15159,7 +14597,7 @@
           <a:bodyPr wrap="square" rtlCol="0" anchor="ctr"/>
           <a:lstStyle/>
           <a:p>
-            <a:pPr marL="0" indent="0">
+            <a:pPr indent="0" marL="0">
               <a:buNone/>
             </a:pPr>
             <a:r>
@@ -15198,7 +14636,7 @@
           <a:bodyPr wrap="square" rtlCol="0" anchor="ctr"/>
           <a:lstStyle/>
           <a:p>
-            <a:pPr marL="0" indent="0">
+            <a:pPr indent="0" marL="0">
               <a:buNone/>
             </a:pPr>
             <a:r>
@@ -15238,13 +14676,6 @@
             <a:prstDash val="solid"/>
           </a:ln>
         </p:spPr>
-        <p:txBody>
-          <a:bodyPr/>
-          <a:lstStyle/>
-          <a:p>
-            <a:endParaRPr lang="en-US"/>
-          </a:p>
-        </p:txBody>
       </p:sp>
       <p:sp>
         <p:nvSpPr>
@@ -15272,13 +14703,6 @@
             <a:prstDash val="solid"/>
           </a:ln>
         </p:spPr>
-        <p:txBody>
-          <a:bodyPr/>
-          <a:lstStyle/>
-          <a:p>
-            <a:endParaRPr lang="en-US"/>
-          </a:p>
-        </p:txBody>
       </p:sp>
       <p:sp>
         <p:nvSpPr>
@@ -15301,7 +14725,7 @@
           <a:bodyPr wrap="square" rtlCol="0" anchor="ctr"/>
           <a:lstStyle/>
           <a:p>
-            <a:pPr marL="0" indent="0" algn="ctr">
+            <a:pPr algn="ctr" indent="0" marL="0">
               <a:buNone/>
             </a:pPr>
             <a:r>
@@ -15337,7 +14761,7 @@
           <a:bodyPr wrap="square" rtlCol="0" anchor="ctr"/>
           <a:lstStyle/>
           <a:p>
-            <a:pPr marL="0" indent="0">
+            <a:pPr indent="0" marL="0">
               <a:buNone/>
             </a:pPr>
             <a:r>
@@ -15376,7 +14800,7 @@
           <a:bodyPr wrap="square" rtlCol="0" anchor="ctr"/>
           <a:lstStyle/>
           <a:p>
-            <a:pPr marL="0" indent="0">
+            <a:pPr indent="0" marL="0">
               <a:buNone/>
             </a:pPr>
             <a:r>
@@ -15420,13 +14844,6 @@
             <a:prstDash val="solid"/>
           </a:ln>
         </p:spPr>
-        <p:txBody>
-          <a:bodyPr/>
-          <a:lstStyle/>
-          <a:p>
-            <a:endParaRPr lang="en-US"/>
-          </a:p>
-        </p:txBody>
       </p:sp>
       <p:sp>
         <p:nvSpPr>
@@ -15449,7 +14866,7 @@
           <a:bodyPr wrap="square" rtlCol="0" anchor="ctr"/>
           <a:lstStyle/>
           <a:p>
-            <a:pPr marL="0" indent="0" algn="ctr">
+            <a:pPr algn="ctr" indent="0" marL="0">
               <a:buNone/>
             </a:pPr>
             <a:r>
@@ -15485,7 +14902,7 @@
           <a:bodyPr wrap="square" rtlCol="0" anchor="ctr"/>
           <a:lstStyle/>
           <a:p>
-            <a:pPr marL="0" indent="0">
+            <a:pPr indent="0" marL="0">
               <a:buNone/>
             </a:pPr>
             <a:r>
@@ -15524,7 +14941,7 @@
           <a:bodyPr wrap="square" rtlCol="0" anchor="ctr"/>
           <a:lstStyle/>
           <a:p>
-            <a:pPr marL="0" indent="0">
+            <a:pPr indent="0" marL="0">
               <a:buNone/>
             </a:pPr>
             <a:r>
@@ -15568,13 +14985,6 @@
             <a:prstDash val="solid"/>
           </a:ln>
         </p:spPr>
-        <p:txBody>
-          <a:bodyPr/>
-          <a:lstStyle/>
-          <a:p>
-            <a:endParaRPr lang="en-US"/>
-          </a:p>
-        </p:txBody>
       </p:sp>
       <p:sp>
         <p:nvSpPr>
@@ -15597,7 +15007,7 @@
           <a:bodyPr wrap="square" rtlCol="0" anchor="ctr"/>
           <a:lstStyle/>
           <a:p>
-            <a:pPr marL="0" indent="0" algn="ctr">
+            <a:pPr algn="ctr" indent="0" marL="0">
               <a:buNone/>
             </a:pPr>
             <a:r>
@@ -15633,7 +15043,7 @@
           <a:bodyPr wrap="square" rtlCol="0" anchor="ctr"/>
           <a:lstStyle/>
           <a:p>
-            <a:pPr marL="0" indent="0">
+            <a:pPr indent="0" marL="0">
               <a:buNone/>
             </a:pPr>
             <a:r>
@@ -15672,7 +15082,7 @@
           <a:bodyPr wrap="square" rtlCol="0" anchor="ctr"/>
           <a:lstStyle/>
           <a:p>
-            <a:pPr marL="0" indent="0">
+            <a:pPr indent="0" marL="0">
               <a:buNone/>
             </a:pPr>
             <a:r>
@@ -15711,7 +15121,7 @@
           <a:bodyPr wrap="square" rtlCol="0" anchor="ctr"/>
           <a:lstStyle/>
           <a:p>
-            <a:pPr marL="0" indent="0" algn="ctr">
+            <a:pPr algn="ctr" indent="0" marL="0">
               <a:buNone/>
             </a:pPr>
             <a:r>
@@ -15750,7 +15160,7 @@
           <a:bodyPr wrap="square" rtlCol="0" anchor="ctr"/>
           <a:lstStyle/>
           <a:p>
-            <a:pPr marL="0" indent="0" algn="ctr">
+            <a:pPr algn="ctr" indent="0" marL="0">
               <a:buNone/>
             </a:pPr>
             <a:r>
@@ -15817,13 +15227,6 @@
             <a:prstDash val="solid"/>
           </a:ln>
         </p:spPr>
-        <p:txBody>
-          <a:bodyPr/>
-          <a:lstStyle/>
-          <a:p>
-            <a:endParaRPr lang="en-US"/>
-          </a:p>
-        </p:txBody>
       </p:sp>
       <p:sp>
         <p:nvSpPr>
@@ -15853,13 +15256,6 @@
             <a:prstDash val="solid"/>
           </a:ln>
         </p:spPr>
-        <p:txBody>
-          <a:bodyPr/>
-          <a:lstStyle/>
-          <a:p>
-            <a:endParaRPr lang="en-US"/>
-          </a:p>
-        </p:txBody>
       </p:sp>
       <p:sp>
         <p:nvSpPr>
@@ -15889,13 +15285,6 @@
             <a:prstDash val="solid"/>
           </a:ln>
         </p:spPr>
-        <p:txBody>
-          <a:bodyPr/>
-          <a:lstStyle/>
-          <a:p>
-            <a:endParaRPr lang="en-US"/>
-          </a:p>
-        </p:txBody>
       </p:sp>
       <p:sp>
         <p:nvSpPr>
@@ -15925,13 +15314,6 @@
             <a:prstDash val="solid"/>
           </a:ln>
         </p:spPr>
-        <p:txBody>
-          <a:bodyPr/>
-          <a:lstStyle/>
-          <a:p>
-            <a:endParaRPr lang="en-US"/>
-          </a:p>
-        </p:txBody>
       </p:sp>
       <p:sp>
         <p:nvSpPr>
@@ -15957,13 +15339,6 @@
             <a:prstDash val="solid"/>
           </a:ln>
         </p:spPr>
-        <p:txBody>
-          <a:bodyPr/>
-          <a:lstStyle/>
-          <a:p>
-            <a:endParaRPr lang="en-US"/>
-          </a:p>
-        </p:txBody>
       </p:sp>
       <p:sp>
         <p:nvSpPr>
@@ -15989,13 +15364,6 @@
             <a:prstDash val="solid"/>
           </a:ln>
         </p:spPr>
-        <p:txBody>
-          <a:bodyPr/>
-          <a:lstStyle/>
-          <a:p>
-            <a:endParaRPr lang="en-US"/>
-          </a:p>
-        </p:txBody>
       </p:sp>
       <p:sp>
         <p:nvSpPr>
@@ -16018,7 +15386,7 @@
           <a:bodyPr wrap="square" rtlCol="0" anchor="ctr"/>
           <a:lstStyle/>
           <a:p>
-            <a:pPr marL="0" indent="0">
+            <a:pPr indent="0" marL="0">
               <a:buNone/>
             </a:pPr>
             <a:r>
@@ -16057,7 +15425,7 @@
           <a:bodyPr wrap="square" rtlCol="0" anchor="ctr"/>
           <a:lstStyle/>
           <a:p>
-            <a:pPr marL="0" indent="0">
+            <a:pPr indent="0" marL="0">
               <a:buNone/>
             </a:pPr>
             <a:r>
@@ -16097,13 +15465,6 @@
             <a:prstDash val="solid"/>
           </a:ln>
         </p:spPr>
-        <p:txBody>
-          <a:bodyPr/>
-          <a:lstStyle/>
-          <a:p>
-            <a:endParaRPr lang="en-US"/>
-          </a:p>
-        </p:txBody>
       </p:sp>
       <p:sp>
         <p:nvSpPr>
@@ -16131,13 +15492,6 @@
             <a:prstDash val="solid"/>
           </a:ln>
         </p:spPr>
-        <p:txBody>
-          <a:bodyPr/>
-          <a:lstStyle/>
-          <a:p>
-            <a:endParaRPr lang="en-US"/>
-          </a:p>
-        </p:txBody>
       </p:sp>
       <p:sp>
         <p:nvSpPr>
@@ -16160,7 +15514,7 @@
           <a:bodyPr wrap="square" rtlCol="0" anchor="ctr"/>
           <a:lstStyle/>
           <a:p>
-            <a:pPr marL="0" indent="0" algn="ctr">
+            <a:pPr algn="ctr" indent="0" marL="0">
               <a:buNone/>
             </a:pPr>
             <a:r>
@@ -16196,7 +15550,7 @@
           <a:bodyPr wrap="square" rtlCol="0" anchor="ctr"/>
           <a:lstStyle/>
           <a:p>
-            <a:pPr marL="0" indent="0">
+            <a:pPr indent="0" marL="0">
               <a:buNone/>
             </a:pPr>
             <a:r>
@@ -16235,7 +15589,7 @@
           <a:bodyPr wrap="square" rtlCol="0" anchor="ctr"/>
           <a:lstStyle/>
           <a:p>
-            <a:pPr marL="0" indent="0">
+            <a:pPr indent="0" marL="0">
               <a:buNone/>
             </a:pPr>
             <a:r>
@@ -16279,13 +15633,6 @@
             <a:prstDash val="solid"/>
           </a:ln>
         </p:spPr>
-        <p:txBody>
-          <a:bodyPr/>
-          <a:lstStyle/>
-          <a:p>
-            <a:endParaRPr lang="en-US"/>
-          </a:p>
-        </p:txBody>
       </p:sp>
       <p:sp>
         <p:nvSpPr>
@@ -16308,7 +15655,7 @@
           <a:bodyPr wrap="square" rtlCol="0" anchor="ctr"/>
           <a:lstStyle/>
           <a:p>
-            <a:pPr marL="0" indent="0" algn="ctr">
+            <a:pPr algn="ctr" indent="0" marL="0">
               <a:buNone/>
             </a:pPr>
             <a:r>
@@ -16344,7 +15691,7 @@
           <a:bodyPr wrap="square" rtlCol="0" anchor="ctr"/>
           <a:lstStyle/>
           <a:p>
-            <a:pPr marL="0" indent="0">
+            <a:pPr indent="0" marL="0">
               <a:buNone/>
             </a:pPr>
             <a:r>
@@ -16383,7 +15730,7 @@
           <a:bodyPr wrap="square" rtlCol="0" anchor="ctr"/>
           <a:lstStyle/>
           <a:p>
-            <a:pPr marL="0" indent="0">
+            <a:pPr indent="0" marL="0">
               <a:buNone/>
             </a:pPr>
             <a:r>
@@ -16427,13 +15774,6 @@
             <a:prstDash val="solid"/>
           </a:ln>
         </p:spPr>
-        <p:txBody>
-          <a:bodyPr/>
-          <a:lstStyle/>
-          <a:p>
-            <a:endParaRPr lang="en-US"/>
-          </a:p>
-        </p:txBody>
       </p:sp>
       <p:sp>
         <p:nvSpPr>
@@ -16456,7 +15796,7 @@
           <a:bodyPr wrap="square" rtlCol="0" anchor="ctr"/>
           <a:lstStyle/>
           <a:p>
-            <a:pPr marL="0" indent="0" algn="ctr">
+            <a:pPr algn="ctr" indent="0" marL="0">
               <a:buNone/>
             </a:pPr>
             <a:r>
@@ -16492,7 +15832,7 @@
           <a:bodyPr wrap="square" rtlCol="0" anchor="ctr"/>
           <a:lstStyle/>
           <a:p>
-            <a:pPr marL="0" indent="0">
+            <a:pPr indent="0" marL="0">
               <a:buNone/>
             </a:pPr>
             <a:r>
@@ -16531,7 +15871,7 @@
           <a:bodyPr wrap="square" rtlCol="0" anchor="ctr"/>
           <a:lstStyle/>
           <a:p>
-            <a:pPr marL="0" indent="0">
+            <a:pPr indent="0" marL="0">
               <a:buNone/>
             </a:pPr>
             <a:r>
@@ -16570,7 +15910,7 @@
           <a:bodyPr wrap="square" rtlCol="0" anchor="ctr"/>
           <a:lstStyle/>
           <a:p>
-            <a:pPr marL="0" indent="0" algn="l">
+            <a:pPr algn="l" indent="0" marL="0">
               <a:buNone/>
             </a:pPr>
             <a:r>
@@ -16637,13 +15977,6 @@
             <a:prstDash val="solid"/>
           </a:ln>
         </p:spPr>
-        <p:txBody>
-          <a:bodyPr/>
-          <a:lstStyle/>
-          <a:p>
-            <a:endParaRPr lang="en-US"/>
-          </a:p>
-        </p:txBody>
       </p:sp>
       <p:sp>
         <p:nvSpPr>
@@ -16673,13 +16006,6 @@
             <a:prstDash val="solid"/>
           </a:ln>
         </p:spPr>
-        <p:txBody>
-          <a:bodyPr/>
-          <a:lstStyle/>
-          <a:p>
-            <a:endParaRPr lang="en-US"/>
-          </a:p>
-        </p:txBody>
       </p:sp>
       <p:sp>
         <p:nvSpPr>
@@ -16709,13 +16035,6 @@
             <a:prstDash val="solid"/>
           </a:ln>
         </p:spPr>
-        <p:txBody>
-          <a:bodyPr/>
-          <a:lstStyle/>
-          <a:p>
-            <a:endParaRPr lang="en-US"/>
-          </a:p>
-        </p:txBody>
       </p:sp>
       <p:sp>
         <p:nvSpPr>
@@ -16741,13 +16060,6 @@
             <a:prstDash val="solid"/>
           </a:ln>
         </p:spPr>
-        <p:txBody>
-          <a:bodyPr/>
-          <a:lstStyle/>
-          <a:p>
-            <a:endParaRPr lang="en-US"/>
-          </a:p>
-        </p:txBody>
       </p:sp>
       <p:sp>
         <p:nvSpPr>
@@ -16773,13 +16085,6 @@
             <a:prstDash val="solid"/>
           </a:ln>
         </p:spPr>
-        <p:txBody>
-          <a:bodyPr/>
-          <a:lstStyle/>
-          <a:p>
-            <a:endParaRPr lang="en-US"/>
-          </a:p>
-        </p:txBody>
       </p:sp>
       <p:sp>
         <p:nvSpPr>
@@ -16802,7 +16107,7 @@
           <a:bodyPr wrap="square" rtlCol="0" anchor="ctr"/>
           <a:lstStyle/>
           <a:p>
-            <a:pPr marL="0" indent="0">
+            <a:pPr indent="0" marL="0">
               <a:buNone/>
             </a:pPr>
             <a:r>
@@ -16841,7 +16146,7 @@
           <a:bodyPr wrap="square" rtlCol="0" anchor="ctr"/>
           <a:lstStyle/>
           <a:p>
-            <a:pPr marL="0" indent="0">
+            <a:pPr indent="0" marL="0">
               <a:buNone/>
             </a:pPr>
             <a:r>
@@ -16881,13 +16186,6 @@
             <a:prstDash val="solid"/>
           </a:ln>
         </p:spPr>
-        <p:txBody>
-          <a:bodyPr/>
-          <a:lstStyle/>
-          <a:p>
-            <a:endParaRPr lang="en-US"/>
-          </a:p>
-        </p:txBody>
       </p:sp>
       <p:sp>
         <p:nvSpPr>
@@ -16915,13 +16213,6 @@
             <a:prstDash val="solid"/>
           </a:ln>
         </p:spPr>
-        <p:txBody>
-          <a:bodyPr/>
-          <a:lstStyle/>
-          <a:p>
-            <a:endParaRPr lang="en-US"/>
-          </a:p>
-        </p:txBody>
       </p:sp>
       <p:sp>
         <p:nvSpPr>
@@ -16944,7 +16235,7 @@
           <a:bodyPr wrap="square" rtlCol="0" anchor="ctr"/>
           <a:lstStyle/>
           <a:p>
-            <a:pPr marL="0" indent="0">
+            <a:pPr indent="0" marL="0">
               <a:buNone/>
             </a:pPr>
             <a:r>
@@ -16984,13 +16275,6 @@
             <a:prstDash val="solid"/>
           </a:ln>
         </p:spPr>
-        <p:txBody>
-          <a:bodyPr/>
-          <a:lstStyle/>
-          <a:p>
-            <a:endParaRPr lang="en-US"/>
-          </a:p>
-        </p:txBody>
       </p:sp>
       <p:sp>
         <p:nvSpPr>
@@ -17013,7 +16297,7 @@
           <a:bodyPr wrap="square" rtlCol="0" anchor="ctr"/>
           <a:lstStyle/>
           <a:p>
-            <a:pPr marL="0" indent="0">
+            <a:pPr indent="0" marL="0">
               <a:buNone/>
             </a:pPr>
             <a:r>
@@ -17052,7 +16336,7 @@
           <a:bodyPr wrap="square" rtlCol="0" anchor="ctr"/>
           <a:lstStyle/>
           <a:p>
-            <a:pPr marL="0" indent="0" algn="ctr">
+            <a:pPr algn="ctr" indent="0" marL="0">
               <a:buNone/>
             </a:pPr>
             <a:r>
@@ -17088,7 +16372,7 @@
           <a:bodyPr wrap="square" rtlCol="0" anchor="ctr"/>
           <a:lstStyle/>
           <a:p>
-            <a:pPr marL="0" indent="0">
+            <a:pPr indent="0" marL="0">
               <a:buNone/>
             </a:pPr>
             <a:r>
@@ -17105,7 +16389,7 @@
             <a:endParaRPr lang="en-US" sz="1300" dirty="0"/>
           </a:p>
           <a:p>
-            <a:pPr marL="0" indent="0">
+            <a:pPr indent="0" marL="0">
               <a:buNone/>
             </a:pPr>
             <a:r>
@@ -17144,7 +16428,7 @@
           <a:bodyPr wrap="square" rtlCol="0" anchor="ctr"/>
           <a:lstStyle/>
           <a:p>
-            <a:pPr marL="0" indent="0" algn="ctr">
+            <a:pPr algn="ctr" indent="0" marL="0">
               <a:buNone/>
             </a:pPr>
             <a:r>
@@ -17180,7 +16464,7 @@
           <a:bodyPr wrap="square" rtlCol="0" anchor="ctr"/>
           <a:lstStyle/>
           <a:p>
-            <a:pPr marL="0" indent="0">
+            <a:pPr indent="0" marL="0">
               <a:buNone/>
             </a:pPr>
             <a:r>
@@ -17197,7 +16481,7 @@
             <a:endParaRPr lang="en-US" sz="1300" dirty="0"/>
           </a:p>
           <a:p>
-            <a:pPr marL="0" indent="0">
+            <a:pPr indent="0" marL="0">
               <a:buNone/>
             </a:pPr>
             <a:r>
@@ -17236,7 +16520,7 @@
           <a:bodyPr wrap="square" rtlCol="0" anchor="ctr"/>
           <a:lstStyle/>
           <a:p>
-            <a:pPr marL="0" indent="0" algn="ctr">
+            <a:pPr algn="ctr" indent="0" marL="0">
               <a:buNone/>
             </a:pPr>
             <a:r>
@@ -17272,7 +16556,7 @@
           <a:bodyPr wrap="square" rtlCol="0" anchor="ctr"/>
           <a:lstStyle/>
           <a:p>
-            <a:pPr marL="0" indent="0">
+            <a:pPr indent="0" marL="0">
               <a:buNone/>
             </a:pPr>
             <a:r>
@@ -17289,7 +16573,7 @@
             <a:endParaRPr lang="en-US" sz="1300" dirty="0"/>
           </a:p>
           <a:p>
-            <a:pPr marL="0" indent="0">
+            <a:pPr indent="0" marL="0">
               <a:buNone/>
             </a:pPr>
             <a:r>
@@ -17333,13 +16617,6 @@
             <a:prstDash val="solid"/>
           </a:ln>
         </p:spPr>
-        <p:txBody>
-          <a:bodyPr/>
-          <a:lstStyle/>
-          <a:p>
-            <a:endParaRPr lang="en-US"/>
-          </a:p>
-        </p:txBody>
       </p:sp>
       <p:sp>
         <p:nvSpPr>
@@ -17362,7 +16639,7 @@
           <a:bodyPr wrap="square" rtlCol="0" anchor="ctr"/>
           <a:lstStyle/>
           <a:p>
-            <a:pPr marL="0" indent="0">
+            <a:pPr indent="0" marL="0">
               <a:buNone/>
             </a:pPr>
             <a:r>
@@ -17402,13 +16679,6 @@
             <a:prstDash val="solid"/>
           </a:ln>
         </p:spPr>
-        <p:txBody>
-          <a:bodyPr/>
-          <a:lstStyle/>
-          <a:p>
-            <a:endParaRPr lang="en-US"/>
-          </a:p>
-        </p:txBody>
       </p:sp>
       <p:sp>
         <p:nvSpPr>
@@ -17431,7 +16701,7 @@
           <a:bodyPr wrap="square" rtlCol="0" anchor="ctr"/>
           <a:lstStyle/>
           <a:p>
-            <a:pPr marL="0" indent="0">
+            <a:pPr indent="0" marL="0">
               <a:buNone/>
             </a:pPr>
             <a:r>
@@ -17470,7 +16740,7 @@
           <a:bodyPr wrap="square" rtlCol="0" anchor="ctr"/>
           <a:lstStyle/>
           <a:p>
-            <a:pPr marL="0" indent="0" algn="ctr">
+            <a:pPr algn="ctr" indent="0" marL="0">
               <a:buNone/>
             </a:pPr>
             <a:r>
@@ -17506,7 +16776,7 @@
           <a:bodyPr wrap="square" rtlCol="0" anchor="ctr"/>
           <a:lstStyle/>
           <a:p>
-            <a:pPr marL="0" indent="0">
+            <a:pPr indent="0" marL="0">
               <a:buNone/>
             </a:pPr>
             <a:r>
@@ -17523,7 +16793,7 @@
             <a:endParaRPr lang="en-US" sz="1300" dirty="0"/>
           </a:p>
           <a:p>
-            <a:pPr marL="0" indent="0">
+            <a:pPr indent="0" marL="0">
               <a:buNone/>
             </a:pPr>
             <a:r>
@@ -17562,7 +16832,7 @@
           <a:bodyPr wrap="square" rtlCol="0" anchor="ctr"/>
           <a:lstStyle/>
           <a:p>
-            <a:pPr marL="0" indent="0" algn="ctr">
+            <a:pPr algn="ctr" indent="0" marL="0">
               <a:buNone/>
             </a:pPr>
             <a:r>
@@ -17598,7 +16868,7 @@
           <a:bodyPr wrap="square" rtlCol="0" anchor="ctr"/>
           <a:lstStyle/>
           <a:p>
-            <a:pPr marL="0" indent="0">
+            <a:pPr indent="0" marL="0">
               <a:buNone/>
             </a:pPr>
             <a:r>
@@ -17615,7 +16885,7 @@
             <a:endParaRPr lang="en-US" sz="1300" dirty="0"/>
           </a:p>
           <a:p>
-            <a:pPr marL="0" indent="0">
+            <a:pPr indent="0" marL="0">
               <a:buNone/>
             </a:pPr>
             <a:r>
@@ -17654,7 +16924,7 @@
           <a:bodyPr wrap="square" rtlCol="0" anchor="ctr"/>
           <a:lstStyle/>
           <a:p>
-            <a:pPr marL="0" indent="0" algn="ctr">
+            <a:pPr algn="ctr" indent="0" marL="0">
               <a:buNone/>
             </a:pPr>
             <a:r>
@@ -17690,7 +16960,7 @@
           <a:bodyPr wrap="square" rtlCol="0" anchor="ctr"/>
           <a:lstStyle/>
           <a:p>
-            <a:pPr marL="0" indent="0">
+            <a:pPr indent="0" marL="0">
               <a:buNone/>
             </a:pPr>
             <a:r>
@@ -17707,7 +16977,7 @@
             <a:endParaRPr lang="en-US" sz="1300" dirty="0"/>
           </a:p>
           <a:p>
-            <a:pPr marL="0" indent="0">
+            <a:pPr indent="0" marL="0">
               <a:buNone/>
             </a:pPr>
             <a:r>
@@ -17746,7 +17016,7 @@
           <a:bodyPr wrap="square" rtlCol="0" anchor="ctr"/>
           <a:lstStyle/>
           <a:p>
-            <a:pPr marL="0" indent="0" algn="ctr">
+            <a:pPr algn="ctr" indent="0" marL="0">
               <a:buNone/>
             </a:pPr>
             <a:r>
@@ -17790,13 +17060,6 @@
             <a:prstDash val="solid"/>
           </a:ln>
         </p:spPr>
-        <p:txBody>
-          <a:bodyPr/>
-          <a:lstStyle/>
-          <a:p>
-            <a:endParaRPr lang="en-US"/>
-          </a:p>
-        </p:txBody>
       </p:sp>
       <p:sp>
         <p:nvSpPr>
@@ -17819,7 +17082,7 @@
           <a:bodyPr wrap="square" rtlCol="0" anchor="ctr"/>
           <a:lstStyle/>
           <a:p>
-            <a:pPr marL="0" indent="0" algn="ctr">
+            <a:pPr algn="ctr" indent="0" marL="0">
               <a:buNone/>
             </a:pPr>
             <a:r>
@@ -17858,7 +17121,7 @@
           <a:bodyPr wrap="square" rtlCol="0" anchor="ctr"/>
           <a:lstStyle/>
           <a:p>
-            <a:pPr marL="0" indent="0" algn="ctr">
+            <a:pPr algn="ctr" indent="0" marL="0">
               <a:buNone/>
             </a:pPr>
             <a:r>
@@ -17925,13 +17188,6 @@
             <a:prstDash val="solid"/>
           </a:ln>
         </p:spPr>
-        <p:txBody>
-          <a:bodyPr/>
-          <a:lstStyle/>
-          <a:p>
-            <a:endParaRPr lang="en-US"/>
-          </a:p>
-        </p:txBody>
       </p:sp>
       <p:sp>
         <p:nvSpPr>
@@ -17961,13 +17217,6 @@
             <a:prstDash val="solid"/>
           </a:ln>
         </p:spPr>
-        <p:txBody>
-          <a:bodyPr/>
-          <a:lstStyle/>
-          <a:p>
-            <a:endParaRPr lang="en-US"/>
-          </a:p>
-        </p:txBody>
       </p:sp>
       <p:sp>
         <p:nvSpPr>
@@ -17997,13 +17246,6 @@
             <a:prstDash val="solid"/>
           </a:ln>
         </p:spPr>
-        <p:txBody>
-          <a:bodyPr/>
-          <a:lstStyle/>
-          <a:p>
-            <a:endParaRPr lang="en-US"/>
-          </a:p>
-        </p:txBody>
       </p:sp>
       <p:sp>
         <p:nvSpPr>
@@ -18027,13 +17269,6 @@
             <a:prstDash val="solid"/>
           </a:ln>
         </p:spPr>
-        <p:txBody>
-          <a:bodyPr/>
-          <a:lstStyle/>
-          <a:p>
-            <a:endParaRPr lang="en-US"/>
-          </a:p>
-        </p:txBody>
       </p:sp>
       <p:sp>
         <p:nvSpPr>
@@ -18059,13 +17294,6 @@
             <a:prstDash val="solid"/>
           </a:ln>
         </p:spPr>
-        <p:txBody>
-          <a:bodyPr/>
-          <a:lstStyle/>
-          <a:p>
-            <a:endParaRPr lang="en-US"/>
-          </a:p>
-        </p:txBody>
       </p:sp>
       <p:sp>
         <p:nvSpPr>
@@ -18091,13 +17319,6 @@
             <a:prstDash val="solid"/>
           </a:ln>
         </p:spPr>
-        <p:txBody>
-          <a:bodyPr/>
-          <a:lstStyle/>
-          <a:p>
-            <a:endParaRPr lang="en-US"/>
-          </a:p>
-        </p:txBody>
       </p:sp>
       <p:sp>
         <p:nvSpPr>
@@ -18120,7 +17341,7 @@
           <a:bodyPr wrap="square" rtlCol="0" anchor="ctr"/>
           <a:lstStyle/>
           <a:p>
-            <a:pPr marL="0" indent="0">
+            <a:pPr indent="0" marL="0">
               <a:buNone/>
             </a:pPr>
             <a:r>
@@ -18159,7 +17380,7 @@
           <a:bodyPr wrap="square" rtlCol="0" anchor="ctr"/>
           <a:lstStyle/>
           <a:p>
-            <a:pPr marL="0" indent="0">
+            <a:pPr indent="0" marL="0">
               <a:buNone/>
             </a:pPr>
             <a:r>
@@ -18199,13 +17420,6 @@
             <a:prstDash val="solid"/>
           </a:ln>
         </p:spPr>
-        <p:txBody>
-          <a:bodyPr/>
-          <a:lstStyle/>
-          <a:p>
-            <a:endParaRPr lang="en-US"/>
-          </a:p>
-        </p:txBody>
       </p:sp>
       <p:sp>
         <p:nvSpPr>
@@ -18233,13 +17447,6 @@
             <a:prstDash val="solid"/>
           </a:ln>
         </p:spPr>
-        <p:txBody>
-          <a:bodyPr/>
-          <a:lstStyle/>
-          <a:p>
-            <a:endParaRPr lang="en-US"/>
-          </a:p>
-        </p:txBody>
       </p:sp>
       <p:sp>
         <p:nvSpPr>
@@ -18262,7 +17469,7 @@
           <a:bodyPr wrap="square" rtlCol="0" anchor="ctr"/>
           <a:lstStyle/>
           <a:p>
-            <a:pPr marL="0" indent="0">
+            <a:pPr indent="0" marL="0">
               <a:buNone/>
             </a:pPr>
             <a:r>
@@ -18301,7 +17508,7 @@
           <a:bodyPr wrap="square" rtlCol="0" anchor="ctr"/>
           <a:lstStyle/>
           <a:p>
-            <a:pPr marL="0" indent="0">
+            <a:pPr indent="0" marL="0">
               <a:buNone/>
             </a:pPr>
             <a:r>
@@ -18318,7 +17525,7 @@
             <a:endParaRPr lang="en-US" sz="1100" dirty="0"/>
           </a:p>
           <a:p>
-            <a:pPr marL="0" indent="0">
+            <a:pPr indent="0" marL="0">
               <a:buNone/>
             </a:pPr>
             <a:r>
@@ -18357,7 +17564,7 @@
           <a:bodyPr wrap="square" rtlCol="0" anchor="ctr"/>
           <a:lstStyle/>
           <a:p>
-            <a:pPr marL="0" indent="0" algn="r">
+            <a:pPr algn="r" indent="0" marL="0">
               <a:buNone/>
             </a:pPr>
             <a:r>
@@ -18401,13 +17608,6 @@
             <a:prstDash val="solid"/>
           </a:ln>
         </p:spPr>
-        <p:txBody>
-          <a:bodyPr/>
-          <a:lstStyle/>
-          <a:p>
-            <a:endParaRPr lang="en-US"/>
-          </a:p>
-        </p:txBody>
       </p:sp>
       <p:sp>
         <p:nvSpPr>
@@ -18430,7 +17630,7 @@
           <a:bodyPr wrap="square" rtlCol="0" anchor="ctr"/>
           <a:lstStyle/>
           <a:p>
-            <a:pPr marL="0" indent="0">
+            <a:pPr indent="0" marL="0">
               <a:buNone/>
             </a:pPr>
             <a:r>
@@ -18469,7 +17669,7 @@
           <a:bodyPr wrap="square" rtlCol="0" anchor="ctr"/>
           <a:lstStyle/>
           <a:p>
-            <a:pPr marL="0" indent="0">
+            <a:pPr indent="0" marL="0">
               <a:buNone/>
             </a:pPr>
             <a:r>
@@ -18486,7 +17686,7 @@
             <a:endParaRPr lang="en-US" sz="1100" dirty="0"/>
           </a:p>
           <a:p>
-            <a:pPr marL="0" indent="0">
+            <a:pPr indent="0" marL="0">
               <a:buNone/>
             </a:pPr>
             <a:r>
@@ -18525,7 +17725,7 @@
           <a:bodyPr wrap="square" rtlCol="0" anchor="ctr"/>
           <a:lstStyle/>
           <a:p>
-            <a:pPr marL="0" indent="0" algn="r">
+            <a:pPr algn="r" indent="0" marL="0">
               <a:buNone/>
             </a:pPr>
             <a:r>
@@ -18569,13 +17769,6 @@
             <a:prstDash val="solid"/>
           </a:ln>
         </p:spPr>
-        <p:txBody>
-          <a:bodyPr/>
-          <a:lstStyle/>
-          <a:p>
-            <a:endParaRPr lang="en-US"/>
-          </a:p>
-        </p:txBody>
       </p:sp>
       <p:sp>
         <p:nvSpPr>
@@ -18598,7 +17791,7 @@
           <a:bodyPr wrap="square" rtlCol="0" anchor="ctr"/>
           <a:lstStyle/>
           <a:p>
-            <a:pPr marL="0" indent="0">
+            <a:pPr indent="0" marL="0">
               <a:buNone/>
             </a:pPr>
             <a:r>
@@ -18637,7 +17830,7 @@
           <a:bodyPr wrap="square" rtlCol="0" anchor="ctr"/>
           <a:lstStyle/>
           <a:p>
-            <a:pPr marL="0" indent="0">
+            <a:pPr indent="0" marL="0">
               <a:buNone/>
             </a:pPr>
             <a:r>
@@ -18654,7 +17847,7 @@
             <a:endParaRPr lang="en-US" sz="1100" dirty="0"/>
           </a:p>
           <a:p>
-            <a:pPr marL="0" indent="0">
+            <a:pPr indent="0" marL="0">
               <a:buNone/>
             </a:pPr>
             <a:r>
@@ -18693,7 +17886,7 @@
           <a:bodyPr wrap="square" rtlCol="0" anchor="ctr"/>
           <a:lstStyle/>
           <a:p>
-            <a:pPr marL="0" indent="0" algn="r">
+            <a:pPr algn="r" indent="0" marL="0">
               <a:buNone/>
             </a:pPr>
             <a:r>
@@ -18737,13 +17930,6 @@
             <a:prstDash val="solid"/>
           </a:ln>
         </p:spPr>
-        <p:txBody>
-          <a:bodyPr/>
-          <a:lstStyle/>
-          <a:p>
-            <a:endParaRPr lang="en-US"/>
-          </a:p>
-        </p:txBody>
       </p:sp>
       <p:sp>
         <p:nvSpPr>
@@ -18766,7 +17952,7 @@
           <a:bodyPr wrap="square" rtlCol="0" anchor="ctr"/>
           <a:lstStyle/>
           <a:p>
-            <a:pPr marL="0" indent="0">
+            <a:pPr indent="0" marL="0">
               <a:buNone/>
             </a:pPr>
             <a:r>
@@ -18805,7 +17991,7 @@
           <a:bodyPr wrap="square" rtlCol="0" anchor="ctr"/>
           <a:lstStyle/>
           <a:p>
-            <a:pPr marL="0" indent="0" algn="l">
+            <a:pPr algn="l" indent="0" marL="0">
               <a:buNone/>
             </a:pPr>
             <a:r>
@@ -18872,13 +18058,6 @@
             <a:prstDash val="solid"/>
           </a:ln>
         </p:spPr>
-        <p:txBody>
-          <a:bodyPr/>
-          <a:lstStyle/>
-          <a:p>
-            <a:endParaRPr lang="en-US"/>
-          </a:p>
-        </p:txBody>
       </p:sp>
       <p:sp>
         <p:nvSpPr>
@@ -18908,13 +18087,6 @@
             <a:prstDash val="solid"/>
           </a:ln>
         </p:spPr>
-        <p:txBody>
-          <a:bodyPr/>
-          <a:lstStyle/>
-          <a:p>
-            <a:endParaRPr lang="en-US"/>
-          </a:p>
-        </p:txBody>
       </p:sp>
       <p:sp>
         <p:nvSpPr>
@@ -18944,13 +18116,6 @@
             <a:prstDash val="solid"/>
           </a:ln>
         </p:spPr>
-        <p:txBody>
-          <a:bodyPr/>
-          <a:lstStyle/>
-          <a:p>
-            <a:endParaRPr lang="en-US"/>
-          </a:p>
-        </p:txBody>
       </p:sp>
       <p:sp>
         <p:nvSpPr>
@@ -18980,13 +18145,6 @@
             <a:prstDash val="solid"/>
           </a:ln>
         </p:spPr>
-        <p:txBody>
-          <a:bodyPr/>
-          <a:lstStyle/>
-          <a:p>
-            <a:endParaRPr lang="en-US"/>
-          </a:p>
-        </p:txBody>
       </p:sp>
       <p:sp>
         <p:nvSpPr>
@@ -19012,13 +18170,6 @@
             <a:prstDash val="solid"/>
           </a:ln>
         </p:spPr>
-        <p:txBody>
-          <a:bodyPr/>
-          <a:lstStyle/>
-          <a:p>
-            <a:endParaRPr lang="en-US"/>
-          </a:p>
-        </p:txBody>
       </p:sp>
       <p:sp>
         <p:nvSpPr>
@@ -19044,13 +18195,6 @@
             <a:prstDash val="solid"/>
           </a:ln>
         </p:spPr>
-        <p:txBody>
-          <a:bodyPr/>
-          <a:lstStyle/>
-          <a:p>
-            <a:endParaRPr lang="en-US"/>
-          </a:p>
-        </p:txBody>
       </p:sp>
       <p:sp>
         <p:nvSpPr>
@@ -19073,7 +18217,7 @@
           <a:bodyPr wrap="square" rtlCol="0" anchor="ctr"/>
           <a:lstStyle/>
           <a:p>
-            <a:pPr marL="0" indent="0">
+            <a:pPr indent="0" marL="0">
               <a:buNone/>
             </a:pPr>
             <a:r>
@@ -19112,7 +18256,7 @@
           <a:bodyPr wrap="square" rtlCol="0" anchor="ctr"/>
           <a:lstStyle/>
           <a:p>
-            <a:pPr marL="0" indent="0">
+            <a:pPr indent="0" marL="0">
               <a:buNone/>
             </a:pPr>
             <a:r>
@@ -19152,13 +18296,6 @@
             <a:prstDash val="solid"/>
           </a:ln>
         </p:spPr>
-        <p:txBody>
-          <a:bodyPr/>
-          <a:lstStyle/>
-          <a:p>
-            <a:endParaRPr lang="en-US"/>
-          </a:p>
-        </p:txBody>
       </p:sp>
       <p:sp>
         <p:nvSpPr>
@@ -19186,13 +18323,6 @@
             <a:prstDash val="solid"/>
           </a:ln>
         </p:spPr>
-        <p:txBody>
-          <a:bodyPr/>
-          <a:lstStyle/>
-          <a:p>
-            <a:endParaRPr lang="en-US"/>
-          </a:p>
-        </p:txBody>
       </p:sp>
       <p:sp>
         <p:nvSpPr>
@@ -19215,7 +18345,7 @@
           <a:bodyPr wrap="square" rtlCol="0" anchor="ctr"/>
           <a:lstStyle/>
           <a:p>
-            <a:pPr marL="0" indent="0">
+            <a:pPr indent="0" marL="0">
               <a:buNone/>
             </a:pPr>
             <a:r>
@@ -19254,7 +18384,7 @@
           <a:bodyPr wrap="square" rtlCol="0" anchor="ctr"/>
           <a:lstStyle/>
           <a:p>
-            <a:pPr marL="0" indent="0">
+            <a:pPr indent="0" marL="0">
               <a:buNone/>
             </a:pPr>
             <a:r>
@@ -19293,7 +18423,7 @@
           <a:bodyPr wrap="square" rtlCol="0" anchor="ctr"/>
           <a:lstStyle/>
           <a:p>
-            <a:pPr marL="0" indent="0">
+            <a:pPr indent="0" marL="0">
               <a:buNone/>
             </a:pPr>
             <a:r>
@@ -19332,7 +18462,7 @@
           <a:bodyPr wrap="square" rtlCol="0" anchor="ctr"/>
           <a:lstStyle/>
           <a:p>
-            <a:pPr marL="0" indent="0">
+            <a:pPr indent="0" marL="0">
               <a:buNone/>
             </a:pPr>
             <a:r>
@@ -19376,13 +18506,6 @@
             <a:prstDash val="solid"/>
           </a:ln>
         </p:spPr>
-        <p:txBody>
-          <a:bodyPr/>
-          <a:lstStyle/>
-          <a:p>
-            <a:endParaRPr lang="en-US"/>
-          </a:p>
-        </p:txBody>
       </p:sp>
       <p:sp>
         <p:nvSpPr>
@@ -19405,7 +18528,7 @@
           <a:bodyPr wrap="square" rtlCol="0" anchor="ctr"/>
           <a:lstStyle/>
           <a:p>
-            <a:pPr marL="0" indent="0">
+            <a:pPr indent="0" marL="0">
               <a:buNone/>
             </a:pPr>
             <a:r>
@@ -19444,7 +18567,7 @@
           <a:bodyPr wrap="square" rtlCol="0" anchor="ctr"/>
           <a:lstStyle/>
           <a:p>
-            <a:pPr marL="0" indent="0" algn="ctr">
+            <a:pPr algn="ctr" indent="0" marL="0">
               <a:buNone/>
             </a:pPr>
             <a:r>
@@ -19480,7 +18603,7 @@
           <a:bodyPr wrap="square" rtlCol="0" anchor="ctr"/>
           <a:lstStyle/>
           <a:p>
-            <a:pPr marL="0" indent="0" algn="ctr">
+            <a:pPr algn="ctr" indent="0" marL="0">
               <a:buNone/>
             </a:pPr>
             <a:r>
@@ -19516,7 +18639,7 @@
           <a:bodyPr wrap="square" rtlCol="0" anchor="ctr"/>
           <a:lstStyle/>
           <a:p>
-            <a:pPr marL="0" indent="0" algn="ctr">
+            <a:pPr algn="ctr" indent="0" marL="0">
               <a:buNone/>
             </a:pPr>
             <a:r>
@@ -19557,13 +18680,6 @@
             <a:prstDash val="solid"/>
           </a:ln>
         </p:spPr>
-        <p:txBody>
-          <a:bodyPr/>
-          <a:lstStyle/>
-          <a:p>
-            <a:endParaRPr lang="en-US"/>
-          </a:p>
-        </p:txBody>
       </p:sp>
       <p:sp>
         <p:nvSpPr>
@@ -19586,7 +18702,7 @@
           <a:bodyPr wrap="square" rtlCol="0" anchor="ctr"/>
           <a:lstStyle/>
           <a:p>
-            <a:pPr marL="0" indent="0">
+            <a:pPr indent="0" marL="0">
               <a:buNone/>
             </a:pPr>
             <a:r>
@@ -19625,7 +18741,7 @@
           <a:bodyPr wrap="square" rtlCol="0" anchor="ctr"/>
           <a:lstStyle/>
           <a:p>
-            <a:pPr marL="0" indent="0" algn="ctr">
+            <a:pPr algn="ctr" indent="0" marL="0">
               <a:buNone/>
             </a:pPr>
             <a:r>
@@ -19661,7 +18777,7 @@
           <a:bodyPr wrap="square" rtlCol="0" anchor="ctr"/>
           <a:lstStyle/>
           <a:p>
-            <a:pPr marL="0" indent="0" algn="ctr">
+            <a:pPr algn="ctr" indent="0" marL="0">
               <a:buNone/>
             </a:pPr>
             <a:r>
@@ -19697,7 +18813,7 @@
           <a:bodyPr wrap="square" rtlCol="0" anchor="ctr"/>
           <a:lstStyle/>
           <a:p>
-            <a:pPr marL="0" indent="0" algn="ctr">
+            <a:pPr algn="ctr" indent="0" marL="0">
               <a:buNone/>
             </a:pPr>
             <a:r>
@@ -19738,13 +18854,6 @@
             <a:prstDash val="solid"/>
           </a:ln>
         </p:spPr>
-        <p:txBody>
-          <a:bodyPr/>
-          <a:lstStyle/>
-          <a:p>
-            <a:endParaRPr lang="en-US"/>
-          </a:p>
-        </p:txBody>
       </p:sp>
       <p:sp>
         <p:nvSpPr>
@@ -19767,7 +18876,7 @@
           <a:bodyPr wrap="square" rtlCol="0" anchor="ctr"/>
           <a:lstStyle/>
           <a:p>
-            <a:pPr marL="0" indent="0">
+            <a:pPr indent="0" marL="0">
               <a:buNone/>
             </a:pPr>
             <a:r>
@@ -19806,7 +18915,7 @@
           <a:bodyPr wrap="square" rtlCol="0" anchor="ctr"/>
           <a:lstStyle/>
           <a:p>
-            <a:pPr marL="0" indent="0" algn="ctr">
+            <a:pPr algn="ctr" indent="0" marL="0">
               <a:buNone/>
             </a:pPr>
             <a:r>
@@ -19842,7 +18951,7 @@
           <a:bodyPr wrap="square" rtlCol="0" anchor="ctr"/>
           <a:lstStyle/>
           <a:p>
-            <a:pPr marL="0" indent="0" algn="ctr">
+            <a:pPr algn="ctr" indent="0" marL="0">
               <a:buNone/>
             </a:pPr>
             <a:r>
@@ -19878,7 +18987,7 @@
           <a:bodyPr wrap="square" rtlCol="0" anchor="ctr"/>
           <a:lstStyle/>
           <a:p>
-            <a:pPr marL="0" indent="0" algn="ctr">
+            <a:pPr algn="ctr" indent="0" marL="0">
               <a:buNone/>
             </a:pPr>
             <a:r>
@@ -19919,13 +19028,6 @@
             <a:prstDash val="solid"/>
           </a:ln>
         </p:spPr>
-        <p:txBody>
-          <a:bodyPr/>
-          <a:lstStyle/>
-          <a:p>
-            <a:endParaRPr lang="en-US"/>
-          </a:p>
-        </p:txBody>
       </p:sp>
       <p:sp>
         <p:nvSpPr>
@@ -19948,7 +19050,7 @@
           <a:bodyPr wrap="square" rtlCol="0" anchor="ctr"/>
           <a:lstStyle/>
           <a:p>
-            <a:pPr marL="0" indent="0">
+            <a:pPr indent="0" marL="0">
               <a:buNone/>
             </a:pPr>
             <a:r>
@@ -19987,7 +19089,7 @@
           <a:bodyPr wrap="square" rtlCol="0" anchor="ctr"/>
           <a:lstStyle/>
           <a:p>
-            <a:pPr marL="0" indent="0" algn="ctr">
+            <a:pPr algn="ctr" indent="0" marL="0">
               <a:buNone/>
             </a:pPr>
             <a:r>
@@ -20023,7 +19125,7 @@
           <a:bodyPr wrap="square" rtlCol="0" anchor="ctr"/>
           <a:lstStyle/>
           <a:p>
-            <a:pPr marL="0" indent="0" algn="ctr">
+            <a:pPr algn="ctr" indent="0" marL="0">
               <a:buNone/>
             </a:pPr>
             <a:r>
@@ -20059,7 +19161,7 @@
           <a:bodyPr wrap="square" rtlCol="0" anchor="ctr"/>
           <a:lstStyle/>
           <a:p>
-            <a:pPr marL="0" indent="0" algn="ctr">
+            <a:pPr algn="ctr" indent="0" marL="0">
               <a:buNone/>
             </a:pPr>
             <a:r>
@@ -20100,13 +19202,6 @@
             <a:prstDash val="solid"/>
           </a:ln>
         </p:spPr>
-        <p:txBody>
-          <a:bodyPr/>
-          <a:lstStyle/>
-          <a:p>
-            <a:endParaRPr lang="en-US"/>
-          </a:p>
-        </p:txBody>
       </p:sp>
       <p:sp>
         <p:nvSpPr>
@@ -20129,7 +19224,7 @@
           <a:bodyPr wrap="square" rtlCol="0" anchor="ctr"/>
           <a:lstStyle/>
           <a:p>
-            <a:pPr marL="0" indent="0">
+            <a:pPr indent="0" marL="0">
               <a:buNone/>
             </a:pPr>
             <a:r>
@@ -20168,7 +19263,7 @@
           <a:bodyPr wrap="square" rtlCol="0" anchor="ctr"/>
           <a:lstStyle/>
           <a:p>
-            <a:pPr marL="0" indent="0" algn="ctr">
+            <a:pPr algn="ctr" indent="0" marL="0">
               <a:buNone/>
             </a:pPr>
             <a:r>
@@ -20204,7 +19299,7 @@
           <a:bodyPr wrap="square" rtlCol="0" anchor="ctr"/>
           <a:lstStyle/>
           <a:p>
-            <a:pPr marL="0" indent="0" algn="ctr">
+            <a:pPr algn="ctr" indent="0" marL="0">
               <a:buNone/>
             </a:pPr>
             <a:r>
@@ -20240,7 +19335,7 @@
           <a:bodyPr wrap="square" rtlCol="0" anchor="ctr"/>
           <a:lstStyle/>
           <a:p>
-            <a:pPr marL="0" indent="0" algn="ctr">
+            <a:pPr algn="ctr" indent="0" marL="0">
               <a:buNone/>
             </a:pPr>
             <a:r>
@@ -20281,13 +19376,6 @@
             <a:prstDash val="solid"/>
           </a:ln>
         </p:spPr>
-        <p:txBody>
-          <a:bodyPr/>
-          <a:lstStyle/>
-          <a:p>
-            <a:endParaRPr lang="en-US"/>
-          </a:p>
-        </p:txBody>
       </p:sp>
       <p:sp>
         <p:nvSpPr>
@@ -20310,7 +19398,7 @@
           <a:bodyPr wrap="square" rtlCol="0" anchor="ctr"/>
           <a:lstStyle/>
           <a:p>
-            <a:pPr marL="0" indent="0">
+            <a:pPr indent="0" marL="0">
               <a:buNone/>
             </a:pPr>
             <a:r>
@@ -20349,7 +19437,7 @@
           <a:bodyPr wrap="square" rtlCol="0" anchor="ctr"/>
           <a:lstStyle/>
           <a:p>
-            <a:pPr marL="0" indent="0" algn="ctr">
+            <a:pPr algn="ctr" indent="0" marL="0">
               <a:buNone/>
             </a:pPr>
             <a:r>
@@ -20385,7 +19473,7 @@
           <a:bodyPr wrap="square" rtlCol="0" anchor="ctr"/>
           <a:lstStyle/>
           <a:p>
-            <a:pPr marL="0" indent="0" algn="ctr">
+            <a:pPr algn="ctr" indent="0" marL="0">
               <a:buNone/>
             </a:pPr>
             <a:r>
@@ -20421,7 +19509,7 @@
           <a:bodyPr wrap="square" rtlCol="0" anchor="ctr"/>
           <a:lstStyle/>
           <a:p>
-            <a:pPr marL="0" indent="0" algn="ctr">
+            <a:pPr algn="ctr" indent="0" marL="0">
               <a:buNone/>
             </a:pPr>
             <a:r>
@@ -20457,7 +19545,7 @@
           <a:bodyPr wrap="square" rtlCol="0" anchor="ctr"/>
           <a:lstStyle/>
           <a:p>
-            <a:pPr marL="0" indent="0" algn="l">
+            <a:pPr algn="l" indent="0" marL="0">
               <a:buNone/>
             </a:pPr>
             <a:r>
@@ -20776,319 +19864,4 @@
     </a:ext>
   </a:extLst>
 </a:theme>
-</file>
-
-<file path=ppt/theme/theme2.xml><?xml version="1.0" encoding="utf-8"?>
-<a:theme xmlns:a="http://schemas.openxmlformats.org/drawingml/2006/main" name="Office Theme">
-  <a:themeElements>
-    <a:clrScheme name="Office">
-      <a:dk1>
-        <a:sysClr val="windowText" lastClr="000000"/>
-      </a:dk1>
-      <a:lt1>
-        <a:sysClr val="window" lastClr="FFFFFF"/>
-      </a:lt1>
-      <a:dk2>
-        <a:srgbClr val="0E2841"/>
-      </a:dk2>
-      <a:lt2>
-        <a:srgbClr val="E8E8E8"/>
-      </a:lt2>
-      <a:accent1>
-        <a:srgbClr val="156082"/>
-      </a:accent1>
-      <a:accent2>
-        <a:srgbClr val="E97132"/>
-      </a:accent2>
-      <a:accent3>
-        <a:srgbClr val="196B24"/>
-      </a:accent3>
-      <a:accent4>
-        <a:srgbClr val="0F9ED5"/>
-      </a:accent4>
-      <a:accent5>
-        <a:srgbClr val="A02B93"/>
-      </a:accent5>
-      <a:accent6>
-        <a:srgbClr val="4EA72E"/>
-      </a:accent6>
-      <a:hlink>
-        <a:srgbClr val="467886"/>
-      </a:hlink>
-      <a:folHlink>
-        <a:srgbClr val="96607D"/>
-      </a:folHlink>
-    </a:clrScheme>
-    <a:fontScheme name="Office">
-      <a:majorFont>
-        <a:latin typeface="Aptos Display" panose="02110004020202020204"/>
-        <a:ea typeface=""/>
-        <a:cs typeface=""/>
-        <a:font script="Jpan" typeface="游ゴシック Light"/>
-        <a:font script="Hang" typeface="맑은 고딕"/>
-        <a:font script="Hans" typeface="等线 Light"/>
-        <a:font script="Hant" typeface="新細明體"/>
-        <a:font script="Arab" typeface="Times New Roman"/>
-        <a:font script="Hebr" typeface="Times New Roman"/>
-        <a:font script="Thai" typeface="Angsana New"/>
-        <a:font script="Ethi" typeface="Nyala"/>
-        <a:font script="Beng" typeface="Vrinda"/>
-        <a:font script="Gujr" typeface="Shruti"/>
-        <a:font script="Khmr" typeface="MoolBoran"/>
-        <a:font script="Knda" typeface="Tunga"/>
-        <a:font script="Guru" typeface="Raavi"/>
-        <a:font script="Cans" typeface="Euphemia"/>
-        <a:font script="Cher" typeface="Plantagenet Cherokee"/>
-        <a:font script="Yiii" typeface="Microsoft Yi Baiti"/>
-        <a:font script="Tibt" typeface="Microsoft Himalaya"/>
-        <a:font script="Thaa" typeface="MV Boli"/>
-        <a:font script="Deva" typeface="Mangal"/>
-        <a:font script="Telu" typeface="Gautami"/>
-        <a:font script="Taml" typeface="Latha"/>
-        <a:font script="Syrc" typeface="Estrangelo Edessa"/>
-        <a:font script="Orya" typeface="Kalinga"/>
-        <a:font script="Mlym" typeface="Kartika"/>
-        <a:font script="Laoo" typeface="DokChampa"/>
-        <a:font script="Sinh" typeface="Iskoola Pota"/>
-        <a:font script="Mong" typeface="Mongolian Baiti"/>
-        <a:font script="Viet" typeface="Times New Roman"/>
-        <a:font script="Uigh" typeface="Microsoft Uighur"/>
-        <a:font script="Geor" typeface="Sylfaen"/>
-        <a:font script="Armn" typeface="Arial"/>
-        <a:font script="Bugi" typeface="Leelawadee UI"/>
-        <a:font script="Bopo" typeface="Microsoft JhengHei"/>
-        <a:font script="Java" typeface="Javanese Text"/>
-        <a:font script="Lisu" typeface="Segoe UI"/>
-        <a:font script="Mymr" typeface="Myanmar Text"/>
-        <a:font script="Nkoo" typeface="Ebrima"/>
-        <a:font script="Olck" typeface="Nirmala UI"/>
-        <a:font script="Osma" typeface="Ebrima"/>
-        <a:font script="Phag" typeface="Phagspa"/>
-        <a:font script="Syrn" typeface="Estrangelo Edessa"/>
-        <a:font script="Syrj" typeface="Estrangelo Edessa"/>
-        <a:font script="Syre" typeface="Estrangelo Edessa"/>
-        <a:font script="Sora" typeface="Nirmala UI"/>
-        <a:font script="Tale" typeface="Microsoft Tai Le"/>
-        <a:font script="Talu" typeface="Microsoft New Tai Lue"/>
-        <a:font script="Tfng" typeface="Ebrima"/>
-      </a:majorFont>
-      <a:minorFont>
-        <a:latin typeface="Aptos" panose="02110004020202020204"/>
-        <a:ea typeface=""/>
-        <a:cs typeface=""/>
-        <a:font script="Jpan" typeface="游ゴシック"/>
-        <a:font script="Hang" typeface="맑은 고딕"/>
-        <a:font script="Hans" typeface="等线"/>
-        <a:font script="Hant" typeface="新細明體"/>
-        <a:font script="Arab" typeface="Arial"/>
-        <a:font script="Hebr" typeface="Arial"/>
-        <a:font script="Thai" typeface="Cordia New"/>
-        <a:font script="Ethi" typeface="Nyala"/>
-        <a:font script="Beng" typeface="Vrinda"/>
-        <a:font script="Gujr" typeface="Shruti"/>
-        <a:font script="Khmr" typeface="DaunPenh"/>
-        <a:font script="Knda" typeface="Tunga"/>
-        <a:font script="Guru" typeface="Raavi"/>
-        <a:font script="Cans" typeface="Euphemia"/>
-        <a:font script="Cher" typeface="Plantagenet Cherokee"/>
-        <a:font script="Yiii" typeface="Microsoft Yi Baiti"/>
-        <a:font script="Tibt" typeface="Microsoft Himalaya"/>
-        <a:font script="Thaa" typeface="MV Boli"/>
-        <a:font script="Deva" typeface="Mangal"/>
-        <a:font script="Telu" typeface="Gautami"/>
-        <a:font script="Taml" typeface="Latha"/>
-        <a:font script="Syrc" typeface="Estrangelo Edessa"/>
-        <a:font script="Orya" typeface="Kalinga"/>
-        <a:font script="Mlym" typeface="Kartika"/>
-        <a:font script="Laoo" typeface="DokChampa"/>
-        <a:font script="Sinh" typeface="Iskoola Pota"/>
-        <a:font script="Mong" typeface="Mongolian Baiti"/>
-        <a:font script="Viet" typeface="Arial"/>
-        <a:font script="Uigh" typeface="Microsoft Uighur"/>
-        <a:font script="Geor" typeface="Sylfaen"/>
-        <a:font script="Armn" typeface="Arial"/>
-        <a:font script="Bugi" typeface="Leelawadee UI"/>
-        <a:font script="Bopo" typeface="Microsoft JhengHei"/>
-        <a:font script="Java" typeface="Javanese Text"/>
-        <a:font script="Lisu" typeface="Segoe UI"/>
-        <a:font script="Mymr" typeface="Myanmar Text"/>
-        <a:font script="Nkoo" typeface="Ebrima"/>
-        <a:font script="Olck" typeface="Nirmala UI"/>
-        <a:font script="Osma" typeface="Ebrima"/>
-        <a:font script="Phag" typeface="Phagspa"/>
-        <a:font script="Syrn" typeface="Estrangelo Edessa"/>
-        <a:font script="Syrj" typeface="Estrangelo Edessa"/>
-        <a:font script="Syre" typeface="Estrangelo Edessa"/>
-        <a:font script="Sora" typeface="Nirmala UI"/>
-        <a:font script="Tale" typeface="Microsoft Tai Le"/>
-        <a:font script="Talu" typeface="Microsoft New Tai Lue"/>
-        <a:font script="Tfng" typeface="Ebrima"/>
-      </a:minorFont>
-    </a:fontScheme>
-    <a:fmtScheme name="Office">
-      <a:fillStyleLst>
-        <a:solidFill>
-          <a:schemeClr val="phClr"/>
-        </a:solidFill>
-        <a:gradFill rotWithShape="1">
-          <a:gsLst>
-            <a:gs pos="0">
-              <a:schemeClr val="phClr">
-                <a:lumMod val="110000"/>
-                <a:satMod val="105000"/>
-                <a:tint val="67000"/>
-              </a:schemeClr>
-            </a:gs>
-            <a:gs pos="50000">
-              <a:schemeClr val="phClr">
-                <a:lumMod val="105000"/>
-                <a:satMod val="103000"/>
-                <a:tint val="73000"/>
-              </a:schemeClr>
-            </a:gs>
-            <a:gs pos="100000">
-              <a:schemeClr val="phClr">
-                <a:lumMod val="105000"/>
-                <a:satMod val="109000"/>
-                <a:tint val="81000"/>
-              </a:schemeClr>
-            </a:gs>
-          </a:gsLst>
-          <a:lin ang="5400000" scaled="0"/>
-        </a:gradFill>
-        <a:gradFill rotWithShape="1">
-          <a:gsLst>
-            <a:gs pos="0">
-              <a:schemeClr val="phClr">
-                <a:satMod val="103000"/>
-                <a:lumMod val="102000"/>
-                <a:tint val="94000"/>
-              </a:schemeClr>
-            </a:gs>
-            <a:gs pos="50000">
-              <a:schemeClr val="phClr">
-                <a:satMod val="110000"/>
-                <a:lumMod val="100000"/>
-                <a:shade val="100000"/>
-              </a:schemeClr>
-            </a:gs>
-            <a:gs pos="100000">
-              <a:schemeClr val="phClr">
-                <a:lumMod val="99000"/>
-                <a:satMod val="120000"/>
-                <a:shade val="78000"/>
-              </a:schemeClr>
-            </a:gs>
-          </a:gsLst>
-          <a:lin ang="5400000" scaled="0"/>
-        </a:gradFill>
-      </a:fillStyleLst>
-      <a:lnStyleLst>
-        <a:ln w="12700" cap="flat" cmpd="sng" algn="ctr">
-          <a:solidFill>
-            <a:schemeClr val="phClr"/>
-          </a:solidFill>
-          <a:prstDash val="solid"/>
-          <a:miter lim="800000"/>
-        </a:ln>
-        <a:ln w="19050" cap="flat" cmpd="sng" algn="ctr">
-          <a:solidFill>
-            <a:schemeClr val="phClr"/>
-          </a:solidFill>
-          <a:prstDash val="solid"/>
-          <a:miter lim="800000"/>
-        </a:ln>
-        <a:ln w="25400" cap="flat" cmpd="sng" algn="ctr">
-          <a:solidFill>
-            <a:schemeClr val="phClr"/>
-          </a:solidFill>
-          <a:prstDash val="solid"/>
-          <a:miter lim="800000"/>
-        </a:ln>
-      </a:lnStyleLst>
-      <a:effectStyleLst>
-        <a:effectStyle>
-          <a:effectLst/>
-        </a:effectStyle>
-        <a:effectStyle>
-          <a:effectLst/>
-        </a:effectStyle>
-        <a:effectStyle>
-          <a:effectLst>
-            <a:outerShdw blurRad="57150" dist="19050" dir="5400000" algn="ctr" rotWithShape="0">
-              <a:srgbClr val="000000">
-                <a:alpha val="63000"/>
-              </a:srgbClr>
-            </a:outerShdw>
-          </a:effectLst>
-        </a:effectStyle>
-      </a:effectStyleLst>
-      <a:bgFillStyleLst>
-        <a:solidFill>
-          <a:schemeClr val="phClr"/>
-        </a:solidFill>
-        <a:solidFill>
-          <a:schemeClr val="phClr">
-            <a:tint val="95000"/>
-            <a:satMod val="170000"/>
-          </a:schemeClr>
-        </a:solidFill>
-        <a:gradFill rotWithShape="1">
-          <a:gsLst>
-            <a:gs pos="0">
-              <a:schemeClr val="phClr">
-                <a:tint val="93000"/>
-                <a:satMod val="150000"/>
-                <a:shade val="98000"/>
-                <a:lumMod val="102000"/>
-              </a:schemeClr>
-            </a:gs>
-            <a:gs pos="50000">
-              <a:schemeClr val="phClr">
-                <a:tint val="98000"/>
-                <a:satMod val="130000"/>
-                <a:shade val="90000"/>
-                <a:lumMod val="103000"/>
-              </a:schemeClr>
-            </a:gs>
-            <a:gs pos="100000">
-              <a:schemeClr val="phClr">
-                <a:shade val="63000"/>
-                <a:satMod val="120000"/>
-              </a:schemeClr>
-            </a:gs>
-          </a:gsLst>
-          <a:lin ang="5400000" scaled="0"/>
-        </a:gradFill>
-      </a:bgFillStyleLst>
-    </a:fmtScheme>
-  </a:themeElements>
-  <a:objectDefaults>
-    <a:lnDef>
-      <a:spPr/>
-      <a:bodyPr/>
-      <a:lstStyle/>
-      <a:style>
-        <a:lnRef idx="2">
-          <a:schemeClr val="accent1"/>
-        </a:lnRef>
-        <a:fillRef idx="0">
-          <a:schemeClr val="accent1"/>
-        </a:fillRef>
-        <a:effectRef idx="1">
-          <a:schemeClr val="accent1"/>
-        </a:effectRef>
-        <a:fontRef idx="minor">
-          <a:schemeClr val="tx1"/>
-        </a:fontRef>
-      </a:style>
-    </a:lnDef>
-  </a:objectDefaults>
-  <a:extraClrSchemeLst/>
-  <a:extLst>
-    <a:ext uri="{05A4C25C-085E-4340-85A3-A5531E510DB2}">
-      <thm15:themeFamily xmlns:thm15="http://schemas.microsoft.com/office/thememl/2012/main" name="Office Theme" id="{2E142A2C-CD16-42D6-873A-C26D2A0506FA}" vid="{1BDDFF52-6CD6-40A5-AB3C-68EB2F1E4D0A}"/>
-    </a:ext>
-  </a:extLst>
-</a:theme>
 </file>
--- a/business/CareSignal_Pitch_Deck.pptx
+++ b/business/CareSignal_Pitch_Deck.pptx
@@ -4,6 +4,9 @@
   <p:sldMasterIdLst>
     <p:sldMasterId id="2147483648" r:id="rId1"/>
   </p:sldMasterIdLst>
+  <p:notesMasterIdLst>
+    <p:notesMasterId r:id="rId17"/>
+  </p:notesMasterIdLst>
   <p:sldIdLst>
     <p:sldId id="256" r:id="rId2"/>
     <p:sldId id="257" r:id="rId3"/>
@@ -21,9 +24,6 @@
     <p:sldId id="269" r:id="rId15"/>
     <p:sldId id="270" r:id="rId16"/>
   </p:sldIdLst>
-  <p:notesMasterIdLst>
-    <p:notesMasterId r:id="rId17"/>
-  </p:notesMasterIdLst>
   <p:sldSz cx="12192000" cy="6858000"/>
   <p:notesSz cx="6858000" cy="12192000"/>
   <p:defaultTextStyle>
@@ -118,6 +118,11 @@
       </a:defRPr>
     </a:lvl9pPr>
   </p:defaultTextStyle>
+  <p:extLst>
+    <p:ext uri="{EFAFB233-063F-42B5-8137-9DF3F51BA10A}">
+      <p15:sldGuideLst xmlns:p15="http://schemas.microsoft.com/office/powerpoint/2012/main"/>
+    </p:ext>
+  </p:extLst>
 </p:presentation>
 </file>
 
@@ -143,234 +148,10 @@
           <a:chExt cx="0" cy="0"/>
         </a:xfrm>
       </p:grpSpPr>
-      <p:sp>
-        <p:nvSpPr>
-          <p:cNvPr id="2" name="Header Placeholder 1"/>
-          <p:cNvSpPr>
-            <a:spLocks noGrp="1"/>
-          </p:cNvSpPr>
-          <p:nvPr>
-            <p:ph type="hdr" sz="quarter"/>
-          </p:nvPr>
-        </p:nvSpPr>
-        <p:spPr>
-          <a:xfrm>
-            <a:off x="0" y="0"/>
-            <a:ext cx="2971800" cy="458788"/>
-          </a:xfrm>
-          <a:prstGeom prst="rect">
-            <a:avLst/>
-          </a:prstGeom>
-        </p:spPr>
-        <p:txBody>
-          <a:bodyPr vert="horz" lIns="91440" tIns="45720" rIns="91440" bIns="45720" rtlCol="0"/>
-          <a:lstStyle>
-            <a:lvl1pPr algn="l">
-              <a:defRPr sz="1200"/>
-            </a:lvl1pPr>
-          </a:lstStyle>
-          <a:p>
-            <a:endParaRPr lang="en-US"/>
-          </a:p>
-        </p:txBody>
-      </p:sp>
-      <p:sp>
-        <p:nvSpPr>
-          <p:cNvPr id="3" name="Date Placeholder 2"/>
-          <p:cNvSpPr>
-            <a:spLocks noGrp="1"/>
-          </p:cNvSpPr>
-          <p:nvPr>
-            <p:ph type="dt" idx="1"/>
-          </p:nvPr>
-        </p:nvSpPr>
-        <p:spPr>
-          <a:xfrm>
-            <a:off x="3884613" y="0"/>
-            <a:ext cx="2971800" cy="458788"/>
-          </a:xfrm>
-          <a:prstGeom prst="rect">
-            <a:avLst/>
-          </a:prstGeom>
-        </p:spPr>
-        <p:txBody>
-          <a:bodyPr vert="horz" lIns="91440" tIns="45720" rIns="91440" bIns="45720" rtlCol="0"/>
-          <a:lstStyle>
-            <a:lvl1pPr algn="r">
-              <a:defRPr sz="1200"/>
-            </a:lvl1pPr>
-          </a:lstStyle>
-          <a:p>
-            <a:fld id="{5282F153-3F37-0F45-9E97-73ACFA13230C}" type="datetimeFigureOut">
-              <a:rPr lang="en-US"/>
-              <a:t>7/23/19</a:t>
-            </a:fld>
-            <a:endParaRPr lang="en-US"/>
-          </a:p>
-        </p:txBody>
-      </p:sp>
-      <p:sp>
-        <p:nvSpPr>
-          <p:cNvPr id="4" name="Slide Image Placeholder 3"/>
-          <p:cNvSpPr>
-            <a:spLocks noGrp="1" noRot="1" noChangeAspect="1"/>
-          </p:cNvSpPr>
-          <p:nvPr>
-            <p:ph type="sldImg" idx="2"/>
-          </p:nvPr>
-        </p:nvSpPr>
-        <p:spPr>
-          <a:xfrm>
-            <a:off x="685800" y="1143000"/>
-            <a:ext cx="5486400" cy="3086100"/>
-          </a:xfrm>
-          <a:prstGeom prst="rect">
-            <a:avLst/>
-          </a:prstGeom>
-          <a:noFill/>
-          <a:ln w="12700">
-            <a:solidFill>
-              <a:prstClr val="black"/>
-            </a:solidFill>
-          </a:ln>
-        </p:spPr>
-        <p:txBody>
-          <a:bodyPr vert="horz" lIns="91440" tIns="45720" rIns="91440" bIns="45720" rtlCol="0" anchor="ctr"/>
-          <a:lstStyle/>
-          <a:p>
-            <a:endParaRPr lang="en-US"/>
-          </a:p>
-        </p:txBody>
-      </p:sp>
-      <p:sp>
-        <p:nvSpPr>
-          <p:cNvPr id="5" name="Notes Placeholder 4"/>
-          <p:cNvSpPr>
-            <a:spLocks noGrp="1"/>
-          </p:cNvSpPr>
-          <p:nvPr>
-            <p:ph type="body" sz="quarter" idx="3"/>
-          </p:nvPr>
-        </p:nvSpPr>
-        <p:spPr>
-          <a:xfrm>
-            <a:off x="685800" y="4400550"/>
-            <a:ext cx="5486400" cy="3600450"/>
-          </a:xfrm>
-          <a:prstGeom prst="rect">
-            <a:avLst/>
-          </a:prstGeom>
-        </p:spPr>
-        <p:txBody>
-          <a:bodyPr vert="horz" lIns="91440" tIns="45720" rIns="91440" bIns="45720" rtlCol="0"/>
-          <a:lstStyle/>
-          <a:p>
-            <a:pPr lvl="0"/>
-            <a:r>
-              <a:rPr lang="en-US"/>
-              <a:t>Click to edit Master text styles</a:t>
-            </a:r>
-          </a:p>
-          <a:p>
-            <a:pPr lvl="1"/>
-            <a:r>
-              <a:rPr lang="en-US"/>
-              <a:t>Second level</a:t>
-            </a:r>
-          </a:p>
-          <a:p>
-            <a:pPr lvl="2"/>
-            <a:r>
-              <a:rPr lang="en-US"/>
-              <a:t>Third level</a:t>
-            </a:r>
-          </a:p>
-          <a:p>
-            <a:pPr lvl="3"/>
-            <a:r>
-              <a:rPr lang="en-US"/>
-              <a:t>Fourth level</a:t>
-            </a:r>
-          </a:p>
-          <a:p>
-            <a:pPr lvl="4"/>
-            <a:r>
-              <a:rPr lang="en-US"/>
-              <a:t>Fifth level</a:t>
-            </a:r>
-          </a:p>
-        </p:txBody>
-      </p:sp>
-      <p:sp>
-        <p:nvSpPr>
-          <p:cNvPr id="6" name="Footer Placeholder 5"/>
-          <p:cNvSpPr>
-            <a:spLocks noGrp="1"/>
-          </p:cNvSpPr>
-          <p:nvPr>
-            <p:ph type="ftr" sz="quarter" idx="4"/>
-          </p:nvPr>
-        </p:nvSpPr>
-        <p:spPr>
-          <a:xfrm>
-            <a:off x="0" y="8685213"/>
-            <a:ext cx="2971800" cy="458787"/>
-          </a:xfrm>
-          <a:prstGeom prst="rect">
-            <a:avLst/>
-          </a:prstGeom>
-        </p:spPr>
-        <p:txBody>
-          <a:bodyPr vert="horz" lIns="91440" tIns="45720" rIns="91440" bIns="45720" rtlCol="0" anchor="b"/>
-          <a:lstStyle>
-            <a:lvl1pPr algn="l">
-              <a:defRPr sz="1200"/>
-            </a:lvl1pPr>
-          </a:lstStyle>
-          <a:p>
-            <a:endParaRPr lang="en-US"/>
-          </a:p>
-        </p:txBody>
-      </p:sp>
-      <p:sp>
-        <p:nvSpPr>
-          <p:cNvPr id="7" name="Slide Number Placeholder 6"/>
-          <p:cNvSpPr>
-            <a:spLocks noGrp="1"/>
-          </p:cNvSpPr>
-          <p:nvPr>
-            <p:ph type="sldNum" sz="quarter" idx="5"/>
-          </p:nvPr>
-        </p:nvSpPr>
-        <p:spPr>
-          <a:xfrm>
-            <a:off x="3884613" y="8685213"/>
-            <a:ext cx="2971800" cy="458787"/>
-          </a:xfrm>
-          <a:prstGeom prst="rect">
-            <a:avLst/>
-          </a:prstGeom>
-        </p:spPr>
-        <p:txBody>
-          <a:bodyPr vert="horz" lIns="91440" tIns="45720" rIns="91440" bIns="45720" rtlCol="0" anchor="b"/>
-          <a:lstStyle>
-            <a:lvl1pPr algn="r">
-              <a:defRPr sz="1200"/>
-            </a:lvl1pPr>
-          </a:lstStyle>
-          <a:p>
-            <a:fld id="{CE5E9CC1-C706-0F49-92D6-E571CC5EEA8F}" type="slidenum">
-              <a:rPr lang="en-US"/>
-              <a:t>‹#›</a:t>
-            </a:fld>
-            <a:endParaRPr lang="en-US"/>
-          </a:p>
-        </p:txBody>
-      </p:sp>
     </p:spTree>
     <p:extLst>
       <p:ext uri="{BB962C8B-B14F-4D97-AF65-F5344CB8AC3E}">
-        <p14:creationId xmlns:p14="http://schemas.microsoft.com/office/powerpoint/2010/main" val="1024086991"/>
+        <p14:creationId xmlns:p14="http://schemas.microsoft.com/office/powerpoint/2010/main" val="2717915341"/>
       </p:ext>
     </p:extLst>
   </p:cSld>
@@ -514,10 +295,6 @@
           <a:bodyPr/>
           <a:lstStyle/>
           <a:p>
-            <a:r>
-              <a:rPr lang="en-US" dirty="0"/>
-              <a:t/>
-            </a:r>
             <a:endParaRPr lang="en-US" dirty="0"/>
           </a:p>
         </p:txBody>
@@ -602,10 +379,6 @@
           <a:bodyPr/>
           <a:lstStyle/>
           <a:p>
-            <a:r>
-              <a:rPr lang="en-US" dirty="0"/>
-              <a:t/>
-            </a:r>
             <a:endParaRPr lang="en-US" dirty="0"/>
           </a:p>
         </p:txBody>
@@ -690,10 +463,6 @@
           <a:bodyPr/>
           <a:lstStyle/>
           <a:p>
-            <a:r>
-              <a:rPr lang="en-US" dirty="0"/>
-              <a:t/>
-            </a:r>
             <a:endParaRPr lang="en-US" dirty="0"/>
           </a:p>
         </p:txBody>
@@ -778,10 +547,6 @@
           <a:bodyPr/>
           <a:lstStyle/>
           <a:p>
-            <a:r>
-              <a:rPr lang="en-US" dirty="0"/>
-              <a:t/>
-            </a:r>
             <a:endParaRPr lang="en-US" dirty="0"/>
           </a:p>
         </p:txBody>
@@ -866,10 +631,6 @@
           <a:bodyPr/>
           <a:lstStyle/>
           <a:p>
-            <a:r>
-              <a:rPr lang="en-US" dirty="0"/>
-              <a:t/>
-            </a:r>
             <a:endParaRPr lang="en-US" dirty="0"/>
           </a:p>
         </p:txBody>
@@ -954,10 +715,6 @@
           <a:bodyPr/>
           <a:lstStyle/>
           <a:p>
-            <a:r>
-              <a:rPr lang="en-US" dirty="0"/>
-              <a:t/>
-            </a:r>
             <a:endParaRPr lang="en-US" dirty="0"/>
           </a:p>
         </p:txBody>
@@ -1042,10 +799,6 @@
           <a:bodyPr/>
           <a:lstStyle/>
           <a:p>
-            <a:r>
-              <a:rPr lang="en-US" dirty="0"/>
-              <a:t/>
-            </a:r>
             <a:endParaRPr lang="en-US" dirty="0"/>
           </a:p>
         </p:txBody>
@@ -1130,10 +883,6 @@
           <a:bodyPr/>
           <a:lstStyle/>
           <a:p>
-            <a:r>
-              <a:rPr lang="en-US" dirty="0"/>
-              <a:t/>
-            </a:r>
             <a:endParaRPr lang="en-US" dirty="0"/>
           </a:p>
         </p:txBody>
@@ -1218,10 +967,6 @@
           <a:bodyPr/>
           <a:lstStyle/>
           <a:p>
-            <a:r>
-              <a:rPr lang="en-US" dirty="0"/>
-              <a:t/>
-            </a:r>
             <a:endParaRPr lang="en-US" dirty="0"/>
           </a:p>
         </p:txBody>
@@ -1306,10 +1051,6 @@
           <a:bodyPr/>
           <a:lstStyle/>
           <a:p>
-            <a:r>
-              <a:rPr lang="en-US" dirty="0"/>
-              <a:t/>
-            </a:r>
             <a:endParaRPr lang="en-US" dirty="0"/>
           </a:p>
         </p:txBody>
@@ -1394,10 +1135,6 @@
           <a:bodyPr/>
           <a:lstStyle/>
           <a:p>
-            <a:r>
-              <a:rPr lang="en-US" dirty="0"/>
-              <a:t/>
-            </a:r>
             <a:endParaRPr lang="en-US" dirty="0"/>
           </a:p>
         </p:txBody>
@@ -1482,10 +1219,6 @@
           <a:bodyPr/>
           <a:lstStyle/>
           <a:p>
-            <a:r>
-              <a:rPr lang="en-US" dirty="0"/>
-              <a:t/>
-            </a:r>
             <a:endParaRPr lang="en-US" dirty="0"/>
           </a:p>
         </p:txBody>
@@ -1570,10 +1303,6 @@
           <a:bodyPr/>
           <a:lstStyle/>
           <a:p>
-            <a:r>
-              <a:rPr lang="en-US" dirty="0"/>
-              <a:t/>
-            </a:r>
             <a:endParaRPr lang="en-US" dirty="0"/>
           </a:p>
         </p:txBody>
@@ -1658,10 +1387,6 @@
           <a:bodyPr/>
           <a:lstStyle/>
           <a:p>
-            <a:r>
-              <a:rPr lang="en-US" dirty="0"/>
-              <a:t/>
-            </a:r>
             <a:endParaRPr lang="en-US" dirty="0"/>
           </a:p>
         </p:txBody>
@@ -1746,10 +1471,6 @@
           <a:bodyPr/>
           <a:lstStyle/>
           <a:p>
-            <a:r>
-              <a:rPr lang="en-US" dirty="0"/>
-              <a:t/>
-            </a:r>
             <a:endParaRPr lang="en-US" dirty="0"/>
           </a:p>
         </p:txBody>
@@ -1823,6 +1544,11 @@
 <file path=ppt/slideMasters/slideMaster1.xml><?xml version="1.0" encoding="utf-8"?>
 <p:sldMaster xmlns:a="http://schemas.openxmlformats.org/drawingml/2006/main" xmlns:r="http://schemas.openxmlformats.org/officeDocument/2006/relationships" xmlns:p="http://schemas.openxmlformats.org/presentationml/2006/main">
   <p:cSld>
+    <p:bg>
+      <p:bgRef idx="1001">
+        <a:schemeClr val="bg1"/>
+      </p:bgRef>
+    </p:bg>
     <p:spTree>
       <p:nvGrpSpPr>
         <p:cNvPr id="1" name=""/>
@@ -2138,6 +1864,13 @@
             <a:prstDash val="solid"/>
           </a:ln>
         </p:spPr>
+        <p:txBody>
+          <a:bodyPr/>
+          <a:lstStyle/>
+          <a:p>
+            <a:endParaRPr lang="en-US"/>
+          </a:p>
+        </p:txBody>
       </p:sp>
       <p:sp>
         <p:nvSpPr>
@@ -2167,6 +1900,13 @@
             <a:prstDash val="solid"/>
           </a:ln>
         </p:spPr>
+        <p:txBody>
+          <a:bodyPr/>
+          <a:lstStyle/>
+          <a:p>
+            <a:endParaRPr lang="en-US"/>
+          </a:p>
+        </p:txBody>
       </p:sp>
       <p:sp>
         <p:nvSpPr>
@@ -2196,6 +1936,13 @@
             <a:prstDash val="solid"/>
           </a:ln>
         </p:spPr>
+        <p:txBody>
+          <a:bodyPr/>
+          <a:lstStyle/>
+          <a:p>
+            <a:endParaRPr lang="en-US"/>
+          </a:p>
+        </p:txBody>
       </p:sp>
       <p:sp>
         <p:nvSpPr>
@@ -2225,6 +1972,13 @@
             <a:prstDash val="solid"/>
           </a:ln>
         </p:spPr>
+        <p:txBody>
+          <a:bodyPr/>
+          <a:lstStyle/>
+          <a:p>
+            <a:endParaRPr lang="en-US"/>
+          </a:p>
+        </p:txBody>
       </p:sp>
       <p:sp>
         <p:nvSpPr>
@@ -2250,6 +2004,13 @@
             <a:prstDash val="solid"/>
           </a:ln>
         </p:spPr>
+        <p:txBody>
+          <a:bodyPr/>
+          <a:lstStyle/>
+          <a:p>
+            <a:endParaRPr lang="en-US"/>
+          </a:p>
+        </p:txBody>
       </p:sp>
       <p:sp>
         <p:nvSpPr>
@@ -2275,6 +2036,13 @@
             <a:prstDash val="solid"/>
           </a:ln>
         </p:spPr>
+        <p:txBody>
+          <a:bodyPr/>
+          <a:lstStyle/>
+          <a:p>
+            <a:endParaRPr lang="en-US"/>
+          </a:p>
+        </p:txBody>
       </p:sp>
       <p:sp>
         <p:nvSpPr>
@@ -2297,7 +2065,7 @@
           <a:bodyPr wrap="square" rtlCol="0" anchor="ctr"/>
           <a:lstStyle/>
           <a:p>
-            <a:pPr algn="ctr" indent="0" marL="0">
+            <a:pPr marL="0" indent="0" algn="ctr">
               <a:buNone/>
             </a:pPr>
             <a:r>
@@ -2333,7 +2101,7 @@
           <a:bodyPr wrap="square" rtlCol="0" anchor="ctr"/>
           <a:lstStyle/>
           <a:p>
-            <a:pPr indent="0" marL="0">
+            <a:pPr marL="0" indent="0">
               <a:buNone/>
             </a:pPr>
             <a:r>
@@ -2372,7 +2140,7 @@
           <a:bodyPr wrap="square" rtlCol="0" anchor="ctr"/>
           <a:lstStyle/>
           <a:p>
-            <a:pPr indent="0" marL="0">
+            <a:pPr marL="0" indent="0">
               <a:buNone/>
             </a:pPr>
             <a:r>
@@ -2412,6 +2180,13 @@
             <a:prstDash val="solid"/>
           </a:ln>
         </p:spPr>
+        <p:txBody>
+          <a:bodyPr/>
+          <a:lstStyle/>
+          <a:p>
+            <a:endParaRPr lang="en-US"/>
+          </a:p>
+        </p:txBody>
       </p:sp>
       <p:sp>
         <p:nvSpPr>
@@ -2439,6 +2214,13 @@
             <a:prstDash val="solid"/>
           </a:ln>
         </p:spPr>
+        <p:txBody>
+          <a:bodyPr/>
+          <a:lstStyle/>
+          <a:p>
+            <a:endParaRPr lang="en-US"/>
+          </a:p>
+        </p:txBody>
       </p:sp>
       <p:sp>
         <p:nvSpPr>
@@ -2461,7 +2243,7 @@
           <a:bodyPr wrap="square" rtlCol="0" anchor="ctr"/>
           <a:lstStyle/>
           <a:p>
-            <a:pPr algn="ctr" indent="0" marL="0">
+            <a:pPr marL="0" indent="0" algn="ctr">
               <a:buNone/>
             </a:pPr>
             <a:r>
@@ -2497,7 +2279,7 @@
           <a:bodyPr wrap="square" rtlCol="0" anchor="ctr"/>
           <a:lstStyle/>
           <a:p>
-            <a:pPr algn="ctr" indent="0" marL="0">
+            <a:pPr marL="0" indent="0" algn="ctr">
               <a:buNone/>
             </a:pPr>
             <a:r>
@@ -2514,7 +2296,7 @@
             <a:endParaRPr lang="en-US" sz="1300" dirty="0"/>
           </a:p>
           <a:p>
-            <a:pPr algn="ctr" indent="0" marL="0">
+            <a:pPr marL="0" indent="0" algn="ctr">
               <a:buNone/>
             </a:pPr>
             <a:r>
@@ -2531,7 +2313,7 @@
             <a:endParaRPr lang="en-US" sz="1300" dirty="0"/>
           </a:p>
           <a:p>
-            <a:pPr algn="ctr" indent="0" marL="0">
+            <a:pPr marL="0" indent="0" algn="ctr">
               <a:buNone/>
             </a:pPr>
             <a:r>
@@ -2575,6 +2357,13 @@
             <a:prstDash val="solid"/>
           </a:ln>
         </p:spPr>
+        <p:txBody>
+          <a:bodyPr/>
+          <a:lstStyle/>
+          <a:p>
+            <a:endParaRPr lang="en-US"/>
+          </a:p>
+        </p:txBody>
       </p:sp>
       <p:sp>
         <p:nvSpPr>
@@ -2597,7 +2386,7 @@
           <a:bodyPr wrap="square" rtlCol="0" anchor="ctr"/>
           <a:lstStyle/>
           <a:p>
-            <a:pPr algn="ctr" indent="0" marL="0">
+            <a:pPr marL="0" indent="0" algn="ctr">
               <a:buNone/>
             </a:pPr>
             <a:r>
@@ -2633,7 +2422,7 @@
           <a:bodyPr wrap="square" rtlCol="0" anchor="ctr"/>
           <a:lstStyle/>
           <a:p>
-            <a:pPr algn="ctr" indent="0" marL="0">
+            <a:pPr marL="0" indent="0" algn="ctr">
               <a:buNone/>
             </a:pPr>
             <a:r>
@@ -2650,7 +2439,7 @@
             <a:endParaRPr lang="en-US" sz="1300" dirty="0"/>
           </a:p>
           <a:p>
-            <a:pPr algn="ctr" indent="0" marL="0">
+            <a:pPr marL="0" indent="0" algn="ctr">
               <a:buNone/>
             </a:pPr>
             <a:r>
@@ -2667,7 +2456,7 @@
             <a:endParaRPr lang="en-US" sz="1300" dirty="0"/>
           </a:p>
           <a:p>
-            <a:pPr algn="ctr" indent="0" marL="0">
+            <a:pPr marL="0" indent="0" algn="ctr">
               <a:buNone/>
             </a:pPr>
             <a:r>
@@ -2711,6 +2500,13 @@
             <a:prstDash val="solid"/>
           </a:ln>
         </p:spPr>
+        <p:txBody>
+          <a:bodyPr/>
+          <a:lstStyle/>
+          <a:p>
+            <a:endParaRPr lang="en-US"/>
+          </a:p>
+        </p:txBody>
       </p:sp>
       <p:sp>
         <p:nvSpPr>
@@ -2733,7 +2529,7 @@
           <a:bodyPr wrap="square" rtlCol="0" anchor="ctr"/>
           <a:lstStyle/>
           <a:p>
-            <a:pPr algn="ctr" indent="0" marL="0">
+            <a:pPr marL="0" indent="0" algn="ctr">
               <a:buNone/>
             </a:pPr>
             <a:r>
@@ -2769,7 +2565,7 @@
           <a:bodyPr wrap="square" rtlCol="0" anchor="ctr"/>
           <a:lstStyle/>
           <a:p>
-            <a:pPr algn="ctr" indent="0" marL="0">
+            <a:pPr marL="0" indent="0" algn="ctr">
               <a:buNone/>
             </a:pPr>
             <a:r>
@@ -2786,7 +2582,7 @@
             <a:endParaRPr lang="en-US" sz="1300" dirty="0"/>
           </a:p>
           <a:p>
-            <a:pPr algn="ctr" indent="0" marL="0">
+            <a:pPr marL="0" indent="0" algn="ctr">
               <a:buNone/>
             </a:pPr>
             <a:r>
@@ -2803,7 +2599,7 @@
             <a:endParaRPr lang="en-US" sz="1300" dirty="0"/>
           </a:p>
           <a:p>
-            <a:pPr algn="ctr" indent="0" marL="0">
+            <a:pPr marL="0" indent="0" algn="ctr">
               <a:buNone/>
             </a:pPr>
             <a:r>
@@ -2842,7 +2638,7 @@
           <a:bodyPr wrap="square" rtlCol="0" anchor="ctr"/>
           <a:lstStyle/>
           <a:p>
-            <a:pPr algn="ctr" indent="0" marL="0">
+            <a:pPr marL="0" indent="0" algn="ctr">
               <a:buNone/>
             </a:pPr>
             <a:r>
@@ -2854,7 +2650,29 @@
                 <a:ea typeface="Arial" pitchFamily="34" charset="-122"/>
                 <a:cs typeface="Arial" pitchFamily="34" charset="-120"/>
               </a:rPr>
-              <a:t>Pitch · 4 minutos  |  WomenCISO 4 / MenCISO 1  |  Agosto 2026</a:t>
+              <a:t>Roberto Garcia |  WomenCISO 4 / MenCISO 1  |  </a:t>
+            </a:r>
+            <a:r>
+              <a:rPr lang="en-US" sz="1200" dirty="0" err="1">
+                <a:solidFill>
+                  <a:srgbClr val="718096"/>
+                </a:solidFill>
+                <a:latin typeface="Arial" pitchFamily="34" charset="0"/>
+                <a:ea typeface="Arial" pitchFamily="34" charset="-122"/>
+                <a:cs typeface="Arial" pitchFamily="34" charset="-120"/>
+              </a:rPr>
+              <a:t>Septiembre</a:t>
+            </a:r>
+            <a:r>
+              <a:rPr lang="en-US" sz="1200" dirty="0">
+                <a:solidFill>
+                  <a:srgbClr val="718096"/>
+                </a:solidFill>
+                <a:latin typeface="Arial" pitchFamily="34" charset="0"/>
+                <a:ea typeface="Arial" pitchFamily="34" charset="-122"/>
+                <a:cs typeface="Arial" pitchFamily="34" charset="-120"/>
+              </a:rPr>
+              <a:t> 2026</a:t>
             </a:r>
             <a:endParaRPr lang="en-US" sz="1200" dirty="0"/>
           </a:p>
@@ -2869,19 +2687,19 @@
         <p:spPr>
           <a:xfrm>
             <a:off x="457200" y="6172200"/>
-            <a:ext cx="8375904" cy="256032"/>
-          </a:xfrm>
-          <a:prstGeom prst="rect">
-            <a:avLst/>
-          </a:prstGeom>
-          <a:noFill/>
-          <a:ln/>
-        </p:spPr>
-        <p:txBody>
-          <a:bodyPr wrap="square" rtlCol="0" anchor="ctr"/>
-          <a:lstStyle/>
-          <a:p>
-            <a:pPr algn="ctr" indent="0" marL="0">
+            <a:ext cx="8806912" cy="256032"/>
+          </a:xfrm>
+          <a:prstGeom prst="rect">
+            <a:avLst/>
+          </a:prstGeom>
+          <a:noFill/>
+          <a:ln/>
+        </p:spPr>
+        <p:txBody>
+          <a:bodyPr wrap="square" rtlCol="0" anchor="ctr"/>
+          <a:lstStyle/>
+          <a:p>
+            <a:pPr marL="0" indent="0" algn="ctr">
               <a:buNone/>
             </a:pPr>
             <a:r>
@@ -2893,7 +2711,18 @@
                 <a:ea typeface="Arial" pitchFamily="34" charset="-122"/>
                 <a:cs typeface="Arial" pitchFamily="34" charset="-120"/>
               </a:rPr>
-              <a:t>v0.1.0-workshop  ·  MVP operacional  ·  No dispositivo médico  ·  Datos ficticios</a:t>
+              <a:t>v0.1.0-workshop  ·  MVP operacional  ·  No dispositivo médico  ·  Datos </a:t>
+            </a:r>
+            <a:r>
+              <a:rPr lang="en-US" dirty="0" err="1">
+                <a:solidFill>
+                  <a:srgbClr val="718096"/>
+                </a:solidFill>
+                <a:latin typeface="Arial" pitchFamily="34" charset="0"/>
+                <a:ea typeface="Arial" pitchFamily="34" charset="-122"/>
+                <a:cs typeface="Arial" pitchFamily="34" charset="-120"/>
+              </a:rPr>
+              <a:t>sintéticos</a:t>
             </a:r>
             <a:endParaRPr lang="en-US" dirty="0"/>
           </a:p>
@@ -2948,6 +2777,13 @@
             <a:prstDash val="solid"/>
           </a:ln>
         </p:spPr>
+        <p:txBody>
+          <a:bodyPr/>
+          <a:lstStyle/>
+          <a:p>
+            <a:endParaRPr lang="en-US"/>
+          </a:p>
+        </p:txBody>
       </p:sp>
       <p:sp>
         <p:nvSpPr>
@@ -2977,6 +2813,13 @@
             <a:prstDash val="solid"/>
           </a:ln>
         </p:spPr>
+        <p:txBody>
+          <a:bodyPr/>
+          <a:lstStyle/>
+          <a:p>
+            <a:endParaRPr lang="en-US"/>
+          </a:p>
+        </p:txBody>
       </p:sp>
       <p:sp>
         <p:nvSpPr>
@@ -3006,6 +2849,13 @@
             <a:prstDash val="solid"/>
           </a:ln>
         </p:spPr>
+        <p:txBody>
+          <a:bodyPr/>
+          <a:lstStyle/>
+          <a:p>
+            <a:endParaRPr lang="en-US"/>
+          </a:p>
+        </p:txBody>
       </p:sp>
       <p:sp>
         <p:nvSpPr>
@@ -3031,6 +2881,13 @@
             <a:prstDash val="solid"/>
           </a:ln>
         </p:spPr>
+        <p:txBody>
+          <a:bodyPr/>
+          <a:lstStyle/>
+          <a:p>
+            <a:endParaRPr lang="en-US"/>
+          </a:p>
+        </p:txBody>
       </p:sp>
       <p:sp>
         <p:nvSpPr>
@@ -3056,6 +2913,13 @@
             <a:prstDash val="solid"/>
           </a:ln>
         </p:spPr>
+        <p:txBody>
+          <a:bodyPr/>
+          <a:lstStyle/>
+          <a:p>
+            <a:endParaRPr lang="en-US"/>
+          </a:p>
+        </p:txBody>
       </p:sp>
       <p:sp>
         <p:nvSpPr>
@@ -3078,7 +2942,7 @@
           <a:bodyPr wrap="square" rtlCol="0" anchor="ctr"/>
           <a:lstStyle/>
           <a:p>
-            <a:pPr indent="0" marL="0">
+            <a:pPr marL="0" indent="0">
               <a:buNone/>
             </a:pPr>
             <a:r>
@@ -3117,7 +2981,7 @@
           <a:bodyPr wrap="square" rtlCol="0" anchor="ctr"/>
           <a:lstStyle/>
           <a:p>
-            <a:pPr indent="0" marL="0">
+            <a:pPr marL="0" indent="0">
               <a:buNone/>
             </a:pPr>
             <a:r>
@@ -3157,6 +3021,13 @@
             <a:prstDash val="solid"/>
           </a:ln>
         </p:spPr>
+        <p:txBody>
+          <a:bodyPr/>
+          <a:lstStyle/>
+          <a:p>
+            <a:endParaRPr lang="en-US"/>
+          </a:p>
+        </p:txBody>
       </p:sp>
       <p:sp>
         <p:nvSpPr>
@@ -3184,6 +3055,13 @@
             <a:prstDash val="solid"/>
           </a:ln>
         </p:spPr>
+        <p:txBody>
+          <a:bodyPr/>
+          <a:lstStyle/>
+          <a:p>
+            <a:endParaRPr lang="en-US"/>
+          </a:p>
+        </p:txBody>
       </p:sp>
       <p:sp>
         <p:nvSpPr>
@@ -3206,7 +3084,7 @@
           <a:bodyPr wrap="square" rtlCol="0" anchor="ctr"/>
           <a:lstStyle/>
           <a:p>
-            <a:pPr algn="ctr" indent="0" marL="0">
+            <a:pPr marL="0" indent="0" algn="ctr">
               <a:buNone/>
             </a:pPr>
             <a:r>
@@ -3242,7 +3120,7 @@
           <a:bodyPr wrap="square" rtlCol="0" anchor="ctr"/>
           <a:lstStyle/>
           <a:p>
-            <a:pPr algn="ctr" indent="0" marL="0">
+            <a:pPr marL="0" indent="0" algn="ctr">
               <a:buNone/>
             </a:pPr>
             <a:r>
@@ -3281,7 +3159,7 @@
           <a:bodyPr wrap="square" rtlCol="0" anchor="ctr"/>
           <a:lstStyle/>
           <a:p>
-            <a:pPr algn="ctr" indent="0" marL="0">
+            <a:pPr marL="0" indent="0" algn="ctr">
               <a:buNone/>
             </a:pPr>
             <a:r>
@@ -3298,7 +3176,7 @@
             <a:endParaRPr lang="en-US" sz="1050" dirty="0"/>
           </a:p>
           <a:p>
-            <a:pPr algn="ctr" indent="0" marL="0">
+            <a:pPr marL="0" indent="0" algn="ctr">
               <a:buNone/>
             </a:pPr>
             <a:r>
@@ -3342,6 +3220,13 @@
             <a:prstDash val="solid"/>
           </a:ln>
         </p:spPr>
+        <p:txBody>
+          <a:bodyPr/>
+          <a:lstStyle/>
+          <a:p>
+            <a:endParaRPr lang="en-US"/>
+          </a:p>
+        </p:txBody>
       </p:sp>
       <p:sp>
         <p:nvSpPr>
@@ -3364,7 +3249,7 @@
           <a:bodyPr wrap="square" rtlCol="0" anchor="ctr"/>
           <a:lstStyle/>
           <a:p>
-            <a:pPr algn="ctr" indent="0" marL="0">
+            <a:pPr marL="0" indent="0" algn="ctr">
               <a:buNone/>
             </a:pPr>
             <a:r>
@@ -3400,7 +3285,7 @@
           <a:bodyPr wrap="square" rtlCol="0" anchor="ctr"/>
           <a:lstStyle/>
           <a:p>
-            <a:pPr algn="ctr" indent="0" marL="0">
+            <a:pPr marL="0" indent="0" algn="ctr">
               <a:buNone/>
             </a:pPr>
             <a:r>
@@ -3439,7 +3324,7 @@
           <a:bodyPr wrap="square" rtlCol="0" anchor="ctr"/>
           <a:lstStyle/>
           <a:p>
-            <a:pPr algn="ctr" indent="0" marL="0">
+            <a:pPr marL="0" indent="0" algn="ctr">
               <a:buNone/>
             </a:pPr>
             <a:r>
@@ -3456,7 +3341,7 @@
             <a:endParaRPr lang="en-US" sz="1050" dirty="0"/>
           </a:p>
           <a:p>
-            <a:pPr algn="ctr" indent="0" marL="0">
+            <a:pPr marL="0" indent="0" algn="ctr">
               <a:buNone/>
             </a:pPr>
             <a:r>
@@ -3500,6 +3385,13 @@
             <a:prstDash val="solid"/>
           </a:ln>
         </p:spPr>
+        <p:txBody>
+          <a:bodyPr/>
+          <a:lstStyle/>
+          <a:p>
+            <a:endParaRPr lang="en-US"/>
+          </a:p>
+        </p:txBody>
       </p:sp>
       <p:sp>
         <p:nvSpPr>
@@ -3522,7 +3414,7 @@
           <a:bodyPr wrap="square" rtlCol="0" anchor="ctr"/>
           <a:lstStyle/>
           <a:p>
-            <a:pPr algn="ctr" indent="0" marL="0">
+            <a:pPr marL="0" indent="0" algn="ctr">
               <a:buNone/>
             </a:pPr>
             <a:r>
@@ -3558,7 +3450,7 @@
           <a:bodyPr wrap="square" rtlCol="0" anchor="ctr"/>
           <a:lstStyle/>
           <a:p>
-            <a:pPr algn="ctr" indent="0" marL="0">
+            <a:pPr marL="0" indent="0" algn="ctr">
               <a:buNone/>
             </a:pPr>
             <a:r>
@@ -3597,7 +3489,7 @@
           <a:bodyPr wrap="square" rtlCol="0" anchor="ctr"/>
           <a:lstStyle/>
           <a:p>
-            <a:pPr algn="ctr" indent="0" marL="0">
+            <a:pPr marL="0" indent="0" algn="ctr">
               <a:buNone/>
             </a:pPr>
             <a:r>
@@ -3614,7 +3506,7 @@
             <a:endParaRPr lang="en-US" sz="1050" dirty="0"/>
           </a:p>
           <a:p>
-            <a:pPr algn="ctr" indent="0" marL="0">
+            <a:pPr marL="0" indent="0" algn="ctr">
               <a:buNone/>
             </a:pPr>
             <a:r>
@@ -3658,6 +3550,13 @@
             <a:prstDash val="solid"/>
           </a:ln>
         </p:spPr>
+        <p:txBody>
+          <a:bodyPr/>
+          <a:lstStyle/>
+          <a:p>
+            <a:endParaRPr lang="en-US"/>
+          </a:p>
+        </p:txBody>
       </p:sp>
       <p:sp>
         <p:nvSpPr>
@@ -3680,7 +3579,7 @@
           <a:bodyPr wrap="square" rtlCol="0" anchor="ctr"/>
           <a:lstStyle/>
           <a:p>
-            <a:pPr algn="ctr" indent="0" marL="0">
+            <a:pPr marL="0" indent="0" algn="ctr">
               <a:buNone/>
             </a:pPr>
             <a:r>
@@ -3716,7 +3615,7 @@
           <a:bodyPr wrap="square" rtlCol="0" anchor="ctr"/>
           <a:lstStyle/>
           <a:p>
-            <a:pPr algn="ctr" indent="0" marL="0">
+            <a:pPr marL="0" indent="0" algn="ctr">
               <a:buNone/>
             </a:pPr>
             <a:r>
@@ -3755,7 +3654,7 @@
           <a:bodyPr wrap="square" rtlCol="0" anchor="ctr"/>
           <a:lstStyle/>
           <a:p>
-            <a:pPr algn="ctr" indent="0" marL="0">
+            <a:pPr marL="0" indent="0" algn="ctr">
               <a:buNone/>
             </a:pPr>
             <a:r>
@@ -3772,7 +3671,7 @@
             <a:endParaRPr lang="en-US" sz="1050" dirty="0"/>
           </a:p>
           <a:p>
-            <a:pPr algn="ctr" indent="0" marL="0">
+            <a:pPr marL="0" indent="0" algn="ctr">
               <a:buNone/>
             </a:pPr>
             <a:r>
@@ -3816,6 +3715,13 @@
             <a:prstDash val="solid"/>
           </a:ln>
         </p:spPr>
+        <p:txBody>
+          <a:bodyPr/>
+          <a:lstStyle/>
+          <a:p>
+            <a:endParaRPr lang="en-US"/>
+          </a:p>
+        </p:txBody>
       </p:sp>
       <p:sp>
         <p:nvSpPr>
@@ -3838,7 +3744,7 @@
           <a:bodyPr wrap="square" rtlCol="0" anchor="ctr"/>
           <a:lstStyle/>
           <a:p>
-            <a:pPr algn="ctr" indent="0" marL="0">
+            <a:pPr marL="0" indent="0" algn="ctr">
               <a:buNone/>
             </a:pPr>
             <a:r>
@@ -3874,7 +3780,7 @@
           <a:bodyPr wrap="square" rtlCol="0" anchor="ctr"/>
           <a:lstStyle/>
           <a:p>
-            <a:pPr algn="ctr" indent="0" marL="0">
+            <a:pPr marL="0" indent="0" algn="ctr">
               <a:buNone/>
             </a:pPr>
             <a:r>
@@ -3913,7 +3819,7 @@
           <a:bodyPr wrap="square" rtlCol="0" anchor="ctr"/>
           <a:lstStyle/>
           <a:p>
-            <a:pPr algn="ctr" indent="0" marL="0">
+            <a:pPr marL="0" indent="0" algn="ctr">
               <a:buNone/>
             </a:pPr>
             <a:r>
@@ -3930,7 +3836,7 @@
             <a:endParaRPr lang="en-US" sz="1000" dirty="0"/>
           </a:p>
           <a:p>
-            <a:pPr algn="ctr" indent="0" marL="0">
+            <a:pPr marL="0" indent="0" algn="ctr">
               <a:buNone/>
             </a:pPr>
             <a:r>
@@ -3974,6 +3880,13 @@
             <a:prstDash val="solid"/>
           </a:ln>
         </p:spPr>
+        <p:txBody>
+          <a:bodyPr/>
+          <a:lstStyle/>
+          <a:p>
+            <a:endParaRPr lang="en-US"/>
+          </a:p>
+        </p:txBody>
       </p:sp>
       <p:sp>
         <p:nvSpPr>
@@ -3996,7 +3909,7 @@
           <a:bodyPr wrap="square" rtlCol="0" anchor="ctr"/>
           <a:lstStyle/>
           <a:p>
-            <a:pPr algn="ctr" indent="0" marL="0">
+            <a:pPr marL="0" indent="0" algn="ctr">
               <a:buNone/>
             </a:pPr>
             <a:r>
@@ -4032,7 +3945,7 @@
           <a:bodyPr wrap="square" rtlCol="0" anchor="ctr"/>
           <a:lstStyle/>
           <a:p>
-            <a:pPr algn="ctr" indent="0" marL="0">
+            <a:pPr marL="0" indent="0" algn="ctr">
               <a:buNone/>
             </a:pPr>
             <a:r>
@@ -4071,7 +3984,7 @@
           <a:bodyPr wrap="square" rtlCol="0" anchor="ctr"/>
           <a:lstStyle/>
           <a:p>
-            <a:pPr algn="ctr" indent="0" marL="0">
+            <a:pPr marL="0" indent="0" algn="ctr">
               <a:buNone/>
             </a:pPr>
             <a:r>
@@ -4088,7 +4001,7 @@
             <a:endParaRPr lang="en-US" sz="1000" dirty="0"/>
           </a:p>
           <a:p>
-            <a:pPr algn="ctr" indent="0" marL="0">
+            <a:pPr marL="0" indent="0" algn="ctr">
               <a:buNone/>
             </a:pPr>
             <a:r>
@@ -4132,6 +4045,13 @@
             <a:prstDash val="solid"/>
           </a:ln>
         </p:spPr>
+        <p:txBody>
+          <a:bodyPr/>
+          <a:lstStyle/>
+          <a:p>
+            <a:endParaRPr lang="en-US"/>
+          </a:p>
+        </p:txBody>
       </p:sp>
       <p:sp>
         <p:nvSpPr>
@@ -4154,7 +4074,7 @@
           <a:bodyPr wrap="square" rtlCol="0" anchor="ctr"/>
           <a:lstStyle/>
           <a:p>
-            <a:pPr algn="ctr" indent="0" marL="0">
+            <a:pPr marL="0" indent="0" algn="ctr">
               <a:buNone/>
             </a:pPr>
             <a:r>
@@ -4190,7 +4110,7 @@
           <a:bodyPr wrap="square" rtlCol="0" anchor="ctr"/>
           <a:lstStyle/>
           <a:p>
-            <a:pPr algn="ctr" indent="0" marL="0">
+            <a:pPr marL="0" indent="0" algn="ctr">
               <a:buNone/>
             </a:pPr>
             <a:r>
@@ -4229,7 +4149,7 @@
           <a:bodyPr wrap="square" rtlCol="0" anchor="ctr"/>
           <a:lstStyle/>
           <a:p>
-            <a:pPr algn="ctr" indent="0" marL="0">
+            <a:pPr marL="0" indent="0" algn="ctr">
               <a:buNone/>
             </a:pPr>
             <a:r>
@@ -4246,7 +4166,7 @@
             <a:endParaRPr lang="en-US" sz="1000" dirty="0"/>
           </a:p>
           <a:p>
-            <a:pPr algn="ctr" indent="0" marL="0">
+            <a:pPr marL="0" indent="0" algn="ctr">
               <a:buNone/>
             </a:pPr>
             <a:r>
@@ -4290,6 +4210,13 @@
             <a:prstDash val="solid"/>
           </a:ln>
         </p:spPr>
+        <p:txBody>
+          <a:bodyPr/>
+          <a:lstStyle/>
+          <a:p>
+            <a:endParaRPr lang="en-US"/>
+          </a:p>
+        </p:txBody>
       </p:sp>
       <p:sp>
         <p:nvSpPr>
@@ -4312,7 +4239,7 @@
           <a:bodyPr wrap="square" rtlCol="0" anchor="ctr"/>
           <a:lstStyle/>
           <a:p>
-            <a:pPr algn="ctr" indent="0" marL="0">
+            <a:pPr marL="0" indent="0" algn="ctr">
               <a:buNone/>
             </a:pPr>
             <a:r>
@@ -4348,7 +4275,7 @@
           <a:bodyPr wrap="square" rtlCol="0" anchor="ctr"/>
           <a:lstStyle/>
           <a:p>
-            <a:pPr algn="ctr" indent="0" marL="0">
+            <a:pPr marL="0" indent="0" algn="ctr">
               <a:buNone/>
             </a:pPr>
             <a:r>
@@ -4387,7 +4314,7 @@
           <a:bodyPr wrap="square" rtlCol="0" anchor="ctr"/>
           <a:lstStyle/>
           <a:p>
-            <a:pPr algn="ctr" indent="0" marL="0">
+            <a:pPr marL="0" indent="0" algn="ctr">
               <a:buNone/>
             </a:pPr>
             <a:r>
@@ -4404,7 +4331,7 @@
             <a:endParaRPr lang="en-US" sz="1000" dirty="0"/>
           </a:p>
           <a:p>
-            <a:pPr algn="ctr" indent="0" marL="0">
+            <a:pPr marL="0" indent="0" algn="ctr">
               <a:buNone/>
             </a:pPr>
             <a:r>
@@ -4443,9 +4370,7 @@
           <a:bodyPr wrap="square" rtlCol="0" anchor="ctr"/>
           <a:lstStyle/>
           <a:p>
-            <a:pPr algn="ctr" indent="0" marL="0">
-              <a:buNone/>
-            </a:pPr>
+            <a:pPr algn="ctr"/>
             <a:r>
               <a:rPr lang="en-US" dirty="0">
                 <a:solidFill>
@@ -4455,7 +4380,18 @@
                 <a:ea typeface="Arial" pitchFamily="34" charset="-122"/>
                 <a:cs typeface="Arial" pitchFamily="34" charset="-120"/>
               </a:rPr>
-              <a:t>MVP operacional · No dispositivo médico · Datos ficticios</a:t>
+              <a:t>MVP operacional · No dispositivo médico · Datos </a:t>
+            </a:r>
+            <a:r>
+              <a:rPr lang="en-US" dirty="0" err="1">
+                <a:solidFill>
+                  <a:srgbClr val="718096"/>
+                </a:solidFill>
+                <a:latin typeface="Arial" pitchFamily="34" charset="0"/>
+                <a:ea typeface="Arial" pitchFamily="34" charset="-122"/>
+                <a:cs typeface="Arial" pitchFamily="34" charset="-120"/>
+              </a:rPr>
+              <a:t>sintéticos</a:t>
             </a:r>
             <a:endParaRPr lang="en-US" dirty="0"/>
           </a:p>
@@ -4510,6 +4446,13 @@
             <a:prstDash val="solid"/>
           </a:ln>
         </p:spPr>
+        <p:txBody>
+          <a:bodyPr/>
+          <a:lstStyle/>
+          <a:p>
+            <a:endParaRPr lang="en-US"/>
+          </a:p>
+        </p:txBody>
       </p:sp>
       <p:sp>
         <p:nvSpPr>
@@ -4539,6 +4482,13 @@
             <a:prstDash val="solid"/>
           </a:ln>
         </p:spPr>
+        <p:txBody>
+          <a:bodyPr/>
+          <a:lstStyle/>
+          <a:p>
+            <a:endParaRPr lang="en-US"/>
+          </a:p>
+        </p:txBody>
       </p:sp>
       <p:sp>
         <p:nvSpPr>
@@ -4568,6 +4518,13 @@
             <a:prstDash val="solid"/>
           </a:ln>
         </p:spPr>
+        <p:txBody>
+          <a:bodyPr/>
+          <a:lstStyle/>
+          <a:p>
+            <a:endParaRPr lang="en-US"/>
+          </a:p>
+        </p:txBody>
       </p:sp>
       <p:sp>
         <p:nvSpPr>
@@ -4591,6 +4548,13 @@
             <a:prstDash val="solid"/>
           </a:ln>
         </p:spPr>
+        <p:txBody>
+          <a:bodyPr/>
+          <a:lstStyle/>
+          <a:p>
+            <a:endParaRPr lang="en-US"/>
+          </a:p>
+        </p:txBody>
       </p:sp>
       <p:sp>
         <p:nvSpPr>
@@ -4616,6 +4580,13 @@
             <a:prstDash val="solid"/>
           </a:ln>
         </p:spPr>
+        <p:txBody>
+          <a:bodyPr/>
+          <a:lstStyle/>
+          <a:p>
+            <a:endParaRPr lang="en-US"/>
+          </a:p>
+        </p:txBody>
       </p:sp>
       <p:sp>
         <p:nvSpPr>
@@ -4641,6 +4612,13 @@
             <a:prstDash val="solid"/>
           </a:ln>
         </p:spPr>
+        <p:txBody>
+          <a:bodyPr/>
+          <a:lstStyle/>
+          <a:p>
+            <a:endParaRPr lang="en-US"/>
+          </a:p>
+        </p:txBody>
       </p:sp>
       <p:sp>
         <p:nvSpPr>
@@ -4663,7 +4641,7 @@
           <a:bodyPr wrap="square" rtlCol="0" anchor="ctr"/>
           <a:lstStyle/>
           <a:p>
-            <a:pPr indent="0" marL="0">
+            <a:pPr marL="0" indent="0">
               <a:buNone/>
             </a:pPr>
             <a:r>
@@ -4702,7 +4680,7 @@
           <a:bodyPr wrap="square" rtlCol="0" anchor="ctr"/>
           <a:lstStyle/>
           <a:p>
-            <a:pPr indent="0" marL="0">
+            <a:pPr marL="0" indent="0">
               <a:buNone/>
             </a:pPr>
             <a:r>
@@ -4742,6 +4720,13 @@
             <a:prstDash val="solid"/>
           </a:ln>
         </p:spPr>
+        <p:txBody>
+          <a:bodyPr/>
+          <a:lstStyle/>
+          <a:p>
+            <a:endParaRPr lang="en-US"/>
+          </a:p>
+        </p:txBody>
       </p:sp>
       <p:sp>
         <p:nvSpPr>
@@ -4769,6 +4754,13 @@
             <a:prstDash val="solid"/>
           </a:ln>
         </p:spPr>
+        <p:txBody>
+          <a:bodyPr/>
+          <a:lstStyle/>
+          <a:p>
+            <a:endParaRPr lang="en-US"/>
+          </a:p>
+        </p:txBody>
       </p:sp>
       <p:sp>
         <p:nvSpPr>
@@ -4791,7 +4783,7 @@
           <a:bodyPr wrap="square" rtlCol="0" anchor="ctr"/>
           <a:lstStyle/>
           <a:p>
-            <a:pPr algn="ctr" indent="0" marL="0">
+            <a:pPr marL="0" indent="0" algn="ctr">
               <a:buNone/>
             </a:pPr>
             <a:r>
@@ -4830,7 +4822,7 @@
           <a:bodyPr wrap="square" rtlCol="0" anchor="ctr"/>
           <a:lstStyle/>
           <a:p>
-            <a:pPr algn="ctr" indent="0" marL="0">
+            <a:pPr marL="0" indent="0" algn="ctr">
               <a:buNone/>
             </a:pPr>
             <a:r>
@@ -4869,7 +4861,7 @@
           <a:bodyPr wrap="square" rtlCol="0" anchor="ctr"/>
           <a:lstStyle/>
           <a:p>
-            <a:pPr algn="ctr" indent="0" marL="0">
+            <a:pPr marL="0" indent="0" algn="ctr">
               <a:buNone/>
             </a:pPr>
             <a:r>
@@ -4909,6 +4901,13 @@
             <a:prstDash val="solid"/>
           </a:ln>
         </p:spPr>
+        <p:txBody>
+          <a:bodyPr/>
+          <a:lstStyle/>
+          <a:p>
+            <a:endParaRPr lang="en-US"/>
+          </a:p>
+        </p:txBody>
       </p:sp>
       <p:sp>
         <p:nvSpPr>
@@ -4931,7 +4930,7 @@
           <a:bodyPr wrap="square" rtlCol="0" anchor="ctr"/>
           <a:lstStyle/>
           <a:p>
-            <a:pPr algn="ctr" indent="0" marL="0">
+            <a:pPr marL="0" indent="0" algn="ctr">
               <a:buNone/>
             </a:pPr>
             <a:r>
@@ -4970,7 +4969,7 @@
           <a:bodyPr wrap="square" rtlCol="0" anchor="ctr"/>
           <a:lstStyle/>
           <a:p>
-            <a:pPr algn="ctr" indent="0" marL="0">
+            <a:pPr marL="0" indent="0" algn="ctr">
               <a:buNone/>
             </a:pPr>
             <a:r>
@@ -5009,7 +5008,7 @@
           <a:bodyPr wrap="square" rtlCol="0" anchor="ctr"/>
           <a:lstStyle/>
           <a:p>
-            <a:pPr algn="ctr" indent="0" marL="0">
+            <a:pPr marL="0" indent="0" algn="ctr">
               <a:buNone/>
             </a:pPr>
             <a:r>
@@ -5048,7 +5047,7 @@
           <a:bodyPr wrap="square" rtlCol="0" anchor="ctr"/>
           <a:lstStyle/>
           <a:p>
-            <a:pPr algn="ctr" indent="0" marL="0">
+            <a:pPr marL="0" indent="0" algn="ctr">
               <a:buNone/>
             </a:pPr>
             <a:r>
@@ -5092,6 +5091,13 @@
             <a:prstDash val="solid"/>
           </a:ln>
         </p:spPr>
+        <p:txBody>
+          <a:bodyPr/>
+          <a:lstStyle/>
+          <a:p>
+            <a:endParaRPr lang="en-US"/>
+          </a:p>
+        </p:txBody>
       </p:sp>
       <p:sp>
         <p:nvSpPr>
@@ -5114,7 +5120,7 @@
           <a:bodyPr wrap="square" rtlCol="0" anchor="ctr"/>
           <a:lstStyle/>
           <a:p>
-            <a:pPr algn="ctr" indent="0" marL="0">
+            <a:pPr marL="0" indent="0" algn="ctr">
               <a:buNone/>
             </a:pPr>
             <a:r>
@@ -5153,7 +5159,7 @@
           <a:bodyPr wrap="square" rtlCol="0" anchor="ctr"/>
           <a:lstStyle/>
           <a:p>
-            <a:pPr algn="ctr" indent="0" marL="0">
+            <a:pPr marL="0" indent="0" algn="ctr">
               <a:buNone/>
             </a:pPr>
             <a:r>
@@ -5192,7 +5198,7 @@
           <a:bodyPr wrap="square" rtlCol="0" anchor="ctr"/>
           <a:lstStyle/>
           <a:p>
-            <a:pPr algn="ctr" indent="0" marL="0">
+            <a:pPr marL="0" indent="0" algn="ctr">
               <a:buNone/>
             </a:pPr>
             <a:r>
@@ -5232,6 +5238,13 @@
             <a:prstDash val="solid"/>
           </a:ln>
         </p:spPr>
+        <p:txBody>
+          <a:bodyPr/>
+          <a:lstStyle/>
+          <a:p>
+            <a:endParaRPr lang="en-US"/>
+          </a:p>
+        </p:txBody>
       </p:sp>
       <p:sp>
         <p:nvSpPr>
@@ -5254,7 +5267,7 @@
           <a:bodyPr wrap="square" rtlCol="0" anchor="ctr"/>
           <a:lstStyle/>
           <a:p>
-            <a:pPr algn="ctr" indent="0" marL="0">
+            <a:pPr marL="0" indent="0" algn="ctr">
               <a:buNone/>
             </a:pPr>
             <a:r>
@@ -5293,7 +5306,7 @@
           <a:bodyPr wrap="square" rtlCol="0" anchor="ctr"/>
           <a:lstStyle/>
           <a:p>
-            <a:pPr algn="ctr" indent="0" marL="0">
+            <a:pPr marL="0" indent="0" algn="ctr">
               <a:buNone/>
             </a:pPr>
             <a:r>
@@ -5332,7 +5345,7 @@
           <a:bodyPr wrap="square" rtlCol="0" anchor="ctr"/>
           <a:lstStyle/>
           <a:p>
-            <a:pPr algn="ctr" indent="0" marL="0">
+            <a:pPr marL="0" indent="0" algn="ctr">
               <a:buNone/>
             </a:pPr>
             <a:r>
@@ -5371,7 +5384,7 @@
           <a:bodyPr wrap="square" rtlCol="0" anchor="ctr"/>
           <a:lstStyle/>
           <a:p>
-            <a:pPr algn="ctr" indent="0" marL="0">
+            <a:pPr marL="0" indent="0" algn="ctr">
               <a:buNone/>
             </a:pPr>
             <a:r>
@@ -5415,6 +5428,13 @@
             <a:prstDash val="solid"/>
           </a:ln>
         </p:spPr>
+        <p:txBody>
+          <a:bodyPr/>
+          <a:lstStyle/>
+          <a:p>
+            <a:endParaRPr lang="en-US"/>
+          </a:p>
+        </p:txBody>
       </p:sp>
       <p:sp>
         <p:nvSpPr>
@@ -5442,6 +5462,13 @@
             <a:prstDash val="solid"/>
           </a:ln>
         </p:spPr>
+        <p:txBody>
+          <a:bodyPr/>
+          <a:lstStyle/>
+          <a:p>
+            <a:endParaRPr lang="en-US"/>
+          </a:p>
+        </p:txBody>
       </p:sp>
       <p:sp>
         <p:nvSpPr>
@@ -5464,7 +5491,7 @@
           <a:bodyPr wrap="square" rtlCol="0" anchor="ctr"/>
           <a:lstStyle/>
           <a:p>
-            <a:pPr algn="ctr" indent="0" marL="0">
+            <a:pPr marL="0" indent="0" algn="ctr">
               <a:buNone/>
             </a:pPr>
             <a:r>
@@ -5503,7 +5530,7 @@
           <a:bodyPr wrap="square" rtlCol="0" anchor="ctr"/>
           <a:lstStyle/>
           <a:p>
-            <a:pPr algn="ctr" indent="0" marL="0">
+            <a:pPr marL="0" indent="0" algn="ctr">
               <a:buNone/>
             </a:pPr>
             <a:r>
@@ -5542,7 +5569,7 @@
           <a:bodyPr wrap="square" rtlCol="0" anchor="ctr"/>
           <a:lstStyle/>
           <a:p>
-            <a:pPr algn="ctr" indent="0" marL="0">
+            <a:pPr marL="0" indent="0" algn="ctr">
               <a:buNone/>
             </a:pPr>
             <a:r>
@@ -5581,7 +5608,7 @@
           <a:bodyPr wrap="square" rtlCol="0" anchor="ctr"/>
           <a:lstStyle/>
           <a:p>
-            <a:pPr algn="ctr" indent="0" marL="0">
+            <a:pPr marL="0" indent="0" algn="ctr">
               <a:buNone/>
             </a:pPr>
             <a:r>
@@ -5621,6 +5648,13 @@
             <a:prstDash val="solid"/>
           </a:ln>
         </p:spPr>
+        <p:txBody>
+          <a:bodyPr/>
+          <a:lstStyle/>
+          <a:p>
+            <a:endParaRPr lang="en-US"/>
+          </a:p>
+        </p:txBody>
       </p:sp>
       <p:sp>
         <p:nvSpPr>
@@ -5643,7 +5677,7 @@
           <a:bodyPr wrap="square" rtlCol="0" anchor="ctr"/>
           <a:lstStyle/>
           <a:p>
-            <a:pPr algn="ctr" indent="0" marL="0">
+            <a:pPr marL="0" indent="0" algn="ctr">
               <a:buNone/>
             </a:pPr>
             <a:r>
@@ -5682,7 +5716,7 @@
           <a:bodyPr wrap="square" rtlCol="0" anchor="ctr"/>
           <a:lstStyle/>
           <a:p>
-            <a:pPr algn="ctr" indent="0" marL="0">
+            <a:pPr marL="0" indent="0" algn="ctr">
               <a:buNone/>
             </a:pPr>
             <a:r>
@@ -5721,7 +5755,7 @@
           <a:bodyPr wrap="square" rtlCol="0" anchor="ctr"/>
           <a:lstStyle/>
           <a:p>
-            <a:pPr algn="ctr" indent="0" marL="0">
+            <a:pPr marL="0" indent="0" algn="ctr">
               <a:buNone/>
             </a:pPr>
             <a:r>
@@ -5760,7 +5794,7 @@
           <a:bodyPr wrap="square" rtlCol="0" anchor="ctr"/>
           <a:lstStyle/>
           <a:p>
-            <a:pPr algn="ctr" indent="0" marL="0">
+            <a:pPr marL="0" indent="0" algn="ctr">
               <a:buNone/>
             </a:pPr>
             <a:r>
@@ -5804,6 +5838,13 @@
             <a:prstDash val="solid"/>
           </a:ln>
         </p:spPr>
+        <p:txBody>
+          <a:bodyPr/>
+          <a:lstStyle/>
+          <a:p>
+            <a:endParaRPr lang="en-US"/>
+          </a:p>
+        </p:txBody>
       </p:sp>
       <p:sp>
         <p:nvSpPr>
@@ -5826,7 +5867,7 @@
           <a:bodyPr wrap="square" rtlCol="0" anchor="ctr"/>
           <a:lstStyle/>
           <a:p>
-            <a:pPr algn="ctr" indent="0" marL="0">
+            <a:pPr marL="0" indent="0" algn="ctr">
               <a:buNone/>
             </a:pPr>
             <a:r>
@@ -5865,7 +5906,7 @@
           <a:bodyPr wrap="square" rtlCol="0" anchor="ctr"/>
           <a:lstStyle/>
           <a:p>
-            <a:pPr algn="ctr" indent="0" marL="0">
+            <a:pPr marL="0" indent="0" algn="ctr">
               <a:buNone/>
             </a:pPr>
             <a:r>
@@ -5904,7 +5945,7 @@
           <a:bodyPr wrap="square" rtlCol="0" anchor="ctr"/>
           <a:lstStyle/>
           <a:p>
-            <a:pPr algn="ctr" indent="0" marL="0">
+            <a:pPr marL="0" indent="0" algn="ctr">
               <a:buNone/>
             </a:pPr>
             <a:r>
@@ -5944,6 +5985,13 @@
             <a:prstDash val="solid"/>
           </a:ln>
         </p:spPr>
+        <p:txBody>
+          <a:bodyPr/>
+          <a:lstStyle/>
+          <a:p>
+            <a:endParaRPr lang="en-US"/>
+          </a:p>
+        </p:txBody>
       </p:sp>
       <p:sp>
         <p:nvSpPr>
@@ -5966,7 +6014,7 @@
           <a:bodyPr wrap="square" rtlCol="0" anchor="ctr"/>
           <a:lstStyle/>
           <a:p>
-            <a:pPr algn="ctr" indent="0" marL="0">
+            <a:pPr marL="0" indent="0" algn="ctr">
               <a:buNone/>
             </a:pPr>
             <a:r>
@@ -6005,7 +6053,7 @@
           <a:bodyPr wrap="square" rtlCol="0" anchor="ctr"/>
           <a:lstStyle/>
           <a:p>
-            <a:pPr algn="ctr" indent="0" marL="0">
+            <a:pPr marL="0" indent="0" algn="ctr">
               <a:buNone/>
             </a:pPr>
             <a:r>
@@ -6044,7 +6092,7 @@
           <a:bodyPr wrap="square" rtlCol="0" anchor="ctr"/>
           <a:lstStyle/>
           <a:p>
-            <a:pPr algn="ctr" indent="0" marL="0">
+            <a:pPr marL="0" indent="0" algn="ctr">
               <a:buNone/>
             </a:pPr>
             <a:r>
@@ -6083,7 +6131,7 @@
           <a:bodyPr wrap="square" rtlCol="0" anchor="ctr"/>
           <a:lstStyle/>
           <a:p>
-            <a:pPr algn="ctr" indent="0" marL="0">
+            <a:pPr marL="0" indent="0" algn="ctr">
               <a:buNone/>
             </a:pPr>
             <a:r>
@@ -6109,20 +6157,20 @@
         </p:nvSpPr>
         <p:spPr>
           <a:xfrm>
-            <a:off x="457200" y="6291072"/>
-            <a:ext cx="8375904" cy="201168"/>
-          </a:xfrm>
-          <a:prstGeom prst="rect">
-            <a:avLst/>
-          </a:prstGeom>
-          <a:noFill/>
-          <a:ln/>
-        </p:spPr>
-        <p:txBody>
-          <a:bodyPr wrap="square" rtlCol="0" anchor="ctr"/>
-          <a:lstStyle/>
-          <a:p>
-            <a:pPr algn="l" indent="0" marL="0">
+            <a:off x="457200" y="5888736"/>
+            <a:ext cx="11135532" cy="603504"/>
+          </a:xfrm>
+          <a:prstGeom prst="rect">
+            <a:avLst/>
+          </a:prstGeom>
+          <a:noFill/>
+          <a:ln/>
+        </p:spPr>
+        <p:txBody>
+          <a:bodyPr wrap="square" rtlCol="0" anchor="ctr"/>
+          <a:lstStyle/>
+          <a:p>
+            <a:pPr marL="0" indent="0" algn="l">
               <a:buNone/>
             </a:pPr>
             <a:r>
@@ -6134,7 +6182,29 @@
                 <a:ea typeface="Arial" pitchFamily="34" charset="-122"/>
                 <a:cs typeface="Arial" pitchFamily="34" charset="-120"/>
               </a:rPr>
-              <a:t>⚠️ Precios de referencia — no validados con clientes reales. El tier Freemium opera sin SLA ni responsabilidad legal. Declarar ante jueces.</a:t>
+              <a:t>⚠️ Precios de referencia — no validados con clientes reales. El tier Freemium opera sin SLA ni </a:t>
+            </a:r>
+            <a:r>
+              <a:rPr lang="en-US" dirty="0" err="1">
+                <a:solidFill>
+                  <a:srgbClr val="718096"/>
+                </a:solidFill>
+                <a:latin typeface="Arial" pitchFamily="34" charset="0"/>
+                <a:ea typeface="Arial" pitchFamily="34" charset="-122"/>
+                <a:cs typeface="Arial" pitchFamily="34" charset="-120"/>
+              </a:rPr>
+              <a:t>responsabilidad</a:t>
+            </a:r>
+            <a:r>
+              <a:rPr lang="en-US" dirty="0">
+                <a:solidFill>
+                  <a:srgbClr val="718096"/>
+                </a:solidFill>
+                <a:latin typeface="Arial" pitchFamily="34" charset="0"/>
+                <a:ea typeface="Arial" pitchFamily="34" charset="-122"/>
+                <a:cs typeface="Arial" pitchFamily="34" charset="-120"/>
+              </a:rPr>
+              <a:t> legal.</a:t>
             </a:r>
             <a:endParaRPr lang="en-US" dirty="0"/>
           </a:p>
@@ -6189,6 +6259,13 @@
             <a:prstDash val="solid"/>
           </a:ln>
         </p:spPr>
+        <p:txBody>
+          <a:bodyPr/>
+          <a:lstStyle/>
+          <a:p>
+            <a:endParaRPr lang="en-US"/>
+          </a:p>
+        </p:txBody>
       </p:sp>
       <p:sp>
         <p:nvSpPr>
@@ -6218,6 +6295,13 @@
             <a:prstDash val="solid"/>
           </a:ln>
         </p:spPr>
+        <p:txBody>
+          <a:bodyPr/>
+          <a:lstStyle/>
+          <a:p>
+            <a:endParaRPr lang="en-US"/>
+          </a:p>
+        </p:txBody>
       </p:sp>
       <p:sp>
         <p:nvSpPr>
@@ -6247,6 +6331,13 @@
             <a:prstDash val="solid"/>
           </a:ln>
         </p:spPr>
+        <p:txBody>
+          <a:bodyPr/>
+          <a:lstStyle/>
+          <a:p>
+            <a:endParaRPr lang="en-US"/>
+          </a:p>
+        </p:txBody>
       </p:sp>
       <p:sp>
         <p:nvSpPr>
@@ -6272,6 +6363,13 @@
             <a:prstDash val="solid"/>
           </a:ln>
         </p:spPr>
+        <p:txBody>
+          <a:bodyPr/>
+          <a:lstStyle/>
+          <a:p>
+            <a:endParaRPr lang="en-US"/>
+          </a:p>
+        </p:txBody>
       </p:sp>
       <p:sp>
         <p:nvSpPr>
@@ -6297,6 +6395,13 @@
             <a:prstDash val="solid"/>
           </a:ln>
         </p:spPr>
+        <p:txBody>
+          <a:bodyPr/>
+          <a:lstStyle/>
+          <a:p>
+            <a:endParaRPr lang="en-US"/>
+          </a:p>
+        </p:txBody>
       </p:sp>
       <p:sp>
         <p:nvSpPr>
@@ -6319,7 +6424,7 @@
           <a:bodyPr wrap="square" rtlCol="0" anchor="ctr"/>
           <a:lstStyle/>
           <a:p>
-            <a:pPr indent="0" marL="0">
+            <a:pPr marL="0" indent="0">
               <a:buNone/>
             </a:pPr>
             <a:r>
@@ -6358,7 +6463,7 @@
           <a:bodyPr wrap="square" rtlCol="0" anchor="ctr"/>
           <a:lstStyle/>
           <a:p>
-            <a:pPr indent="0" marL="0">
+            <a:pPr marL="0" indent="0">
               <a:buNone/>
             </a:pPr>
             <a:r>
@@ -6398,6 +6503,13 @@
             <a:prstDash val="solid"/>
           </a:ln>
         </p:spPr>
+        <p:txBody>
+          <a:bodyPr/>
+          <a:lstStyle/>
+          <a:p>
+            <a:endParaRPr lang="en-US"/>
+          </a:p>
+        </p:txBody>
       </p:sp>
       <p:sp>
         <p:nvSpPr>
@@ -6425,6 +6537,13 @@
             <a:prstDash val="solid"/>
           </a:ln>
         </p:spPr>
+        <p:txBody>
+          <a:bodyPr/>
+          <a:lstStyle/>
+          <a:p>
+            <a:endParaRPr lang="en-US"/>
+          </a:p>
+        </p:txBody>
       </p:sp>
       <p:sp>
         <p:nvSpPr>
@@ -6447,7 +6566,7 @@
           <a:bodyPr wrap="square" rtlCol="0" anchor="ctr"/>
           <a:lstStyle/>
           <a:p>
-            <a:pPr indent="0" marL="0">
+            <a:pPr marL="0" indent="0">
               <a:buNone/>
             </a:pPr>
             <a:r>
@@ -6487,6 +6606,13 @@
             <a:prstDash val="solid"/>
           </a:ln>
         </p:spPr>
+        <p:txBody>
+          <a:bodyPr/>
+          <a:lstStyle/>
+          <a:p>
+            <a:endParaRPr lang="en-US"/>
+          </a:p>
+        </p:txBody>
       </p:sp>
       <p:sp>
         <p:nvSpPr>
@@ -6509,7 +6635,7 @@
           <a:bodyPr wrap="square" rtlCol="0" anchor="ctr"/>
           <a:lstStyle/>
           <a:p>
-            <a:pPr algn="ctr" indent="0" marL="0">
+            <a:pPr marL="0" indent="0" algn="ctr">
               <a:buNone/>
             </a:pPr>
             <a:r>
@@ -6545,7 +6671,7 @@
           <a:bodyPr wrap="square" rtlCol="0" anchor="ctr"/>
           <a:lstStyle/>
           <a:p>
-            <a:pPr indent="0" marL="0">
+            <a:pPr marL="0" indent="0">
               <a:buNone/>
             </a:pPr>
             <a:r>
@@ -6562,7 +6688,7 @@
             <a:endParaRPr lang="en-US" sz="1150" dirty="0"/>
           </a:p>
           <a:p>
-            <a:pPr indent="0" marL="0">
+            <a:pPr marL="0" indent="0">
               <a:buNone/>
             </a:pPr>
             <a:r>
@@ -6601,7 +6727,7 @@
           <a:bodyPr wrap="square" rtlCol="0" anchor="ctr"/>
           <a:lstStyle/>
           <a:p>
-            <a:pPr algn="ctr" indent="0" marL="0">
+            <a:pPr marL="0" indent="0" algn="ctr">
               <a:buNone/>
             </a:pPr>
             <a:r>
@@ -6637,7 +6763,7 @@
           <a:bodyPr wrap="square" rtlCol="0" anchor="ctr"/>
           <a:lstStyle/>
           <a:p>
-            <a:pPr indent="0" marL="0">
+            <a:pPr marL="0" indent="0">
               <a:buNone/>
             </a:pPr>
             <a:r>
@@ -6654,7 +6780,7 @@
             <a:endParaRPr lang="en-US" sz="1150" dirty="0"/>
           </a:p>
           <a:p>
-            <a:pPr indent="0" marL="0">
+            <a:pPr marL="0" indent="0">
               <a:buNone/>
             </a:pPr>
             <a:r>
@@ -6693,7 +6819,7 @@
           <a:bodyPr wrap="square" rtlCol="0" anchor="ctr"/>
           <a:lstStyle/>
           <a:p>
-            <a:pPr algn="ctr" indent="0" marL="0">
+            <a:pPr marL="0" indent="0" algn="ctr">
               <a:buNone/>
             </a:pPr>
             <a:r>
@@ -6729,7 +6855,7 @@
           <a:bodyPr wrap="square" rtlCol="0" anchor="ctr"/>
           <a:lstStyle/>
           <a:p>
-            <a:pPr indent="0" marL="0">
+            <a:pPr marL="0" indent="0">
               <a:buNone/>
             </a:pPr>
             <a:r>
@@ -6746,7 +6872,7 @@
             <a:endParaRPr lang="en-US" sz="1150" dirty="0"/>
           </a:p>
           <a:p>
-            <a:pPr indent="0" marL="0">
+            <a:pPr marL="0" indent="0">
               <a:buNone/>
             </a:pPr>
             <a:r>
@@ -6785,7 +6911,7 @@
           <a:bodyPr wrap="square" rtlCol="0" anchor="ctr"/>
           <a:lstStyle/>
           <a:p>
-            <a:pPr algn="ctr" indent="0" marL="0">
+            <a:pPr marL="0" indent="0" algn="ctr">
               <a:buNone/>
             </a:pPr>
             <a:r>
@@ -6821,7 +6947,7 @@
           <a:bodyPr wrap="square" rtlCol="0" anchor="ctr"/>
           <a:lstStyle/>
           <a:p>
-            <a:pPr indent="0" marL="0">
+            <a:pPr marL="0" indent="0">
               <a:buNone/>
             </a:pPr>
             <a:r>
@@ -6838,7 +6964,7 @@
             <a:endParaRPr lang="en-US" sz="1150" dirty="0"/>
           </a:p>
           <a:p>
-            <a:pPr indent="0" marL="0">
+            <a:pPr marL="0" indent="0">
               <a:buNone/>
             </a:pPr>
             <a:r>
@@ -6882,6 +7008,13 @@
             <a:prstDash val="solid"/>
           </a:ln>
         </p:spPr>
+        <p:txBody>
+          <a:bodyPr/>
+          <a:lstStyle/>
+          <a:p>
+            <a:endParaRPr lang="en-US"/>
+          </a:p>
+        </p:txBody>
       </p:sp>
       <p:sp>
         <p:nvSpPr>
@@ -6904,7 +7037,7 @@
           <a:bodyPr wrap="square" rtlCol="0" anchor="ctr"/>
           <a:lstStyle/>
           <a:p>
-            <a:pPr indent="0" marL="0">
+            <a:pPr marL="0" indent="0">
               <a:buNone/>
             </a:pPr>
             <a:r>
@@ -6944,6 +7077,13 @@
             <a:prstDash val="solid"/>
           </a:ln>
         </p:spPr>
+        <p:txBody>
+          <a:bodyPr/>
+          <a:lstStyle/>
+          <a:p>
+            <a:endParaRPr lang="en-US"/>
+          </a:p>
+        </p:txBody>
       </p:sp>
       <p:sp>
         <p:nvSpPr>
@@ -6966,7 +7106,7 @@
           <a:bodyPr wrap="square" rtlCol="0" anchor="ctr"/>
           <a:lstStyle/>
           <a:p>
-            <a:pPr algn="ctr" indent="0" marL="0">
+            <a:pPr marL="0" indent="0" algn="ctr">
               <a:buNone/>
             </a:pPr>
             <a:r>
@@ -7002,7 +7142,7 @@
           <a:bodyPr wrap="square" rtlCol="0" anchor="ctr"/>
           <a:lstStyle/>
           <a:p>
-            <a:pPr indent="0" marL="0">
+            <a:pPr marL="0" indent="0">
               <a:buNone/>
             </a:pPr>
             <a:r>
@@ -7019,7 +7159,7 @@
             <a:endParaRPr lang="en-US" sz="1150" dirty="0"/>
           </a:p>
           <a:p>
-            <a:pPr indent="0" marL="0">
+            <a:pPr marL="0" indent="0">
               <a:buNone/>
             </a:pPr>
             <a:r>
@@ -7058,7 +7198,7 @@
           <a:bodyPr wrap="square" rtlCol="0" anchor="ctr"/>
           <a:lstStyle/>
           <a:p>
-            <a:pPr algn="ctr" indent="0" marL="0">
+            <a:pPr marL="0" indent="0" algn="ctr">
               <a:buNone/>
             </a:pPr>
             <a:r>
@@ -7094,7 +7234,7 @@
           <a:bodyPr wrap="square" rtlCol="0" anchor="ctr"/>
           <a:lstStyle/>
           <a:p>
-            <a:pPr indent="0" marL="0">
+            <a:pPr marL="0" indent="0">
               <a:buNone/>
             </a:pPr>
             <a:r>
@@ -7111,7 +7251,7 @@
             <a:endParaRPr lang="en-US" sz="1150" dirty="0"/>
           </a:p>
           <a:p>
-            <a:pPr indent="0" marL="0">
+            <a:pPr marL="0" indent="0">
               <a:buNone/>
             </a:pPr>
             <a:r>
@@ -7150,7 +7290,7 @@
           <a:bodyPr wrap="square" rtlCol="0" anchor="ctr"/>
           <a:lstStyle/>
           <a:p>
-            <a:pPr algn="ctr" indent="0" marL="0">
+            <a:pPr marL="0" indent="0" algn="ctr">
               <a:buNone/>
             </a:pPr>
             <a:r>
@@ -7186,7 +7326,7 @@
           <a:bodyPr wrap="square" rtlCol="0" anchor="ctr"/>
           <a:lstStyle/>
           <a:p>
-            <a:pPr indent="0" marL="0">
+            <a:pPr marL="0" indent="0">
               <a:buNone/>
             </a:pPr>
             <a:r>
@@ -7203,7 +7343,7 @@
             <a:endParaRPr lang="en-US" sz="1150" dirty="0"/>
           </a:p>
           <a:p>
-            <a:pPr indent="0" marL="0">
+            <a:pPr marL="0" indent="0">
               <a:buNone/>
             </a:pPr>
             <a:r>
@@ -7242,7 +7382,7 @@
           <a:bodyPr wrap="square" rtlCol="0" anchor="ctr"/>
           <a:lstStyle/>
           <a:p>
-            <a:pPr algn="ctr" indent="0" marL="0">
+            <a:pPr marL="0" indent="0" algn="ctr">
               <a:buNone/>
             </a:pPr>
             <a:r>
@@ -7278,7 +7418,7 @@
           <a:bodyPr wrap="square" rtlCol="0" anchor="ctr"/>
           <a:lstStyle/>
           <a:p>
-            <a:pPr indent="0" marL="0">
+            <a:pPr marL="0" indent="0">
               <a:buNone/>
             </a:pPr>
             <a:r>
@@ -7295,7 +7435,7 @@
             <a:endParaRPr lang="en-US" sz="1150" dirty="0"/>
           </a:p>
           <a:p>
-            <a:pPr indent="0" marL="0">
+            <a:pPr marL="0" indent="0">
               <a:buNone/>
             </a:pPr>
             <a:r>
@@ -7335,6 +7475,13 @@
             <a:prstDash val="solid"/>
           </a:ln>
         </p:spPr>
+        <p:txBody>
+          <a:bodyPr/>
+          <a:lstStyle/>
+          <a:p>
+            <a:endParaRPr lang="en-US"/>
+          </a:p>
+        </p:txBody>
       </p:sp>
       <p:sp>
         <p:nvSpPr>
@@ -7357,7 +7504,7 @@
           <a:bodyPr wrap="square" rtlCol="0" anchor="ctr"/>
           <a:lstStyle/>
           <a:p>
-            <a:pPr algn="ctr" indent="0" marL="0">
+            <a:pPr marL="0" indent="0" algn="ctr">
               <a:buNone/>
             </a:pPr>
             <a:r>
@@ -7401,6 +7548,13 @@
             <a:prstDash val="solid"/>
           </a:ln>
         </p:spPr>
+        <p:txBody>
+          <a:bodyPr/>
+          <a:lstStyle/>
+          <a:p>
+            <a:endParaRPr lang="en-US"/>
+          </a:p>
+        </p:txBody>
       </p:sp>
       <p:sp>
         <p:nvSpPr>
@@ -7423,7 +7577,7 @@
           <a:bodyPr wrap="square" rtlCol="0" anchor="ctr"/>
           <a:lstStyle/>
           <a:p>
-            <a:pPr algn="ctr" indent="0" marL="0">
+            <a:pPr marL="0" indent="0" algn="ctr">
               <a:buNone/>
             </a:pPr>
             <a:r>
@@ -7459,7 +7613,7 @@
           <a:bodyPr wrap="square" rtlCol="0" anchor="ctr"/>
           <a:lstStyle/>
           <a:p>
-            <a:pPr indent="0" marL="0">
+            <a:pPr marL="0" indent="0">
               <a:buNone/>
             </a:pPr>
             <a:r>
@@ -7476,7 +7630,7 @@
             <a:endParaRPr lang="en-US" sz="1200" dirty="0"/>
           </a:p>
           <a:p>
-            <a:pPr indent="0" marL="0">
+            <a:pPr marL="0" indent="0">
               <a:buNone/>
             </a:pPr>
             <a:r>
@@ -7515,7 +7669,7 @@
           <a:bodyPr wrap="square" rtlCol="0" anchor="ctr"/>
           <a:lstStyle/>
           <a:p>
-            <a:pPr algn="l" indent="0" marL="0">
+            <a:pPr marL="0" indent="0" algn="l">
               <a:buNone/>
             </a:pPr>
             <a:r>
@@ -7582,6 +7736,13 @@
             <a:prstDash val="solid"/>
           </a:ln>
         </p:spPr>
+        <p:txBody>
+          <a:bodyPr/>
+          <a:lstStyle/>
+          <a:p>
+            <a:endParaRPr lang="en-US"/>
+          </a:p>
+        </p:txBody>
       </p:sp>
       <p:sp>
         <p:nvSpPr>
@@ -7611,6 +7772,13 @@
             <a:prstDash val="solid"/>
           </a:ln>
         </p:spPr>
+        <p:txBody>
+          <a:bodyPr/>
+          <a:lstStyle/>
+          <a:p>
+            <a:endParaRPr lang="en-US"/>
+          </a:p>
+        </p:txBody>
       </p:sp>
       <p:sp>
         <p:nvSpPr>
@@ -7640,6 +7808,13 @@
             <a:prstDash val="solid"/>
           </a:ln>
         </p:spPr>
+        <p:txBody>
+          <a:bodyPr/>
+          <a:lstStyle/>
+          <a:p>
+            <a:endParaRPr lang="en-US"/>
+          </a:p>
+        </p:txBody>
       </p:sp>
       <p:sp>
         <p:nvSpPr>
@@ -7665,6 +7840,13 @@
             <a:prstDash val="solid"/>
           </a:ln>
         </p:spPr>
+        <p:txBody>
+          <a:bodyPr/>
+          <a:lstStyle/>
+          <a:p>
+            <a:endParaRPr lang="en-US"/>
+          </a:p>
+        </p:txBody>
       </p:sp>
       <p:sp>
         <p:nvSpPr>
@@ -7690,6 +7872,13 @@
             <a:prstDash val="solid"/>
           </a:ln>
         </p:spPr>
+        <p:txBody>
+          <a:bodyPr/>
+          <a:lstStyle/>
+          <a:p>
+            <a:endParaRPr lang="en-US"/>
+          </a:p>
+        </p:txBody>
       </p:sp>
       <p:sp>
         <p:nvSpPr>
@@ -7712,7 +7901,7 @@
           <a:bodyPr wrap="square" rtlCol="0" anchor="ctr"/>
           <a:lstStyle/>
           <a:p>
-            <a:pPr indent="0" marL="0">
+            <a:pPr marL="0" indent="0">
               <a:buNone/>
             </a:pPr>
             <a:r>
@@ -7751,7 +7940,7 @@
           <a:bodyPr wrap="square" rtlCol="0" anchor="ctr"/>
           <a:lstStyle/>
           <a:p>
-            <a:pPr indent="0" marL="0">
+            <a:pPr marL="0" indent="0">
               <a:buNone/>
             </a:pPr>
             <a:r>
@@ -7791,6 +7980,13 @@
             <a:prstDash val="solid"/>
           </a:ln>
         </p:spPr>
+        <p:txBody>
+          <a:bodyPr/>
+          <a:lstStyle/>
+          <a:p>
+            <a:endParaRPr lang="en-US"/>
+          </a:p>
+        </p:txBody>
       </p:sp>
       <p:sp>
         <p:nvSpPr>
@@ -7818,6 +8014,13 @@
             <a:prstDash val="solid"/>
           </a:ln>
         </p:spPr>
+        <p:txBody>
+          <a:bodyPr/>
+          <a:lstStyle/>
+          <a:p>
+            <a:endParaRPr lang="en-US"/>
+          </a:p>
+        </p:txBody>
       </p:sp>
       <p:sp>
         <p:nvSpPr>
@@ -7840,7 +8043,7 @@
           <a:bodyPr wrap="square" rtlCol="0" anchor="ctr"/>
           <a:lstStyle/>
           <a:p>
-            <a:pPr algn="ctr" indent="0" marL="0">
+            <a:pPr marL="0" indent="0" algn="ctr">
               <a:buNone/>
             </a:pPr>
             <a:r>
@@ -7879,7 +8082,7 @@
           <a:bodyPr wrap="square" rtlCol="0" anchor="ctr"/>
           <a:lstStyle/>
           <a:p>
-            <a:pPr algn="ctr" indent="0" marL="0">
+            <a:pPr marL="0" indent="0" algn="ctr">
               <a:buNone/>
             </a:pPr>
             <a:r>
@@ -7915,7 +8118,7 @@
           <a:bodyPr wrap="square" rtlCol="0" anchor="ctr"/>
           <a:lstStyle/>
           <a:p>
-            <a:pPr indent="0" marL="0">
+            <a:pPr marL="0" indent="0">
               <a:buNone/>
             </a:pPr>
             <a:r>
@@ -7954,7 +8157,7 @@
           <a:bodyPr wrap="square" rtlCol="0" anchor="ctr"/>
           <a:lstStyle/>
           <a:p>
-            <a:pPr indent="0" marL="0">
+            <a:pPr marL="0" indent="0">
               <a:buNone/>
             </a:pPr>
             <a:r>
@@ -7993,7 +8196,7 @@
           <a:bodyPr wrap="square" rtlCol="0" anchor="ctr"/>
           <a:lstStyle/>
           <a:p>
-            <a:pPr algn="ctr" indent="0" marL="0">
+            <a:pPr marL="0" indent="0" algn="ctr">
               <a:buNone/>
             </a:pPr>
             <a:r>
@@ -8029,7 +8232,7 @@
           <a:bodyPr wrap="square" rtlCol="0" anchor="ctr"/>
           <a:lstStyle/>
           <a:p>
-            <a:pPr indent="0" marL="0">
+            <a:pPr marL="0" indent="0">
               <a:buNone/>
             </a:pPr>
             <a:r>
@@ -8068,7 +8271,7 @@
           <a:bodyPr wrap="square" rtlCol="0" anchor="ctr"/>
           <a:lstStyle/>
           <a:p>
-            <a:pPr indent="0" marL="0">
+            <a:pPr marL="0" indent="0">
               <a:buNone/>
             </a:pPr>
             <a:r>
@@ -8107,7 +8310,7 @@
           <a:bodyPr wrap="square" rtlCol="0" anchor="ctr"/>
           <a:lstStyle/>
           <a:p>
-            <a:pPr algn="ctr" indent="0" marL="0">
+            <a:pPr marL="0" indent="0" algn="ctr">
               <a:buNone/>
             </a:pPr>
             <a:r>
@@ -8143,7 +8346,7 @@
           <a:bodyPr wrap="square" rtlCol="0" anchor="ctr"/>
           <a:lstStyle/>
           <a:p>
-            <a:pPr indent="0" marL="0">
+            <a:pPr marL="0" indent="0">
               <a:buNone/>
             </a:pPr>
             <a:r>
@@ -8182,7 +8385,7 @@
           <a:bodyPr wrap="square" rtlCol="0" anchor="ctr"/>
           <a:lstStyle/>
           <a:p>
-            <a:pPr indent="0" marL="0">
+            <a:pPr marL="0" indent="0">
               <a:buNone/>
             </a:pPr>
             <a:r>
@@ -8221,7 +8424,7 @@
           <a:bodyPr wrap="square" rtlCol="0" anchor="ctr"/>
           <a:lstStyle/>
           <a:p>
-            <a:pPr algn="ctr" indent="0" marL="0">
+            <a:pPr marL="0" indent="0" algn="ctr">
               <a:buNone/>
             </a:pPr>
             <a:r>
@@ -8257,7 +8460,7 @@
           <a:bodyPr wrap="square" rtlCol="0" anchor="ctr"/>
           <a:lstStyle/>
           <a:p>
-            <a:pPr indent="0" marL="0">
+            <a:pPr marL="0" indent="0">
               <a:buNone/>
             </a:pPr>
             <a:r>
@@ -8296,7 +8499,7 @@
           <a:bodyPr wrap="square" rtlCol="0" anchor="ctr"/>
           <a:lstStyle/>
           <a:p>
-            <a:pPr indent="0" marL="0">
+            <a:pPr marL="0" indent="0">
               <a:buNone/>
             </a:pPr>
             <a:r>
@@ -8335,7 +8538,7 @@
           <a:bodyPr wrap="square" rtlCol="0" anchor="ctr"/>
           <a:lstStyle/>
           <a:p>
-            <a:pPr algn="ctr" indent="0" marL="0">
+            <a:pPr marL="0" indent="0" algn="ctr">
               <a:buNone/>
             </a:pPr>
             <a:r>
@@ -8371,7 +8574,7 @@
           <a:bodyPr wrap="square" rtlCol="0" anchor="ctr"/>
           <a:lstStyle/>
           <a:p>
-            <a:pPr indent="0" marL="0">
+            <a:pPr marL="0" indent="0">
               <a:buNone/>
             </a:pPr>
             <a:r>
@@ -8410,7 +8613,7 @@
           <a:bodyPr wrap="square" rtlCol="0" anchor="ctr"/>
           <a:lstStyle/>
           <a:p>
-            <a:pPr indent="0" marL="0">
+            <a:pPr marL="0" indent="0">
               <a:buNone/>
             </a:pPr>
             <a:r>
@@ -8449,7 +8652,7 @@
           <a:bodyPr wrap="square" rtlCol="0" anchor="ctr"/>
           <a:lstStyle/>
           <a:p>
-            <a:pPr algn="ctr" indent="0" marL="0">
+            <a:pPr marL="0" indent="0" algn="ctr">
               <a:buNone/>
             </a:pPr>
             <a:r>
@@ -8484,7 +8687,10 @@
             </a:avLst>
           </a:prstGeom>
           <a:solidFill>
-            <a:srgbClr val="FFF7ED"/>
+            <a:schemeClr val="accent4">
+              <a:lumMod val="20000"/>
+              <a:lumOff val="80000"/>
+            </a:schemeClr>
           </a:solidFill>
           <a:ln w="6350">
             <a:solidFill>
@@ -8493,6 +8699,13 @@
             <a:prstDash val="solid"/>
           </a:ln>
         </p:spPr>
+        <p:txBody>
+          <a:bodyPr/>
+          <a:lstStyle/>
+          <a:p>
+            <a:endParaRPr lang="en-US"/>
+          </a:p>
+        </p:txBody>
       </p:sp>
       <p:sp>
         <p:nvSpPr>
@@ -8515,7 +8728,7 @@
           <a:bodyPr wrap="square" rtlCol="0" anchor="ctr"/>
           <a:lstStyle/>
           <a:p>
-            <a:pPr algn="ctr" indent="0" marL="0">
+            <a:pPr marL="0" indent="0" algn="ctr">
               <a:buNone/>
             </a:pPr>
             <a:r>
@@ -8554,7 +8767,7 @@
           <a:bodyPr wrap="square" rtlCol="0" anchor="ctr"/>
           <a:lstStyle/>
           <a:p>
-            <a:pPr algn="ctr" indent="0" marL="0">
+            <a:pPr marL="0" indent="0" algn="ctr">
               <a:buNone/>
             </a:pPr>
             <a:r>
@@ -8590,7 +8803,7 @@
           <a:bodyPr wrap="square" rtlCol="0" anchor="ctr"/>
           <a:lstStyle/>
           <a:p>
-            <a:pPr indent="0" marL="0">
+            <a:pPr marL="0" indent="0">
               <a:buNone/>
             </a:pPr>
             <a:r>
@@ -8629,7 +8842,7 @@
           <a:bodyPr wrap="square" rtlCol="0" anchor="ctr"/>
           <a:lstStyle/>
           <a:p>
-            <a:pPr indent="0" marL="0">
+            <a:pPr marL="0" indent="0">
               <a:buNone/>
             </a:pPr>
             <a:r>
@@ -8668,7 +8881,7 @@
           <a:bodyPr wrap="square" rtlCol="0" anchor="ctr"/>
           <a:lstStyle/>
           <a:p>
-            <a:pPr algn="ctr" indent="0" marL="0">
+            <a:pPr marL="0" indent="0" algn="ctr">
               <a:buNone/>
             </a:pPr>
             <a:r>
@@ -8704,7 +8917,7 @@
           <a:bodyPr wrap="square" rtlCol="0" anchor="ctr"/>
           <a:lstStyle/>
           <a:p>
-            <a:pPr indent="0" marL="0">
+            <a:pPr marL="0" indent="0">
               <a:buNone/>
             </a:pPr>
             <a:r>
@@ -8743,7 +8956,7 @@
           <a:bodyPr wrap="square" rtlCol="0" anchor="ctr"/>
           <a:lstStyle/>
           <a:p>
-            <a:pPr indent="0" marL="0">
+            <a:pPr marL="0" indent="0">
               <a:buNone/>
             </a:pPr>
             <a:r>
@@ -8782,7 +8995,7 @@
           <a:bodyPr wrap="square" rtlCol="0" anchor="ctr"/>
           <a:lstStyle/>
           <a:p>
-            <a:pPr algn="ctr" indent="0" marL="0">
+            <a:pPr marL="0" indent="0" algn="ctr">
               <a:buNone/>
             </a:pPr>
             <a:r>
@@ -8818,7 +9031,7 @@
           <a:bodyPr wrap="square" rtlCol="0" anchor="ctr"/>
           <a:lstStyle/>
           <a:p>
-            <a:pPr indent="0" marL="0">
+            <a:pPr marL="0" indent="0">
               <a:buNone/>
             </a:pPr>
             <a:r>
@@ -8857,7 +9070,7 @@
           <a:bodyPr wrap="square" rtlCol="0" anchor="ctr"/>
           <a:lstStyle/>
           <a:p>
-            <a:pPr indent="0" marL="0">
+            <a:pPr marL="0" indent="0">
               <a:buNone/>
             </a:pPr>
             <a:r>
@@ -8896,7 +9109,7 @@
           <a:bodyPr wrap="square" rtlCol="0" anchor="ctr"/>
           <a:lstStyle/>
           <a:p>
-            <a:pPr algn="ctr" indent="0" marL="0">
+            <a:pPr marL="0" indent="0" algn="ctr">
               <a:buNone/>
             </a:pPr>
             <a:r>
@@ -8932,7 +9145,7 @@
           <a:bodyPr wrap="square" rtlCol="0" anchor="ctr"/>
           <a:lstStyle/>
           <a:p>
-            <a:pPr indent="0" marL="0">
+            <a:pPr marL="0" indent="0">
               <a:buNone/>
             </a:pPr>
             <a:r>
@@ -8971,7 +9184,7 @@
           <a:bodyPr wrap="square" rtlCol="0" anchor="ctr"/>
           <a:lstStyle/>
           <a:p>
-            <a:pPr indent="0" marL="0">
+            <a:pPr marL="0" indent="0">
               <a:buNone/>
             </a:pPr>
             <a:r>
@@ -9010,7 +9223,7 @@
           <a:bodyPr wrap="square" rtlCol="0" anchor="ctr"/>
           <a:lstStyle/>
           <a:p>
-            <a:pPr algn="ctr" indent="0" marL="0">
+            <a:pPr marL="0" indent="0" algn="ctr">
               <a:buNone/>
             </a:pPr>
             <a:r>
@@ -9046,7 +9259,7 @@
           <a:bodyPr wrap="square" rtlCol="0" anchor="ctr"/>
           <a:lstStyle/>
           <a:p>
-            <a:pPr indent="0" marL="0">
+            <a:pPr marL="0" indent="0">
               <a:buNone/>
             </a:pPr>
             <a:r>
@@ -9085,7 +9298,7 @@
           <a:bodyPr wrap="square" rtlCol="0" anchor="ctr"/>
           <a:lstStyle/>
           <a:p>
-            <a:pPr indent="0" marL="0">
+            <a:pPr marL="0" indent="0">
               <a:buNone/>
             </a:pPr>
             <a:r>
@@ -9129,6 +9342,13 @@
             <a:prstDash val="solid"/>
           </a:ln>
         </p:spPr>
+        <p:txBody>
+          <a:bodyPr/>
+          <a:lstStyle/>
+          <a:p>
+            <a:endParaRPr lang="en-US"/>
+          </a:p>
+        </p:txBody>
       </p:sp>
       <p:sp>
         <p:nvSpPr>
@@ -9151,7 +9371,7 @@
           <a:bodyPr wrap="square" rtlCol="0" anchor="ctr"/>
           <a:lstStyle/>
           <a:p>
-            <a:pPr indent="0" marL="0">
+            <a:pPr marL="0" indent="0">
               <a:buNone/>
             </a:pPr>
             <a:r>
@@ -9190,7 +9410,7 @@
           <a:bodyPr wrap="square" rtlCol="0" anchor="ctr"/>
           <a:lstStyle/>
           <a:p>
-            <a:pPr algn="ctr" indent="0" marL="0">
+            <a:pPr marL="0" indent="0" algn="ctr">
               <a:buNone/>
             </a:pPr>
             <a:r>
@@ -9207,7 +9427,7 @@
             <a:endParaRPr lang="en-US" sz="900" dirty="0"/>
           </a:p>
           <a:p>
-            <a:pPr algn="ctr" indent="0" marL="0">
+            <a:pPr marL="0" indent="0" algn="ctr">
               <a:buNone/>
             </a:pPr>
             <a:r>
@@ -9246,7 +9466,7 @@
           <a:bodyPr wrap="square" rtlCol="0" anchor="ctr"/>
           <a:lstStyle/>
           <a:p>
-            <a:pPr algn="ctr" indent="0" marL="0">
+            <a:pPr marL="0" indent="0" algn="ctr">
               <a:buNone/>
             </a:pPr>
             <a:r>
@@ -9285,7 +9505,7 @@
           <a:bodyPr wrap="square" rtlCol="0" anchor="ctr"/>
           <a:lstStyle/>
           <a:p>
-            <a:pPr algn="ctr" indent="0" marL="0">
+            <a:pPr marL="0" indent="0" algn="ctr">
               <a:buNone/>
             </a:pPr>
             <a:r>
@@ -9302,7 +9522,7 @@
             <a:endParaRPr lang="en-US" sz="900" dirty="0"/>
           </a:p>
           <a:p>
-            <a:pPr algn="ctr" indent="0" marL="0">
+            <a:pPr marL="0" indent="0" algn="ctr">
               <a:buNone/>
             </a:pPr>
             <a:r>
@@ -9341,7 +9561,7 @@
           <a:bodyPr wrap="square" rtlCol="0" anchor="ctr"/>
           <a:lstStyle/>
           <a:p>
-            <a:pPr algn="ctr" indent="0" marL="0">
+            <a:pPr marL="0" indent="0" algn="ctr">
               <a:buNone/>
             </a:pPr>
             <a:r>
@@ -9380,7 +9600,7 @@
           <a:bodyPr wrap="square" rtlCol="0" anchor="ctr"/>
           <a:lstStyle/>
           <a:p>
-            <a:pPr algn="ctr" indent="0" marL="0">
+            <a:pPr marL="0" indent="0" algn="ctr">
               <a:buNone/>
             </a:pPr>
             <a:r>
@@ -9397,7 +9617,7 @@
             <a:endParaRPr lang="en-US" sz="900" dirty="0"/>
           </a:p>
           <a:p>
-            <a:pPr algn="ctr" indent="0" marL="0">
+            <a:pPr marL="0" indent="0" algn="ctr">
               <a:buNone/>
             </a:pPr>
             <a:r>
@@ -9436,7 +9656,7 @@
           <a:bodyPr wrap="square" rtlCol="0" anchor="ctr"/>
           <a:lstStyle/>
           <a:p>
-            <a:pPr algn="ctr" indent="0" marL="0">
+            <a:pPr marL="0" indent="0" algn="ctr">
               <a:buNone/>
             </a:pPr>
             <a:r>
@@ -9475,7 +9695,7 @@
           <a:bodyPr wrap="square" rtlCol="0" anchor="ctr"/>
           <a:lstStyle/>
           <a:p>
-            <a:pPr algn="ctr" indent="0" marL="0">
+            <a:pPr marL="0" indent="0" algn="ctr">
               <a:buNone/>
             </a:pPr>
             <a:r>
@@ -9492,7 +9712,7 @@
             <a:endParaRPr lang="en-US" sz="900" dirty="0"/>
           </a:p>
           <a:p>
-            <a:pPr algn="ctr" indent="0" marL="0">
+            <a:pPr marL="0" indent="0" algn="ctr">
               <a:buNone/>
             </a:pPr>
             <a:r>
@@ -9518,20 +9738,20 @@
         </p:nvSpPr>
         <p:spPr>
           <a:xfrm>
-            <a:off x="457200" y="6291072"/>
-            <a:ext cx="8375904" cy="201168"/>
-          </a:xfrm>
-          <a:prstGeom prst="rect">
-            <a:avLst/>
-          </a:prstGeom>
-          <a:noFill/>
-          <a:ln/>
-        </p:spPr>
-        <p:txBody>
-          <a:bodyPr wrap="square" rtlCol="0" anchor="ctr"/>
-          <a:lstStyle/>
-          <a:p>
-            <a:pPr algn="l" indent="0" marL="0">
+            <a:off x="457200" y="5879592"/>
+            <a:ext cx="11174278" cy="612648"/>
+          </a:xfrm>
+          <a:prstGeom prst="rect">
+            <a:avLst/>
+          </a:prstGeom>
+          <a:noFill/>
+          <a:ln/>
+        </p:spPr>
+        <p:txBody>
+          <a:bodyPr wrap="square" rtlCol="0" anchor="ctr"/>
+          <a:lstStyle/>
+          <a:p>
+            <a:pPr marL="0" indent="0" algn="l">
               <a:buNone/>
             </a:pPr>
             <a:r>
@@ -9598,6 +9818,13 @@
             <a:prstDash val="solid"/>
           </a:ln>
         </p:spPr>
+        <p:txBody>
+          <a:bodyPr/>
+          <a:lstStyle/>
+          <a:p>
+            <a:endParaRPr lang="en-US"/>
+          </a:p>
+        </p:txBody>
       </p:sp>
       <p:sp>
         <p:nvSpPr>
@@ -9627,6 +9854,13 @@
             <a:prstDash val="solid"/>
           </a:ln>
         </p:spPr>
+        <p:txBody>
+          <a:bodyPr/>
+          <a:lstStyle/>
+          <a:p>
+            <a:endParaRPr lang="en-US"/>
+          </a:p>
+        </p:txBody>
       </p:sp>
       <p:sp>
         <p:nvSpPr>
@@ -9656,6 +9890,13 @@
             <a:prstDash val="solid"/>
           </a:ln>
         </p:spPr>
+        <p:txBody>
+          <a:bodyPr/>
+          <a:lstStyle/>
+          <a:p>
+            <a:endParaRPr lang="en-US"/>
+          </a:p>
+        </p:txBody>
       </p:sp>
       <p:sp>
         <p:nvSpPr>
@@ -9685,6 +9926,13 @@
             <a:prstDash val="solid"/>
           </a:ln>
         </p:spPr>
+        <p:txBody>
+          <a:bodyPr/>
+          <a:lstStyle/>
+          <a:p>
+            <a:endParaRPr lang="en-US"/>
+          </a:p>
+        </p:txBody>
       </p:sp>
       <p:sp>
         <p:nvSpPr>
@@ -9710,6 +9958,13 @@
             <a:prstDash val="solid"/>
           </a:ln>
         </p:spPr>
+        <p:txBody>
+          <a:bodyPr/>
+          <a:lstStyle/>
+          <a:p>
+            <a:endParaRPr lang="en-US"/>
+          </a:p>
+        </p:txBody>
       </p:sp>
       <p:sp>
         <p:nvSpPr>
@@ -9735,6 +9990,13 @@
             <a:prstDash val="solid"/>
           </a:ln>
         </p:spPr>
+        <p:txBody>
+          <a:bodyPr/>
+          <a:lstStyle/>
+          <a:p>
+            <a:endParaRPr lang="en-US"/>
+          </a:p>
+        </p:txBody>
       </p:sp>
       <p:sp>
         <p:nvSpPr>
@@ -9757,7 +10019,7 @@
           <a:bodyPr wrap="square" rtlCol="0" anchor="ctr"/>
           <a:lstStyle/>
           <a:p>
-            <a:pPr indent="0" marL="0">
+            <a:pPr marL="0" indent="0">
               <a:buNone/>
             </a:pPr>
             <a:r>
@@ -9797,6 +10059,13 @@
             <a:prstDash val="solid"/>
           </a:ln>
         </p:spPr>
+        <p:txBody>
+          <a:bodyPr/>
+          <a:lstStyle/>
+          <a:p>
+            <a:endParaRPr lang="en-US"/>
+          </a:p>
+        </p:txBody>
       </p:sp>
       <p:sp>
         <p:nvSpPr>
@@ -9824,6 +10093,13 @@
             <a:prstDash val="solid"/>
           </a:ln>
         </p:spPr>
+        <p:txBody>
+          <a:bodyPr/>
+          <a:lstStyle/>
+          <a:p>
+            <a:endParaRPr lang="en-US"/>
+          </a:p>
+        </p:txBody>
       </p:sp>
       <p:sp>
         <p:nvSpPr>
@@ -9846,7 +10122,7 @@
           <a:bodyPr wrap="square" rtlCol="0" anchor="ctr"/>
           <a:lstStyle/>
           <a:p>
-            <a:pPr algn="ctr" indent="0" marL="0">
+            <a:pPr marL="0" indent="0" algn="ctr">
               <a:buNone/>
             </a:pPr>
             <a:r>
@@ -9882,7 +10158,7 @@
           <a:bodyPr wrap="square" rtlCol="0" anchor="ctr"/>
           <a:lstStyle/>
           <a:p>
-            <a:pPr algn="ctr" indent="0" marL="0">
+            <a:pPr marL="0" indent="0" algn="ctr">
               <a:buNone/>
             </a:pPr>
             <a:r>
@@ -9899,7 +10175,7 @@
             <a:endParaRPr lang="en-US" sz="1500" dirty="0"/>
           </a:p>
           <a:p>
-            <a:pPr algn="ctr" indent="0" marL="0">
+            <a:pPr marL="0" indent="0" algn="ctr">
               <a:buNone/>
             </a:pPr>
             <a:r>
@@ -9938,7 +10214,7 @@
           <a:bodyPr wrap="square" rtlCol="0" anchor="ctr"/>
           <a:lstStyle/>
           <a:p>
-            <a:pPr algn="ctr" indent="0" marL="0">
+            <a:pPr marL="0" indent="0" algn="ctr">
               <a:buNone/>
             </a:pPr>
             <a:r>
@@ -9982,6 +10258,13 @@
             <a:prstDash val="solid"/>
           </a:ln>
         </p:spPr>
+        <p:txBody>
+          <a:bodyPr/>
+          <a:lstStyle/>
+          <a:p>
+            <a:endParaRPr lang="en-US"/>
+          </a:p>
+        </p:txBody>
       </p:sp>
       <p:sp>
         <p:nvSpPr>
@@ -10004,7 +10287,7 @@
           <a:bodyPr wrap="square" rtlCol="0" anchor="ctr"/>
           <a:lstStyle/>
           <a:p>
-            <a:pPr algn="ctr" indent="0" marL="0">
+            <a:pPr marL="0" indent="0" algn="ctr">
               <a:buNone/>
             </a:pPr>
             <a:r>
@@ -10040,7 +10323,7 @@
           <a:bodyPr wrap="square" rtlCol="0" anchor="ctr"/>
           <a:lstStyle/>
           <a:p>
-            <a:pPr algn="ctr" indent="0" marL="0">
+            <a:pPr marL="0" indent="0" algn="ctr">
               <a:buNone/>
             </a:pPr>
             <a:r>
@@ -10057,7 +10340,7 @@
             <a:endParaRPr lang="en-US" sz="1500" dirty="0"/>
           </a:p>
           <a:p>
-            <a:pPr algn="ctr" indent="0" marL="0">
+            <a:pPr marL="0" indent="0" algn="ctr">
               <a:buNone/>
             </a:pPr>
             <a:r>
@@ -10096,7 +10379,7 @@
           <a:bodyPr wrap="square" rtlCol="0" anchor="ctr"/>
           <a:lstStyle/>
           <a:p>
-            <a:pPr algn="ctr" indent="0" marL="0">
+            <a:pPr marL="0" indent="0" algn="ctr">
               <a:buNone/>
             </a:pPr>
             <a:r>
@@ -10140,6 +10423,13 @@
             <a:prstDash val="solid"/>
           </a:ln>
         </p:spPr>
+        <p:txBody>
+          <a:bodyPr/>
+          <a:lstStyle/>
+          <a:p>
+            <a:endParaRPr lang="en-US"/>
+          </a:p>
+        </p:txBody>
       </p:sp>
       <p:sp>
         <p:nvSpPr>
@@ -10162,7 +10452,7 @@
           <a:bodyPr wrap="square" rtlCol="0" anchor="ctr"/>
           <a:lstStyle/>
           <a:p>
-            <a:pPr algn="ctr" indent="0" marL="0">
+            <a:pPr marL="0" indent="0" algn="ctr">
               <a:buNone/>
             </a:pPr>
             <a:r>
@@ -10198,7 +10488,7 @@
           <a:bodyPr wrap="square" rtlCol="0" anchor="ctr"/>
           <a:lstStyle/>
           <a:p>
-            <a:pPr algn="ctr" indent="0" marL="0">
+            <a:pPr marL="0" indent="0" algn="ctr">
               <a:buNone/>
             </a:pPr>
             <a:r>
@@ -10215,7 +10505,7 @@
             <a:endParaRPr lang="en-US" sz="1500" dirty="0"/>
           </a:p>
           <a:p>
-            <a:pPr algn="ctr" indent="0" marL="0">
+            <a:pPr marL="0" indent="0" algn="ctr">
               <a:buNone/>
             </a:pPr>
             <a:r>
@@ -10254,7 +10544,7 @@
           <a:bodyPr wrap="square" rtlCol="0" anchor="ctr"/>
           <a:lstStyle/>
           <a:p>
-            <a:pPr algn="ctr" indent="0" marL="0">
+            <a:pPr marL="0" indent="0" algn="ctr">
               <a:buNone/>
             </a:pPr>
             <a:r>
@@ -10293,7 +10583,7 @@
           <a:bodyPr wrap="square" rtlCol="0" anchor="ctr"/>
           <a:lstStyle/>
           <a:p>
-            <a:pPr algn="ctr" indent="0" marL="0">
+            <a:pPr marL="0" indent="0" algn="ctr">
               <a:buNone/>
             </a:pPr>
             <a:r>
@@ -10337,6 +10627,13 @@
             <a:prstDash val="solid"/>
           </a:ln>
         </p:spPr>
+        <p:txBody>
+          <a:bodyPr/>
+          <a:lstStyle/>
+          <a:p>
+            <a:endParaRPr lang="en-US"/>
+          </a:p>
+        </p:txBody>
       </p:sp>
       <p:sp>
         <p:nvSpPr>
@@ -10359,7 +10656,7 @@
           <a:bodyPr wrap="square" rtlCol="0" anchor="ctr"/>
           <a:lstStyle/>
           <a:p>
-            <a:pPr algn="ctr" indent="0" marL="0">
+            <a:pPr marL="0" indent="0" algn="ctr">
               <a:buNone/>
             </a:pPr>
             <a:r>
@@ -10376,7 +10673,7 @@
             <a:endParaRPr lang="en-US" sz="1700" dirty="0"/>
           </a:p>
           <a:p>
-            <a:pPr algn="ctr" indent="0" marL="0">
+            <a:pPr marL="0" indent="0" algn="ctr">
               <a:buNone/>
             </a:pPr>
             <a:r>
@@ -10420,6 +10717,13 @@
             <a:prstDash val="solid"/>
           </a:ln>
         </p:spPr>
+        <p:txBody>
+          <a:bodyPr/>
+          <a:lstStyle/>
+          <a:p>
+            <a:endParaRPr lang="en-US"/>
+          </a:p>
+        </p:txBody>
       </p:sp>
       <p:sp>
         <p:nvSpPr>
@@ -10442,7 +10746,7 @@
           <a:bodyPr wrap="square" rtlCol="0" anchor="ctr"/>
           <a:lstStyle/>
           <a:p>
-            <a:pPr algn="ctr" indent="0" marL="0">
+            <a:pPr marL="0" indent="0" algn="ctr">
               <a:buNone/>
             </a:pPr>
             <a:r>
@@ -10481,7 +10785,7 @@
           <a:bodyPr wrap="square" rtlCol="0" anchor="ctr"/>
           <a:lstStyle/>
           <a:p>
-            <a:pPr algn="ctr" indent="0" marL="0">
+            <a:pPr marL="0" indent="0" algn="ctr">
               <a:buNone/>
             </a:pPr>
             <a:r>
@@ -10520,7 +10824,7 @@
           <a:bodyPr wrap="square" rtlCol="0" anchor="ctr"/>
           <a:lstStyle/>
           <a:p>
-            <a:pPr algn="ctr" indent="0" marL="0">
+            <a:pPr marL="0" indent="0" algn="ctr">
               <a:buNone/>
             </a:pPr>
             <a:r>
@@ -10559,7 +10863,7 @@
           <a:bodyPr wrap="square" rtlCol="0" anchor="ctr"/>
           <a:lstStyle/>
           <a:p>
-            <a:pPr algn="ctr" indent="0" marL="0">
+            <a:pPr marL="0" indent="0" algn="ctr">
               <a:buNone/>
             </a:pPr>
             <a:r>
@@ -10626,6 +10930,13 @@
             <a:prstDash val="solid"/>
           </a:ln>
         </p:spPr>
+        <p:txBody>
+          <a:bodyPr/>
+          <a:lstStyle/>
+          <a:p>
+            <a:endParaRPr lang="en-US"/>
+          </a:p>
+        </p:txBody>
       </p:sp>
       <p:sp>
         <p:nvSpPr>
@@ -10655,6 +10966,13 @@
             <a:prstDash val="solid"/>
           </a:ln>
         </p:spPr>
+        <p:txBody>
+          <a:bodyPr/>
+          <a:lstStyle/>
+          <a:p>
+            <a:endParaRPr lang="en-US"/>
+          </a:p>
+        </p:txBody>
       </p:sp>
       <p:sp>
         <p:nvSpPr>
@@ -10684,6 +11002,13 @@
             <a:prstDash val="solid"/>
           </a:ln>
         </p:spPr>
+        <p:txBody>
+          <a:bodyPr/>
+          <a:lstStyle/>
+          <a:p>
+            <a:endParaRPr lang="en-US"/>
+          </a:p>
+        </p:txBody>
       </p:sp>
       <p:sp>
         <p:nvSpPr>
@@ -10707,6 +11032,13 @@
             <a:prstDash val="solid"/>
           </a:ln>
         </p:spPr>
+        <p:txBody>
+          <a:bodyPr/>
+          <a:lstStyle/>
+          <a:p>
+            <a:endParaRPr lang="en-US"/>
+          </a:p>
+        </p:txBody>
       </p:sp>
       <p:sp>
         <p:nvSpPr>
@@ -10732,6 +11064,13 @@
             <a:prstDash val="solid"/>
           </a:ln>
         </p:spPr>
+        <p:txBody>
+          <a:bodyPr/>
+          <a:lstStyle/>
+          <a:p>
+            <a:endParaRPr lang="en-US"/>
+          </a:p>
+        </p:txBody>
       </p:sp>
       <p:sp>
         <p:nvSpPr>
@@ -10757,6 +11096,13 @@
             <a:prstDash val="solid"/>
           </a:ln>
         </p:spPr>
+        <p:txBody>
+          <a:bodyPr/>
+          <a:lstStyle/>
+          <a:p>
+            <a:endParaRPr lang="en-US"/>
+          </a:p>
+        </p:txBody>
       </p:sp>
       <p:sp>
         <p:nvSpPr>
@@ -10779,7 +11125,7 @@
           <a:bodyPr wrap="square" rtlCol="0" anchor="ctr"/>
           <a:lstStyle/>
           <a:p>
-            <a:pPr indent="0" marL="0">
+            <a:pPr marL="0" indent="0">
               <a:buNone/>
             </a:pPr>
             <a:r>
@@ -10818,7 +11164,7 @@
           <a:bodyPr wrap="square" rtlCol="0" anchor="ctr"/>
           <a:lstStyle/>
           <a:p>
-            <a:pPr indent="0" marL="0">
+            <a:pPr marL="0" indent="0">
               <a:buNone/>
             </a:pPr>
             <a:r>
@@ -10858,6 +11204,13 @@
             <a:prstDash val="solid"/>
           </a:ln>
         </p:spPr>
+        <p:txBody>
+          <a:bodyPr/>
+          <a:lstStyle/>
+          <a:p>
+            <a:endParaRPr lang="en-US"/>
+          </a:p>
+        </p:txBody>
       </p:sp>
       <p:sp>
         <p:nvSpPr>
@@ -10885,6 +11238,13 @@
             <a:prstDash val="solid"/>
           </a:ln>
         </p:spPr>
+        <p:txBody>
+          <a:bodyPr/>
+          <a:lstStyle/>
+          <a:p>
+            <a:endParaRPr lang="en-US"/>
+          </a:p>
+        </p:txBody>
       </p:sp>
       <p:sp>
         <p:nvSpPr>
@@ -10907,7 +11267,7 @@
           <a:bodyPr wrap="square" rtlCol="0" anchor="ctr"/>
           <a:lstStyle/>
           <a:p>
-            <a:pPr indent="0" marL="0">
+            <a:pPr marL="0" indent="0">
               <a:buNone/>
             </a:pPr>
             <a:r>
@@ -10946,7 +11306,7 @@
           <a:bodyPr wrap="square" rtlCol="0" anchor="ctr"/>
           <a:lstStyle/>
           <a:p>
-            <a:pPr indent="0" marL="0">
+            <a:pPr marL="0" indent="0">
               <a:buNone/>
             </a:pPr>
             <a:r>
@@ -10990,6 +11350,13 @@
             <a:prstDash val="solid"/>
           </a:ln>
         </p:spPr>
+        <p:txBody>
+          <a:bodyPr/>
+          <a:lstStyle/>
+          <a:p>
+            <a:endParaRPr lang="en-US"/>
+          </a:p>
+        </p:txBody>
       </p:sp>
       <p:sp>
         <p:nvSpPr>
@@ -11012,7 +11379,7 @@
           <a:bodyPr wrap="square" rtlCol="0" anchor="ctr"/>
           <a:lstStyle/>
           <a:p>
-            <a:pPr indent="0" marL="0">
+            <a:pPr marL="0" indent="0">
               <a:buNone/>
             </a:pPr>
             <a:r>
@@ -11051,7 +11418,7 @@
           <a:bodyPr wrap="square" rtlCol="0" anchor="ctr"/>
           <a:lstStyle/>
           <a:p>
-            <a:pPr indent="0" marL="0">
+            <a:pPr marL="0" indent="0">
               <a:buNone/>
             </a:pPr>
             <a:r>
@@ -11095,6 +11462,13 @@
             <a:prstDash val="solid"/>
           </a:ln>
         </p:spPr>
+        <p:txBody>
+          <a:bodyPr/>
+          <a:lstStyle/>
+          <a:p>
+            <a:endParaRPr lang="en-US"/>
+          </a:p>
+        </p:txBody>
       </p:sp>
       <p:sp>
         <p:nvSpPr>
@@ -11117,7 +11491,7 @@
           <a:bodyPr wrap="square" rtlCol="0" anchor="ctr"/>
           <a:lstStyle/>
           <a:p>
-            <a:pPr indent="0" marL="0">
+            <a:pPr marL="0" indent="0">
               <a:buNone/>
             </a:pPr>
             <a:r>
@@ -11156,7 +11530,7 @@
           <a:bodyPr wrap="square" rtlCol="0" anchor="ctr"/>
           <a:lstStyle/>
           <a:p>
-            <a:pPr indent="0" marL="0">
+            <a:pPr marL="0" indent="0">
               <a:buNone/>
             </a:pPr>
             <a:r>
@@ -11200,6 +11574,13 @@
             <a:prstDash val="solid"/>
           </a:ln>
         </p:spPr>
+        <p:txBody>
+          <a:bodyPr/>
+          <a:lstStyle/>
+          <a:p>
+            <a:endParaRPr lang="en-US"/>
+          </a:p>
+        </p:txBody>
       </p:sp>
       <p:sp>
         <p:nvSpPr>
@@ -11222,7 +11603,7 @@
           <a:bodyPr wrap="square" rtlCol="0" anchor="ctr"/>
           <a:lstStyle/>
           <a:p>
-            <a:pPr indent="0" marL="0">
+            <a:pPr marL="0" indent="0">
               <a:buNone/>
             </a:pPr>
             <a:r>
@@ -11261,7 +11642,7 @@
           <a:bodyPr wrap="square" rtlCol="0" anchor="ctr"/>
           <a:lstStyle/>
           <a:p>
-            <a:pPr indent="0" marL="0">
+            <a:pPr marL="0" indent="0">
               <a:buNone/>
             </a:pPr>
             <a:r>
@@ -11300,7 +11681,7 @@
           <a:bodyPr wrap="square" rtlCol="0" anchor="ctr"/>
           <a:lstStyle/>
           <a:p>
-            <a:pPr algn="ctr" indent="0" marL="0">
+            <a:pPr marL="0" indent="0" algn="ctr">
               <a:buNone/>
             </a:pPr>
             <a:r>
@@ -11367,6 +11748,13 @@
             <a:prstDash val="solid"/>
           </a:ln>
         </p:spPr>
+        <p:txBody>
+          <a:bodyPr/>
+          <a:lstStyle/>
+          <a:p>
+            <a:endParaRPr lang="en-US"/>
+          </a:p>
+        </p:txBody>
       </p:sp>
       <p:sp>
         <p:nvSpPr>
@@ -11396,6 +11784,13 @@
             <a:prstDash val="solid"/>
           </a:ln>
         </p:spPr>
+        <p:txBody>
+          <a:bodyPr/>
+          <a:lstStyle/>
+          <a:p>
+            <a:endParaRPr lang="en-US"/>
+          </a:p>
+        </p:txBody>
       </p:sp>
       <p:sp>
         <p:nvSpPr>
@@ -11425,6 +11820,13 @@
             <a:prstDash val="solid"/>
           </a:ln>
         </p:spPr>
+        <p:txBody>
+          <a:bodyPr/>
+          <a:lstStyle/>
+          <a:p>
+            <a:endParaRPr lang="en-US"/>
+          </a:p>
+        </p:txBody>
       </p:sp>
       <p:sp>
         <p:nvSpPr>
@@ -11448,6 +11850,13 @@
             <a:prstDash val="solid"/>
           </a:ln>
         </p:spPr>
+        <p:txBody>
+          <a:bodyPr/>
+          <a:lstStyle/>
+          <a:p>
+            <a:endParaRPr lang="en-US"/>
+          </a:p>
+        </p:txBody>
       </p:sp>
       <p:sp>
         <p:nvSpPr>
@@ -11473,6 +11882,13 @@
             <a:prstDash val="solid"/>
           </a:ln>
         </p:spPr>
+        <p:txBody>
+          <a:bodyPr/>
+          <a:lstStyle/>
+          <a:p>
+            <a:endParaRPr lang="en-US"/>
+          </a:p>
+        </p:txBody>
       </p:sp>
       <p:sp>
         <p:nvSpPr>
@@ -11482,7 +11898,7 @@
         </p:nvSpPr>
         <p:spPr>
           <a:xfrm>
-            <a:off x="0" y="6528816"/>
+            <a:off x="0" y="6722252"/>
             <a:ext cx="12192000" cy="54864"/>
           </a:xfrm>
           <a:prstGeom prst="rect">
@@ -11498,6 +11914,13 @@
             <a:prstDash val="solid"/>
           </a:ln>
         </p:spPr>
+        <p:txBody>
+          <a:bodyPr/>
+          <a:lstStyle/>
+          <a:p>
+            <a:endParaRPr lang="en-US"/>
+          </a:p>
+        </p:txBody>
       </p:sp>
       <p:sp>
         <p:nvSpPr>
@@ -11520,7 +11943,7 @@
           <a:bodyPr wrap="square" rtlCol="0" anchor="ctr"/>
           <a:lstStyle/>
           <a:p>
-            <a:pPr indent="0" marL="0">
+            <a:pPr marL="0" indent="0">
               <a:buNone/>
             </a:pPr>
             <a:r>
@@ -11559,7 +11982,7 @@
           <a:bodyPr wrap="square" rtlCol="0" anchor="ctr"/>
           <a:lstStyle/>
           <a:p>
-            <a:pPr indent="0" marL="0">
+            <a:pPr marL="0" indent="0">
               <a:buNone/>
             </a:pPr>
             <a:r>
@@ -11599,6 +12022,13 @@
             <a:prstDash val="solid"/>
           </a:ln>
         </p:spPr>
+        <p:txBody>
+          <a:bodyPr/>
+          <a:lstStyle/>
+          <a:p>
+            <a:endParaRPr lang="en-US"/>
+          </a:p>
+        </p:txBody>
       </p:sp>
       <p:sp>
         <p:nvSpPr>
@@ -11626,6 +12056,13 @@
             <a:prstDash val="solid"/>
           </a:ln>
         </p:spPr>
+        <p:txBody>
+          <a:bodyPr/>
+          <a:lstStyle/>
+          <a:p>
+            <a:endParaRPr lang="en-US"/>
+          </a:p>
+        </p:txBody>
       </p:sp>
       <p:sp>
         <p:nvSpPr>
@@ -11648,7 +12085,7 @@
           <a:bodyPr wrap="square" rtlCol="0" anchor="ctr"/>
           <a:lstStyle/>
           <a:p>
-            <a:pPr algn="ctr" indent="0" marL="0">
+            <a:pPr marL="0" indent="0" algn="ctr">
               <a:buNone/>
             </a:pPr>
             <a:r>
@@ -11684,7 +12121,7 @@
           <a:bodyPr wrap="square" rtlCol="0" anchor="ctr"/>
           <a:lstStyle/>
           <a:p>
-            <a:pPr algn="ctr" indent="0" marL="0">
+            <a:pPr marL="0" indent="0" algn="ctr">
               <a:buNone/>
             </a:pPr>
             <a:r>
@@ -11723,7 +12160,7 @@
           <a:bodyPr wrap="square" rtlCol="0" anchor="ctr"/>
           <a:lstStyle/>
           <a:p>
-            <a:pPr algn="ctr" indent="0" marL="0">
+            <a:pPr marL="0" indent="0" algn="ctr">
               <a:buNone/>
             </a:pPr>
             <a:r>
@@ -11762,7 +12199,7 @@
           <a:bodyPr wrap="square" rtlCol="0" anchor="ctr"/>
           <a:lstStyle/>
           <a:p>
-            <a:pPr algn="ctr" indent="0" marL="0">
+            <a:pPr marL="0" indent="0" algn="ctr">
               <a:buNone/>
             </a:pPr>
             <a:r>
@@ -11806,6 +12243,13 @@
             <a:prstDash val="solid"/>
           </a:ln>
         </p:spPr>
+        <p:txBody>
+          <a:bodyPr/>
+          <a:lstStyle/>
+          <a:p>
+            <a:endParaRPr lang="en-US"/>
+          </a:p>
+        </p:txBody>
       </p:sp>
       <p:sp>
         <p:nvSpPr>
@@ -11828,7 +12272,7 @@
           <a:bodyPr wrap="square" rtlCol="0" anchor="ctr"/>
           <a:lstStyle/>
           <a:p>
-            <a:pPr algn="ctr" indent="0" marL="0">
+            <a:pPr marL="0" indent="0" algn="ctr">
               <a:buNone/>
             </a:pPr>
             <a:r>
@@ -11864,7 +12308,7 @@
           <a:bodyPr wrap="square" rtlCol="0" anchor="ctr"/>
           <a:lstStyle/>
           <a:p>
-            <a:pPr algn="ctr" indent="0" marL="0">
+            <a:pPr marL="0" indent="0" algn="ctr">
               <a:buNone/>
             </a:pPr>
             <a:r>
@@ -11903,7 +12347,7 @@
           <a:bodyPr wrap="square" rtlCol="0" anchor="ctr"/>
           <a:lstStyle/>
           <a:p>
-            <a:pPr algn="ctr" indent="0" marL="0">
+            <a:pPr marL="0" indent="0" algn="ctr">
               <a:buNone/>
             </a:pPr>
             <a:r>
@@ -11942,7 +12386,7 @@
           <a:bodyPr wrap="square" rtlCol="0" anchor="ctr"/>
           <a:lstStyle/>
           <a:p>
-            <a:pPr algn="ctr" indent="0" marL="0">
+            <a:pPr marL="0" indent="0" algn="ctr">
               <a:buNone/>
             </a:pPr>
             <a:r>
@@ -11986,6 +12430,13 @@
             <a:prstDash val="solid"/>
           </a:ln>
         </p:spPr>
+        <p:txBody>
+          <a:bodyPr/>
+          <a:lstStyle/>
+          <a:p>
+            <a:endParaRPr lang="en-US"/>
+          </a:p>
+        </p:txBody>
       </p:sp>
       <p:sp>
         <p:nvSpPr>
@@ -12008,7 +12459,7 @@
           <a:bodyPr wrap="square" rtlCol="0" anchor="ctr"/>
           <a:lstStyle/>
           <a:p>
-            <a:pPr algn="ctr" indent="0" marL="0">
+            <a:pPr marL="0" indent="0" algn="ctr">
               <a:buNone/>
             </a:pPr>
             <a:r>
@@ -12044,7 +12495,7 @@
           <a:bodyPr wrap="square" rtlCol="0" anchor="ctr"/>
           <a:lstStyle/>
           <a:p>
-            <a:pPr algn="ctr" indent="0" marL="0">
+            <a:pPr marL="0" indent="0" algn="ctr">
               <a:buNone/>
             </a:pPr>
             <a:r>
@@ -12083,7 +12534,7 @@
           <a:bodyPr wrap="square" rtlCol="0" anchor="ctr"/>
           <a:lstStyle/>
           <a:p>
-            <a:pPr algn="ctr" indent="0" marL="0">
+            <a:pPr marL="0" indent="0" algn="ctr">
               <a:buNone/>
             </a:pPr>
             <a:r>
@@ -12122,7 +12573,7 @@
           <a:bodyPr wrap="square" rtlCol="0" anchor="ctr"/>
           <a:lstStyle/>
           <a:p>
-            <a:pPr algn="ctr" indent="0" marL="0">
+            <a:pPr marL="0" indent="0" algn="ctr">
               <a:buNone/>
             </a:pPr>
             <a:r>
@@ -12166,6 +12617,13 @@
             <a:prstDash val="solid"/>
           </a:ln>
         </p:spPr>
+        <p:txBody>
+          <a:bodyPr/>
+          <a:lstStyle/>
+          <a:p>
+            <a:endParaRPr lang="en-US"/>
+          </a:p>
+        </p:txBody>
       </p:sp>
       <p:sp>
         <p:nvSpPr>
@@ -12188,7 +12646,7 @@
           <a:bodyPr wrap="square" rtlCol="0" anchor="ctr"/>
           <a:lstStyle/>
           <a:p>
-            <a:pPr algn="ctr" indent="0" marL="0">
+            <a:pPr marL="0" indent="0" algn="ctr">
               <a:buNone/>
             </a:pPr>
             <a:r>
@@ -12224,7 +12682,7 @@
           <a:bodyPr wrap="square" rtlCol="0" anchor="ctr"/>
           <a:lstStyle/>
           <a:p>
-            <a:pPr algn="ctr" indent="0" marL="0">
+            <a:pPr marL="0" indent="0" algn="ctr">
               <a:buNone/>
             </a:pPr>
             <a:r>
@@ -12263,7 +12721,7 @@
           <a:bodyPr wrap="square" rtlCol="0" anchor="ctr"/>
           <a:lstStyle/>
           <a:p>
-            <a:pPr algn="ctr" indent="0" marL="0">
+            <a:pPr marL="0" indent="0" algn="ctr">
               <a:buNone/>
             </a:pPr>
             <a:r>
@@ -12302,7 +12760,7 @@
           <a:bodyPr wrap="square" rtlCol="0" anchor="ctr"/>
           <a:lstStyle/>
           <a:p>
-            <a:pPr algn="ctr" indent="0" marL="0">
+            <a:pPr marL="0" indent="0" algn="ctr">
               <a:buNone/>
             </a:pPr>
             <a:r>
@@ -12346,6 +12804,13 @@
             <a:prstDash val="solid"/>
           </a:ln>
         </p:spPr>
+        <p:txBody>
+          <a:bodyPr/>
+          <a:lstStyle/>
+          <a:p>
+            <a:endParaRPr lang="en-US"/>
+          </a:p>
+        </p:txBody>
       </p:sp>
       <p:sp>
         <p:nvSpPr>
@@ -12368,7 +12833,7 @@
           <a:bodyPr wrap="square" rtlCol="0" anchor="ctr"/>
           <a:lstStyle/>
           <a:p>
-            <a:pPr algn="ctr" indent="0" marL="0">
+            <a:pPr marL="0" indent="0" algn="ctr">
               <a:buNone/>
             </a:pPr>
             <a:r>
@@ -12404,7 +12869,7 @@
           <a:bodyPr wrap="square" rtlCol="0" anchor="ctr"/>
           <a:lstStyle/>
           <a:p>
-            <a:pPr algn="ctr" indent="0" marL="0">
+            <a:pPr marL="0" indent="0" algn="ctr">
               <a:buNone/>
             </a:pPr>
             <a:r>
@@ -12443,7 +12908,7 @@
           <a:bodyPr wrap="square" rtlCol="0" anchor="ctr"/>
           <a:lstStyle/>
           <a:p>
-            <a:pPr algn="ctr" indent="0" marL="0">
+            <a:pPr marL="0" indent="0" algn="ctr">
               <a:buNone/>
             </a:pPr>
             <a:r>
@@ -12482,7 +12947,7 @@
           <a:bodyPr wrap="square" rtlCol="0" anchor="ctr"/>
           <a:lstStyle/>
           <a:p>
-            <a:pPr algn="ctr" indent="0" marL="0">
+            <a:pPr marL="0" indent="0" algn="ctr">
               <a:buNone/>
             </a:pPr>
             <a:r>
@@ -12526,6 +12991,13 @@
             <a:prstDash val="solid"/>
           </a:ln>
         </p:spPr>
+        <p:txBody>
+          <a:bodyPr/>
+          <a:lstStyle/>
+          <a:p>
+            <a:endParaRPr lang="en-US"/>
+          </a:p>
+        </p:txBody>
       </p:sp>
       <p:sp>
         <p:nvSpPr>
@@ -12548,7 +13020,7 @@
           <a:bodyPr wrap="square" rtlCol="0" anchor="ctr"/>
           <a:lstStyle/>
           <a:p>
-            <a:pPr algn="ctr" indent="0" marL="0">
+            <a:pPr marL="0" indent="0" algn="ctr">
               <a:buNone/>
             </a:pPr>
             <a:r>
@@ -12584,7 +13056,7 @@
           <a:bodyPr wrap="square" rtlCol="0" anchor="ctr"/>
           <a:lstStyle/>
           <a:p>
-            <a:pPr algn="ctr" indent="0" marL="0">
+            <a:pPr marL="0" indent="0" algn="ctr">
               <a:buNone/>
             </a:pPr>
             <a:r>
@@ -12623,7 +13095,7 @@
           <a:bodyPr wrap="square" rtlCol="0" anchor="ctr"/>
           <a:lstStyle/>
           <a:p>
-            <a:pPr algn="ctr" indent="0" marL="0">
+            <a:pPr marL="0" indent="0" algn="ctr">
               <a:buNone/>
             </a:pPr>
             <a:r>
@@ -12662,7 +13134,7 @@
           <a:bodyPr wrap="square" rtlCol="0" anchor="ctr"/>
           <a:lstStyle/>
           <a:p>
-            <a:pPr algn="ctr" indent="0" marL="0">
+            <a:pPr marL="0" indent="0" algn="ctr">
               <a:buNone/>
             </a:pPr>
             <a:r>
@@ -12702,6 +13174,13 @@
             <a:prstDash val="solid"/>
           </a:ln>
         </p:spPr>
+        <p:txBody>
+          <a:bodyPr/>
+          <a:lstStyle/>
+          <a:p>
+            <a:endParaRPr lang="en-US"/>
+          </a:p>
+        </p:txBody>
       </p:sp>
       <p:sp>
         <p:nvSpPr>
@@ -12724,7 +13203,7 @@
           <a:bodyPr wrap="square" rtlCol="0" anchor="ctr"/>
           <a:lstStyle/>
           <a:p>
-            <a:pPr indent="0" marL="0">
+            <a:pPr marL="0" indent="0">
               <a:buNone/>
             </a:pPr>
             <a:r>
@@ -12763,7 +13242,7 @@
           <a:bodyPr wrap="square" rtlCol="0" anchor="ctr"/>
           <a:lstStyle/>
           <a:p>
-            <a:pPr algn="l" indent="0" marL="0">
+            <a:pPr marL="0" indent="0" algn="l">
               <a:buNone/>
             </a:pPr>
             <a:r>
@@ -12830,6 +13309,13 @@
             <a:prstDash val="solid"/>
           </a:ln>
         </p:spPr>
+        <p:txBody>
+          <a:bodyPr/>
+          <a:lstStyle/>
+          <a:p>
+            <a:endParaRPr lang="en-US"/>
+          </a:p>
+        </p:txBody>
       </p:sp>
       <p:sp>
         <p:nvSpPr>
@@ -12859,6 +13345,13 @@
             <a:prstDash val="solid"/>
           </a:ln>
         </p:spPr>
+        <p:txBody>
+          <a:bodyPr/>
+          <a:lstStyle/>
+          <a:p>
+            <a:endParaRPr lang="en-US"/>
+          </a:p>
+        </p:txBody>
       </p:sp>
       <p:sp>
         <p:nvSpPr>
@@ -12888,6 +13381,13 @@
             <a:prstDash val="solid"/>
           </a:ln>
         </p:spPr>
+        <p:txBody>
+          <a:bodyPr/>
+          <a:lstStyle/>
+          <a:p>
+            <a:endParaRPr lang="en-US"/>
+          </a:p>
+        </p:txBody>
       </p:sp>
       <p:sp>
         <p:nvSpPr>
@@ -12917,6 +13417,13 @@
             <a:prstDash val="solid"/>
           </a:ln>
         </p:spPr>
+        <p:txBody>
+          <a:bodyPr/>
+          <a:lstStyle/>
+          <a:p>
+            <a:endParaRPr lang="en-US"/>
+          </a:p>
+        </p:txBody>
       </p:sp>
       <p:sp>
         <p:nvSpPr>
@@ -12942,6 +13449,13 @@
             <a:prstDash val="solid"/>
           </a:ln>
         </p:spPr>
+        <p:txBody>
+          <a:bodyPr/>
+          <a:lstStyle/>
+          <a:p>
+            <a:endParaRPr lang="en-US"/>
+          </a:p>
+        </p:txBody>
       </p:sp>
       <p:sp>
         <p:nvSpPr>
@@ -12967,6 +13481,13 @@
             <a:prstDash val="solid"/>
           </a:ln>
         </p:spPr>
+        <p:txBody>
+          <a:bodyPr/>
+          <a:lstStyle/>
+          <a:p>
+            <a:endParaRPr lang="en-US"/>
+          </a:p>
+        </p:txBody>
       </p:sp>
       <p:sp>
         <p:nvSpPr>
@@ -12989,7 +13510,7 @@
           <a:bodyPr wrap="square" rtlCol="0" anchor="ctr"/>
           <a:lstStyle/>
           <a:p>
-            <a:pPr algn="ctr" indent="0" marL="0">
+            <a:pPr marL="0" indent="0" algn="ctr">
               <a:buNone/>
             </a:pPr>
             <a:r>
@@ -13025,7 +13546,7 @@
           <a:bodyPr wrap="square" rtlCol="0" anchor="ctr"/>
           <a:lstStyle/>
           <a:p>
-            <a:pPr algn="ctr" indent="0" marL="0">
+            <a:pPr marL="0" indent="0" algn="ctr">
               <a:buNone/>
             </a:pPr>
             <a:r>
@@ -13037,7 +13558,7 @@
                 <a:ea typeface="Arial" pitchFamily="34" charset="-122"/>
                 <a:cs typeface="Arial" pitchFamily="34" charset="-120"/>
               </a:rPr>
-              <a:t>El momento de confianza</a:t>
+              <a:t>Un momento de confianza</a:t>
             </a:r>
             <a:endParaRPr lang="en-US" dirty="0"/>
           </a:p>
@@ -13065,6 +13586,13 @@
             <a:prstDash val="solid"/>
           </a:ln>
         </p:spPr>
+        <p:txBody>
+          <a:bodyPr/>
+          <a:lstStyle/>
+          <a:p>
+            <a:endParaRPr lang="en-US"/>
+          </a:p>
+        </p:txBody>
       </p:sp>
       <p:sp>
         <p:nvSpPr>
@@ -13087,7 +13615,7 @@
           <a:bodyPr wrap="square" rtlCol="0" anchor="ctr"/>
           <a:lstStyle/>
           <a:p>
-            <a:pPr algn="ctr" indent="0" marL="0">
+            <a:pPr marL="0" indent="0" algn="ctr">
               <a:lnSpc>
                 <a:spcPct val="140000"/>
               </a:lnSpc>
@@ -13107,7 +13635,7 @@
             <a:endParaRPr lang="en-US" sz="2000" dirty="0"/>
           </a:p>
           <a:p>
-            <a:pPr algn="ctr" indent="0" marL="0">
+            <a:pPr marL="0" indent="0" algn="ctr">
               <a:lnSpc>
                 <a:spcPct val="140000"/>
               </a:lnSpc>
@@ -13127,7 +13655,7 @@
             <a:endParaRPr lang="en-US" sz="2000" dirty="0"/>
           </a:p>
           <a:p>
-            <a:pPr algn="ctr" indent="0" marL="0">
+            <a:pPr marL="0" indent="0" algn="ctr">
               <a:lnSpc>
                 <a:spcPct val="140000"/>
               </a:lnSpc>
@@ -13174,6 +13702,13 @@
             <a:prstDash val="solid"/>
           </a:ln>
         </p:spPr>
+        <p:txBody>
+          <a:bodyPr/>
+          <a:lstStyle/>
+          <a:p>
+            <a:endParaRPr lang="en-US"/>
+          </a:p>
+        </p:txBody>
       </p:sp>
       <p:sp>
         <p:nvSpPr>
@@ -13196,7 +13731,7 @@
           <a:bodyPr wrap="square" rtlCol="0" anchor="ctr"/>
           <a:lstStyle/>
           <a:p>
-            <a:pPr algn="ctr" indent="0" marL="0">
+            <a:pPr marL="0" indent="0" algn="ctr">
               <a:buNone/>
             </a:pPr>
             <a:r>
@@ -13240,6 +13775,13 @@
             <a:prstDash val="solid"/>
           </a:ln>
         </p:spPr>
+        <p:txBody>
+          <a:bodyPr/>
+          <a:lstStyle/>
+          <a:p>
+            <a:endParaRPr lang="en-US"/>
+          </a:p>
+        </p:txBody>
       </p:sp>
       <p:sp>
         <p:nvSpPr>
@@ -13262,7 +13804,7 @@
           <a:bodyPr wrap="square" rtlCol="0" anchor="ctr"/>
           <a:lstStyle/>
           <a:p>
-            <a:pPr algn="ctr" indent="0" marL="0">
+            <a:pPr marL="0" indent="0" algn="ctr">
               <a:buNone/>
             </a:pPr>
             <a:r>
@@ -13306,6 +13848,13 @@
             <a:prstDash val="solid"/>
           </a:ln>
         </p:spPr>
+        <p:txBody>
+          <a:bodyPr/>
+          <a:lstStyle/>
+          <a:p>
+            <a:endParaRPr lang="en-US"/>
+          </a:p>
+        </p:txBody>
       </p:sp>
       <p:sp>
         <p:nvSpPr>
@@ -13328,7 +13877,7 @@
           <a:bodyPr wrap="square" rtlCol="0" anchor="ctr"/>
           <a:lstStyle/>
           <a:p>
-            <a:pPr algn="ctr" indent="0" marL="0">
+            <a:pPr marL="0" indent="0" algn="ctr">
               <a:buNone/>
             </a:pPr>
             <a:r>
@@ -13367,9 +13916,7 @@
           <a:bodyPr wrap="square" rtlCol="0" anchor="ctr"/>
           <a:lstStyle/>
           <a:p>
-            <a:pPr algn="ctr" indent="0" marL="0">
-              <a:buNone/>
-            </a:pPr>
+            <a:pPr algn="ctr"/>
             <a:r>
               <a:rPr lang="en-US" dirty="0">
                 <a:solidFill>
@@ -13379,7 +13926,18 @@
                 <a:ea typeface="Arial" pitchFamily="34" charset="-122"/>
                 <a:cs typeface="Arial" pitchFamily="34" charset="-120"/>
               </a:rPr>
-              <a:t>MVP operacional · No dispositivo médico · Datos ficticios</a:t>
+              <a:t>MVP operacional · No dispositivo médico · Datos </a:t>
+            </a:r>
+            <a:r>
+              <a:rPr lang="en-US" dirty="0" err="1">
+                <a:solidFill>
+                  <a:srgbClr val="718096"/>
+                </a:solidFill>
+                <a:latin typeface="Arial" pitchFamily="34" charset="0"/>
+                <a:ea typeface="Arial" pitchFamily="34" charset="-122"/>
+                <a:cs typeface="Arial" pitchFamily="34" charset="-120"/>
+              </a:rPr>
+              <a:t>sintéticos</a:t>
             </a:r>
             <a:endParaRPr lang="en-US" dirty="0"/>
           </a:p>
@@ -13434,6 +13992,13 @@
             <a:prstDash val="solid"/>
           </a:ln>
         </p:spPr>
+        <p:txBody>
+          <a:bodyPr/>
+          <a:lstStyle/>
+          <a:p>
+            <a:endParaRPr lang="en-US"/>
+          </a:p>
+        </p:txBody>
       </p:sp>
       <p:sp>
         <p:nvSpPr>
@@ -13463,6 +14028,13 @@
             <a:prstDash val="solid"/>
           </a:ln>
         </p:spPr>
+        <p:txBody>
+          <a:bodyPr/>
+          <a:lstStyle/>
+          <a:p>
+            <a:endParaRPr lang="en-US"/>
+          </a:p>
+        </p:txBody>
       </p:sp>
       <p:sp>
         <p:nvSpPr>
@@ -13492,6 +14064,13 @@
             <a:prstDash val="solid"/>
           </a:ln>
         </p:spPr>
+        <p:txBody>
+          <a:bodyPr/>
+          <a:lstStyle/>
+          <a:p>
+            <a:endParaRPr lang="en-US"/>
+          </a:p>
+        </p:txBody>
       </p:sp>
       <p:sp>
         <p:nvSpPr>
@@ -13515,6 +14094,13 @@
             <a:prstDash val="solid"/>
           </a:ln>
         </p:spPr>
+        <p:txBody>
+          <a:bodyPr/>
+          <a:lstStyle/>
+          <a:p>
+            <a:endParaRPr lang="en-US"/>
+          </a:p>
+        </p:txBody>
       </p:sp>
       <p:sp>
         <p:nvSpPr>
@@ -13540,6 +14126,13 @@
             <a:prstDash val="solid"/>
           </a:ln>
         </p:spPr>
+        <p:txBody>
+          <a:bodyPr/>
+          <a:lstStyle/>
+          <a:p>
+            <a:endParaRPr lang="en-US"/>
+          </a:p>
+        </p:txBody>
       </p:sp>
       <p:sp>
         <p:nvSpPr>
@@ -13565,6 +14158,13 @@
             <a:prstDash val="solid"/>
           </a:ln>
         </p:spPr>
+        <p:txBody>
+          <a:bodyPr/>
+          <a:lstStyle/>
+          <a:p>
+            <a:endParaRPr lang="en-US"/>
+          </a:p>
+        </p:txBody>
       </p:sp>
       <p:sp>
         <p:nvSpPr>
@@ -13587,7 +14187,7 @@
           <a:bodyPr wrap="square" rtlCol="0" anchor="ctr"/>
           <a:lstStyle/>
           <a:p>
-            <a:pPr indent="0" marL="0">
+            <a:pPr marL="0" indent="0">
               <a:buNone/>
             </a:pPr>
             <a:r>
@@ -13599,7 +14199,62 @@
                 <a:ea typeface="Arial" pitchFamily="34" charset="-122"/>
                 <a:cs typeface="Arial" pitchFamily="34" charset="-120"/>
               </a:rPr>
-              <a:t>⚠️  Fallo operativo</a:t>
+              <a:t>⚠️  El </a:t>
+            </a:r>
+            <a:r>
+              <a:rPr lang="en-US" b="1" dirty="0" err="1">
+                <a:solidFill>
+                  <a:srgbClr val="2D3748"/>
+                </a:solidFill>
+                <a:latin typeface="Arial" pitchFamily="34" charset="0"/>
+                <a:ea typeface="Arial" pitchFamily="34" charset="-122"/>
+                <a:cs typeface="Arial" pitchFamily="34" charset="-120"/>
+              </a:rPr>
+              <a:t>problema</a:t>
+            </a:r>
+            <a:r>
+              <a:rPr lang="en-US" b="1" dirty="0">
+                <a:solidFill>
+                  <a:srgbClr val="2D3748"/>
+                </a:solidFill>
+                <a:latin typeface="Arial" pitchFamily="34" charset="0"/>
+                <a:ea typeface="Arial" pitchFamily="34" charset="-122"/>
+                <a:cs typeface="Arial" pitchFamily="34" charset="-120"/>
+              </a:rPr>
+              <a:t> de la </a:t>
+            </a:r>
+            <a:r>
+              <a:rPr lang="en-US" b="1" dirty="0" err="1">
+                <a:solidFill>
+                  <a:srgbClr val="2D3748"/>
+                </a:solidFill>
+                <a:latin typeface="Arial" pitchFamily="34" charset="0"/>
+                <a:ea typeface="Arial" pitchFamily="34" charset="-122"/>
+                <a:cs typeface="Arial" pitchFamily="34" charset="-120"/>
+              </a:rPr>
+              <a:t>situación</a:t>
+            </a:r>
+            <a:r>
+              <a:rPr lang="en-US" b="1" dirty="0">
+                <a:solidFill>
+                  <a:srgbClr val="2D3748"/>
+                </a:solidFill>
+                <a:latin typeface="Arial" pitchFamily="34" charset="0"/>
+                <a:ea typeface="Arial" pitchFamily="34" charset="-122"/>
+                <a:cs typeface="Arial" pitchFamily="34" charset="-120"/>
+              </a:rPr>
+              <a:t> </a:t>
+            </a:r>
+            <a:r>
+              <a:rPr lang="en-US" b="1" dirty="0" err="1">
+                <a:solidFill>
+                  <a:srgbClr val="2D3748"/>
+                </a:solidFill>
+                <a:latin typeface="Arial" pitchFamily="34" charset="0"/>
+                <a:ea typeface="Arial" pitchFamily="34" charset="-122"/>
+                <a:cs typeface="Arial" pitchFamily="34" charset="-120"/>
+              </a:rPr>
+              <a:t>operativa</a:t>
             </a:r>
             <a:endParaRPr lang="en-US" dirty="0"/>
           </a:p>
@@ -13626,7 +14281,7 @@
           <a:bodyPr wrap="square" rtlCol="0" anchor="ctr"/>
           <a:lstStyle/>
           <a:p>
-            <a:pPr indent="0" marL="0">
+            <a:pPr marL="0" indent="0">
               <a:buNone/>
             </a:pPr>
             <a:r>
@@ -13666,6 +14321,13 @@
             <a:prstDash val="solid"/>
           </a:ln>
         </p:spPr>
+        <p:txBody>
+          <a:bodyPr/>
+          <a:lstStyle/>
+          <a:p>
+            <a:endParaRPr lang="en-US"/>
+          </a:p>
+        </p:txBody>
       </p:sp>
       <p:sp>
         <p:nvSpPr>
@@ -13693,6 +14355,13 @@
             <a:prstDash val="solid"/>
           </a:ln>
         </p:spPr>
+        <p:txBody>
+          <a:bodyPr/>
+          <a:lstStyle/>
+          <a:p>
+            <a:endParaRPr lang="en-US"/>
+          </a:p>
+        </p:txBody>
       </p:sp>
       <p:sp>
         <p:nvSpPr>
@@ -13715,7 +14384,7 @@
           <a:bodyPr wrap="square" rtlCol="0" anchor="ctr"/>
           <a:lstStyle/>
           <a:p>
-            <a:pPr algn="ctr" indent="0" marL="0">
+            <a:pPr marL="0" indent="0" algn="ctr">
               <a:buNone/>
             </a:pPr>
             <a:r>
@@ -13751,7 +14420,7 @@
           <a:bodyPr wrap="square" rtlCol="0" anchor="ctr"/>
           <a:lstStyle/>
           <a:p>
-            <a:pPr algn="ctr" indent="0" marL="0">
+            <a:pPr marL="0" indent="0" algn="ctr">
               <a:buNone/>
             </a:pPr>
             <a:r>
@@ -13768,7 +14437,7 @@
             <a:endParaRPr lang="en-US" sz="1200" dirty="0"/>
           </a:p>
           <a:p>
-            <a:pPr algn="ctr" indent="0" marL="0">
+            <a:pPr marL="0" indent="0" algn="ctr">
               <a:buNone/>
             </a:pPr>
             <a:r>
@@ -13807,7 +14476,7 @@
           <a:bodyPr wrap="square" rtlCol="0" anchor="ctr"/>
           <a:lstStyle/>
           <a:p>
-            <a:pPr algn="ctr" indent="0" marL="0">
+            <a:pPr marL="0" indent="0" algn="ctr">
               <a:buNone/>
             </a:pPr>
             <a:r>
@@ -13851,6 +14520,13 @@
             <a:prstDash val="solid"/>
           </a:ln>
         </p:spPr>
+        <p:txBody>
+          <a:bodyPr/>
+          <a:lstStyle/>
+          <a:p>
+            <a:endParaRPr lang="en-US"/>
+          </a:p>
+        </p:txBody>
       </p:sp>
       <p:sp>
         <p:nvSpPr>
@@ -13873,7 +14549,7 @@
           <a:bodyPr wrap="square" rtlCol="0" anchor="ctr"/>
           <a:lstStyle/>
           <a:p>
-            <a:pPr algn="ctr" indent="0" marL="0">
+            <a:pPr marL="0" indent="0" algn="ctr">
               <a:buNone/>
             </a:pPr>
             <a:r>
@@ -13909,7 +14585,7 @@
           <a:bodyPr wrap="square" rtlCol="0" anchor="ctr"/>
           <a:lstStyle/>
           <a:p>
-            <a:pPr algn="ctr" indent="0" marL="0">
+            <a:pPr marL="0" indent="0" algn="ctr">
               <a:buNone/>
             </a:pPr>
             <a:r>
@@ -13926,7 +14602,7 @@
             <a:endParaRPr lang="en-US" sz="1200" dirty="0"/>
           </a:p>
           <a:p>
-            <a:pPr algn="ctr" indent="0" marL="0">
+            <a:pPr marL="0" indent="0" algn="ctr">
               <a:buNone/>
             </a:pPr>
             <a:r>
@@ -13965,7 +14641,7 @@
           <a:bodyPr wrap="square" rtlCol="0" anchor="ctr"/>
           <a:lstStyle/>
           <a:p>
-            <a:pPr algn="ctr" indent="0" marL="0">
+            <a:pPr marL="0" indent="0" algn="ctr">
               <a:buNone/>
             </a:pPr>
             <a:r>
@@ -14009,6 +14685,13 @@
             <a:prstDash val="solid"/>
           </a:ln>
         </p:spPr>
+        <p:txBody>
+          <a:bodyPr/>
+          <a:lstStyle/>
+          <a:p>
+            <a:endParaRPr lang="en-US"/>
+          </a:p>
+        </p:txBody>
       </p:sp>
       <p:sp>
         <p:nvSpPr>
@@ -14031,7 +14714,7 @@
           <a:bodyPr wrap="square" rtlCol="0" anchor="ctr"/>
           <a:lstStyle/>
           <a:p>
-            <a:pPr algn="ctr" indent="0" marL="0">
+            <a:pPr marL="0" indent="0" algn="ctr">
               <a:buNone/>
             </a:pPr>
             <a:r>
@@ -14067,7 +14750,7 @@
           <a:bodyPr wrap="square" rtlCol="0" anchor="ctr"/>
           <a:lstStyle/>
           <a:p>
-            <a:pPr algn="ctr" indent="0" marL="0">
+            <a:pPr marL="0" indent="0" algn="ctr">
               <a:buNone/>
             </a:pPr>
             <a:r>
@@ -14084,7 +14767,7 @@
             <a:endParaRPr lang="en-US" sz="1200" dirty="0"/>
           </a:p>
           <a:p>
-            <a:pPr algn="ctr" indent="0" marL="0">
+            <a:pPr marL="0" indent="0" algn="ctr">
               <a:buNone/>
             </a:pPr>
             <a:r>
@@ -14123,7 +14806,7 @@
           <a:bodyPr wrap="square" rtlCol="0" anchor="ctr"/>
           <a:lstStyle/>
           <a:p>
-            <a:pPr algn="ctr" indent="0" marL="0">
+            <a:pPr marL="0" indent="0" algn="ctr">
               <a:buNone/>
             </a:pPr>
             <a:r>
@@ -14167,6 +14850,13 @@
             <a:prstDash val="solid"/>
           </a:ln>
         </p:spPr>
+        <p:txBody>
+          <a:bodyPr/>
+          <a:lstStyle/>
+          <a:p>
+            <a:endParaRPr lang="en-US"/>
+          </a:p>
+        </p:txBody>
       </p:sp>
       <p:sp>
         <p:nvSpPr>
@@ -14189,7 +14879,7 @@
           <a:bodyPr wrap="square" rtlCol="0" anchor="ctr"/>
           <a:lstStyle/>
           <a:p>
-            <a:pPr algn="ctr" indent="0" marL="0">
+            <a:pPr marL="0" indent="0" algn="ctr">
               <a:buNone/>
             </a:pPr>
             <a:r>
@@ -14225,7 +14915,7 @@
           <a:bodyPr wrap="square" rtlCol="0" anchor="ctr"/>
           <a:lstStyle/>
           <a:p>
-            <a:pPr algn="ctr" indent="0" marL="0">
+            <a:pPr marL="0" indent="0" algn="ctr">
               <a:buNone/>
             </a:pPr>
             <a:r>
@@ -14242,7 +14932,7 @@
             <a:endParaRPr lang="en-US" sz="1200" dirty="0"/>
           </a:p>
           <a:p>
-            <a:pPr algn="ctr" indent="0" marL="0">
+            <a:pPr marL="0" indent="0" algn="ctr">
               <a:buNone/>
             </a:pPr>
             <a:r>
@@ -14286,6 +14976,13 @@
             <a:prstDash val="solid"/>
           </a:ln>
         </p:spPr>
+        <p:txBody>
+          <a:bodyPr/>
+          <a:lstStyle/>
+          <a:p>
+            <a:endParaRPr lang="en-US"/>
+          </a:p>
+        </p:txBody>
       </p:sp>
       <p:sp>
         <p:nvSpPr>
@@ -14308,7 +15005,7 @@
           <a:bodyPr wrap="square" rtlCol="0" anchor="ctr"/>
           <a:lstStyle/>
           <a:p>
-            <a:pPr algn="ctr" indent="0" marL="0">
+            <a:pPr marL="0" indent="0" algn="ctr">
               <a:buNone/>
             </a:pPr>
             <a:r>
@@ -14344,7 +15041,7 @@
           <a:bodyPr wrap="square" rtlCol="0" anchor="ctr"/>
           <a:lstStyle/>
           <a:p>
-            <a:pPr indent="0" marL="0">
+            <a:pPr marL="0" indent="0">
               <a:buNone/>
             </a:pPr>
             <a:r>
@@ -14361,7 +15058,7 @@
             <a:endParaRPr lang="en-US" sz="1300" dirty="0"/>
           </a:p>
           <a:p>
-            <a:pPr indent="0" marL="0">
+            <a:pPr marL="0" indent="0">
               <a:buNone/>
             </a:pPr>
             <a:r>
@@ -14400,9 +15097,7 @@
           <a:bodyPr wrap="square" rtlCol="0" anchor="ctr"/>
           <a:lstStyle/>
           <a:p>
-            <a:pPr algn="ctr" indent="0" marL="0">
-              <a:buNone/>
-            </a:pPr>
+            <a:pPr algn="ctr"/>
             <a:r>
               <a:rPr lang="en-US" dirty="0">
                 <a:solidFill>
@@ -14412,7 +15107,18 @@
                 <a:ea typeface="Arial" pitchFamily="34" charset="-122"/>
                 <a:cs typeface="Arial" pitchFamily="34" charset="-120"/>
               </a:rPr>
-              <a:t>MVP operacional · No dispositivo médico · Datos ficticios</a:t>
+              <a:t>MVP operacional · No dispositivo médico · Datos </a:t>
+            </a:r>
+            <a:r>
+              <a:rPr lang="en-US" dirty="0" err="1">
+                <a:solidFill>
+                  <a:srgbClr val="718096"/>
+                </a:solidFill>
+                <a:latin typeface="Arial" pitchFamily="34" charset="0"/>
+                <a:ea typeface="Arial" pitchFamily="34" charset="-122"/>
+                <a:cs typeface="Arial" pitchFamily="34" charset="-120"/>
+              </a:rPr>
+              <a:t>sintéticos</a:t>
             </a:r>
             <a:endParaRPr lang="en-US" dirty="0"/>
           </a:p>
@@ -14467,6 +15173,13 @@
             <a:prstDash val="solid"/>
           </a:ln>
         </p:spPr>
+        <p:txBody>
+          <a:bodyPr/>
+          <a:lstStyle/>
+          <a:p>
+            <a:endParaRPr lang="en-US"/>
+          </a:p>
+        </p:txBody>
       </p:sp>
       <p:sp>
         <p:nvSpPr>
@@ -14496,6 +15209,13 @@
             <a:prstDash val="solid"/>
           </a:ln>
         </p:spPr>
+        <p:txBody>
+          <a:bodyPr/>
+          <a:lstStyle/>
+          <a:p>
+            <a:endParaRPr lang="en-US"/>
+          </a:p>
+        </p:txBody>
       </p:sp>
       <p:sp>
         <p:nvSpPr>
@@ -14525,6 +15245,13 @@
             <a:prstDash val="solid"/>
           </a:ln>
         </p:spPr>
+        <p:txBody>
+          <a:bodyPr/>
+          <a:lstStyle/>
+          <a:p>
+            <a:endParaRPr lang="en-US"/>
+          </a:p>
+        </p:txBody>
       </p:sp>
       <p:sp>
         <p:nvSpPr>
@@ -14550,6 +15277,13 @@
             <a:prstDash val="solid"/>
           </a:ln>
         </p:spPr>
+        <p:txBody>
+          <a:bodyPr/>
+          <a:lstStyle/>
+          <a:p>
+            <a:endParaRPr lang="en-US"/>
+          </a:p>
+        </p:txBody>
       </p:sp>
       <p:sp>
         <p:nvSpPr>
@@ -14575,6 +15309,13 @@
             <a:prstDash val="solid"/>
           </a:ln>
         </p:spPr>
+        <p:txBody>
+          <a:bodyPr/>
+          <a:lstStyle/>
+          <a:p>
+            <a:endParaRPr lang="en-US"/>
+          </a:p>
+        </p:txBody>
       </p:sp>
       <p:sp>
         <p:nvSpPr>
@@ -14597,7 +15338,7 @@
           <a:bodyPr wrap="square" rtlCol="0" anchor="ctr"/>
           <a:lstStyle/>
           <a:p>
-            <a:pPr indent="0" marL="0">
+            <a:pPr marL="0" indent="0">
               <a:buNone/>
             </a:pPr>
             <a:r>
@@ -14609,7 +15350,51 @@
                 <a:ea typeface="Arial" pitchFamily="34" charset="-122"/>
                 <a:cs typeface="Arial" pitchFamily="34" charset="-120"/>
               </a:rPr>
-              <a:t>🗂️  Fallo administrativo</a:t>
+              <a:t>🗂️  El </a:t>
+            </a:r>
+            <a:r>
+              <a:rPr lang="en-US" b="1" dirty="0" err="1">
+                <a:solidFill>
+                  <a:srgbClr val="2D3748"/>
+                </a:solidFill>
+                <a:latin typeface="Arial" pitchFamily="34" charset="0"/>
+                <a:ea typeface="Arial" pitchFamily="34" charset="-122"/>
+                <a:cs typeface="Arial" pitchFamily="34" charset="-120"/>
+              </a:rPr>
+              <a:t>problema</a:t>
+            </a:r>
+            <a:r>
+              <a:rPr lang="en-US" b="1" dirty="0">
+                <a:solidFill>
+                  <a:srgbClr val="2D3748"/>
+                </a:solidFill>
+                <a:latin typeface="Arial" pitchFamily="34" charset="0"/>
+                <a:ea typeface="Arial" pitchFamily="34" charset="-122"/>
+                <a:cs typeface="Arial" pitchFamily="34" charset="-120"/>
+              </a:rPr>
+              <a:t> de la </a:t>
+            </a:r>
+            <a:r>
+              <a:rPr lang="en-US" b="1" dirty="0" err="1">
+                <a:solidFill>
+                  <a:srgbClr val="2D3748"/>
+                </a:solidFill>
+                <a:latin typeface="Arial" pitchFamily="34" charset="0"/>
+                <a:ea typeface="Arial" pitchFamily="34" charset="-122"/>
+                <a:cs typeface="Arial" pitchFamily="34" charset="-120"/>
+              </a:rPr>
+              <a:t>situación</a:t>
+            </a:r>
+            <a:r>
+              <a:rPr lang="en-US" b="1" dirty="0">
+                <a:solidFill>
+                  <a:srgbClr val="2D3748"/>
+                </a:solidFill>
+                <a:latin typeface="Arial" pitchFamily="34" charset="0"/>
+                <a:ea typeface="Arial" pitchFamily="34" charset="-122"/>
+                <a:cs typeface="Arial" pitchFamily="34" charset="-120"/>
+              </a:rPr>
+              <a:t> administrativo</a:t>
             </a:r>
             <a:endParaRPr lang="en-US" dirty="0"/>
           </a:p>
@@ -14636,7 +15421,7 @@
           <a:bodyPr wrap="square" rtlCol="0" anchor="ctr"/>
           <a:lstStyle/>
           <a:p>
-            <a:pPr indent="0" marL="0">
+            <a:pPr marL="0" indent="0">
               <a:buNone/>
             </a:pPr>
             <a:r>
@@ -14676,6 +15461,13 @@
             <a:prstDash val="solid"/>
           </a:ln>
         </p:spPr>
+        <p:txBody>
+          <a:bodyPr/>
+          <a:lstStyle/>
+          <a:p>
+            <a:endParaRPr lang="en-US"/>
+          </a:p>
+        </p:txBody>
       </p:sp>
       <p:sp>
         <p:nvSpPr>
@@ -14703,6 +15495,13 @@
             <a:prstDash val="solid"/>
           </a:ln>
         </p:spPr>
+        <p:txBody>
+          <a:bodyPr/>
+          <a:lstStyle/>
+          <a:p>
+            <a:endParaRPr lang="en-US"/>
+          </a:p>
+        </p:txBody>
       </p:sp>
       <p:sp>
         <p:nvSpPr>
@@ -14725,7 +15524,7 @@
           <a:bodyPr wrap="square" rtlCol="0" anchor="ctr"/>
           <a:lstStyle/>
           <a:p>
-            <a:pPr algn="ctr" indent="0" marL="0">
+            <a:pPr marL="0" indent="0" algn="ctr">
               <a:buNone/>
             </a:pPr>
             <a:r>
@@ -14761,7 +15560,7 @@
           <a:bodyPr wrap="square" rtlCol="0" anchor="ctr"/>
           <a:lstStyle/>
           <a:p>
-            <a:pPr indent="0" marL="0">
+            <a:pPr marL="0" indent="0">
               <a:buNone/>
             </a:pPr>
             <a:r>
@@ -14800,7 +15599,7 @@
           <a:bodyPr wrap="square" rtlCol="0" anchor="ctr"/>
           <a:lstStyle/>
           <a:p>
-            <a:pPr indent="0" marL="0">
+            <a:pPr marL="0" indent="0">
               <a:buNone/>
             </a:pPr>
             <a:r>
@@ -14844,6 +15643,13 @@
             <a:prstDash val="solid"/>
           </a:ln>
         </p:spPr>
+        <p:txBody>
+          <a:bodyPr/>
+          <a:lstStyle/>
+          <a:p>
+            <a:endParaRPr lang="en-US"/>
+          </a:p>
+        </p:txBody>
       </p:sp>
       <p:sp>
         <p:nvSpPr>
@@ -14866,7 +15672,7 @@
           <a:bodyPr wrap="square" rtlCol="0" anchor="ctr"/>
           <a:lstStyle/>
           <a:p>
-            <a:pPr algn="ctr" indent="0" marL="0">
+            <a:pPr marL="0" indent="0" algn="ctr">
               <a:buNone/>
             </a:pPr>
             <a:r>
@@ -14902,7 +15708,7 @@
           <a:bodyPr wrap="square" rtlCol="0" anchor="ctr"/>
           <a:lstStyle/>
           <a:p>
-            <a:pPr indent="0" marL="0">
+            <a:pPr marL="0" indent="0">
               <a:buNone/>
             </a:pPr>
             <a:r>
@@ -14941,7 +15747,7 @@
           <a:bodyPr wrap="square" rtlCol="0" anchor="ctr"/>
           <a:lstStyle/>
           <a:p>
-            <a:pPr indent="0" marL="0">
+            <a:pPr marL="0" indent="0">
               <a:buNone/>
             </a:pPr>
             <a:r>
@@ -14985,6 +15791,13 @@
             <a:prstDash val="solid"/>
           </a:ln>
         </p:spPr>
+        <p:txBody>
+          <a:bodyPr/>
+          <a:lstStyle/>
+          <a:p>
+            <a:endParaRPr lang="en-US"/>
+          </a:p>
+        </p:txBody>
       </p:sp>
       <p:sp>
         <p:nvSpPr>
@@ -15007,7 +15820,7 @@
           <a:bodyPr wrap="square" rtlCol="0" anchor="ctr"/>
           <a:lstStyle/>
           <a:p>
-            <a:pPr algn="ctr" indent="0" marL="0">
+            <a:pPr marL="0" indent="0" algn="ctr">
               <a:buNone/>
             </a:pPr>
             <a:r>
@@ -15043,7 +15856,7 @@
           <a:bodyPr wrap="square" rtlCol="0" anchor="ctr"/>
           <a:lstStyle/>
           <a:p>
-            <a:pPr indent="0" marL="0">
+            <a:pPr marL="0" indent="0">
               <a:buNone/>
             </a:pPr>
             <a:r>
@@ -15082,7 +15895,7 @@
           <a:bodyPr wrap="square" rtlCol="0" anchor="ctr"/>
           <a:lstStyle/>
           <a:p>
-            <a:pPr indent="0" marL="0">
+            <a:pPr marL="0" indent="0">
               <a:buNone/>
             </a:pPr>
             <a:r>
@@ -15121,7 +15934,7 @@
           <a:bodyPr wrap="square" rtlCol="0" anchor="ctr"/>
           <a:lstStyle/>
           <a:p>
-            <a:pPr algn="ctr" indent="0" marL="0">
+            <a:pPr marL="0" indent="0" algn="ctr">
               <a:buNone/>
             </a:pPr>
             <a:r>
@@ -15160,9 +15973,7 @@
           <a:bodyPr wrap="square" rtlCol="0" anchor="ctr"/>
           <a:lstStyle/>
           <a:p>
-            <a:pPr algn="ctr" indent="0" marL="0">
-              <a:buNone/>
-            </a:pPr>
+            <a:pPr algn="ctr"/>
             <a:r>
               <a:rPr lang="en-US" dirty="0">
                 <a:solidFill>
@@ -15172,7 +15983,18 @@
                 <a:ea typeface="Arial" pitchFamily="34" charset="-122"/>
                 <a:cs typeface="Arial" pitchFamily="34" charset="-120"/>
               </a:rPr>
-              <a:t>MVP operacional · No dispositivo médico · Datos ficticios</a:t>
+              <a:t>MVP operacional · No dispositivo médico · Datos </a:t>
+            </a:r>
+            <a:r>
+              <a:rPr lang="en-US" dirty="0" err="1">
+                <a:solidFill>
+                  <a:srgbClr val="718096"/>
+                </a:solidFill>
+                <a:latin typeface="Arial" pitchFamily="34" charset="0"/>
+                <a:ea typeface="Arial" pitchFamily="34" charset="-122"/>
+                <a:cs typeface="Arial" pitchFamily="34" charset="-120"/>
+              </a:rPr>
+              <a:t>sintéticos</a:t>
             </a:r>
             <a:endParaRPr lang="en-US" dirty="0"/>
           </a:p>
@@ -15227,6 +16049,13 @@
             <a:prstDash val="solid"/>
           </a:ln>
         </p:spPr>
+        <p:txBody>
+          <a:bodyPr/>
+          <a:lstStyle/>
+          <a:p>
+            <a:endParaRPr lang="en-US"/>
+          </a:p>
+        </p:txBody>
       </p:sp>
       <p:sp>
         <p:nvSpPr>
@@ -15256,6 +16085,13 @@
             <a:prstDash val="solid"/>
           </a:ln>
         </p:spPr>
+        <p:txBody>
+          <a:bodyPr/>
+          <a:lstStyle/>
+          <a:p>
+            <a:endParaRPr lang="en-US"/>
+          </a:p>
+        </p:txBody>
       </p:sp>
       <p:sp>
         <p:nvSpPr>
@@ -15285,6 +16121,13 @@
             <a:prstDash val="solid"/>
           </a:ln>
         </p:spPr>
+        <p:txBody>
+          <a:bodyPr/>
+          <a:lstStyle/>
+          <a:p>
+            <a:endParaRPr lang="en-US"/>
+          </a:p>
+        </p:txBody>
       </p:sp>
       <p:sp>
         <p:nvSpPr>
@@ -15314,6 +16157,13 @@
             <a:prstDash val="solid"/>
           </a:ln>
         </p:spPr>
+        <p:txBody>
+          <a:bodyPr/>
+          <a:lstStyle/>
+          <a:p>
+            <a:endParaRPr lang="en-US"/>
+          </a:p>
+        </p:txBody>
       </p:sp>
       <p:sp>
         <p:nvSpPr>
@@ -15339,6 +16189,13 @@
             <a:prstDash val="solid"/>
           </a:ln>
         </p:spPr>
+        <p:txBody>
+          <a:bodyPr/>
+          <a:lstStyle/>
+          <a:p>
+            <a:endParaRPr lang="en-US"/>
+          </a:p>
+        </p:txBody>
       </p:sp>
       <p:sp>
         <p:nvSpPr>
@@ -15364,6 +16221,13 @@
             <a:prstDash val="solid"/>
           </a:ln>
         </p:spPr>
+        <p:txBody>
+          <a:bodyPr/>
+          <a:lstStyle/>
+          <a:p>
+            <a:endParaRPr lang="en-US"/>
+          </a:p>
+        </p:txBody>
       </p:sp>
       <p:sp>
         <p:nvSpPr>
@@ -15386,7 +16250,7 @@
           <a:bodyPr wrap="square" rtlCol="0" anchor="ctr"/>
           <a:lstStyle/>
           <a:p>
-            <a:pPr indent="0" marL="0">
+            <a:pPr marL="0" indent="0">
               <a:buNone/>
             </a:pPr>
             <a:r>
@@ -15425,7 +16289,7 @@
           <a:bodyPr wrap="square" rtlCol="0" anchor="ctr"/>
           <a:lstStyle/>
           <a:p>
-            <a:pPr indent="0" marL="0">
+            <a:pPr marL="0" indent="0">
               <a:buNone/>
             </a:pPr>
             <a:r>
@@ -15465,6 +16329,13 @@
             <a:prstDash val="solid"/>
           </a:ln>
         </p:spPr>
+        <p:txBody>
+          <a:bodyPr/>
+          <a:lstStyle/>
+          <a:p>
+            <a:endParaRPr lang="en-US"/>
+          </a:p>
+        </p:txBody>
       </p:sp>
       <p:sp>
         <p:nvSpPr>
@@ -15492,6 +16363,13 @@
             <a:prstDash val="solid"/>
           </a:ln>
         </p:spPr>
+        <p:txBody>
+          <a:bodyPr/>
+          <a:lstStyle/>
+          <a:p>
+            <a:endParaRPr lang="en-US"/>
+          </a:p>
+        </p:txBody>
       </p:sp>
       <p:sp>
         <p:nvSpPr>
@@ -15514,7 +16392,7 @@
           <a:bodyPr wrap="square" rtlCol="0" anchor="ctr"/>
           <a:lstStyle/>
           <a:p>
-            <a:pPr algn="ctr" indent="0" marL="0">
+            <a:pPr marL="0" indent="0" algn="ctr">
               <a:buNone/>
             </a:pPr>
             <a:r>
@@ -15550,7 +16428,7 @@
           <a:bodyPr wrap="square" rtlCol="0" anchor="ctr"/>
           <a:lstStyle/>
           <a:p>
-            <a:pPr indent="0" marL="0">
+            <a:pPr marL="0" indent="0">
               <a:buNone/>
             </a:pPr>
             <a:r>
@@ -15589,7 +16467,7 @@
           <a:bodyPr wrap="square" rtlCol="0" anchor="ctr"/>
           <a:lstStyle/>
           <a:p>
-            <a:pPr indent="0" marL="0">
+            <a:pPr marL="0" indent="0">
               <a:buNone/>
             </a:pPr>
             <a:r>
@@ -15633,6 +16511,13 @@
             <a:prstDash val="solid"/>
           </a:ln>
         </p:spPr>
+        <p:txBody>
+          <a:bodyPr/>
+          <a:lstStyle/>
+          <a:p>
+            <a:endParaRPr lang="en-US"/>
+          </a:p>
+        </p:txBody>
       </p:sp>
       <p:sp>
         <p:nvSpPr>
@@ -15655,7 +16540,7 @@
           <a:bodyPr wrap="square" rtlCol="0" anchor="ctr"/>
           <a:lstStyle/>
           <a:p>
-            <a:pPr algn="ctr" indent="0" marL="0">
+            <a:pPr marL="0" indent="0" algn="ctr">
               <a:buNone/>
             </a:pPr>
             <a:r>
@@ -15691,7 +16576,7 @@
           <a:bodyPr wrap="square" rtlCol="0" anchor="ctr"/>
           <a:lstStyle/>
           <a:p>
-            <a:pPr indent="0" marL="0">
+            <a:pPr marL="0" indent="0">
               <a:buNone/>
             </a:pPr>
             <a:r>
@@ -15730,7 +16615,7 @@
           <a:bodyPr wrap="square" rtlCol="0" anchor="ctr"/>
           <a:lstStyle/>
           <a:p>
-            <a:pPr indent="0" marL="0">
+            <a:pPr marL="0" indent="0">
               <a:buNone/>
             </a:pPr>
             <a:r>
@@ -15774,6 +16659,13 @@
             <a:prstDash val="solid"/>
           </a:ln>
         </p:spPr>
+        <p:txBody>
+          <a:bodyPr/>
+          <a:lstStyle/>
+          <a:p>
+            <a:endParaRPr lang="en-US"/>
+          </a:p>
+        </p:txBody>
       </p:sp>
       <p:sp>
         <p:nvSpPr>
@@ -15796,7 +16688,7 @@
           <a:bodyPr wrap="square" rtlCol="0" anchor="ctr"/>
           <a:lstStyle/>
           <a:p>
-            <a:pPr algn="ctr" indent="0" marL="0">
+            <a:pPr marL="0" indent="0" algn="ctr">
               <a:buNone/>
             </a:pPr>
             <a:r>
@@ -15832,7 +16724,7 @@
           <a:bodyPr wrap="square" rtlCol="0" anchor="ctr"/>
           <a:lstStyle/>
           <a:p>
-            <a:pPr indent="0" marL="0">
+            <a:pPr marL="0" indent="0">
               <a:buNone/>
             </a:pPr>
             <a:r>
@@ -15871,7 +16763,7 @@
           <a:bodyPr wrap="square" rtlCol="0" anchor="ctr"/>
           <a:lstStyle/>
           <a:p>
-            <a:pPr indent="0" marL="0">
+            <a:pPr marL="0" indent="0">
               <a:buNone/>
             </a:pPr>
             <a:r>
@@ -15910,7 +16802,7 @@
           <a:bodyPr wrap="square" rtlCol="0" anchor="ctr"/>
           <a:lstStyle/>
           <a:p>
-            <a:pPr algn="l" indent="0" marL="0">
+            <a:pPr marL="0" indent="0" algn="l">
               <a:buNone/>
             </a:pPr>
             <a:r>
@@ -15955,31 +16847,6 @@
       </p:grpSpPr>
       <p:sp>
         <p:nvSpPr>
-          <p:cNvPr id="2" name="Shape 0"/>
-          <p:cNvSpPr/>
-          <p:nvPr/>
-        </p:nvSpPr>
-        <p:spPr>
-          <a:xfrm>
-            <a:off x="0" y="0"/>
-            <a:ext cx="12192000" cy="6858000"/>
-          </a:xfrm>
-          <a:prstGeom prst="rect">
-            <a:avLst/>
-          </a:prstGeom>
-          <a:solidFill>
-            <a:srgbClr val="FAFAF8"/>
-          </a:solidFill>
-          <a:ln w="12700">
-            <a:solidFill>
-              <a:srgbClr val="FAFAF8"/>
-            </a:solidFill>
-            <a:prstDash val="solid"/>
-          </a:ln>
-        </p:spPr>
-      </p:sp>
-      <p:sp>
-        <p:nvSpPr>
           <p:cNvPr id="3" name="Shape 1"/>
           <p:cNvSpPr/>
           <p:nvPr/>
@@ -16006,6 +16873,13 @@
             <a:prstDash val="solid"/>
           </a:ln>
         </p:spPr>
+        <p:txBody>
+          <a:bodyPr/>
+          <a:lstStyle/>
+          <a:p>
+            <a:endParaRPr lang="en-US"/>
+          </a:p>
+        </p:txBody>
       </p:sp>
       <p:sp>
         <p:nvSpPr>
@@ -16035,6 +16909,13 @@
             <a:prstDash val="solid"/>
           </a:ln>
         </p:spPr>
+        <p:txBody>
+          <a:bodyPr/>
+          <a:lstStyle/>
+          <a:p>
+            <a:endParaRPr lang="en-US"/>
+          </a:p>
+        </p:txBody>
       </p:sp>
       <p:sp>
         <p:nvSpPr>
@@ -16060,6 +16941,13 @@
             <a:prstDash val="solid"/>
           </a:ln>
         </p:spPr>
+        <p:txBody>
+          <a:bodyPr/>
+          <a:lstStyle/>
+          <a:p>
+            <a:endParaRPr lang="en-US"/>
+          </a:p>
+        </p:txBody>
       </p:sp>
       <p:sp>
         <p:nvSpPr>
@@ -16085,6 +16973,13 @@
             <a:prstDash val="solid"/>
           </a:ln>
         </p:spPr>
+        <p:txBody>
+          <a:bodyPr/>
+          <a:lstStyle/>
+          <a:p>
+            <a:endParaRPr lang="en-US"/>
+          </a:p>
+        </p:txBody>
       </p:sp>
       <p:sp>
         <p:nvSpPr>
@@ -16107,7 +17002,7 @@
           <a:bodyPr wrap="square" rtlCol="0" anchor="ctr"/>
           <a:lstStyle/>
           <a:p>
-            <a:pPr indent="0" marL="0">
+            <a:pPr marL="0" indent="0">
               <a:buNone/>
             </a:pPr>
             <a:r>
@@ -16146,7 +17041,7 @@
           <a:bodyPr wrap="square" rtlCol="0" anchor="ctr"/>
           <a:lstStyle/>
           <a:p>
-            <a:pPr indent="0" marL="0">
+            <a:pPr marL="0" indent="0">
               <a:buNone/>
             </a:pPr>
             <a:r>
@@ -16186,6 +17081,13 @@
             <a:prstDash val="solid"/>
           </a:ln>
         </p:spPr>
+        <p:txBody>
+          <a:bodyPr/>
+          <a:lstStyle/>
+          <a:p>
+            <a:endParaRPr lang="en-US"/>
+          </a:p>
+        </p:txBody>
       </p:sp>
       <p:sp>
         <p:nvSpPr>
@@ -16196,7 +17098,7 @@
         <p:spPr>
           <a:xfrm>
             <a:off x="457200" y="1261872"/>
-            <a:ext cx="3977640" cy="3474720"/>
+            <a:ext cx="3977640" cy="978408"/>
           </a:xfrm>
           <a:prstGeom prst="roundRect">
             <a:avLst>
@@ -16204,7 +17106,10 @@
             </a:avLst>
           </a:prstGeom>
           <a:solidFill>
-            <a:srgbClr val="EFF6FF"/>
+            <a:schemeClr val="accent2">
+              <a:lumMod val="20000"/>
+              <a:lumOff val="80000"/>
+            </a:schemeClr>
           </a:solidFill>
           <a:ln w="6350">
             <a:solidFill>
@@ -16213,6 +17118,13 @@
             <a:prstDash val="solid"/>
           </a:ln>
         </p:spPr>
+        <p:txBody>
+          <a:bodyPr/>
+          <a:lstStyle/>
+          <a:p>
+            <a:endParaRPr lang="en-US"/>
+          </a:p>
+        </p:txBody>
       </p:sp>
       <p:sp>
         <p:nvSpPr>
@@ -16235,7 +17147,7 @@
           <a:bodyPr wrap="square" rtlCol="0" anchor="ctr"/>
           <a:lstStyle/>
           <a:p>
-            <a:pPr indent="0" marL="0">
+            <a:pPr marL="0" indent="0">
               <a:buNone/>
             </a:pPr>
             <a:r>
@@ -16275,6 +17187,13 @@
             <a:prstDash val="solid"/>
           </a:ln>
         </p:spPr>
+        <p:txBody>
+          <a:bodyPr/>
+          <a:lstStyle/>
+          <a:p>
+            <a:endParaRPr lang="en-US"/>
+          </a:p>
+        </p:txBody>
       </p:sp>
       <p:sp>
         <p:nvSpPr>
@@ -16297,7 +17216,7 @@
           <a:bodyPr wrap="square" rtlCol="0" anchor="ctr"/>
           <a:lstStyle/>
           <a:p>
-            <a:pPr indent="0" marL="0">
+            <a:pPr marL="0" indent="0">
               <a:buNone/>
             </a:pPr>
             <a:r>
@@ -16317,290 +17236,14 @@
       </p:sp>
       <p:sp>
         <p:nvSpPr>
-          <p:cNvPr id="14" name="Text 12"/>
-          <p:cNvSpPr/>
-          <p:nvPr/>
-        </p:nvSpPr>
-        <p:spPr>
-          <a:xfrm>
-            <a:off x="640080" y="2331720"/>
-            <a:ext cx="548640" cy="457200"/>
-          </a:xfrm>
-          <a:prstGeom prst="rect">
-            <a:avLst/>
-          </a:prstGeom>
-          <a:noFill/>
-          <a:ln/>
-        </p:spPr>
-        <p:txBody>
-          <a:bodyPr wrap="square" rtlCol="0" anchor="ctr"/>
-          <a:lstStyle/>
-          <a:p>
-            <a:pPr algn="ctr" indent="0" marL="0">
-              <a:buNone/>
-            </a:pPr>
-            <a:r>
-              <a:rPr lang="en-US" sz="2200" dirty="0">
-                <a:solidFill>
-                  <a:srgbClr val="000000"/>
-                </a:solidFill>
-              </a:rPr>
-              <a:t>⏱️</a:t>
-            </a:r>
-            <a:endParaRPr lang="en-US" sz="2200" dirty="0"/>
-          </a:p>
-        </p:txBody>
-      </p:sp>
-      <p:sp>
-        <p:nvSpPr>
-          <p:cNvPr id="15" name="Text 13"/>
-          <p:cNvSpPr/>
-          <p:nvPr/>
-        </p:nvSpPr>
-        <p:spPr>
-          <a:xfrm>
-            <a:off x="1234440" y="2331720"/>
-            <a:ext cx="3063240" cy="594360"/>
-          </a:xfrm>
-          <a:prstGeom prst="rect">
-            <a:avLst/>
-          </a:prstGeom>
-          <a:noFill/>
-          <a:ln/>
-        </p:spPr>
-        <p:txBody>
-          <a:bodyPr wrap="square" rtlCol="0" anchor="ctr"/>
-          <a:lstStyle/>
-          <a:p>
-            <a:pPr indent="0" marL="0">
-              <a:buNone/>
-            </a:pPr>
-            <a:r>
-              <a:rPr lang="en-US" sz="1300" dirty="0">
-                <a:solidFill>
-                  <a:srgbClr val="2D3748"/>
-                </a:solidFill>
-                <a:latin typeface="Arial" pitchFamily="34" charset="0"/>
-                <a:ea typeface="Arial" pitchFamily="34" charset="-122"/>
-                <a:cs typeface="Arial" pitchFamily="34" charset="-120"/>
-              </a:rPr>
-              <a:t>Detecta automáticamente</a:t>
-            </a:r>
-            <a:endParaRPr lang="en-US" sz="1300" dirty="0"/>
-          </a:p>
-          <a:p>
-            <a:pPr indent="0" marL="0">
-              <a:buNone/>
-            </a:pPr>
-            <a:r>
-              <a:rPr lang="en-US" sz="1300" dirty="0">
-                <a:solidFill>
-                  <a:srgbClr val="2D3748"/>
-                </a:solidFill>
-                <a:latin typeface="Arial" pitchFamily="34" charset="0"/>
-                <a:ea typeface="Arial" pitchFamily="34" charset="-122"/>
-                <a:cs typeface="Arial" pitchFamily="34" charset="-120"/>
-              </a:rPr>
-              <a:t>cuando una ronda no ocurre</a:t>
-            </a:r>
-            <a:endParaRPr lang="en-US" sz="1300" dirty="0"/>
-          </a:p>
-        </p:txBody>
-      </p:sp>
-      <p:sp>
-        <p:nvSpPr>
-          <p:cNvPr id="16" name="Text 14"/>
-          <p:cNvSpPr/>
-          <p:nvPr/>
-        </p:nvSpPr>
-        <p:spPr>
-          <a:xfrm>
-            <a:off x="640080" y="3017520"/>
-            <a:ext cx="548640" cy="457200"/>
-          </a:xfrm>
-          <a:prstGeom prst="rect">
-            <a:avLst/>
-          </a:prstGeom>
-          <a:noFill/>
-          <a:ln/>
-        </p:spPr>
-        <p:txBody>
-          <a:bodyPr wrap="square" rtlCol="0" anchor="ctr"/>
-          <a:lstStyle/>
-          <a:p>
-            <a:pPr algn="ctr" indent="0" marL="0">
-              <a:buNone/>
-            </a:pPr>
-            <a:r>
-              <a:rPr lang="en-US" sz="2200" dirty="0">
-                <a:solidFill>
-                  <a:srgbClr val="000000"/>
-                </a:solidFill>
-              </a:rPr>
-              <a:t>🔔</a:t>
-            </a:r>
-            <a:endParaRPr lang="en-US" sz="2200" dirty="0"/>
-          </a:p>
-        </p:txBody>
-      </p:sp>
-      <p:sp>
-        <p:nvSpPr>
-          <p:cNvPr id="17" name="Text 15"/>
-          <p:cNvSpPr/>
-          <p:nvPr/>
-        </p:nvSpPr>
-        <p:spPr>
-          <a:xfrm>
-            <a:off x="1234440" y="3017520"/>
-            <a:ext cx="3063240" cy="594360"/>
-          </a:xfrm>
-          <a:prstGeom prst="rect">
-            <a:avLst/>
-          </a:prstGeom>
-          <a:noFill/>
-          <a:ln/>
-        </p:spPr>
-        <p:txBody>
-          <a:bodyPr wrap="square" rtlCol="0" anchor="ctr"/>
-          <a:lstStyle/>
-          <a:p>
-            <a:pPr indent="0" marL="0">
-              <a:buNone/>
-            </a:pPr>
-            <a:r>
-              <a:rPr lang="en-US" sz="1300" dirty="0">
-                <a:solidFill>
-                  <a:srgbClr val="2D3748"/>
-                </a:solidFill>
-                <a:latin typeface="Arial" pitchFamily="34" charset="0"/>
-                <a:ea typeface="Arial" pitchFamily="34" charset="-122"/>
-                <a:cs typeface="Arial" pitchFamily="34" charset="-120"/>
-              </a:rPr>
-              <a:t>Alerta al supervisor</a:t>
-            </a:r>
-            <a:endParaRPr lang="en-US" sz="1300" dirty="0"/>
-          </a:p>
-          <a:p>
-            <a:pPr indent="0" marL="0">
-              <a:buNone/>
-            </a:pPr>
-            <a:r>
-              <a:rPr lang="en-US" sz="1300" dirty="0">
-                <a:solidFill>
-                  <a:srgbClr val="2D3748"/>
-                </a:solidFill>
-                <a:latin typeface="Arial" pitchFamily="34" charset="0"/>
-                <a:ea typeface="Arial" pitchFamily="34" charset="-122"/>
-                <a:cs typeface="Arial" pitchFamily="34" charset="-120"/>
-              </a:rPr>
-              <a:t>en tiempo real</a:t>
-            </a:r>
-            <a:endParaRPr lang="en-US" sz="1300" dirty="0"/>
-          </a:p>
-        </p:txBody>
-      </p:sp>
-      <p:sp>
-        <p:nvSpPr>
-          <p:cNvPr id="18" name="Text 16"/>
-          <p:cNvSpPr/>
-          <p:nvPr/>
-        </p:nvSpPr>
-        <p:spPr>
-          <a:xfrm>
-            <a:off x="640080" y="3703320"/>
-            <a:ext cx="548640" cy="457200"/>
-          </a:xfrm>
-          <a:prstGeom prst="rect">
-            <a:avLst/>
-          </a:prstGeom>
-          <a:noFill/>
-          <a:ln/>
-        </p:spPr>
-        <p:txBody>
-          <a:bodyPr wrap="square" rtlCol="0" anchor="ctr"/>
-          <a:lstStyle/>
-          <a:p>
-            <a:pPr algn="ctr" indent="0" marL="0">
-              <a:buNone/>
-            </a:pPr>
-            <a:r>
-              <a:rPr lang="en-US" sz="2200" dirty="0">
-                <a:solidFill>
-                  <a:srgbClr val="000000"/>
-                </a:solidFill>
-              </a:rPr>
-              <a:t>👤</a:t>
-            </a:r>
-            <a:endParaRPr lang="en-US" sz="2200" dirty="0"/>
-          </a:p>
-        </p:txBody>
-      </p:sp>
-      <p:sp>
-        <p:nvSpPr>
-          <p:cNvPr id="19" name="Text 17"/>
-          <p:cNvSpPr/>
-          <p:nvPr/>
-        </p:nvSpPr>
-        <p:spPr>
-          <a:xfrm>
-            <a:off x="1234440" y="3703320"/>
-            <a:ext cx="3063240" cy="594360"/>
-          </a:xfrm>
-          <a:prstGeom prst="rect">
-            <a:avLst/>
-          </a:prstGeom>
-          <a:noFill/>
-          <a:ln/>
-        </p:spPr>
-        <p:txBody>
-          <a:bodyPr wrap="square" rtlCol="0" anchor="ctr"/>
-          <a:lstStyle/>
-          <a:p>
-            <a:pPr indent="0" marL="0">
-              <a:buNone/>
-            </a:pPr>
-            <a:r>
-              <a:rPr lang="en-US" sz="1300" dirty="0">
-                <a:solidFill>
-                  <a:srgbClr val="2D3748"/>
-                </a:solidFill>
-                <a:latin typeface="Arial" pitchFamily="34" charset="0"/>
-                <a:ea typeface="Arial" pitchFamily="34" charset="-122"/>
-                <a:cs typeface="Arial" pitchFamily="34" charset="-120"/>
-              </a:rPr>
-              <a:t>Asignación, escalación</a:t>
-            </a:r>
-            <a:endParaRPr lang="en-US" sz="1300" dirty="0"/>
-          </a:p>
-          <a:p>
-            <a:pPr indent="0" marL="0">
-              <a:buNone/>
-            </a:pPr>
-            <a:r>
-              <a:rPr lang="en-US" sz="1300" dirty="0">
-                <a:solidFill>
-                  <a:srgbClr val="2D3748"/>
-                </a:solidFill>
-                <a:latin typeface="Arial" pitchFamily="34" charset="0"/>
-                <a:ea typeface="Arial" pitchFamily="34" charset="-122"/>
-                <a:cs typeface="Arial" pitchFamily="34" charset="-120"/>
-              </a:rPr>
-              <a:t>y seguimiento del cuidador</a:t>
-            </a:r>
-            <a:endParaRPr lang="en-US" sz="1300" dirty="0"/>
-          </a:p>
-        </p:txBody>
-      </p:sp>
-      <p:sp>
-        <p:nvSpPr>
           <p:cNvPr id="20" name="Shape 18"/>
           <p:cNvSpPr/>
           <p:nvPr/>
         </p:nvSpPr>
         <p:spPr>
           <a:xfrm>
-            <a:off x="4846320" y="1261872"/>
-            <a:ext cx="3977640" cy="3474720"/>
+            <a:off x="4732020" y="1266445"/>
+            <a:ext cx="3977640" cy="960120"/>
           </a:xfrm>
           <a:prstGeom prst="roundRect">
             <a:avLst>
@@ -16608,7 +17251,10 @@
             </a:avLst>
           </a:prstGeom>
           <a:solidFill>
-            <a:srgbClr val="F0FDF4"/>
+            <a:schemeClr val="accent2">
+              <a:lumMod val="20000"/>
+              <a:lumOff val="80000"/>
+            </a:schemeClr>
           </a:solidFill>
           <a:ln w="6350">
             <a:solidFill>
@@ -16617,6 +17263,13 @@
             <a:prstDash val="solid"/>
           </a:ln>
         </p:spPr>
+        <p:txBody>
+          <a:bodyPr/>
+          <a:lstStyle/>
+          <a:p>
+            <a:endParaRPr lang="en-US"/>
+          </a:p>
+        </p:txBody>
       </p:sp>
       <p:sp>
         <p:nvSpPr>
@@ -16639,7 +17292,7 @@
           <a:bodyPr wrap="square" rtlCol="0" anchor="ctr"/>
           <a:lstStyle/>
           <a:p>
-            <a:pPr indent="0" marL="0">
+            <a:pPr marL="0" indent="0">
               <a:buNone/>
             </a:pPr>
             <a:r>
@@ -16651,9 +17304,18 @@
                 <a:ea typeface="Arial" pitchFamily="34" charset="-122"/>
                 <a:cs typeface="Arial" pitchFamily="34" charset="-120"/>
               </a:rPr>
-              <a:t>🗂️  Fallo administrativo</a:t>
-            </a:r>
-            <a:endParaRPr lang="en-US" sz="1400" dirty="0"/>
+              <a:t>🗂️  </a:t>
+            </a:r>
+            <a:r>
+              <a:rPr lang="en-US" sz="1400" b="1" dirty="0">
+                <a:solidFill>
+                  <a:srgbClr val="C4786A"/>
+                </a:solidFill>
+                <a:latin typeface="Arial" pitchFamily="34" charset="0"/>
+                <a:cs typeface="Arial" pitchFamily="34" charset="-120"/>
+              </a:rPr>
+              <a:t>Fallo administrativo</a:t>
+            </a:r>
           </a:p>
         </p:txBody>
       </p:sp>
@@ -16679,6 +17341,13 @@
             <a:prstDash val="solid"/>
           </a:ln>
         </p:spPr>
+        <p:txBody>
+          <a:bodyPr/>
+          <a:lstStyle/>
+          <a:p>
+            <a:endParaRPr lang="en-US"/>
+          </a:p>
+        </p:txBody>
       </p:sp>
       <p:sp>
         <p:nvSpPr>
@@ -16701,7 +17370,7 @@
           <a:bodyPr wrap="square" rtlCol="0" anchor="ctr"/>
           <a:lstStyle/>
           <a:p>
-            <a:pPr indent="0" marL="0">
+            <a:pPr marL="0" indent="0">
               <a:buNone/>
             </a:pPr>
             <a:r>
@@ -16721,328 +17390,13 @@
       </p:sp>
       <p:sp>
         <p:nvSpPr>
-          <p:cNvPr id="24" name="Text 22"/>
-          <p:cNvSpPr/>
-          <p:nvPr/>
-        </p:nvSpPr>
-        <p:spPr>
-          <a:xfrm>
-            <a:off x="5029200" y="2331720"/>
-            <a:ext cx="548640" cy="457200"/>
-          </a:xfrm>
-          <a:prstGeom prst="rect">
-            <a:avLst/>
-          </a:prstGeom>
-          <a:noFill/>
-          <a:ln/>
-        </p:spPr>
-        <p:txBody>
-          <a:bodyPr wrap="square" rtlCol="0" anchor="ctr"/>
-          <a:lstStyle/>
-          <a:p>
-            <a:pPr algn="ctr" indent="0" marL="0">
-              <a:buNone/>
-            </a:pPr>
-            <a:r>
-              <a:rPr lang="en-US" sz="2200" dirty="0">
-                <a:solidFill>
-                  <a:srgbClr val="000000"/>
-                </a:solidFill>
-              </a:rPr>
-              <a:t>📋</a:t>
-            </a:r>
-            <a:endParaRPr lang="en-US" sz="2200" dirty="0"/>
-          </a:p>
-        </p:txBody>
-      </p:sp>
-      <p:sp>
-        <p:nvSpPr>
-          <p:cNvPr id="25" name="Text 23"/>
-          <p:cNvSpPr/>
-          <p:nvPr/>
-        </p:nvSpPr>
-        <p:spPr>
-          <a:xfrm>
-            <a:off x="5623560" y="2331720"/>
-            <a:ext cx="3063240" cy="594360"/>
-          </a:xfrm>
-          <a:prstGeom prst="rect">
-            <a:avLst/>
-          </a:prstGeom>
-          <a:noFill/>
-          <a:ln/>
-        </p:spPr>
-        <p:txBody>
-          <a:bodyPr wrap="square" rtlCol="0" anchor="ctr"/>
-          <a:lstStyle/>
-          <a:p>
-            <a:pPr indent="0" marL="0">
-              <a:buNone/>
-            </a:pPr>
-            <a:r>
-              <a:rPr lang="en-US" sz="1300" dirty="0">
-                <a:solidFill>
-                  <a:srgbClr val="2D3748"/>
-                </a:solidFill>
-                <a:latin typeface="Arial" pitchFamily="34" charset="0"/>
-                <a:ea typeface="Arial" pitchFamily="34" charset="-122"/>
-                <a:cs typeface="Arial" pitchFamily="34" charset="-120"/>
-              </a:rPr>
-              <a:t>Bitácora inmutable:</a:t>
-            </a:r>
-            <a:endParaRPr lang="en-US" sz="1300" dirty="0"/>
-          </a:p>
-          <a:p>
-            <a:pPr indent="0" marL="0">
-              <a:buNone/>
-            </a:pPr>
-            <a:r>
-              <a:rPr lang="en-US" sz="1300" dirty="0">
-                <a:solidFill>
-                  <a:srgbClr val="2D3748"/>
-                </a:solidFill>
-                <a:latin typeface="Arial" pitchFamily="34" charset="0"/>
-                <a:ea typeface="Arial" pitchFamily="34" charset="-122"/>
-                <a:cs typeface="Arial" pitchFamily="34" charset="-120"/>
-              </a:rPr>
-              <a:t>quién, cuándo, qué resultado</a:t>
-            </a:r>
-            <a:endParaRPr lang="en-US" sz="1300" dirty="0"/>
-          </a:p>
-        </p:txBody>
-      </p:sp>
-      <p:sp>
-        <p:nvSpPr>
-          <p:cNvPr id="26" name="Text 24"/>
-          <p:cNvSpPr/>
-          <p:nvPr/>
-        </p:nvSpPr>
-        <p:spPr>
-          <a:xfrm>
-            <a:off x="5029200" y="3017520"/>
-            <a:ext cx="548640" cy="457200"/>
-          </a:xfrm>
-          <a:prstGeom prst="rect">
-            <a:avLst/>
-          </a:prstGeom>
-          <a:noFill/>
-          <a:ln/>
-        </p:spPr>
-        <p:txBody>
-          <a:bodyPr wrap="square" rtlCol="0" anchor="ctr"/>
-          <a:lstStyle/>
-          <a:p>
-            <a:pPr algn="ctr" indent="0" marL="0">
-              <a:buNone/>
-            </a:pPr>
-            <a:r>
-              <a:rPr lang="en-US" sz="2200" dirty="0">
-                <a:solidFill>
-                  <a:srgbClr val="000000"/>
-                </a:solidFill>
-              </a:rPr>
-              <a:t>📄</a:t>
-            </a:r>
-            <a:endParaRPr lang="en-US" sz="2200" dirty="0"/>
-          </a:p>
-        </p:txBody>
-      </p:sp>
-      <p:sp>
-        <p:nvSpPr>
-          <p:cNvPr id="27" name="Text 25"/>
-          <p:cNvSpPr/>
-          <p:nvPr/>
-        </p:nvSpPr>
-        <p:spPr>
-          <a:xfrm>
-            <a:off x="5623560" y="3017520"/>
-            <a:ext cx="3063240" cy="594360"/>
-          </a:xfrm>
-          <a:prstGeom prst="rect">
-            <a:avLst/>
-          </a:prstGeom>
-          <a:noFill/>
-          <a:ln/>
-        </p:spPr>
-        <p:txBody>
-          <a:bodyPr wrap="square" rtlCol="0" anchor="ctr"/>
-          <a:lstStyle/>
-          <a:p>
-            <a:pPr indent="0" marL="0">
-              <a:buNone/>
-            </a:pPr>
-            <a:r>
-              <a:rPr lang="en-US" sz="1300" dirty="0">
-                <a:solidFill>
-                  <a:srgbClr val="2D3748"/>
-                </a:solidFill>
-                <a:latin typeface="Arial" pitchFamily="34" charset="0"/>
-                <a:ea typeface="Arial" pitchFamily="34" charset="-122"/>
-                <a:cs typeface="Arial" pitchFamily="34" charset="-120"/>
-              </a:rPr>
-              <a:t>Sin papel, sin transcripción,</a:t>
-            </a:r>
-            <a:endParaRPr lang="en-US" sz="1300" dirty="0"/>
-          </a:p>
-          <a:p>
-            <a:pPr indent="0" marL="0">
-              <a:buNone/>
-            </a:pPr>
-            <a:r>
-              <a:rPr lang="en-US" sz="1300" dirty="0">
-                <a:solidFill>
-                  <a:srgbClr val="2D3748"/>
-                </a:solidFill>
-                <a:latin typeface="Arial" pitchFamily="34" charset="0"/>
-                <a:ea typeface="Arial" pitchFamily="34" charset="-122"/>
-                <a:cs typeface="Arial" pitchFamily="34" charset="-120"/>
-              </a:rPr>
-              <a:t>sin trabajo extra</a:t>
-            </a:r>
-            <a:endParaRPr lang="en-US" sz="1300" dirty="0"/>
-          </a:p>
-        </p:txBody>
-      </p:sp>
-      <p:sp>
-        <p:nvSpPr>
-          <p:cNvPr id="28" name="Text 26"/>
-          <p:cNvSpPr/>
-          <p:nvPr/>
-        </p:nvSpPr>
-        <p:spPr>
-          <a:xfrm>
-            <a:off x="5029200" y="3703320"/>
-            <a:ext cx="548640" cy="457200"/>
-          </a:xfrm>
-          <a:prstGeom prst="rect">
-            <a:avLst/>
-          </a:prstGeom>
-          <a:noFill/>
-          <a:ln/>
-        </p:spPr>
-        <p:txBody>
-          <a:bodyPr wrap="square" rtlCol="0" anchor="ctr"/>
-          <a:lstStyle/>
-          <a:p>
-            <a:pPr algn="ctr" indent="0" marL="0">
-              <a:buNone/>
-            </a:pPr>
-            <a:r>
-              <a:rPr lang="en-US" sz="2200" dirty="0">
-                <a:solidFill>
-                  <a:srgbClr val="000000"/>
-                </a:solidFill>
-              </a:rPr>
-              <a:t>🛡️</a:t>
-            </a:r>
-            <a:endParaRPr lang="en-US" sz="2200" dirty="0"/>
-          </a:p>
-        </p:txBody>
-      </p:sp>
-      <p:sp>
-        <p:nvSpPr>
-          <p:cNvPr id="29" name="Text 27"/>
-          <p:cNvSpPr/>
-          <p:nvPr/>
-        </p:nvSpPr>
-        <p:spPr>
-          <a:xfrm>
-            <a:off x="5623560" y="3703320"/>
-            <a:ext cx="3063240" cy="594360"/>
-          </a:xfrm>
-          <a:prstGeom prst="rect">
-            <a:avLst/>
-          </a:prstGeom>
-          <a:noFill/>
-          <a:ln/>
-        </p:spPr>
-        <p:txBody>
-          <a:bodyPr wrap="square" rtlCol="0" anchor="ctr"/>
-          <a:lstStyle/>
-          <a:p>
-            <a:pPr indent="0" marL="0">
-              <a:buNone/>
-            </a:pPr>
-            <a:r>
-              <a:rPr lang="en-US" sz="1300" dirty="0">
-                <a:solidFill>
-                  <a:srgbClr val="2D3748"/>
-                </a:solidFill>
-                <a:latin typeface="Arial" pitchFamily="34" charset="0"/>
-                <a:ea typeface="Arial" pitchFamily="34" charset="-122"/>
-                <a:cs typeface="Arial" pitchFamily="34" charset="-120"/>
-              </a:rPr>
-              <a:t>Evidencia lista ante cualquier</a:t>
-            </a:r>
-            <a:endParaRPr lang="en-US" sz="1300" dirty="0"/>
-          </a:p>
-          <a:p>
-            <a:pPr indent="0" marL="0">
-              <a:buNone/>
-            </a:pPr>
-            <a:r>
-              <a:rPr lang="en-US" sz="1300" dirty="0">
-                <a:solidFill>
-                  <a:srgbClr val="2D3748"/>
-                </a:solidFill>
-                <a:latin typeface="Arial" pitchFamily="34" charset="0"/>
-                <a:ea typeface="Arial" pitchFamily="34" charset="-122"/>
-                <a:cs typeface="Arial" pitchFamily="34" charset="-120"/>
-              </a:rPr>
-              <a:t>inspección, queja o demanda</a:t>
-            </a:r>
-            <a:endParaRPr lang="en-US" sz="1300" dirty="0"/>
-          </a:p>
-        </p:txBody>
-      </p:sp>
-      <p:sp>
-        <p:nvSpPr>
-          <p:cNvPr id="30" name="Text 28"/>
-          <p:cNvSpPr/>
-          <p:nvPr/>
-        </p:nvSpPr>
-        <p:spPr>
-          <a:xfrm>
-            <a:off x="4434840" y="2651760"/>
-            <a:ext cx="411480" cy="457200"/>
-          </a:xfrm>
-          <a:prstGeom prst="rect">
-            <a:avLst/>
-          </a:prstGeom>
-          <a:noFill/>
-          <a:ln/>
-        </p:spPr>
-        <p:txBody>
-          <a:bodyPr wrap="square" rtlCol="0" anchor="ctr"/>
-          <a:lstStyle/>
-          <a:p>
-            <a:pPr algn="ctr" indent="0" marL="0">
-              <a:buNone/>
-            </a:pPr>
-            <a:r>
-              <a:rPr lang="en-US" sz="2400" b="1" dirty="0">
-                <a:solidFill>
-                  <a:srgbClr val="5B8DB8"/>
-                </a:solidFill>
-                <a:latin typeface="Arial" pitchFamily="34" charset="0"/>
-                <a:ea typeface="Arial" pitchFamily="34" charset="-122"/>
-                <a:cs typeface="Arial" pitchFamily="34" charset="-120"/>
-              </a:rPr>
-              <a:t>→</a:t>
-            </a:r>
-            <a:endParaRPr lang="en-US" sz="2400" dirty="0"/>
-          </a:p>
-        </p:txBody>
-      </p:sp>
-      <p:sp>
-        <p:nvSpPr>
           <p:cNvPr id="31" name="Shape 29"/>
           <p:cNvSpPr/>
           <p:nvPr/>
         </p:nvSpPr>
         <p:spPr>
           <a:xfrm>
-            <a:off x="457200" y="4956048"/>
+            <a:off x="457200" y="5019436"/>
             <a:ext cx="8375904" cy="685800"/>
           </a:xfrm>
           <a:prstGeom prst="roundRect">
@@ -17051,7 +17405,10 @@
             </a:avLst>
           </a:prstGeom>
           <a:solidFill>
-            <a:srgbClr val="F0EDE8"/>
+            <a:schemeClr val="accent1">
+              <a:lumMod val="60000"/>
+              <a:lumOff val="40000"/>
+            </a:schemeClr>
           </a:solidFill>
           <a:ln w="6350">
             <a:solidFill>
@@ -17060,6 +17417,13 @@
             <a:prstDash val="solid"/>
           </a:ln>
         </p:spPr>
+        <p:txBody>
+          <a:bodyPr/>
+          <a:lstStyle/>
+          <a:p>
+            <a:endParaRPr lang="en-US"/>
+          </a:p>
+        </p:txBody>
       </p:sp>
       <p:sp>
         <p:nvSpPr>
@@ -17082,7 +17446,7 @@
           <a:bodyPr wrap="square" rtlCol="0" anchor="ctr"/>
           <a:lstStyle/>
           <a:p>
-            <a:pPr algn="ctr" indent="0" marL="0">
+            <a:pPr marL="0" indent="0" algn="ctr">
               <a:buNone/>
             </a:pPr>
             <a:r>
@@ -17097,6 +17461,45 @@
               <a:t>El director tiene evidencia lista ante cualquier inspección, queja o demanda — en todo momento.</a:t>
             </a:r>
             <a:endParaRPr lang="en-US" sz="1300" dirty="0"/>
+          </a:p>
+        </p:txBody>
+      </p:sp>
+      <p:sp>
+        <p:nvSpPr>
+          <p:cNvPr id="43" name="Text 6">
+            <a:extLst>
+              <a:ext uri="{FF2B5EF4-FFF2-40B4-BE49-F238E27FC236}">
+                <a16:creationId xmlns:a16="http://schemas.microsoft.com/office/drawing/2014/main" id="{1D66D282-66FE-A8E9-64AF-DE5882472691}"/>
+              </a:ext>
+            </a:extLst>
+          </p:cNvPr>
+          <p:cNvSpPr/>
+          <p:nvPr/>
+        </p:nvSpPr>
+        <p:spPr>
+          <a:xfrm>
+            <a:off x="4732020" y="2782371"/>
+            <a:ext cx="3977640" cy="2073711"/>
+          </a:xfrm>
+          <a:prstGeom prst="rect">
+            <a:avLst/>
+          </a:prstGeom>
+          <a:solidFill>
+            <a:schemeClr val="accent6">
+              <a:lumMod val="40000"/>
+              <a:lumOff val="60000"/>
+            </a:schemeClr>
+          </a:solidFill>
+          <a:ln/>
+        </p:spPr>
+        <p:txBody>
+          <a:bodyPr wrap="square" rtlCol="0" anchor="ctr"/>
+          <a:lstStyle/>
+          <a:p>
+            <a:pPr marL="0" indent="0">
+              <a:buNone/>
+            </a:pPr>
+            <a:endParaRPr lang="en-US" dirty="0"/>
           </a:p>
         </p:txBody>
       </p:sp>
@@ -17121,9 +17524,7 @@
           <a:bodyPr wrap="square" rtlCol="0" anchor="ctr"/>
           <a:lstStyle/>
           <a:p>
-            <a:pPr algn="ctr" indent="0" marL="0">
-              <a:buNone/>
-            </a:pPr>
+            <a:pPr algn="ctr"/>
             <a:r>
               <a:rPr lang="en-US" dirty="0">
                 <a:solidFill>
@@ -17133,9 +17534,611 @@
                 <a:ea typeface="Arial" pitchFamily="34" charset="-122"/>
                 <a:cs typeface="Arial" pitchFamily="34" charset="-120"/>
               </a:rPr>
-              <a:t>MVP operacional · No dispositivo médico · Datos ficticios</a:t>
+              <a:t>MVP operacional · No dispositivo médico · Datos </a:t>
+            </a:r>
+            <a:r>
+              <a:rPr lang="en-US" dirty="0" err="1">
+                <a:solidFill>
+                  <a:srgbClr val="718096"/>
+                </a:solidFill>
+                <a:latin typeface="Arial" pitchFamily="34" charset="0"/>
+                <a:ea typeface="Arial" pitchFamily="34" charset="-122"/>
+                <a:cs typeface="Arial" pitchFamily="34" charset="-120"/>
+              </a:rPr>
+              <a:t>sintéticos</a:t>
             </a:r>
             <a:endParaRPr lang="en-US" dirty="0"/>
+          </a:p>
+        </p:txBody>
+      </p:sp>
+      <p:sp>
+        <p:nvSpPr>
+          <p:cNvPr id="24" name="Text 22"/>
+          <p:cNvSpPr/>
+          <p:nvPr/>
+        </p:nvSpPr>
+        <p:spPr>
+          <a:xfrm>
+            <a:off x="5006340" y="2892447"/>
+            <a:ext cx="548640" cy="457200"/>
+          </a:xfrm>
+          <a:prstGeom prst="rect">
+            <a:avLst/>
+          </a:prstGeom>
+          <a:noFill/>
+          <a:ln/>
+        </p:spPr>
+        <p:txBody>
+          <a:bodyPr wrap="square" rtlCol="0" anchor="ctr"/>
+          <a:lstStyle/>
+          <a:p>
+            <a:pPr marL="0" indent="0" algn="ctr">
+              <a:buNone/>
+            </a:pPr>
+            <a:r>
+              <a:rPr lang="en-US" sz="2200" dirty="0">
+                <a:solidFill>
+                  <a:srgbClr val="000000"/>
+                </a:solidFill>
+              </a:rPr>
+              <a:t>📋</a:t>
+            </a:r>
+            <a:endParaRPr lang="en-US" sz="2200" dirty="0"/>
+          </a:p>
+        </p:txBody>
+      </p:sp>
+      <p:sp>
+        <p:nvSpPr>
+          <p:cNvPr id="26" name="Text 24"/>
+          <p:cNvSpPr/>
+          <p:nvPr/>
+        </p:nvSpPr>
+        <p:spPr>
+          <a:xfrm>
+            <a:off x="5006340" y="3578247"/>
+            <a:ext cx="548640" cy="457200"/>
+          </a:xfrm>
+          <a:prstGeom prst="rect">
+            <a:avLst/>
+          </a:prstGeom>
+          <a:noFill/>
+          <a:ln/>
+        </p:spPr>
+        <p:txBody>
+          <a:bodyPr wrap="square" rtlCol="0" anchor="ctr"/>
+          <a:lstStyle/>
+          <a:p>
+            <a:pPr marL="0" indent="0" algn="ctr">
+              <a:buNone/>
+            </a:pPr>
+            <a:r>
+              <a:rPr lang="en-US" sz="2200" dirty="0">
+                <a:solidFill>
+                  <a:srgbClr val="000000"/>
+                </a:solidFill>
+              </a:rPr>
+              <a:t>📄</a:t>
+            </a:r>
+            <a:endParaRPr lang="en-US" sz="2200" dirty="0"/>
+          </a:p>
+        </p:txBody>
+      </p:sp>
+      <p:sp>
+        <p:nvSpPr>
+          <p:cNvPr id="28" name="Text 26"/>
+          <p:cNvSpPr/>
+          <p:nvPr/>
+        </p:nvSpPr>
+        <p:spPr>
+          <a:xfrm>
+            <a:off x="5006340" y="4264047"/>
+            <a:ext cx="548640" cy="457200"/>
+          </a:xfrm>
+          <a:prstGeom prst="rect">
+            <a:avLst/>
+          </a:prstGeom>
+          <a:noFill/>
+          <a:ln/>
+        </p:spPr>
+        <p:txBody>
+          <a:bodyPr wrap="square" rtlCol="0" anchor="ctr"/>
+          <a:lstStyle/>
+          <a:p>
+            <a:pPr marL="0" indent="0" algn="ctr">
+              <a:buNone/>
+            </a:pPr>
+            <a:r>
+              <a:rPr lang="en-US" sz="2200" dirty="0">
+                <a:solidFill>
+                  <a:srgbClr val="000000"/>
+                </a:solidFill>
+              </a:rPr>
+              <a:t>🛡️</a:t>
+            </a:r>
+            <a:endParaRPr lang="en-US" sz="2200" dirty="0"/>
+          </a:p>
+        </p:txBody>
+      </p:sp>
+      <p:sp>
+        <p:nvSpPr>
+          <p:cNvPr id="25" name="Text 23"/>
+          <p:cNvSpPr/>
+          <p:nvPr/>
+        </p:nvSpPr>
+        <p:spPr>
+          <a:xfrm>
+            <a:off x="5600700" y="2892447"/>
+            <a:ext cx="3063240" cy="594360"/>
+          </a:xfrm>
+          <a:prstGeom prst="rect">
+            <a:avLst/>
+          </a:prstGeom>
+          <a:noFill/>
+          <a:ln/>
+        </p:spPr>
+        <p:txBody>
+          <a:bodyPr wrap="square" rtlCol="0" anchor="ctr"/>
+          <a:lstStyle/>
+          <a:p>
+            <a:pPr marL="0" indent="0">
+              <a:buNone/>
+            </a:pPr>
+            <a:r>
+              <a:rPr lang="en-US" sz="1300" dirty="0">
+                <a:solidFill>
+                  <a:srgbClr val="2D3748"/>
+                </a:solidFill>
+                <a:latin typeface="Arial" pitchFamily="34" charset="0"/>
+                <a:ea typeface="Arial" pitchFamily="34" charset="-122"/>
+                <a:cs typeface="Arial" pitchFamily="34" charset="-120"/>
+              </a:rPr>
+              <a:t>Bitácora inmutable:</a:t>
+            </a:r>
+            <a:endParaRPr lang="en-US" sz="1300" dirty="0"/>
+          </a:p>
+          <a:p>
+            <a:pPr marL="0" indent="0">
+              <a:buNone/>
+            </a:pPr>
+            <a:r>
+              <a:rPr lang="en-US" sz="1300" dirty="0">
+                <a:solidFill>
+                  <a:srgbClr val="2D3748"/>
+                </a:solidFill>
+                <a:latin typeface="Arial" pitchFamily="34" charset="0"/>
+                <a:ea typeface="Arial" pitchFamily="34" charset="-122"/>
+                <a:cs typeface="Arial" pitchFamily="34" charset="-120"/>
+              </a:rPr>
+              <a:t>quién, cuándo, qué resultado</a:t>
+            </a:r>
+            <a:endParaRPr lang="en-US" sz="1300" dirty="0"/>
+          </a:p>
+        </p:txBody>
+      </p:sp>
+      <p:sp>
+        <p:nvSpPr>
+          <p:cNvPr id="27" name="Text 25"/>
+          <p:cNvSpPr/>
+          <p:nvPr/>
+        </p:nvSpPr>
+        <p:spPr>
+          <a:xfrm>
+            <a:off x="5600700" y="3578247"/>
+            <a:ext cx="3063240" cy="594360"/>
+          </a:xfrm>
+          <a:prstGeom prst="rect">
+            <a:avLst/>
+          </a:prstGeom>
+          <a:noFill/>
+          <a:ln/>
+        </p:spPr>
+        <p:txBody>
+          <a:bodyPr wrap="square" rtlCol="0" anchor="ctr"/>
+          <a:lstStyle/>
+          <a:p>
+            <a:pPr marL="0" indent="0">
+              <a:buNone/>
+            </a:pPr>
+            <a:r>
+              <a:rPr lang="en-US" sz="1300" dirty="0">
+                <a:solidFill>
+                  <a:srgbClr val="2D3748"/>
+                </a:solidFill>
+                <a:latin typeface="Arial" pitchFamily="34" charset="0"/>
+                <a:ea typeface="Arial" pitchFamily="34" charset="-122"/>
+                <a:cs typeface="Arial" pitchFamily="34" charset="-120"/>
+              </a:rPr>
+              <a:t>Sin papel, sin transcripción,</a:t>
+            </a:r>
+            <a:endParaRPr lang="en-US" sz="1300" dirty="0"/>
+          </a:p>
+          <a:p>
+            <a:pPr marL="0" indent="0">
+              <a:buNone/>
+            </a:pPr>
+            <a:r>
+              <a:rPr lang="en-US" sz="1300" dirty="0">
+                <a:solidFill>
+                  <a:srgbClr val="2D3748"/>
+                </a:solidFill>
+                <a:latin typeface="Arial" pitchFamily="34" charset="0"/>
+                <a:ea typeface="Arial" pitchFamily="34" charset="-122"/>
+                <a:cs typeface="Arial" pitchFamily="34" charset="-120"/>
+              </a:rPr>
+              <a:t>sin trabajo extra</a:t>
+            </a:r>
+            <a:endParaRPr lang="en-US" sz="1300" dirty="0"/>
+          </a:p>
+        </p:txBody>
+      </p:sp>
+      <p:sp>
+        <p:nvSpPr>
+          <p:cNvPr id="29" name="Text 27"/>
+          <p:cNvSpPr/>
+          <p:nvPr/>
+        </p:nvSpPr>
+        <p:spPr>
+          <a:xfrm>
+            <a:off x="5600700" y="4264047"/>
+            <a:ext cx="3063240" cy="594360"/>
+          </a:xfrm>
+          <a:prstGeom prst="rect">
+            <a:avLst/>
+          </a:prstGeom>
+          <a:noFill/>
+          <a:ln/>
+        </p:spPr>
+        <p:txBody>
+          <a:bodyPr wrap="square" rtlCol="0" anchor="ctr"/>
+          <a:lstStyle/>
+          <a:p>
+            <a:pPr marL="0" indent="0">
+              <a:buNone/>
+            </a:pPr>
+            <a:r>
+              <a:rPr lang="en-US" sz="1300" dirty="0">
+                <a:solidFill>
+                  <a:srgbClr val="2D3748"/>
+                </a:solidFill>
+                <a:latin typeface="Arial" pitchFamily="34" charset="0"/>
+                <a:ea typeface="Arial" pitchFamily="34" charset="-122"/>
+                <a:cs typeface="Arial" pitchFamily="34" charset="-120"/>
+              </a:rPr>
+              <a:t>Evidencia lista ante cualquier</a:t>
+            </a:r>
+            <a:endParaRPr lang="en-US" sz="1300" dirty="0"/>
+          </a:p>
+          <a:p>
+            <a:pPr marL="0" indent="0">
+              <a:buNone/>
+            </a:pPr>
+            <a:r>
+              <a:rPr lang="en-US" sz="1300" dirty="0">
+                <a:solidFill>
+                  <a:srgbClr val="2D3748"/>
+                </a:solidFill>
+                <a:latin typeface="Arial" pitchFamily="34" charset="0"/>
+                <a:ea typeface="Arial" pitchFamily="34" charset="-122"/>
+                <a:cs typeface="Arial" pitchFamily="34" charset="-120"/>
+              </a:rPr>
+              <a:t>inspección, queja o demanda</a:t>
+            </a:r>
+            <a:endParaRPr lang="en-US" sz="1300" dirty="0"/>
+          </a:p>
+        </p:txBody>
+      </p:sp>
+      <p:sp>
+        <p:nvSpPr>
+          <p:cNvPr id="45" name="Text 6">
+            <a:extLst>
+              <a:ext uri="{FF2B5EF4-FFF2-40B4-BE49-F238E27FC236}">
+                <a16:creationId xmlns:a16="http://schemas.microsoft.com/office/drawing/2014/main" id="{B9281D72-1063-D73D-F901-32DF6FA23612}"/>
+              </a:ext>
+            </a:extLst>
+          </p:cNvPr>
+          <p:cNvSpPr/>
+          <p:nvPr/>
+        </p:nvSpPr>
+        <p:spPr>
+          <a:xfrm>
+            <a:off x="457200" y="2782371"/>
+            <a:ext cx="3977640" cy="2111219"/>
+          </a:xfrm>
+          <a:prstGeom prst="rect">
+            <a:avLst/>
+          </a:prstGeom>
+          <a:solidFill>
+            <a:schemeClr val="accent6">
+              <a:lumMod val="40000"/>
+              <a:lumOff val="60000"/>
+            </a:schemeClr>
+          </a:solidFill>
+          <a:ln/>
+        </p:spPr>
+        <p:txBody>
+          <a:bodyPr wrap="square" rtlCol="0" anchor="ctr"/>
+          <a:lstStyle/>
+          <a:p>
+            <a:pPr marL="0" indent="0">
+              <a:buNone/>
+            </a:pPr>
+            <a:endParaRPr lang="en-US" dirty="0"/>
+          </a:p>
+        </p:txBody>
+      </p:sp>
+      <p:sp>
+        <p:nvSpPr>
+          <p:cNvPr id="14" name="Text 12"/>
+          <p:cNvSpPr/>
+          <p:nvPr/>
+        </p:nvSpPr>
+        <p:spPr>
+          <a:xfrm>
+            <a:off x="662940" y="2980324"/>
+            <a:ext cx="548640" cy="457200"/>
+          </a:xfrm>
+          <a:prstGeom prst="rect">
+            <a:avLst/>
+          </a:prstGeom>
+          <a:noFill/>
+          <a:ln/>
+        </p:spPr>
+        <p:txBody>
+          <a:bodyPr wrap="square" rtlCol="0" anchor="ctr"/>
+          <a:lstStyle/>
+          <a:p>
+            <a:pPr marL="0" indent="0" algn="ctr">
+              <a:buNone/>
+            </a:pPr>
+            <a:r>
+              <a:rPr lang="en-US" sz="2200" dirty="0">
+                <a:solidFill>
+                  <a:srgbClr val="000000"/>
+                </a:solidFill>
+              </a:rPr>
+              <a:t>⏱️</a:t>
+            </a:r>
+            <a:endParaRPr lang="en-US" sz="2200" dirty="0"/>
+          </a:p>
+        </p:txBody>
+      </p:sp>
+      <p:sp>
+        <p:nvSpPr>
+          <p:cNvPr id="15" name="Text 13"/>
+          <p:cNvSpPr/>
+          <p:nvPr/>
+        </p:nvSpPr>
+        <p:spPr>
+          <a:xfrm>
+            <a:off x="1257300" y="2980324"/>
+            <a:ext cx="3063240" cy="594360"/>
+          </a:xfrm>
+          <a:prstGeom prst="rect">
+            <a:avLst/>
+          </a:prstGeom>
+          <a:noFill/>
+          <a:ln/>
+        </p:spPr>
+        <p:txBody>
+          <a:bodyPr wrap="square" rtlCol="0" anchor="ctr"/>
+          <a:lstStyle/>
+          <a:p>
+            <a:pPr marL="0" indent="0">
+              <a:buNone/>
+            </a:pPr>
+            <a:r>
+              <a:rPr lang="en-US" sz="1300" dirty="0">
+                <a:solidFill>
+                  <a:srgbClr val="2D3748"/>
+                </a:solidFill>
+                <a:latin typeface="Arial" pitchFamily="34" charset="0"/>
+                <a:ea typeface="Arial" pitchFamily="34" charset="-122"/>
+                <a:cs typeface="Arial" pitchFamily="34" charset="-120"/>
+              </a:rPr>
+              <a:t>Detecta automáticamente</a:t>
+            </a:r>
+            <a:endParaRPr lang="en-US" sz="1300" dirty="0"/>
+          </a:p>
+          <a:p>
+            <a:pPr marL="0" indent="0">
+              <a:buNone/>
+            </a:pPr>
+            <a:r>
+              <a:rPr lang="en-US" sz="1300" dirty="0">
+                <a:solidFill>
+                  <a:srgbClr val="2D3748"/>
+                </a:solidFill>
+                <a:latin typeface="Arial" pitchFamily="34" charset="0"/>
+                <a:ea typeface="Arial" pitchFamily="34" charset="-122"/>
+                <a:cs typeface="Arial" pitchFamily="34" charset="-120"/>
+              </a:rPr>
+              <a:t>cuando una ronda no ocurre</a:t>
+            </a:r>
+            <a:endParaRPr lang="en-US" sz="1300" dirty="0"/>
+          </a:p>
+        </p:txBody>
+      </p:sp>
+      <p:sp>
+        <p:nvSpPr>
+          <p:cNvPr id="16" name="Text 14"/>
+          <p:cNvSpPr/>
+          <p:nvPr/>
+        </p:nvSpPr>
+        <p:spPr>
+          <a:xfrm>
+            <a:off x="662940" y="3666124"/>
+            <a:ext cx="548640" cy="457200"/>
+          </a:xfrm>
+          <a:prstGeom prst="rect">
+            <a:avLst/>
+          </a:prstGeom>
+          <a:noFill/>
+          <a:ln/>
+        </p:spPr>
+        <p:txBody>
+          <a:bodyPr wrap="square" rtlCol="0" anchor="ctr"/>
+          <a:lstStyle/>
+          <a:p>
+            <a:pPr marL="0" indent="0" algn="ctr">
+              <a:buNone/>
+            </a:pPr>
+            <a:r>
+              <a:rPr lang="en-US" sz="2200" dirty="0">
+                <a:solidFill>
+                  <a:srgbClr val="000000"/>
+                </a:solidFill>
+              </a:rPr>
+              <a:t>🔔</a:t>
+            </a:r>
+            <a:endParaRPr lang="en-US" sz="2200" dirty="0"/>
+          </a:p>
+        </p:txBody>
+      </p:sp>
+      <p:sp>
+        <p:nvSpPr>
+          <p:cNvPr id="17" name="Text 15"/>
+          <p:cNvSpPr/>
+          <p:nvPr/>
+        </p:nvSpPr>
+        <p:spPr>
+          <a:xfrm>
+            <a:off x="1257300" y="3666124"/>
+            <a:ext cx="3063240" cy="594360"/>
+          </a:xfrm>
+          <a:prstGeom prst="rect">
+            <a:avLst/>
+          </a:prstGeom>
+          <a:noFill/>
+          <a:ln/>
+        </p:spPr>
+        <p:txBody>
+          <a:bodyPr wrap="square" rtlCol="0" anchor="ctr"/>
+          <a:lstStyle/>
+          <a:p>
+            <a:pPr marL="0" indent="0">
+              <a:buNone/>
+            </a:pPr>
+            <a:r>
+              <a:rPr lang="en-US" sz="1300" dirty="0">
+                <a:solidFill>
+                  <a:srgbClr val="2D3748"/>
+                </a:solidFill>
+                <a:latin typeface="Arial" pitchFamily="34" charset="0"/>
+                <a:ea typeface="Arial" pitchFamily="34" charset="-122"/>
+                <a:cs typeface="Arial" pitchFamily="34" charset="-120"/>
+              </a:rPr>
+              <a:t>Alerta al supervisor</a:t>
+            </a:r>
+            <a:endParaRPr lang="en-US" sz="1300" dirty="0"/>
+          </a:p>
+          <a:p>
+            <a:pPr marL="0" indent="0">
+              <a:buNone/>
+            </a:pPr>
+            <a:r>
+              <a:rPr lang="en-US" sz="1300" dirty="0">
+                <a:solidFill>
+                  <a:srgbClr val="2D3748"/>
+                </a:solidFill>
+                <a:latin typeface="Arial" pitchFamily="34" charset="0"/>
+                <a:ea typeface="Arial" pitchFamily="34" charset="-122"/>
+                <a:cs typeface="Arial" pitchFamily="34" charset="-120"/>
+              </a:rPr>
+              <a:t>en tiempo real</a:t>
+            </a:r>
+            <a:endParaRPr lang="en-US" sz="1300" dirty="0"/>
+          </a:p>
+        </p:txBody>
+      </p:sp>
+      <p:sp>
+        <p:nvSpPr>
+          <p:cNvPr id="18" name="Text 16"/>
+          <p:cNvSpPr/>
+          <p:nvPr/>
+        </p:nvSpPr>
+        <p:spPr>
+          <a:xfrm>
+            <a:off x="662940" y="4351924"/>
+            <a:ext cx="548640" cy="457200"/>
+          </a:xfrm>
+          <a:prstGeom prst="rect">
+            <a:avLst/>
+          </a:prstGeom>
+          <a:noFill/>
+          <a:ln/>
+        </p:spPr>
+        <p:txBody>
+          <a:bodyPr wrap="square" rtlCol="0" anchor="ctr"/>
+          <a:lstStyle/>
+          <a:p>
+            <a:pPr marL="0" indent="0" algn="ctr">
+              <a:buNone/>
+            </a:pPr>
+            <a:r>
+              <a:rPr lang="en-US" sz="2200" dirty="0">
+                <a:solidFill>
+                  <a:srgbClr val="000000"/>
+                </a:solidFill>
+              </a:rPr>
+              <a:t>👤</a:t>
+            </a:r>
+            <a:endParaRPr lang="en-US" sz="2200" dirty="0"/>
+          </a:p>
+        </p:txBody>
+      </p:sp>
+      <p:sp>
+        <p:nvSpPr>
+          <p:cNvPr id="19" name="Text 17"/>
+          <p:cNvSpPr/>
+          <p:nvPr/>
+        </p:nvSpPr>
+        <p:spPr>
+          <a:xfrm>
+            <a:off x="1257300" y="4351924"/>
+            <a:ext cx="3063240" cy="594360"/>
+          </a:xfrm>
+          <a:prstGeom prst="rect">
+            <a:avLst/>
+          </a:prstGeom>
+          <a:noFill/>
+          <a:ln/>
+        </p:spPr>
+        <p:txBody>
+          <a:bodyPr wrap="square" rtlCol="0" anchor="ctr"/>
+          <a:lstStyle/>
+          <a:p>
+            <a:pPr marL="0" indent="0">
+              <a:buNone/>
+            </a:pPr>
+            <a:r>
+              <a:rPr lang="en-US" sz="1300" dirty="0">
+                <a:solidFill>
+                  <a:srgbClr val="2D3748"/>
+                </a:solidFill>
+                <a:latin typeface="Arial" pitchFamily="34" charset="0"/>
+                <a:ea typeface="Arial" pitchFamily="34" charset="-122"/>
+                <a:cs typeface="Arial" pitchFamily="34" charset="-120"/>
+              </a:rPr>
+              <a:t>Asignación, escalación</a:t>
+            </a:r>
+            <a:endParaRPr lang="en-US" sz="1300" dirty="0"/>
+          </a:p>
+          <a:p>
+            <a:pPr marL="0" indent="0">
+              <a:buNone/>
+            </a:pPr>
+            <a:r>
+              <a:rPr lang="en-US" sz="1300" dirty="0">
+                <a:solidFill>
+                  <a:srgbClr val="2D3748"/>
+                </a:solidFill>
+                <a:latin typeface="Arial" pitchFamily="34" charset="0"/>
+                <a:ea typeface="Arial" pitchFamily="34" charset="-122"/>
+                <a:cs typeface="Arial" pitchFamily="34" charset="-120"/>
+              </a:rPr>
+              <a:t>y seguimiento del cuidador</a:t>
+            </a:r>
+            <a:endParaRPr lang="en-US" sz="1300" dirty="0"/>
           </a:p>
         </p:txBody>
       </p:sp>
@@ -17188,6 +18191,13 @@
             <a:prstDash val="solid"/>
           </a:ln>
         </p:spPr>
+        <p:txBody>
+          <a:bodyPr/>
+          <a:lstStyle/>
+          <a:p>
+            <a:endParaRPr lang="en-US"/>
+          </a:p>
+        </p:txBody>
       </p:sp>
       <p:sp>
         <p:nvSpPr>
@@ -17217,6 +18227,13 @@
             <a:prstDash val="solid"/>
           </a:ln>
         </p:spPr>
+        <p:txBody>
+          <a:bodyPr/>
+          <a:lstStyle/>
+          <a:p>
+            <a:endParaRPr lang="en-US"/>
+          </a:p>
+        </p:txBody>
       </p:sp>
       <p:sp>
         <p:nvSpPr>
@@ -17246,6 +18263,13 @@
             <a:prstDash val="solid"/>
           </a:ln>
         </p:spPr>
+        <p:txBody>
+          <a:bodyPr/>
+          <a:lstStyle/>
+          <a:p>
+            <a:endParaRPr lang="en-US"/>
+          </a:p>
+        </p:txBody>
       </p:sp>
       <p:sp>
         <p:nvSpPr>
@@ -17269,6 +18293,13 @@
             <a:prstDash val="solid"/>
           </a:ln>
         </p:spPr>
+        <p:txBody>
+          <a:bodyPr/>
+          <a:lstStyle/>
+          <a:p>
+            <a:endParaRPr lang="en-US"/>
+          </a:p>
+        </p:txBody>
       </p:sp>
       <p:sp>
         <p:nvSpPr>
@@ -17294,6 +18325,13 @@
             <a:prstDash val="solid"/>
           </a:ln>
         </p:spPr>
+        <p:txBody>
+          <a:bodyPr/>
+          <a:lstStyle/>
+          <a:p>
+            <a:endParaRPr lang="en-US"/>
+          </a:p>
+        </p:txBody>
       </p:sp>
       <p:sp>
         <p:nvSpPr>
@@ -17319,6 +18357,13 @@
             <a:prstDash val="solid"/>
           </a:ln>
         </p:spPr>
+        <p:txBody>
+          <a:bodyPr/>
+          <a:lstStyle/>
+          <a:p>
+            <a:endParaRPr lang="en-US"/>
+          </a:p>
+        </p:txBody>
       </p:sp>
       <p:sp>
         <p:nvSpPr>
@@ -17341,7 +18386,7 @@
           <a:bodyPr wrap="square" rtlCol="0" anchor="ctr"/>
           <a:lstStyle/>
           <a:p>
-            <a:pPr indent="0" marL="0">
+            <a:pPr marL="0" indent="0">
               <a:buNone/>
             </a:pPr>
             <a:r>
@@ -17380,7 +18425,7 @@
           <a:bodyPr wrap="square" rtlCol="0" anchor="ctr"/>
           <a:lstStyle/>
           <a:p>
-            <a:pPr indent="0" marL="0">
+            <a:pPr marL="0" indent="0">
               <a:buNone/>
             </a:pPr>
             <a:r>
@@ -17420,6 +18465,13 @@
             <a:prstDash val="solid"/>
           </a:ln>
         </p:spPr>
+        <p:txBody>
+          <a:bodyPr/>
+          <a:lstStyle/>
+          <a:p>
+            <a:endParaRPr lang="en-US"/>
+          </a:p>
+        </p:txBody>
       </p:sp>
       <p:sp>
         <p:nvSpPr>
@@ -17447,6 +18499,13 @@
             <a:prstDash val="solid"/>
           </a:ln>
         </p:spPr>
+        <p:txBody>
+          <a:bodyPr/>
+          <a:lstStyle/>
+          <a:p>
+            <a:endParaRPr lang="en-US"/>
+          </a:p>
+        </p:txBody>
       </p:sp>
       <p:sp>
         <p:nvSpPr>
@@ -17469,7 +18528,7 @@
           <a:bodyPr wrap="square" rtlCol="0" anchor="ctr"/>
           <a:lstStyle/>
           <a:p>
-            <a:pPr indent="0" marL="0">
+            <a:pPr marL="0" indent="0">
               <a:buNone/>
             </a:pPr>
             <a:r>
@@ -17508,7 +18567,7 @@
           <a:bodyPr wrap="square" rtlCol="0" anchor="ctr"/>
           <a:lstStyle/>
           <a:p>
-            <a:pPr indent="0" marL="0">
+            <a:pPr marL="0" indent="0">
               <a:buNone/>
             </a:pPr>
             <a:r>
@@ -17525,7 +18584,7 @@
             <a:endParaRPr lang="en-US" sz="1100" dirty="0"/>
           </a:p>
           <a:p>
-            <a:pPr indent="0" marL="0">
+            <a:pPr marL="0" indent="0">
               <a:buNone/>
             </a:pPr>
             <a:r>
@@ -17564,7 +18623,7 @@
           <a:bodyPr wrap="square" rtlCol="0" anchor="ctr"/>
           <a:lstStyle/>
           <a:p>
-            <a:pPr algn="r" indent="0" marL="0">
+            <a:pPr marL="0" indent="0" algn="r">
               <a:buNone/>
             </a:pPr>
             <a:r>
@@ -17608,6 +18667,13 @@
             <a:prstDash val="solid"/>
           </a:ln>
         </p:spPr>
+        <p:txBody>
+          <a:bodyPr/>
+          <a:lstStyle/>
+          <a:p>
+            <a:endParaRPr lang="en-US"/>
+          </a:p>
+        </p:txBody>
       </p:sp>
       <p:sp>
         <p:nvSpPr>
@@ -17630,7 +18696,7 @@
           <a:bodyPr wrap="square" rtlCol="0" anchor="ctr"/>
           <a:lstStyle/>
           <a:p>
-            <a:pPr indent="0" marL="0">
+            <a:pPr marL="0" indent="0">
               <a:buNone/>
             </a:pPr>
             <a:r>
@@ -17669,7 +18735,7 @@
           <a:bodyPr wrap="square" rtlCol="0" anchor="ctr"/>
           <a:lstStyle/>
           <a:p>
-            <a:pPr indent="0" marL="0">
+            <a:pPr marL="0" indent="0">
               <a:buNone/>
             </a:pPr>
             <a:r>
@@ -17686,7 +18752,7 @@
             <a:endParaRPr lang="en-US" sz="1100" dirty="0"/>
           </a:p>
           <a:p>
-            <a:pPr indent="0" marL="0">
+            <a:pPr marL="0" indent="0">
               <a:buNone/>
             </a:pPr>
             <a:r>
@@ -17712,20 +18778,20 @@
         </p:nvSpPr>
         <p:spPr>
           <a:xfrm>
-            <a:off x="6172200" y="2651760"/>
-            <a:ext cx="2743200" cy="384048"/>
-          </a:xfrm>
-          <a:prstGeom prst="rect">
-            <a:avLst/>
-          </a:prstGeom>
-          <a:noFill/>
-          <a:ln/>
-        </p:spPr>
-        <p:txBody>
-          <a:bodyPr wrap="square" rtlCol="0" anchor="ctr"/>
-          <a:lstStyle/>
-          <a:p>
-            <a:pPr algn="r" indent="0" marL="0">
+            <a:off x="7067227" y="2651760"/>
+            <a:ext cx="1278610" cy="384048"/>
+          </a:xfrm>
+          <a:prstGeom prst="rect">
+            <a:avLst/>
+          </a:prstGeom>
+          <a:noFill/>
+          <a:ln/>
+        </p:spPr>
+        <p:txBody>
+          <a:bodyPr wrap="square" rtlCol="0" anchor="ctr"/>
+          <a:lstStyle/>
+          <a:p>
+            <a:pPr marL="0" indent="0" algn="r">
               <a:buNone/>
             </a:pPr>
             <a:r>
@@ -17769,6 +18835,13 @@
             <a:prstDash val="solid"/>
           </a:ln>
         </p:spPr>
+        <p:txBody>
+          <a:bodyPr/>
+          <a:lstStyle/>
+          <a:p>
+            <a:endParaRPr lang="en-US"/>
+          </a:p>
+        </p:txBody>
       </p:sp>
       <p:sp>
         <p:nvSpPr>
@@ -17791,7 +18864,7 @@
           <a:bodyPr wrap="square" rtlCol="0" anchor="ctr"/>
           <a:lstStyle/>
           <a:p>
-            <a:pPr indent="0" marL="0">
+            <a:pPr marL="0" indent="0">
               <a:buNone/>
             </a:pPr>
             <a:r>
@@ -17830,7 +18903,7 @@
           <a:bodyPr wrap="square" rtlCol="0" anchor="ctr"/>
           <a:lstStyle/>
           <a:p>
-            <a:pPr indent="0" marL="0">
+            <a:pPr marL="0" indent="0">
               <a:buNone/>
             </a:pPr>
             <a:r>
@@ -17847,7 +18920,7 @@
             <a:endParaRPr lang="en-US" sz="1100" dirty="0"/>
           </a:p>
           <a:p>
-            <a:pPr indent="0" marL="0">
+            <a:pPr marL="0" indent="0">
               <a:buNone/>
             </a:pPr>
             <a:r>
@@ -17873,20 +18946,20 @@
         </p:nvSpPr>
         <p:spPr>
           <a:xfrm>
-            <a:off x="6583680" y="3776472"/>
-            <a:ext cx="2743200" cy="384048"/>
-          </a:xfrm>
-          <a:prstGeom prst="rect">
-            <a:avLst/>
-          </a:prstGeom>
-          <a:noFill/>
-          <a:ln/>
-        </p:spPr>
-        <p:txBody>
-          <a:bodyPr wrap="square" rtlCol="0" anchor="ctr"/>
-          <a:lstStyle/>
-          <a:p>
-            <a:pPr algn="r" indent="0" marL="0">
+            <a:off x="5490275" y="3776472"/>
+            <a:ext cx="2363491" cy="384048"/>
+          </a:xfrm>
+          <a:prstGeom prst="rect">
+            <a:avLst/>
+          </a:prstGeom>
+          <a:noFill/>
+          <a:ln/>
+        </p:spPr>
+        <p:txBody>
+          <a:bodyPr wrap="square" rtlCol="0" anchor="ctr"/>
+          <a:lstStyle/>
+          <a:p>
+            <a:pPr marL="0" indent="0" algn="r">
               <a:buNone/>
             </a:pPr>
             <a:r>
@@ -17930,6 +19003,13 @@
             <a:prstDash val="solid"/>
           </a:ln>
         </p:spPr>
+        <p:txBody>
+          <a:bodyPr/>
+          <a:lstStyle/>
+          <a:p>
+            <a:endParaRPr lang="en-US"/>
+          </a:p>
+        </p:txBody>
       </p:sp>
       <p:sp>
         <p:nvSpPr>
@@ -17952,7 +19032,7 @@
           <a:bodyPr wrap="square" rtlCol="0" anchor="ctr"/>
           <a:lstStyle/>
           <a:p>
-            <a:pPr indent="0" marL="0">
+            <a:pPr marL="0" indent="0">
               <a:buNone/>
             </a:pPr>
             <a:r>
@@ -17978,20 +19058,20 @@
         </p:nvSpPr>
         <p:spPr>
           <a:xfrm>
-            <a:off x="457200" y="6291072"/>
-            <a:ext cx="8375904" cy="201168"/>
-          </a:xfrm>
-          <a:prstGeom prst="rect">
-            <a:avLst/>
-          </a:prstGeom>
-          <a:noFill/>
-          <a:ln/>
-        </p:spPr>
-        <p:txBody>
-          <a:bodyPr wrap="square" rtlCol="0" anchor="ctr"/>
-          <a:lstStyle/>
-          <a:p>
-            <a:pPr algn="l" indent="0" marL="0">
+            <a:off x="457199" y="6007608"/>
+            <a:ext cx="11604357" cy="484632"/>
+          </a:xfrm>
+          <a:prstGeom prst="rect">
+            <a:avLst/>
+          </a:prstGeom>
+          <a:noFill/>
+          <a:ln/>
+        </p:spPr>
+        <p:txBody>
+          <a:bodyPr wrap="square" rtlCol="0" anchor="ctr"/>
+          <a:lstStyle/>
+          <a:p>
+            <a:pPr marL="0" indent="0" algn="l">
               <a:buNone/>
             </a:pPr>
             <a:r>
@@ -18003,7 +19083,40 @@
                 <a:ea typeface="Arial" pitchFamily="34" charset="-122"/>
                 <a:cs typeface="Arial" pitchFamily="34" charset="-120"/>
               </a:rPr>
-              <a:t>Fuentes: DENUE 2025 · IMARC Group · Grand View Research  ·  Precios de referencia, no validados con clientes</a:t>
+              <a:t>Fuentes: DENUE 2025 · IMARC Group · Grand View Research  ·  Precios de </a:t>
+            </a:r>
+            <a:r>
+              <a:rPr lang="en-US" dirty="0" err="1">
+                <a:solidFill>
+                  <a:srgbClr val="718096"/>
+                </a:solidFill>
+                <a:latin typeface="Arial" pitchFamily="34" charset="0"/>
+                <a:ea typeface="Arial" pitchFamily="34" charset="-122"/>
+                <a:cs typeface="Arial" pitchFamily="34" charset="-120"/>
+              </a:rPr>
+              <a:t>referencia</a:t>
+            </a:r>
+            <a:r>
+              <a:rPr lang="en-US" dirty="0">
+                <a:solidFill>
+                  <a:srgbClr val="718096"/>
+                </a:solidFill>
+                <a:latin typeface="Arial" pitchFamily="34" charset="0"/>
+                <a:ea typeface="Arial" pitchFamily="34" charset="-122"/>
+                <a:cs typeface="Arial" pitchFamily="34" charset="-120"/>
+              </a:rPr>
+              <a:t> </a:t>
+            </a:r>
+            <a:r>
+              <a:rPr lang="en-US" dirty="0" err="1">
+                <a:solidFill>
+                  <a:srgbClr val="718096"/>
+                </a:solidFill>
+                <a:latin typeface="Arial" pitchFamily="34" charset="0"/>
+                <a:ea typeface="Arial" pitchFamily="34" charset="-122"/>
+                <a:cs typeface="Arial" pitchFamily="34" charset="-120"/>
+              </a:rPr>
+              <a:t>estimados</a:t>
             </a:r>
             <a:endParaRPr lang="en-US" dirty="0"/>
           </a:p>
@@ -18058,6 +19171,13 @@
             <a:prstDash val="solid"/>
           </a:ln>
         </p:spPr>
+        <p:txBody>
+          <a:bodyPr/>
+          <a:lstStyle/>
+          <a:p>
+            <a:endParaRPr lang="en-US"/>
+          </a:p>
+        </p:txBody>
       </p:sp>
       <p:sp>
         <p:nvSpPr>
@@ -18087,6 +19207,13 @@
             <a:prstDash val="solid"/>
           </a:ln>
         </p:spPr>
+        <p:txBody>
+          <a:bodyPr/>
+          <a:lstStyle/>
+          <a:p>
+            <a:endParaRPr lang="en-US"/>
+          </a:p>
+        </p:txBody>
       </p:sp>
       <p:sp>
         <p:nvSpPr>
@@ -18116,35 +19243,13 @@
             <a:prstDash val="solid"/>
           </a:ln>
         </p:spPr>
-      </p:sp>
-      <p:sp>
-        <p:nvSpPr>
-          <p:cNvPr id="5" name="Shape 3"/>
-          <p:cNvSpPr/>
-          <p:nvPr/>
-        </p:nvSpPr>
-        <p:spPr>
-          <a:xfrm>
-            <a:off x="8778240" y="1645920"/>
-            <a:ext cx="54864" cy="2194560"/>
-          </a:xfrm>
-          <a:prstGeom prst="rect">
-            <a:avLst/>
-          </a:prstGeom>
-          <a:solidFill>
-            <a:srgbClr val="5B8DB8">
-              <a:alpha val="45000"/>
-            </a:srgbClr>
-          </a:solidFill>
-          <a:ln w="12700">
-            <a:solidFill>
-              <a:srgbClr val="5B8DB8">
-                <a:alpha val="45000"/>
-              </a:srgbClr>
-            </a:solidFill>
-            <a:prstDash val="solid"/>
-          </a:ln>
-        </p:spPr>
+        <p:txBody>
+          <a:bodyPr/>
+          <a:lstStyle/>
+          <a:p>
+            <a:endParaRPr lang="en-US"/>
+          </a:p>
+        </p:txBody>
       </p:sp>
       <p:sp>
         <p:nvSpPr>
@@ -18170,6 +19275,13 @@
             <a:prstDash val="solid"/>
           </a:ln>
         </p:spPr>
+        <p:txBody>
+          <a:bodyPr/>
+          <a:lstStyle/>
+          <a:p>
+            <a:endParaRPr lang="en-US"/>
+          </a:p>
+        </p:txBody>
       </p:sp>
       <p:sp>
         <p:nvSpPr>
@@ -18195,6 +19307,13 @@
             <a:prstDash val="solid"/>
           </a:ln>
         </p:spPr>
+        <p:txBody>
+          <a:bodyPr/>
+          <a:lstStyle/>
+          <a:p>
+            <a:endParaRPr lang="en-US"/>
+          </a:p>
+        </p:txBody>
       </p:sp>
       <p:sp>
         <p:nvSpPr>
@@ -18217,7 +19336,7 @@
           <a:bodyPr wrap="square" rtlCol="0" anchor="ctr"/>
           <a:lstStyle/>
           <a:p>
-            <a:pPr indent="0" marL="0">
+            <a:pPr marL="0" indent="0">
               <a:buNone/>
             </a:pPr>
             <a:r>
@@ -18256,7 +19375,7 @@
           <a:bodyPr wrap="square" rtlCol="0" anchor="ctr"/>
           <a:lstStyle/>
           <a:p>
-            <a:pPr indent="0" marL="0">
+            <a:pPr marL="0" indent="0">
               <a:buNone/>
             </a:pPr>
             <a:r>
@@ -18296,6 +19415,13 @@
             <a:prstDash val="solid"/>
           </a:ln>
         </p:spPr>
+        <p:txBody>
+          <a:bodyPr/>
+          <a:lstStyle/>
+          <a:p>
+            <a:endParaRPr lang="en-US"/>
+          </a:p>
+        </p:txBody>
       </p:sp>
       <p:sp>
         <p:nvSpPr>
@@ -18323,6 +19449,13 @@
             <a:prstDash val="solid"/>
           </a:ln>
         </p:spPr>
+        <p:txBody>
+          <a:bodyPr/>
+          <a:lstStyle/>
+          <a:p>
+            <a:endParaRPr lang="en-US"/>
+          </a:p>
+        </p:txBody>
       </p:sp>
       <p:sp>
         <p:nvSpPr>
@@ -18345,7 +19478,7 @@
           <a:bodyPr wrap="square" rtlCol="0" anchor="ctr"/>
           <a:lstStyle/>
           <a:p>
-            <a:pPr indent="0" marL="0">
+            <a:pPr marL="0" indent="0">
               <a:buNone/>
             </a:pPr>
             <a:r>
@@ -18384,7 +19517,7 @@
           <a:bodyPr wrap="square" rtlCol="0" anchor="ctr"/>
           <a:lstStyle/>
           <a:p>
-            <a:pPr indent="0" marL="0">
+            <a:pPr marL="0" indent="0">
               <a:buNone/>
             </a:pPr>
             <a:r>
@@ -18423,7 +19556,7 @@
           <a:bodyPr wrap="square" rtlCol="0" anchor="ctr"/>
           <a:lstStyle/>
           <a:p>
-            <a:pPr indent="0" marL="0">
+            <a:pPr marL="0" indent="0">
               <a:buNone/>
             </a:pPr>
             <a:r>
@@ -18462,7 +19595,7 @@
           <a:bodyPr wrap="square" rtlCol="0" anchor="ctr"/>
           <a:lstStyle/>
           <a:p>
-            <a:pPr indent="0" marL="0">
+            <a:pPr marL="0" indent="0">
               <a:buNone/>
             </a:pPr>
             <a:r>
@@ -18506,6 +19639,13 @@
             <a:prstDash val="solid"/>
           </a:ln>
         </p:spPr>
+        <p:txBody>
+          <a:bodyPr/>
+          <a:lstStyle/>
+          <a:p>
+            <a:endParaRPr lang="en-US"/>
+          </a:p>
+        </p:txBody>
       </p:sp>
       <p:sp>
         <p:nvSpPr>
@@ -18528,7 +19668,7 @@
           <a:bodyPr wrap="square" rtlCol="0" anchor="ctr"/>
           <a:lstStyle/>
           <a:p>
-            <a:pPr indent="0" marL="0">
+            <a:pPr marL="0" indent="0">
               <a:buNone/>
             </a:pPr>
             <a:r>
@@ -18567,7 +19707,7 @@
           <a:bodyPr wrap="square" rtlCol="0" anchor="ctr"/>
           <a:lstStyle/>
           <a:p>
-            <a:pPr algn="ctr" indent="0" marL="0">
+            <a:pPr marL="0" indent="0" algn="ctr">
               <a:buNone/>
             </a:pPr>
             <a:r>
@@ -18603,7 +19743,7 @@
           <a:bodyPr wrap="square" rtlCol="0" anchor="ctr"/>
           <a:lstStyle/>
           <a:p>
-            <a:pPr algn="ctr" indent="0" marL="0">
+            <a:pPr marL="0" indent="0" algn="ctr">
               <a:buNone/>
             </a:pPr>
             <a:r>
@@ -18639,7 +19779,7 @@
           <a:bodyPr wrap="square" rtlCol="0" anchor="ctr"/>
           <a:lstStyle/>
           <a:p>
-            <a:pPr algn="ctr" indent="0" marL="0">
+            <a:pPr marL="0" indent="0" algn="ctr">
               <a:buNone/>
             </a:pPr>
             <a:r>
@@ -18680,6 +19820,13 @@
             <a:prstDash val="solid"/>
           </a:ln>
         </p:spPr>
+        <p:txBody>
+          <a:bodyPr/>
+          <a:lstStyle/>
+          <a:p>
+            <a:endParaRPr lang="en-US"/>
+          </a:p>
+        </p:txBody>
       </p:sp>
       <p:sp>
         <p:nvSpPr>
@@ -18702,7 +19849,7 @@
           <a:bodyPr wrap="square" rtlCol="0" anchor="ctr"/>
           <a:lstStyle/>
           <a:p>
-            <a:pPr indent="0" marL="0">
+            <a:pPr marL="0" indent="0">
               <a:buNone/>
             </a:pPr>
             <a:r>
@@ -18741,7 +19888,7 @@
           <a:bodyPr wrap="square" rtlCol="0" anchor="ctr"/>
           <a:lstStyle/>
           <a:p>
-            <a:pPr algn="ctr" indent="0" marL="0">
+            <a:pPr marL="0" indent="0" algn="ctr">
               <a:buNone/>
             </a:pPr>
             <a:r>
@@ -18777,7 +19924,7 @@
           <a:bodyPr wrap="square" rtlCol="0" anchor="ctr"/>
           <a:lstStyle/>
           <a:p>
-            <a:pPr algn="ctr" indent="0" marL="0">
+            <a:pPr marL="0" indent="0" algn="ctr">
               <a:buNone/>
             </a:pPr>
             <a:r>
@@ -18813,7 +19960,7 @@
           <a:bodyPr wrap="square" rtlCol="0" anchor="ctr"/>
           <a:lstStyle/>
           <a:p>
-            <a:pPr algn="ctr" indent="0" marL="0">
+            <a:pPr marL="0" indent="0" algn="ctr">
               <a:buNone/>
             </a:pPr>
             <a:r>
@@ -18854,6 +20001,13 @@
             <a:prstDash val="solid"/>
           </a:ln>
         </p:spPr>
+        <p:txBody>
+          <a:bodyPr/>
+          <a:lstStyle/>
+          <a:p>
+            <a:endParaRPr lang="en-US"/>
+          </a:p>
+        </p:txBody>
       </p:sp>
       <p:sp>
         <p:nvSpPr>
@@ -18876,7 +20030,7 @@
           <a:bodyPr wrap="square" rtlCol="0" anchor="ctr"/>
           <a:lstStyle/>
           <a:p>
-            <a:pPr indent="0" marL="0">
+            <a:pPr marL="0" indent="0">
               <a:buNone/>
             </a:pPr>
             <a:r>
@@ -18915,7 +20069,7 @@
           <a:bodyPr wrap="square" rtlCol="0" anchor="ctr"/>
           <a:lstStyle/>
           <a:p>
-            <a:pPr algn="ctr" indent="0" marL="0">
+            <a:pPr marL="0" indent="0" algn="ctr">
               <a:buNone/>
             </a:pPr>
             <a:r>
@@ -18951,7 +20105,7 @@
           <a:bodyPr wrap="square" rtlCol="0" anchor="ctr"/>
           <a:lstStyle/>
           <a:p>
-            <a:pPr algn="ctr" indent="0" marL="0">
+            <a:pPr marL="0" indent="0" algn="ctr">
               <a:buNone/>
             </a:pPr>
             <a:r>
@@ -18987,7 +20141,7 @@
           <a:bodyPr wrap="square" rtlCol="0" anchor="ctr"/>
           <a:lstStyle/>
           <a:p>
-            <a:pPr algn="ctr" indent="0" marL="0">
+            <a:pPr marL="0" indent="0" algn="ctr">
               <a:buNone/>
             </a:pPr>
             <a:r>
@@ -19028,6 +20182,13 @@
             <a:prstDash val="solid"/>
           </a:ln>
         </p:spPr>
+        <p:txBody>
+          <a:bodyPr/>
+          <a:lstStyle/>
+          <a:p>
+            <a:endParaRPr lang="en-US"/>
+          </a:p>
+        </p:txBody>
       </p:sp>
       <p:sp>
         <p:nvSpPr>
@@ -19050,7 +20211,7 @@
           <a:bodyPr wrap="square" rtlCol="0" anchor="ctr"/>
           <a:lstStyle/>
           <a:p>
-            <a:pPr indent="0" marL="0">
+            <a:pPr marL="0" indent="0">
               <a:buNone/>
             </a:pPr>
             <a:r>
@@ -19089,7 +20250,7 @@
           <a:bodyPr wrap="square" rtlCol="0" anchor="ctr"/>
           <a:lstStyle/>
           <a:p>
-            <a:pPr algn="ctr" indent="0" marL="0">
+            <a:pPr marL="0" indent="0" algn="ctr">
               <a:buNone/>
             </a:pPr>
             <a:r>
@@ -19125,7 +20286,7 @@
           <a:bodyPr wrap="square" rtlCol="0" anchor="ctr"/>
           <a:lstStyle/>
           <a:p>
-            <a:pPr algn="ctr" indent="0" marL="0">
+            <a:pPr marL="0" indent="0" algn="ctr">
               <a:buNone/>
             </a:pPr>
             <a:r>
@@ -19161,7 +20322,7 @@
           <a:bodyPr wrap="square" rtlCol="0" anchor="ctr"/>
           <a:lstStyle/>
           <a:p>
-            <a:pPr algn="ctr" indent="0" marL="0">
+            <a:pPr marL="0" indent="0" algn="ctr">
               <a:buNone/>
             </a:pPr>
             <a:r>
@@ -19202,6 +20363,13 @@
             <a:prstDash val="solid"/>
           </a:ln>
         </p:spPr>
+        <p:txBody>
+          <a:bodyPr/>
+          <a:lstStyle/>
+          <a:p>
+            <a:endParaRPr lang="en-US"/>
+          </a:p>
+        </p:txBody>
       </p:sp>
       <p:sp>
         <p:nvSpPr>
@@ -19224,7 +20392,7 @@
           <a:bodyPr wrap="square" rtlCol="0" anchor="ctr"/>
           <a:lstStyle/>
           <a:p>
-            <a:pPr indent="0" marL="0">
+            <a:pPr marL="0" indent="0">
               <a:buNone/>
             </a:pPr>
             <a:r>
@@ -19263,7 +20431,7 @@
           <a:bodyPr wrap="square" rtlCol="0" anchor="ctr"/>
           <a:lstStyle/>
           <a:p>
-            <a:pPr algn="ctr" indent="0" marL="0">
+            <a:pPr marL="0" indent="0" algn="ctr">
               <a:buNone/>
             </a:pPr>
             <a:r>
@@ -19299,7 +20467,7 @@
           <a:bodyPr wrap="square" rtlCol="0" anchor="ctr"/>
           <a:lstStyle/>
           <a:p>
-            <a:pPr algn="ctr" indent="0" marL="0">
+            <a:pPr marL="0" indent="0" algn="ctr">
               <a:buNone/>
             </a:pPr>
             <a:r>
@@ -19335,7 +20503,7 @@
           <a:bodyPr wrap="square" rtlCol="0" anchor="ctr"/>
           <a:lstStyle/>
           <a:p>
-            <a:pPr algn="ctr" indent="0" marL="0">
+            <a:pPr marL="0" indent="0" algn="ctr">
               <a:buNone/>
             </a:pPr>
             <a:r>
@@ -19376,6 +20544,13 @@
             <a:prstDash val="solid"/>
           </a:ln>
         </p:spPr>
+        <p:txBody>
+          <a:bodyPr/>
+          <a:lstStyle/>
+          <a:p>
+            <a:endParaRPr lang="en-US"/>
+          </a:p>
+        </p:txBody>
       </p:sp>
       <p:sp>
         <p:nvSpPr>
@@ -19398,7 +20573,7 @@
           <a:bodyPr wrap="square" rtlCol="0" anchor="ctr"/>
           <a:lstStyle/>
           <a:p>
-            <a:pPr indent="0" marL="0">
+            <a:pPr marL="0" indent="0">
               <a:buNone/>
             </a:pPr>
             <a:r>
@@ -19437,7 +20612,7 @@
           <a:bodyPr wrap="square" rtlCol="0" anchor="ctr"/>
           <a:lstStyle/>
           <a:p>
-            <a:pPr algn="ctr" indent="0" marL="0">
+            <a:pPr marL="0" indent="0" algn="ctr">
               <a:buNone/>
             </a:pPr>
             <a:r>
@@ -19473,7 +20648,7 @@
           <a:bodyPr wrap="square" rtlCol="0" anchor="ctr"/>
           <a:lstStyle/>
           <a:p>
-            <a:pPr algn="ctr" indent="0" marL="0">
+            <a:pPr marL="0" indent="0" algn="ctr">
               <a:buNone/>
             </a:pPr>
             <a:r>
@@ -19509,7 +20684,7 @@
           <a:bodyPr wrap="square" rtlCol="0" anchor="ctr"/>
           <a:lstStyle/>
           <a:p>
-            <a:pPr algn="ctr" indent="0" marL="0">
+            <a:pPr marL="0" indent="0" algn="ctr">
               <a:buNone/>
             </a:pPr>
             <a:r>
@@ -19532,20 +20707,20 @@
         </p:nvSpPr>
         <p:spPr>
           <a:xfrm>
-            <a:off x="457200" y="6291072"/>
-            <a:ext cx="8375904" cy="201168"/>
-          </a:xfrm>
-          <a:prstGeom prst="rect">
-            <a:avLst/>
-          </a:prstGeom>
-          <a:noFill/>
-          <a:ln/>
-        </p:spPr>
-        <p:txBody>
-          <a:bodyPr wrap="square" rtlCol="0" anchor="ctr"/>
-          <a:lstStyle/>
-          <a:p>
-            <a:pPr algn="l" indent="0" marL="0">
+            <a:off x="457199" y="5934456"/>
+            <a:ext cx="10372241" cy="557784"/>
+          </a:xfrm>
+          <a:prstGeom prst="rect">
+            <a:avLst/>
+          </a:prstGeom>
+          <a:noFill/>
+          <a:ln/>
+        </p:spPr>
+        <p:txBody>
+          <a:bodyPr wrap="square" rtlCol="0" anchor="ctr"/>
+          <a:lstStyle/>
+          <a:p>
+            <a:pPr marL="0" indent="0" algn="l">
               <a:buNone/>
             </a:pPr>
             <a:r>
@@ -19864,4 +21039,319 @@
     </a:ext>
   </a:extLst>
 </a:theme>
+</file>
+
+<file path=ppt/theme/theme2.xml><?xml version="1.0" encoding="utf-8"?>
+<a:theme xmlns:a="http://schemas.openxmlformats.org/drawingml/2006/main" name="Office Theme">
+  <a:themeElements>
+    <a:clrScheme name="Office">
+      <a:dk1>
+        <a:sysClr val="windowText" lastClr="000000"/>
+      </a:dk1>
+      <a:lt1>
+        <a:sysClr val="window" lastClr="FFFFFF"/>
+      </a:lt1>
+      <a:dk2>
+        <a:srgbClr val="0E2841"/>
+      </a:dk2>
+      <a:lt2>
+        <a:srgbClr val="E8E8E8"/>
+      </a:lt2>
+      <a:accent1>
+        <a:srgbClr val="156082"/>
+      </a:accent1>
+      <a:accent2>
+        <a:srgbClr val="E97132"/>
+      </a:accent2>
+      <a:accent3>
+        <a:srgbClr val="196B24"/>
+      </a:accent3>
+      <a:accent4>
+        <a:srgbClr val="0F9ED5"/>
+      </a:accent4>
+      <a:accent5>
+        <a:srgbClr val="A02B93"/>
+      </a:accent5>
+      <a:accent6>
+        <a:srgbClr val="4EA72E"/>
+      </a:accent6>
+      <a:hlink>
+        <a:srgbClr val="467886"/>
+      </a:hlink>
+      <a:folHlink>
+        <a:srgbClr val="96607D"/>
+      </a:folHlink>
+    </a:clrScheme>
+    <a:fontScheme name="Office">
+      <a:majorFont>
+        <a:latin typeface="Aptos Display" panose="02110004020202020204"/>
+        <a:ea typeface=""/>
+        <a:cs typeface=""/>
+        <a:font script="Jpan" typeface="游ゴシック Light"/>
+        <a:font script="Hang" typeface="맑은 고딕"/>
+        <a:font script="Hans" typeface="等线 Light"/>
+        <a:font script="Hant" typeface="新細明體"/>
+        <a:font script="Arab" typeface="Times New Roman"/>
+        <a:font script="Hebr" typeface="Times New Roman"/>
+        <a:font script="Thai" typeface="Angsana New"/>
+        <a:font script="Ethi" typeface="Nyala"/>
+        <a:font script="Beng" typeface="Vrinda"/>
+        <a:font script="Gujr" typeface="Shruti"/>
+        <a:font script="Khmr" typeface="MoolBoran"/>
+        <a:font script="Knda" typeface="Tunga"/>
+        <a:font script="Guru" typeface="Raavi"/>
+        <a:font script="Cans" typeface="Euphemia"/>
+        <a:font script="Cher" typeface="Plantagenet Cherokee"/>
+        <a:font script="Yiii" typeface="Microsoft Yi Baiti"/>
+        <a:font script="Tibt" typeface="Microsoft Himalaya"/>
+        <a:font script="Thaa" typeface="MV Boli"/>
+        <a:font script="Deva" typeface="Mangal"/>
+        <a:font script="Telu" typeface="Gautami"/>
+        <a:font script="Taml" typeface="Latha"/>
+        <a:font script="Syrc" typeface="Estrangelo Edessa"/>
+        <a:font script="Orya" typeface="Kalinga"/>
+        <a:font script="Mlym" typeface="Kartika"/>
+        <a:font script="Laoo" typeface="DokChampa"/>
+        <a:font script="Sinh" typeface="Iskoola Pota"/>
+        <a:font script="Mong" typeface="Mongolian Baiti"/>
+        <a:font script="Viet" typeface="Times New Roman"/>
+        <a:font script="Uigh" typeface="Microsoft Uighur"/>
+        <a:font script="Geor" typeface="Sylfaen"/>
+        <a:font script="Armn" typeface="Arial"/>
+        <a:font script="Bugi" typeface="Leelawadee UI"/>
+        <a:font script="Bopo" typeface="Microsoft JhengHei"/>
+        <a:font script="Java" typeface="Javanese Text"/>
+        <a:font script="Lisu" typeface="Segoe UI"/>
+        <a:font script="Mymr" typeface="Myanmar Text"/>
+        <a:font script="Nkoo" typeface="Ebrima"/>
+        <a:font script="Olck" typeface="Nirmala UI"/>
+        <a:font script="Osma" typeface="Ebrima"/>
+        <a:font script="Phag" typeface="Phagspa"/>
+        <a:font script="Syrn" typeface="Estrangelo Edessa"/>
+        <a:font script="Syrj" typeface="Estrangelo Edessa"/>
+        <a:font script="Syre" typeface="Estrangelo Edessa"/>
+        <a:font script="Sora" typeface="Nirmala UI"/>
+        <a:font script="Tale" typeface="Microsoft Tai Le"/>
+        <a:font script="Talu" typeface="Microsoft New Tai Lue"/>
+        <a:font script="Tfng" typeface="Ebrima"/>
+      </a:majorFont>
+      <a:minorFont>
+        <a:latin typeface="Aptos" panose="02110004020202020204"/>
+        <a:ea typeface=""/>
+        <a:cs typeface=""/>
+        <a:font script="Jpan" typeface="游ゴシック"/>
+        <a:font script="Hang" typeface="맑은 고딕"/>
+        <a:font script="Hans" typeface="等线"/>
+        <a:font script="Hant" typeface="新細明體"/>
+        <a:font script="Arab" typeface="Arial"/>
+        <a:font script="Hebr" typeface="Arial"/>
+        <a:font script="Thai" typeface="Cordia New"/>
+        <a:font script="Ethi" typeface="Nyala"/>
+        <a:font script="Beng" typeface="Vrinda"/>
+        <a:font script="Gujr" typeface="Shruti"/>
+        <a:font script="Khmr" typeface="DaunPenh"/>
+        <a:font script="Knda" typeface="Tunga"/>
+        <a:font script="Guru" typeface="Raavi"/>
+        <a:font script="Cans" typeface="Euphemia"/>
+        <a:font script="Cher" typeface="Plantagenet Cherokee"/>
+        <a:font script="Yiii" typeface="Microsoft Yi Baiti"/>
+        <a:font script="Tibt" typeface="Microsoft Himalaya"/>
+        <a:font script="Thaa" typeface="MV Boli"/>
+        <a:font script="Deva" typeface="Mangal"/>
+        <a:font script="Telu" typeface="Gautami"/>
+        <a:font script="Taml" typeface="Latha"/>
+        <a:font script="Syrc" typeface="Estrangelo Edessa"/>
+        <a:font script="Orya" typeface="Kalinga"/>
+        <a:font script="Mlym" typeface="Kartika"/>
+        <a:font script="Laoo" typeface="DokChampa"/>
+        <a:font script="Sinh" typeface="Iskoola Pota"/>
+        <a:font script="Mong" typeface="Mongolian Baiti"/>
+        <a:font script="Viet" typeface="Arial"/>
+        <a:font script="Uigh" typeface="Microsoft Uighur"/>
+        <a:font script="Geor" typeface="Sylfaen"/>
+        <a:font script="Armn" typeface="Arial"/>
+        <a:font script="Bugi" typeface="Leelawadee UI"/>
+        <a:font script="Bopo" typeface="Microsoft JhengHei"/>
+        <a:font script="Java" typeface="Javanese Text"/>
+        <a:font script="Lisu" typeface="Segoe UI"/>
+        <a:font script="Mymr" typeface="Myanmar Text"/>
+        <a:font script="Nkoo" typeface="Ebrima"/>
+        <a:font script="Olck" typeface="Nirmala UI"/>
+        <a:font script="Osma" typeface="Ebrima"/>
+        <a:font script="Phag" typeface="Phagspa"/>
+        <a:font script="Syrn" typeface="Estrangelo Edessa"/>
+        <a:font script="Syrj" typeface="Estrangelo Edessa"/>
+        <a:font script="Syre" typeface="Estrangelo Edessa"/>
+        <a:font script="Sora" typeface="Nirmala UI"/>
+        <a:font script="Tale" typeface="Microsoft Tai Le"/>
+        <a:font script="Talu" typeface="Microsoft New Tai Lue"/>
+        <a:font script="Tfng" typeface="Ebrima"/>
+      </a:minorFont>
+    </a:fontScheme>
+    <a:fmtScheme name="Office">
+      <a:fillStyleLst>
+        <a:solidFill>
+          <a:schemeClr val="phClr"/>
+        </a:solidFill>
+        <a:gradFill rotWithShape="1">
+          <a:gsLst>
+            <a:gs pos="0">
+              <a:schemeClr val="phClr">
+                <a:lumMod val="110000"/>
+                <a:satMod val="105000"/>
+                <a:tint val="67000"/>
+              </a:schemeClr>
+            </a:gs>
+            <a:gs pos="50000">
+              <a:schemeClr val="phClr">
+                <a:lumMod val="105000"/>
+                <a:satMod val="103000"/>
+                <a:tint val="73000"/>
+              </a:schemeClr>
+            </a:gs>
+            <a:gs pos="100000">
+              <a:schemeClr val="phClr">
+                <a:lumMod val="105000"/>
+                <a:satMod val="109000"/>
+                <a:tint val="81000"/>
+              </a:schemeClr>
+            </a:gs>
+          </a:gsLst>
+          <a:lin ang="5400000" scaled="0"/>
+        </a:gradFill>
+        <a:gradFill rotWithShape="1">
+          <a:gsLst>
+            <a:gs pos="0">
+              <a:schemeClr val="phClr">
+                <a:satMod val="103000"/>
+                <a:lumMod val="102000"/>
+                <a:tint val="94000"/>
+              </a:schemeClr>
+            </a:gs>
+            <a:gs pos="50000">
+              <a:schemeClr val="phClr">
+                <a:satMod val="110000"/>
+                <a:lumMod val="100000"/>
+                <a:shade val="100000"/>
+              </a:schemeClr>
+            </a:gs>
+            <a:gs pos="100000">
+              <a:schemeClr val="phClr">
+                <a:lumMod val="99000"/>
+                <a:satMod val="120000"/>
+                <a:shade val="78000"/>
+              </a:schemeClr>
+            </a:gs>
+          </a:gsLst>
+          <a:lin ang="5400000" scaled="0"/>
+        </a:gradFill>
+      </a:fillStyleLst>
+      <a:lnStyleLst>
+        <a:ln w="12700" cap="flat" cmpd="sng" algn="ctr">
+          <a:solidFill>
+            <a:schemeClr val="phClr"/>
+          </a:solidFill>
+          <a:prstDash val="solid"/>
+          <a:miter lim="800000"/>
+        </a:ln>
+        <a:ln w="19050" cap="flat" cmpd="sng" algn="ctr">
+          <a:solidFill>
+            <a:schemeClr val="phClr"/>
+          </a:solidFill>
+          <a:prstDash val="solid"/>
+          <a:miter lim="800000"/>
+        </a:ln>
+        <a:ln w="25400" cap="flat" cmpd="sng" algn="ctr">
+          <a:solidFill>
+            <a:schemeClr val="phClr"/>
+          </a:solidFill>
+          <a:prstDash val="solid"/>
+          <a:miter lim="800000"/>
+        </a:ln>
+      </a:lnStyleLst>
+      <a:effectStyleLst>
+        <a:effectStyle>
+          <a:effectLst/>
+        </a:effectStyle>
+        <a:effectStyle>
+          <a:effectLst/>
+        </a:effectStyle>
+        <a:effectStyle>
+          <a:effectLst>
+            <a:outerShdw blurRad="57150" dist="19050" dir="5400000" algn="ctr" rotWithShape="0">
+              <a:srgbClr val="000000">
+                <a:alpha val="63000"/>
+              </a:srgbClr>
+            </a:outerShdw>
+          </a:effectLst>
+        </a:effectStyle>
+      </a:effectStyleLst>
+      <a:bgFillStyleLst>
+        <a:solidFill>
+          <a:schemeClr val="phClr"/>
+        </a:solidFill>
+        <a:solidFill>
+          <a:schemeClr val="phClr">
+            <a:tint val="95000"/>
+            <a:satMod val="170000"/>
+          </a:schemeClr>
+        </a:solidFill>
+        <a:gradFill rotWithShape="1">
+          <a:gsLst>
+            <a:gs pos="0">
+              <a:schemeClr val="phClr">
+                <a:tint val="93000"/>
+                <a:satMod val="150000"/>
+                <a:shade val="98000"/>
+                <a:lumMod val="102000"/>
+              </a:schemeClr>
+            </a:gs>
+            <a:gs pos="50000">
+              <a:schemeClr val="phClr">
+                <a:tint val="98000"/>
+                <a:satMod val="130000"/>
+                <a:shade val="90000"/>
+                <a:lumMod val="103000"/>
+              </a:schemeClr>
+            </a:gs>
+            <a:gs pos="100000">
+              <a:schemeClr val="phClr">
+                <a:shade val="63000"/>
+                <a:satMod val="120000"/>
+              </a:schemeClr>
+            </a:gs>
+          </a:gsLst>
+          <a:lin ang="5400000" scaled="0"/>
+        </a:gradFill>
+      </a:bgFillStyleLst>
+    </a:fmtScheme>
+  </a:themeElements>
+  <a:objectDefaults>
+    <a:lnDef>
+      <a:spPr/>
+      <a:bodyPr/>
+      <a:lstStyle/>
+      <a:style>
+        <a:lnRef idx="2">
+          <a:schemeClr val="accent1"/>
+        </a:lnRef>
+        <a:fillRef idx="0">
+          <a:schemeClr val="accent1"/>
+        </a:fillRef>
+        <a:effectRef idx="1">
+          <a:schemeClr val="accent1"/>
+        </a:effectRef>
+        <a:fontRef idx="minor">
+          <a:schemeClr val="tx1"/>
+        </a:fontRef>
+      </a:style>
+    </a:lnDef>
+  </a:objectDefaults>
+  <a:extraClrSchemeLst/>
+  <a:extLst>
+    <a:ext uri="{05A4C25C-085E-4340-85A3-A5531E510DB2}">
+      <thm15:themeFamily xmlns:thm15="http://schemas.microsoft.com/office/thememl/2012/main" name="Office Theme" id="{2E142A2C-CD16-42D6-873A-C26D2A0506FA}" vid="{1BDDFF52-6CD6-40A5-AB3C-68EB2F1E4D0A}"/>
+    </a:ext>
+  </a:extLst>
+</a:theme>
 </file>